--- a/docs/decks/mcom-2026-08-05-macro.pptx
+++ b/docs/decks/mcom-2026-08-05-macro.pptx
@@ -1639,7 +1639,7 @@
           <a:lstStyle/>
           <a:p>
             <a:r>
-              <a:t>This is the merge of what were two contradicting slides. Say it plainly: there are two published prices for every crop — the farm gate and the market quote — and only the farm gate belongs beside a production cost. On that basis three of the five crops with full economics lose money, rice included, with its price up 12.4%.</a:t>
+              <a:t>This is the merge of what were two contradicting slides. Say it plainly: there are two published prices for every crop — the farm gate and the market quote — and only the farm gate belongs beside a production cost. On that basis three of the five crops with full economics lose money, rice included, with its price up 13.2%.</a:t>
             </a:r>
           </a:p>
         </p:txBody>
@@ -5935,7 +5935,7 @@
                 </a:solidFill>
                 <a:latin typeface="Kanit"/>
               </a:rPr>
-              <a:t>134</a:t>
+              <a:t>132</a:t>
             </a:r>
           </a:p>
         </p:txBody>
@@ -5974,7 +5974,7 @@
                 </a:solidFill>
                 <a:latin typeface="Kanit"/>
               </a:rPr>
-              <a:t>of 794 (16.9%) · up from 84 on 11 July · live</a:t>
+              <a:t>of 794 (16.6%) · up from 84 on 11 July · live</a:t>
             </a:r>
           </a:p>
         </p:txBody>
@@ -6100,7 +6100,7 @@
                 </a:solidFill>
                 <a:latin typeface="Kanit"/>
               </a:rPr>
-              <a:t>31</a:t>
+              <a:t>41</a:t>
             </a:r>
           </a:p>
         </p:txBody>
@@ -6139,7 +6139,7 @@
                 </a:solidFill>
                 <a:latin typeface="Kanit"/>
               </a:rPr>
-              <a:t>latest daily reading · 2026-08-03</a:t>
+              <a:t>latest daily reading · 2026-08-04</a:t>
             </a:r>
           </a:p>
         </p:txBody>
@@ -26439,7 +26439,7 @@
                 </a:solidFill>
                 <a:latin typeface="Kanit"/>
               </a:rPr>
-              <a:t>Rice prices are UP 12.4% and rice still returns −฿1,433 a tonne, −฿444 per person per month, after cost. Three of the five crops with a full OAE cost series are below cost. Two published prices exist for every crop and only the farm gate belongs beside a cost — the market quote for rice is 2.2× the gate, and the grower does not own that difference.</a:t>
+              <a:t>Rice prices are UP 13.2% and rice still returns −฿1,433 a tonne, −฿444 per person per month, after cost. Three of the five crops with a full OAE cost series are below cost. Two published prices exist for every crop and only the farm gate belongs beside a cost — the market quote for rice is 2.2× the gate, and the grower does not own that difference.</a:t>
             </a:r>
           </a:p>
         </p:txBody>
@@ -26561,7 +26561,7 @@
                 </a:solidFill>
                 <a:latin typeface="Kanit"/>
               </a:rPr>
-              <a:t>Sugarcane, coconut and pineapple are 12.2% of the country’s planted area, they are the three crops whose farm-gate prices are FALLING, and they are the three with no published cost of production. We can see the price move and cannot see whether it has taken the grower under. สุพรรณบุรี is drought and a −17.9% cane price at once, and we cannot price it.</a:t>
+              <a:t>Sugarcane, coconut and pineapple are 10.7% of the country’s planted area, they are the three crops whose farm-gate prices are FALLING, and they are the three with no published cost of production. We can see the price move and cannot see whether it has taken the grower under. สุพรรณบุรี is drought and a −17.9% cane price at once, and we cannot price it.</a:t>
             </a:r>
           </a:p>
         </p:txBody>
@@ -27010,7 +27010,7 @@
                 </a:solidFill>
                 <a:latin typeface="Kanit"/>
               </a:rPr>
-              <a:t>Vintages — world prices 2026M06 · Thai farm gate 2026-08-02 · crop cost of production OAE Cai-up 2568 · drought 2026-06-21 · CPI 2026-05 · GDP 2026-Q1 · IMF WEO 2026 · resale index 2026-05 · registrations to 2026-01 · household debt NSO SES 2566 · wages NSO LFS 2568 · telemetry 2026-08-03.</a:t>
+              <a:t>Vintages — world prices 2026M06 · Thai farm gate 2026-08-03 · crop cost of production OAE Cai-up 2568 · drought 2026-06-21 · CPI 2026-05 · GDP 2026-Q1 · IMF WEO 2026 · resale index 2026-05 · registrations to 2026-01 · household debt NSO SES 2566 · wages NSO LFS 2568 · telemetry 2026-08-04.</a:t>
             </a:r>
           </a:p>
         </p:txBody>
@@ -27540,7 +27540,7 @@
                 </a:solidFill>
                 <a:latin typeface="Kanit"/>
               </a:rPr>
-              <a:t>Not on the world index — but that is the wrong instrument. On the measured Thai farm gate nine commodities are falling, beef by 6.1% while the world index reads +11.8%. And margin matters more than price: netted of cost, a 24% price move becomes a 73% swing in crop income.</a:t>
+              <a:t>Not on the world index — but that is the wrong instrument. On the measured Thai farm gate eight commodities are falling, beef by 6.1% while the world index reads +11.8%. And margin matters more than price: netted of cost, a price move of 25% becomes a swing of 80% in crop income.</a:t>
             </a:r>
           </a:p>
         </p:txBody>
@@ -28898,7 +28898,7 @@
                 </a:solidFill>
                 <a:latin typeface="Kanit"/>
               </a:rPr>
-              <a:t>33.47</a:t>
+              <a:t>33.34</a:t>
             </a:r>
           </a:p>
         </p:txBody>
@@ -28937,7 +28937,7 @@
                 </a:solidFill>
                 <a:latin typeface="Kanit"/>
               </a:rPr>
-              <a:t>ECB reference · 2026-07-31</a:t>
+              <a:t>ECB reference · 2026-08-03</a:t>
             </a:r>
           </a:p>
         </p:txBody>
@@ -32069,7 +32069,7 @@
                 </a:solidFill>
                 <a:latin typeface="Kanit"/>
               </a:rPr>
-              <a:t>338 of 928 · 134 of 794 river stations above high mark</a:t>
+              <a:t>338 of 928 · 132 of 794 river stations above high mark</a:t>
             </a:r>
           </a:p>
         </p:txBody>
@@ -32841,7 +32841,7 @@
                           </a:solidFill>
                           <a:latin typeface="Kanit"/>
                         </a:rPr>
-                        <a:t>28/159</a:t>
+                        <a:t>31/158</a:t>
                       </a:r>
                     </a:p>
                   </a:txBody>
@@ -33073,7 +33073,7 @@
                           </a:solidFill>
                           <a:latin typeface="Kanit"/>
                         </a:rPr>
-                        <a:t>26/273</a:t>
+                        <a:t>26/274</a:t>
                       </a:r>
                     </a:p>
                   </a:txBody>
@@ -33537,7 +33537,7 @@
                           </a:solidFill>
                           <a:latin typeface="Kanit"/>
                         </a:rPr>
-                        <a:t>10/52</a:t>
+                        <a:t>7/52</a:t>
                       </a:r>
                     </a:p>
                   </a:txBody>
@@ -33769,7 +33769,7 @@
                           </a:solidFill>
                           <a:latin typeface="Kanit"/>
                         </a:rPr>
-                        <a:t>41/142</a:t>
+                        <a:t>39/142</a:t>
                       </a:r>
                     </a:p>
                   </a:txBody>
@@ -34445,7 +34445,7 @@
                 </a:solidFill>
                 <a:latin typeface="Kanit"/>
               </a:rPr>
-              <a:t>The board carries 21 commodities. Seventeen have a measured Thai farm-gate price beside the world index, and nine of those seventeen are negative year on year.</a:t>
+              <a:t>The board carries 21 commodities. Seventeen have a measured Thai farm-gate price beside the world index, and eight of those seventeen are negative year on year.</a:t>
             </a:r>
           </a:p>
         </p:txBody>
@@ -34460,7 +34460,7 @@
         </p:nvGraphicFramePr>
         <p:xfrm>
           <a:off x="411480" y="1488948"/>
-          <a:ext cx="11365992" cy="2617011"/>
+          <a:ext cx="11365992" cy="2362808"/>
         </p:xfrm>
         <a:graphic>
           <a:graphicData uri="http://schemas.openxmlformats.org/drawingml/2006/table">
@@ -34675,7 +34675,7 @@
                           </a:solidFill>
                           <a:latin typeface="Kanit"/>
                         </a:rPr>
-                        <a:t>−70.9%</a:t>
+                        <a:t>−69.7%</a:t>
                       </a:r>
                     </a:p>
                   </a:txBody>
@@ -34792,7 +34792,7 @@
                           </a:solidFill>
                           <a:latin typeface="Kanit"/>
                         </a:rPr>
-                        <a:t>−20.0%</a:t>
+                        <a:t>−18.4%</a:t>
                       </a:r>
                     </a:p>
                   </a:txBody>
@@ -34886,7 +34886,7 @@
                           </a:solidFill>
                           <a:latin typeface="Kanit"/>
                         </a:rPr>
-                        <a:t>Isan · Central</a:t>
+                        <a:t>Isan · C</a:t>
                       </a:r>
                     </a:p>
                   </a:txBody>
@@ -34926,7 +34926,7 @@
                     <a:p>
                       <a:pPr algn="r"/>
                       <a:r>
-                        <a:rPr sz="1000" b="0">
+                        <a:rPr sz="1000" b="1">
                           <a:solidFill>
                             <a:srgbClr val="CC0000"/>
                           </a:solidFill>
@@ -35074,7 +35074,7 @@
                           </a:solidFill>
                           <a:latin typeface="Kanit"/>
                         </a:rPr>
-                        <a:t>Pork</a:t>
+                        <a:t>Beef</a:t>
                       </a:r>
                     </a:p>
                   </a:txBody>
@@ -35120,7 +35120,7 @@
                           </a:solidFill>
                           <a:latin typeface="Kanit"/>
                         </a:rPr>
-                        <a:t>C · W · E</a:t>
+                        <a:t>Isan</a:t>
                       </a:r>
                     </a:p>
                   </a:txBody>
@@ -35143,7 +35143,7 @@
                           </a:solidFill>
                           <a:latin typeface="Kanit"/>
                         </a:rPr>
-                        <a:t>−6.7%</a:t>
+                        <a:t>−6.1%</a:t>
                       </a:r>
                     </a:p>
                   </a:txBody>
@@ -35160,13 +35160,13 @@
                     <a:p>
                       <a:pPr algn="r"/>
                       <a:r>
-                        <a:rPr sz="1000" b="0">
-                          <a:solidFill>
-                            <a:srgbClr val="606060"/>
-                          </a:solidFill>
-                          <a:latin typeface="Kanit"/>
-                        </a:rPr>
-                        <a:t>—</a:t>
+                        <a:rPr sz="1000" b="1">
+                          <a:solidFill>
+                            <a:srgbClr val="15795F"/>
+                          </a:solidFill>
+                          <a:latin typeface="Kanit"/>
+                        </a:rPr>
+                        <a:t>+11.8%</a:t>
                       </a:r>
                     </a:p>
                   </a:txBody>
@@ -35191,7 +35191,7 @@
                           </a:solidFill>
                           <a:latin typeface="Kanit"/>
                         </a:rPr>
-                        <a:t>Beef</a:t>
+                        <a:t>Pork</a:t>
                       </a:r>
                     </a:p>
                   </a:txBody>
@@ -35237,7 +35237,7 @@
                           </a:solidFill>
                           <a:latin typeface="Kanit"/>
                         </a:rPr>
-                        <a:t>Isan</a:t>
+                        <a:t>C · W · E</a:t>
                       </a:r>
                     </a:p>
                   </a:txBody>
@@ -35260,7 +35260,7 @@
                           </a:solidFill>
                           <a:latin typeface="Kanit"/>
                         </a:rPr>
-                        <a:t>−6.1%</a:t>
+                        <a:t>−3.5%</a:t>
                       </a:r>
                     </a:p>
                   </a:txBody>
@@ -35277,13 +35277,13 @@
                     <a:p>
                       <a:pPr algn="r"/>
                       <a:r>
-                        <a:rPr sz="1000" b="1">
-                          <a:solidFill>
-                            <a:srgbClr val="15795F"/>
-                          </a:solidFill>
-                          <a:latin typeface="Kanit"/>
-                        </a:rPr>
-                        <a:t>+11.8%</a:t>
+                        <a:rPr sz="1000" b="0">
+                          <a:solidFill>
+                            <a:srgbClr val="606060"/>
+                          </a:solidFill>
+                          <a:latin typeface="Kanit"/>
+                        </a:rPr>
+                        <a:t>—</a:t>
                       </a:r>
                     </a:p>
                   </a:txBody>
@@ -35377,7 +35377,7 @@
                           </a:solidFill>
                           <a:latin typeface="Kanit"/>
                         </a:rPr>
-                        <a:t>−4.3%</a:t>
+                        <a:t>−1.8%</a:t>
                       </a:r>
                     </a:p>
                   </a:txBody>
@@ -35494,7 +35494,7 @@
                           </a:solidFill>
                           <a:latin typeface="Kanit"/>
                         </a:rPr>
-                        <a:t>−2.4%</a:t>
+                        <a:t>−0.1%</a:t>
                       </a:r>
                     </a:p>
                   </a:txBody>
@@ -35511,9 +35511,9 @@
                     <a:p>
                       <a:pPr algn="r"/>
                       <a:r>
-                        <a:rPr sz="1000" b="0">
-                          <a:solidFill>
-                            <a:srgbClr val="606060"/>
+                        <a:rPr sz="1000" b="1">
+                          <a:solidFill>
+                            <a:srgbClr val="CC0000"/>
                           </a:solidFill>
                           <a:latin typeface="Kanit"/>
                         </a:rPr>
@@ -35524,123 +35524,6 @@
                   <a:tcPr marL="54864" marR="54864" marT="18288" marB="18288" anchor="ctr">
                     <a:solidFill>
                       <a:srgbClr val="F7F9FC"/>
-                    </a:solidFill>
-                  </a:tcPr>
-                </a:tc>
-              </a:tr>
-              <a:tr h="254203">
-                <a:tc>
-                  <a:txBody>
-                    <a:bodyPr wrap="square"/>
-                    <a:lstStyle/>
-                    <a:p>
-                      <a:pPr algn="l"/>
-                      <a:r>
-                        <a:rPr sz="1000" b="1">
-                          <a:solidFill>
-                            <a:srgbClr val="1E2F5C"/>
-                          </a:solidFill>
-                          <a:latin typeface="Kanit"/>
-                        </a:rPr>
-                        <a:t>Eggs</a:t>
-                      </a:r>
-                    </a:p>
-                  </a:txBody>
-                  <a:tcPr marL="54864" marR="54864" marT="18288" marB="18288" anchor="ctr">
-                    <a:solidFill>
-                      <a:srgbClr val="FFFFFF"/>
-                    </a:solidFill>
-                  </a:tcPr>
-                </a:tc>
-                <a:tc>
-                  <a:txBody>
-                    <a:bodyPr wrap="square"/>
-                    <a:lstStyle/>
-                    <a:p>
-                      <a:pPr algn="l"/>
-                      <a:r>
-                        <a:rPr sz="1000" b="0">
-                          <a:solidFill>
-                            <a:srgbClr val="1E2F5C"/>
-                          </a:solidFill>
-                          <a:latin typeface="Kanit"/>
-                        </a:rPr>
-                        <a:t>Livestock</a:t>
-                      </a:r>
-                    </a:p>
-                  </a:txBody>
-                  <a:tcPr marL="54864" marR="54864" marT="18288" marB="18288" anchor="ctr">
-                    <a:solidFill>
-                      <a:srgbClr val="FFFFFF"/>
-                    </a:solidFill>
-                  </a:tcPr>
-                </a:tc>
-                <a:tc>
-                  <a:txBody>
-                    <a:bodyPr wrap="square"/>
-                    <a:lstStyle/>
-                    <a:p>
-                      <a:pPr algn="l"/>
-                      <a:r>
-                        <a:rPr sz="1000" b="0">
-                          <a:solidFill>
-                            <a:srgbClr val="1E2F5C"/>
-                          </a:solidFill>
-                          <a:latin typeface="Kanit"/>
-                        </a:rPr>
-                        <a:t>C · E</a:t>
-                      </a:r>
-                    </a:p>
-                  </a:txBody>
-                  <a:tcPr marL="54864" marR="54864" marT="18288" marB="18288" anchor="ctr">
-                    <a:solidFill>
-                      <a:srgbClr val="FFFFFF"/>
-                    </a:solidFill>
-                  </a:tcPr>
-                </a:tc>
-                <a:tc>
-                  <a:txBody>
-                    <a:bodyPr wrap="square"/>
-                    <a:lstStyle/>
-                    <a:p>
-                      <a:pPr algn="r"/>
-                      <a:r>
-                        <a:rPr sz="1000" b="1">
-                          <a:solidFill>
-                            <a:srgbClr val="CC0000"/>
-                          </a:solidFill>
-                          <a:latin typeface="Kanit"/>
-                        </a:rPr>
-                        <a:t>−1.7%</a:t>
-                      </a:r>
-                    </a:p>
-                  </a:txBody>
-                  <a:tcPr marL="54864" marR="54864" marT="18288" marB="18288" anchor="ctr">
-                    <a:solidFill>
-                      <a:srgbClr val="FFFFFF"/>
-                    </a:solidFill>
-                  </a:tcPr>
-                </a:tc>
-                <a:tc>
-                  <a:txBody>
-                    <a:bodyPr wrap="square"/>
-                    <a:lstStyle/>
-                    <a:p>
-                      <a:pPr algn="r"/>
-                      <a:r>
-                        <a:rPr sz="1000" b="0">
-                          <a:solidFill>
-                            <a:srgbClr val="606060"/>
-                          </a:solidFill>
-                          <a:latin typeface="Kanit"/>
-                        </a:rPr>
-                        <a:t>—</a:t>
-                      </a:r>
-                    </a:p>
-                  </a:txBody>
-                  <a:tcPr marL="54864" marR="54864" marT="18288" marB="18288" anchor="ctr">
-                    <a:solidFill>
-                      <a:srgbClr val="FFFFFF"/>
                     </a:solidFill>
                   </a:tcPr>
                 </a:tc>
@@ -35657,7 +35540,7 @@
         </p:nvSpPr>
         <p:spPr>
           <a:xfrm>
-            <a:off x="411480" y="4233976"/>
+            <a:off x="411480" y="3979773"/>
             <a:ext cx="535747" cy="192024"/>
           </a:xfrm>
           <a:prstGeom prst="roundRect">
@@ -35703,7 +35586,7 @@
         </p:nvSpPr>
         <p:spPr>
           <a:xfrm>
-            <a:off x="411480" y="4263237"/>
+            <a:off x="411480" y="4009034"/>
             <a:ext cx="535747" cy="134112"/>
           </a:xfrm>
           <a:prstGeom prst="rect">
@@ -35742,7 +35625,7 @@
         </p:nvSpPr>
         <p:spPr>
           <a:xfrm>
-            <a:off x="1056955" y="4247692"/>
+            <a:off x="1056955" y="3993489"/>
             <a:ext cx="10720516" cy="308610"/>
           </a:xfrm>
           <a:prstGeom prst="rect">
@@ -35768,7 +35651,7 @@
                 </a:solidFill>
                 <a:latin typeface="Kanit"/>
               </a:rPr>
-              <a:t>Prices MEASURED — NABC daily and monthly market feeds, Thai farm gate, OCSB announced cane price, World Bank Pink Sheet 2026M06; farm-gate vintage 2026-08-02. The belt column is an ESTIMATED read of where each is produced, and the belts overlap — the same household often keeps poultry and grows rice.</a:t>
+              <a:t>Prices MEASURED — NABC daily and monthly market feeds, Thai farm gate, OCSB announced cane price, World Bank Pink Sheet 2026M06; newest farm-gate quote 2026-08-03. The belt column is an ESTIMATED read of where each is produced, and the belts overlap — the same household often keeps poultry and grows rice.</a:t>
             </a:r>
           </a:p>
         </p:txBody>
@@ -35781,7 +35664,7 @@
         </p:nvSpPr>
         <p:spPr>
           <a:xfrm>
-            <a:off x="411480" y="4688890"/>
+            <a:off x="411480" y="4434687"/>
             <a:ext cx="11365992" cy="854456"/>
           </a:xfrm>
           <a:prstGeom prst="rect">
@@ -35825,7 +35708,7 @@
         </p:nvSpPr>
         <p:spPr>
           <a:xfrm>
-            <a:off x="411480" y="4688890"/>
+            <a:off x="411480" y="4434687"/>
             <a:ext cx="50292" cy="854456"/>
           </a:xfrm>
           <a:prstGeom prst="rect">
@@ -35869,7 +35752,7 @@
         </p:nvSpPr>
         <p:spPr>
           <a:xfrm>
-            <a:off x="630936" y="4835194"/>
+            <a:off x="630936" y="4580991"/>
             <a:ext cx="11036808" cy="158750"/>
           </a:xfrm>
           <a:prstGeom prst="rect">
@@ -35908,7 +35791,7 @@
         </p:nvSpPr>
         <p:spPr>
           <a:xfrm>
-            <a:off x="630936" y="5039664"/>
+            <a:off x="630936" y="4785461"/>
             <a:ext cx="11036808" cy="357378"/>
           </a:xfrm>
           <a:prstGeom prst="rect">
@@ -39452,7 +39335,7 @@
                 </a:solidFill>
                 <a:latin typeface="Kanit"/>
               </a:rPr>
-              <a:t>rice, rubber, sugarcane, palm, cassava, maize, coconut, pineapple</a:t>
+              <a:t>rice, rubber, sugarcane, oil palm, cassava, maize, coconut, pineapple</a:t>
             </a:r>
           </a:p>
         </p:txBody>
@@ -39617,7 +39500,7 @@
                 </a:solidFill>
                 <a:latin typeface="Kanit"/>
               </a:rPr>
-              <a:t>sugarcane −17.9%, coconut −70.9%, pineapple −20.0% year on year</a:t>
+              <a:t>coconut −69.7%, pineapple −18.4%, sugarcane −17.9% year on year</a:t>
             </a:r>
           </a:p>
         </p:txBody>
@@ -39743,7 +39626,7 @@
                 </a:solidFill>
                 <a:latin typeface="Kanit"/>
               </a:rPr>
-              <a:t>+14.3%</a:t>
+              <a:t>+15.5%</a:t>
             </a:r>
           </a:p>
         </p:txBody>
@@ -40178,7 +40061,7 @@
                           </a:solidFill>
                           <a:latin typeface="Kanit"/>
                         </a:rPr>
-                        <a:t>+5.0%</a:t>
+                        <a:t>+5.8%</a:t>
                       </a:r>
                     </a:p>
                   </a:txBody>
@@ -40247,7 +40130,7 @@
                           </a:solidFill>
                           <a:latin typeface="Kanit"/>
                         </a:rPr>
-                        <a:t>-66.4%</a:t>
+                        <a:t>-65.2%</a:t>
                       </a:r>
                     </a:p>
                   </a:txBody>
@@ -40318,7 +40201,7 @@
                           </a:solidFill>
                           <a:latin typeface="Kanit"/>
                         </a:rPr>
-                        <a:t>+13.2%</a:t>
+                        <a:t>+14.3%</a:t>
                       </a:r>
                     </a:p>
                   </a:txBody>
@@ -40387,7 +40270,7 @@
                           </a:solidFill>
                           <a:latin typeface="Kanit"/>
                         </a:rPr>
-                        <a:t>+8.4%</a:t>
+                        <a:t>+9.2%</a:t>
                       </a:r>
                     </a:p>
                   </a:txBody>
@@ -40458,7 +40341,7 @@
                           </a:solidFill>
                           <a:latin typeface="Kanit"/>
                         </a:rPr>
-                        <a:t>+14.7%</a:t>
+                        <a:t>+15.7%</a:t>
                       </a:r>
                     </a:p>
                   </a:txBody>
@@ -40527,7 +40410,7 @@
                           </a:solidFill>
                           <a:latin typeface="Kanit"/>
                         </a:rPr>
-                        <a:t>+7.2%</a:t>
+                        <a:t>+8.0%</a:t>
                       </a:r>
                     </a:p>
                   </a:txBody>
@@ -40598,7 +40481,7 @@
                           </a:solidFill>
                           <a:latin typeface="Kanit"/>
                         </a:rPr>
-                        <a:t>+23.9%</a:t>
+                        <a:t>+25.3%</a:t>
                       </a:r>
                     </a:p>
                   </a:txBody>
@@ -40667,7 +40550,7 @@
                           </a:solidFill>
                           <a:latin typeface="Kanit"/>
                         </a:rPr>
-                        <a:t>+9.2%</a:t>
+                        <a:t>+9.8%</a:t>
                       </a:r>
                     </a:p>
                   </a:txBody>
@@ -40738,7 +40621,7 @@
                           </a:solidFill>
                           <a:latin typeface="Kanit"/>
                         </a:rPr>
-                        <a:t>+34.9%</a:t>
+                        <a:t>+36.4%</a:t>
                       </a:r>
                     </a:p>
                   </a:txBody>
@@ -40807,7 +40690,7 @@
                           </a:solidFill>
                           <a:latin typeface="Kanit"/>
                         </a:rPr>
-                        <a:t>+31.3%</a:t>
+                        <a:t>+29.9%</a:t>
                       </a:r>
                     </a:p>
                   </a:txBody>
@@ -40983,8 +40866,8 @@
                 </a:solidFill>
                 <a:latin typeface="Kanit"/>
               </a:rPr>
-              <a:t>Rubber +38%, cassava +57%, palm +32% and rice +12% at the farm gate lifted crop income in every region — the South by 34.9%, the East by 23.9%. On a mix basis this is the best crop year in several.
-The exception is narrow and worth naming: four provinces on the western gulf — สมุทรสงคราม, สมุทรสาคร, ราชบุรี and ประจวบคีรีขันธ์ — all coconut, all negative, the worst at −66.4%. A single crop collapsing 70.9% is enough to take a whole province backwards while the national picture improves.
+              <a:t>Rubber +41%, cassava +59%, palm +28% and rice +13% at the farm gate lifted crop income in every region — the South by 36.4%, the East by 25.3%. On a mix basis this is the best crop year in several.
+The exception is narrow and worth naming: four provinces on the western gulf — สมุทรสงคราม, สมุทรสาคร, ราชบุรี and ประจวบคีรีขันธ์ — all coconut, all negative, the worst at −65.2%. A single crop collapsing 69.7% is enough to take a whole province backwards while the national picture improves.
 And a gain on a mix basis is not cash in hand: the next slide nets these same prices against cost of production.</a:t>
             </a:r>
           </a:p>
@@ -41311,7 +41194,7 @@
                           </a:solidFill>
                           <a:latin typeface="Kanit"/>
                         </a:rPr>
-                        <a:t>Rice 67% (+12%)</a:t>
+                        <a:t>Rice 67% (+13%)</a:t>
                       </a:r>
                     </a:p>
                   </a:txBody>
@@ -41357,7 +41240,7 @@
                           </a:solidFill>
                           <a:latin typeface="Kanit"/>
                         </a:rPr>
-                        <a:t>+14.6%</a:t>
+                        <a:t>+15.5%</a:t>
                       </a:r>
                     </a:p>
                   </a:txBody>
@@ -41403,7 +41286,7 @@
                           </a:solidFill>
                           <a:latin typeface="Kanit"/>
                         </a:rPr>
-                        <a:t>+719</a:t>
+                        <a:t>+764</a:t>
                       </a:r>
                     </a:p>
                   </a:txBody>
@@ -41520,7 +41403,7 @@
                           </a:solidFill>
                           <a:latin typeface="Kanit"/>
                         </a:rPr>
-                        <a:t>Rice 79% (+12%)</a:t>
+                        <a:t>Rice 79% (+13%)</a:t>
                       </a:r>
                     </a:p>
                   </a:txBody>
@@ -41543,7 +41426,7 @@
                           </a:solidFill>
                           <a:latin typeface="Kanit"/>
                         </a:rPr>
-                        <a:t>Coconut (-71%)</a:t>
+                        <a:t>Coconut (-70%)</a:t>
                       </a:r>
                     </a:p>
                   </a:txBody>
@@ -41566,7 +41449,7 @@
                           </a:solidFill>
                           <a:latin typeface="Kanit"/>
                         </a:rPr>
-                        <a:t>+18.9%</a:t>
+                        <a:t>+20.1%</a:t>
                       </a:r>
                     </a:p>
                   </a:txBody>
@@ -41612,7 +41495,7 @@
                           </a:solidFill>
                           <a:latin typeface="Kanit"/>
                         </a:rPr>
-                        <a:t>+809</a:t>
+                        <a:t>+857</a:t>
                       </a:r>
                     </a:p>
                   </a:txBody>
@@ -41729,7 +41612,7 @@
                           </a:solidFill>
                           <a:latin typeface="Kanit"/>
                         </a:rPr>
-                        <a:t>Rice 65% (+12%)</a:t>
+                        <a:t>Rice 65% (+13%)</a:t>
                       </a:r>
                     </a:p>
                   </a:txBody>
@@ -41775,7 +41658,7 @@
                           </a:solidFill>
                           <a:latin typeface="Kanit"/>
                         </a:rPr>
-                        <a:t>+9.2%</a:t>
+                        <a:t>+10.0%</a:t>
                       </a:r>
                     </a:p>
                   </a:txBody>
@@ -41821,7 +41704,7 @@
                           </a:solidFill>
                           <a:latin typeface="Kanit"/>
                         </a:rPr>
-                        <a:t>+546</a:t>
+                        <a:t>+593</a:t>
                       </a:r>
                     </a:p>
                   </a:txBody>
@@ -41938,7 +41821,7 @@
                           </a:solidFill>
                           <a:latin typeface="Kanit"/>
                         </a:rPr>
-                        <a:t>Rubber 60% (+38%)</a:t>
+                        <a:t>Rubber 60% (+41%)</a:t>
                       </a:r>
                     </a:p>
                   </a:txBody>
@@ -41961,7 +41844,7 @@
                           </a:solidFill>
                           <a:latin typeface="Kanit"/>
                         </a:rPr>
-                        <a:t>Coconut (-71%)</a:t>
+                        <a:t>Coconut (-70%)</a:t>
                       </a:r>
                     </a:p>
                   </a:txBody>
@@ -41984,7 +41867,7 @@
                           </a:solidFill>
                           <a:latin typeface="Kanit"/>
                         </a:rPr>
-                        <a:t>+34.6%</a:t>
+                        <a:t>+34.9%</a:t>
                       </a:r>
                     </a:p>
                   </a:txBody>
@@ -42030,7 +41913,7 @@
                           </a:solidFill>
                           <a:latin typeface="Kanit"/>
                         </a:rPr>
-                        <a:t>+2,175</a:t>
+                        <a:t>+2,192</a:t>
                       </a:r>
                     </a:p>
                   </a:txBody>
@@ -42147,7 +42030,7 @@
                           </a:solidFill>
                           <a:latin typeface="Kanit"/>
                         </a:rPr>
-                        <a:t>Rice 82% (+12%)</a:t>
+                        <a:t>Rice 82% (+13%)</a:t>
                       </a:r>
                     </a:p>
                   </a:txBody>
@@ -42193,7 +42076,7 @@
                           </a:solidFill>
                           <a:latin typeface="Kanit"/>
                         </a:rPr>
-                        <a:t>+14.9%</a:t>
+                        <a:t>+15.9%</a:t>
                       </a:r>
                     </a:p>
                   </a:txBody>
@@ -42239,7 +42122,7 @@
                           </a:solidFill>
                           <a:latin typeface="Kanit"/>
                         </a:rPr>
-                        <a:t>+621</a:t>
+                        <a:t>+662</a:t>
                       </a:r>
                     </a:p>
                   </a:txBody>
@@ -42356,7 +42239,7 @@
                           </a:solidFill>
                           <a:latin typeface="Kanit"/>
                         </a:rPr>
-                        <a:t>Rice 88% (+12%)</a:t>
+                        <a:t>Rice 88% (+13%)</a:t>
                       </a:r>
                     </a:p>
                   </a:txBody>
@@ -42402,7 +42285,7 @@
                           </a:solidFill>
                           <a:latin typeface="Kanit"/>
                         </a:rPr>
-                        <a:t>+13.8%</a:t>
+                        <a:t>+14.8%</a:t>
                       </a:r>
                     </a:p>
                   </a:txBody>
@@ -42448,7 +42331,7 @@
                           </a:solidFill>
                           <a:latin typeface="Kanit"/>
                         </a:rPr>
-                        <a:t>+495</a:t>
+                        <a:t>+529</a:t>
                       </a:r>
                     </a:p>
                   </a:txBody>
@@ -43285,7 +43168,7 @@
                           </a:solidFill>
                           <a:latin typeface="Kanit"/>
                         </a:rPr>
-                        <a:t>+57.3%</a:t>
+                        <a:t>+58.8%</a:t>
                       </a:r>
                     </a:p>
                   </a:txBody>
@@ -43423,7 +43306,7 @@
                           </a:solidFill>
                           <a:latin typeface="Kanit"/>
                         </a:rPr>
-                        <a:t>3.50</a:t>
+                        <a:t>3.75</a:t>
                       </a:r>
                     </a:p>
                   </a:txBody>
@@ -43517,7 +43400,7 @@
                           </a:solidFill>
                           <a:latin typeface="Kanit"/>
                         </a:rPr>
-                        <a:t>+12.4%</a:t>
+                        <a:t>+13.2%</a:t>
                       </a:r>
                     </a:p>
                   </a:txBody>
@@ -43749,7 +43632,7 @@
                           </a:solidFill>
                           <a:latin typeface="Kanit"/>
                         </a:rPr>
-                        <a:t>+38.0%</a:t>
+                        <a:t>+41.2%</a:t>
                       </a:r>
                     </a:p>
                   </a:txBody>
@@ -43887,7 +43770,7 @@
                           </a:solidFill>
                           <a:latin typeface="Kanit"/>
                         </a:rPr>
-                        <a:t>84.08</a:t>
+                        <a:t>82.20</a:t>
                       </a:r>
                     </a:p>
                   </a:txBody>
@@ -43981,7 +43864,7 @@
                           </a:solidFill>
                           <a:latin typeface="Kanit"/>
                         </a:rPr>
-                        <a:t>+11.3%</a:t>
+                        <a:t>+13.4%</a:t>
                       </a:r>
                     </a:p>
                   </a:txBody>
@@ -44119,7 +44002,7 @@
                           </a:solidFill>
                           <a:latin typeface="Kanit"/>
                         </a:rPr>
-                        <a:t>10.68</a:t>
+                        <a:t>10.20</a:t>
                       </a:r>
                     </a:p>
                   </a:txBody>
@@ -44213,7 +44096,7 @@
                           </a:solidFill>
                           <a:latin typeface="Kanit"/>
                         </a:rPr>
-                        <a:t>+31.8%</a:t>
+                        <a:t>+27.5%</a:t>
                       </a:r>
                     </a:p>
                   </a:txBody>
@@ -44351,7 +44234,7 @@
                           </a:solidFill>
                           <a:latin typeface="Kanit"/>
                         </a:rPr>
-                        <a:t>8.65</a:t>
+                        <a:t>8.88</a:t>
                       </a:r>
                     </a:p>
                   </a:txBody>
@@ -44524,7 +44407,7 @@
                 </a:solidFill>
                 <a:latin typeface="Kanit"/>
               </a:rPr>
-              <a:t>The three crops whose farm-gate prices are FALLING — sugarcane −17.9%, coconut −70.9%, pineapple −20.0%, together 12.2% of the country’s planted area — are exactly the three with no OAE cost series, which is why they are not on this table. We can see the price move and cannot see whether it has taken the grower under.</a:t>
+              <a:t>The three crops whose farm-gate prices are FALLING — coconut −69.7%, pineapple −18.4%, sugarcane −17.9%, together 10.7% of the country’s planted area — are exactly the three with no OAE cost series, which is why they are not on this table. We can see the price move and cannot see whether it has taken the grower under.</a:t>
             </a:r>
           </a:p>
         </p:txBody>
@@ -44651,7 +44534,7 @@
                 </a:solidFill>
                 <a:latin typeface="Kanit"/>
               </a:rPr>
-              <a:t>Rice: the price is up 12.4% and the crop still loses money</a:t>
+              <a:t>Rice: the price is up 13.2% and the crop still loses money</a:t>
             </a:r>
           </a:p>
         </p:txBody>

--- a/docs/decks/mcom-2026-08-05-macro.pptx
+++ b/docs/decks/mcom-2026-08-05-macro.pptx
@@ -15921,7 +15921,7 @@
                           </a:solidFill>
                           <a:latin typeface="Kanit"/>
                         </a:rPr>
-                        <a:t>Pickup + PPV</a:t>
+                        <a:t>Pickup + PPV รถกระบะ</a:t>
                       </a:r>
                     </a:p>
                   </a:txBody>
@@ -16061,7 +16061,7 @@
                           </a:solidFill>
                           <a:latin typeface="Kanit"/>
                         </a:rPr>
-                        <a:t>Passenger car</a:t>
+                        <a:t>Passenger car รถยนต์นั่ง</a:t>
                       </a:r>
                     </a:p>
                   </a:txBody>
@@ -28806,7 +28806,7 @@
                 </a:solidFill>
                 <a:latin typeface="Kanit"/>
               </a:rPr>
-              <a:t>Pickup stock</a:t>
+              <a:t>Pickup stock รถกระบะ</a:t>
             </a:r>
           </a:p>
         </p:txBody>
@@ -28971,7 +28971,7 @@
                 </a:solidFill>
                 <a:latin typeface="Kanit"/>
               </a:rPr>
-              <a:t>Car stock</a:t>
+              <a:t>Car stock รถยนต์นั่ง</a:t>
             </a:r>
           </a:p>
         </p:txBody>
@@ -30651,7 +30651,7 @@
                 </a:solidFill>
                 <a:latin typeface="Kanit"/>
               </a:rPr>
-              <a:t>DLT registered stock and ownership transfers by region and class, plus MOT fleet totals. Share = class stock ÷ all registered vehicles in the region. Turnover = transfers ÷ registered stock — how much of the parc changes hands a year, the depth a repossessed title sells into.</a:t>
+              <a:t>DLT registered stock and ownership transfers by region and class (PU รถกระบะ · car รถยนต์นั่ง · moto รถจักรยานยนต์), plus MOT fleet totals. Share = class stock ÷ all registered vehicles in the region. Turnover = transfers ÷ registered stock — how much of the parc changes hands a year, the depth a repossessed title sells into.</a:t>
             </a:r>
           </a:p>
         </p:txBody>
@@ -34038,7 +34038,7 @@
                 </a:solidFill>
                 <a:latin typeface="Kanit"/>
               </a:rPr>
-              <a:t>Household debt</a:t>
+              <a:t>Household debt หนี้ครัวเรือน</a:t>
             </a:r>
           </a:p>
         </p:txBody>
@@ -34203,7 +34203,7 @@
                 </a:solidFill>
                 <a:latin typeface="Kanit"/>
               </a:rPr>
-              <a:t>Tourist arrivals</a:t>
+              <a:t>Tourist arrivals นักท่องเที่ยว</a:t>
             </a:r>
           </a:p>
         </p:txBody>
@@ -35674,7 +35674,7 @@
                 </a:solidFill>
                 <a:latin typeface="Kanit"/>
               </a:rPr>
-              <a:t>Thai banking-system NPL, % of loans · 40 quarters</a:t>
+              <a:t>Thai banking-system NPL หนี้เสีย, % of loans · 40 quarters</a:t>
             </a:r>
           </a:p>
         </p:txBody>
@@ -36514,7 +36514,7 @@
                 </a:solidFill>
                 <a:latin typeface="Kanit"/>
               </a:rPr>
-              <a:t>Labour force</a:t>
+              <a:t>Labour force กำลังแรงงาน</a:t>
             </a:r>
           </a:p>
         </p:txBody>
@@ -36679,7 +36679,7 @@
                 </a:solidFill>
                 <a:latin typeface="Kanit"/>
               </a:rPr>
-              <a:t>Informality</a:t>
+              <a:t>Informal work นอกระบบ</a:t>
             </a:r>
           </a:p>
         </p:txBody>
@@ -36844,7 +36844,7 @@
                 </a:solidFill>
                 <a:latin typeface="Kanit"/>
               </a:rPr>
-              <a:t>Vehicle fleet</a:t>
+              <a:t>Vehicle fleet รถจดทะเบียน</a:t>
             </a:r>
           </a:p>
         </p:txBody>
@@ -37009,7 +37009,7 @@
                 </a:solidFill>
                 <a:latin typeface="Kanit"/>
               </a:rPr>
-              <a:t>Districts dry</a:t>
+              <a:t>Districts dry ภัยแล้ง</a:t>
             </a:r>
           </a:p>
         </p:txBody>
@@ -37174,7 +37174,7 @@
                 </a:solidFill>
                 <a:latin typeface="Kanit"/>
               </a:rPr>
-              <a:t>Household debt</a:t>
+              <a:t>Household debt หนี้ครัวเรือน</a:t>
             </a:r>
           </a:p>
         </p:txBody>
@@ -37339,7 +37339,7 @@
                 </a:solidFill>
                 <a:latin typeface="Kanit"/>
               </a:rPr>
-              <a:t>No cushion</a:t>
+              <a:t>No cushion กันชนทางการเงิน</a:t>
             </a:r>
           </a:p>
         </p:txBody>

--- a/docs/decks/mcom-2026-08-05-macro.pptx
+++ b/docs/decks/mcom-2026-08-05-macro.pptx
@@ -5359,7 +5359,7 @@
         </p:nvSpPr>
         <p:spPr>
           <a:xfrm>
-            <a:off x="411480" y="6547104"/>
+            <a:off x="411480" y="6592824"/>
             <a:ext cx="6400800" cy="134112"/>
           </a:xfrm>
           <a:prstGeom prst="rect">
@@ -9174,7 +9174,7 @@
         </p:nvSpPr>
         <p:spPr>
           <a:xfrm>
-            <a:off x="411480" y="6547104"/>
+            <a:off x="411480" y="6592824"/>
             <a:ext cx="6400800" cy="134112"/>
           </a:xfrm>
           <a:prstGeom prst="rect">
@@ -12402,7 +12402,7 @@
         </p:nvSpPr>
         <p:spPr>
           <a:xfrm>
-            <a:off x="411480" y="6547104"/>
+            <a:off x="411480" y="6592824"/>
             <a:ext cx="6400800" cy="134112"/>
           </a:xfrm>
           <a:prstGeom prst="rect">
@@ -15282,7 +15282,7 @@
               <a:t>• Pickup +12.5% in 6 months, −0.4% in 12 — the fall has stopped.
 • Car +6.0% in 6 months, −8.3% in 12 — same shape, weaker level.
 • Pickup is 33 pts below its 2015 base, car 12 pts.
-• Pre-2022 advance rates price a market that no longer exists.</a:t>
+• Advance rates set before 2022 price a market that no longer exists.</a:t>
             </a:r>
           </a:p>
         </p:txBody>
@@ -15671,7 +15671,7 @@
         </p:nvSpPr>
         <p:spPr>
           <a:xfrm>
-            <a:off x="411480" y="6547104"/>
+            <a:off x="411480" y="6592824"/>
             <a:ext cx="6400800" cy="134112"/>
           </a:xfrm>
           <a:prstGeom prst="rect">
@@ -18584,7 +18584,7 @@
         </p:nvSpPr>
         <p:spPr>
           <a:xfrm>
-            <a:off x="411480" y="6547104"/>
+            <a:off x="411480" y="6592824"/>
             <a:ext cx="6400800" cy="134112"/>
           </a:xfrm>
           <a:prstGeom prst="rect">
@@ -21653,7 +21653,7 @@
         </p:nvSpPr>
         <p:spPr>
           <a:xfrm>
-            <a:off x="411480" y="6547104"/>
+            <a:off x="411480" y="6592824"/>
             <a:ext cx="6400800" cy="134112"/>
           </a:xfrm>
           <a:prstGeom prst="rect">
@@ -24386,7 +24386,7 @@
         </p:nvSpPr>
         <p:spPr>
           <a:xfrm>
-            <a:off x="411480" y="4959705"/>
+            <a:off x="411480" y="4932273"/>
             <a:ext cx="754177" cy="192024"/>
           </a:xfrm>
           <a:prstGeom prst="roundRect">
@@ -24432,7 +24432,7 @@
         </p:nvSpPr>
         <p:spPr>
           <a:xfrm>
-            <a:off x="411480" y="4988966"/>
+            <a:off x="411480" y="4961534"/>
             <a:ext cx="754177" cy="134112"/>
           </a:xfrm>
           <a:prstGeom prst="rect">
@@ -24471,7 +24471,7 @@
         </p:nvSpPr>
         <p:spPr>
           <a:xfrm>
-            <a:off x="1275385" y="4973421"/>
+            <a:off x="1275385" y="4945989"/>
             <a:ext cx="10502086" cy="462915"/>
           </a:xfrm>
           <a:prstGeom prst="rect">
@@ -24510,7 +24510,7 @@
         </p:nvSpPr>
         <p:spPr>
           <a:xfrm>
-            <a:off x="411480" y="5600928"/>
+            <a:off x="411480" y="5573496"/>
             <a:ext cx="164592" cy="176022"/>
           </a:xfrm>
           <a:prstGeom prst="rect">
@@ -24549,7 +24549,7 @@
         </p:nvSpPr>
         <p:spPr>
           <a:xfrm>
-            <a:off x="594360" y="5587212"/>
+            <a:off x="594360" y="5559780"/>
             <a:ext cx="11183112" cy="181356"/>
           </a:xfrm>
           <a:prstGeom prst="rect">
@@ -24588,7 +24588,7 @@
         </p:nvSpPr>
         <p:spPr>
           <a:xfrm>
-            <a:off x="411480" y="5873724"/>
+            <a:off x="411480" y="5846292"/>
             <a:ext cx="164592" cy="176022"/>
           </a:xfrm>
           <a:prstGeom prst="rect">
@@ -24627,7 +24627,7 @@
         </p:nvSpPr>
         <p:spPr>
           <a:xfrm>
-            <a:off x="594360" y="5860008"/>
+            <a:off x="594360" y="5832576"/>
             <a:ext cx="11183112" cy="181356"/>
           </a:xfrm>
           <a:prstGeom prst="rect">
@@ -24666,7 +24666,7 @@
         </p:nvSpPr>
         <p:spPr>
           <a:xfrm>
-            <a:off x="411480" y="6146520"/>
+            <a:off x="411480" y="6119088"/>
             <a:ext cx="164592" cy="176022"/>
           </a:xfrm>
           <a:prstGeom prst="rect">
@@ -24705,7 +24705,7 @@
         </p:nvSpPr>
         <p:spPr>
           <a:xfrm>
-            <a:off x="594360" y="6132804"/>
+            <a:off x="594360" y="6105372"/>
             <a:ext cx="11183112" cy="181356"/>
           </a:xfrm>
           <a:prstGeom prst="rect">
@@ -24744,7 +24744,7 @@
         </p:nvSpPr>
         <p:spPr>
           <a:xfrm>
-            <a:off x="411480" y="6419316"/>
+            <a:off x="411480" y="6391884"/>
             <a:ext cx="164592" cy="176022"/>
           </a:xfrm>
           <a:prstGeom prst="rect">
@@ -24783,7 +24783,7 @@
         </p:nvSpPr>
         <p:spPr>
           <a:xfrm>
-            <a:off x="594360" y="6405600"/>
+            <a:off x="594360" y="6378168"/>
             <a:ext cx="11183112" cy="181356"/>
           </a:xfrm>
           <a:prstGeom prst="rect">
@@ -25074,7 +25074,7 @@
         </p:nvSpPr>
         <p:spPr>
           <a:xfrm>
-            <a:off x="411480" y="6547104"/>
+            <a:off x="411480" y="6592824"/>
             <a:ext cx="6400800" cy="134112"/>
           </a:xfrm>
           <a:prstGeom prst="rect">
@@ -28693,7 +28693,7 @@
         </p:nvSpPr>
         <p:spPr>
           <a:xfrm>
-            <a:off x="411480" y="6547104"/>
+            <a:off x="411480" y="6592824"/>
             <a:ext cx="6400800" cy="134112"/>
           </a:xfrm>
           <a:prstGeom prst="rect">
@@ -31250,7 +31250,7 @@
         </p:nvSpPr>
         <p:spPr>
           <a:xfrm>
-            <a:off x="411480" y="6547104"/>
+            <a:off x="411480" y="6592824"/>
             <a:ext cx="6400800" cy="134112"/>
           </a:xfrm>
           <a:prstGeom prst="rect">
@@ -32312,7 +32312,7 @@
         </p:nvSpPr>
         <p:spPr>
           <a:xfrm>
-            <a:off x="411480" y="6547104"/>
+            <a:off x="411480" y="6592824"/>
             <a:ext cx="6400800" cy="134112"/>
           </a:xfrm>
           <a:prstGeom prst="rect">
@@ -33265,7 +33265,7 @@
         </p:nvSpPr>
         <p:spPr>
           <a:xfrm>
-            <a:off x="411480" y="6547104"/>
+            <a:off x="411480" y="6592824"/>
             <a:ext cx="6400800" cy="134112"/>
           </a:xfrm>
           <a:prstGeom prst="rect">
@@ -36401,7 +36401,7 @@
         </p:nvSpPr>
         <p:spPr>
           <a:xfrm>
-            <a:off x="411480" y="6547104"/>
+            <a:off x="411480" y="6592824"/>
             <a:ext cx="6400800" cy="134112"/>
           </a:xfrm>
           <a:prstGeom prst="rect">
@@ -39398,7 +39398,7 @@
         </p:nvSpPr>
         <p:spPr>
           <a:xfrm>
-            <a:off x="411480" y="6547104"/>
+            <a:off x="411480" y="6592824"/>
             <a:ext cx="6400800" cy="134112"/>
           </a:xfrm>
           <a:prstGeom prst="rect">
@@ -41711,7 +41711,7 @@
         </p:nvSpPr>
         <p:spPr>
           <a:xfrm>
-            <a:off x="411480" y="6547104"/>
+            <a:off x="411480" y="6592824"/>
             <a:ext cx="6400800" cy="134112"/>
           </a:xfrm>
           <a:prstGeom prst="rect">
@@ -44812,7 +44812,7 @@
         </p:nvSpPr>
         <p:spPr>
           <a:xfrm>
-            <a:off x="411480" y="6547104"/>
+            <a:off x="411480" y="6592824"/>
             <a:ext cx="6400800" cy="134112"/>
           </a:xfrm>
           <a:prstGeom prst="rect">
@@ -46590,7 +46590,7 @@
         </p:nvGraphicFramePr>
         <p:xfrm>
           <a:off x="411480" y="4359402"/>
-          <a:ext cx="11365992" cy="1664208"/>
+          <a:ext cx="11365992" cy="1581912"/>
         </p:xfrm>
         <a:graphic>
           <a:graphicData uri="http://schemas.openxmlformats.org/drawingml/2006/table">
@@ -46770,7 +46770,7 @@
                   </a:tcPr>
                 </a:tc>
               </a:tr>
-              <a:tr h="228600">
+              <a:tr h="214884">
                 <a:tc>
                   <a:txBody>
                     <a:bodyPr wrap="square"/>
@@ -46933,7 +46933,7 @@
                   </a:tcPr>
                 </a:tc>
               </a:tr>
-              <a:tr h="228600">
+              <a:tr h="214884">
                 <a:tc>
                   <a:txBody>
                     <a:bodyPr wrap="square"/>
@@ -47096,7 +47096,7 @@
                   </a:tcPr>
                 </a:tc>
               </a:tr>
-              <a:tr h="228600">
+              <a:tr h="214884">
                 <a:tc>
                   <a:txBody>
                     <a:bodyPr wrap="square"/>
@@ -47259,7 +47259,7 @@
                   </a:tcPr>
                 </a:tc>
               </a:tr>
-              <a:tr h="228600">
+              <a:tr h="214884">
                 <a:tc>
                   <a:txBody>
                     <a:bodyPr wrap="square"/>
@@ -47422,7 +47422,7 @@
                   </a:tcPr>
                 </a:tc>
               </a:tr>
-              <a:tr h="228600">
+              <a:tr h="214884">
                 <a:tc>
                   <a:txBody>
                     <a:bodyPr wrap="square"/>
@@ -47585,7 +47585,7 @@
                   </a:tcPr>
                 </a:tc>
               </a:tr>
-              <a:tr h="228600">
+              <a:tr h="214884">
                 <a:tc>
                   <a:txBody>
                     <a:bodyPr wrap="square"/>
@@ -47760,7 +47760,7 @@
         </p:nvSpPr>
         <p:spPr>
           <a:xfrm>
-            <a:off x="411480" y="6151626"/>
+            <a:off x="411480" y="6051042"/>
             <a:ext cx="535747" cy="192024"/>
           </a:xfrm>
           <a:prstGeom prst="roundRect">
@@ -47806,7 +47806,7 @@
         </p:nvSpPr>
         <p:spPr>
           <a:xfrm>
-            <a:off x="411480" y="6180886"/>
+            <a:off x="411480" y="6080302"/>
             <a:ext cx="535747" cy="134112"/>
           </a:xfrm>
           <a:prstGeom prst="rect">
@@ -47845,7 +47845,7 @@
         </p:nvSpPr>
         <p:spPr>
           <a:xfrm>
-            <a:off x="1056955" y="6165342"/>
+            <a:off x="1056955" y="6064757"/>
             <a:ext cx="10720516" cy="462915"/>
           </a:xfrm>
           <a:prstGeom prst="rect">
@@ -48136,7 +48136,7 @@
         </p:nvSpPr>
         <p:spPr>
           <a:xfrm>
-            <a:off x="411480" y="6547104"/>
+            <a:off x="411480" y="6592824"/>
             <a:ext cx="6400800" cy="134112"/>
           </a:xfrm>
           <a:prstGeom prst="rect">
@@ -52640,7 +52640,7 @@
         </p:nvSpPr>
         <p:spPr>
           <a:xfrm>
-            <a:off x="411480" y="6547104"/>
+            <a:off x="411480" y="6592824"/>
             <a:ext cx="6400800" cy="134112"/>
           </a:xfrm>
           <a:prstGeom prst="rect">

--- a/docs/decks/mcom-2026-08-05-macro.pptx
+++ b/docs/decks/mcom-2026-08-05-macro.pptx
@@ -6279,7 +6279,7 @@
                 </a:solidFill>
                 <a:latin typeface="Kanit"/>
               </a:rPr>
-              <a:t>of 794 (16.6%) · live · 2026-08-04</a:t>
+              <a:t>of 795 (16.6%) · live · 2026-08-05</a:t>
             </a:r>
           </a:p>
         </p:txBody>
@@ -6405,7 +6405,7 @@
                 </a:solidFill>
                 <a:latin typeface="Kanit"/>
               </a:rPr>
-              <a:t>41</a:t>
+              <a:t>29</a:t>
             </a:r>
           </a:p>
         </p:txBody>
@@ -6444,7 +6444,7 @@
                 </a:solidFill>
                 <a:latin typeface="Kanit"/>
               </a:rPr>
-              <a:t>latest daily reading · 2026-08-04</a:t>
+              <a:t>latest daily reading · 2026-08-05</a:t>
             </a:r>
           </a:p>
         </p:txBody>
@@ -7882,7 +7882,7 @@
                           </a:solidFill>
                           <a:latin typeface="Kanit"/>
                         </a:rPr>
-                        <a:t>ยโสธร</a:t>
+                        <a:t>นราธิวาส</a:t>
                       </a:r>
                     </a:p>
                   </a:txBody>
@@ -7905,7 +7905,7 @@
                           </a:solidFill>
                           <a:latin typeface="Kanit"/>
                         </a:rPr>
-                        <a:t>15</a:t>
+                        <a:t>66</a:t>
                       </a:r>
                     </a:p>
                   </a:txBody>
@@ -7928,7 +7928,7 @@
                           </a:solidFill>
                           <a:latin typeface="Kanit"/>
                         </a:rPr>
-                        <a:t>98</a:t>
+                        <a:t>56</a:t>
                       </a:r>
                     </a:p>
                   </a:txBody>
@@ -7951,7 +7951,7 @@
                           </a:solidFill>
                           <a:latin typeface="Kanit"/>
                         </a:rPr>
-                        <a:t>33.3%</a:t>
+                        <a:t>4.5%</a:t>
                       </a:r>
                     </a:p>
                   </a:txBody>
@@ -7974,7 +7974,7 @@
                           </a:solidFill>
                           <a:latin typeface="Kanit"/>
                         </a:rPr>
-                        <a:t>5/6</a:t>
+                        <a:t>5/10</a:t>
                       </a:r>
                     </a:p>
                   </a:txBody>
@@ -8022,7 +8022,7 @@
                           </a:solidFill>
                           <a:latin typeface="Kanit"/>
                         </a:rPr>
-                        <a:t>นราธิวาส</a:t>
+                        <a:t>ยโสธร</a:t>
                       </a:r>
                     </a:p>
                   </a:txBody>
@@ -8045,7 +8045,7 @@
                           </a:solidFill>
                           <a:latin typeface="Kanit"/>
                         </a:rPr>
-                        <a:t>65</a:t>
+                        <a:t>16</a:t>
                       </a:r>
                     </a:p>
                   </a:txBody>
@@ -8068,7 +8068,7 @@
                           </a:solidFill>
                           <a:latin typeface="Kanit"/>
                         </a:rPr>
-                        <a:t>57</a:t>
+                        <a:t>27</a:t>
                       </a:r>
                     </a:p>
                   </a:txBody>
@@ -8087,11 +8087,11 @@
                       <a:r>
                         <a:rPr sz="900" b="1">
                           <a:solidFill>
-                            <a:srgbClr val="F5C242"/>
-                          </a:solidFill>
-                          <a:latin typeface="Kanit"/>
-                        </a:rPr>
-                        <a:t>7.7%</a:t>
+                            <a:srgbClr val="606060"/>
+                          </a:solidFill>
+                          <a:latin typeface="Kanit"/>
+                        </a:rPr>
+                        <a:t>0.0%</a:t>
                       </a:r>
                     </a:p>
                   </a:txBody>
@@ -8114,7 +8114,7 @@
                           </a:solidFill>
                           <a:latin typeface="Kanit"/>
                         </a:rPr>
-                        <a:t>5/10</a:t>
+                        <a:t>5/6</a:t>
                       </a:r>
                     </a:p>
                   </a:txBody>
@@ -8162,7 +8162,7 @@
                           </a:solidFill>
                           <a:latin typeface="Kanit"/>
                         </a:rPr>
-                        <a:t>มุกดาหาร</a:t>
+                        <a:t>บึงกาฬ</a:t>
                       </a:r>
                     </a:p>
                   </a:txBody>
@@ -8185,7 +8185,7 @@
                           </a:solidFill>
                           <a:latin typeface="Kanit"/>
                         </a:rPr>
-                        <a:t>17</a:t>
+                        <a:t>10</a:t>
                       </a:r>
                     </a:p>
                   </a:txBody>
@@ -8208,7 +8208,7 @@
                           </a:solidFill>
                           <a:latin typeface="Kanit"/>
                         </a:rPr>
-                        <a:t>97</a:t>
+                        <a:t>99</a:t>
                       </a:r>
                     </a:p>
                   </a:txBody>
@@ -8231,7 +8231,7 @@
                           </a:solidFill>
                           <a:latin typeface="Kanit"/>
                         </a:rPr>
-                        <a:t>47.1%</a:t>
+                        <a:t>90.0%</a:t>
                       </a:r>
                     </a:p>
                   </a:txBody>
@@ -8254,7 +8254,7 @@
                           </a:solidFill>
                           <a:latin typeface="Kanit"/>
                         </a:rPr>
-                        <a:t>1/2</a:t>
+                        <a:t>1/1</a:t>
                       </a:r>
                     </a:p>
                   </a:txBody>
@@ -8302,7 +8302,7 @@
                           </a:solidFill>
                           <a:latin typeface="Kanit"/>
                         </a:rPr>
-                        <a:t>บึงกาฬ</a:t>
+                        <a:t>มุกดาหาร</a:t>
                       </a:r>
                     </a:p>
                   </a:txBody>
@@ -8325,7 +8325,7 @@
                           </a:solidFill>
                           <a:latin typeface="Kanit"/>
                         </a:rPr>
-                        <a:t>11</a:t>
+                        <a:t>16</a:t>
                       </a:r>
                     </a:p>
                   </a:txBody>
@@ -8348,7 +8348,7 @@
                           </a:solidFill>
                           <a:latin typeface="Kanit"/>
                         </a:rPr>
-                        <a:t>85</a:t>
+                        <a:t>77</a:t>
                       </a:r>
                     </a:p>
                   </a:txBody>
@@ -8371,7 +8371,7 @@
                           </a:solidFill>
                           <a:latin typeface="Kanit"/>
                         </a:rPr>
-                        <a:t>45.5%</a:t>
+                        <a:t>18.8%</a:t>
                       </a:r>
                     </a:p>
                   </a:txBody>
@@ -8394,7 +8394,7 @@
                           </a:solidFill>
                           <a:latin typeface="Kanit"/>
                         </a:rPr>
-                        <a:t>1/1</a:t>
+                        <a:t>1/2</a:t>
                       </a:r>
                     </a:p>
                   </a:txBody>
@@ -8442,7 +8442,7 @@
                           </a:solidFill>
                           <a:latin typeface="Kanit"/>
                         </a:rPr>
-                        <a:t>นครพนม</a:t>
+                        <a:t>ปทุมธานี</a:t>
                       </a:r>
                     </a:p>
                   </a:txBody>
@@ -8465,7 +8465,7 @@
                           </a:solidFill>
                           <a:latin typeface="Kanit"/>
                         </a:rPr>
-                        <a:t>29</a:t>
+                        <a:t>11</a:t>
                       </a:r>
                     </a:p>
                   </a:txBody>
@@ -8488,7 +8488,7 @@
                           </a:solidFill>
                           <a:latin typeface="Kanit"/>
                         </a:rPr>
-                        <a:t>56</a:t>
+                        <a:t>43</a:t>
                       </a:r>
                     </a:p>
                   </a:txBody>
@@ -8511,7 +8511,7 @@
                           </a:solidFill>
                           <a:latin typeface="Kanit"/>
                         </a:rPr>
-                        <a:t>24.1%</a:t>
+                        <a:t>18.2%</a:t>
                       </a:r>
                     </a:p>
                   </a:txBody>
@@ -8534,7 +8534,7 @@
                           </a:solidFill>
                           <a:latin typeface="Kanit"/>
                         </a:rPr>
-                        <a:t>5/15</a:t>
+                        <a:t>2/4</a:t>
                       </a:r>
                     </a:p>
                   </a:txBody>
@@ -8582,7 +8582,7 @@
                           </a:solidFill>
                           <a:latin typeface="Kanit"/>
                         </a:rPr>
-                        <a:t>อุดรธานี</a:t>
+                        <a:t>นครพนม</a:t>
                       </a:r>
                     </a:p>
                   </a:txBody>
@@ -8605,7 +8605,7 @@
                           </a:solidFill>
                           <a:latin typeface="Kanit"/>
                         </a:rPr>
-                        <a:t>33</a:t>
+                        <a:t>29</a:t>
                       </a:r>
                     </a:p>
                   </a:txBody>
@@ -8628,7 +8628,7 @@
                           </a:solidFill>
                           <a:latin typeface="Kanit"/>
                         </a:rPr>
-                        <a:t>59</a:t>
+                        <a:t>86</a:t>
                       </a:r>
                     </a:p>
                   </a:txBody>
@@ -8651,7 +8651,7 @@
                           </a:solidFill>
                           <a:latin typeface="Kanit"/>
                         </a:rPr>
-                        <a:t>15.2%</a:t>
+                        <a:t>17.2%</a:t>
                       </a:r>
                     </a:p>
                   </a:txBody>
@@ -8674,7 +8674,7 @@
                           </a:solidFill>
                           <a:latin typeface="Kanit"/>
                         </a:rPr>
-                        <a:t>3/4</a:t>
+                        <a:t>5/15</a:t>
                       </a:r>
                     </a:p>
                   </a:txBody>
@@ -8909,7 +8909,7 @@
                 </a:solidFill>
                 <a:latin typeface="Kanit"/>
               </a:rPr>
-              <a:t>Planted area MEASURED (OAE — 3,295 amphoe crop rows). Drought is a MODELLED SPEI index from rainfall and evapotranspiration, refreshed monthly, retrieved 2026-07-20 — the best national-coverage signal available, but nobody has walked those districts. Rain and river telemetry MEASURED (ThaiWater, live, pulled daily and accumulated — a missed pull leaves a gap rather than an invented point) · rain to 2026-08-04, river to 2026-08-04. Structural flood exposure MEASURED (GISTDA 1:50,000 repeated-flooding census, 2005-2016 — a 12-year ground record, not a forecast).</a:t>
+              <a:t>Planted area MEASURED (OAE — 3,295 amphoe crop rows). Drought is a MODELLED SPEI index from rainfall and evapotranspiration, refreshed monthly, retrieved 2026-07-20 — the best national-coverage signal available, but nobody has walked those districts. Rain and river telemetry MEASURED (ThaiWater, live, pulled daily and accumulated — a missed pull leaves a gap rather than an invented point) · rain to 2026-08-05, river to 2026-08-05. Structural flood exposure MEASURED (GISTDA 1:50,000 repeated-flooding census, 2005-2016 — a 12-year ground record, not a forecast).</a:t>
             </a:r>
           </a:p>
         </p:txBody>
@@ -31476,7 +31476,7 @@
                 </a:solidFill>
                 <a:latin typeface="Kanit"/>
               </a:rPr>
-              <a:t>Median crop income rose +15.5%, but four provinces fell — all on the coconut (มะพร้าว) belt, worst สมุทรสงคราม at −65.2%.</a:t>
+              <a:t>Median crop income rose +15.6%, but four provinces fell — all on the coconut (มะพร้าว) belt, worst สมุทรสงคราม at −64.8%.</a:t>
             </a:r>
           </a:p>
         </p:txBody>
@@ -32047,7 +32047,7 @@
                 </a:solidFill>
                 <a:latin typeface="Kanit"/>
               </a:rPr>
-              <a:t>Vintages — world prices 2026M06 · Thai farm gate 2026-08-03 · Thai price history 2026-08-02 · crop cost of production OAE Cai-up 2568 (crop year 2568/69, OAE forecast Mar 2569) · drought 2026-06-21 · CPI 2026-05 · GDP 2026-Q1 · IMF WEO 2026 · resale index 2026-05 · registrations to 2026-01 · household debt NSO SES 2566 · wages NSO LFS 2568 · telemetry 2026-08-04.</a:t>
+              <a:t>Vintages — world prices 2026M06 · Thai farm gate 2026-08-04 · Thai price history 2026-08-02 · crop cost of production OAE Cai-up 2568 (crop year 2568/69, OAE forecast Mar 2569) · drought 2026-06-21 · CPI 2026-05 · GDP 2026-Q1 · IMF WEO 2026 · resale index 2026-05 · registrations to 2026-01 · household debt NSO SES 2566 · wages NSO LFS 2568 · telemetry 2026-08-05.</a:t>
             </a:r>
           </a:p>
         </p:txBody>
@@ -32544,9 +32544,9 @@
                 <a:latin typeface="Kanit"/>
               </a:rPr>
               <a:t>Not on the world index — the farm gate (ราคาที่เกษตรกรขายได้) says otherwise.
-• Eight of seventeen Thai farm-gate prices are falling year on year.
+• Seven of seventeen Thai farm-gate prices are falling year on year.
 • Beef: farm gate −6.1% vs world index +11.8%.
-• Margin over price: a 25% price move becomes an 80% swing in crop income.</a:t>
+• Margin over price: a 25% price move becomes an 81% swing in crop income.</a:t>
             </a:r>
           </a:p>
         </p:txBody>
@@ -37087,7 +37087,7 @@
                 </a:solidFill>
                 <a:latin typeface="Kanit"/>
               </a:rPr>
-              <a:t>338 of 928 districts · 132 of 794 rivers high</a:t>
+              <a:t>338 of 928 districts · 132 of 795 rivers high</a:t>
             </a:r>
           </a:p>
         </p:txBody>
@@ -37859,7 +37859,7 @@
                           </a:solidFill>
                           <a:latin typeface="Kanit"/>
                         </a:rPr>
-                        <a:t>31/158</a:t>
+                        <a:t>34/159</a:t>
                       </a:r>
                     </a:p>
                   </a:txBody>
@@ -38091,7 +38091,7 @@
                           </a:solidFill>
                           <a:latin typeface="Kanit"/>
                         </a:rPr>
-                        <a:t>26/274</a:t>
+                        <a:t>23/274</a:t>
                       </a:r>
                     </a:p>
                   </a:txBody>
@@ -38323,7 +38323,7 @@
                           </a:solidFill>
                           <a:latin typeface="Kanit"/>
                         </a:rPr>
-                        <a:t>29/168</a:t>
+                        <a:t>27/168</a:t>
                       </a:r>
                     </a:p>
                   </a:txBody>
@@ -38555,7 +38555,7 @@
                           </a:solidFill>
                           <a:latin typeface="Kanit"/>
                         </a:rPr>
-                        <a:t>7/52</a:t>
+                        <a:t>8/52</a:t>
                       </a:r>
                     </a:p>
                   </a:txBody>
@@ -38787,7 +38787,7 @@
                           </a:solidFill>
                           <a:latin typeface="Kanit"/>
                         </a:rPr>
-                        <a:t>39/142</a:t>
+                        <a:t>40/142</a:t>
                       </a:r>
                     </a:p>
                   </a:txBody>
@@ -39502,7 +39502,7 @@
                 </a:solidFill>
                 <a:latin typeface="Kanit"/>
               </a:rPr>
-              <a:t>Seventeen of the 21 commodities we track have a measured Thai farm-gate price (ราคาที่เกษตรกรขายได้). Eight are falling year on year.</a:t>
+              <a:t>Seventeen of the 21 commodities we track have a measured Thai farm-gate price (ราคาที่เกษตรกรขายได้). Seven are falling year on year.</a:t>
             </a:r>
           </a:p>
         </p:txBody>
@@ -39673,7 +39673,7 @@
         </p:nvGraphicFramePr>
         <p:xfrm>
           <a:off x="411480" y="2033016"/>
-          <a:ext cx="11365992" cy="2362808"/>
+          <a:ext cx="11365992" cy="2108605"/>
         </p:xfrm>
         <a:graphic>
           <a:graphicData uri="http://schemas.openxmlformats.org/drawingml/2006/table">
@@ -39936,7 +39936,7 @@
                           </a:solidFill>
                           <a:latin typeface="Kanit"/>
                         </a:rPr>
-                        <a:t>−69.7%</a:t>
+                        <a:t>−69.3%</a:t>
                       </a:r>
                     </a:p>
                   </a:txBody>
@@ -40751,7 +40751,7 @@
                           </a:solidFill>
                           <a:latin typeface="Kanit"/>
                         </a:rPr>
-                        <a:t>−3.5%</a:t>
+                        <a:t>−3.2%</a:t>
                       </a:r>
                     </a:p>
                   </a:txBody>
@@ -40914,7 +40914,7 @@
                           </a:solidFill>
                           <a:latin typeface="Kanit"/>
                         </a:rPr>
-                        <a:t>−1.8%</a:t>
+                        <a:t>−1.5%</a:t>
                       </a:r>
                     </a:p>
                   </a:txBody>
@@ -40990,169 +40990,6 @@
                   <a:tcPr marL="54864" marR="54864" marT="18288" marB="18288" anchor="ctr">
                     <a:solidFill>
                       <a:srgbClr val="FFFFFF"/>
-                    </a:solidFill>
-                  </a:tcPr>
-                </a:tc>
-              </a:tr>
-              <a:tr h="254203">
-                <a:tc>
-                  <a:txBody>
-                    <a:bodyPr wrap="square"/>
-                    <a:lstStyle/>
-                    <a:p>
-                      <a:pPr algn="l"/>
-                      <a:r>
-                        <a:rPr sz="1000" b="1">
-                          <a:solidFill>
-                            <a:srgbClr val="1E2F5C"/>
-                          </a:solidFill>
-                          <a:latin typeface="Kanit"/>
-                        </a:rPr>
-                        <a:t>Chicken</a:t>
-                      </a:r>
-                    </a:p>
-                  </a:txBody>
-                  <a:tcPr marL="54864" marR="54864" marT="18288" marB="18288" anchor="ctr">
-                    <a:solidFill>
-                      <a:srgbClr val="F7F9FC"/>
-                    </a:solidFill>
-                  </a:tcPr>
-                </a:tc>
-                <a:tc>
-                  <a:txBody>
-                    <a:bodyPr wrap="square"/>
-                    <a:lstStyle/>
-                    <a:p>
-                      <a:pPr algn="l"/>
-                      <a:r>
-                        <a:rPr sz="1000" b="0">
-                          <a:solidFill>
-                            <a:srgbClr val="1E2F5C"/>
-                          </a:solidFill>
-                          <a:latin typeface="Kanit"/>
-                        </a:rPr>
-                        <a:t>Livestock</a:t>
-                      </a:r>
-                    </a:p>
-                  </a:txBody>
-                  <a:tcPr marL="54864" marR="54864" marT="18288" marB="18288" anchor="ctr">
-                    <a:solidFill>
-                      <a:srgbClr val="F7F9FC"/>
-                    </a:solidFill>
-                  </a:tcPr>
-                </a:tc>
-                <a:tc>
-                  <a:txBody>
-                    <a:bodyPr wrap="square"/>
-                    <a:lstStyle/>
-                    <a:p>
-                      <a:pPr algn="l"/>
-                      <a:r>
-                        <a:rPr sz="1000" b="0">
-                          <a:solidFill>
-                            <a:srgbClr val="1E2F5C"/>
-                          </a:solidFill>
-                          <a:latin typeface="Kanit"/>
-                        </a:rPr>
-                        <a:t>C · E</a:t>
-                      </a:r>
-                    </a:p>
-                  </a:txBody>
-                  <a:tcPr marL="54864" marR="54864" marT="18288" marB="18288" anchor="ctr">
-                    <a:solidFill>
-                      <a:srgbClr val="F7F9FC"/>
-                    </a:solidFill>
-                  </a:tcPr>
-                </a:tc>
-                <a:tc>
-                  <a:txBody>
-                    <a:bodyPr wrap="square"/>
-                    <a:lstStyle/>
-                    <a:p>
-                      <a:pPr algn="r"/>
-                      <a:r>
-                        <a:rPr sz="1000" b="1">
-                          <a:solidFill>
-                            <a:srgbClr val="CC0000"/>
-                          </a:solidFill>
-                          <a:latin typeface="Kanit"/>
-                        </a:rPr>
-                        <a:t>−0.1%</a:t>
-                      </a:r>
-                    </a:p>
-                  </a:txBody>
-                  <a:tcPr marL="54864" marR="54864" marT="18288" marB="18288" anchor="ctr">
-                    <a:solidFill>
-                      <a:srgbClr val="F7F9FC"/>
-                    </a:solidFill>
-                  </a:tcPr>
-                </a:tc>
-                <a:tc>
-                  <a:txBody>
-                    <a:bodyPr wrap="square"/>
-                    <a:lstStyle/>
-                    <a:p>
-                      <a:pPr algn="r"/>
-                      <a:r>
-                        <a:rPr sz="1000" b="1">
-                          <a:solidFill>
-                            <a:srgbClr val="CC0000"/>
-                          </a:solidFill>
-                          <a:latin typeface="Kanit"/>
-                        </a:rPr>
-                        <a:t>−1.9%</a:t>
-                      </a:r>
-                    </a:p>
-                  </a:txBody>
-                  <a:tcPr marL="54864" marR="54864" marT="18288" marB="18288" anchor="ctr">
-                    <a:solidFill>
-                      <a:srgbClr val="F7F9FC"/>
-                    </a:solidFill>
-                  </a:tcPr>
-                </a:tc>
-                <a:tc>
-                  <a:txBody>
-                    <a:bodyPr wrap="square"/>
-                    <a:lstStyle/>
-                    <a:p>
-                      <a:pPr algn="r"/>
-                      <a:r>
-                        <a:rPr sz="1000" b="1">
-                          <a:solidFill>
-                            <a:srgbClr val="7A4FE0"/>
-                          </a:solidFill>
-                          <a:latin typeface="Kanit"/>
-                        </a:rPr>
-                        <a:t>41,496</a:t>
-                      </a:r>
-                    </a:p>
-                  </a:txBody>
-                  <a:tcPr marL="54864" marR="54864" marT="18288" marB="18288" anchor="ctr">
-                    <a:solidFill>
-                      <a:srgbClr val="F7F9FC"/>
-                    </a:solidFill>
-                  </a:tcPr>
-                </a:tc>
-                <a:tc>
-                  <a:txBody>
-                    <a:bodyPr wrap="square"/>
-                    <a:lstStyle/>
-                    <a:p>
-                      <a:pPr algn="r"/>
-                      <a:r>
-                        <a:rPr sz="1000" b="0">
-                          <a:solidFill>
-                            <a:srgbClr val="606060"/>
-                          </a:solidFill>
-                          <a:latin typeface="Kanit"/>
-                        </a:rPr>
-                        <a:t>23%</a:t>
-                      </a:r>
-                    </a:p>
-                  </a:txBody>
-                  <a:tcPr marL="54864" marR="54864" marT="18288" marB="18288" anchor="ctr">
-                    <a:solidFill>
-                      <a:srgbClr val="F7F9FC"/>
                     </a:solidFill>
                   </a:tcPr>
                 </a:tc>
@@ -41169,7 +41006,7 @@
         </p:nvSpPr>
         <p:spPr>
           <a:xfrm>
-            <a:off x="411480" y="4523841"/>
+            <a:off x="411480" y="4269638"/>
             <a:ext cx="535747" cy="192024"/>
           </a:xfrm>
           <a:prstGeom prst="roundRect">
@@ -41215,7 +41052,7 @@
         </p:nvSpPr>
         <p:spPr>
           <a:xfrm>
-            <a:off x="411480" y="4553102"/>
+            <a:off x="411480" y="4298899"/>
             <a:ext cx="535747" cy="134112"/>
           </a:xfrm>
           <a:prstGeom prst="rect">
@@ -41254,7 +41091,7 @@
         </p:nvSpPr>
         <p:spPr>
           <a:xfrm>
-            <a:off x="1056955" y="4537557"/>
+            <a:off x="1056955" y="4283354"/>
             <a:ext cx="10720516" cy="617220"/>
           </a:xfrm>
           <a:prstGeom prst="rect">
@@ -41280,7 +41117,7 @@
                 </a:solidFill>
                 <a:latin typeface="Kanit"/>
               </a:rPr>
-              <a:t>Prices MEASURED — NABC daily quotes for the Thai farm gate, OCSB announced cane price; newest quote 2026-08-03. The six-month move is computed from NABC's own monthly series (thai_price_history, vintage 2026-08-02); a crop with no monthly series is marked, never estimated. Belt is an ESTIMATED read of where each commodity is produced, and belts overlap. Farming accounts are OURS and MEASURED — accounts whose recorded occupation is เกษตร in the belt provinces, from the 382,735-account tape at 2026-07; no cell below 30 accounts is published. They live where the crop grows; they are not confirmed to grow it.</a:t>
+              <a:t>Prices MEASURED — NABC daily quotes for the Thai farm gate, OCSB announced cane price; newest quote 2026-08-04. The six-month move is computed from NABC's own monthly series (thai_price_history, vintage 2026-08-02); a crop with no monthly series is marked, never estimated. Belt is an ESTIMATED read of where each commodity is produced, and belts overlap. Farming accounts are OURS and MEASURED — accounts whose recorded occupation is เกษตร in the belt provinces, from the 382,735-account tape at 2026-07; no cell below 30 accounts is published. They live where the crop grows; they are not confirmed to grow it.</a:t>
             </a:r>
           </a:p>
         </p:txBody>
@@ -41293,7 +41130,7 @@
         </p:nvSpPr>
         <p:spPr>
           <a:xfrm>
-            <a:off x="411480" y="5287365"/>
+            <a:off x="411480" y="5033162"/>
             <a:ext cx="11365992" cy="675767"/>
           </a:xfrm>
           <a:prstGeom prst="rect">
@@ -41337,7 +41174,7 @@
         </p:nvSpPr>
         <p:spPr>
           <a:xfrm>
-            <a:off x="411480" y="5287365"/>
+            <a:off x="411480" y="5033162"/>
             <a:ext cx="50292" cy="675767"/>
           </a:xfrm>
           <a:prstGeom prst="rect">
@@ -41381,7 +41218,7 @@
         </p:nvSpPr>
         <p:spPr>
           <a:xfrm>
-            <a:off x="630936" y="5433669"/>
+            <a:off x="630936" y="5179466"/>
             <a:ext cx="11036808" cy="158750"/>
           </a:xfrm>
           <a:prstGeom prst="rect">
@@ -41420,7 +41257,7 @@
         </p:nvSpPr>
         <p:spPr>
           <a:xfrm>
-            <a:off x="630936" y="5638139"/>
+            <a:off x="630936" y="5383936"/>
             <a:ext cx="11036808" cy="178689"/>
           </a:xfrm>
           <a:prstGeom prst="rect">
@@ -45168,7 +45005,7 @@
                 </a:solidFill>
                 <a:latin typeface="Kanit"/>
               </a:rPr>
-              <a:t>coconut −69.7%, pineapple −18.4%, sugarcane −17.9% year on year</a:t>
+              <a:t>coconut −69.3%, pineapple −18.4%, sugarcane −17.9% year on year</a:t>
             </a:r>
           </a:p>
         </p:txBody>
@@ -45294,7 +45131,7 @@
                 </a:solidFill>
                 <a:latin typeface="Kanit"/>
               </a:rPr>
-              <a:t>+15.5%</a:t>
+              <a:t>+15.6%</a:t>
             </a:r>
           </a:p>
         </p:txBody>
@@ -45768,7 +45605,7 @@
                           </a:solidFill>
                           <a:latin typeface="Kanit"/>
                         </a:rPr>
-                        <a:t>+5.8%</a:t>
+                        <a:t>+6.0%</a:t>
                       </a:r>
                     </a:p>
                   </a:txBody>
@@ -45837,7 +45674,7 @@
                           </a:solidFill>
                           <a:latin typeface="Kanit"/>
                         </a:rPr>
-                        <a:t>-65.2%</a:t>
+                        <a:t>-64.8%</a:t>
                       </a:r>
                     </a:p>
                   </a:txBody>
@@ -45908,7 +45745,7 @@
                           </a:solidFill>
                           <a:latin typeface="Kanit"/>
                         </a:rPr>
-                        <a:t>+14.3%</a:t>
+                        <a:t>+14.4%</a:t>
                       </a:r>
                     </a:p>
                   </a:txBody>
@@ -45977,7 +45814,7 @@
                           </a:solidFill>
                           <a:latin typeface="Kanit"/>
                         </a:rPr>
-                        <a:t>+9.2%</a:t>
+                        <a:t>+9.3%</a:t>
                       </a:r>
                     </a:p>
                   </a:txBody>
@@ -46048,7 +45885,7 @@
                           </a:solidFill>
                           <a:latin typeface="Kanit"/>
                         </a:rPr>
-                        <a:t>+15.7%</a:t>
+                        <a:t>+15.9%</a:t>
                       </a:r>
                     </a:p>
                   </a:txBody>
@@ -46117,7 +45954,7 @@
                           </a:solidFill>
                           <a:latin typeface="Kanit"/>
                         </a:rPr>
-                        <a:t>+8.0%</a:t>
+                        <a:t>+8.1%</a:t>
                       </a:r>
                     </a:p>
                   </a:txBody>
@@ -46257,7 +46094,7 @@
                           </a:solidFill>
                           <a:latin typeface="Kanit"/>
                         </a:rPr>
-                        <a:t>+9.8%</a:t>
+                        <a:t>+9.9%</a:t>
                       </a:r>
                     </a:p>
                   </a:txBody>
@@ -46328,7 +46165,7 @@
                           </a:solidFill>
                           <a:latin typeface="Kanit"/>
                         </a:rPr>
-                        <a:t>+36.4%</a:t>
+                        <a:t>+36.3%</a:t>
                       </a:r>
                     </a:p>
                   </a:txBody>
@@ -46397,7 +46234,7 @@
                           </a:solidFill>
                           <a:latin typeface="Kanit"/>
                         </a:rPr>
-                        <a:t>+29.9%</a:t>
+                        <a:t>+29.8%</a:t>
                       </a:r>
                     </a:p>
                   </a:txBody>
@@ -46573,8 +46410,8 @@
                 </a:solidFill>
                 <a:latin typeface="Kanit"/>
               </a:rPr>
-              <a:t>•  +41% rubber, +59% cassava, +28% palm, +13% rice at the farm gate. Crop income rose in every region.
-•  Four provinces fell — all coconut, all on the western gulf. Coconut price is down 70%.
+              <a:t>•  +41% rubber, +59% cassava, +27% palm, +13% rice at the farm gate. Crop income rose in every region.
+•  Four provinces fell — all coconut, all on the western gulf. Coconut price is down 69%.
 •  A gain on paper is not cash yet — the next table nets prices against cost.</a:t>
             </a:r>
           </a:p>
@@ -46876,7 +46713,7 @@
                           </a:solidFill>
                           <a:latin typeface="Kanit"/>
                         </a:rPr>
-                        <a:t>+15.5%</a:t>
+                        <a:t>+15.7%</a:t>
                       </a:r>
                     </a:p>
                   </a:txBody>
@@ -47039,7 +46876,7 @@
                           </a:solidFill>
                           <a:latin typeface="Kanit"/>
                         </a:rPr>
-                        <a:t>+20.1%</a:t>
+                        <a:t>+20.2%</a:t>
                       </a:r>
                     </a:p>
                   </a:txBody>
@@ -47202,7 +47039,7 @@
                           </a:solidFill>
                           <a:latin typeface="Kanit"/>
                         </a:rPr>
-                        <a:t>+10.0%</a:t>
+                        <a:t>+10.2%</a:t>
                       </a:r>
                     </a:p>
                   </a:txBody>
@@ -47365,7 +47202,7 @@
                           </a:solidFill>
                           <a:latin typeface="Kanit"/>
                         </a:rPr>
-                        <a:t>+34.9%</a:t>
+                        <a:t>+34.8%</a:t>
                       </a:r>
                     </a:p>
                   </a:txBody>
@@ -47528,7 +47365,7 @@
                           </a:solidFill>
                           <a:latin typeface="Kanit"/>
                         </a:rPr>
-                        <a:t>+15.9%</a:t>
+                        <a:t>+16.1%</a:t>
                       </a:r>
                     </a:p>
                   </a:txBody>
@@ -47691,7 +47528,7 @@
                           </a:solidFill>
                           <a:latin typeface="Kanit"/>
                         </a:rPr>
-                        <a:t>+14.8%</a:t>
+                        <a:t>+15.0%</a:t>
                       </a:r>
                     </a:p>
                   </a:txBody>
@@ -48318,7 +48155,7 @@
                 </a:solidFill>
                 <a:latin typeface="Kanit"/>
               </a:rPr>
-              <a:t>Year on year and six months disagree on direction for three of them. A single annual number can point the wrong way.</a:t>
+              <a:t>Year on year and six months disagree on direction for four of them. A single annual number can point the wrong way.</a:t>
             </a:r>
           </a:p>
         </p:txBody>
@@ -48513,7 +48350,7 @@
                 </a:solidFill>
                 <a:latin typeface="Kanit"/>
               </a:rPr>
-              <a:t>YoY −69.7%</a:t>
+              <a:t>YoY −69.3%</a:t>
             </a:r>
           </a:p>
         </p:txBody>
@@ -49149,7 +48986,7 @@
                 </a:solidFill>
                 <a:latin typeface="Kanit"/>
               </a:rPr>
-              <a:t>YoY −3.5%</a:t>
+              <a:t>YoY −3.2%</a:t>
             </a:r>
           </a:p>
         </p:txBody>
@@ -49467,7 +49304,7 @@
                 </a:solidFill>
                 <a:latin typeface="Kanit"/>
               </a:rPr>
-              <a:t>YoY −1.8%</a:t>
+              <a:t>YoY −1.5%</a:t>
             </a:r>
           </a:p>
         </p:txBody>
@@ -49707,6 +49544,324 @@
                 </a:solidFill>
                 <a:latin typeface="Kanit"/>
               </a:rPr>
+              <a:t>Eggs  ไข่ไก่</a:t>
+            </a:r>
+          </a:p>
+        </p:txBody>
+      </p:sp>
+      <p:sp>
+        <p:nvSpPr>
+          <p:cNvPr id="44" name="TextBox 43"/>
+          <p:cNvSpPr txBox="1"/>
+          <p:nvPr/>
+        </p:nvSpPr>
+        <p:spPr>
+          <a:xfrm>
+            <a:off x="9621316" y="2112263"/>
+            <a:ext cx="2156155" cy="125730"/>
+          </a:xfrm>
+          <a:prstGeom prst="rect">
+            <a:avLst/>
+          </a:prstGeom>
+          <a:noFill/>
+        </p:spPr>
+        <p:txBody>
+          <a:bodyPr wrap="square" lIns="0" rIns="0" tIns="0" bIns="0" anchor="t">
+            <a:noAutofit/>
+          </a:bodyPr>
+          <a:lstStyle/>
+          <a:p>
+            <a:pPr algn="l">
+              <a:lnSpc>
+                <a:spcPts val="990"/>
+              </a:lnSpc>
+            </a:pPr>
+            <a:r>
+              <a:rPr sz="750" b="0">
+                <a:solidFill>
+                  <a:srgbClr val="606060"/>
+                </a:solidFill>
+                <a:latin typeface="Kanit"/>
+              </a:rPr>
+              <a:t>฿338.24 /ร้อยฟอง · C·E</a:t>
+            </a:r>
+          </a:p>
+        </p:txBody>
+      </p:sp>
+      <p:sp>
+        <p:nvSpPr>
+          <p:cNvPr id="45" name="TextBox 44"/>
+          <p:cNvSpPr txBox="1"/>
+          <p:nvPr/>
+        </p:nvSpPr>
+        <p:spPr>
+          <a:xfrm>
+            <a:off x="9621316" y="2244851"/>
+            <a:ext cx="1078077" cy="134112"/>
+          </a:xfrm>
+          <a:prstGeom prst="rect">
+            <a:avLst/>
+          </a:prstGeom>
+          <a:noFill/>
+        </p:spPr>
+        <p:txBody>
+          <a:bodyPr wrap="square" lIns="0" rIns="0" tIns="0" bIns="0" anchor="t">
+            <a:noAutofit/>
+          </a:bodyPr>
+          <a:lstStyle/>
+          <a:p>
+            <a:pPr algn="l">
+              <a:lnSpc>
+                <a:spcPts val="1056"/>
+              </a:lnSpc>
+            </a:pPr>
+            <a:r>
+              <a:rPr sz="800" b="1">
+                <a:solidFill>
+                  <a:srgbClr val="606060"/>
+                </a:solidFill>
+                <a:latin typeface="Kanit"/>
+              </a:rPr>
+              <a:t>YoY +0.0%</a:t>
+            </a:r>
+          </a:p>
+        </p:txBody>
+      </p:sp>
+      <p:sp>
+        <p:nvSpPr>
+          <p:cNvPr id="46" name="TextBox 45"/>
+          <p:cNvSpPr txBox="1"/>
+          <p:nvPr/>
+        </p:nvSpPr>
+        <p:spPr>
+          <a:xfrm>
+            <a:off x="10699394" y="2244851"/>
+            <a:ext cx="1078077" cy="134112"/>
+          </a:xfrm>
+          <a:prstGeom prst="rect">
+            <a:avLst/>
+          </a:prstGeom>
+          <a:noFill/>
+        </p:spPr>
+        <p:txBody>
+          <a:bodyPr wrap="square" lIns="0" rIns="0" tIns="0" bIns="0" anchor="t">
+            <a:noAutofit/>
+          </a:bodyPr>
+          <a:lstStyle/>
+          <a:p>
+            <a:pPr algn="l">
+              <a:lnSpc>
+                <a:spcPts val="1056"/>
+              </a:lnSpc>
+            </a:pPr>
+            <a:r>
+              <a:rPr sz="800" b="1">
+                <a:solidFill>
+                  <a:srgbClr val="15795F"/>
+                </a:solidFill>
+                <a:latin typeface="Kanit"/>
+              </a:rPr>
+              <a:t>6m +5.0%</a:t>
+            </a:r>
+          </a:p>
+        </p:txBody>
+      </p:sp>
+      <p:sp>
+        <p:nvSpPr>
+          <p:cNvPr id="47" name="Rectangle 46"/>
+          <p:cNvSpPr/>
+          <p:nvPr/>
+        </p:nvSpPr>
+        <p:spPr>
+          <a:xfrm>
+            <a:off x="9621316" y="2400300"/>
+            <a:ext cx="2156155" cy="548640"/>
+          </a:xfrm>
+          <a:prstGeom prst="rect">
+            <a:avLst/>
+          </a:prstGeom>
+          <a:solidFill>
+            <a:srgbClr val="FBFCFE"/>
+          </a:solidFill>
+          <a:ln w="9525">
+            <a:solidFill>
+              <a:srgbClr val="D9DEE9"/>
+            </a:solidFill>
+          </a:ln>
+          <a:effectLst/>
+        </p:spPr>
+        <p:style>
+          <a:lnRef idx="1">
+            <a:schemeClr val="accent1"/>
+          </a:lnRef>
+          <a:fillRef idx="3">
+            <a:schemeClr val="accent1"/>
+          </a:fillRef>
+          <a:effectRef idx="2">
+            <a:schemeClr val="accent1"/>
+          </a:effectRef>
+          <a:fontRef idx="minor">
+            <a:schemeClr val="lt1"/>
+          </a:fontRef>
+        </p:style>
+        <p:txBody>
+          <a:bodyPr rtlCol="0" anchor="ctr" wrap="none"/>
+          <a:lstStyle/>
+          <a:p>
+            <a:pPr algn="ctr"/>
+          </a:p>
+        </p:txBody>
+      </p:sp>
+      <p:sp>
+        <p:nvSpPr>
+          <p:cNvPr id="48" name="Freeform 47"/>
+          <p:cNvSpPr/>
+          <p:nvPr/>
+        </p:nvSpPr>
+        <p:spPr>
+          <a:xfrm>
+            <a:off x="9667036" y="2446020"/>
+            <a:ext cx="2064715" cy="457200"/>
+          </a:xfrm>
+          <a:custGeom>
+            <a:avLst/>
+            <a:gdLst/>
+            <a:ahLst/>
+            <a:cxnLst/>
+            <a:rect l="l" t="t" r="r" b="b"/>
+            <a:pathLst>
+              <a:path w="2064715" h="457200">
+                <a:moveTo>
+                  <a:pt x="0" y="457200"/>
+                </a:moveTo>
+                <a:lnTo>
+                  <a:pt x="412943" y="391702"/>
+                </a:lnTo>
+                <a:lnTo>
+                  <a:pt x="825886" y="105409"/>
+                </a:lnTo>
+                <a:lnTo>
+                  <a:pt x="1238829" y="105409"/>
+                </a:lnTo>
+                <a:lnTo>
+                  <a:pt x="1651772" y="214144"/>
+                </a:lnTo>
+                <a:lnTo>
+                  <a:pt x="2064715" y="0"/>
+                </a:lnTo>
+              </a:path>
+            </a:pathLst>
+          </a:custGeom>
+          <a:noFill/>
+          <a:ln w="20320">
+            <a:solidFill>
+              <a:srgbClr val="15795F"/>
+            </a:solidFill>
+          </a:ln>
+          <a:effectLst/>
+        </p:spPr>
+        <p:style>
+          <a:lnRef idx="1">
+            <a:schemeClr val="accent1"/>
+          </a:lnRef>
+          <a:fillRef idx="3">
+            <a:schemeClr val="accent1"/>
+          </a:fillRef>
+          <a:effectRef idx="2">
+            <a:schemeClr val="accent1"/>
+          </a:effectRef>
+          <a:fontRef idx="minor">
+            <a:schemeClr val="lt1"/>
+          </a:fontRef>
+        </p:style>
+        <p:txBody>
+          <a:bodyPr rtlCol="0" anchor="ctr"/>
+          <a:lstStyle/>
+          <a:p>
+            <a:pPr algn="ctr"/>
+          </a:p>
+        </p:txBody>
+      </p:sp>
+      <p:sp>
+        <p:nvSpPr>
+          <p:cNvPr id="49" name="Rounded Rectangle 48"/>
+          <p:cNvSpPr/>
+          <p:nvPr/>
+        </p:nvSpPr>
+        <p:spPr>
+          <a:xfrm>
+            <a:off x="11690603" y="2404872"/>
+            <a:ext cx="82296" cy="82296"/>
+          </a:xfrm>
+          <a:prstGeom prst="roundRect">
+            <a:avLst>
+              <a:gd name="adj" fmla="val 50000"/>
+            </a:avLst>
+          </a:prstGeom>
+          <a:solidFill>
+            <a:srgbClr val="15795F"/>
+          </a:solidFill>
+          <a:ln>
+            <a:noFill/>
+          </a:ln>
+          <a:effectLst/>
+        </p:spPr>
+        <p:style>
+          <a:lnRef idx="1">
+            <a:schemeClr val="accent1"/>
+          </a:lnRef>
+          <a:fillRef idx="3">
+            <a:schemeClr val="accent1"/>
+          </a:fillRef>
+          <a:effectRef idx="2">
+            <a:schemeClr val="accent1"/>
+          </a:effectRef>
+          <a:fontRef idx="minor">
+            <a:schemeClr val="lt1"/>
+          </a:fontRef>
+        </p:style>
+        <p:txBody>
+          <a:bodyPr rtlCol="0" anchor="ctr" wrap="none"/>
+          <a:lstStyle/>
+          <a:p>
+            <a:pPr algn="ctr"/>
+          </a:p>
+        </p:txBody>
+      </p:sp>
+      <p:sp>
+        <p:nvSpPr>
+          <p:cNvPr id="50" name="TextBox 49"/>
+          <p:cNvSpPr txBox="1"/>
+          <p:nvPr/>
+        </p:nvSpPr>
+        <p:spPr>
+          <a:xfrm>
+            <a:off x="411480" y="3076956"/>
+            <a:ext cx="2156155" cy="150876"/>
+          </a:xfrm>
+          <a:prstGeom prst="rect">
+            <a:avLst/>
+          </a:prstGeom>
+          <a:noFill/>
+        </p:spPr>
+        <p:txBody>
+          <a:bodyPr wrap="square" lIns="0" rIns="0" tIns="0" bIns="0" anchor="t">
+            <a:noAutofit/>
+          </a:bodyPr>
+          <a:lstStyle/>
+          <a:p>
+            <a:pPr algn="l">
+              <a:lnSpc>
+                <a:spcPts val="1188"/>
+              </a:lnSpc>
+            </a:pPr>
+            <a:r>
+              <a:rPr sz="900" b="1">
+                <a:solidFill>
+                  <a:srgbClr val="1E2F5C"/>
+                </a:solidFill>
+                <a:latin typeface="Kanit"/>
+              </a:rPr>
               <a:t>Chicken  ไก่</a:t>
             </a:r>
           </a:p>
@@ -49714,13 +49869,13 @@
       </p:sp>
       <p:sp>
         <p:nvSpPr>
-          <p:cNvPr id="44" name="TextBox 43"/>
+          <p:cNvPr id="51" name="TextBox 50"/>
           <p:cNvSpPr txBox="1"/>
           <p:nvPr/>
         </p:nvSpPr>
         <p:spPr>
           <a:xfrm>
-            <a:off x="9621316" y="2112263"/>
+            <a:off x="411480" y="3218687"/>
             <a:ext cx="2156155" cy="125730"/>
           </a:xfrm>
           <a:prstGeom prst="rect">
@@ -49753,13 +49908,13 @@
       </p:sp>
       <p:sp>
         <p:nvSpPr>
-          <p:cNvPr id="45" name="TextBox 44"/>
+          <p:cNvPr id="52" name="TextBox 51"/>
           <p:cNvSpPr txBox="1"/>
           <p:nvPr/>
         </p:nvSpPr>
         <p:spPr>
           <a:xfrm>
-            <a:off x="9621316" y="2244851"/>
+            <a:off x="411480" y="3351275"/>
             <a:ext cx="1078077" cy="134112"/>
           </a:xfrm>
           <a:prstGeom prst="rect">
@@ -49781,24 +49936,24 @@
             <a:r>
               <a:rPr sz="800" b="1">
                 <a:solidFill>
-                  <a:srgbClr val="CC0000"/>
+                  <a:srgbClr val="15795F"/>
                 </a:solidFill>
                 <a:latin typeface="Kanit"/>
               </a:rPr>
-              <a:t>YoY −0.1%</a:t>
+              <a:t>YoY +0.1%</a:t>
             </a:r>
           </a:p>
         </p:txBody>
       </p:sp>
       <p:sp>
         <p:nvSpPr>
-          <p:cNvPr id="46" name="TextBox 45"/>
+          <p:cNvPr id="53" name="TextBox 52"/>
           <p:cNvSpPr txBox="1"/>
           <p:nvPr/>
         </p:nvSpPr>
         <p:spPr>
           <a:xfrm>
-            <a:off x="10699394" y="2244851"/>
+            <a:off x="1489557" y="3351275"/>
             <a:ext cx="1078077" cy="134112"/>
           </a:xfrm>
           <a:prstGeom prst="rect">
@@ -49831,13 +49986,13 @@
       </p:sp>
       <p:sp>
         <p:nvSpPr>
-          <p:cNvPr id="47" name="Rectangle 46"/>
+          <p:cNvPr id="54" name="Rectangle 53"/>
           <p:cNvSpPr/>
           <p:nvPr/>
         </p:nvSpPr>
         <p:spPr>
           <a:xfrm>
-            <a:off x="9621316" y="2400300"/>
+            <a:off x="411480" y="3506724"/>
             <a:ext cx="2156155" cy="548640"/>
           </a:xfrm>
           <a:prstGeom prst="rect">
@@ -49877,13 +50032,13 @@
       </p:sp>
       <p:sp>
         <p:nvSpPr>
-          <p:cNvPr id="48" name="Freeform 47"/>
+          <p:cNvPr id="55" name="Freeform 54"/>
           <p:cNvSpPr/>
           <p:nvPr/>
         </p:nvSpPr>
         <p:spPr>
           <a:xfrm>
-            <a:off x="9667036" y="2446020"/>
+            <a:off x="457200" y="3552444"/>
             <a:ext cx="2064715" cy="457200"/>
           </a:xfrm>
           <a:custGeom>
@@ -49947,13 +50102,13 @@
       </p:sp>
       <p:sp>
         <p:nvSpPr>
-          <p:cNvPr id="49" name="Rounded Rectangle 48"/>
+          <p:cNvPr id="56" name="Rounded Rectangle 55"/>
           <p:cNvSpPr/>
           <p:nvPr/>
         </p:nvSpPr>
         <p:spPr>
           <a:xfrm>
-            <a:off x="11690603" y="2680208"/>
+            <a:off x="2480767" y="3786632"/>
             <a:ext cx="82296" cy="82296"/>
           </a:xfrm>
           <a:prstGeom prst="roundRect">
@@ -49993,13 +50148,13 @@
       </p:sp>
       <p:sp>
         <p:nvSpPr>
-          <p:cNvPr id="50" name="TextBox 49"/>
+          <p:cNvPr id="57" name="TextBox 56"/>
           <p:cNvSpPr txBox="1"/>
           <p:nvPr/>
         </p:nvSpPr>
         <p:spPr>
           <a:xfrm>
-            <a:off x="411480" y="3076956"/>
+            <a:off x="2713939" y="3076956"/>
             <a:ext cx="2156155" cy="150876"/>
           </a:xfrm>
           <a:prstGeom prst="rect">
@@ -50025,20 +50180,20 @@
                 </a:solidFill>
                 <a:latin typeface="Kanit"/>
               </a:rPr>
-              <a:t>Eggs  ไข่ไก่</a:t>
+              <a:t>Maize  ข้าวโพดเลี้ยงสัตว์</a:t>
             </a:r>
           </a:p>
         </p:txBody>
       </p:sp>
       <p:sp>
         <p:nvSpPr>
-          <p:cNvPr id="51" name="TextBox 50"/>
+          <p:cNvPr id="58" name="TextBox 57"/>
           <p:cNvSpPr txBox="1"/>
           <p:nvPr/>
         </p:nvSpPr>
         <p:spPr>
           <a:xfrm>
-            <a:off x="411480" y="3218687"/>
+            <a:off x="2713939" y="3218687"/>
             <a:ext cx="2156155" cy="125730"/>
           </a:xfrm>
           <a:prstGeom prst="rect">
@@ -50064,59 +50219,20 @@
                 </a:solidFill>
                 <a:latin typeface="Kanit"/>
               </a:rPr>
-              <a:t>฿338.24 /ร้อยฟอง · C·E</a:t>
+              <a:t>฿10.76 /กก. · North</a:t>
             </a:r>
           </a:p>
         </p:txBody>
       </p:sp>
       <p:sp>
         <p:nvSpPr>
-          <p:cNvPr id="52" name="TextBox 51"/>
+          <p:cNvPr id="59" name="TextBox 58"/>
           <p:cNvSpPr txBox="1"/>
           <p:nvPr/>
         </p:nvSpPr>
         <p:spPr>
           <a:xfrm>
-            <a:off x="411480" y="3351275"/>
-            <a:ext cx="1078077" cy="134112"/>
-          </a:xfrm>
-          <a:prstGeom prst="rect">
-            <a:avLst/>
-          </a:prstGeom>
-          <a:noFill/>
-        </p:spPr>
-        <p:txBody>
-          <a:bodyPr wrap="square" lIns="0" rIns="0" tIns="0" bIns="0" anchor="t">
-            <a:noAutofit/>
-          </a:bodyPr>
-          <a:lstStyle/>
-          <a:p>
-            <a:pPr algn="l">
-              <a:lnSpc>
-                <a:spcPts val="1056"/>
-              </a:lnSpc>
-            </a:pPr>
-            <a:r>
-              <a:rPr sz="800" b="1">
-                <a:solidFill>
-                  <a:srgbClr val="606060"/>
-                </a:solidFill>
-                <a:latin typeface="Kanit"/>
-              </a:rPr>
-              <a:t>YoY +0.0%</a:t>
-            </a:r>
-          </a:p>
-        </p:txBody>
-      </p:sp>
-      <p:sp>
-        <p:nvSpPr>
-          <p:cNvPr id="53" name="TextBox 52"/>
-          <p:cNvSpPr txBox="1"/>
-          <p:nvPr/>
-        </p:nvSpPr>
-        <p:spPr>
-          <a:xfrm>
-            <a:off x="1489557" y="3351275"/>
+            <a:off x="2713939" y="3351275"/>
             <a:ext cx="1078077" cy="134112"/>
           </a:xfrm>
           <a:prstGeom prst="rect">
@@ -50142,20 +50258,59 @@
                 </a:solidFill>
                 <a:latin typeface="Kanit"/>
               </a:rPr>
-              <a:t>6m +5.0%</a:t>
+              <a:t>YoY +13.3%</a:t>
             </a:r>
           </a:p>
         </p:txBody>
       </p:sp>
       <p:sp>
         <p:nvSpPr>
-          <p:cNvPr id="54" name="Rectangle 53"/>
+          <p:cNvPr id="60" name="TextBox 59"/>
+          <p:cNvSpPr txBox="1"/>
+          <p:nvPr/>
+        </p:nvSpPr>
+        <p:spPr>
+          <a:xfrm>
+            <a:off x="3792016" y="3351275"/>
+            <a:ext cx="1078077" cy="134112"/>
+          </a:xfrm>
+          <a:prstGeom prst="rect">
+            <a:avLst/>
+          </a:prstGeom>
+          <a:noFill/>
+        </p:spPr>
+        <p:txBody>
+          <a:bodyPr wrap="square" lIns="0" rIns="0" tIns="0" bIns="0" anchor="t">
+            <a:noAutofit/>
+          </a:bodyPr>
+          <a:lstStyle/>
+          <a:p>
+            <a:pPr algn="l">
+              <a:lnSpc>
+                <a:spcPts val="1056"/>
+              </a:lnSpc>
+            </a:pPr>
+            <a:r>
+              <a:rPr sz="800" b="1">
+                <a:solidFill>
+                  <a:srgbClr val="15795F"/>
+                </a:solidFill>
+                <a:latin typeface="Kanit"/>
+              </a:rPr>
+              <a:t>6m +22.1%</a:t>
+            </a:r>
+          </a:p>
+        </p:txBody>
+      </p:sp>
+      <p:sp>
+        <p:nvSpPr>
+          <p:cNvPr id="61" name="Rectangle 60"/>
           <p:cNvSpPr/>
           <p:nvPr/>
         </p:nvSpPr>
         <p:spPr>
           <a:xfrm>
-            <a:off x="411480" y="3506724"/>
+            <a:off x="2713939" y="3506724"/>
             <a:ext cx="2156155" cy="548640"/>
           </a:xfrm>
           <a:prstGeom prst="rect">
@@ -50195,13 +50350,13 @@
       </p:sp>
       <p:sp>
         <p:nvSpPr>
-          <p:cNvPr id="55" name="Freeform 54"/>
+          <p:cNvPr id="62" name="Freeform 61"/>
           <p:cNvSpPr/>
           <p:nvPr/>
         </p:nvSpPr>
         <p:spPr>
           <a:xfrm>
-            <a:off x="457200" y="3552444"/>
+            <a:off x="2759659" y="3552444"/>
             <a:ext cx="2064715" cy="457200"/>
           </a:xfrm>
           <a:custGeom>
@@ -50216,19 +50371,19 @@
                   <a:pt x="0" y="457200"/>
                 </a:moveTo>
                 <a:lnTo>
-                  <a:pt x="412943" y="391702"/>
-                </a:lnTo>
-                <a:lnTo>
-                  <a:pt x="825886" y="105409"/>
-                </a:lnTo>
-                <a:lnTo>
-                  <a:pt x="1238829" y="105409"/>
-                </a:lnTo>
-                <a:lnTo>
-                  <a:pt x="1651772" y="214144"/>
-                </a:lnTo>
-                <a:lnTo>
-                  <a:pt x="2064715" y="0"/>
+                  <a:pt x="412943" y="415234"/>
+                </a:lnTo>
+                <a:lnTo>
+                  <a:pt x="825886" y="315843"/>
+                </a:lnTo>
+                <a:lnTo>
+                  <a:pt x="1238829" y="81721"/>
+                </a:lnTo>
+                <a:lnTo>
+                  <a:pt x="1651772" y="0"/>
+                </a:lnTo>
+                <a:lnTo>
+                  <a:pt x="2064715" y="46382"/>
                 </a:lnTo>
               </a:path>
             </a:pathLst>
@@ -50265,13 +50420,13 @@
       </p:sp>
       <p:sp>
         <p:nvSpPr>
-          <p:cNvPr id="56" name="Rounded Rectangle 55"/>
+          <p:cNvPr id="63" name="Rounded Rectangle 62"/>
           <p:cNvSpPr/>
           <p:nvPr/>
         </p:nvSpPr>
         <p:spPr>
           <a:xfrm>
-            <a:off x="2480767" y="3511296"/>
+            <a:off x="4783226" y="3557678"/>
             <a:ext cx="82296" cy="82296"/>
           </a:xfrm>
           <a:prstGeom prst="roundRect">
@@ -50311,13 +50466,13 @@
       </p:sp>
       <p:sp>
         <p:nvSpPr>
-          <p:cNvPr id="57" name="TextBox 56"/>
+          <p:cNvPr id="64" name="TextBox 63"/>
           <p:cNvSpPr txBox="1"/>
           <p:nvPr/>
         </p:nvSpPr>
         <p:spPr>
           <a:xfrm>
-            <a:off x="2713939" y="3076956"/>
+            <a:off x="5016398" y="3076956"/>
             <a:ext cx="2156155" cy="150876"/>
           </a:xfrm>
           <a:prstGeom prst="rect">
@@ -50350,13 +50505,13 @@
       </p:sp>
       <p:sp>
         <p:nvSpPr>
-          <p:cNvPr id="58" name="TextBox 57"/>
+          <p:cNvPr id="65" name="TextBox 64"/>
           <p:cNvSpPr txBox="1"/>
           <p:nvPr/>
         </p:nvSpPr>
         <p:spPr>
           <a:xfrm>
-            <a:off x="2713939" y="3218687"/>
+            <a:off x="5016398" y="3218687"/>
             <a:ext cx="2156155" cy="125730"/>
           </a:xfrm>
           <a:prstGeom prst="rect">
@@ -50389,13 +50544,13 @@
       </p:sp>
       <p:sp>
         <p:nvSpPr>
-          <p:cNvPr id="59" name="TextBox 58"/>
+          <p:cNvPr id="66" name="TextBox 65"/>
           <p:cNvSpPr txBox="1"/>
           <p:nvPr/>
         </p:nvSpPr>
         <p:spPr>
           <a:xfrm>
-            <a:off x="2713939" y="3351275"/>
+            <a:off x="5016398" y="3351275"/>
             <a:ext cx="1078077" cy="134112"/>
           </a:xfrm>
           <a:prstGeom prst="rect">
@@ -50421,20 +50576,20 @@
                 </a:solidFill>
                 <a:latin typeface="Kanit"/>
               </a:rPr>
-              <a:t>YoY +13.2%</a:t>
+              <a:t>YoY +13.4%</a:t>
             </a:r>
           </a:p>
         </p:txBody>
       </p:sp>
       <p:sp>
         <p:nvSpPr>
-          <p:cNvPr id="60" name="TextBox 59"/>
+          <p:cNvPr id="67" name="TextBox 66"/>
           <p:cNvSpPr txBox="1"/>
           <p:nvPr/>
         </p:nvSpPr>
         <p:spPr>
           <a:xfrm>
-            <a:off x="3792016" y="3351275"/>
+            <a:off x="6094475" y="3351275"/>
             <a:ext cx="1078077" cy="134112"/>
           </a:xfrm>
           <a:prstGeom prst="rect">
@@ -50467,13 +50622,13 @@
       </p:sp>
       <p:sp>
         <p:nvSpPr>
-          <p:cNvPr id="61" name="Rectangle 60"/>
+          <p:cNvPr id="68" name="Rectangle 67"/>
           <p:cNvSpPr/>
           <p:nvPr/>
         </p:nvSpPr>
         <p:spPr>
           <a:xfrm>
-            <a:off x="2713939" y="3506724"/>
+            <a:off x="5016398" y="3506724"/>
             <a:ext cx="2156155" cy="548640"/>
           </a:xfrm>
           <a:prstGeom prst="rect">
@@ -50513,13 +50668,13 @@
       </p:sp>
       <p:sp>
         <p:nvSpPr>
-          <p:cNvPr id="62" name="Freeform 61"/>
+          <p:cNvPr id="69" name="Freeform 68"/>
           <p:cNvSpPr/>
           <p:nvPr/>
         </p:nvSpPr>
         <p:spPr>
           <a:xfrm>
-            <a:off x="2759659" y="3552444"/>
+            <a:off x="5062118" y="3552444"/>
             <a:ext cx="2064715" cy="457200"/>
           </a:xfrm>
           <a:custGeom>
@@ -50583,331 +50738,13 @@
       </p:sp>
       <p:sp>
         <p:nvSpPr>
-          <p:cNvPr id="63" name="Rounded Rectangle 62"/>
-          <p:cNvSpPr/>
-          <p:nvPr/>
-        </p:nvSpPr>
-        <p:spPr>
-          <a:xfrm>
-            <a:off x="4783226" y="3511296"/>
-            <a:ext cx="82296" cy="82296"/>
-          </a:xfrm>
-          <a:prstGeom prst="roundRect">
-            <a:avLst>
-              <a:gd name="adj" fmla="val 50000"/>
-            </a:avLst>
-          </a:prstGeom>
-          <a:solidFill>
-            <a:srgbClr val="15795F"/>
-          </a:solidFill>
-          <a:ln>
-            <a:noFill/>
-          </a:ln>
-          <a:effectLst/>
-        </p:spPr>
-        <p:style>
-          <a:lnRef idx="1">
-            <a:schemeClr val="accent1"/>
-          </a:lnRef>
-          <a:fillRef idx="3">
-            <a:schemeClr val="accent1"/>
-          </a:fillRef>
-          <a:effectRef idx="2">
-            <a:schemeClr val="accent1"/>
-          </a:effectRef>
-          <a:fontRef idx="minor">
-            <a:schemeClr val="lt1"/>
-          </a:fontRef>
-        </p:style>
-        <p:txBody>
-          <a:bodyPr rtlCol="0" anchor="ctr" wrap="none"/>
-          <a:lstStyle/>
-          <a:p>
-            <a:pPr algn="ctr"/>
-          </a:p>
-        </p:txBody>
-      </p:sp>
-      <p:sp>
-        <p:nvSpPr>
-          <p:cNvPr id="64" name="TextBox 63"/>
-          <p:cNvSpPr txBox="1"/>
-          <p:nvPr/>
-        </p:nvSpPr>
-        <p:spPr>
-          <a:xfrm>
-            <a:off x="5016398" y="3076956"/>
-            <a:ext cx="2156155" cy="150876"/>
-          </a:xfrm>
-          <a:prstGeom prst="rect">
-            <a:avLst/>
-          </a:prstGeom>
-          <a:noFill/>
-        </p:spPr>
-        <p:txBody>
-          <a:bodyPr wrap="square" lIns="0" rIns="0" tIns="0" bIns="0" anchor="t">
-            <a:noAutofit/>
-          </a:bodyPr>
-          <a:lstStyle/>
-          <a:p>
-            <a:pPr algn="l">
-              <a:lnSpc>
-                <a:spcPts val="1188"/>
-              </a:lnSpc>
-            </a:pPr>
-            <a:r>
-              <a:rPr sz="900" b="1">
-                <a:solidFill>
-                  <a:srgbClr val="1E2F5C"/>
-                </a:solidFill>
-                <a:latin typeface="Kanit"/>
-              </a:rPr>
-              <a:t>Maize  ข้าวโพดเลี้ยงสัตว์</a:t>
-            </a:r>
-          </a:p>
-        </p:txBody>
-      </p:sp>
-      <p:sp>
-        <p:nvSpPr>
-          <p:cNvPr id="65" name="TextBox 64"/>
-          <p:cNvSpPr txBox="1"/>
-          <p:nvPr/>
-        </p:nvSpPr>
-        <p:spPr>
-          <a:xfrm>
-            <a:off x="5016398" y="3218687"/>
-            <a:ext cx="2156155" cy="125730"/>
-          </a:xfrm>
-          <a:prstGeom prst="rect">
-            <a:avLst/>
-          </a:prstGeom>
-          <a:noFill/>
-        </p:spPr>
-        <p:txBody>
-          <a:bodyPr wrap="square" lIns="0" rIns="0" tIns="0" bIns="0" anchor="t">
-            <a:noAutofit/>
-          </a:bodyPr>
-          <a:lstStyle/>
-          <a:p>
-            <a:pPr algn="l">
-              <a:lnSpc>
-                <a:spcPts val="990"/>
-              </a:lnSpc>
-            </a:pPr>
-            <a:r>
-              <a:rPr sz="750" b="0">
-                <a:solidFill>
-                  <a:srgbClr val="606060"/>
-                </a:solidFill>
-                <a:latin typeface="Kanit"/>
-              </a:rPr>
-              <a:t>฿10.76 /กก. · North</a:t>
-            </a:r>
-          </a:p>
-        </p:txBody>
-      </p:sp>
-      <p:sp>
-        <p:nvSpPr>
-          <p:cNvPr id="66" name="TextBox 65"/>
-          <p:cNvSpPr txBox="1"/>
-          <p:nvPr/>
-        </p:nvSpPr>
-        <p:spPr>
-          <a:xfrm>
-            <a:off x="5016398" y="3351275"/>
-            <a:ext cx="1078077" cy="134112"/>
-          </a:xfrm>
-          <a:prstGeom prst="rect">
-            <a:avLst/>
-          </a:prstGeom>
-          <a:noFill/>
-        </p:spPr>
-        <p:txBody>
-          <a:bodyPr wrap="square" lIns="0" rIns="0" tIns="0" bIns="0" anchor="t">
-            <a:noAutofit/>
-          </a:bodyPr>
-          <a:lstStyle/>
-          <a:p>
-            <a:pPr algn="l">
-              <a:lnSpc>
-                <a:spcPts val="1056"/>
-              </a:lnSpc>
-            </a:pPr>
-            <a:r>
-              <a:rPr sz="800" b="1">
-                <a:solidFill>
-                  <a:srgbClr val="15795F"/>
-                </a:solidFill>
-                <a:latin typeface="Kanit"/>
-              </a:rPr>
-              <a:t>YoY +13.4%</a:t>
-            </a:r>
-          </a:p>
-        </p:txBody>
-      </p:sp>
-      <p:sp>
-        <p:nvSpPr>
-          <p:cNvPr id="67" name="TextBox 66"/>
-          <p:cNvSpPr txBox="1"/>
-          <p:nvPr/>
-        </p:nvSpPr>
-        <p:spPr>
-          <a:xfrm>
-            <a:off x="6094475" y="3351275"/>
-            <a:ext cx="1078077" cy="134112"/>
-          </a:xfrm>
-          <a:prstGeom prst="rect">
-            <a:avLst/>
-          </a:prstGeom>
-          <a:noFill/>
-        </p:spPr>
-        <p:txBody>
-          <a:bodyPr wrap="square" lIns="0" rIns="0" tIns="0" bIns="0" anchor="t">
-            <a:noAutofit/>
-          </a:bodyPr>
-          <a:lstStyle/>
-          <a:p>
-            <a:pPr algn="l">
-              <a:lnSpc>
-                <a:spcPts val="1056"/>
-              </a:lnSpc>
-            </a:pPr>
-            <a:r>
-              <a:rPr sz="800" b="1">
-                <a:solidFill>
-                  <a:srgbClr val="15795F"/>
-                </a:solidFill>
-                <a:latin typeface="Kanit"/>
-              </a:rPr>
-              <a:t>6m +22.1%</a:t>
-            </a:r>
-          </a:p>
-        </p:txBody>
-      </p:sp>
-      <p:sp>
-        <p:nvSpPr>
-          <p:cNvPr id="68" name="Rectangle 67"/>
-          <p:cNvSpPr/>
-          <p:nvPr/>
-        </p:nvSpPr>
-        <p:spPr>
-          <a:xfrm>
-            <a:off x="5016398" y="3506724"/>
-            <a:ext cx="2156155" cy="548640"/>
-          </a:xfrm>
-          <a:prstGeom prst="rect">
-            <a:avLst/>
-          </a:prstGeom>
-          <a:solidFill>
-            <a:srgbClr val="FBFCFE"/>
-          </a:solidFill>
-          <a:ln w="9525">
-            <a:solidFill>
-              <a:srgbClr val="D9DEE9"/>
-            </a:solidFill>
-          </a:ln>
-          <a:effectLst/>
-        </p:spPr>
-        <p:style>
-          <a:lnRef idx="1">
-            <a:schemeClr val="accent1"/>
-          </a:lnRef>
-          <a:fillRef idx="3">
-            <a:schemeClr val="accent1"/>
-          </a:fillRef>
-          <a:effectRef idx="2">
-            <a:schemeClr val="accent1"/>
-          </a:effectRef>
-          <a:fontRef idx="minor">
-            <a:schemeClr val="lt1"/>
-          </a:fontRef>
-        </p:style>
-        <p:txBody>
-          <a:bodyPr rtlCol="0" anchor="ctr" wrap="none"/>
-          <a:lstStyle/>
-          <a:p>
-            <a:pPr algn="ctr"/>
-          </a:p>
-        </p:txBody>
-      </p:sp>
-      <p:sp>
-        <p:nvSpPr>
-          <p:cNvPr id="69" name="Freeform 68"/>
-          <p:cNvSpPr/>
-          <p:nvPr/>
-        </p:nvSpPr>
-        <p:spPr>
-          <a:xfrm>
-            <a:off x="5062118" y="3552444"/>
-            <a:ext cx="2064715" cy="457200"/>
-          </a:xfrm>
-          <a:custGeom>
-            <a:avLst/>
-            <a:gdLst/>
-            <a:ahLst/>
-            <a:cxnLst/>
-            <a:rect l="l" t="t" r="r" b="b"/>
-            <a:pathLst>
-              <a:path w="2064715" h="457200">
-                <a:moveTo>
-                  <a:pt x="0" y="457200"/>
-                </a:moveTo>
-                <a:lnTo>
-                  <a:pt x="412943" y="415234"/>
-                </a:lnTo>
-                <a:lnTo>
-                  <a:pt x="825886" y="315843"/>
-                </a:lnTo>
-                <a:lnTo>
-                  <a:pt x="1238829" y="81721"/>
-                </a:lnTo>
-                <a:lnTo>
-                  <a:pt x="1651772" y="0"/>
-                </a:lnTo>
-                <a:lnTo>
-                  <a:pt x="2064715" y="46382"/>
-                </a:lnTo>
-              </a:path>
-            </a:pathLst>
-          </a:custGeom>
-          <a:noFill/>
-          <a:ln w="20320">
-            <a:solidFill>
-              <a:srgbClr val="15795F"/>
-            </a:solidFill>
-          </a:ln>
-          <a:effectLst/>
-        </p:spPr>
-        <p:style>
-          <a:lnRef idx="1">
-            <a:schemeClr val="accent1"/>
-          </a:lnRef>
-          <a:fillRef idx="3">
-            <a:schemeClr val="accent1"/>
-          </a:fillRef>
-          <a:effectRef idx="2">
-            <a:schemeClr val="accent1"/>
-          </a:effectRef>
-          <a:fontRef idx="minor">
-            <a:schemeClr val="lt1"/>
-          </a:fontRef>
-        </p:style>
-        <p:txBody>
-          <a:bodyPr rtlCol="0" anchor="ctr"/>
-          <a:lstStyle/>
-          <a:p>
-            <a:pPr algn="ctr"/>
-          </a:p>
-        </p:txBody>
-      </p:sp>
-      <p:sp>
-        <p:nvSpPr>
           <p:cNvPr id="70" name="Rounded Rectangle 69"/>
           <p:cNvSpPr/>
           <p:nvPr/>
         </p:nvSpPr>
         <p:spPr>
           <a:xfrm>
-            <a:off x="7085685" y="3557678"/>
+            <a:off x="7085685" y="3511296"/>
             <a:ext cx="82296" cy="82296"/>
           </a:xfrm>
           <a:prstGeom prst="roundRect">
@@ -51057,7 +50894,7 @@
                 </a:solidFill>
                 <a:latin typeface="Kanit"/>
               </a:rPr>
-              <a:t>YoY +27.5%</a:t>
+              <a:t>YoY +27.3%</a:t>
             </a:r>
           </a:p>
         </p:txBody>
@@ -51375,7 +51212,7 @@
                 </a:solidFill>
                 <a:latin typeface="Kanit"/>
               </a:rPr>
-              <a:t>YoY +41.2%</a:t>
+              <a:t>YoY +41.1%</a:t>
             </a:r>
           </a:p>
         </p:txBody>
@@ -51693,7 +51530,7 @@
                 </a:solidFill>
                 <a:latin typeface="Kanit"/>
               </a:rPr>
-              <a:t>YoY +58.8%</a:t>
+              <a:t>YoY +59.3%</a:t>
             </a:r>
           </a:p>
         </p:txBody>
@@ -52011,7 +51848,7 @@
                 </a:solidFill>
                 <a:latin typeface="Kanit"/>
               </a:rPr>
-              <a:t>YoY +75.6%</a:t>
+              <a:t>YoY +94.7%</a:t>
             </a:r>
           </a:p>
         </p:txBody>
@@ -52375,7 +52212,7 @@
                 </a:solidFill>
                 <a:latin typeface="Kanit"/>
               </a:rPr>
-              <a:t>Farm-gate prices MEASURED — NABC daily quotes, monthly means, in baht as published (no currency conversion); newest quote 2026-08-03, history vintage 2026-08-02. Farm gate (ราคาที่เกษตรกรขายได้) is what the grower is paid at first sale, before trading, milling or transport take a cut — not the world index and not a supermarket price. Belts are an ESTIMATED read of where each commodity is produced, and they overlap. Sugar is OCSB's announced season price, one point a year, so it has no six-month move to show.</a:t>
+              <a:t>Farm-gate prices MEASURED — NABC daily quotes, monthly means, in baht as published (no currency conversion); newest quote 2026-08-04, history vintage 2026-08-02. Farm gate (ราคาที่เกษตรกรขายได้) is what the grower is paid at first sale, before trading, milling or transport take a cut — not the world index and not a supermarket price. Belts are an ESTIMATED read of where each commodity is produced, and they overlap. Sugar is OCSB's announced season price, one point a year, so it has no six-month move to show.</a:t>
             </a:r>
           </a:p>
         </p:txBody>

--- a/docs/decks/mcom-2026-08-05-macro.pptx
+++ b/docs/decks/mcom-2026-08-05-macro.pptx
@@ -6240,7 +6240,7 @@
                 </a:solidFill>
                 <a:latin typeface="Kanit"/>
               </a:rPr>
-              <a:t>132</a:t>
+              <a:t>167</a:t>
             </a:r>
           </a:p>
         </p:txBody>
@@ -6279,7 +6279,7 @@
                 </a:solidFill>
                 <a:latin typeface="Kanit"/>
               </a:rPr>
-              <a:t>of 795 (16.6%) · live · 2026-08-05</a:t>
+              <a:t>of 796 (21.0%) · live · 2026-08-09</a:t>
             </a:r>
           </a:p>
         </p:txBody>
@@ -6405,7 +6405,7 @@
                 </a:solidFill>
                 <a:latin typeface="Kanit"/>
               </a:rPr>
-              <a:t>29</a:t>
+              <a:t>20</a:t>
             </a:r>
           </a:p>
         </p:txBody>
@@ -6444,7 +6444,7 @@
                 </a:solidFill>
                 <a:latin typeface="Kanit"/>
               </a:rPr>
-              <a:t>latest daily reading · 2026-08-05</a:t>
+              <a:t>latest daily reading · 2026-08-09</a:t>
             </a:r>
           </a:p>
         </p:txBody>
@@ -7882,7 +7882,7 @@
                           </a:solidFill>
                           <a:latin typeface="Kanit"/>
                         </a:rPr>
-                        <a:t>นราธิวาส</a:t>
+                        <a:t>พะเยา</a:t>
                       </a:r>
                     </a:p>
                   </a:txBody>
@@ -7905,7 +7905,7 @@
                           </a:solidFill>
                           <a:latin typeface="Kanit"/>
                         </a:rPr>
-                        <a:t>66</a:t>
+                        <a:t>121</a:t>
                       </a:r>
                     </a:p>
                   </a:txBody>
@@ -7928,7 +7928,7 @@
                           </a:solidFill>
                           <a:latin typeface="Kanit"/>
                         </a:rPr>
-                        <a:t>56</a:t>
+                        <a:t>82</a:t>
                       </a:r>
                     </a:p>
                   </a:txBody>
@@ -7951,7 +7951,7 @@
                           </a:solidFill>
                           <a:latin typeface="Kanit"/>
                         </a:rPr>
-                        <a:t>4.5%</a:t>
+                        <a:t>24.8%</a:t>
                       </a:r>
                     </a:p>
                   </a:txBody>
@@ -7974,7 +7974,7 @@
                           </a:solidFill>
                           <a:latin typeface="Kanit"/>
                         </a:rPr>
-                        <a:t>5/10</a:t>
+                        <a:t>5/13</a:t>
                       </a:r>
                     </a:p>
                   </a:txBody>
@@ -8022,7 +8022,7 @@
                           </a:solidFill>
                           <a:latin typeface="Kanit"/>
                         </a:rPr>
-                        <a:t>ยโสธร</a:t>
+                        <a:t>น่าน</a:t>
                       </a:r>
                     </a:p>
                   </a:txBody>
@@ -8045,7 +8045,7 @@
                           </a:solidFill>
                           <a:latin typeface="Kanit"/>
                         </a:rPr>
-                        <a:t>16</a:t>
+                        <a:t>221</a:t>
                       </a:r>
                     </a:p>
                   </a:txBody>
@@ -8068,7 +8068,7 @@
                           </a:solidFill>
                           <a:latin typeface="Kanit"/>
                         </a:rPr>
-                        <a:t>27</a:t>
+                        <a:t>134</a:t>
                       </a:r>
                     </a:p>
                   </a:txBody>
@@ -8087,11 +8087,11 @@
                       <a:r>
                         <a:rPr sz="900" b="1">
                           <a:solidFill>
-                            <a:srgbClr val="606060"/>
-                          </a:solidFill>
-                          <a:latin typeface="Kanit"/>
-                        </a:rPr>
-                        <a:t>0.0%</a:t>
+                            <a:srgbClr val="F5C242"/>
+                          </a:solidFill>
+                          <a:latin typeface="Kanit"/>
+                        </a:rPr>
+                        <a:t>23.5%</a:t>
                       </a:r>
                     </a:p>
                   </a:txBody>
@@ -8114,7 +8114,7 @@
                           </a:solidFill>
                           <a:latin typeface="Kanit"/>
                         </a:rPr>
-                        <a:t>5/6</a:t>
+                        <a:t>10/28</a:t>
                       </a:r>
                     </a:p>
                   </a:txBody>
@@ -8162,7 +8162,7 @@
                           </a:solidFill>
                           <a:latin typeface="Kanit"/>
                         </a:rPr>
-                        <a:t>บึงกาฬ</a:t>
+                        <a:t>นครพนม</a:t>
                       </a:r>
                     </a:p>
                   </a:txBody>
@@ -8185,7 +8185,7 @@
                           </a:solidFill>
                           <a:latin typeface="Kanit"/>
                         </a:rPr>
-                        <a:t>10</a:t>
+                        <a:t>29</a:t>
                       </a:r>
                     </a:p>
                   </a:txBody>
@@ -8208,7 +8208,7 @@
                           </a:solidFill>
                           <a:latin typeface="Kanit"/>
                         </a:rPr>
-                        <a:t>99</a:t>
+                        <a:t>278</a:t>
                       </a:r>
                     </a:p>
                   </a:txBody>
@@ -8231,7 +8231,7 @@
                           </a:solidFill>
                           <a:latin typeface="Kanit"/>
                         </a:rPr>
-                        <a:t>90.0%</a:t>
+                        <a:t>17.2%</a:t>
                       </a:r>
                     </a:p>
                   </a:txBody>
@@ -8254,7 +8254,7 @@
                           </a:solidFill>
                           <a:latin typeface="Kanit"/>
                         </a:rPr>
-                        <a:t>1/1</a:t>
+                        <a:t>9/15</a:t>
                       </a:r>
                     </a:p>
                   </a:txBody>
@@ -8273,11 +8273,11 @@
                       <a:r>
                         <a:rPr sz="900" b="1">
                           <a:solidFill>
-                            <a:srgbClr val="F5C242"/>
-                          </a:solidFill>
-                          <a:latin typeface="Kanit"/>
-                        </a:rPr>
-                        <a:t>4</a:t>
+                            <a:srgbClr val="CC0000"/>
+                          </a:solidFill>
+                          <a:latin typeface="Kanit"/>
+                        </a:rPr>
+                        <a:t>5</a:t>
                       </a:r>
                     </a:p>
                   </a:txBody>
@@ -8302,7 +8302,7 @@
                           </a:solidFill>
                           <a:latin typeface="Kanit"/>
                         </a:rPr>
-                        <a:t>มุกดาหาร</a:t>
+                        <a:t>สกลนคร</a:t>
                       </a:r>
                     </a:p>
                   </a:txBody>
@@ -8325,7 +8325,7 @@
                           </a:solidFill>
                           <a:latin typeface="Kanit"/>
                         </a:rPr>
-                        <a:t>16</a:t>
+                        <a:t>36</a:t>
                       </a:r>
                     </a:p>
                   </a:txBody>
@@ -8348,7 +8348,7 @@
                           </a:solidFill>
                           <a:latin typeface="Kanit"/>
                         </a:rPr>
-                        <a:t>77</a:t>
+                        <a:t>47</a:t>
                       </a:r>
                     </a:p>
                   </a:txBody>
@@ -8371,7 +8371,7 @@
                           </a:solidFill>
                           <a:latin typeface="Kanit"/>
                         </a:rPr>
-                        <a:t>18.8%</a:t>
+                        <a:t>2.8%</a:t>
                       </a:r>
                     </a:p>
                   </a:txBody>
@@ -8394,7 +8394,7 @@
                           </a:solidFill>
                           <a:latin typeface="Kanit"/>
                         </a:rPr>
-                        <a:t>1/2</a:t>
+                        <a:t>9/14</a:t>
                       </a:r>
                     </a:p>
                   </a:txBody>
@@ -8413,11 +8413,11 @@
                       <a:r>
                         <a:rPr sz="900" b="1">
                           <a:solidFill>
-                            <a:srgbClr val="F5C242"/>
-                          </a:solidFill>
-                          <a:latin typeface="Kanit"/>
-                        </a:rPr>
-                        <a:t>4</a:t>
+                            <a:srgbClr val="CC0000"/>
+                          </a:solidFill>
+                          <a:latin typeface="Kanit"/>
+                        </a:rPr>
+                        <a:t>5</a:t>
                       </a:r>
                     </a:p>
                   </a:txBody>
@@ -8442,7 +8442,7 @@
                           </a:solidFill>
                           <a:latin typeface="Kanit"/>
                         </a:rPr>
-                        <a:t>ปทุมธานี</a:t>
+                        <a:t>นราธิวาส</a:t>
                       </a:r>
                     </a:p>
                   </a:txBody>
@@ -8465,7 +8465,7 @@
                           </a:solidFill>
                           <a:latin typeface="Kanit"/>
                         </a:rPr>
-                        <a:t>11</a:t>
+                        <a:t>64</a:t>
                       </a:r>
                     </a:p>
                   </a:txBody>
@@ -8488,7 +8488,7 @@
                           </a:solidFill>
                           <a:latin typeface="Kanit"/>
                         </a:rPr>
-                        <a:t>43</a:t>
+                        <a:t>24</a:t>
                       </a:r>
                     </a:p>
                   </a:txBody>
@@ -8507,11 +8507,11 @@
                       <a:r>
                         <a:rPr sz="900" b="1">
                           <a:solidFill>
-                            <a:srgbClr val="F5C242"/>
-                          </a:solidFill>
-                          <a:latin typeface="Kanit"/>
-                        </a:rPr>
-                        <a:t>18.2%</a:t>
+                            <a:srgbClr val="606060"/>
+                          </a:solidFill>
+                          <a:latin typeface="Kanit"/>
+                        </a:rPr>
+                        <a:t>0.0%</a:t>
                       </a:r>
                     </a:p>
                   </a:txBody>
@@ -8534,7 +8534,7 @@
                           </a:solidFill>
                           <a:latin typeface="Kanit"/>
                         </a:rPr>
-                        <a:t>2/4</a:t>
+                        <a:t>5/10</a:t>
                       </a:r>
                     </a:p>
                   </a:txBody>
@@ -8553,11 +8553,11 @@
                       <a:r>
                         <a:rPr sz="900" b="1">
                           <a:solidFill>
-                            <a:srgbClr val="F5C242"/>
-                          </a:solidFill>
-                          <a:latin typeface="Kanit"/>
-                        </a:rPr>
-                        <a:t>4</a:t>
+                            <a:srgbClr val="CC0000"/>
+                          </a:solidFill>
+                          <a:latin typeface="Kanit"/>
+                        </a:rPr>
+                        <a:t>5</a:t>
                       </a:r>
                     </a:p>
                   </a:txBody>
@@ -8582,7 +8582,7 @@
                           </a:solidFill>
                           <a:latin typeface="Kanit"/>
                         </a:rPr>
-                        <a:t>นครพนม</a:t>
+                        <a:t>มุกดาหาร</a:t>
                       </a:r>
                     </a:p>
                   </a:txBody>
@@ -8605,7 +8605,7 @@
                           </a:solidFill>
                           <a:latin typeface="Kanit"/>
                         </a:rPr>
-                        <a:t>29</a:t>
+                        <a:t>18</a:t>
                       </a:r>
                     </a:p>
                   </a:txBody>
@@ -8628,7 +8628,7 @@
                           </a:solidFill>
                           <a:latin typeface="Kanit"/>
                         </a:rPr>
-                        <a:t>86</a:t>
+                        <a:t>22</a:t>
                       </a:r>
                     </a:p>
                   </a:txBody>
@@ -8647,11 +8647,11 @@
                       <a:r>
                         <a:rPr sz="900" b="1">
                           <a:solidFill>
-                            <a:srgbClr val="F5C242"/>
-                          </a:solidFill>
-                          <a:latin typeface="Kanit"/>
-                        </a:rPr>
-                        <a:t>17.2%</a:t>
+                            <a:srgbClr val="606060"/>
+                          </a:solidFill>
+                          <a:latin typeface="Kanit"/>
+                        </a:rPr>
+                        <a:t>0.0%</a:t>
                       </a:r>
                     </a:p>
                   </a:txBody>
@@ -8674,7 +8674,7 @@
                           </a:solidFill>
                           <a:latin typeface="Kanit"/>
                         </a:rPr>
-                        <a:t>5/15</a:t>
+                        <a:t>2/2</a:t>
                       </a:r>
                     </a:p>
                   </a:txBody>
@@ -8693,11 +8693,11 @@
                       <a:r>
                         <a:rPr sz="900" b="1">
                           <a:solidFill>
-                            <a:srgbClr val="F5C242"/>
-                          </a:solidFill>
-                          <a:latin typeface="Kanit"/>
-                        </a:rPr>
-                        <a:t>4</a:t>
+                            <a:srgbClr val="CC0000"/>
+                          </a:solidFill>
+                          <a:latin typeface="Kanit"/>
+                        </a:rPr>
+                        <a:t>5</a:t>
                       </a:r>
                     </a:p>
                   </a:txBody>
@@ -8909,7 +8909,7 @@
                 </a:solidFill>
                 <a:latin typeface="Kanit"/>
               </a:rPr>
-              <a:t>Planted area MEASURED (OAE — 3,295 amphoe crop rows). Drought is a MODELLED SPEI index from rainfall and evapotranspiration, refreshed monthly, retrieved 2026-07-20 — the best national-coverage signal available, but nobody has walked those districts. Rain and river telemetry MEASURED (ThaiWater, live, pulled daily and accumulated — a missed pull leaves a gap rather than an invented point) · rain to 2026-08-05, river to 2026-08-05. Structural flood exposure MEASURED (GISTDA 1:50,000 repeated-flooding census, 2005-2016 — a 12-year ground record, not a forecast).</a:t>
+              <a:t>Planted area MEASURED (OAE — 3,295 amphoe crop rows). Drought is a MODELLED SPEI index from rainfall and evapotranspiration, refreshed monthly, retrieved 2026-07-20 — the best national-coverage signal available, but nobody has walked those districts. Rain and river telemetry MEASURED (ThaiWater, live, pulled daily and accumulated — a missed pull leaves a gap rather than an invented point) · rain to 2026-08-09, river to 2026-08-09. Structural flood exposure MEASURED (GISTDA 1:50,000 repeated-flooding census, 2005-2016 — a 12-year ground record, not a forecast).</a:t>
             </a:r>
           </a:p>
         </p:txBody>
@@ -31476,7 +31476,7 @@
                 </a:solidFill>
                 <a:latin typeface="Kanit"/>
               </a:rPr>
-              <a:t>Median crop income rose +15.6%, but four provinces fell — all on the coconut (มะพร้าว) belt, worst สมุทรสงคราม at −64.8%.</a:t>
+              <a:t>Median crop income rose +16.1%, but four provinces fell — all on the coconut (มะพร้าว) belt, worst สมุทรสงคราม at −64.0%.</a:t>
             </a:r>
           </a:p>
         </p:txBody>
@@ -32047,7 +32047,7 @@
                 </a:solidFill>
                 <a:latin typeface="Kanit"/>
               </a:rPr>
-              <a:t>Vintages — world prices 2026M06 · Thai farm gate 2026-08-04 · Thai price history 2026-08-02 · crop cost of production OAE Cai-up 2568 (crop year 2568/69, OAE forecast Mar 2569) · drought 2026-06-21 · CPI 2026-05 · GDP 2026-Q1 · IMF WEO 2026 · resale index 2026-05 · registrations to 2026-01 · household debt NSO SES 2566 · wages NSO LFS 2568 · telemetry 2026-08-05.</a:t>
+              <a:t>Vintages — world prices 2026M06 · Thai farm gate 2026-08-07 · Thai price history 2026-08-02 · crop cost of production OAE Cai-up 2568 (crop year 2568/69, OAE forecast Mar 2569) · drought 2026-06-21 · CPI 2026-05 · GDP 2026-Q1 · IMF WEO 2026 · resale index 2026-05 · registrations to 2026-01 · household debt NSO SES 2566 · wages NSO LFS 2568 · telemetry 2026-08-09.</a:t>
             </a:r>
           </a:p>
         </p:txBody>
@@ -32546,7 +32546,7 @@
               <a:t>Not on the world index — the farm gate (ราคาที่เกษตรกรขายได้) says otherwise.
 • Seven of seventeen Thai farm-gate prices are falling year on year.
 • Beef: farm gate −6.1% vs world index +11.8%.
-• Margin over price: a 25% price move becomes an 81% swing in crop income.</a:t>
+• Margin over price: a 26% price move becomes an 83% swing in crop income.</a:t>
             </a:r>
           </a:p>
         </p:txBody>
@@ -33912,7 +33912,7 @@
                 </a:solidFill>
                 <a:latin typeface="Kanit"/>
               </a:rPr>
-              <a:t>33.34</a:t>
+              <a:t>33.05</a:t>
             </a:r>
           </a:p>
         </p:txBody>
@@ -33951,7 +33951,7 @@
                 </a:solidFill>
                 <a:latin typeface="Kanit"/>
               </a:rPr>
-              <a:t>ECB reference · 2026-08-03</a:t>
+              <a:t>ECB reference · 2026-08-07</a:t>
             </a:r>
           </a:p>
         </p:txBody>
@@ -35798,7 +35798,7 @@
                 </a:solidFill>
                 <a:latin typeface="Kanit"/>
               </a:rPr>
-              <a:t>NESDC 2026-Q1 · TPSO 2026-05 · Bank of Thailand 2026-06 · BIS 2025-Q4 · ECB 2026-08-03, each pulled from the publishing agency. IMF World Economic Outlook 2026 (pulled 2026-07-25) for the peer table. BoT published NPL ratio — 4.48% at 2026-Q1, 4.33% the quarter before, +0.24pp on the year, 3.08% low in 2021-Q1.</a:t>
+              <a:t>NESDC 2026-Q1 · TPSO 2026-05 · Bank of Thailand 2026-06 · BIS 2025-Q4 · ECB 2026-08-07, each pulled from the publishing agency. IMF World Economic Outlook 2026 (pulled 2026-07-25) for the peer table. BoT published NPL ratio — 4.48% at 2026-Q1, 4.33% the quarter before, +0.24pp on the year, 3.08% low in 2021-Q1.</a:t>
             </a:r>
           </a:p>
         </p:txBody>
@@ -37087,7 +37087,7 @@
                 </a:solidFill>
                 <a:latin typeface="Kanit"/>
               </a:rPr>
-              <a:t>338 of 928 districts · 132 of 795 rivers high</a:t>
+              <a:t>338 of 928 districts · 167 of 796 rivers high</a:t>
             </a:r>
           </a:p>
         </p:txBody>
@@ -37859,7 +37859,7 @@
                           </a:solidFill>
                           <a:latin typeface="Kanit"/>
                         </a:rPr>
-                        <a:t>34/159</a:t>
+                        <a:t>40/159</a:t>
                       </a:r>
                     </a:p>
                   </a:txBody>
@@ -38091,7 +38091,7 @@
                           </a:solidFill>
                           <a:latin typeface="Kanit"/>
                         </a:rPr>
-                        <a:t>23/274</a:t>
+                        <a:t>45/274</a:t>
                       </a:r>
                     </a:p>
                   </a:txBody>
@@ -38555,7 +38555,7 @@
                           </a:solidFill>
                           <a:latin typeface="Kanit"/>
                         </a:rPr>
-                        <a:t>8/52</a:t>
+                        <a:t>7/52</a:t>
                       </a:r>
                     </a:p>
                   </a:txBody>
@@ -38787,7 +38787,7 @@
                           </a:solidFill>
                           <a:latin typeface="Kanit"/>
                         </a:rPr>
-                        <a:t>40/142</a:t>
+                        <a:t>48/143</a:t>
                       </a:r>
                     </a:p>
                   </a:txBody>
@@ -39936,7 +39936,7 @@
                           </a:solidFill>
                           <a:latin typeface="Kanit"/>
                         </a:rPr>
-                        <a:t>−69.3%</a:t>
+                        <a:t>−68.4%</a:t>
                       </a:r>
                     </a:p>
                   </a:txBody>
@@ -40751,7 +40751,7 @@
                           </a:solidFill>
                           <a:latin typeface="Kanit"/>
                         </a:rPr>
-                        <a:t>−3.2%</a:t>
+                        <a:t>−1.2%</a:t>
                       </a:r>
                     </a:p>
                   </a:txBody>
@@ -40914,7 +40914,7 @@
                           </a:solidFill>
                           <a:latin typeface="Kanit"/>
                         </a:rPr>
-                        <a:t>−1.5%</a:t>
+                        <a:t>−0.4%</a:t>
                       </a:r>
                     </a:p>
                   </a:txBody>
@@ -41117,7 +41117,7 @@
                 </a:solidFill>
                 <a:latin typeface="Kanit"/>
               </a:rPr>
-              <a:t>Prices MEASURED — NABC daily quotes for the Thai farm gate, OCSB announced cane price; newest quote 2026-08-04. The six-month move is computed from NABC's own monthly series (thai_price_history, vintage 2026-08-02); a crop with no monthly series is marked, never estimated. Belt is an ESTIMATED read of where each commodity is produced, and belts overlap. Farming accounts are OURS and MEASURED — accounts whose recorded occupation is เกษตร in the belt provinces, from the 382,735-account tape at 2026-07; no cell below 30 accounts is published. They live where the crop grows; they are not confirmed to grow it.</a:t>
+              <a:t>Prices MEASURED — NABC daily quotes for the Thai farm gate, OCSB announced cane price; newest quote 2026-08-07. The six-month move is computed from NABC's own monthly series (thai_price_history, vintage 2026-08-02); a crop with no monthly series is marked, never estimated. Belt is an ESTIMATED read of where each commodity is produced, and belts overlap. Farming accounts are OURS and MEASURED — accounts whose recorded occupation is เกษตร in the belt provinces, from the 382,735-account tape at 2026-07; no cell below 30 accounts is published. They live where the crop grows; they are not confirmed to grow it.</a:t>
             </a:r>
           </a:p>
         </p:txBody>
@@ -43745,7 +43745,7 @@
                           </a:solidFill>
                           <a:latin typeface="Kanit"/>
                         </a:rPr>
-                        <a:t>95.34</a:t>
+                        <a:t>94.54</a:t>
                       </a:r>
                     </a:p>
                   </a:txBody>
@@ -43885,7 +43885,7 @@
                           </a:solidFill>
                           <a:latin typeface="Kanit"/>
                         </a:rPr>
-                        <a:t>16,467</a:t>
+                        <a:t>16,329</a:t>
                       </a:r>
                     </a:p>
                   </a:txBody>
@@ -44025,7 +44025,7 @@
                           </a:solidFill>
                           <a:latin typeface="Kanit"/>
                         </a:rPr>
-                        <a:t>36,835</a:t>
+                        <a:t>36,526</a:t>
                       </a:r>
                     </a:p>
                   </a:txBody>
@@ -44165,7 +44165,7 @@
                           </a:solidFill>
                           <a:latin typeface="Kanit"/>
                         </a:rPr>
-                        <a:t>10.67</a:t>
+                        <a:t>10.58</a:t>
                       </a:r>
                     </a:p>
                   </a:txBody>
@@ -44384,7 +44384,7 @@
                 </a:solidFill>
                 <a:latin typeface="Kanit"/>
               </a:rPr>
-              <a:t>World Bank Pink Sheet nominal-USD monthly prices, vintage 2026M06 (60 observations per series, rebased to 100 at 2021-07 for the chart — units differ, so raw levels can’t share an axis). Baht conversion at the ECB reference rate USD/THB 33.335, 2026-08-03. Planted-area share MEASURED, OAE/DOAE crop mix (crop_mix.json). Nominal, not deflated: five years of Thai CPI sit under every ‘vs 5 yrs ago’ figure.</a:t>
+              <a:t>World Bank Pink Sheet nominal-USD monthly prices, vintage 2026M06 (60 observations per series, rebased to 100 at 2021-07 for the chart — units differ, so raw levels can’t share an axis). Baht conversion at the ECB reference rate USD/THB 33.055, 2026-08-07. Planted-area share MEASURED, OAE/DOAE crop mix (crop_mix.json). Nominal, not deflated: five years of Thai CPI sit under every ‘vs 5 yrs ago’ figure.</a:t>
             </a:r>
           </a:p>
         </p:txBody>
@@ -45005,7 +45005,7 @@
                 </a:solidFill>
                 <a:latin typeface="Kanit"/>
               </a:rPr>
-              <a:t>coconut −69.3%, pineapple −18.4%, sugarcane −17.9% year on year</a:t>
+              <a:t>coconut −68.4%, pineapple −18.4%, sugarcane −17.9% year on year</a:t>
             </a:r>
           </a:p>
         </p:txBody>
@@ -45131,7 +45131,7 @@
                 </a:solidFill>
                 <a:latin typeface="Kanit"/>
               </a:rPr>
-              <a:t>+15.6%</a:t>
+              <a:t>+16.1%</a:t>
             </a:r>
           </a:p>
         </p:txBody>
@@ -45605,7 +45605,7 @@
                           </a:solidFill>
                           <a:latin typeface="Kanit"/>
                         </a:rPr>
-                        <a:t>+6.0%</a:t>
+                        <a:t>+6.1%</a:t>
                       </a:r>
                     </a:p>
                   </a:txBody>
@@ -45674,7 +45674,7 @@
                           </a:solidFill>
                           <a:latin typeface="Kanit"/>
                         </a:rPr>
-                        <a:t>-64.8%</a:t>
+                        <a:t>-64.0%</a:t>
                       </a:r>
                     </a:p>
                   </a:txBody>
@@ -45745,7 +45745,7 @@
                           </a:solidFill>
                           <a:latin typeface="Kanit"/>
                         </a:rPr>
-                        <a:t>+14.4%</a:t>
+                        <a:t>+14.9%</a:t>
                       </a:r>
                     </a:p>
                   </a:txBody>
@@ -45814,7 +45814,7 @@
                           </a:solidFill>
                           <a:latin typeface="Kanit"/>
                         </a:rPr>
-                        <a:t>+9.3%</a:t>
+                        <a:t>+9.5%</a:t>
                       </a:r>
                     </a:p>
                   </a:txBody>
@@ -45885,7 +45885,7 @@
                           </a:solidFill>
                           <a:latin typeface="Kanit"/>
                         </a:rPr>
-                        <a:t>+15.9%</a:t>
+                        <a:t>+16.2%</a:t>
                       </a:r>
                     </a:p>
                   </a:txBody>
@@ -45954,7 +45954,7 @@
                           </a:solidFill>
                           <a:latin typeface="Kanit"/>
                         </a:rPr>
-                        <a:t>+8.1%</a:t>
+                        <a:t>+8.3%</a:t>
                       </a:r>
                     </a:p>
                   </a:txBody>
@@ -46025,7 +46025,7 @@
                           </a:solidFill>
                           <a:latin typeface="Kanit"/>
                         </a:rPr>
-                        <a:t>+25.3%</a:t>
+                        <a:t>+25.5%</a:t>
                       </a:r>
                     </a:p>
                   </a:txBody>
@@ -46094,7 +46094,7 @@
                           </a:solidFill>
                           <a:latin typeface="Kanit"/>
                         </a:rPr>
-                        <a:t>+9.9%</a:t>
+                        <a:t>+10.2%</a:t>
                       </a:r>
                     </a:p>
                   </a:txBody>
@@ -46234,7 +46234,7 @@
                           </a:solidFill>
                           <a:latin typeface="Kanit"/>
                         </a:rPr>
-                        <a:t>+29.8%</a:t>
+                        <a:t>+28.9%</a:t>
                       </a:r>
                     </a:p>
                   </a:txBody>
@@ -46410,8 +46410,8 @@
                 </a:solidFill>
                 <a:latin typeface="Kanit"/>
               </a:rPr>
-              <a:t>•  +41% rubber, +59% cassava, +27% palm, +13% rice at the farm gate. Crop income rose in every region.
-•  Four provinces fell — all coconut, all on the western gulf. Coconut price is down 69%.
+              <a:t>•  +42% rubber, +61% cassava, +26% palm, +14% rice at the farm gate. Crop income rose in every region.
+•  Four provinces fell — all coconut, all on the western gulf. Coconut price is down 68%.
 •  A gain on paper is not cash yet — the next table nets prices against cost.</a:t>
             </a:r>
           </a:p>
@@ -46713,7 +46713,7 @@
                           </a:solidFill>
                           <a:latin typeface="Kanit"/>
                         </a:rPr>
-                        <a:t>+15.7%</a:t>
+                        <a:t>+16.1%</a:t>
                       </a:r>
                     </a:p>
                   </a:txBody>
@@ -46876,7 +46876,7 @@
                           </a:solidFill>
                           <a:latin typeface="Kanit"/>
                         </a:rPr>
-                        <a:t>+20.2%</a:t>
+                        <a:t>+20.5%</a:t>
                       </a:r>
                     </a:p>
                   </a:txBody>
@@ -47039,7 +47039,7 @@
                           </a:solidFill>
                           <a:latin typeface="Kanit"/>
                         </a:rPr>
-                        <a:t>+10.2%</a:t>
+                        <a:t>+10.5%</a:t>
                       </a:r>
                     </a:p>
                   </a:txBody>
@@ -47202,7 +47202,7 @@
                           </a:solidFill>
                           <a:latin typeface="Kanit"/>
                         </a:rPr>
-                        <a:t>+34.8%</a:t>
+                        <a:t>+34.4%</a:t>
                       </a:r>
                     </a:p>
                   </a:txBody>
@@ -47365,7 +47365,7 @@
                           </a:solidFill>
                           <a:latin typeface="Kanit"/>
                         </a:rPr>
-                        <a:t>+16.1%</a:t>
+                        <a:t>+16.3%</a:t>
                       </a:r>
                     </a:p>
                   </a:txBody>
@@ -47528,7 +47528,7 @@
                           </a:solidFill>
                           <a:latin typeface="Kanit"/>
                         </a:rPr>
-                        <a:t>+15.0%</a:t>
+                        <a:t>+15.1%</a:t>
                       </a:r>
                     </a:p>
                   </a:txBody>
@@ -48350,7 +48350,7 @@
                 </a:solidFill>
                 <a:latin typeface="Kanit"/>
               </a:rPr>
-              <a:t>YoY −69.3%</a:t>
+              <a:t>YoY −68.4%</a:t>
             </a:r>
           </a:p>
         </p:txBody>
@@ -48986,7 +48986,7 @@
                 </a:solidFill>
                 <a:latin typeface="Kanit"/>
               </a:rPr>
-              <a:t>YoY −3.2%</a:t>
+              <a:t>YoY −1.2%</a:t>
             </a:r>
           </a:p>
         </p:txBody>
@@ -49304,7 +49304,7 @@
                 </a:solidFill>
                 <a:latin typeface="Kanit"/>
               </a:rPr>
-              <a:t>YoY −1.5%</a:t>
+              <a:t>YoY −0.4%</a:t>
             </a:r>
           </a:p>
         </p:txBody>
@@ -49940,7 +49940,7 @@
                 </a:solidFill>
                 <a:latin typeface="Kanit"/>
               </a:rPr>
-              <a:t>YoY +0.1%</a:t>
+              <a:t>YoY +0.9%</a:t>
             </a:r>
           </a:p>
         </p:txBody>
@@ -50180,6 +50180,324 @@
                 </a:solidFill>
                 <a:latin typeface="Kanit"/>
               </a:rPr>
+              <a:t>Rice  ข้าวหอมมะลิ</a:t>
+            </a:r>
+          </a:p>
+        </p:txBody>
+      </p:sp>
+      <p:sp>
+        <p:nvSpPr>
+          <p:cNvPr id="58" name="TextBox 57"/>
+          <p:cNvSpPr txBox="1"/>
+          <p:nvPr/>
+        </p:nvSpPr>
+        <p:spPr>
+          <a:xfrm>
+            <a:off x="2713939" y="3218687"/>
+            <a:ext cx="2156155" cy="125730"/>
+          </a:xfrm>
+          <a:prstGeom prst="rect">
+            <a:avLst/>
+          </a:prstGeom>
+          <a:noFill/>
+        </p:spPr>
+        <p:txBody>
+          <a:bodyPr wrap="square" lIns="0" rIns="0" tIns="0" bIns="0" anchor="t">
+            <a:noAutofit/>
+          </a:bodyPr>
+          <a:lstStyle/>
+          <a:p>
+            <a:pPr algn="l">
+              <a:lnSpc>
+                <a:spcPts val="990"/>
+              </a:lnSpc>
+            </a:pPr>
+            <a:r>
+              <a:rPr sz="750" b="0">
+                <a:solidFill>
+                  <a:srgbClr val="606060"/>
+                </a:solidFill>
+                <a:latin typeface="Kanit"/>
+              </a:rPr>
+              <a:t>฿17,727 /ตัน · Isan·N·C</a:t>
+            </a:r>
+          </a:p>
+        </p:txBody>
+      </p:sp>
+      <p:sp>
+        <p:nvSpPr>
+          <p:cNvPr id="59" name="TextBox 58"/>
+          <p:cNvSpPr txBox="1"/>
+          <p:nvPr/>
+        </p:nvSpPr>
+        <p:spPr>
+          <a:xfrm>
+            <a:off x="2713939" y="3351275"/>
+            <a:ext cx="1078077" cy="134112"/>
+          </a:xfrm>
+          <a:prstGeom prst="rect">
+            <a:avLst/>
+          </a:prstGeom>
+          <a:noFill/>
+        </p:spPr>
+        <p:txBody>
+          <a:bodyPr wrap="square" lIns="0" rIns="0" tIns="0" bIns="0" anchor="t">
+            <a:noAutofit/>
+          </a:bodyPr>
+          <a:lstStyle/>
+          <a:p>
+            <a:pPr algn="l">
+              <a:lnSpc>
+                <a:spcPts val="1056"/>
+              </a:lnSpc>
+            </a:pPr>
+            <a:r>
+              <a:rPr sz="800" b="1">
+                <a:solidFill>
+                  <a:srgbClr val="15795F"/>
+                </a:solidFill>
+                <a:latin typeface="Kanit"/>
+              </a:rPr>
+              <a:t>YoY +13.5%</a:t>
+            </a:r>
+          </a:p>
+        </p:txBody>
+      </p:sp>
+      <p:sp>
+        <p:nvSpPr>
+          <p:cNvPr id="60" name="TextBox 59"/>
+          <p:cNvSpPr txBox="1"/>
+          <p:nvPr/>
+        </p:nvSpPr>
+        <p:spPr>
+          <a:xfrm>
+            <a:off x="3792016" y="3351275"/>
+            <a:ext cx="1078077" cy="134112"/>
+          </a:xfrm>
+          <a:prstGeom prst="rect">
+            <a:avLst/>
+          </a:prstGeom>
+          <a:noFill/>
+        </p:spPr>
+        <p:txBody>
+          <a:bodyPr wrap="square" lIns="0" rIns="0" tIns="0" bIns="0" anchor="t">
+            <a:noAutofit/>
+          </a:bodyPr>
+          <a:lstStyle/>
+          <a:p>
+            <a:pPr algn="l">
+              <a:lnSpc>
+                <a:spcPts val="1056"/>
+              </a:lnSpc>
+            </a:pPr>
+            <a:r>
+              <a:rPr sz="800" b="1">
+                <a:solidFill>
+                  <a:srgbClr val="15795F"/>
+                </a:solidFill>
+                <a:latin typeface="Kanit"/>
+              </a:rPr>
+              <a:t>6m +8.1%</a:t>
+            </a:r>
+          </a:p>
+        </p:txBody>
+      </p:sp>
+      <p:sp>
+        <p:nvSpPr>
+          <p:cNvPr id="61" name="Rectangle 60"/>
+          <p:cNvSpPr/>
+          <p:nvPr/>
+        </p:nvSpPr>
+        <p:spPr>
+          <a:xfrm>
+            <a:off x="2713939" y="3506724"/>
+            <a:ext cx="2156155" cy="548640"/>
+          </a:xfrm>
+          <a:prstGeom prst="rect">
+            <a:avLst/>
+          </a:prstGeom>
+          <a:solidFill>
+            <a:srgbClr val="FBFCFE"/>
+          </a:solidFill>
+          <a:ln w="9525">
+            <a:solidFill>
+              <a:srgbClr val="D9DEE9"/>
+            </a:solidFill>
+          </a:ln>
+          <a:effectLst/>
+        </p:spPr>
+        <p:style>
+          <a:lnRef idx="1">
+            <a:schemeClr val="accent1"/>
+          </a:lnRef>
+          <a:fillRef idx="3">
+            <a:schemeClr val="accent1"/>
+          </a:fillRef>
+          <a:effectRef idx="2">
+            <a:schemeClr val="accent1"/>
+          </a:effectRef>
+          <a:fontRef idx="minor">
+            <a:schemeClr val="lt1"/>
+          </a:fontRef>
+        </p:style>
+        <p:txBody>
+          <a:bodyPr rtlCol="0" anchor="ctr" wrap="none"/>
+          <a:lstStyle/>
+          <a:p>
+            <a:pPr algn="ctr"/>
+          </a:p>
+        </p:txBody>
+      </p:sp>
+      <p:sp>
+        <p:nvSpPr>
+          <p:cNvPr id="62" name="Freeform 61"/>
+          <p:cNvSpPr/>
+          <p:nvPr/>
+        </p:nvSpPr>
+        <p:spPr>
+          <a:xfrm>
+            <a:off x="2759659" y="3552444"/>
+            <a:ext cx="2064715" cy="457200"/>
+          </a:xfrm>
+          <a:custGeom>
+            <a:avLst/>
+            <a:gdLst/>
+            <a:ahLst/>
+            <a:cxnLst/>
+            <a:rect l="l" t="t" r="r" b="b"/>
+            <a:pathLst>
+              <a:path w="2064715" h="457200">
+                <a:moveTo>
+                  <a:pt x="0" y="457200"/>
+                </a:moveTo>
+                <a:lnTo>
+                  <a:pt x="412943" y="340931"/>
+                </a:lnTo>
+                <a:lnTo>
+                  <a:pt x="825886" y="253323"/>
+                </a:lnTo>
+                <a:lnTo>
+                  <a:pt x="1238829" y="103264"/>
+                </a:lnTo>
+                <a:lnTo>
+                  <a:pt x="1651772" y="6195"/>
+                </a:lnTo>
+                <a:lnTo>
+                  <a:pt x="2064715" y="0"/>
+                </a:lnTo>
+              </a:path>
+            </a:pathLst>
+          </a:custGeom>
+          <a:noFill/>
+          <a:ln w="20320">
+            <a:solidFill>
+              <a:srgbClr val="15795F"/>
+            </a:solidFill>
+          </a:ln>
+          <a:effectLst/>
+        </p:spPr>
+        <p:style>
+          <a:lnRef idx="1">
+            <a:schemeClr val="accent1"/>
+          </a:lnRef>
+          <a:fillRef idx="3">
+            <a:schemeClr val="accent1"/>
+          </a:fillRef>
+          <a:effectRef idx="2">
+            <a:schemeClr val="accent1"/>
+          </a:effectRef>
+          <a:fontRef idx="minor">
+            <a:schemeClr val="lt1"/>
+          </a:fontRef>
+        </p:style>
+        <p:txBody>
+          <a:bodyPr rtlCol="0" anchor="ctr"/>
+          <a:lstStyle/>
+          <a:p>
+            <a:pPr algn="ctr"/>
+          </a:p>
+        </p:txBody>
+      </p:sp>
+      <p:sp>
+        <p:nvSpPr>
+          <p:cNvPr id="63" name="Rounded Rectangle 62"/>
+          <p:cNvSpPr/>
+          <p:nvPr/>
+        </p:nvSpPr>
+        <p:spPr>
+          <a:xfrm>
+            <a:off x="4783226" y="3511296"/>
+            <a:ext cx="82296" cy="82296"/>
+          </a:xfrm>
+          <a:prstGeom prst="roundRect">
+            <a:avLst>
+              <a:gd name="adj" fmla="val 50000"/>
+            </a:avLst>
+          </a:prstGeom>
+          <a:solidFill>
+            <a:srgbClr val="15795F"/>
+          </a:solidFill>
+          <a:ln>
+            <a:noFill/>
+          </a:ln>
+          <a:effectLst/>
+        </p:spPr>
+        <p:style>
+          <a:lnRef idx="1">
+            <a:schemeClr val="accent1"/>
+          </a:lnRef>
+          <a:fillRef idx="3">
+            <a:schemeClr val="accent1"/>
+          </a:fillRef>
+          <a:effectRef idx="2">
+            <a:schemeClr val="accent1"/>
+          </a:effectRef>
+          <a:fontRef idx="minor">
+            <a:schemeClr val="lt1"/>
+          </a:fontRef>
+        </p:style>
+        <p:txBody>
+          <a:bodyPr rtlCol="0" anchor="ctr" wrap="none"/>
+          <a:lstStyle/>
+          <a:p>
+            <a:pPr algn="ctr"/>
+          </a:p>
+        </p:txBody>
+      </p:sp>
+      <p:sp>
+        <p:nvSpPr>
+          <p:cNvPr id="64" name="TextBox 63"/>
+          <p:cNvSpPr txBox="1"/>
+          <p:nvPr/>
+        </p:nvSpPr>
+        <p:spPr>
+          <a:xfrm>
+            <a:off x="5016398" y="3076956"/>
+            <a:ext cx="2156155" cy="150876"/>
+          </a:xfrm>
+          <a:prstGeom prst="rect">
+            <a:avLst/>
+          </a:prstGeom>
+          <a:noFill/>
+        </p:spPr>
+        <p:txBody>
+          <a:bodyPr wrap="square" lIns="0" rIns="0" tIns="0" bIns="0" anchor="t">
+            <a:noAutofit/>
+          </a:bodyPr>
+          <a:lstStyle/>
+          <a:p>
+            <a:pPr algn="l">
+              <a:lnSpc>
+                <a:spcPts val="1188"/>
+              </a:lnSpc>
+            </a:pPr>
+            <a:r>
+              <a:rPr sz="900" b="1">
+                <a:solidFill>
+                  <a:srgbClr val="1E2F5C"/>
+                </a:solidFill>
+                <a:latin typeface="Kanit"/>
+              </a:rPr>
               <a:t>Maize  ข้าวโพดเลี้ยงสัตว์</a:t>
             </a:r>
           </a:p>
@@ -50187,13 +50505,13 @@
       </p:sp>
       <p:sp>
         <p:nvSpPr>
-          <p:cNvPr id="58" name="TextBox 57"/>
+          <p:cNvPr id="65" name="TextBox 64"/>
           <p:cNvSpPr txBox="1"/>
           <p:nvPr/>
         </p:nvSpPr>
         <p:spPr>
           <a:xfrm>
-            <a:off x="2713939" y="3218687"/>
+            <a:off x="5016398" y="3218687"/>
             <a:ext cx="2156155" cy="125730"/>
           </a:xfrm>
           <a:prstGeom prst="rect">
@@ -50226,13 +50544,13 @@
       </p:sp>
       <p:sp>
         <p:nvSpPr>
-          <p:cNvPr id="59" name="TextBox 58"/>
+          <p:cNvPr id="66" name="TextBox 65"/>
           <p:cNvSpPr txBox="1"/>
           <p:nvPr/>
         </p:nvSpPr>
         <p:spPr>
           <a:xfrm>
-            <a:off x="2713939" y="3351275"/>
+            <a:off x="5016398" y="3351275"/>
             <a:ext cx="1078077" cy="134112"/>
           </a:xfrm>
           <a:prstGeom prst="rect">
@@ -50258,20 +50576,20 @@
                 </a:solidFill>
                 <a:latin typeface="Kanit"/>
               </a:rPr>
-              <a:t>YoY +13.3%</a:t>
+              <a:t>YoY +14.9%</a:t>
             </a:r>
           </a:p>
         </p:txBody>
       </p:sp>
       <p:sp>
         <p:nvSpPr>
-          <p:cNvPr id="60" name="TextBox 59"/>
+          <p:cNvPr id="67" name="TextBox 66"/>
           <p:cNvSpPr txBox="1"/>
           <p:nvPr/>
         </p:nvSpPr>
         <p:spPr>
           <a:xfrm>
-            <a:off x="3792016" y="3351275"/>
+            <a:off x="6094475" y="3351275"/>
             <a:ext cx="1078077" cy="134112"/>
           </a:xfrm>
           <a:prstGeom prst="rect">
@@ -50304,13 +50622,13 @@
       </p:sp>
       <p:sp>
         <p:nvSpPr>
-          <p:cNvPr id="61" name="Rectangle 60"/>
+          <p:cNvPr id="68" name="Rectangle 67"/>
           <p:cNvSpPr/>
           <p:nvPr/>
         </p:nvSpPr>
         <p:spPr>
           <a:xfrm>
-            <a:off x="2713939" y="3506724"/>
+            <a:off x="5016398" y="3506724"/>
             <a:ext cx="2156155" cy="548640"/>
           </a:xfrm>
           <a:prstGeom prst="rect">
@@ -50350,13 +50668,13 @@
       </p:sp>
       <p:sp>
         <p:nvSpPr>
-          <p:cNvPr id="62" name="Freeform 61"/>
+          <p:cNvPr id="69" name="Freeform 68"/>
           <p:cNvSpPr/>
           <p:nvPr/>
         </p:nvSpPr>
         <p:spPr>
           <a:xfrm>
-            <a:off x="2759659" y="3552444"/>
+            <a:off x="5062118" y="3552444"/>
             <a:ext cx="2064715" cy="457200"/>
           </a:xfrm>
           <a:custGeom>
@@ -50420,331 +50738,13 @@
       </p:sp>
       <p:sp>
         <p:nvSpPr>
-          <p:cNvPr id="63" name="Rounded Rectangle 62"/>
-          <p:cNvSpPr/>
-          <p:nvPr/>
-        </p:nvSpPr>
-        <p:spPr>
-          <a:xfrm>
-            <a:off x="4783226" y="3557678"/>
-            <a:ext cx="82296" cy="82296"/>
-          </a:xfrm>
-          <a:prstGeom prst="roundRect">
-            <a:avLst>
-              <a:gd name="adj" fmla="val 50000"/>
-            </a:avLst>
-          </a:prstGeom>
-          <a:solidFill>
-            <a:srgbClr val="15795F"/>
-          </a:solidFill>
-          <a:ln>
-            <a:noFill/>
-          </a:ln>
-          <a:effectLst/>
-        </p:spPr>
-        <p:style>
-          <a:lnRef idx="1">
-            <a:schemeClr val="accent1"/>
-          </a:lnRef>
-          <a:fillRef idx="3">
-            <a:schemeClr val="accent1"/>
-          </a:fillRef>
-          <a:effectRef idx="2">
-            <a:schemeClr val="accent1"/>
-          </a:effectRef>
-          <a:fontRef idx="minor">
-            <a:schemeClr val="lt1"/>
-          </a:fontRef>
-        </p:style>
-        <p:txBody>
-          <a:bodyPr rtlCol="0" anchor="ctr" wrap="none"/>
-          <a:lstStyle/>
-          <a:p>
-            <a:pPr algn="ctr"/>
-          </a:p>
-        </p:txBody>
-      </p:sp>
-      <p:sp>
-        <p:nvSpPr>
-          <p:cNvPr id="64" name="TextBox 63"/>
-          <p:cNvSpPr txBox="1"/>
-          <p:nvPr/>
-        </p:nvSpPr>
-        <p:spPr>
-          <a:xfrm>
-            <a:off x="5016398" y="3076956"/>
-            <a:ext cx="2156155" cy="150876"/>
-          </a:xfrm>
-          <a:prstGeom prst="rect">
-            <a:avLst/>
-          </a:prstGeom>
-          <a:noFill/>
-        </p:spPr>
-        <p:txBody>
-          <a:bodyPr wrap="square" lIns="0" rIns="0" tIns="0" bIns="0" anchor="t">
-            <a:noAutofit/>
-          </a:bodyPr>
-          <a:lstStyle/>
-          <a:p>
-            <a:pPr algn="l">
-              <a:lnSpc>
-                <a:spcPts val="1188"/>
-              </a:lnSpc>
-            </a:pPr>
-            <a:r>
-              <a:rPr sz="900" b="1">
-                <a:solidFill>
-                  <a:srgbClr val="1E2F5C"/>
-                </a:solidFill>
-                <a:latin typeface="Kanit"/>
-              </a:rPr>
-              <a:t>Rice  ข้าวหอมมะลิ</a:t>
-            </a:r>
-          </a:p>
-        </p:txBody>
-      </p:sp>
-      <p:sp>
-        <p:nvSpPr>
-          <p:cNvPr id="65" name="TextBox 64"/>
-          <p:cNvSpPr txBox="1"/>
-          <p:nvPr/>
-        </p:nvSpPr>
-        <p:spPr>
-          <a:xfrm>
-            <a:off x="5016398" y="3218687"/>
-            <a:ext cx="2156155" cy="125730"/>
-          </a:xfrm>
-          <a:prstGeom prst="rect">
-            <a:avLst/>
-          </a:prstGeom>
-          <a:noFill/>
-        </p:spPr>
-        <p:txBody>
-          <a:bodyPr wrap="square" lIns="0" rIns="0" tIns="0" bIns="0" anchor="t">
-            <a:noAutofit/>
-          </a:bodyPr>
-          <a:lstStyle/>
-          <a:p>
-            <a:pPr algn="l">
-              <a:lnSpc>
-                <a:spcPts val="990"/>
-              </a:lnSpc>
-            </a:pPr>
-            <a:r>
-              <a:rPr sz="750" b="0">
-                <a:solidFill>
-                  <a:srgbClr val="606060"/>
-                </a:solidFill>
-                <a:latin typeface="Kanit"/>
-              </a:rPr>
-              <a:t>฿17,727 /ตัน · Isan·N·C</a:t>
-            </a:r>
-          </a:p>
-        </p:txBody>
-      </p:sp>
-      <p:sp>
-        <p:nvSpPr>
-          <p:cNvPr id="66" name="TextBox 65"/>
-          <p:cNvSpPr txBox="1"/>
-          <p:nvPr/>
-        </p:nvSpPr>
-        <p:spPr>
-          <a:xfrm>
-            <a:off x="5016398" y="3351275"/>
-            <a:ext cx="1078077" cy="134112"/>
-          </a:xfrm>
-          <a:prstGeom prst="rect">
-            <a:avLst/>
-          </a:prstGeom>
-          <a:noFill/>
-        </p:spPr>
-        <p:txBody>
-          <a:bodyPr wrap="square" lIns="0" rIns="0" tIns="0" bIns="0" anchor="t">
-            <a:noAutofit/>
-          </a:bodyPr>
-          <a:lstStyle/>
-          <a:p>
-            <a:pPr algn="l">
-              <a:lnSpc>
-                <a:spcPts val="1056"/>
-              </a:lnSpc>
-            </a:pPr>
-            <a:r>
-              <a:rPr sz="800" b="1">
-                <a:solidFill>
-                  <a:srgbClr val="15795F"/>
-                </a:solidFill>
-                <a:latin typeface="Kanit"/>
-              </a:rPr>
-              <a:t>YoY +13.4%</a:t>
-            </a:r>
-          </a:p>
-        </p:txBody>
-      </p:sp>
-      <p:sp>
-        <p:nvSpPr>
-          <p:cNvPr id="67" name="TextBox 66"/>
-          <p:cNvSpPr txBox="1"/>
-          <p:nvPr/>
-        </p:nvSpPr>
-        <p:spPr>
-          <a:xfrm>
-            <a:off x="6094475" y="3351275"/>
-            <a:ext cx="1078077" cy="134112"/>
-          </a:xfrm>
-          <a:prstGeom prst="rect">
-            <a:avLst/>
-          </a:prstGeom>
-          <a:noFill/>
-        </p:spPr>
-        <p:txBody>
-          <a:bodyPr wrap="square" lIns="0" rIns="0" tIns="0" bIns="0" anchor="t">
-            <a:noAutofit/>
-          </a:bodyPr>
-          <a:lstStyle/>
-          <a:p>
-            <a:pPr algn="l">
-              <a:lnSpc>
-                <a:spcPts val="1056"/>
-              </a:lnSpc>
-            </a:pPr>
-            <a:r>
-              <a:rPr sz="800" b="1">
-                <a:solidFill>
-                  <a:srgbClr val="15795F"/>
-                </a:solidFill>
-                <a:latin typeface="Kanit"/>
-              </a:rPr>
-              <a:t>6m +8.1%</a:t>
-            </a:r>
-          </a:p>
-        </p:txBody>
-      </p:sp>
-      <p:sp>
-        <p:nvSpPr>
-          <p:cNvPr id="68" name="Rectangle 67"/>
-          <p:cNvSpPr/>
-          <p:nvPr/>
-        </p:nvSpPr>
-        <p:spPr>
-          <a:xfrm>
-            <a:off x="5016398" y="3506724"/>
-            <a:ext cx="2156155" cy="548640"/>
-          </a:xfrm>
-          <a:prstGeom prst="rect">
-            <a:avLst/>
-          </a:prstGeom>
-          <a:solidFill>
-            <a:srgbClr val="FBFCFE"/>
-          </a:solidFill>
-          <a:ln w="9525">
-            <a:solidFill>
-              <a:srgbClr val="D9DEE9"/>
-            </a:solidFill>
-          </a:ln>
-          <a:effectLst/>
-        </p:spPr>
-        <p:style>
-          <a:lnRef idx="1">
-            <a:schemeClr val="accent1"/>
-          </a:lnRef>
-          <a:fillRef idx="3">
-            <a:schemeClr val="accent1"/>
-          </a:fillRef>
-          <a:effectRef idx="2">
-            <a:schemeClr val="accent1"/>
-          </a:effectRef>
-          <a:fontRef idx="minor">
-            <a:schemeClr val="lt1"/>
-          </a:fontRef>
-        </p:style>
-        <p:txBody>
-          <a:bodyPr rtlCol="0" anchor="ctr" wrap="none"/>
-          <a:lstStyle/>
-          <a:p>
-            <a:pPr algn="ctr"/>
-          </a:p>
-        </p:txBody>
-      </p:sp>
-      <p:sp>
-        <p:nvSpPr>
-          <p:cNvPr id="69" name="Freeform 68"/>
-          <p:cNvSpPr/>
-          <p:nvPr/>
-        </p:nvSpPr>
-        <p:spPr>
-          <a:xfrm>
-            <a:off x="5062118" y="3552444"/>
-            <a:ext cx="2064715" cy="457200"/>
-          </a:xfrm>
-          <a:custGeom>
-            <a:avLst/>
-            <a:gdLst/>
-            <a:ahLst/>
-            <a:cxnLst/>
-            <a:rect l="l" t="t" r="r" b="b"/>
-            <a:pathLst>
-              <a:path w="2064715" h="457200">
-                <a:moveTo>
-                  <a:pt x="0" y="457200"/>
-                </a:moveTo>
-                <a:lnTo>
-                  <a:pt x="412943" y="340931"/>
-                </a:lnTo>
-                <a:lnTo>
-                  <a:pt x="825886" y="253323"/>
-                </a:lnTo>
-                <a:lnTo>
-                  <a:pt x="1238829" y="103264"/>
-                </a:lnTo>
-                <a:lnTo>
-                  <a:pt x="1651772" y="6195"/>
-                </a:lnTo>
-                <a:lnTo>
-                  <a:pt x="2064715" y="0"/>
-                </a:lnTo>
-              </a:path>
-            </a:pathLst>
-          </a:custGeom>
-          <a:noFill/>
-          <a:ln w="20320">
-            <a:solidFill>
-              <a:srgbClr val="15795F"/>
-            </a:solidFill>
-          </a:ln>
-          <a:effectLst/>
-        </p:spPr>
-        <p:style>
-          <a:lnRef idx="1">
-            <a:schemeClr val="accent1"/>
-          </a:lnRef>
-          <a:fillRef idx="3">
-            <a:schemeClr val="accent1"/>
-          </a:fillRef>
-          <a:effectRef idx="2">
-            <a:schemeClr val="accent1"/>
-          </a:effectRef>
-          <a:fontRef idx="minor">
-            <a:schemeClr val="lt1"/>
-          </a:fontRef>
-        </p:style>
-        <p:txBody>
-          <a:bodyPr rtlCol="0" anchor="ctr"/>
-          <a:lstStyle/>
-          <a:p>
-            <a:pPr algn="ctr"/>
-          </a:p>
-        </p:txBody>
-      </p:sp>
-      <p:sp>
-        <p:nvSpPr>
           <p:cNvPr id="70" name="Rounded Rectangle 69"/>
           <p:cNvSpPr/>
           <p:nvPr/>
         </p:nvSpPr>
         <p:spPr>
           <a:xfrm>
-            <a:off x="7085685" y="3511296"/>
+            <a:off x="7085685" y="3557678"/>
             <a:ext cx="82296" cy="82296"/>
           </a:xfrm>
           <a:prstGeom prst="roundRect">
@@ -50894,7 +50894,7 @@
                 </a:solidFill>
                 <a:latin typeface="Kanit"/>
               </a:rPr>
-              <a:t>YoY +27.3%</a:t>
+              <a:t>YoY +25.5%</a:t>
             </a:r>
           </a:p>
         </p:txBody>
@@ -51212,7 +51212,7 @@
                 </a:solidFill>
                 <a:latin typeface="Kanit"/>
               </a:rPr>
-              <a:t>YoY +41.1%</a:t>
+              <a:t>YoY +41.6%</a:t>
             </a:r>
           </a:p>
         </p:txBody>
@@ -51530,7 +51530,7 @@
                 </a:solidFill>
                 <a:latin typeface="Kanit"/>
               </a:rPr>
-              <a:t>YoY +59.3%</a:t>
+              <a:t>YoY +61.3%</a:t>
             </a:r>
           </a:p>
         </p:txBody>
@@ -51848,7 +51848,7 @@
                 </a:solidFill>
                 <a:latin typeface="Kanit"/>
               </a:rPr>
-              <a:t>YoY +94.7%</a:t>
+              <a:t>YoY +105.0%</a:t>
             </a:r>
           </a:p>
         </p:txBody>
@@ -52212,7 +52212,7 @@
                 </a:solidFill>
                 <a:latin typeface="Kanit"/>
               </a:rPr>
-              <a:t>Farm-gate prices MEASURED — NABC daily quotes, monthly means, in baht as published (no currency conversion); newest quote 2026-08-04, history vintage 2026-08-02. Farm gate (ราคาที่เกษตรกรขายได้) is what the grower is paid at first sale, before trading, milling or transport take a cut — not the world index and not a supermarket price. Belts are an ESTIMATED read of where each commodity is produced, and they overlap. Sugar is OCSB's announced season price, one point a year, so it has no six-month move to show.</a:t>
+              <a:t>Farm-gate prices MEASURED — NABC daily quotes, monthly means, in baht as published (no currency conversion); newest quote 2026-08-07, history vintage 2026-08-02. Farm gate (ราคาที่เกษตรกรขายได้) is what the grower is paid at first sale, before trading, milling or transport take a cut — not the world index and not a supermarket price. Belts are an ESTIMATED read of where each commodity is produced, and they overlap. Sugar is OCSB's announced season price, one point a year, so it has no six-month move to show.</a:t>
             </a:r>
           </a:p>
         </p:txBody>

--- a/docs/decks/mcom-2026-08-05-macro.pptx
+++ b/docs/decks/mcom-2026-08-05-macro.pptx
@@ -6240,7 +6240,7 @@
                 </a:solidFill>
                 <a:latin typeface="Kanit"/>
               </a:rPr>
-              <a:t>167</a:t>
+              <a:t>156</a:t>
             </a:r>
           </a:p>
         </p:txBody>
@@ -6279,7 +6279,7 @@
                 </a:solidFill>
                 <a:latin typeface="Kanit"/>
               </a:rPr>
-              <a:t>of 796 (21.0%) · live · 2026-08-09</a:t>
+              <a:t>of 794 (19.6%) · live · 2026-08-11</a:t>
             </a:r>
           </a:p>
         </p:txBody>
@@ -6405,7 +6405,7 @@
                 </a:solidFill>
                 <a:latin typeface="Kanit"/>
               </a:rPr>
-              <a:t>20</a:t>
+              <a:t>14</a:t>
             </a:r>
           </a:p>
         </p:txBody>
@@ -6444,7 +6444,7 @@
                 </a:solidFill>
                 <a:latin typeface="Kanit"/>
               </a:rPr>
-              <a:t>latest daily reading · 2026-08-09</a:t>
+              <a:t>latest daily reading · 2026-08-11</a:t>
             </a:r>
           </a:p>
         </p:txBody>
@@ -7905,7 +7905,7 @@
                           </a:solidFill>
                           <a:latin typeface="Kanit"/>
                         </a:rPr>
-                        <a:t>121</a:t>
+                        <a:t>123</a:t>
                       </a:r>
                     </a:p>
                   </a:txBody>
@@ -7928,7 +7928,7 @@
                           </a:solidFill>
                           <a:latin typeface="Kanit"/>
                         </a:rPr>
-                        <a:t>82</a:t>
+                        <a:t>105</a:t>
                       </a:r>
                     </a:p>
                   </a:txBody>
@@ -7951,7 +7951,7 @@
                           </a:solidFill>
                           <a:latin typeface="Kanit"/>
                         </a:rPr>
-                        <a:t>24.8%</a:t>
+                        <a:t>10.6%</a:t>
                       </a:r>
                     </a:p>
                   </a:txBody>
@@ -7974,7 +7974,7 @@
                           </a:solidFill>
                           <a:latin typeface="Kanit"/>
                         </a:rPr>
-                        <a:t>5/13</a:t>
+                        <a:t>4/13</a:t>
                       </a:r>
                     </a:p>
                   </a:txBody>
@@ -8022,7 +8022,7 @@
                           </a:solidFill>
                           <a:latin typeface="Kanit"/>
                         </a:rPr>
-                        <a:t>น่าน</a:t>
+                        <a:t>นราธิวาส</a:t>
                       </a:r>
                     </a:p>
                   </a:txBody>
@@ -8045,7 +8045,7 @@
                           </a:solidFill>
                           <a:latin typeface="Kanit"/>
                         </a:rPr>
-                        <a:t>221</a:t>
+                        <a:t>64</a:t>
                       </a:r>
                     </a:p>
                   </a:txBody>
@@ -8068,7 +8068,7 @@
                           </a:solidFill>
                           <a:latin typeface="Kanit"/>
                         </a:rPr>
-                        <a:t>134</a:t>
+                        <a:t>38</a:t>
                       </a:r>
                     </a:p>
                   </a:txBody>
@@ -8091,7 +8091,7 @@
                           </a:solidFill>
                           <a:latin typeface="Kanit"/>
                         </a:rPr>
-                        <a:t>23.5%</a:t>
+                        <a:t>1.6%</a:t>
                       </a:r>
                     </a:p>
                   </a:txBody>
@@ -8114,7 +8114,7 @@
                           </a:solidFill>
                           <a:latin typeface="Kanit"/>
                         </a:rPr>
-                        <a:t>10/28</a:t>
+                        <a:t>5/10</a:t>
                       </a:r>
                     </a:p>
                   </a:txBody>
@@ -8162,7 +8162,7 @@
                           </a:solidFill>
                           <a:latin typeface="Kanit"/>
                         </a:rPr>
-                        <a:t>นครพนม</a:t>
+                        <a:t>ชัยภูมิ</a:t>
                       </a:r>
                     </a:p>
                   </a:txBody>
@@ -8185,7 +8185,7 @@
                           </a:solidFill>
                           <a:latin typeface="Kanit"/>
                         </a:rPr>
-                        <a:t>29</a:t>
+                        <a:t>58</a:t>
                       </a:r>
                     </a:p>
                   </a:txBody>
@@ -8208,7 +8208,7 @@
                           </a:solidFill>
                           <a:latin typeface="Kanit"/>
                         </a:rPr>
-                        <a:t>278</a:t>
+                        <a:t>24</a:t>
                       </a:r>
                     </a:p>
                   </a:txBody>
@@ -8227,11 +8227,11 @@
                       <a:r>
                         <a:rPr sz="900" b="1">
                           <a:solidFill>
-                            <a:srgbClr val="F5C242"/>
-                          </a:solidFill>
-                          <a:latin typeface="Kanit"/>
-                        </a:rPr>
-                        <a:t>17.2%</a:t>
+                            <a:srgbClr val="606060"/>
+                          </a:solidFill>
+                          <a:latin typeface="Kanit"/>
+                        </a:rPr>
+                        <a:t>0.0%</a:t>
                       </a:r>
                     </a:p>
                   </a:txBody>
@@ -8254,7 +8254,7 @@
                           </a:solidFill>
                           <a:latin typeface="Kanit"/>
                         </a:rPr>
-                        <a:t>9/15</a:t>
+                        <a:t>1/12</a:t>
                       </a:r>
                     </a:p>
                   </a:txBody>
@@ -8302,7 +8302,7 @@
                           </a:solidFill>
                           <a:latin typeface="Kanit"/>
                         </a:rPr>
-                        <a:t>สกลนคร</a:t>
+                        <a:t>นครพนม</a:t>
                       </a:r>
                     </a:p>
                   </a:txBody>
@@ -8325,7 +8325,7 @@
                           </a:solidFill>
                           <a:latin typeface="Kanit"/>
                         </a:rPr>
-                        <a:t>36</a:t>
+                        <a:t>29</a:t>
                       </a:r>
                     </a:p>
                   </a:txBody>
@@ -8348,7 +8348,7 @@
                           </a:solidFill>
                           <a:latin typeface="Kanit"/>
                         </a:rPr>
-                        <a:t>47</a:t>
+                        <a:t>9</a:t>
                       </a:r>
                     </a:p>
                   </a:txBody>
@@ -8367,11 +8367,11 @@
                       <a:r>
                         <a:rPr sz="900" b="1">
                           <a:solidFill>
-                            <a:srgbClr val="F5C242"/>
-                          </a:solidFill>
-                          <a:latin typeface="Kanit"/>
-                        </a:rPr>
-                        <a:t>2.8%</a:t>
+                            <a:srgbClr val="606060"/>
+                          </a:solidFill>
+                          <a:latin typeface="Kanit"/>
+                        </a:rPr>
+                        <a:t>0.0%</a:t>
                       </a:r>
                     </a:p>
                   </a:txBody>
@@ -8394,7 +8394,7 @@
                           </a:solidFill>
                           <a:latin typeface="Kanit"/>
                         </a:rPr>
-                        <a:t>9/14</a:t>
+                        <a:t>9/15</a:t>
                       </a:r>
                     </a:p>
                   </a:txBody>
@@ -8442,7 +8442,7 @@
                           </a:solidFill>
                           <a:latin typeface="Kanit"/>
                         </a:rPr>
-                        <a:t>นราธิวาส</a:t>
+                        <a:t>บึงกาฬ</a:t>
                       </a:r>
                     </a:p>
                   </a:txBody>
@@ -8465,7 +8465,7 @@
                           </a:solidFill>
                           <a:latin typeface="Kanit"/>
                         </a:rPr>
-                        <a:t>64</a:t>
+                        <a:t>11</a:t>
                       </a:r>
                     </a:p>
                   </a:txBody>
@@ -8488,7 +8488,7 @@
                           </a:solidFill>
                           <a:latin typeface="Kanit"/>
                         </a:rPr>
-                        <a:t>24</a:t>
+                        <a:t>23</a:t>
                       </a:r>
                     </a:p>
                   </a:txBody>
@@ -8534,7 +8534,7 @@
                           </a:solidFill>
                           <a:latin typeface="Kanit"/>
                         </a:rPr>
-                        <a:t>5/10</a:t>
+                        <a:t>1/1</a:t>
                       </a:r>
                     </a:p>
                   </a:txBody>
@@ -8605,7 +8605,7 @@
                           </a:solidFill>
                           <a:latin typeface="Kanit"/>
                         </a:rPr>
-                        <a:t>18</a:t>
+                        <a:t>17</a:t>
                       </a:r>
                     </a:p>
                   </a:txBody>
@@ -8628,7 +8628,7 @@
                           </a:solidFill>
                           <a:latin typeface="Kanit"/>
                         </a:rPr>
-                        <a:t>22</a:t>
+                        <a:t>16</a:t>
                       </a:r>
                     </a:p>
                   </a:txBody>
@@ -8909,7 +8909,7 @@
                 </a:solidFill>
                 <a:latin typeface="Kanit"/>
               </a:rPr>
-              <a:t>Planted area MEASURED (OAE — 3,295 amphoe crop rows). Drought is a MODELLED SPEI index from rainfall and evapotranspiration, refreshed monthly, retrieved 2026-07-20 — the best national-coverage signal available, but nobody has walked those districts. Rain and river telemetry MEASURED (ThaiWater, live, pulled daily and accumulated — a missed pull leaves a gap rather than an invented point) · rain to 2026-08-09, river to 2026-08-09. Structural flood exposure MEASURED (GISTDA 1:50,000 repeated-flooding census, 2005-2016 — a 12-year ground record, not a forecast).</a:t>
+              <a:t>Planted area MEASURED (OAE — 3,295 amphoe crop rows). Drought is a MODELLED SPEI index from rainfall and evapotranspiration, refreshed monthly, retrieved 2026-07-20 — the best national-coverage signal available, but nobody has walked those districts. Rain and river telemetry MEASURED (ThaiWater, live, pulled daily and accumulated — a missed pull leaves a gap rather than an invented point) · rain to 2026-08-11, river to 2026-08-11. Structural flood exposure MEASURED (GISTDA 1:50,000 repeated-flooding census, 2005-2016 — a 12-year ground record, not a forecast).</a:t>
             </a:r>
           </a:p>
         </p:txBody>
@@ -31476,7 +31476,7 @@
                 </a:solidFill>
                 <a:latin typeface="Kanit"/>
               </a:rPr>
-              <a:t>Median crop income rose +16.1%, but four provinces fell — all on the coconut (มะพร้าว) belt, worst สมุทรสงคราม at −64.0%.</a:t>
+              <a:t>Median crop income rose +16.6%, but four provinces fell — all on the coconut (มะพร้าว) belt, worst สมุทรสงคราม at −63.4%.</a:t>
             </a:r>
           </a:p>
         </p:txBody>
@@ -32047,7 +32047,7 @@
                 </a:solidFill>
                 <a:latin typeface="Kanit"/>
               </a:rPr>
-              <a:t>Vintages — world prices 2026M06 · Thai farm gate 2026-08-07 · Thai price history 2026-08-02 · crop cost of production OAE Cai-up 2568 (crop year 2568/69, OAE forecast Mar 2569) · drought 2026-06-21 · CPI 2026-05 · GDP 2026-Q1 · IMF WEO 2026 · resale index 2026-05 · registrations to 2026-01 · household debt NSO SES 2566 · wages NSO LFS 2568 · telemetry 2026-08-09.</a:t>
+              <a:t>Vintages — world prices 2026M06 · Thai farm gate 2026-08-11 · Thai price history 2026-08-02 · crop cost of production OAE Cai-up 2568 (crop year 2568/69, OAE forecast Mar 2569) · drought 2026-06-21 · CPI 2026-05 · GDP 2026-Q1 · IMF WEO 2026 · resale index 2026-05 · registrations to 2026-01 · household debt NSO SES 2566 · wages NSO LFS 2568 · telemetry 2026-08-11.</a:t>
             </a:r>
           </a:p>
         </p:txBody>
@@ -32544,9 +32544,9 @@
                 <a:latin typeface="Kanit"/>
               </a:rPr>
               <a:t>Not on the world index — the farm gate (ราคาที่เกษตรกรขายได้) says otherwise.
-• Seven of seventeen Thai farm-gate prices are falling year on year.
+• Five of seventeen Thai farm-gate prices are falling year on year.
 • Beef: farm gate −6.1% vs world index +11.8%.
-• Margin over price: a 26% price move becomes an 83% swing in crop income.</a:t>
+• Margin over price: a 26% price move becomes an 85% swing in crop income.</a:t>
             </a:r>
           </a:p>
         </p:txBody>
@@ -37087,7 +37087,7 @@
                 </a:solidFill>
                 <a:latin typeface="Kanit"/>
               </a:rPr>
-              <a:t>338 of 928 districts · 167 of 796 rivers high</a:t>
+              <a:t>338 of 928 districts · 156 of 794 rivers high</a:t>
             </a:r>
           </a:p>
         </p:txBody>
@@ -37859,7 +37859,7 @@
                           </a:solidFill>
                           <a:latin typeface="Kanit"/>
                         </a:rPr>
-                        <a:t>40/159</a:t>
+                        <a:t>39/158</a:t>
                       </a:r>
                     </a:p>
                   </a:txBody>
@@ -38091,7 +38091,7 @@
                           </a:solidFill>
                           <a:latin typeface="Kanit"/>
                         </a:rPr>
-                        <a:t>45/274</a:t>
+                        <a:t>42/273</a:t>
                       </a:r>
                     </a:p>
                   </a:txBody>
@@ -38323,7 +38323,7 @@
                           </a:solidFill>
                           <a:latin typeface="Kanit"/>
                         </a:rPr>
-                        <a:t>27/168</a:t>
+                        <a:t>24/168</a:t>
                       </a:r>
                     </a:p>
                   </a:txBody>
@@ -38555,7 +38555,7 @@
                           </a:solidFill>
                           <a:latin typeface="Kanit"/>
                         </a:rPr>
-                        <a:t>7/52</a:t>
+                        <a:t>6/52</a:t>
                       </a:r>
                     </a:p>
                   </a:txBody>
@@ -38787,7 +38787,7 @@
                           </a:solidFill>
                           <a:latin typeface="Kanit"/>
                         </a:rPr>
-                        <a:t>48/143</a:t>
+                        <a:t>45/143</a:t>
                       </a:r>
                     </a:p>
                   </a:txBody>
@@ -39502,7 +39502,7 @@
                 </a:solidFill>
                 <a:latin typeface="Kanit"/>
               </a:rPr>
-              <a:t>Seventeen of the 21 commodities we track have a measured Thai farm-gate price (ราคาที่เกษตรกรขายได้). Seven are falling year on year.</a:t>
+              <a:t>Seventeen of the 21 commodities we track have a measured Thai farm-gate price (ราคาที่เกษตรกรขายได้). Five are falling year on year.</a:t>
             </a:r>
           </a:p>
         </p:txBody>
@@ -39673,7 +39673,7 @@
         </p:nvGraphicFramePr>
         <p:xfrm>
           <a:off x="411480" y="2033016"/>
-          <a:ext cx="11365992" cy="2108605"/>
+          <a:ext cx="11365992" cy="1600199"/>
         </p:xfrm>
         <a:graphic>
           <a:graphicData uri="http://schemas.openxmlformats.org/drawingml/2006/table">
@@ -39936,7 +39936,7 @@
                           </a:solidFill>
                           <a:latin typeface="Kanit"/>
                         </a:rPr>
-                        <a:t>−68.4%</a:t>
+                        <a:t>−67.8%</a:t>
                       </a:r>
                     </a:p>
                   </a:txBody>
@@ -40658,332 +40658,6 @@
                           <a:latin typeface="Kanit"/>
                         </a:rPr>
                         <a:t>23%</a:t>
-                      </a:r>
-                    </a:p>
-                  </a:txBody>
-                  <a:tcPr marL="54864" marR="54864" marT="18288" marB="18288" anchor="ctr">
-                    <a:solidFill>
-                      <a:srgbClr val="FFFFFF"/>
-                    </a:solidFill>
-                  </a:tcPr>
-                </a:tc>
-              </a:tr>
-              <a:tr h="254203">
-                <a:tc>
-                  <a:txBody>
-                    <a:bodyPr wrap="square"/>
-                    <a:lstStyle/>
-                    <a:p>
-                      <a:pPr algn="l"/>
-                      <a:r>
-                        <a:rPr sz="1000" b="1">
-                          <a:solidFill>
-                            <a:srgbClr val="1E2F5C"/>
-                          </a:solidFill>
-                          <a:latin typeface="Kanit"/>
-                        </a:rPr>
-                        <a:t>Pork</a:t>
-                      </a:r>
-                    </a:p>
-                  </a:txBody>
-                  <a:tcPr marL="54864" marR="54864" marT="18288" marB="18288" anchor="ctr">
-                    <a:solidFill>
-                      <a:srgbClr val="F7F9FC"/>
-                    </a:solidFill>
-                  </a:tcPr>
-                </a:tc>
-                <a:tc>
-                  <a:txBody>
-                    <a:bodyPr wrap="square"/>
-                    <a:lstStyle/>
-                    <a:p>
-                      <a:pPr algn="l"/>
-                      <a:r>
-                        <a:rPr sz="1000" b="0">
-                          <a:solidFill>
-                            <a:srgbClr val="1E2F5C"/>
-                          </a:solidFill>
-                          <a:latin typeface="Kanit"/>
-                        </a:rPr>
-                        <a:t>Livestock</a:t>
-                      </a:r>
-                    </a:p>
-                  </a:txBody>
-                  <a:tcPr marL="54864" marR="54864" marT="18288" marB="18288" anchor="ctr">
-                    <a:solidFill>
-                      <a:srgbClr val="F7F9FC"/>
-                    </a:solidFill>
-                  </a:tcPr>
-                </a:tc>
-                <a:tc>
-                  <a:txBody>
-                    <a:bodyPr wrap="square"/>
-                    <a:lstStyle/>
-                    <a:p>
-                      <a:pPr algn="l"/>
-                      <a:r>
-                        <a:rPr sz="1000" b="0">
-                          <a:solidFill>
-                            <a:srgbClr val="1E2F5C"/>
-                          </a:solidFill>
-                          <a:latin typeface="Kanit"/>
-                        </a:rPr>
-                        <a:t>C · W · E</a:t>
-                      </a:r>
-                    </a:p>
-                  </a:txBody>
-                  <a:tcPr marL="54864" marR="54864" marT="18288" marB="18288" anchor="ctr">
-                    <a:solidFill>
-                      <a:srgbClr val="F7F9FC"/>
-                    </a:solidFill>
-                  </a:tcPr>
-                </a:tc>
-                <a:tc>
-                  <a:txBody>
-                    <a:bodyPr wrap="square"/>
-                    <a:lstStyle/>
-                    <a:p>
-                      <a:pPr algn="r"/>
-                      <a:r>
-                        <a:rPr sz="1000" b="1">
-                          <a:solidFill>
-                            <a:srgbClr val="CC0000"/>
-                          </a:solidFill>
-                          <a:latin typeface="Kanit"/>
-                        </a:rPr>
-                        <a:t>−1.2%</a:t>
-                      </a:r>
-                    </a:p>
-                  </a:txBody>
-                  <a:tcPr marL="54864" marR="54864" marT="18288" marB="18288" anchor="ctr">
-                    <a:solidFill>
-                      <a:srgbClr val="F7F9FC"/>
-                    </a:solidFill>
-                  </a:tcPr>
-                </a:tc>
-                <a:tc>
-                  <a:txBody>
-                    <a:bodyPr wrap="square"/>
-                    <a:lstStyle/>
-                    <a:p>
-                      <a:pPr algn="r"/>
-                      <a:r>
-                        <a:rPr sz="1000" b="1">
-                          <a:solidFill>
-                            <a:srgbClr val="15795F"/>
-                          </a:solidFill>
-                          <a:latin typeface="Kanit"/>
-                        </a:rPr>
-                        <a:t>+6.1%</a:t>
-                      </a:r>
-                    </a:p>
-                  </a:txBody>
-                  <a:tcPr marL="54864" marR="54864" marT="18288" marB="18288" anchor="ctr">
-                    <a:solidFill>
-                      <a:srgbClr val="F7F9FC"/>
-                    </a:solidFill>
-                  </a:tcPr>
-                </a:tc>
-                <a:tc>
-                  <a:txBody>
-                    <a:bodyPr wrap="square"/>
-                    <a:lstStyle/>
-                    <a:p>
-                      <a:pPr algn="r"/>
-                      <a:r>
-                        <a:rPr sz="1000" b="1">
-                          <a:solidFill>
-                            <a:srgbClr val="7A4FE0"/>
-                          </a:solidFill>
-                          <a:latin typeface="Kanit"/>
-                        </a:rPr>
-                        <a:t>32,143</a:t>
-                      </a:r>
-                    </a:p>
-                  </a:txBody>
-                  <a:tcPr marL="54864" marR="54864" marT="18288" marB="18288" anchor="ctr">
-                    <a:solidFill>
-                      <a:srgbClr val="F7F9FC"/>
-                    </a:solidFill>
-                  </a:tcPr>
-                </a:tc>
-                <a:tc>
-                  <a:txBody>
-                    <a:bodyPr wrap="square"/>
-                    <a:lstStyle/>
-                    <a:p>
-                      <a:pPr algn="r"/>
-                      <a:r>
-                        <a:rPr sz="1000" b="0">
-                          <a:solidFill>
-                            <a:srgbClr val="606060"/>
-                          </a:solidFill>
-                          <a:latin typeface="Kanit"/>
-                        </a:rPr>
-                        <a:t>22%</a:t>
-                      </a:r>
-                    </a:p>
-                  </a:txBody>
-                  <a:tcPr marL="54864" marR="54864" marT="18288" marB="18288" anchor="ctr">
-                    <a:solidFill>
-                      <a:srgbClr val="F7F9FC"/>
-                    </a:solidFill>
-                  </a:tcPr>
-                </a:tc>
-              </a:tr>
-              <a:tr h="254203">
-                <a:tc>
-                  <a:txBody>
-                    <a:bodyPr wrap="square"/>
-                    <a:lstStyle/>
-                    <a:p>
-                      <a:pPr algn="l"/>
-                      <a:r>
-                        <a:rPr sz="1000" b="1">
-                          <a:solidFill>
-                            <a:srgbClr val="1E2F5C"/>
-                          </a:solidFill>
-                          <a:latin typeface="Kanit"/>
-                        </a:rPr>
-                        <a:t>White shrimp</a:t>
-                      </a:r>
-                    </a:p>
-                  </a:txBody>
-                  <a:tcPr marL="54864" marR="54864" marT="18288" marB="18288" anchor="ctr">
-                    <a:solidFill>
-                      <a:srgbClr val="FFFFFF"/>
-                    </a:solidFill>
-                  </a:tcPr>
-                </a:tc>
-                <a:tc>
-                  <a:txBody>
-                    <a:bodyPr wrap="square"/>
-                    <a:lstStyle/>
-                    <a:p>
-                      <a:pPr algn="l"/>
-                      <a:r>
-                        <a:rPr sz="1000" b="0">
-                          <a:solidFill>
-                            <a:srgbClr val="1E2F5C"/>
-                          </a:solidFill>
-                          <a:latin typeface="Kanit"/>
-                        </a:rPr>
-                        <a:t>Fisheries</a:t>
-                      </a:r>
-                    </a:p>
-                  </a:txBody>
-                  <a:tcPr marL="54864" marR="54864" marT="18288" marB="18288" anchor="ctr">
-                    <a:solidFill>
-                      <a:srgbClr val="FFFFFF"/>
-                    </a:solidFill>
-                  </a:tcPr>
-                </a:tc>
-                <a:tc>
-                  <a:txBody>
-                    <a:bodyPr wrap="square"/>
-                    <a:lstStyle/>
-                    <a:p>
-                      <a:pPr algn="l"/>
-                      <a:r>
-                        <a:rPr sz="1000" b="0">
-                          <a:solidFill>
-                            <a:srgbClr val="1E2F5C"/>
-                          </a:solidFill>
-                          <a:latin typeface="Kanit"/>
-                        </a:rPr>
-                        <a:t>S · E coast</a:t>
-                      </a:r>
-                    </a:p>
-                  </a:txBody>
-                  <a:tcPr marL="54864" marR="54864" marT="18288" marB="18288" anchor="ctr">
-                    <a:solidFill>
-                      <a:srgbClr val="FFFFFF"/>
-                    </a:solidFill>
-                  </a:tcPr>
-                </a:tc>
-                <a:tc>
-                  <a:txBody>
-                    <a:bodyPr wrap="square"/>
-                    <a:lstStyle/>
-                    <a:p>
-                      <a:pPr algn="r"/>
-                      <a:r>
-                        <a:rPr sz="1000" b="1">
-                          <a:solidFill>
-                            <a:srgbClr val="CC0000"/>
-                          </a:solidFill>
-                          <a:latin typeface="Kanit"/>
-                        </a:rPr>
-                        <a:t>−0.4%</a:t>
-                      </a:r>
-                    </a:p>
-                  </a:txBody>
-                  <a:tcPr marL="54864" marR="54864" marT="18288" marB="18288" anchor="ctr">
-                    <a:solidFill>
-                      <a:srgbClr val="FFFFFF"/>
-                    </a:solidFill>
-                  </a:tcPr>
-                </a:tc>
-                <a:tc>
-                  <a:txBody>
-                    <a:bodyPr wrap="square"/>
-                    <a:lstStyle/>
-                    <a:p>
-                      <a:pPr algn="r"/>
-                      <a:r>
-                        <a:rPr sz="1000" b="1">
-                          <a:solidFill>
-                            <a:srgbClr val="CC0000"/>
-                          </a:solidFill>
-                          <a:latin typeface="Kanit"/>
-                        </a:rPr>
-                        <a:t>−15.8%</a:t>
-                      </a:r>
-                    </a:p>
-                  </a:txBody>
-                  <a:tcPr marL="54864" marR="54864" marT="18288" marB="18288" anchor="ctr">
-                    <a:solidFill>
-                      <a:srgbClr val="FFFFFF"/>
-                    </a:solidFill>
-                  </a:tcPr>
-                </a:tc>
-                <a:tc>
-                  <a:txBody>
-                    <a:bodyPr wrap="square"/>
-                    <a:lstStyle/>
-                    <a:p>
-                      <a:pPr algn="r"/>
-                      <a:r>
-                        <a:rPr sz="1000" b="1">
-                          <a:solidFill>
-                            <a:srgbClr val="7A4FE0"/>
-                          </a:solidFill>
-                          <a:latin typeface="Kanit"/>
-                        </a:rPr>
-                        <a:t>9,675</a:t>
-                      </a:r>
-                    </a:p>
-                  </a:txBody>
-                  <a:tcPr marL="54864" marR="54864" marT="18288" marB="18288" anchor="ctr">
-                    <a:solidFill>
-                      <a:srgbClr val="FFFFFF"/>
-                    </a:solidFill>
-                  </a:tcPr>
-                </a:tc>
-                <a:tc>
-                  <a:txBody>
-                    <a:bodyPr wrap="square"/>
-                    <a:lstStyle/>
-                    <a:p>
-                      <a:pPr algn="r"/>
-                      <a:r>
-                        <a:rPr sz="1000" b="0">
-                          <a:solidFill>
-                            <a:srgbClr val="606060"/>
-                          </a:solidFill>
-                          <a:latin typeface="Kanit"/>
-                        </a:rPr>
-                        <a:t>9%</a:t>
                       </a:r>
                     </a:p>
                   </a:txBody>
@@ -41006,7 +40680,7 @@
         </p:nvSpPr>
         <p:spPr>
           <a:xfrm>
-            <a:off x="411480" y="4269638"/>
+            <a:off x="411480" y="3761232"/>
             <a:ext cx="535747" cy="192024"/>
           </a:xfrm>
           <a:prstGeom prst="roundRect">
@@ -41052,7 +40726,7 @@
         </p:nvSpPr>
         <p:spPr>
           <a:xfrm>
-            <a:off x="411480" y="4298899"/>
+            <a:off x="411480" y="3790492"/>
             <a:ext cx="535747" cy="134112"/>
           </a:xfrm>
           <a:prstGeom prst="rect">
@@ -41091,7 +40765,7 @@
         </p:nvSpPr>
         <p:spPr>
           <a:xfrm>
-            <a:off x="1056955" y="4283354"/>
+            <a:off x="1056955" y="3774947"/>
             <a:ext cx="10720516" cy="617220"/>
           </a:xfrm>
           <a:prstGeom prst="rect">
@@ -41117,7 +40791,7 @@
                 </a:solidFill>
                 <a:latin typeface="Kanit"/>
               </a:rPr>
-              <a:t>Prices MEASURED — NABC daily quotes for the Thai farm gate, OCSB announced cane price; newest quote 2026-08-07. The six-month move is computed from NABC's own monthly series (thai_price_history, vintage 2026-08-02); a crop with no monthly series is marked, never estimated. Belt is an ESTIMATED read of where each commodity is produced, and belts overlap. Farming accounts are OURS and MEASURED — accounts whose recorded occupation is เกษตร in the belt provinces, from the 382,735-account tape at 2026-07; no cell below 30 accounts is published. They live where the crop grows; they are not confirmed to grow it.</a:t>
+              <a:t>Prices MEASURED — NABC daily quotes for the Thai farm gate, OCSB announced cane price; newest quote 2026-08-11. The six-month move is computed from NABC's own monthly series (thai_price_history, vintage 2026-08-02); a crop with no monthly series is marked, never estimated. Belt is an ESTIMATED read of where each commodity is produced, and belts overlap. Farming accounts are OURS and MEASURED — accounts whose recorded occupation is เกษตร in the belt provinces, from the 382,735-account tape at 2026-07; no cell below 30 accounts is published. They live where the crop grows; they are not confirmed to grow it.</a:t>
             </a:r>
           </a:p>
         </p:txBody>
@@ -41130,7 +40804,7 @@
         </p:nvSpPr>
         <p:spPr>
           <a:xfrm>
-            <a:off x="411480" y="5033162"/>
+            <a:off x="411480" y="4524756"/>
             <a:ext cx="11365992" cy="675767"/>
           </a:xfrm>
           <a:prstGeom prst="rect">
@@ -41174,7 +40848,7 @@
         </p:nvSpPr>
         <p:spPr>
           <a:xfrm>
-            <a:off x="411480" y="5033162"/>
+            <a:off x="411480" y="4524756"/>
             <a:ext cx="50292" cy="675767"/>
           </a:xfrm>
           <a:prstGeom prst="rect">
@@ -41218,7 +40892,7 @@
         </p:nvSpPr>
         <p:spPr>
           <a:xfrm>
-            <a:off x="630936" y="5179466"/>
+            <a:off x="630936" y="4671060"/>
             <a:ext cx="11036808" cy="158750"/>
           </a:xfrm>
           <a:prstGeom prst="rect">
@@ -41257,7 +40931,7 @@
         </p:nvSpPr>
         <p:spPr>
           <a:xfrm>
-            <a:off x="630936" y="5383936"/>
+            <a:off x="630936" y="4875529"/>
             <a:ext cx="11036808" cy="178689"/>
           </a:xfrm>
           <a:prstGeom prst="rect">
@@ -45005,7 +44679,7 @@
                 </a:solidFill>
                 <a:latin typeface="Kanit"/>
               </a:rPr>
-              <a:t>coconut −68.4%, pineapple −18.4%, sugarcane −17.9% year on year</a:t>
+              <a:t>coconut −67.8%, pineapple −18.4%, sugarcane −17.9% year on year</a:t>
             </a:r>
           </a:p>
         </p:txBody>
@@ -45131,7 +44805,7 @@
                 </a:solidFill>
                 <a:latin typeface="Kanit"/>
               </a:rPr>
-              <a:t>+16.1%</a:t>
+              <a:t>+16.6%</a:t>
             </a:r>
           </a:p>
         </p:txBody>
@@ -45605,7 +45279,7 @@
                           </a:solidFill>
                           <a:latin typeface="Kanit"/>
                         </a:rPr>
-                        <a:t>+6.1%</a:t>
+                        <a:t>+6.5%</a:t>
                       </a:r>
                     </a:p>
                   </a:txBody>
@@ -45674,7 +45348,7 @@
                           </a:solidFill>
                           <a:latin typeface="Kanit"/>
                         </a:rPr>
-                        <a:t>-64.0%</a:t>
+                        <a:t>-63.4%</a:t>
                       </a:r>
                     </a:p>
                   </a:txBody>
@@ -45745,7 +45419,7 @@
                           </a:solidFill>
                           <a:latin typeface="Kanit"/>
                         </a:rPr>
-                        <a:t>+14.9%</a:t>
+                        <a:t>+15.3%</a:t>
                       </a:r>
                     </a:p>
                   </a:txBody>
@@ -45814,7 +45488,7 @@
                           </a:solidFill>
                           <a:latin typeface="Kanit"/>
                         </a:rPr>
-                        <a:t>+9.5%</a:t>
+                        <a:t>+9.8%</a:t>
                       </a:r>
                     </a:p>
                   </a:txBody>
@@ -45885,7 +45559,7 @@
                           </a:solidFill>
                           <a:latin typeface="Kanit"/>
                         </a:rPr>
-                        <a:t>+16.2%</a:t>
+                        <a:t>+16.7%</a:t>
                       </a:r>
                     </a:p>
                   </a:txBody>
@@ -45954,7 +45628,7 @@
                           </a:solidFill>
                           <a:latin typeface="Kanit"/>
                         </a:rPr>
-                        <a:t>+8.3%</a:t>
+                        <a:t>+8.6%</a:t>
                       </a:r>
                     </a:p>
                   </a:txBody>
@@ -46025,7 +45699,7 @@
                           </a:solidFill>
                           <a:latin typeface="Kanit"/>
                         </a:rPr>
-                        <a:t>+25.5%</a:t>
+                        <a:t>+25.8%</a:t>
                       </a:r>
                     </a:p>
                   </a:txBody>
@@ -46094,7 +45768,7 @@
                           </a:solidFill>
                           <a:latin typeface="Kanit"/>
                         </a:rPr>
-                        <a:t>+10.2%</a:t>
+                        <a:t>+10.7%</a:t>
                       </a:r>
                     </a:p>
                   </a:txBody>
@@ -46165,7 +45839,7 @@
                           </a:solidFill>
                           <a:latin typeface="Kanit"/>
                         </a:rPr>
-                        <a:t>+36.3%</a:t>
+                        <a:t>+36.5%</a:t>
                       </a:r>
                     </a:p>
                   </a:txBody>
@@ -46234,7 +45908,7 @@
                           </a:solidFill>
                           <a:latin typeface="Kanit"/>
                         </a:rPr>
-                        <a:t>+28.9%</a:t>
+                        <a:t>+29.0%</a:t>
                       </a:r>
                     </a:p>
                   </a:txBody>
@@ -46410,7 +46084,7 @@
                 </a:solidFill>
                 <a:latin typeface="Kanit"/>
               </a:rPr>
-              <a:t>•  +42% rubber, +61% cassava, +26% palm, +14% rice at the farm gate. Crop income rose in every region.
+              <a:t>•  +42% rubber, +64% cassava, +25% palm, +14% rice at the farm gate. Crop income rose in every region.
 •  Four provinces fell — all coconut, all on the western gulf. Coconut price is down 68%.
 •  A gain on paper is not cash yet — the next table nets prices against cost.</a:t>
             </a:r>
@@ -46713,7 +46387,7 @@
                           </a:solidFill>
                           <a:latin typeface="Kanit"/>
                         </a:rPr>
-                        <a:t>+16.1%</a:t>
+                        <a:t>+16.7%</a:t>
                       </a:r>
                     </a:p>
                   </a:txBody>
@@ -46876,7 +46550,7 @@
                           </a:solidFill>
                           <a:latin typeface="Kanit"/>
                         </a:rPr>
-                        <a:t>+20.5%</a:t>
+                        <a:t>+21.1%</a:t>
                       </a:r>
                     </a:p>
                   </a:txBody>
@@ -47039,7 +46713,7 @@
                           </a:solidFill>
                           <a:latin typeface="Kanit"/>
                         </a:rPr>
-                        <a:t>+10.5%</a:t>
+                        <a:t>+10.9%</a:t>
                       </a:r>
                     </a:p>
                   </a:txBody>
@@ -47202,7 +46876,7 @@
                           </a:solidFill>
                           <a:latin typeface="Kanit"/>
                         </a:rPr>
-                        <a:t>+34.4%</a:t>
+                        <a:t>+34.5%</a:t>
                       </a:r>
                     </a:p>
                   </a:txBody>
@@ -47365,7 +47039,7 @@
                           </a:solidFill>
                           <a:latin typeface="Kanit"/>
                         </a:rPr>
-                        <a:t>+16.3%</a:t>
+                        <a:t>+16.8%</a:t>
                       </a:r>
                     </a:p>
                   </a:txBody>
@@ -47528,7 +47202,7 @@
                           </a:solidFill>
                           <a:latin typeface="Kanit"/>
                         </a:rPr>
-                        <a:t>+15.1%</a:t>
+                        <a:t>+15.5%</a:t>
                       </a:r>
                     </a:p>
                   </a:txBody>
@@ -48350,7 +48024,7 @@
                 </a:solidFill>
                 <a:latin typeface="Kanit"/>
               </a:rPr>
-              <a:t>YoY −68.4%</a:t>
+              <a:t>YoY −67.8%</a:t>
             </a:r>
           </a:p>
         </p:txBody>
@@ -48908,6 +48582,324 @@
                 </a:solidFill>
                 <a:latin typeface="Kanit"/>
               </a:rPr>
+              <a:t>Eggs  ไข่ไก่</a:t>
+            </a:r>
+          </a:p>
+        </p:txBody>
+      </p:sp>
+      <p:sp>
+        <p:nvSpPr>
+          <p:cNvPr id="30" name="TextBox 29"/>
+          <p:cNvSpPr txBox="1"/>
+          <p:nvPr/>
+        </p:nvSpPr>
+        <p:spPr>
+          <a:xfrm>
+            <a:off x="5016398" y="2112263"/>
+            <a:ext cx="2156155" cy="125730"/>
+          </a:xfrm>
+          <a:prstGeom prst="rect">
+            <a:avLst/>
+          </a:prstGeom>
+          <a:noFill/>
+        </p:spPr>
+        <p:txBody>
+          <a:bodyPr wrap="square" lIns="0" rIns="0" tIns="0" bIns="0" anchor="t">
+            <a:noAutofit/>
+          </a:bodyPr>
+          <a:lstStyle/>
+          <a:p>
+            <a:pPr algn="l">
+              <a:lnSpc>
+                <a:spcPts val="990"/>
+              </a:lnSpc>
+            </a:pPr>
+            <a:r>
+              <a:rPr sz="750" b="0">
+                <a:solidFill>
+                  <a:srgbClr val="606060"/>
+                </a:solidFill>
+                <a:latin typeface="Kanit"/>
+              </a:rPr>
+              <a:t>฿338.24 /ร้อยฟอง · C·E</a:t>
+            </a:r>
+          </a:p>
+        </p:txBody>
+      </p:sp>
+      <p:sp>
+        <p:nvSpPr>
+          <p:cNvPr id="31" name="TextBox 30"/>
+          <p:cNvSpPr txBox="1"/>
+          <p:nvPr/>
+        </p:nvSpPr>
+        <p:spPr>
+          <a:xfrm>
+            <a:off x="5016398" y="2244851"/>
+            <a:ext cx="1078077" cy="134112"/>
+          </a:xfrm>
+          <a:prstGeom prst="rect">
+            <a:avLst/>
+          </a:prstGeom>
+          <a:noFill/>
+        </p:spPr>
+        <p:txBody>
+          <a:bodyPr wrap="square" lIns="0" rIns="0" tIns="0" bIns="0" anchor="t">
+            <a:noAutofit/>
+          </a:bodyPr>
+          <a:lstStyle/>
+          <a:p>
+            <a:pPr algn="l">
+              <a:lnSpc>
+                <a:spcPts val="1056"/>
+              </a:lnSpc>
+            </a:pPr>
+            <a:r>
+              <a:rPr sz="800" b="1">
+                <a:solidFill>
+                  <a:srgbClr val="15795F"/>
+                </a:solidFill>
+                <a:latin typeface="Kanit"/>
+              </a:rPr>
+              <a:t>YoY +0.3%</a:t>
+            </a:r>
+          </a:p>
+        </p:txBody>
+      </p:sp>
+      <p:sp>
+        <p:nvSpPr>
+          <p:cNvPr id="32" name="TextBox 31"/>
+          <p:cNvSpPr txBox="1"/>
+          <p:nvPr/>
+        </p:nvSpPr>
+        <p:spPr>
+          <a:xfrm>
+            <a:off x="6094475" y="2244851"/>
+            <a:ext cx="1078077" cy="134112"/>
+          </a:xfrm>
+          <a:prstGeom prst="rect">
+            <a:avLst/>
+          </a:prstGeom>
+          <a:noFill/>
+        </p:spPr>
+        <p:txBody>
+          <a:bodyPr wrap="square" lIns="0" rIns="0" tIns="0" bIns="0" anchor="t">
+            <a:noAutofit/>
+          </a:bodyPr>
+          <a:lstStyle/>
+          <a:p>
+            <a:pPr algn="l">
+              <a:lnSpc>
+                <a:spcPts val="1056"/>
+              </a:lnSpc>
+            </a:pPr>
+            <a:r>
+              <a:rPr sz="800" b="1">
+                <a:solidFill>
+                  <a:srgbClr val="15795F"/>
+                </a:solidFill>
+                <a:latin typeface="Kanit"/>
+              </a:rPr>
+              <a:t>6m +5.0%</a:t>
+            </a:r>
+          </a:p>
+        </p:txBody>
+      </p:sp>
+      <p:sp>
+        <p:nvSpPr>
+          <p:cNvPr id="33" name="Rectangle 32"/>
+          <p:cNvSpPr/>
+          <p:nvPr/>
+        </p:nvSpPr>
+        <p:spPr>
+          <a:xfrm>
+            <a:off x="5016398" y="2400300"/>
+            <a:ext cx="2156155" cy="548640"/>
+          </a:xfrm>
+          <a:prstGeom prst="rect">
+            <a:avLst/>
+          </a:prstGeom>
+          <a:solidFill>
+            <a:srgbClr val="FBFCFE"/>
+          </a:solidFill>
+          <a:ln w="9525">
+            <a:solidFill>
+              <a:srgbClr val="D9DEE9"/>
+            </a:solidFill>
+          </a:ln>
+          <a:effectLst/>
+        </p:spPr>
+        <p:style>
+          <a:lnRef idx="1">
+            <a:schemeClr val="accent1"/>
+          </a:lnRef>
+          <a:fillRef idx="3">
+            <a:schemeClr val="accent1"/>
+          </a:fillRef>
+          <a:effectRef idx="2">
+            <a:schemeClr val="accent1"/>
+          </a:effectRef>
+          <a:fontRef idx="minor">
+            <a:schemeClr val="lt1"/>
+          </a:fontRef>
+        </p:style>
+        <p:txBody>
+          <a:bodyPr rtlCol="0" anchor="ctr" wrap="none"/>
+          <a:lstStyle/>
+          <a:p>
+            <a:pPr algn="ctr"/>
+          </a:p>
+        </p:txBody>
+      </p:sp>
+      <p:sp>
+        <p:nvSpPr>
+          <p:cNvPr id="34" name="Freeform 33"/>
+          <p:cNvSpPr/>
+          <p:nvPr/>
+        </p:nvSpPr>
+        <p:spPr>
+          <a:xfrm>
+            <a:off x="5062118" y="2446020"/>
+            <a:ext cx="2064715" cy="457200"/>
+          </a:xfrm>
+          <a:custGeom>
+            <a:avLst/>
+            <a:gdLst/>
+            <a:ahLst/>
+            <a:cxnLst/>
+            <a:rect l="l" t="t" r="r" b="b"/>
+            <a:pathLst>
+              <a:path w="2064715" h="457200">
+                <a:moveTo>
+                  <a:pt x="0" y="457200"/>
+                </a:moveTo>
+                <a:lnTo>
+                  <a:pt x="412943" y="391702"/>
+                </a:lnTo>
+                <a:lnTo>
+                  <a:pt x="825886" y="105409"/>
+                </a:lnTo>
+                <a:lnTo>
+                  <a:pt x="1238829" y="105409"/>
+                </a:lnTo>
+                <a:lnTo>
+                  <a:pt x="1651772" y="214144"/>
+                </a:lnTo>
+                <a:lnTo>
+                  <a:pt x="2064715" y="0"/>
+                </a:lnTo>
+              </a:path>
+            </a:pathLst>
+          </a:custGeom>
+          <a:noFill/>
+          <a:ln w="20320">
+            <a:solidFill>
+              <a:srgbClr val="15795F"/>
+            </a:solidFill>
+          </a:ln>
+          <a:effectLst/>
+        </p:spPr>
+        <p:style>
+          <a:lnRef idx="1">
+            <a:schemeClr val="accent1"/>
+          </a:lnRef>
+          <a:fillRef idx="3">
+            <a:schemeClr val="accent1"/>
+          </a:fillRef>
+          <a:effectRef idx="2">
+            <a:schemeClr val="accent1"/>
+          </a:effectRef>
+          <a:fontRef idx="minor">
+            <a:schemeClr val="lt1"/>
+          </a:fontRef>
+        </p:style>
+        <p:txBody>
+          <a:bodyPr rtlCol="0" anchor="ctr"/>
+          <a:lstStyle/>
+          <a:p>
+            <a:pPr algn="ctr"/>
+          </a:p>
+        </p:txBody>
+      </p:sp>
+      <p:sp>
+        <p:nvSpPr>
+          <p:cNvPr id="35" name="Rounded Rectangle 34"/>
+          <p:cNvSpPr/>
+          <p:nvPr/>
+        </p:nvSpPr>
+        <p:spPr>
+          <a:xfrm>
+            <a:off x="7085685" y="2404872"/>
+            <a:ext cx="82296" cy="82296"/>
+          </a:xfrm>
+          <a:prstGeom prst="roundRect">
+            <a:avLst>
+              <a:gd name="adj" fmla="val 50000"/>
+            </a:avLst>
+          </a:prstGeom>
+          <a:solidFill>
+            <a:srgbClr val="15795F"/>
+          </a:solidFill>
+          <a:ln>
+            <a:noFill/>
+          </a:ln>
+          <a:effectLst/>
+        </p:spPr>
+        <p:style>
+          <a:lnRef idx="1">
+            <a:schemeClr val="accent1"/>
+          </a:lnRef>
+          <a:fillRef idx="3">
+            <a:schemeClr val="accent1"/>
+          </a:fillRef>
+          <a:effectRef idx="2">
+            <a:schemeClr val="accent1"/>
+          </a:effectRef>
+          <a:fontRef idx="minor">
+            <a:schemeClr val="lt1"/>
+          </a:fontRef>
+        </p:style>
+        <p:txBody>
+          <a:bodyPr rtlCol="0" anchor="ctr" wrap="none"/>
+          <a:lstStyle/>
+          <a:p>
+            <a:pPr algn="ctr"/>
+          </a:p>
+        </p:txBody>
+      </p:sp>
+      <p:sp>
+        <p:nvSpPr>
+          <p:cNvPr id="36" name="TextBox 35"/>
+          <p:cNvSpPr txBox="1"/>
+          <p:nvPr/>
+        </p:nvSpPr>
+        <p:spPr>
+          <a:xfrm>
+            <a:off x="7318857" y="1970531"/>
+            <a:ext cx="2156155" cy="150876"/>
+          </a:xfrm>
+          <a:prstGeom prst="rect">
+            <a:avLst/>
+          </a:prstGeom>
+          <a:noFill/>
+        </p:spPr>
+        <p:txBody>
+          <a:bodyPr wrap="square" lIns="0" rIns="0" tIns="0" bIns="0" anchor="t">
+            <a:noAutofit/>
+          </a:bodyPr>
+          <a:lstStyle/>
+          <a:p>
+            <a:pPr algn="l">
+              <a:lnSpc>
+                <a:spcPts val="1188"/>
+              </a:lnSpc>
+            </a:pPr>
+            <a:r>
+              <a:rPr sz="900" b="1">
+                <a:solidFill>
+                  <a:srgbClr val="1E2F5C"/>
+                </a:solidFill>
+                <a:latin typeface="Kanit"/>
+              </a:rPr>
               <a:t>Pork  สุกร</a:t>
             </a:r>
           </a:p>
@@ -48915,13 +48907,13 @@
       </p:sp>
       <p:sp>
         <p:nvSpPr>
-          <p:cNvPr id="30" name="TextBox 29"/>
+          <p:cNvPr id="37" name="TextBox 36"/>
           <p:cNvSpPr txBox="1"/>
           <p:nvPr/>
         </p:nvSpPr>
         <p:spPr>
           <a:xfrm>
-            <a:off x="5016398" y="2112263"/>
+            <a:off x="7318857" y="2112263"/>
             <a:ext cx="2156155" cy="125730"/>
           </a:xfrm>
           <a:prstGeom prst="rect">
@@ -48954,13 +48946,13 @@
       </p:sp>
       <p:sp>
         <p:nvSpPr>
-          <p:cNvPr id="31" name="TextBox 30"/>
+          <p:cNvPr id="38" name="TextBox 37"/>
           <p:cNvSpPr txBox="1"/>
           <p:nvPr/>
         </p:nvSpPr>
         <p:spPr>
           <a:xfrm>
-            <a:off x="5016398" y="2244851"/>
+            <a:off x="7318857" y="2244851"/>
             <a:ext cx="1078077" cy="134112"/>
           </a:xfrm>
           <a:prstGeom prst="rect">
@@ -48982,24 +48974,24 @@
             <a:r>
               <a:rPr sz="800" b="1">
                 <a:solidFill>
-                  <a:srgbClr val="CC0000"/>
+                  <a:srgbClr val="15795F"/>
                 </a:solidFill>
                 <a:latin typeface="Kanit"/>
               </a:rPr>
-              <a:t>YoY −1.2%</a:t>
+              <a:t>YoY +0.3%</a:t>
             </a:r>
           </a:p>
         </p:txBody>
       </p:sp>
       <p:sp>
         <p:nvSpPr>
-          <p:cNvPr id="32" name="TextBox 31"/>
+          <p:cNvPr id="39" name="TextBox 38"/>
           <p:cNvSpPr txBox="1"/>
           <p:nvPr/>
         </p:nvSpPr>
         <p:spPr>
           <a:xfrm>
-            <a:off x="6094475" y="2244851"/>
+            <a:off x="8396935" y="2244851"/>
             <a:ext cx="1078077" cy="134112"/>
           </a:xfrm>
           <a:prstGeom prst="rect">
@@ -49032,13 +49024,13 @@
       </p:sp>
       <p:sp>
         <p:nvSpPr>
-          <p:cNvPr id="33" name="Rectangle 32"/>
+          <p:cNvPr id="40" name="Rectangle 39"/>
           <p:cNvSpPr/>
           <p:nvPr/>
         </p:nvSpPr>
         <p:spPr>
           <a:xfrm>
-            <a:off x="5016398" y="2400300"/>
+            <a:off x="7318857" y="2400300"/>
             <a:ext cx="2156155" cy="548640"/>
           </a:xfrm>
           <a:prstGeom prst="rect">
@@ -49078,13 +49070,13 @@
       </p:sp>
       <p:sp>
         <p:nvSpPr>
-          <p:cNvPr id="34" name="Freeform 33"/>
+          <p:cNvPr id="41" name="Freeform 40"/>
           <p:cNvSpPr/>
           <p:nvPr/>
         </p:nvSpPr>
         <p:spPr>
           <a:xfrm>
-            <a:off x="5062118" y="2446020"/>
+            <a:off x="7364577" y="2446020"/>
             <a:ext cx="2064715" cy="457200"/>
           </a:xfrm>
           <a:custGeom>
@@ -49148,13 +49140,13 @@
       </p:sp>
       <p:sp>
         <p:nvSpPr>
-          <p:cNvPr id="35" name="Rounded Rectangle 34"/>
+          <p:cNvPr id="42" name="Rounded Rectangle 41"/>
           <p:cNvSpPr/>
           <p:nvPr/>
         </p:nvSpPr>
         <p:spPr>
           <a:xfrm>
-            <a:off x="7085685" y="2457891"/>
+            <a:off x="9388144" y="2457891"/>
             <a:ext cx="82296" cy="82296"/>
           </a:xfrm>
           <a:prstGeom prst="roundRect">
@@ -49194,13 +49186,13 @@
       </p:sp>
       <p:sp>
         <p:nvSpPr>
-          <p:cNvPr id="36" name="TextBox 35"/>
+          <p:cNvPr id="43" name="TextBox 42"/>
           <p:cNvSpPr txBox="1"/>
           <p:nvPr/>
         </p:nvSpPr>
         <p:spPr>
           <a:xfrm>
-            <a:off x="7318857" y="1970531"/>
+            <a:off x="9621316" y="1970531"/>
             <a:ext cx="2156155" cy="150876"/>
           </a:xfrm>
           <a:prstGeom prst="rect">
@@ -49233,13 +49225,13 @@
       </p:sp>
       <p:sp>
         <p:nvSpPr>
-          <p:cNvPr id="37" name="TextBox 36"/>
+          <p:cNvPr id="44" name="TextBox 43"/>
           <p:cNvSpPr txBox="1"/>
           <p:nvPr/>
         </p:nvSpPr>
         <p:spPr>
           <a:xfrm>
-            <a:off x="7318857" y="2112263"/>
+            <a:off x="9621316" y="2112263"/>
             <a:ext cx="2156155" cy="125730"/>
           </a:xfrm>
           <a:prstGeom prst="rect">
@@ -49272,13 +49264,13 @@
       </p:sp>
       <p:sp>
         <p:nvSpPr>
-          <p:cNvPr id="38" name="TextBox 37"/>
+          <p:cNvPr id="45" name="TextBox 44"/>
           <p:cNvSpPr txBox="1"/>
           <p:nvPr/>
         </p:nvSpPr>
         <p:spPr>
           <a:xfrm>
-            <a:off x="7318857" y="2244851"/>
+            <a:off x="9621316" y="2244851"/>
             <a:ext cx="1078077" cy="134112"/>
           </a:xfrm>
           <a:prstGeom prst="rect">
@@ -49300,24 +49292,24 @@
             <a:r>
               <a:rPr sz="800" b="1">
                 <a:solidFill>
-                  <a:srgbClr val="CC0000"/>
+                  <a:srgbClr val="15795F"/>
                 </a:solidFill>
                 <a:latin typeface="Kanit"/>
               </a:rPr>
-              <a:t>YoY −0.4%</a:t>
+              <a:t>YoY +0.6%</a:t>
             </a:r>
           </a:p>
         </p:txBody>
       </p:sp>
       <p:sp>
         <p:nvSpPr>
-          <p:cNvPr id="39" name="TextBox 38"/>
+          <p:cNvPr id="46" name="TextBox 45"/>
           <p:cNvSpPr txBox="1"/>
           <p:nvPr/>
         </p:nvSpPr>
         <p:spPr>
           <a:xfrm>
-            <a:off x="8396935" y="2244851"/>
+            <a:off x="10699394" y="2244851"/>
             <a:ext cx="1078077" cy="134112"/>
           </a:xfrm>
           <a:prstGeom prst="rect">
@@ -49350,13 +49342,13 @@
       </p:sp>
       <p:sp>
         <p:nvSpPr>
-          <p:cNvPr id="40" name="Rectangle 39"/>
+          <p:cNvPr id="47" name="Rectangle 46"/>
           <p:cNvSpPr/>
           <p:nvPr/>
         </p:nvSpPr>
         <p:spPr>
           <a:xfrm>
-            <a:off x="7318857" y="2400300"/>
+            <a:off x="9621316" y="2400300"/>
             <a:ext cx="2156155" cy="548640"/>
           </a:xfrm>
           <a:prstGeom prst="rect">
@@ -49396,13 +49388,13 @@
       </p:sp>
       <p:sp>
         <p:nvSpPr>
-          <p:cNvPr id="41" name="Freeform 40"/>
+          <p:cNvPr id="48" name="Freeform 47"/>
           <p:cNvSpPr/>
           <p:nvPr/>
         </p:nvSpPr>
         <p:spPr>
           <a:xfrm>
-            <a:off x="7364577" y="2446020"/>
+            <a:off x="9667036" y="2446020"/>
             <a:ext cx="2064715" cy="457200"/>
           </a:xfrm>
           <a:custGeom>
@@ -49466,13 +49458,13 @@
       </p:sp>
       <p:sp>
         <p:nvSpPr>
-          <p:cNvPr id="42" name="Rounded Rectangle 41"/>
+          <p:cNvPr id="49" name="Rounded Rectangle 48"/>
           <p:cNvSpPr/>
           <p:nvPr/>
         </p:nvSpPr>
         <p:spPr>
           <a:xfrm>
-            <a:off x="9388144" y="2628007"/>
+            <a:off x="11690603" y="2628007"/>
             <a:ext cx="82296" cy="82296"/>
           </a:xfrm>
           <a:prstGeom prst="roundRect">
@@ -49482,324 +49474,6 @@
           </a:prstGeom>
           <a:solidFill>
             <a:srgbClr val="CC0000"/>
-          </a:solidFill>
-          <a:ln>
-            <a:noFill/>
-          </a:ln>
-          <a:effectLst/>
-        </p:spPr>
-        <p:style>
-          <a:lnRef idx="1">
-            <a:schemeClr val="accent1"/>
-          </a:lnRef>
-          <a:fillRef idx="3">
-            <a:schemeClr val="accent1"/>
-          </a:fillRef>
-          <a:effectRef idx="2">
-            <a:schemeClr val="accent1"/>
-          </a:effectRef>
-          <a:fontRef idx="minor">
-            <a:schemeClr val="lt1"/>
-          </a:fontRef>
-        </p:style>
-        <p:txBody>
-          <a:bodyPr rtlCol="0" anchor="ctr" wrap="none"/>
-          <a:lstStyle/>
-          <a:p>
-            <a:pPr algn="ctr"/>
-          </a:p>
-        </p:txBody>
-      </p:sp>
-      <p:sp>
-        <p:nvSpPr>
-          <p:cNvPr id="43" name="TextBox 42"/>
-          <p:cNvSpPr txBox="1"/>
-          <p:nvPr/>
-        </p:nvSpPr>
-        <p:spPr>
-          <a:xfrm>
-            <a:off x="9621316" y="1970531"/>
-            <a:ext cx="2156155" cy="150876"/>
-          </a:xfrm>
-          <a:prstGeom prst="rect">
-            <a:avLst/>
-          </a:prstGeom>
-          <a:noFill/>
-        </p:spPr>
-        <p:txBody>
-          <a:bodyPr wrap="square" lIns="0" rIns="0" tIns="0" bIns="0" anchor="t">
-            <a:noAutofit/>
-          </a:bodyPr>
-          <a:lstStyle/>
-          <a:p>
-            <a:pPr algn="l">
-              <a:lnSpc>
-                <a:spcPts val="1188"/>
-              </a:lnSpc>
-            </a:pPr>
-            <a:r>
-              <a:rPr sz="900" b="1">
-                <a:solidFill>
-                  <a:srgbClr val="1E2F5C"/>
-                </a:solidFill>
-                <a:latin typeface="Kanit"/>
-              </a:rPr>
-              <a:t>Eggs  ไข่ไก่</a:t>
-            </a:r>
-          </a:p>
-        </p:txBody>
-      </p:sp>
-      <p:sp>
-        <p:nvSpPr>
-          <p:cNvPr id="44" name="TextBox 43"/>
-          <p:cNvSpPr txBox="1"/>
-          <p:nvPr/>
-        </p:nvSpPr>
-        <p:spPr>
-          <a:xfrm>
-            <a:off x="9621316" y="2112263"/>
-            <a:ext cx="2156155" cy="125730"/>
-          </a:xfrm>
-          <a:prstGeom prst="rect">
-            <a:avLst/>
-          </a:prstGeom>
-          <a:noFill/>
-        </p:spPr>
-        <p:txBody>
-          <a:bodyPr wrap="square" lIns="0" rIns="0" tIns="0" bIns="0" anchor="t">
-            <a:noAutofit/>
-          </a:bodyPr>
-          <a:lstStyle/>
-          <a:p>
-            <a:pPr algn="l">
-              <a:lnSpc>
-                <a:spcPts val="990"/>
-              </a:lnSpc>
-            </a:pPr>
-            <a:r>
-              <a:rPr sz="750" b="0">
-                <a:solidFill>
-                  <a:srgbClr val="606060"/>
-                </a:solidFill>
-                <a:latin typeface="Kanit"/>
-              </a:rPr>
-              <a:t>฿338.24 /ร้อยฟอง · C·E</a:t>
-            </a:r>
-          </a:p>
-        </p:txBody>
-      </p:sp>
-      <p:sp>
-        <p:nvSpPr>
-          <p:cNvPr id="45" name="TextBox 44"/>
-          <p:cNvSpPr txBox="1"/>
-          <p:nvPr/>
-        </p:nvSpPr>
-        <p:spPr>
-          <a:xfrm>
-            <a:off x="9621316" y="2244851"/>
-            <a:ext cx="1078077" cy="134112"/>
-          </a:xfrm>
-          <a:prstGeom prst="rect">
-            <a:avLst/>
-          </a:prstGeom>
-          <a:noFill/>
-        </p:spPr>
-        <p:txBody>
-          <a:bodyPr wrap="square" lIns="0" rIns="0" tIns="0" bIns="0" anchor="t">
-            <a:noAutofit/>
-          </a:bodyPr>
-          <a:lstStyle/>
-          <a:p>
-            <a:pPr algn="l">
-              <a:lnSpc>
-                <a:spcPts val="1056"/>
-              </a:lnSpc>
-            </a:pPr>
-            <a:r>
-              <a:rPr sz="800" b="1">
-                <a:solidFill>
-                  <a:srgbClr val="606060"/>
-                </a:solidFill>
-                <a:latin typeface="Kanit"/>
-              </a:rPr>
-              <a:t>YoY +0.0%</a:t>
-            </a:r>
-          </a:p>
-        </p:txBody>
-      </p:sp>
-      <p:sp>
-        <p:nvSpPr>
-          <p:cNvPr id="46" name="TextBox 45"/>
-          <p:cNvSpPr txBox="1"/>
-          <p:nvPr/>
-        </p:nvSpPr>
-        <p:spPr>
-          <a:xfrm>
-            <a:off x="10699394" y="2244851"/>
-            <a:ext cx="1078077" cy="134112"/>
-          </a:xfrm>
-          <a:prstGeom prst="rect">
-            <a:avLst/>
-          </a:prstGeom>
-          <a:noFill/>
-        </p:spPr>
-        <p:txBody>
-          <a:bodyPr wrap="square" lIns="0" rIns="0" tIns="0" bIns="0" anchor="t">
-            <a:noAutofit/>
-          </a:bodyPr>
-          <a:lstStyle/>
-          <a:p>
-            <a:pPr algn="l">
-              <a:lnSpc>
-                <a:spcPts val="1056"/>
-              </a:lnSpc>
-            </a:pPr>
-            <a:r>
-              <a:rPr sz="800" b="1">
-                <a:solidFill>
-                  <a:srgbClr val="15795F"/>
-                </a:solidFill>
-                <a:latin typeface="Kanit"/>
-              </a:rPr>
-              <a:t>6m +5.0%</a:t>
-            </a:r>
-          </a:p>
-        </p:txBody>
-      </p:sp>
-      <p:sp>
-        <p:nvSpPr>
-          <p:cNvPr id="47" name="Rectangle 46"/>
-          <p:cNvSpPr/>
-          <p:nvPr/>
-        </p:nvSpPr>
-        <p:spPr>
-          <a:xfrm>
-            <a:off x="9621316" y="2400300"/>
-            <a:ext cx="2156155" cy="548640"/>
-          </a:xfrm>
-          <a:prstGeom prst="rect">
-            <a:avLst/>
-          </a:prstGeom>
-          <a:solidFill>
-            <a:srgbClr val="FBFCFE"/>
-          </a:solidFill>
-          <a:ln w="9525">
-            <a:solidFill>
-              <a:srgbClr val="D9DEE9"/>
-            </a:solidFill>
-          </a:ln>
-          <a:effectLst/>
-        </p:spPr>
-        <p:style>
-          <a:lnRef idx="1">
-            <a:schemeClr val="accent1"/>
-          </a:lnRef>
-          <a:fillRef idx="3">
-            <a:schemeClr val="accent1"/>
-          </a:fillRef>
-          <a:effectRef idx="2">
-            <a:schemeClr val="accent1"/>
-          </a:effectRef>
-          <a:fontRef idx="minor">
-            <a:schemeClr val="lt1"/>
-          </a:fontRef>
-        </p:style>
-        <p:txBody>
-          <a:bodyPr rtlCol="0" anchor="ctr" wrap="none"/>
-          <a:lstStyle/>
-          <a:p>
-            <a:pPr algn="ctr"/>
-          </a:p>
-        </p:txBody>
-      </p:sp>
-      <p:sp>
-        <p:nvSpPr>
-          <p:cNvPr id="48" name="Freeform 47"/>
-          <p:cNvSpPr/>
-          <p:nvPr/>
-        </p:nvSpPr>
-        <p:spPr>
-          <a:xfrm>
-            <a:off x="9667036" y="2446020"/>
-            <a:ext cx="2064715" cy="457200"/>
-          </a:xfrm>
-          <a:custGeom>
-            <a:avLst/>
-            <a:gdLst/>
-            <a:ahLst/>
-            <a:cxnLst/>
-            <a:rect l="l" t="t" r="r" b="b"/>
-            <a:pathLst>
-              <a:path w="2064715" h="457200">
-                <a:moveTo>
-                  <a:pt x="0" y="457200"/>
-                </a:moveTo>
-                <a:lnTo>
-                  <a:pt x="412943" y="391702"/>
-                </a:lnTo>
-                <a:lnTo>
-                  <a:pt x="825886" y="105409"/>
-                </a:lnTo>
-                <a:lnTo>
-                  <a:pt x="1238829" y="105409"/>
-                </a:lnTo>
-                <a:lnTo>
-                  <a:pt x="1651772" y="214144"/>
-                </a:lnTo>
-                <a:lnTo>
-                  <a:pt x="2064715" y="0"/>
-                </a:lnTo>
-              </a:path>
-            </a:pathLst>
-          </a:custGeom>
-          <a:noFill/>
-          <a:ln w="20320">
-            <a:solidFill>
-              <a:srgbClr val="15795F"/>
-            </a:solidFill>
-          </a:ln>
-          <a:effectLst/>
-        </p:spPr>
-        <p:style>
-          <a:lnRef idx="1">
-            <a:schemeClr val="accent1"/>
-          </a:lnRef>
-          <a:fillRef idx="3">
-            <a:schemeClr val="accent1"/>
-          </a:fillRef>
-          <a:effectRef idx="2">
-            <a:schemeClr val="accent1"/>
-          </a:effectRef>
-          <a:fontRef idx="minor">
-            <a:schemeClr val="lt1"/>
-          </a:fontRef>
-        </p:style>
-        <p:txBody>
-          <a:bodyPr rtlCol="0" anchor="ctr"/>
-          <a:lstStyle/>
-          <a:p>
-            <a:pPr algn="ctr"/>
-          </a:p>
-        </p:txBody>
-      </p:sp>
-      <p:sp>
-        <p:nvSpPr>
-          <p:cNvPr id="49" name="Rounded Rectangle 48"/>
-          <p:cNvSpPr/>
-          <p:nvPr/>
-        </p:nvSpPr>
-        <p:spPr>
-          <a:xfrm>
-            <a:off x="11690603" y="2404872"/>
-            <a:ext cx="82296" cy="82296"/>
-          </a:xfrm>
-          <a:prstGeom prst="roundRect">
-            <a:avLst>
-              <a:gd name="adj" fmla="val 50000"/>
-            </a:avLst>
-          </a:prstGeom>
-          <a:solidFill>
-            <a:srgbClr val="15795F"/>
           </a:solidFill>
           <a:ln>
             <a:noFill/>
@@ -49940,7 +49614,7 @@
                 </a:solidFill>
                 <a:latin typeface="Kanit"/>
               </a:rPr>
-              <a:t>YoY +0.9%</a:t>
+              <a:t>YoY +1.6%</a:t>
             </a:r>
           </a:p>
         </p:txBody>
@@ -50258,7 +49932,7 @@
                 </a:solidFill>
                 <a:latin typeface="Kanit"/>
               </a:rPr>
-              <a:t>YoY +13.5%</a:t>
+              <a:t>YoY +13.9%</a:t>
             </a:r>
           </a:p>
         </p:txBody>
@@ -50576,7 +50250,7 @@
                 </a:solidFill>
                 <a:latin typeface="Kanit"/>
               </a:rPr>
-              <a:t>YoY +14.9%</a:t>
+              <a:t>YoY +15.4%</a:t>
             </a:r>
           </a:p>
         </p:txBody>
@@ -50894,7 +50568,7 @@
                 </a:solidFill>
                 <a:latin typeface="Kanit"/>
               </a:rPr>
-              <a:t>YoY +25.5%</a:t>
+              <a:t>YoY +25.3%</a:t>
             </a:r>
           </a:p>
         </p:txBody>
@@ -51212,7 +50886,7 @@
                 </a:solidFill>
                 <a:latin typeface="Kanit"/>
               </a:rPr>
-              <a:t>YoY +41.6%</a:t>
+              <a:t>YoY +42.0%</a:t>
             </a:r>
           </a:p>
         </p:txBody>
@@ -51530,7 +51204,7 @@
                 </a:solidFill>
                 <a:latin typeface="Kanit"/>
               </a:rPr>
-              <a:t>YoY +61.3%</a:t>
+              <a:t>YoY +63.5%</a:t>
             </a:r>
           </a:p>
         </p:txBody>
@@ -51848,7 +51522,7 @@
                 </a:solidFill>
                 <a:latin typeface="Kanit"/>
               </a:rPr>
-              <a:t>YoY +105.0%</a:t>
+              <a:t>YoY +109.2%</a:t>
             </a:r>
           </a:p>
         </p:txBody>
@@ -52212,7 +51886,7 @@
                 </a:solidFill>
                 <a:latin typeface="Kanit"/>
               </a:rPr>
-              <a:t>Farm-gate prices MEASURED — NABC daily quotes, monthly means, in baht as published (no currency conversion); newest quote 2026-08-07, history vintage 2026-08-02. Farm gate (ราคาที่เกษตรกรขายได้) is what the grower is paid at first sale, before trading, milling or transport take a cut — not the world index and not a supermarket price. Belts are an ESTIMATED read of where each commodity is produced, and they overlap. Sugar is OCSB's announced season price, one point a year, so it has no six-month move to show.</a:t>
+              <a:t>Farm-gate prices MEASURED — NABC daily quotes, monthly means, in baht as published (no currency conversion); newest quote 2026-08-11, history vintage 2026-08-02. Farm gate (ราคาที่เกษตรกรขายได้) is what the grower is paid at first sale, before trading, milling or transport take a cut — not the world index and not a supermarket price. Belts are an ESTIMATED read of where each commodity is produced, and they overlap. Sugar is OCSB's announced season price, one point a year, so it has no six-month move to show.</a:t>
             </a:r>
           </a:p>
         </p:txBody>

--- a/docs/decks/mcom-2026-08-05-macro.pptx
+++ b/docs/decks/mcom-2026-08-05-macro.pptx
@@ -6240,7 +6240,7 @@
                 </a:solidFill>
                 <a:latin typeface="Kanit"/>
               </a:rPr>
-              <a:t>156</a:t>
+              <a:t>155</a:t>
             </a:r>
           </a:p>
         </p:txBody>
@@ -6279,7 +6279,7 @@
                 </a:solidFill>
                 <a:latin typeface="Kanit"/>
               </a:rPr>
-              <a:t>of 794 (19.6%) · live · 2026-08-11</a:t>
+              <a:t>of 794 (19.5%) · live · 2026-08-11</a:t>
             </a:r>
           </a:p>
         </p:txBody>
@@ -8022,7 +8022,7 @@
                           </a:solidFill>
                           <a:latin typeface="Kanit"/>
                         </a:rPr>
-                        <a:t>นราธิวาส</a:t>
+                        <a:t>ชัยภูมิ</a:t>
                       </a:r>
                     </a:p>
                   </a:txBody>
@@ -8045,7 +8045,7 @@
                           </a:solidFill>
                           <a:latin typeface="Kanit"/>
                         </a:rPr>
-                        <a:t>64</a:t>
+                        <a:t>58</a:t>
                       </a:r>
                     </a:p>
                   </a:txBody>
@@ -8068,7 +8068,7 @@
                           </a:solidFill>
                           <a:latin typeface="Kanit"/>
                         </a:rPr>
-                        <a:t>38</a:t>
+                        <a:t>22</a:t>
                       </a:r>
                     </a:p>
                   </a:txBody>
@@ -8087,11 +8087,11 @@
                       <a:r>
                         <a:rPr sz="900" b="1">
                           <a:solidFill>
-                            <a:srgbClr val="F5C242"/>
-                          </a:solidFill>
-                          <a:latin typeface="Kanit"/>
-                        </a:rPr>
-                        <a:t>1.6%</a:t>
+                            <a:srgbClr val="606060"/>
+                          </a:solidFill>
+                          <a:latin typeface="Kanit"/>
+                        </a:rPr>
+                        <a:t>0.0%</a:t>
                       </a:r>
                     </a:p>
                   </a:txBody>
@@ -8114,7 +8114,7 @@
                           </a:solidFill>
                           <a:latin typeface="Kanit"/>
                         </a:rPr>
-                        <a:t>5/10</a:t>
+                        <a:t>1/12</a:t>
                       </a:r>
                     </a:p>
                   </a:txBody>
@@ -8162,7 +8162,7 @@
                           </a:solidFill>
                           <a:latin typeface="Kanit"/>
                         </a:rPr>
-                        <a:t>ชัยภูมิ</a:t>
+                        <a:t>นครพนม</a:t>
                       </a:r>
                     </a:p>
                   </a:txBody>
@@ -8185,7 +8185,7 @@
                           </a:solidFill>
                           <a:latin typeface="Kanit"/>
                         </a:rPr>
-                        <a:t>58</a:t>
+                        <a:t>29</a:t>
                       </a:r>
                     </a:p>
                   </a:txBody>
@@ -8208,7 +8208,7 @@
                           </a:solidFill>
                           <a:latin typeface="Kanit"/>
                         </a:rPr>
-                        <a:t>24</a:t>
+                        <a:t>14</a:t>
                       </a:r>
                     </a:p>
                   </a:txBody>
@@ -8254,7 +8254,7 @@
                           </a:solidFill>
                           <a:latin typeface="Kanit"/>
                         </a:rPr>
-                        <a:t>1/12</a:t>
+                        <a:t>9/15</a:t>
                       </a:r>
                     </a:p>
                   </a:txBody>
@@ -8302,7 +8302,7 @@
                           </a:solidFill>
                           <a:latin typeface="Kanit"/>
                         </a:rPr>
-                        <a:t>นครพนม</a:t>
+                        <a:t>นราธิวาส</a:t>
                       </a:r>
                     </a:p>
                   </a:txBody>
@@ -8325,7 +8325,7 @@
                           </a:solidFill>
                           <a:latin typeface="Kanit"/>
                         </a:rPr>
-                        <a:t>29</a:t>
+                        <a:t>64</a:t>
                       </a:r>
                     </a:p>
                   </a:txBody>
@@ -8348,7 +8348,7 @@
                           </a:solidFill>
                           <a:latin typeface="Kanit"/>
                         </a:rPr>
-                        <a:t>9</a:t>
+                        <a:t>24</a:t>
                       </a:r>
                     </a:p>
                   </a:txBody>
@@ -8394,7 +8394,7 @@
                           </a:solidFill>
                           <a:latin typeface="Kanit"/>
                         </a:rPr>
-                        <a:t>9/15</a:t>
+                        <a:t>5/10</a:t>
                       </a:r>
                     </a:p>
                   </a:txBody>
@@ -8488,7 +8488,7 @@
                           </a:solidFill>
                           <a:latin typeface="Kanit"/>
                         </a:rPr>
-                        <a:t>23</a:t>
+                        <a:t>20</a:t>
                       </a:r>
                     </a:p>
                   </a:txBody>
@@ -8605,7 +8605,7 @@
                           </a:solidFill>
                           <a:latin typeface="Kanit"/>
                         </a:rPr>
-                        <a:t>17</a:t>
+                        <a:t>18</a:t>
                       </a:r>
                     </a:p>
                   </a:txBody>
@@ -33912,7 +33912,7 @@
                 </a:solidFill>
                 <a:latin typeface="Kanit"/>
               </a:rPr>
-              <a:t>33.05</a:t>
+              <a:t>33.01</a:t>
             </a:r>
           </a:p>
         </p:txBody>
@@ -33951,7 +33951,7 @@
                 </a:solidFill>
                 <a:latin typeface="Kanit"/>
               </a:rPr>
-              <a:t>ECB reference · 2026-08-07</a:t>
+              <a:t>ECB reference · 2026-08-10</a:t>
             </a:r>
           </a:p>
         </p:txBody>
@@ -35798,7 +35798,7 @@
                 </a:solidFill>
                 <a:latin typeface="Kanit"/>
               </a:rPr>
-              <a:t>NESDC 2026-Q1 · TPSO 2026-05 · Bank of Thailand 2026-06 · BIS 2025-Q4 · ECB 2026-08-07, each pulled from the publishing agency. IMF World Economic Outlook 2026 (pulled 2026-07-25) for the peer table. BoT published NPL ratio — 4.48% at 2026-Q1, 4.33% the quarter before, +0.24pp on the year, 3.08% low in 2021-Q1.</a:t>
+              <a:t>NESDC 2026-Q1 · TPSO 2026-05 · Bank of Thailand 2026-06 · BIS 2025-Q4 · ECB 2026-08-10, each pulled from the publishing agency. IMF World Economic Outlook 2026 (pulled 2026-07-25) for the peer table. BoT published NPL ratio — 4.48% at 2026-Q1, 4.33% the quarter before, +0.24pp on the year, 3.08% low in 2021-Q1.</a:t>
             </a:r>
           </a:p>
         </p:txBody>
@@ -37087,7 +37087,7 @@
                 </a:solidFill>
                 <a:latin typeface="Kanit"/>
               </a:rPr>
-              <a:t>338 of 928 districts · 156 of 794 rivers high</a:t>
+              <a:t>338 of 928 districts · 155 of 794 rivers high</a:t>
             </a:r>
           </a:p>
         </p:txBody>
@@ -37905,7 +37905,7 @@
                           </a:solidFill>
                           <a:latin typeface="Kanit"/>
                         </a:rPr>
-                        <a:t>0.10</a:t>
+                        <a:t>0.09</a:t>
                       </a:r>
                     </a:p>
                   </a:txBody>
@@ -38091,7 +38091,7 @@
                           </a:solidFill>
                           <a:latin typeface="Kanit"/>
                         </a:rPr>
-                        <a:t>42/273</a:t>
+                        <a:t>41/273</a:t>
                       </a:r>
                     </a:p>
                   </a:txBody>
@@ -38601,7 +38601,7 @@
                           </a:solidFill>
                           <a:latin typeface="Kanit"/>
                         </a:rPr>
-                        <a:t>0.25</a:t>
+                        <a:t>0.22</a:t>
                       </a:r>
                     </a:p>
                   </a:txBody>
@@ -38833,7 +38833,7 @@
                           </a:solidFill>
                           <a:latin typeface="Kanit"/>
                         </a:rPr>
-                        <a:t>0.27</a:t>
+                        <a:t>0.26</a:t>
                       </a:r>
                     </a:p>
                   </a:txBody>
@@ -43419,7 +43419,7 @@
                           </a:solidFill>
                           <a:latin typeface="Kanit"/>
                         </a:rPr>
-                        <a:t>94.54</a:t>
+                        <a:t>94.42</a:t>
                       </a:r>
                     </a:p>
                   </a:txBody>
@@ -43559,7 +43559,7 @@
                           </a:solidFill>
                           <a:latin typeface="Kanit"/>
                         </a:rPr>
-                        <a:t>16,329</a:t>
+                        <a:t>16,308</a:t>
                       </a:r>
                     </a:p>
                   </a:txBody>
@@ -43699,7 +43699,7 @@
                           </a:solidFill>
                           <a:latin typeface="Kanit"/>
                         </a:rPr>
-                        <a:t>36,526</a:t>
+                        <a:t>36,479</a:t>
                       </a:r>
                     </a:p>
                   </a:txBody>
@@ -43839,7 +43839,7 @@
                           </a:solidFill>
                           <a:latin typeface="Kanit"/>
                         </a:rPr>
-                        <a:t>10.58</a:t>
+                        <a:t>10.56</a:t>
                       </a:r>
                     </a:p>
                   </a:txBody>
@@ -44058,7 +44058,7 @@
                 </a:solidFill>
                 <a:latin typeface="Kanit"/>
               </a:rPr>
-              <a:t>World Bank Pink Sheet nominal-USD monthly prices, vintage 2026M06 (60 observations per series, rebased to 100 at 2021-07 for the chart — units differ, so raw levels can’t share an axis). Baht conversion at the ECB reference rate USD/THB 33.055, 2026-08-07. Planted-area share MEASURED, OAE/DOAE crop mix (crop_mix.json). Nominal, not deflated: five years of Thai CPI sit under every ‘vs 5 yrs ago’ figure.</a:t>
+              <a:t>World Bank Pink Sheet nominal-USD monthly prices, vintage 2026M06 (60 observations per series, rebased to 100 at 2021-07 for the chart — units differ, so raw levels can’t share an axis). Baht conversion at the ECB reference rate USD/THB 33.013, 2026-08-10. Planted-area share MEASURED, OAE/DOAE crop mix (crop_mix.json). Nominal, not deflated: five years of Thai CPI sit under every ‘vs 5 yrs ago’ figure.</a:t>
             </a:r>
           </a:p>
         </p:txBody>

--- a/docs/decks/mcom-2026-08-05-macro.pptx
+++ b/docs/decks/mcom-2026-08-05-macro.pptx
@@ -6240,7 +6240,7 @@
                 </a:solidFill>
                 <a:latin typeface="Kanit"/>
               </a:rPr>
-              <a:t>155</a:t>
+              <a:t>129</a:t>
             </a:r>
           </a:p>
         </p:txBody>
@@ -6279,7 +6279,7 @@
                 </a:solidFill>
                 <a:latin typeface="Kanit"/>
               </a:rPr>
-              <a:t>of 794 (19.5%) · live · 2026-08-11</a:t>
+              <a:t>of 795 (16.2%) · live · 2026-08-14</a:t>
             </a:r>
           </a:p>
         </p:txBody>
@@ -6405,7 +6405,7 @@
                 </a:solidFill>
                 <a:latin typeface="Kanit"/>
               </a:rPr>
-              <a:t>14</a:t>
+              <a:t>24</a:t>
             </a:r>
           </a:p>
         </p:txBody>
@@ -6444,7 +6444,7 @@
                 </a:solidFill>
                 <a:latin typeface="Kanit"/>
               </a:rPr>
-              <a:t>latest daily reading · 2026-08-11</a:t>
+              <a:t>latest daily reading · 2026-08-14</a:t>
             </a:r>
           </a:p>
         </p:txBody>
@@ -7882,7 +7882,7 @@
                           </a:solidFill>
                           <a:latin typeface="Kanit"/>
                         </a:rPr>
-                        <a:t>พะเยา</a:t>
+                        <a:t>นครพนม</a:t>
                       </a:r>
                     </a:p>
                   </a:txBody>
@@ -7905,7 +7905,7 @@
                           </a:solidFill>
                           <a:latin typeface="Kanit"/>
                         </a:rPr>
-                        <a:t>123</a:t>
+                        <a:t>28</a:t>
                       </a:r>
                     </a:p>
                   </a:txBody>
@@ -7928,7 +7928,7 @@
                           </a:solidFill>
                           <a:latin typeface="Kanit"/>
                         </a:rPr>
-                        <a:t>105</a:t>
+                        <a:t>114</a:t>
                       </a:r>
                     </a:p>
                   </a:txBody>
@@ -7951,7 +7951,7 @@
                           </a:solidFill>
                           <a:latin typeface="Kanit"/>
                         </a:rPr>
-                        <a:t>10.6%</a:t>
+                        <a:t>46.4%</a:t>
                       </a:r>
                     </a:p>
                   </a:txBody>
@@ -7974,7 +7974,7 @@
                           </a:solidFill>
                           <a:latin typeface="Kanit"/>
                         </a:rPr>
-                        <a:t>4/13</a:t>
+                        <a:t>8/15</a:t>
                       </a:r>
                     </a:p>
                   </a:txBody>
@@ -8022,7 +8022,7 @@
                           </a:solidFill>
                           <a:latin typeface="Kanit"/>
                         </a:rPr>
-                        <a:t>ชัยภูมิ</a:t>
+                        <a:t>มุกดาหาร</a:t>
                       </a:r>
                     </a:p>
                   </a:txBody>
@@ -8045,7 +8045,7 @@
                           </a:solidFill>
                           <a:latin typeface="Kanit"/>
                         </a:rPr>
-                        <a:t>58</a:t>
+                        <a:t>18</a:t>
                       </a:r>
                     </a:p>
                   </a:txBody>
@@ -8068,7 +8068,7 @@
                           </a:solidFill>
                           <a:latin typeface="Kanit"/>
                         </a:rPr>
-                        <a:t>22</a:t>
+                        <a:t>51</a:t>
                       </a:r>
                     </a:p>
                   </a:txBody>
@@ -8087,11 +8087,11 @@
                       <a:r>
                         <a:rPr sz="900" b="1">
                           <a:solidFill>
-                            <a:srgbClr val="606060"/>
-                          </a:solidFill>
-                          <a:latin typeface="Kanit"/>
-                        </a:rPr>
-                        <a:t>0.0%</a:t>
+                            <a:srgbClr val="F5C242"/>
+                          </a:solidFill>
+                          <a:latin typeface="Kanit"/>
+                        </a:rPr>
+                        <a:t>5.6%</a:t>
                       </a:r>
                     </a:p>
                   </a:txBody>
@@ -8114,7 +8114,7 @@
                           </a:solidFill>
                           <a:latin typeface="Kanit"/>
                         </a:rPr>
-                        <a:t>1/12</a:t>
+                        <a:t>2/2</a:t>
                       </a:r>
                     </a:p>
                   </a:txBody>
@@ -8162,7 +8162,7 @@
                           </a:solidFill>
                           <a:latin typeface="Kanit"/>
                         </a:rPr>
-                        <a:t>นครพนม</a:t>
+                        <a:t>สกลนคร</a:t>
                       </a:r>
                     </a:p>
                   </a:txBody>
@@ -8185,6 +8185,29 @@
                           </a:solidFill>
                           <a:latin typeface="Kanit"/>
                         </a:rPr>
+                        <a:t>36</a:t>
+                      </a:r>
+                    </a:p>
+                  </a:txBody>
+                  <a:tcPr marL="54864" marR="54864" marT="18288" marB="18288" anchor="ctr">
+                    <a:solidFill>
+                      <a:srgbClr val="FFFFFF"/>
+                    </a:solidFill>
+                  </a:tcPr>
+                </a:tc>
+                <a:tc>
+                  <a:txBody>
+                    <a:bodyPr wrap="square"/>
+                    <a:lstStyle/>
+                    <a:p>
+                      <a:pPr algn="r"/>
+                      <a:r>
+                        <a:rPr sz="900" b="0">
+                          <a:solidFill>
+                            <a:srgbClr val="1E2F5C"/>
+                          </a:solidFill>
+                          <a:latin typeface="Kanit"/>
+                        </a:rPr>
                         <a:t>29</a:t>
                       </a:r>
                     </a:p>
@@ -8202,13 +8225,13 @@
                     <a:p>
                       <a:pPr algn="r"/>
                       <a:r>
-                        <a:rPr sz="900" b="0">
-                          <a:solidFill>
-                            <a:srgbClr val="1E2F5C"/>
-                          </a:solidFill>
-                          <a:latin typeface="Kanit"/>
-                        </a:rPr>
-                        <a:t>14</a:t>
+                        <a:rPr sz="900" b="1">
+                          <a:solidFill>
+                            <a:srgbClr val="606060"/>
+                          </a:solidFill>
+                          <a:latin typeface="Kanit"/>
+                        </a:rPr>
+                        <a:t>0.0%</a:t>
                       </a:r>
                     </a:p>
                   </a:txBody>
@@ -8227,34 +8250,11 @@
                       <a:r>
                         <a:rPr sz="900" b="1">
                           <a:solidFill>
-                            <a:srgbClr val="606060"/>
-                          </a:solidFill>
-                          <a:latin typeface="Kanit"/>
-                        </a:rPr>
-                        <a:t>0.0%</a:t>
-                      </a:r>
-                    </a:p>
-                  </a:txBody>
-                  <a:tcPr marL="54864" marR="54864" marT="18288" marB="18288" anchor="ctr">
-                    <a:solidFill>
-                      <a:srgbClr val="FFFFFF"/>
-                    </a:solidFill>
-                  </a:tcPr>
-                </a:tc>
-                <a:tc>
-                  <a:txBody>
-                    <a:bodyPr wrap="square"/>
-                    <a:lstStyle/>
-                    <a:p>
-                      <a:pPr algn="r"/>
-                      <a:r>
-                        <a:rPr sz="900" b="1">
-                          <a:solidFill>
                             <a:srgbClr val="CC0000"/>
                           </a:solidFill>
                           <a:latin typeface="Kanit"/>
                         </a:rPr>
-                        <a:t>9/15</a:t>
+                        <a:t>7/13</a:t>
                       </a:r>
                     </a:p>
                   </a:txBody>
@@ -8302,7 +8302,7 @@
                           </a:solidFill>
                           <a:latin typeface="Kanit"/>
                         </a:rPr>
-                        <a:t>นราธิวาส</a:t>
+                        <a:t>สมุทรปราการ</a:t>
                       </a:r>
                     </a:p>
                   </a:txBody>
@@ -8325,7 +8325,7 @@
                           </a:solidFill>
                           <a:latin typeface="Kanit"/>
                         </a:rPr>
-                        <a:t>64</a:t>
+                        <a:t>16</a:t>
                       </a:r>
                     </a:p>
                   </a:txBody>
@@ -8348,7 +8348,7 @@
                           </a:solidFill>
                           <a:latin typeface="Kanit"/>
                         </a:rPr>
-                        <a:t>24</a:t>
+                        <a:t>0</a:t>
                       </a:r>
                     </a:p>
                   </a:txBody>
@@ -8394,7 +8394,7 @@
                           </a:solidFill>
                           <a:latin typeface="Kanit"/>
                         </a:rPr>
-                        <a:t>5/10</a:t>
+                        <a:t>4/5</a:t>
                       </a:r>
                     </a:p>
                   </a:txBody>
@@ -8442,7 +8442,7 @@
                           </a:solidFill>
                           <a:latin typeface="Kanit"/>
                         </a:rPr>
-                        <a:t>บึงกาฬ</a:t>
+                        <a:t>เลย</a:t>
                       </a:r>
                     </a:p>
                   </a:txBody>
@@ -8465,7 +8465,7 @@
                           </a:solidFill>
                           <a:latin typeface="Kanit"/>
                         </a:rPr>
-                        <a:t>11</a:t>
+                        <a:t>101</a:t>
                       </a:r>
                     </a:p>
                   </a:txBody>
@@ -8488,7 +8488,7 @@
                           </a:solidFill>
                           <a:latin typeface="Kanit"/>
                         </a:rPr>
-                        <a:t>20</a:t>
+                        <a:t>14</a:t>
                       </a:r>
                     </a:p>
                   </a:txBody>
@@ -8534,7 +8534,7 @@
                           </a:solidFill>
                           <a:latin typeface="Kanit"/>
                         </a:rPr>
-                        <a:t>1/1</a:t>
+                        <a:t>1/8</a:t>
                       </a:r>
                     </a:p>
                   </a:txBody>
@@ -8582,7 +8582,7 @@
                           </a:solidFill>
                           <a:latin typeface="Kanit"/>
                         </a:rPr>
-                        <a:t>มุกดาหาร</a:t>
+                        <a:t>บึงกาฬ</a:t>
                       </a:r>
                     </a:p>
                   </a:txBody>
@@ -8605,7 +8605,7 @@
                           </a:solidFill>
                           <a:latin typeface="Kanit"/>
                         </a:rPr>
-                        <a:t>18</a:t>
+                        <a:t>11</a:t>
                       </a:r>
                     </a:p>
                   </a:txBody>
@@ -8628,7 +8628,7 @@
                           </a:solidFill>
                           <a:latin typeface="Kanit"/>
                         </a:rPr>
-                        <a:t>16</a:t>
+                        <a:t>48</a:t>
                       </a:r>
                     </a:p>
                   </a:txBody>
@@ -8647,11 +8647,11 @@
                       <a:r>
                         <a:rPr sz="900" b="1">
                           <a:solidFill>
-                            <a:srgbClr val="606060"/>
-                          </a:solidFill>
-                          <a:latin typeface="Kanit"/>
-                        </a:rPr>
-                        <a:t>0.0%</a:t>
+                            <a:srgbClr val="F5C242"/>
+                          </a:solidFill>
+                          <a:latin typeface="Kanit"/>
+                        </a:rPr>
+                        <a:t>36.4%</a:t>
                       </a:r>
                     </a:p>
                   </a:txBody>
@@ -8674,7 +8674,7 @@
                           </a:solidFill>
                           <a:latin typeface="Kanit"/>
                         </a:rPr>
-                        <a:t>2/2</a:t>
+                        <a:t>1/1</a:t>
                       </a:r>
                     </a:p>
                   </a:txBody>
@@ -8693,11 +8693,11 @@
                       <a:r>
                         <a:rPr sz="900" b="1">
                           <a:solidFill>
-                            <a:srgbClr val="CC0000"/>
-                          </a:solidFill>
-                          <a:latin typeface="Kanit"/>
-                        </a:rPr>
-                        <a:t>5</a:t>
+                            <a:srgbClr val="F5C242"/>
+                          </a:solidFill>
+                          <a:latin typeface="Kanit"/>
+                        </a:rPr>
+                        <a:t>4</a:t>
                       </a:r>
                     </a:p>
                   </a:txBody>
@@ -8909,7 +8909,7 @@
                 </a:solidFill>
                 <a:latin typeface="Kanit"/>
               </a:rPr>
-              <a:t>Planted area MEASURED (OAE — 3,295 amphoe crop rows). Drought is a MODELLED SPEI index from rainfall and evapotranspiration, refreshed monthly, retrieved 2026-07-20 — the best national-coverage signal available, but nobody has walked those districts. Rain and river telemetry MEASURED (ThaiWater, live, pulled daily and accumulated — a missed pull leaves a gap rather than an invented point) · rain to 2026-08-11, river to 2026-08-11. Structural flood exposure MEASURED (GISTDA 1:50,000 repeated-flooding census, 2005-2016 — a 12-year ground record, not a forecast).</a:t>
+              <a:t>Planted area MEASURED (OAE — 3,295 amphoe crop rows). Drought is a MODELLED SPEI index from rainfall and evapotranspiration, refreshed monthly, retrieved 2026-07-20 — the best national-coverage signal available, but nobody has walked those districts. Rain and river telemetry MEASURED (ThaiWater, live, pulled daily and accumulated — a missed pull leaves a gap rather than an invented point) · rain to 2026-08-14, river to 2026-08-14. Structural flood exposure MEASURED (GISTDA 1:50,000 repeated-flooding census, 2005-2016 — a 12-year ground record, not a forecast).</a:t>
             </a:r>
           </a:p>
         </p:txBody>
@@ -31476,7 +31476,7 @@
                 </a:solidFill>
                 <a:latin typeface="Kanit"/>
               </a:rPr>
-              <a:t>Median crop income rose +16.6%, but four provinces fell — all on the coconut (มะพร้าว) belt, worst สมุทรสงคราม at −63.4%.</a:t>
+              <a:t>Median crop income rose +16.9%, but four provinces fell — all on the coconut (มะพร้าว) belt, worst สมุทรสงคราม at −63.2%.</a:t>
             </a:r>
           </a:p>
         </p:txBody>
@@ -32047,7 +32047,7 @@
                 </a:solidFill>
                 <a:latin typeface="Kanit"/>
               </a:rPr>
-              <a:t>Vintages — world prices 2026M06 · Thai farm gate 2026-08-11 · Thai price history 2026-08-02 · crop cost of production OAE Cai-up 2568 (crop year 2568/69, OAE forecast Mar 2569) · drought 2026-06-21 · CPI 2026-05 · GDP 2026-Q1 · IMF WEO 2026 · resale index 2026-05 · registrations to 2026-01 · household debt NSO SES 2566 · wages NSO LFS 2568 · telemetry 2026-08-11.</a:t>
+              <a:t>Vintages — world prices 2026M06 · Thai farm gate 2026-08-13 · Thai price history 2026-08-02 · crop cost of production OAE Cai-up 2568 (crop year 2568/69, OAE forecast Mar 2569) · drought 2026-06-21 · CPI 2026-05 · GDP 2026-Q1 · IMF WEO 2026 · resale index 2026-05 · registrations to 2026-01 · household debt NSO SES 2566 · wages NSO LFS 2568 · telemetry 2026-08-14.</a:t>
             </a:r>
           </a:p>
         </p:txBody>
@@ -32546,7 +32546,7 @@
               <a:t>Not on the world index — the farm gate (ราคาที่เกษตรกรขายได้) says otherwise.
 • Five of seventeen Thai farm-gate prices are falling year on year.
 • Beef: farm gate −6.1% vs world index +11.8%.
-• Margin over price: a 26% price move becomes an 85% swing in crop income.</a:t>
+• Margin over price: a 26% price move becomes an 87% swing in crop income.</a:t>
             </a:r>
           </a:p>
         </p:txBody>
@@ -37087,7 +37087,7 @@
                 </a:solidFill>
                 <a:latin typeface="Kanit"/>
               </a:rPr>
-              <a:t>338 of 928 districts · 155 of 794 rivers high</a:t>
+              <a:t>338 of 928 districts · 129 of 795 rivers high</a:t>
             </a:r>
           </a:p>
         </p:txBody>
@@ -37859,7 +37859,7 @@
                           </a:solidFill>
                           <a:latin typeface="Kanit"/>
                         </a:rPr>
-                        <a:t>39/158</a:t>
+                        <a:t>33/157</a:t>
                       </a:r>
                     </a:p>
                   </a:txBody>
@@ -38091,7 +38091,7 @@
                           </a:solidFill>
                           <a:latin typeface="Kanit"/>
                         </a:rPr>
-                        <a:t>41/273</a:t>
+                        <a:t>23/274</a:t>
                       </a:r>
                     </a:p>
                   </a:txBody>
@@ -38323,7 +38323,7 @@
                           </a:solidFill>
                           <a:latin typeface="Kanit"/>
                         </a:rPr>
-                        <a:t>24/168</a:t>
+                        <a:t>27/168</a:t>
                       </a:r>
                     </a:p>
                   </a:txBody>
@@ -38787,7 +38787,7 @@
                           </a:solidFill>
                           <a:latin typeface="Kanit"/>
                         </a:rPr>
-                        <a:t>45/143</a:t>
+                        <a:t>40/144</a:t>
                       </a:r>
                     </a:p>
                   </a:txBody>
@@ -39936,7 +39936,7 @@
                           </a:solidFill>
                           <a:latin typeface="Kanit"/>
                         </a:rPr>
-                        <a:t>−67.8%</a:t>
+                        <a:t>−67.6%</a:t>
                       </a:r>
                     </a:p>
                   </a:txBody>
@@ -40791,7 +40791,7 @@
                 </a:solidFill>
                 <a:latin typeface="Kanit"/>
               </a:rPr>
-              <a:t>Prices MEASURED — NABC daily quotes for the Thai farm gate, OCSB announced cane price; newest quote 2026-08-11. The six-month move is computed from NABC's own monthly series (thai_price_history, vintage 2026-08-02); a crop with no monthly series is marked, never estimated. Belt is an ESTIMATED read of where each commodity is produced, and belts overlap. Farming accounts are OURS and MEASURED — accounts whose recorded occupation is เกษตร in the belt provinces, from the 382,735-account tape at 2026-07; no cell below 30 accounts is published. They live where the crop grows; they are not confirmed to grow it.</a:t>
+              <a:t>Prices MEASURED — NABC daily quotes for the Thai farm gate, OCSB announced cane price; newest quote 2026-08-13. The six-month move is computed from NABC's own monthly series (thai_price_history, vintage 2026-08-02); a crop with no monthly series is marked, never estimated. Belt is an ESTIMATED read of where each commodity is produced, and belts overlap. Farming accounts are OURS and MEASURED — accounts whose recorded occupation is เกษตร in the belt provinces, from the 382,735-account tape at 2026-07; no cell below 30 accounts is published. They live where the crop grows; they are not confirmed to grow it.</a:t>
             </a:r>
           </a:p>
         </p:txBody>
@@ -44679,7 +44679,7 @@
                 </a:solidFill>
                 <a:latin typeface="Kanit"/>
               </a:rPr>
-              <a:t>coconut −67.8%, pineapple −18.4%, sugarcane −17.9% year on year</a:t>
+              <a:t>coconut −67.6%, pineapple −18.4%, sugarcane −17.9% year on year</a:t>
             </a:r>
           </a:p>
         </p:txBody>
@@ -44805,7 +44805,7 @@
                 </a:solidFill>
                 <a:latin typeface="Kanit"/>
               </a:rPr>
-              <a:t>+16.6%</a:t>
+              <a:t>+16.9%</a:t>
             </a:r>
           </a:p>
         </p:txBody>
@@ -45279,7 +45279,7 @@
                           </a:solidFill>
                           <a:latin typeface="Kanit"/>
                         </a:rPr>
-                        <a:t>+6.5%</a:t>
+                        <a:t>+6.7%</a:t>
                       </a:r>
                     </a:p>
                   </a:txBody>
@@ -45348,7 +45348,7 @@
                           </a:solidFill>
                           <a:latin typeface="Kanit"/>
                         </a:rPr>
-                        <a:t>-63.4%</a:t>
+                        <a:t>-63.2%</a:t>
                       </a:r>
                     </a:p>
                   </a:txBody>
@@ -45419,7 +45419,7 @@
                           </a:solidFill>
                           <a:latin typeface="Kanit"/>
                         </a:rPr>
-                        <a:t>+15.3%</a:t>
+                        <a:t>+15.6%</a:t>
                       </a:r>
                     </a:p>
                   </a:txBody>
@@ -45488,7 +45488,7 @@
                           </a:solidFill>
                           <a:latin typeface="Kanit"/>
                         </a:rPr>
-                        <a:t>+9.8%</a:t>
+                        <a:t>+10.0%</a:t>
                       </a:r>
                     </a:p>
                   </a:txBody>
@@ -45559,7 +45559,7 @@
                           </a:solidFill>
                           <a:latin typeface="Kanit"/>
                         </a:rPr>
-                        <a:t>+16.7%</a:t>
+                        <a:t>+16.8%</a:t>
                       </a:r>
                     </a:p>
                   </a:txBody>
@@ -45628,7 +45628,7 @@
                           </a:solidFill>
                           <a:latin typeface="Kanit"/>
                         </a:rPr>
-                        <a:t>+8.6%</a:t>
+                        <a:t>+8.7%</a:t>
                       </a:r>
                     </a:p>
                   </a:txBody>
@@ -45699,7 +45699,7 @@
                           </a:solidFill>
                           <a:latin typeface="Kanit"/>
                         </a:rPr>
-                        <a:t>+25.8%</a:t>
+                        <a:t>+26.0%</a:t>
                       </a:r>
                     </a:p>
                   </a:txBody>
@@ -45768,7 +45768,7 @@
                           </a:solidFill>
                           <a:latin typeface="Kanit"/>
                         </a:rPr>
-                        <a:t>+10.7%</a:t>
+                        <a:t>+10.8%</a:t>
                       </a:r>
                     </a:p>
                   </a:txBody>
@@ -45839,7 +45839,7 @@
                           </a:solidFill>
                           <a:latin typeface="Kanit"/>
                         </a:rPr>
-                        <a:t>+36.5%</a:t>
+                        <a:t>+36.7%</a:t>
                       </a:r>
                     </a:p>
                   </a:txBody>
@@ -45908,7 +45908,7 @@
                           </a:solidFill>
                           <a:latin typeface="Kanit"/>
                         </a:rPr>
-                        <a:t>+29.0%</a:t>
+                        <a:t>+28.8%</a:t>
                       </a:r>
                     </a:p>
                   </a:txBody>
@@ -46387,7 +46387,7 @@
                           </a:solidFill>
                           <a:latin typeface="Kanit"/>
                         </a:rPr>
-                        <a:t>+16.7%</a:t>
+                        <a:t>+16.9%</a:t>
                       </a:r>
                     </a:p>
                   </a:txBody>
@@ -46550,7 +46550,7 @@
                           </a:solidFill>
                           <a:latin typeface="Kanit"/>
                         </a:rPr>
-                        <a:t>+21.1%</a:t>
+                        <a:t>+21.3%</a:t>
                       </a:r>
                     </a:p>
                   </a:txBody>
@@ -46713,7 +46713,7 @@
                           </a:solidFill>
                           <a:latin typeface="Kanit"/>
                         </a:rPr>
-                        <a:t>+10.9%</a:t>
+                        <a:t>+11.2%</a:t>
                       </a:r>
                     </a:p>
                   </a:txBody>
@@ -47039,7 +47039,7 @@
                           </a:solidFill>
                           <a:latin typeface="Kanit"/>
                         </a:rPr>
-                        <a:t>+16.8%</a:t>
+                        <a:t>+16.9%</a:t>
                       </a:r>
                     </a:p>
                   </a:txBody>
@@ -47202,7 +47202,7 @@
                           </a:solidFill>
                           <a:latin typeface="Kanit"/>
                         </a:rPr>
-                        <a:t>+15.5%</a:t>
+                        <a:t>+15.6%</a:t>
                       </a:r>
                     </a:p>
                   </a:txBody>
@@ -48024,7 +48024,7 @@
                 </a:solidFill>
                 <a:latin typeface="Kanit"/>
               </a:rPr>
-              <a:t>YoY −67.8%</a:t>
+              <a:t>YoY −67.6%</a:t>
             </a:r>
           </a:p>
         </p:txBody>
@@ -48660,7 +48660,7 @@
                 </a:solidFill>
                 <a:latin typeface="Kanit"/>
               </a:rPr>
-              <a:t>YoY +0.3%</a:t>
+              <a:t>YoY +0.7%</a:t>
             </a:r>
           </a:p>
         </p:txBody>
@@ -48900,6 +48900,324 @@
                 </a:solidFill>
                 <a:latin typeface="Kanit"/>
               </a:rPr>
+              <a:t>White shrimp  กุ้งขาว</a:t>
+            </a:r>
+          </a:p>
+        </p:txBody>
+      </p:sp>
+      <p:sp>
+        <p:nvSpPr>
+          <p:cNvPr id="37" name="TextBox 36"/>
+          <p:cNvSpPr txBox="1"/>
+          <p:nvPr/>
+        </p:nvSpPr>
+        <p:spPr>
+          <a:xfrm>
+            <a:off x="7318857" y="2112263"/>
+            <a:ext cx="2156155" cy="125730"/>
+          </a:xfrm>
+          <a:prstGeom prst="rect">
+            <a:avLst/>
+          </a:prstGeom>
+          <a:noFill/>
+        </p:spPr>
+        <p:txBody>
+          <a:bodyPr wrap="square" lIns="0" rIns="0" tIns="0" bIns="0" anchor="t">
+            <a:noAutofit/>
+          </a:bodyPr>
+          <a:lstStyle/>
+          <a:p>
+            <a:pPr algn="l">
+              <a:lnSpc>
+                <a:spcPts val="990"/>
+              </a:lnSpc>
+            </a:pPr>
+            <a:r>
+              <a:rPr sz="750" b="0">
+                <a:solidFill>
+                  <a:srgbClr val="606060"/>
+                </a:solidFill>
+                <a:latin typeface="Kanit"/>
+              </a:rPr>
+              <a:t>฿133.82 /กก. · S·E coast</a:t>
+            </a:r>
+          </a:p>
+        </p:txBody>
+      </p:sp>
+      <p:sp>
+        <p:nvSpPr>
+          <p:cNvPr id="38" name="TextBox 37"/>
+          <p:cNvSpPr txBox="1"/>
+          <p:nvPr/>
+        </p:nvSpPr>
+        <p:spPr>
+          <a:xfrm>
+            <a:off x="7318857" y="2244851"/>
+            <a:ext cx="1078077" cy="134112"/>
+          </a:xfrm>
+          <a:prstGeom prst="rect">
+            <a:avLst/>
+          </a:prstGeom>
+          <a:noFill/>
+        </p:spPr>
+        <p:txBody>
+          <a:bodyPr wrap="square" lIns="0" rIns="0" tIns="0" bIns="0" anchor="t">
+            <a:noAutofit/>
+          </a:bodyPr>
+          <a:lstStyle/>
+          <a:p>
+            <a:pPr algn="l">
+              <a:lnSpc>
+                <a:spcPts val="1056"/>
+              </a:lnSpc>
+            </a:pPr>
+            <a:r>
+              <a:rPr sz="800" b="1">
+                <a:solidFill>
+                  <a:srgbClr val="15795F"/>
+                </a:solidFill>
+                <a:latin typeface="Kanit"/>
+              </a:rPr>
+              <a:t>YoY +1.1%</a:t>
+            </a:r>
+          </a:p>
+        </p:txBody>
+      </p:sp>
+      <p:sp>
+        <p:nvSpPr>
+          <p:cNvPr id="39" name="TextBox 38"/>
+          <p:cNvSpPr txBox="1"/>
+          <p:nvPr/>
+        </p:nvSpPr>
+        <p:spPr>
+          <a:xfrm>
+            <a:off x="8396935" y="2244851"/>
+            <a:ext cx="1078077" cy="134112"/>
+          </a:xfrm>
+          <a:prstGeom prst="rect">
+            <a:avLst/>
+          </a:prstGeom>
+          <a:noFill/>
+        </p:spPr>
+        <p:txBody>
+          <a:bodyPr wrap="square" lIns="0" rIns="0" tIns="0" bIns="0" anchor="t">
+            <a:noAutofit/>
+          </a:bodyPr>
+          <a:lstStyle/>
+          <a:p>
+            <a:pPr algn="l">
+              <a:lnSpc>
+                <a:spcPts val="1056"/>
+              </a:lnSpc>
+            </a:pPr>
+            <a:r>
+              <a:rPr sz="800" b="1">
+                <a:solidFill>
+                  <a:srgbClr val="CC0000"/>
+                </a:solidFill>
+                <a:latin typeface="Kanit"/>
+              </a:rPr>
+              <a:t>6m −15.8%</a:t>
+            </a:r>
+          </a:p>
+        </p:txBody>
+      </p:sp>
+      <p:sp>
+        <p:nvSpPr>
+          <p:cNvPr id="40" name="Rectangle 39"/>
+          <p:cNvSpPr/>
+          <p:nvPr/>
+        </p:nvSpPr>
+        <p:spPr>
+          <a:xfrm>
+            <a:off x="7318857" y="2400300"/>
+            <a:ext cx="2156155" cy="548640"/>
+          </a:xfrm>
+          <a:prstGeom prst="rect">
+            <a:avLst/>
+          </a:prstGeom>
+          <a:solidFill>
+            <a:srgbClr val="FBFCFE"/>
+          </a:solidFill>
+          <a:ln w="9525">
+            <a:solidFill>
+              <a:srgbClr val="D9DEE9"/>
+            </a:solidFill>
+          </a:ln>
+          <a:effectLst/>
+        </p:spPr>
+        <p:style>
+          <a:lnRef idx="1">
+            <a:schemeClr val="accent1"/>
+          </a:lnRef>
+          <a:fillRef idx="3">
+            <a:schemeClr val="accent1"/>
+          </a:fillRef>
+          <a:effectRef idx="2">
+            <a:schemeClr val="accent1"/>
+          </a:effectRef>
+          <a:fontRef idx="minor">
+            <a:schemeClr val="lt1"/>
+          </a:fontRef>
+        </p:style>
+        <p:txBody>
+          <a:bodyPr rtlCol="0" anchor="ctr" wrap="none"/>
+          <a:lstStyle/>
+          <a:p>
+            <a:pPr algn="ctr"/>
+          </a:p>
+        </p:txBody>
+      </p:sp>
+      <p:sp>
+        <p:nvSpPr>
+          <p:cNvPr id="41" name="Freeform 40"/>
+          <p:cNvSpPr/>
+          <p:nvPr/>
+        </p:nvSpPr>
+        <p:spPr>
+          <a:xfrm>
+            <a:off x="7364577" y="2446020"/>
+            <a:ext cx="2064715" cy="457200"/>
+          </a:xfrm>
+          <a:custGeom>
+            <a:avLst/>
+            <a:gdLst/>
+            <a:ahLst/>
+            <a:cxnLst/>
+            <a:rect l="l" t="t" r="r" b="b"/>
+            <a:pathLst>
+              <a:path w="2064715" h="457200">
+                <a:moveTo>
+                  <a:pt x="0" y="0"/>
+                </a:moveTo>
+                <a:lnTo>
+                  <a:pt x="412943" y="247179"/>
+                </a:lnTo>
+                <a:lnTo>
+                  <a:pt x="825886" y="420769"/>
+                </a:lnTo>
+                <a:lnTo>
+                  <a:pt x="1238829" y="457200"/>
+                </a:lnTo>
+                <a:lnTo>
+                  <a:pt x="1651772" y="424594"/>
+                </a:lnTo>
+                <a:lnTo>
+                  <a:pt x="2064715" y="223135"/>
+                </a:lnTo>
+              </a:path>
+            </a:pathLst>
+          </a:custGeom>
+          <a:noFill/>
+          <a:ln w="20320">
+            <a:solidFill>
+              <a:srgbClr val="CC0000"/>
+            </a:solidFill>
+          </a:ln>
+          <a:effectLst/>
+        </p:spPr>
+        <p:style>
+          <a:lnRef idx="1">
+            <a:schemeClr val="accent1"/>
+          </a:lnRef>
+          <a:fillRef idx="3">
+            <a:schemeClr val="accent1"/>
+          </a:fillRef>
+          <a:effectRef idx="2">
+            <a:schemeClr val="accent1"/>
+          </a:effectRef>
+          <a:fontRef idx="minor">
+            <a:schemeClr val="lt1"/>
+          </a:fontRef>
+        </p:style>
+        <p:txBody>
+          <a:bodyPr rtlCol="0" anchor="ctr"/>
+          <a:lstStyle/>
+          <a:p>
+            <a:pPr algn="ctr"/>
+          </a:p>
+        </p:txBody>
+      </p:sp>
+      <p:sp>
+        <p:nvSpPr>
+          <p:cNvPr id="42" name="Rounded Rectangle 41"/>
+          <p:cNvSpPr/>
+          <p:nvPr/>
+        </p:nvSpPr>
+        <p:spPr>
+          <a:xfrm>
+            <a:off x="9388144" y="2628007"/>
+            <a:ext cx="82296" cy="82296"/>
+          </a:xfrm>
+          <a:prstGeom prst="roundRect">
+            <a:avLst>
+              <a:gd name="adj" fmla="val 50000"/>
+            </a:avLst>
+          </a:prstGeom>
+          <a:solidFill>
+            <a:srgbClr val="CC0000"/>
+          </a:solidFill>
+          <a:ln>
+            <a:noFill/>
+          </a:ln>
+          <a:effectLst/>
+        </p:spPr>
+        <p:style>
+          <a:lnRef idx="1">
+            <a:schemeClr val="accent1"/>
+          </a:lnRef>
+          <a:fillRef idx="3">
+            <a:schemeClr val="accent1"/>
+          </a:fillRef>
+          <a:effectRef idx="2">
+            <a:schemeClr val="accent1"/>
+          </a:effectRef>
+          <a:fontRef idx="minor">
+            <a:schemeClr val="lt1"/>
+          </a:fontRef>
+        </p:style>
+        <p:txBody>
+          <a:bodyPr rtlCol="0" anchor="ctr" wrap="none"/>
+          <a:lstStyle/>
+          <a:p>
+            <a:pPr algn="ctr"/>
+          </a:p>
+        </p:txBody>
+      </p:sp>
+      <p:sp>
+        <p:nvSpPr>
+          <p:cNvPr id="43" name="TextBox 42"/>
+          <p:cNvSpPr txBox="1"/>
+          <p:nvPr/>
+        </p:nvSpPr>
+        <p:spPr>
+          <a:xfrm>
+            <a:off x="9621316" y="1970531"/>
+            <a:ext cx="2156155" cy="150876"/>
+          </a:xfrm>
+          <a:prstGeom prst="rect">
+            <a:avLst/>
+          </a:prstGeom>
+          <a:noFill/>
+        </p:spPr>
+        <p:txBody>
+          <a:bodyPr wrap="square" lIns="0" rIns="0" tIns="0" bIns="0" anchor="t">
+            <a:noAutofit/>
+          </a:bodyPr>
+          <a:lstStyle/>
+          <a:p>
+            <a:pPr algn="l">
+              <a:lnSpc>
+                <a:spcPts val="1188"/>
+              </a:lnSpc>
+            </a:pPr>
+            <a:r>
+              <a:rPr sz="900" b="1">
+                <a:solidFill>
+                  <a:srgbClr val="1E2F5C"/>
+                </a:solidFill>
+                <a:latin typeface="Kanit"/>
+              </a:rPr>
               <a:t>Pork  สุกร</a:t>
             </a:r>
           </a:p>
@@ -48907,13 +49225,13 @@
       </p:sp>
       <p:sp>
         <p:nvSpPr>
-          <p:cNvPr id="37" name="TextBox 36"/>
+          <p:cNvPr id="44" name="TextBox 43"/>
           <p:cNvSpPr txBox="1"/>
           <p:nvPr/>
         </p:nvSpPr>
         <p:spPr>
           <a:xfrm>
-            <a:off x="7318857" y="2112263"/>
+            <a:off x="9621316" y="2112263"/>
             <a:ext cx="2156155" cy="125730"/>
           </a:xfrm>
           <a:prstGeom prst="rect">
@@ -48946,13 +49264,13 @@
       </p:sp>
       <p:sp>
         <p:nvSpPr>
-          <p:cNvPr id="38" name="TextBox 37"/>
+          <p:cNvPr id="45" name="TextBox 44"/>
           <p:cNvSpPr txBox="1"/>
           <p:nvPr/>
         </p:nvSpPr>
         <p:spPr>
           <a:xfrm>
-            <a:off x="7318857" y="2244851"/>
+            <a:off x="9621316" y="2244851"/>
             <a:ext cx="1078077" cy="134112"/>
           </a:xfrm>
           <a:prstGeom prst="rect">
@@ -48978,20 +49296,20 @@
                 </a:solidFill>
                 <a:latin typeface="Kanit"/>
               </a:rPr>
-              <a:t>YoY +0.3%</a:t>
+              <a:t>YoY +1.5%</a:t>
             </a:r>
           </a:p>
         </p:txBody>
       </p:sp>
       <p:sp>
         <p:nvSpPr>
-          <p:cNvPr id="39" name="TextBox 38"/>
+          <p:cNvPr id="46" name="TextBox 45"/>
           <p:cNvSpPr txBox="1"/>
           <p:nvPr/>
         </p:nvSpPr>
         <p:spPr>
           <a:xfrm>
-            <a:off x="8396935" y="2244851"/>
+            <a:off x="10699394" y="2244851"/>
             <a:ext cx="1078077" cy="134112"/>
           </a:xfrm>
           <a:prstGeom prst="rect">
@@ -49024,13 +49342,13 @@
       </p:sp>
       <p:sp>
         <p:nvSpPr>
-          <p:cNvPr id="40" name="Rectangle 39"/>
+          <p:cNvPr id="47" name="Rectangle 46"/>
           <p:cNvSpPr/>
           <p:nvPr/>
         </p:nvSpPr>
         <p:spPr>
           <a:xfrm>
-            <a:off x="7318857" y="2400300"/>
+            <a:off x="9621316" y="2400300"/>
             <a:ext cx="2156155" cy="548640"/>
           </a:xfrm>
           <a:prstGeom prst="rect">
@@ -49070,13 +49388,13 @@
       </p:sp>
       <p:sp>
         <p:nvSpPr>
-          <p:cNvPr id="41" name="Freeform 40"/>
+          <p:cNvPr id="48" name="Freeform 47"/>
           <p:cNvSpPr/>
           <p:nvPr/>
         </p:nvSpPr>
         <p:spPr>
           <a:xfrm>
-            <a:off x="7364577" y="2446020"/>
+            <a:off x="9667036" y="2446020"/>
             <a:ext cx="2064715" cy="457200"/>
           </a:xfrm>
           <a:custGeom>
@@ -49140,13 +49458,13 @@
       </p:sp>
       <p:sp>
         <p:nvSpPr>
-          <p:cNvPr id="42" name="Rounded Rectangle 41"/>
+          <p:cNvPr id="49" name="Rounded Rectangle 48"/>
           <p:cNvSpPr/>
           <p:nvPr/>
         </p:nvSpPr>
         <p:spPr>
           <a:xfrm>
-            <a:off x="9388144" y="2457891"/>
+            <a:off x="11690603" y="2457891"/>
             <a:ext cx="82296" cy="82296"/>
           </a:xfrm>
           <a:prstGeom prst="roundRect">
@@ -49156,324 +49474,6 @@
           </a:prstGeom>
           <a:solidFill>
             <a:srgbClr val="15795F"/>
-          </a:solidFill>
-          <a:ln>
-            <a:noFill/>
-          </a:ln>
-          <a:effectLst/>
-        </p:spPr>
-        <p:style>
-          <a:lnRef idx="1">
-            <a:schemeClr val="accent1"/>
-          </a:lnRef>
-          <a:fillRef idx="3">
-            <a:schemeClr val="accent1"/>
-          </a:fillRef>
-          <a:effectRef idx="2">
-            <a:schemeClr val="accent1"/>
-          </a:effectRef>
-          <a:fontRef idx="minor">
-            <a:schemeClr val="lt1"/>
-          </a:fontRef>
-        </p:style>
-        <p:txBody>
-          <a:bodyPr rtlCol="0" anchor="ctr" wrap="none"/>
-          <a:lstStyle/>
-          <a:p>
-            <a:pPr algn="ctr"/>
-          </a:p>
-        </p:txBody>
-      </p:sp>
-      <p:sp>
-        <p:nvSpPr>
-          <p:cNvPr id="43" name="TextBox 42"/>
-          <p:cNvSpPr txBox="1"/>
-          <p:nvPr/>
-        </p:nvSpPr>
-        <p:spPr>
-          <a:xfrm>
-            <a:off x="9621316" y="1970531"/>
-            <a:ext cx="2156155" cy="150876"/>
-          </a:xfrm>
-          <a:prstGeom prst="rect">
-            <a:avLst/>
-          </a:prstGeom>
-          <a:noFill/>
-        </p:spPr>
-        <p:txBody>
-          <a:bodyPr wrap="square" lIns="0" rIns="0" tIns="0" bIns="0" anchor="t">
-            <a:noAutofit/>
-          </a:bodyPr>
-          <a:lstStyle/>
-          <a:p>
-            <a:pPr algn="l">
-              <a:lnSpc>
-                <a:spcPts val="1188"/>
-              </a:lnSpc>
-            </a:pPr>
-            <a:r>
-              <a:rPr sz="900" b="1">
-                <a:solidFill>
-                  <a:srgbClr val="1E2F5C"/>
-                </a:solidFill>
-                <a:latin typeface="Kanit"/>
-              </a:rPr>
-              <a:t>White shrimp  กุ้งขาว</a:t>
-            </a:r>
-          </a:p>
-        </p:txBody>
-      </p:sp>
-      <p:sp>
-        <p:nvSpPr>
-          <p:cNvPr id="44" name="TextBox 43"/>
-          <p:cNvSpPr txBox="1"/>
-          <p:nvPr/>
-        </p:nvSpPr>
-        <p:spPr>
-          <a:xfrm>
-            <a:off x="9621316" y="2112263"/>
-            <a:ext cx="2156155" cy="125730"/>
-          </a:xfrm>
-          <a:prstGeom prst="rect">
-            <a:avLst/>
-          </a:prstGeom>
-          <a:noFill/>
-        </p:spPr>
-        <p:txBody>
-          <a:bodyPr wrap="square" lIns="0" rIns="0" tIns="0" bIns="0" anchor="t">
-            <a:noAutofit/>
-          </a:bodyPr>
-          <a:lstStyle/>
-          <a:p>
-            <a:pPr algn="l">
-              <a:lnSpc>
-                <a:spcPts val="990"/>
-              </a:lnSpc>
-            </a:pPr>
-            <a:r>
-              <a:rPr sz="750" b="0">
-                <a:solidFill>
-                  <a:srgbClr val="606060"/>
-                </a:solidFill>
-                <a:latin typeface="Kanit"/>
-              </a:rPr>
-              <a:t>฿133.82 /กก. · S·E coast</a:t>
-            </a:r>
-          </a:p>
-        </p:txBody>
-      </p:sp>
-      <p:sp>
-        <p:nvSpPr>
-          <p:cNvPr id="45" name="TextBox 44"/>
-          <p:cNvSpPr txBox="1"/>
-          <p:nvPr/>
-        </p:nvSpPr>
-        <p:spPr>
-          <a:xfrm>
-            <a:off x="9621316" y="2244851"/>
-            <a:ext cx="1078077" cy="134112"/>
-          </a:xfrm>
-          <a:prstGeom prst="rect">
-            <a:avLst/>
-          </a:prstGeom>
-          <a:noFill/>
-        </p:spPr>
-        <p:txBody>
-          <a:bodyPr wrap="square" lIns="0" rIns="0" tIns="0" bIns="0" anchor="t">
-            <a:noAutofit/>
-          </a:bodyPr>
-          <a:lstStyle/>
-          <a:p>
-            <a:pPr algn="l">
-              <a:lnSpc>
-                <a:spcPts val="1056"/>
-              </a:lnSpc>
-            </a:pPr>
-            <a:r>
-              <a:rPr sz="800" b="1">
-                <a:solidFill>
-                  <a:srgbClr val="15795F"/>
-                </a:solidFill>
-                <a:latin typeface="Kanit"/>
-              </a:rPr>
-              <a:t>YoY +0.6%</a:t>
-            </a:r>
-          </a:p>
-        </p:txBody>
-      </p:sp>
-      <p:sp>
-        <p:nvSpPr>
-          <p:cNvPr id="46" name="TextBox 45"/>
-          <p:cNvSpPr txBox="1"/>
-          <p:nvPr/>
-        </p:nvSpPr>
-        <p:spPr>
-          <a:xfrm>
-            <a:off x="10699394" y="2244851"/>
-            <a:ext cx="1078077" cy="134112"/>
-          </a:xfrm>
-          <a:prstGeom prst="rect">
-            <a:avLst/>
-          </a:prstGeom>
-          <a:noFill/>
-        </p:spPr>
-        <p:txBody>
-          <a:bodyPr wrap="square" lIns="0" rIns="0" tIns="0" bIns="0" anchor="t">
-            <a:noAutofit/>
-          </a:bodyPr>
-          <a:lstStyle/>
-          <a:p>
-            <a:pPr algn="l">
-              <a:lnSpc>
-                <a:spcPts val="1056"/>
-              </a:lnSpc>
-            </a:pPr>
-            <a:r>
-              <a:rPr sz="800" b="1">
-                <a:solidFill>
-                  <a:srgbClr val="CC0000"/>
-                </a:solidFill>
-                <a:latin typeface="Kanit"/>
-              </a:rPr>
-              <a:t>6m −15.8%</a:t>
-            </a:r>
-          </a:p>
-        </p:txBody>
-      </p:sp>
-      <p:sp>
-        <p:nvSpPr>
-          <p:cNvPr id="47" name="Rectangle 46"/>
-          <p:cNvSpPr/>
-          <p:nvPr/>
-        </p:nvSpPr>
-        <p:spPr>
-          <a:xfrm>
-            <a:off x="9621316" y="2400300"/>
-            <a:ext cx="2156155" cy="548640"/>
-          </a:xfrm>
-          <a:prstGeom prst="rect">
-            <a:avLst/>
-          </a:prstGeom>
-          <a:solidFill>
-            <a:srgbClr val="FBFCFE"/>
-          </a:solidFill>
-          <a:ln w="9525">
-            <a:solidFill>
-              <a:srgbClr val="D9DEE9"/>
-            </a:solidFill>
-          </a:ln>
-          <a:effectLst/>
-        </p:spPr>
-        <p:style>
-          <a:lnRef idx="1">
-            <a:schemeClr val="accent1"/>
-          </a:lnRef>
-          <a:fillRef idx="3">
-            <a:schemeClr val="accent1"/>
-          </a:fillRef>
-          <a:effectRef idx="2">
-            <a:schemeClr val="accent1"/>
-          </a:effectRef>
-          <a:fontRef idx="minor">
-            <a:schemeClr val="lt1"/>
-          </a:fontRef>
-        </p:style>
-        <p:txBody>
-          <a:bodyPr rtlCol="0" anchor="ctr" wrap="none"/>
-          <a:lstStyle/>
-          <a:p>
-            <a:pPr algn="ctr"/>
-          </a:p>
-        </p:txBody>
-      </p:sp>
-      <p:sp>
-        <p:nvSpPr>
-          <p:cNvPr id="48" name="Freeform 47"/>
-          <p:cNvSpPr/>
-          <p:nvPr/>
-        </p:nvSpPr>
-        <p:spPr>
-          <a:xfrm>
-            <a:off x="9667036" y="2446020"/>
-            <a:ext cx="2064715" cy="457200"/>
-          </a:xfrm>
-          <a:custGeom>
-            <a:avLst/>
-            <a:gdLst/>
-            <a:ahLst/>
-            <a:cxnLst/>
-            <a:rect l="l" t="t" r="r" b="b"/>
-            <a:pathLst>
-              <a:path w="2064715" h="457200">
-                <a:moveTo>
-                  <a:pt x="0" y="0"/>
-                </a:moveTo>
-                <a:lnTo>
-                  <a:pt x="412943" y="247179"/>
-                </a:lnTo>
-                <a:lnTo>
-                  <a:pt x="825886" y="420769"/>
-                </a:lnTo>
-                <a:lnTo>
-                  <a:pt x="1238829" y="457200"/>
-                </a:lnTo>
-                <a:lnTo>
-                  <a:pt x="1651772" y="424594"/>
-                </a:lnTo>
-                <a:lnTo>
-                  <a:pt x="2064715" y="223135"/>
-                </a:lnTo>
-              </a:path>
-            </a:pathLst>
-          </a:custGeom>
-          <a:noFill/>
-          <a:ln w="20320">
-            <a:solidFill>
-              <a:srgbClr val="CC0000"/>
-            </a:solidFill>
-          </a:ln>
-          <a:effectLst/>
-        </p:spPr>
-        <p:style>
-          <a:lnRef idx="1">
-            <a:schemeClr val="accent1"/>
-          </a:lnRef>
-          <a:fillRef idx="3">
-            <a:schemeClr val="accent1"/>
-          </a:fillRef>
-          <a:effectRef idx="2">
-            <a:schemeClr val="accent1"/>
-          </a:effectRef>
-          <a:fontRef idx="minor">
-            <a:schemeClr val="lt1"/>
-          </a:fontRef>
-        </p:style>
-        <p:txBody>
-          <a:bodyPr rtlCol="0" anchor="ctr"/>
-          <a:lstStyle/>
-          <a:p>
-            <a:pPr algn="ctr"/>
-          </a:p>
-        </p:txBody>
-      </p:sp>
-      <p:sp>
-        <p:nvSpPr>
-          <p:cNvPr id="49" name="Rounded Rectangle 48"/>
-          <p:cNvSpPr/>
-          <p:nvPr/>
-        </p:nvSpPr>
-        <p:spPr>
-          <a:xfrm>
-            <a:off x="11690603" y="2628007"/>
-            <a:ext cx="82296" cy="82296"/>
-          </a:xfrm>
-          <a:prstGeom prst="roundRect">
-            <a:avLst>
-              <a:gd name="adj" fmla="val 50000"/>
-            </a:avLst>
-          </a:prstGeom>
-          <a:solidFill>
-            <a:srgbClr val="CC0000"/>
           </a:solidFill>
           <a:ln>
             <a:noFill/>
@@ -49614,7 +49614,7 @@
                 </a:solidFill>
                 <a:latin typeface="Kanit"/>
               </a:rPr>
-              <a:t>YoY +1.6%</a:t>
+              <a:t>YoY +2.0%</a:t>
             </a:r>
           </a:p>
         </p:txBody>
@@ -49932,7 +49932,7 @@
                 </a:solidFill>
                 <a:latin typeface="Kanit"/>
               </a:rPr>
-              <a:t>YoY +13.9%</a:t>
+              <a:t>YoY +14.0%</a:t>
             </a:r>
           </a:p>
         </p:txBody>
@@ -50250,7 +50250,7 @@
                 </a:solidFill>
                 <a:latin typeface="Kanit"/>
               </a:rPr>
-              <a:t>YoY +15.4%</a:t>
+              <a:t>YoY +16.5%</a:t>
             </a:r>
           </a:p>
         </p:txBody>
@@ -50568,7 +50568,7 @@
                 </a:solidFill>
                 <a:latin typeface="Kanit"/>
               </a:rPr>
-              <a:t>YoY +25.3%</a:t>
+              <a:t>YoY +24.7%</a:t>
             </a:r>
           </a:p>
         </p:txBody>
@@ -50886,7 +50886,7 @@
                 </a:solidFill>
                 <a:latin typeface="Kanit"/>
               </a:rPr>
-              <a:t>YoY +42.0%</a:t>
+              <a:t>YoY +42.4%</a:t>
             </a:r>
           </a:p>
         </p:txBody>
@@ -51204,7 +51204,7 @@
                 </a:solidFill>
                 <a:latin typeface="Kanit"/>
               </a:rPr>
-              <a:t>YoY +63.5%</a:t>
+              <a:t>YoY +64.3%</a:t>
             </a:r>
           </a:p>
         </p:txBody>
@@ -51522,7 +51522,7 @@
                 </a:solidFill>
                 <a:latin typeface="Kanit"/>
               </a:rPr>
-              <a:t>YoY +109.2%</a:t>
+              <a:t>YoY +126.5%</a:t>
             </a:r>
           </a:p>
         </p:txBody>
@@ -51886,7 +51886,7 @@
                 </a:solidFill>
                 <a:latin typeface="Kanit"/>
               </a:rPr>
-              <a:t>Farm-gate prices MEASURED — NABC daily quotes, monthly means, in baht as published (no currency conversion); newest quote 2026-08-11, history vintage 2026-08-02. Farm gate (ราคาที่เกษตรกรขายได้) is what the grower is paid at first sale, before trading, milling or transport take a cut — not the world index and not a supermarket price. Belts are an ESTIMATED read of where each commodity is produced, and they overlap. Sugar is OCSB's announced season price, one point a year, so it has no six-month move to show.</a:t>
+              <a:t>Farm-gate prices MEASURED — NABC daily quotes, monthly means, in baht as published (no currency conversion); newest quote 2026-08-13, history vintage 2026-08-02. Farm gate (ราคาที่เกษตรกรขายได้) is what the grower is paid at first sale, before trading, milling or transport take a cut — not the world index and not a supermarket price. Belts are an ESTIMATED read of where each commodity is produced, and they overlap. Sugar is OCSB's announced season price, one point a year, so it has no six-month move to show.</a:t>
             </a:r>
           </a:p>
         </p:txBody>

--- a/docs/decks/mcom-2026-08-05-macro.pptx
+++ b/docs/decks/mcom-2026-08-05-macro.pptx
@@ -6240,7 +6240,7 @@
                 </a:solidFill>
                 <a:latin typeface="Kanit"/>
               </a:rPr>
-              <a:t>129</a:t>
+              <a:t>133</a:t>
             </a:r>
           </a:p>
         </p:txBody>
@@ -6279,7 +6279,7 @@
                 </a:solidFill>
                 <a:latin typeface="Kanit"/>
               </a:rPr>
-              <a:t>of 795 (16.2%) · live · 2026-08-14</a:t>
+              <a:t>of 795 (16.7%) · live · 2026-08-15</a:t>
             </a:r>
           </a:p>
         </p:txBody>
@@ -6405,7 +6405,7 @@
                 </a:solidFill>
                 <a:latin typeface="Kanit"/>
               </a:rPr>
-              <a:t>24</a:t>
+              <a:t>26</a:t>
             </a:r>
           </a:p>
         </p:txBody>
@@ -6444,7 +6444,7 @@
                 </a:solidFill>
                 <a:latin typeface="Kanit"/>
               </a:rPr>
-              <a:t>latest daily reading · 2026-08-14</a:t>
+              <a:t>latest daily reading · 2026-08-15</a:t>
             </a:r>
           </a:p>
         </p:txBody>
@@ -7928,7 +7928,7 @@
                           </a:solidFill>
                           <a:latin typeface="Kanit"/>
                         </a:rPr>
-                        <a:t>114</a:t>
+                        <a:t>84</a:t>
                       </a:r>
                     </a:p>
                   </a:txBody>
@@ -7951,7 +7951,7 @@
                           </a:solidFill>
                           <a:latin typeface="Kanit"/>
                         </a:rPr>
-                        <a:t>46.4%</a:t>
+                        <a:t>60.7%</a:t>
                       </a:r>
                     </a:p>
                   </a:txBody>
@@ -8022,7 +8022,7 @@
                           </a:solidFill>
                           <a:latin typeface="Kanit"/>
                         </a:rPr>
-                        <a:t>มุกดาหาร</a:t>
+                        <a:t>สกลนคร</a:t>
                       </a:r>
                     </a:p>
                   </a:txBody>
@@ -8045,7 +8045,7 @@
                           </a:solidFill>
                           <a:latin typeface="Kanit"/>
                         </a:rPr>
-                        <a:t>18</a:t>
+                        <a:t>36</a:t>
                       </a:r>
                     </a:p>
                   </a:txBody>
@@ -8068,7 +8068,7 @@
                           </a:solidFill>
                           <a:latin typeface="Kanit"/>
                         </a:rPr>
-                        <a:t>51</a:t>
+                        <a:t>42</a:t>
                       </a:r>
                     </a:p>
                   </a:txBody>
@@ -8091,7 +8091,7 @@
                           </a:solidFill>
                           <a:latin typeface="Kanit"/>
                         </a:rPr>
-                        <a:t>5.6%</a:t>
+                        <a:t>8.3%</a:t>
                       </a:r>
                     </a:p>
                   </a:txBody>
@@ -8114,7 +8114,7 @@
                           </a:solidFill>
                           <a:latin typeface="Kanit"/>
                         </a:rPr>
-                        <a:t>2/2</a:t>
+                        <a:t>7/13</a:t>
                       </a:r>
                     </a:p>
                   </a:txBody>
@@ -8162,7 +8162,7 @@
                           </a:solidFill>
                           <a:latin typeface="Kanit"/>
                         </a:rPr>
-                        <a:t>สกลนคร</a:t>
+                        <a:t>มุกดาหาร</a:t>
                       </a:r>
                     </a:p>
                   </a:txBody>
@@ -8185,7 +8185,7 @@
                           </a:solidFill>
                           <a:latin typeface="Kanit"/>
                         </a:rPr>
-                        <a:t>36</a:t>
+                        <a:t>17</a:t>
                       </a:r>
                     </a:p>
                   </a:txBody>
@@ -8208,7 +8208,7 @@
                           </a:solidFill>
                           <a:latin typeface="Kanit"/>
                         </a:rPr>
-                        <a:t>29</a:t>
+                        <a:t>51</a:t>
                       </a:r>
                     </a:p>
                   </a:txBody>
@@ -8227,11 +8227,11 @@
                       <a:r>
                         <a:rPr sz="900" b="1">
                           <a:solidFill>
-                            <a:srgbClr val="606060"/>
-                          </a:solidFill>
-                          <a:latin typeface="Kanit"/>
-                        </a:rPr>
-                        <a:t>0.0%</a:t>
+                            <a:srgbClr val="F5C242"/>
+                          </a:solidFill>
+                          <a:latin typeface="Kanit"/>
+                        </a:rPr>
+                        <a:t>5.9%</a:t>
                       </a:r>
                     </a:p>
                   </a:txBody>
@@ -8254,7 +8254,7 @@
                           </a:solidFill>
                           <a:latin typeface="Kanit"/>
                         </a:rPr>
-                        <a:t>7/13</a:t>
+                        <a:t>2/2</a:t>
                       </a:r>
                     </a:p>
                   </a:txBody>
@@ -8302,7 +8302,7 @@
                           </a:solidFill>
                           <a:latin typeface="Kanit"/>
                         </a:rPr>
-                        <a:t>สมุทรปราการ</a:t>
+                        <a:t>เลย</a:t>
                       </a:r>
                     </a:p>
                   </a:txBody>
@@ -8325,7 +8325,7 @@
                           </a:solidFill>
                           <a:latin typeface="Kanit"/>
                         </a:rPr>
-                        <a:t>16</a:t>
+                        <a:t>101</a:t>
                       </a:r>
                     </a:p>
                   </a:txBody>
@@ -8348,7 +8348,7 @@
                           </a:solidFill>
                           <a:latin typeface="Kanit"/>
                         </a:rPr>
-                        <a:t>0</a:t>
+                        <a:t>14</a:t>
                       </a:r>
                     </a:p>
                   </a:txBody>
@@ -8394,7 +8394,7 @@
                           </a:solidFill>
                           <a:latin typeface="Kanit"/>
                         </a:rPr>
-                        <a:t>4/5</a:t>
+                        <a:t>1/8</a:t>
                       </a:r>
                     </a:p>
                   </a:txBody>
@@ -8442,7 +8442,7 @@
                           </a:solidFill>
                           <a:latin typeface="Kanit"/>
                         </a:rPr>
-                        <a:t>เลย</a:t>
+                        <a:t>บึงกาฬ</a:t>
                       </a:r>
                     </a:p>
                   </a:txBody>
@@ -8465,7 +8465,7 @@
                           </a:solidFill>
                           <a:latin typeface="Kanit"/>
                         </a:rPr>
-                        <a:t>101</a:t>
+                        <a:t>11</a:t>
                       </a:r>
                     </a:p>
                   </a:txBody>
@@ -8488,7 +8488,7 @@
                           </a:solidFill>
                           <a:latin typeface="Kanit"/>
                         </a:rPr>
-                        <a:t>14</a:t>
+                        <a:t>45</a:t>
                       </a:r>
                     </a:p>
                   </a:txBody>
@@ -8507,11 +8507,11 @@
                       <a:r>
                         <a:rPr sz="900" b="1">
                           <a:solidFill>
-                            <a:srgbClr val="606060"/>
-                          </a:solidFill>
-                          <a:latin typeface="Kanit"/>
-                        </a:rPr>
-                        <a:t>0.0%</a:t>
+                            <a:srgbClr val="F5C242"/>
+                          </a:solidFill>
+                          <a:latin typeface="Kanit"/>
+                        </a:rPr>
+                        <a:t>27.3%</a:t>
                       </a:r>
                     </a:p>
                   </a:txBody>
@@ -8534,7 +8534,7 @@
                           </a:solidFill>
                           <a:latin typeface="Kanit"/>
                         </a:rPr>
-                        <a:t>1/8</a:t>
+                        <a:t>1/1</a:t>
                       </a:r>
                     </a:p>
                   </a:txBody>
@@ -8553,11 +8553,11 @@
                       <a:r>
                         <a:rPr sz="900" b="1">
                           <a:solidFill>
-                            <a:srgbClr val="CC0000"/>
-                          </a:solidFill>
-                          <a:latin typeface="Kanit"/>
-                        </a:rPr>
-                        <a:t>5</a:t>
+                            <a:srgbClr val="F5C242"/>
+                          </a:solidFill>
+                          <a:latin typeface="Kanit"/>
+                        </a:rPr>
+                        <a:t>4</a:t>
                       </a:r>
                     </a:p>
                   </a:txBody>
@@ -8582,7 +8582,7 @@
                           </a:solidFill>
                           <a:latin typeface="Kanit"/>
                         </a:rPr>
-                        <a:t>บึงกาฬ</a:t>
+                        <a:t>นครนายก</a:t>
                       </a:r>
                     </a:p>
                   </a:txBody>
@@ -8605,7 +8605,7 @@
                           </a:solidFill>
                           <a:latin typeface="Kanit"/>
                         </a:rPr>
-                        <a:t>11</a:t>
+                        <a:t>26</a:t>
                       </a:r>
                     </a:p>
                   </a:txBody>
@@ -8628,7 +8628,7 @@
                           </a:solidFill>
                           <a:latin typeface="Kanit"/>
                         </a:rPr>
-                        <a:t>48</a:t>
+                        <a:t>96</a:t>
                       </a:r>
                     </a:p>
                   </a:txBody>
@@ -8651,7 +8651,7 @@
                           </a:solidFill>
                           <a:latin typeface="Kanit"/>
                         </a:rPr>
-                        <a:t>36.4%</a:t>
+                        <a:t>23.1%</a:t>
                       </a:r>
                     </a:p>
                   </a:txBody>
@@ -8674,7 +8674,7 @@
                           </a:solidFill>
                           <a:latin typeface="Kanit"/>
                         </a:rPr>
-                        <a:t>1/1</a:t>
+                        <a:t>2/6</a:t>
                       </a:r>
                     </a:p>
                   </a:txBody>
@@ -8909,7 +8909,7 @@
                 </a:solidFill>
                 <a:latin typeface="Kanit"/>
               </a:rPr>
-              <a:t>Planted area MEASURED (OAE — 3,295 amphoe crop rows). Drought is a MODELLED SPEI index from rainfall and evapotranspiration, refreshed monthly, retrieved 2026-07-20 — the best national-coverage signal available, but nobody has walked those districts. Rain and river telemetry MEASURED (ThaiWater, live, pulled daily and accumulated — a missed pull leaves a gap rather than an invented point) · rain to 2026-08-14, river to 2026-08-14. Structural flood exposure MEASURED (GISTDA 1:50,000 repeated-flooding census, 2005-2016 — a 12-year ground record, not a forecast).</a:t>
+              <a:t>Planted area MEASURED (OAE — 3,295 amphoe crop rows). Drought is a MODELLED SPEI index from rainfall and evapotranspiration, refreshed monthly, retrieved 2026-07-20 — the best national-coverage signal available, but nobody has walked those districts. Rain and river telemetry MEASURED (ThaiWater, live, pulled daily and accumulated — a missed pull leaves a gap rather than an invented point) · rain to 2026-08-15, river to 2026-08-15. Structural flood exposure MEASURED (GISTDA 1:50,000 repeated-flooding census, 2005-2016 — a 12-year ground record, not a forecast).</a:t>
             </a:r>
           </a:p>
         </p:txBody>
@@ -32047,7 +32047,7 @@
                 </a:solidFill>
                 <a:latin typeface="Kanit"/>
               </a:rPr>
-              <a:t>Vintages — world prices 2026M06 · Thai farm gate 2026-08-13 · Thai price history 2026-08-02 · crop cost of production OAE Cai-up 2568 (crop year 2568/69, OAE forecast Mar 2569) · drought 2026-06-21 · CPI 2026-05 · GDP 2026-Q1 · IMF WEO 2026 · resale index 2026-05 · registrations to 2026-01 · household debt NSO SES 2566 · wages NSO LFS 2568 · telemetry 2026-08-14.</a:t>
+              <a:t>Vintages — world prices 2026M06 · Thai farm gate 2026-08-13 · Thai price history 2026-08-02 · crop cost of production OAE Cai-up 2568 (crop year 2568/69, OAE forecast Mar 2569) · drought 2026-06-21 · CPI 2026-05 · GDP 2026-Q1 · IMF WEO 2026 · resale index 2026-05 · registrations to 2026-01 · household debt NSO SES 2566 · wages NSO LFS 2568 · telemetry 2026-08-15.</a:t>
             </a:r>
           </a:p>
         </p:txBody>
@@ -37087,7 +37087,7 @@
                 </a:solidFill>
                 <a:latin typeface="Kanit"/>
               </a:rPr>
-              <a:t>338 of 928 districts · 129 of 795 rivers high</a:t>
+              <a:t>338 of 928 districts · 133 of 795 rivers high</a:t>
             </a:r>
           </a:p>
         </p:txBody>
@@ -38091,7 +38091,7 @@
                           </a:solidFill>
                           <a:latin typeface="Kanit"/>
                         </a:rPr>
-                        <a:t>23/274</a:t>
+                        <a:t>24/274</a:t>
                       </a:r>
                     </a:p>
                   </a:txBody>
@@ -38323,7 +38323,7 @@
                           </a:solidFill>
                           <a:latin typeface="Kanit"/>
                         </a:rPr>
-                        <a:t>27/168</a:t>
+                        <a:t>29/168</a:t>
                       </a:r>
                     </a:p>
                   </a:txBody>
@@ -38787,7 +38787,7 @@
                           </a:solidFill>
                           <a:latin typeface="Kanit"/>
                         </a:rPr>
-                        <a:t>40/144</a:t>
+                        <a:t>41/144</a:t>
                       </a:r>
                     </a:p>
                   </a:txBody>

--- a/docs/decks/mcom-2026-08-05-macro.pptx
+++ b/docs/decks/mcom-2026-08-05-macro.pptx
@@ -6240,7 +6240,7 @@
                 </a:solidFill>
                 <a:latin typeface="Kanit"/>
               </a:rPr>
-              <a:t>133</a:t>
+              <a:t>123</a:t>
             </a:r>
           </a:p>
         </p:txBody>
@@ -6279,7 +6279,7 @@
                 </a:solidFill>
                 <a:latin typeface="Kanit"/>
               </a:rPr>
-              <a:t>of 795 (16.7%) · live · 2026-08-15</a:t>
+              <a:t>of 796 (15.5%) · live · 2026-08-16</a:t>
             </a:r>
           </a:p>
         </p:txBody>
@@ -6405,7 +6405,7 @@
                 </a:solidFill>
                 <a:latin typeface="Kanit"/>
               </a:rPr>
-              <a:t>26</a:t>
+              <a:t>18</a:t>
             </a:r>
           </a:p>
         </p:txBody>
@@ -6444,7 +6444,7 @@
                 </a:solidFill>
                 <a:latin typeface="Kanit"/>
               </a:rPr>
-              <a:t>latest daily reading · 2026-08-15</a:t>
+              <a:t>latest daily reading · 2026-08-16</a:t>
             </a:r>
           </a:p>
         </p:txBody>
@@ -7928,7 +7928,7 @@
                           </a:solidFill>
                           <a:latin typeface="Kanit"/>
                         </a:rPr>
-                        <a:t>84</a:t>
+                        <a:t>24</a:t>
                       </a:r>
                     </a:p>
                   </a:txBody>
@@ -7947,11 +7947,11 @@
                       <a:r>
                         <a:rPr sz="900" b="1">
                           <a:solidFill>
-                            <a:srgbClr val="F5C242"/>
-                          </a:solidFill>
-                          <a:latin typeface="Kanit"/>
-                        </a:rPr>
-                        <a:t>60.7%</a:t>
+                            <a:srgbClr val="606060"/>
+                          </a:solidFill>
+                          <a:latin typeface="Kanit"/>
+                        </a:rPr>
+                        <a:t>0.0%</a:t>
                       </a:r>
                     </a:p>
                   </a:txBody>
@@ -8022,7 +8022,7 @@
                           </a:solidFill>
                           <a:latin typeface="Kanit"/>
                         </a:rPr>
-                        <a:t>สกลนคร</a:t>
+                        <a:t>มุกดาหาร</a:t>
                       </a:r>
                     </a:p>
                   </a:txBody>
@@ -8045,7 +8045,7 @@
                           </a:solidFill>
                           <a:latin typeface="Kanit"/>
                         </a:rPr>
-                        <a:t>36</a:t>
+                        <a:t>17</a:t>
                       </a:r>
                     </a:p>
                   </a:txBody>
@@ -8068,7 +8068,7 @@
                           </a:solidFill>
                           <a:latin typeface="Kanit"/>
                         </a:rPr>
-                        <a:t>42</a:t>
+                        <a:t>7</a:t>
                       </a:r>
                     </a:p>
                   </a:txBody>
@@ -8087,11 +8087,11 @@
                       <a:r>
                         <a:rPr sz="900" b="1">
                           <a:solidFill>
-                            <a:srgbClr val="F5C242"/>
-                          </a:solidFill>
-                          <a:latin typeface="Kanit"/>
-                        </a:rPr>
-                        <a:t>8.3%</a:t>
+                            <a:srgbClr val="606060"/>
+                          </a:solidFill>
+                          <a:latin typeface="Kanit"/>
+                        </a:rPr>
+                        <a:t>0.0%</a:t>
                       </a:r>
                     </a:p>
                   </a:txBody>
@@ -8114,7 +8114,7 @@
                           </a:solidFill>
                           <a:latin typeface="Kanit"/>
                         </a:rPr>
-                        <a:t>7/13</a:t>
+                        <a:t>2/2</a:t>
                       </a:r>
                     </a:p>
                   </a:txBody>
@@ -8162,7 +8162,7 @@
                           </a:solidFill>
                           <a:latin typeface="Kanit"/>
                         </a:rPr>
-                        <a:t>มุกดาหาร</a:t>
+                        <a:t>สกลนคร</a:t>
                       </a:r>
                     </a:p>
                   </a:txBody>
@@ -8185,7 +8185,7 @@
                           </a:solidFill>
                           <a:latin typeface="Kanit"/>
                         </a:rPr>
-                        <a:t>17</a:t>
+                        <a:t>35</a:t>
                       </a:r>
                     </a:p>
                   </a:txBody>
@@ -8208,7 +8208,7 @@
                           </a:solidFill>
                           <a:latin typeface="Kanit"/>
                         </a:rPr>
-                        <a:t>51</a:t>
+                        <a:t>5</a:t>
                       </a:r>
                     </a:p>
                   </a:txBody>
@@ -8227,11 +8227,11 @@
                       <a:r>
                         <a:rPr sz="900" b="1">
                           <a:solidFill>
-                            <a:srgbClr val="F5C242"/>
-                          </a:solidFill>
-                          <a:latin typeface="Kanit"/>
-                        </a:rPr>
-                        <a:t>5.9%</a:t>
+                            <a:srgbClr val="606060"/>
+                          </a:solidFill>
+                          <a:latin typeface="Kanit"/>
+                        </a:rPr>
+                        <a:t>0.0%</a:t>
                       </a:r>
                     </a:p>
                   </a:txBody>
@@ -8254,7 +8254,7 @@
                           </a:solidFill>
                           <a:latin typeface="Kanit"/>
                         </a:rPr>
-                        <a:t>2/2</a:t>
+                        <a:t>7/13</a:t>
                       </a:r>
                     </a:p>
                   </a:txBody>
@@ -8302,7 +8302,7 @@
                           </a:solidFill>
                           <a:latin typeface="Kanit"/>
                         </a:rPr>
-                        <a:t>เลย</a:t>
+                        <a:t>บึงกาฬ</a:t>
                       </a:r>
                     </a:p>
                   </a:txBody>
@@ -8325,7 +8325,7 @@
                           </a:solidFill>
                           <a:latin typeface="Kanit"/>
                         </a:rPr>
-                        <a:t>101</a:t>
+                        <a:t>10</a:t>
                       </a:r>
                     </a:p>
                   </a:txBody>
@@ -8348,7 +8348,7 @@
                           </a:solidFill>
                           <a:latin typeface="Kanit"/>
                         </a:rPr>
-                        <a:t>14</a:t>
+                        <a:t>110</a:t>
                       </a:r>
                     </a:p>
                   </a:txBody>
@@ -8367,11 +8367,11 @@
                       <a:r>
                         <a:rPr sz="900" b="1">
                           <a:solidFill>
-                            <a:srgbClr val="606060"/>
-                          </a:solidFill>
-                          <a:latin typeface="Kanit"/>
-                        </a:rPr>
-                        <a:t>0.0%</a:t>
+                            <a:srgbClr val="F5C242"/>
+                          </a:solidFill>
+                          <a:latin typeface="Kanit"/>
+                        </a:rPr>
+                        <a:t>30.0%</a:t>
                       </a:r>
                     </a:p>
                   </a:txBody>
@@ -8394,7 +8394,7 @@
                           </a:solidFill>
                           <a:latin typeface="Kanit"/>
                         </a:rPr>
-                        <a:t>1/8</a:t>
+                        <a:t>1/1</a:t>
                       </a:r>
                     </a:p>
                   </a:txBody>
@@ -8413,11 +8413,11 @@
                       <a:r>
                         <a:rPr sz="900" b="1">
                           <a:solidFill>
-                            <a:srgbClr val="CC0000"/>
-                          </a:solidFill>
-                          <a:latin typeface="Kanit"/>
-                        </a:rPr>
-                        <a:t>5</a:t>
+                            <a:srgbClr val="F5C242"/>
+                          </a:solidFill>
+                          <a:latin typeface="Kanit"/>
+                        </a:rPr>
+                        <a:t>4</a:t>
                       </a:r>
                     </a:p>
                   </a:txBody>
@@ -8442,7 +8442,7 @@
                           </a:solidFill>
                           <a:latin typeface="Kanit"/>
                         </a:rPr>
-                        <a:t>บึงกาฬ</a:t>
+                        <a:t>สตูล</a:t>
                       </a:r>
                     </a:p>
                   </a:txBody>
@@ -8465,7 +8465,7 @@
                           </a:solidFill>
                           <a:latin typeface="Kanit"/>
                         </a:rPr>
-                        <a:t>11</a:t>
+                        <a:t>33</a:t>
                       </a:r>
                     </a:p>
                   </a:txBody>
@@ -8488,7 +8488,7 @@
                           </a:solidFill>
                           <a:latin typeface="Kanit"/>
                         </a:rPr>
-                        <a:t>45</a:t>
+                        <a:t>70</a:t>
                       </a:r>
                     </a:p>
                   </a:txBody>
@@ -8511,7 +8511,7 @@
                           </a:solidFill>
                           <a:latin typeface="Kanit"/>
                         </a:rPr>
-                        <a:t>27.3%</a:t>
+                        <a:t>24.2%</a:t>
                       </a:r>
                     </a:p>
                   </a:txBody>
@@ -8534,7 +8534,7 @@
                           </a:solidFill>
                           <a:latin typeface="Kanit"/>
                         </a:rPr>
-                        <a:t>1/1</a:t>
+                        <a:t>1/8</a:t>
                       </a:r>
                     </a:p>
                   </a:txBody>
@@ -8582,7 +8582,7 @@
                           </a:solidFill>
                           <a:latin typeface="Kanit"/>
                         </a:rPr>
-                        <a:t>นครนายก</a:t>
+                        <a:t>ฉะเชิงเทรา</a:t>
                       </a:r>
                     </a:p>
                   </a:txBody>
@@ -8605,7 +8605,7 @@
                           </a:solidFill>
                           <a:latin typeface="Kanit"/>
                         </a:rPr>
-                        <a:t>26</a:t>
+                        <a:t>18</a:t>
                       </a:r>
                     </a:p>
                   </a:txBody>
@@ -8628,7 +8628,7 @@
                           </a:solidFill>
                           <a:latin typeface="Kanit"/>
                         </a:rPr>
-                        <a:t>96</a:t>
+                        <a:t>46</a:t>
                       </a:r>
                     </a:p>
                   </a:txBody>
@@ -8651,7 +8651,7 @@
                           </a:solidFill>
                           <a:latin typeface="Kanit"/>
                         </a:rPr>
-                        <a:t>23.1%</a:t>
+                        <a:t>11.1%</a:t>
                       </a:r>
                     </a:p>
                   </a:txBody>
@@ -8674,7 +8674,7 @@
                           </a:solidFill>
                           <a:latin typeface="Kanit"/>
                         </a:rPr>
-                        <a:t>2/6</a:t>
+                        <a:t>2/4</a:t>
                       </a:r>
                     </a:p>
                   </a:txBody>
@@ -8909,7 +8909,7 @@
                 </a:solidFill>
                 <a:latin typeface="Kanit"/>
               </a:rPr>
-              <a:t>Planted area MEASURED (OAE — 3,295 amphoe crop rows). Drought is a MODELLED SPEI index from rainfall and evapotranspiration, refreshed monthly, retrieved 2026-07-20 — the best national-coverage signal available, but nobody has walked those districts. Rain and river telemetry MEASURED (ThaiWater, live, pulled daily and accumulated — a missed pull leaves a gap rather than an invented point) · rain to 2026-08-15, river to 2026-08-15. Structural flood exposure MEASURED (GISTDA 1:50,000 repeated-flooding census, 2005-2016 — a 12-year ground record, not a forecast).</a:t>
+              <a:t>Planted area MEASURED (OAE — 3,295 amphoe crop rows). Drought is a MODELLED SPEI index from rainfall and evapotranspiration, refreshed monthly, retrieved 2026-07-20 — the best national-coverage signal available, but nobody has walked those districts. Rain and river telemetry MEASURED (ThaiWater, live, pulled daily and accumulated — a missed pull leaves a gap rather than an invented point) · rain to 2026-08-16, river to 2026-08-16. Structural flood exposure MEASURED (GISTDA 1:50,000 repeated-flooding census, 2005-2016 — a 12-year ground record, not a forecast).</a:t>
             </a:r>
           </a:p>
         </p:txBody>
@@ -32047,7 +32047,7 @@
                 </a:solidFill>
                 <a:latin typeface="Kanit"/>
               </a:rPr>
-              <a:t>Vintages — world prices 2026M06 · Thai farm gate 2026-08-13 · Thai price history 2026-08-02 · crop cost of production OAE Cai-up 2568 (crop year 2568/69, OAE forecast Mar 2569) · drought 2026-06-21 · CPI 2026-05 · GDP 2026-Q1 · IMF WEO 2026 · resale index 2026-05 · registrations to 2026-01 · household debt NSO SES 2566 · wages NSO LFS 2568 · telemetry 2026-08-15.</a:t>
+              <a:t>Vintages — world prices 2026M06 · Thai farm gate 2026-08-13 · Thai price history 2026-08-02 · crop cost of production OAE Cai-up 2568 (crop year 2568/69, OAE forecast Mar 2569) · drought 2026-06-21 · CPI 2026-05 · GDP 2026-Q1 · IMF WEO 2026 · resale index 2026-05 · registrations to 2026-01 · household debt NSO SES 2566 · wages NSO LFS 2568 · telemetry 2026-08-16.</a:t>
             </a:r>
           </a:p>
         </p:txBody>
@@ -33912,7 +33912,7 @@
                 </a:solidFill>
                 <a:latin typeface="Kanit"/>
               </a:rPr>
-              <a:t>33.01</a:t>
+              <a:t>33.12</a:t>
             </a:r>
           </a:p>
         </p:txBody>
@@ -33951,7 +33951,7 @@
                 </a:solidFill>
                 <a:latin typeface="Kanit"/>
               </a:rPr>
-              <a:t>ECB reference · 2026-08-10</a:t>
+              <a:t>ECB reference · 2026-08-14</a:t>
             </a:r>
           </a:p>
         </p:txBody>
@@ -35798,7 +35798,7 @@
                 </a:solidFill>
                 <a:latin typeface="Kanit"/>
               </a:rPr>
-              <a:t>NESDC 2026-Q1 · TPSO 2026-05 · Bank of Thailand 2026-06 · BIS 2025-Q4 · ECB 2026-08-10, each pulled from the publishing agency. IMF World Economic Outlook 2026 (pulled 2026-07-25) for the peer table. BoT published NPL ratio — 4.48% at 2026-Q1, 4.33% the quarter before, +0.24pp on the year, 3.08% low in 2021-Q1.</a:t>
+              <a:t>NESDC 2026-Q1 · TPSO 2026-05 · Bank of Thailand 2026-06 · BIS 2025-Q4 · ECB 2026-08-14, each pulled from the publishing agency. IMF World Economic Outlook 2026 (pulled 2026-07-25) for the peer table. BoT published NPL ratio — 4.48% at 2026-Q1, 4.33% the quarter before, +0.24pp on the year, 3.08% low in 2021-Q1.</a:t>
             </a:r>
           </a:p>
         </p:txBody>
@@ -37087,7 +37087,7 @@
                 </a:solidFill>
                 <a:latin typeface="Kanit"/>
               </a:rPr>
-              <a:t>338 of 928 districts · 133 of 795 rivers high</a:t>
+              <a:t>338 of 928 districts · 123 of 796 rivers high</a:t>
             </a:r>
           </a:p>
         </p:txBody>
@@ -37859,7 +37859,7 @@
                           </a:solidFill>
                           <a:latin typeface="Kanit"/>
                         </a:rPr>
-                        <a:t>33/157</a:t>
+                        <a:t>29/157</a:t>
                       </a:r>
                     </a:p>
                   </a:txBody>
@@ -38091,7 +38091,7 @@
                           </a:solidFill>
                           <a:latin typeface="Kanit"/>
                         </a:rPr>
-                        <a:t>24/274</a:t>
+                        <a:t>21/274</a:t>
                       </a:r>
                     </a:p>
                   </a:txBody>
@@ -38323,7 +38323,7 @@
                           </a:solidFill>
                           <a:latin typeface="Kanit"/>
                         </a:rPr>
-                        <a:t>29/168</a:t>
+                        <a:t>26/168</a:t>
                       </a:r>
                     </a:p>
                   </a:txBody>
@@ -38787,7 +38787,7 @@
                           </a:solidFill>
                           <a:latin typeface="Kanit"/>
                         </a:rPr>
-                        <a:t>41/144</a:t>
+                        <a:t>41/145</a:t>
                       </a:r>
                     </a:p>
                   </a:txBody>
@@ -43419,7 +43419,7 @@
                           </a:solidFill>
                           <a:latin typeface="Kanit"/>
                         </a:rPr>
-                        <a:t>94.42</a:t>
+                        <a:t>94.74</a:t>
                       </a:r>
                     </a:p>
                   </a:txBody>
@@ -43559,7 +43559,7 @@
                           </a:solidFill>
                           <a:latin typeface="Kanit"/>
                         </a:rPr>
-                        <a:t>16,308</a:t>
+                        <a:t>16,364</a:t>
                       </a:r>
                     </a:p>
                   </a:txBody>
@@ -43699,7 +43699,7 @@
                           </a:solidFill>
                           <a:latin typeface="Kanit"/>
                         </a:rPr>
-                        <a:t>36,479</a:t>
+                        <a:t>36,603</a:t>
                       </a:r>
                     </a:p>
                   </a:txBody>
@@ -43839,7 +43839,7 @@
                           </a:solidFill>
                           <a:latin typeface="Kanit"/>
                         </a:rPr>
-                        <a:t>10.56</a:t>
+                        <a:t>10.60</a:t>
                       </a:r>
                     </a:p>
                   </a:txBody>
@@ -44058,7 +44058,7 @@
                 </a:solidFill>
                 <a:latin typeface="Kanit"/>
               </a:rPr>
-              <a:t>World Bank Pink Sheet nominal-USD monthly prices, vintage 2026M06 (60 observations per series, rebased to 100 at 2021-07 for the chart — units differ, so raw levels can’t share an axis). Baht conversion at the ECB reference rate USD/THB 33.013, 2026-08-10. Planted-area share MEASURED, OAE/DOAE crop mix (crop_mix.json). Nominal, not deflated: five years of Thai CPI sit under every ‘vs 5 yrs ago’ figure.</a:t>
+              <a:t>World Bank Pink Sheet nominal-USD monthly prices, vintage 2026M06 (60 observations per series, rebased to 100 at 2021-07 for the chart — units differ, so raw levels can’t share an axis). Baht conversion at the ECB reference rate USD/THB 33.125, 2026-08-14. Planted-area share MEASURED, OAE/DOAE crop mix (crop_mix.json). Nominal, not deflated: five years of Thai CPI sit under every ‘vs 5 yrs ago’ figure.</a:t>
             </a:r>
           </a:p>
         </p:txBody>

--- a/docs/decks/mcom-2026-08-05-macro.pptx
+++ b/docs/decks/mcom-2026-08-05-macro.pptx
@@ -6240,7 +6240,7 @@
                 </a:solidFill>
                 <a:latin typeface="Kanit"/>
               </a:rPr>
-              <a:t>123</a:t>
+              <a:t>120</a:t>
             </a:r>
           </a:p>
         </p:txBody>
@@ -6279,7 +6279,7 @@
                 </a:solidFill>
                 <a:latin typeface="Kanit"/>
               </a:rPr>
-              <a:t>of 796 (15.5%) · live · 2026-08-16</a:t>
+              <a:t>of 797 (15.1%) · live · 2026-08-17</a:t>
             </a:r>
           </a:p>
         </p:txBody>
@@ -6405,7 +6405,7 @@
                 </a:solidFill>
                 <a:latin typeface="Kanit"/>
               </a:rPr>
-              <a:t>18</a:t>
+              <a:t>8</a:t>
             </a:r>
           </a:p>
         </p:txBody>
@@ -6444,7 +6444,7 @@
                 </a:solidFill>
                 <a:latin typeface="Kanit"/>
               </a:rPr>
-              <a:t>latest daily reading · 2026-08-16</a:t>
+              <a:t>latest daily reading · 2026-08-17</a:t>
             </a:r>
           </a:p>
         </p:txBody>
@@ -7905,7 +7905,7 @@
                           </a:solidFill>
                           <a:latin typeface="Kanit"/>
                         </a:rPr>
-                        <a:t>28</a:t>
+                        <a:t>26</a:t>
                       </a:r>
                     </a:p>
                   </a:txBody>
@@ -7928,7 +7928,7 @@
                           </a:solidFill>
                           <a:latin typeface="Kanit"/>
                         </a:rPr>
-                        <a:t>24</a:t>
+                        <a:t>15</a:t>
                       </a:r>
                     </a:p>
                   </a:txBody>
@@ -7974,7 +7974,7 @@
                           </a:solidFill>
                           <a:latin typeface="Kanit"/>
                         </a:rPr>
-                        <a:t>8/15</a:t>
+                        <a:t>6/14</a:t>
                       </a:r>
                     </a:p>
                   </a:txBody>
@@ -8045,7 +8045,7 @@
                           </a:solidFill>
                           <a:latin typeface="Kanit"/>
                         </a:rPr>
-                        <a:t>17</a:t>
+                        <a:t>15</a:t>
                       </a:r>
                     </a:p>
                   </a:txBody>
@@ -8068,7 +8068,7 @@
                           </a:solidFill>
                           <a:latin typeface="Kanit"/>
                         </a:rPr>
-                        <a:t>7</a:t>
+                        <a:t>0</a:t>
                       </a:r>
                     </a:p>
                   </a:txBody>
@@ -8208,7 +8208,7 @@
                           </a:solidFill>
                           <a:latin typeface="Kanit"/>
                         </a:rPr>
-                        <a:t>5</a:t>
+                        <a:t>4</a:t>
                       </a:r>
                     </a:p>
                   </a:txBody>
@@ -8302,7 +8302,7 @@
                           </a:solidFill>
                           <a:latin typeface="Kanit"/>
                         </a:rPr>
-                        <a:t>บึงกาฬ</a:t>
+                        <a:t>สตูล</a:t>
                       </a:r>
                     </a:p>
                   </a:txBody>
@@ -8325,7 +8325,7 @@
                           </a:solidFill>
                           <a:latin typeface="Kanit"/>
                         </a:rPr>
-                        <a:t>10</a:t>
+                        <a:t>30</a:t>
                       </a:r>
                     </a:p>
                   </a:txBody>
@@ -8348,7 +8348,7 @@
                           </a:solidFill>
                           <a:latin typeface="Kanit"/>
                         </a:rPr>
-                        <a:t>110</a:t>
+                        <a:t>50</a:t>
                       </a:r>
                     </a:p>
                   </a:txBody>
@@ -8371,7 +8371,7 @@
                           </a:solidFill>
                           <a:latin typeface="Kanit"/>
                         </a:rPr>
-                        <a:t>30.0%</a:t>
+                        <a:t>13.3%</a:t>
                       </a:r>
                     </a:p>
                   </a:txBody>
@@ -8394,7 +8394,7 @@
                           </a:solidFill>
                           <a:latin typeface="Kanit"/>
                         </a:rPr>
-                        <a:t>1/1</a:t>
+                        <a:t>1/8</a:t>
                       </a:r>
                     </a:p>
                   </a:txBody>
@@ -8442,7 +8442,7 @@
                           </a:solidFill>
                           <a:latin typeface="Kanit"/>
                         </a:rPr>
-                        <a:t>สตูล</a:t>
+                        <a:t>บึงกาฬ</a:t>
                       </a:r>
                     </a:p>
                   </a:txBody>
@@ -8465,7 +8465,7 @@
                           </a:solidFill>
                           <a:latin typeface="Kanit"/>
                         </a:rPr>
-                        <a:t>33</a:t>
+                        <a:t>10</a:t>
                       </a:r>
                     </a:p>
                   </a:txBody>
@@ -8488,7 +8488,7 @@
                           </a:solidFill>
                           <a:latin typeface="Kanit"/>
                         </a:rPr>
-                        <a:t>70</a:t>
+                        <a:t>35</a:t>
                       </a:r>
                     </a:p>
                   </a:txBody>
@@ -8511,7 +8511,7 @@
                           </a:solidFill>
                           <a:latin typeface="Kanit"/>
                         </a:rPr>
-                        <a:t>24.2%</a:t>
+                        <a:t>10.0%</a:t>
                       </a:r>
                     </a:p>
                   </a:txBody>
@@ -8534,7 +8534,7 @@
                           </a:solidFill>
                           <a:latin typeface="Kanit"/>
                         </a:rPr>
-                        <a:t>1/8</a:t>
+                        <a:t>1/1</a:t>
                       </a:r>
                     </a:p>
                   </a:txBody>
@@ -8582,7 +8582,7 @@
                           </a:solidFill>
                           <a:latin typeface="Kanit"/>
                         </a:rPr>
-                        <a:t>ฉะเชิงเทรา</a:t>
+                        <a:t>สงขลา</a:t>
                       </a:r>
                     </a:p>
                   </a:txBody>
@@ -8605,7 +8605,7 @@
                           </a:solidFill>
                           <a:latin typeface="Kanit"/>
                         </a:rPr>
-                        <a:t>18</a:t>
+                        <a:t>86</a:t>
                       </a:r>
                     </a:p>
                   </a:txBody>
@@ -8628,7 +8628,7 @@
                           </a:solidFill>
                           <a:latin typeface="Kanit"/>
                         </a:rPr>
-                        <a:t>46</a:t>
+                        <a:t>65</a:t>
                       </a:r>
                     </a:p>
                   </a:txBody>
@@ -8651,7 +8651,7 @@
                           </a:solidFill>
                           <a:latin typeface="Kanit"/>
                         </a:rPr>
-                        <a:t>11.1%</a:t>
+                        <a:t>5.8%</a:t>
                       </a:r>
                     </a:p>
                   </a:txBody>
@@ -8674,7 +8674,7 @@
                           </a:solidFill>
                           <a:latin typeface="Kanit"/>
                         </a:rPr>
-                        <a:t>2/4</a:t>
+                        <a:t>3/19</a:t>
                       </a:r>
                     </a:p>
                   </a:txBody>
@@ -8909,7 +8909,7 @@
                 </a:solidFill>
                 <a:latin typeface="Kanit"/>
               </a:rPr>
-              <a:t>Planted area MEASURED (OAE — 3,295 amphoe crop rows). Drought is a MODELLED SPEI index from rainfall and evapotranspiration, refreshed monthly, retrieved 2026-07-20 — the best national-coverage signal available, but nobody has walked those districts. Rain and river telemetry MEASURED (ThaiWater, live, pulled daily and accumulated — a missed pull leaves a gap rather than an invented point) · rain to 2026-08-16, river to 2026-08-16. Structural flood exposure MEASURED (GISTDA 1:50,000 repeated-flooding census, 2005-2016 — a 12-year ground record, not a forecast).</a:t>
+              <a:t>Planted area MEASURED (OAE — 3,295 amphoe crop rows). Drought is a MODELLED SPEI index from rainfall and evapotranspiration, refreshed monthly, retrieved 2026-07-20 — the best national-coverage signal available, but nobody has walked those districts. Rain and river telemetry MEASURED (ThaiWater, live, pulled daily and accumulated — a missed pull leaves a gap rather than an invented point) · rain to 2026-08-17, river to 2026-08-17. Structural flood exposure MEASURED (GISTDA 1:50,000 repeated-flooding census, 2005-2016 — a 12-year ground record, not a forecast).</a:t>
             </a:r>
           </a:p>
         </p:txBody>
@@ -32047,7 +32047,7 @@
                 </a:solidFill>
                 <a:latin typeface="Kanit"/>
               </a:rPr>
-              <a:t>Vintages — world prices 2026M06 · Thai farm gate 2026-08-13 · Thai price history 2026-08-02 · crop cost of production OAE Cai-up 2568 (crop year 2568/69, OAE forecast Mar 2569) · drought 2026-06-21 · CPI 2026-05 · GDP 2026-Q1 · IMF WEO 2026 · resale index 2026-05 · registrations to 2026-01 · household debt NSO SES 2566 · wages NSO LFS 2568 · telemetry 2026-08-16.</a:t>
+              <a:t>Vintages — world prices 2026M06 · Thai farm gate 2026-08-13 · Thai price history 2026-08-02 · crop cost of production OAE Cai-up 2568 (crop year 2568/69, OAE forecast Mar 2569) · drought 2026-06-21 · CPI 2026-05 · GDP 2026-Q1 · IMF WEO 2026 · resale index 2026-05 · registrations to 2026-01 · household debt NSO SES 2566 · wages NSO LFS 2568 · telemetry 2026-08-17.</a:t>
             </a:r>
           </a:p>
         </p:txBody>
@@ -37087,7 +37087,7 @@
                 </a:solidFill>
                 <a:latin typeface="Kanit"/>
               </a:rPr>
-              <a:t>338 of 928 districts · 123 of 796 rivers high</a:t>
+              <a:t>338 of 928 districts · 120 of 797 rivers high</a:t>
             </a:r>
           </a:p>
         </p:txBody>
@@ -37859,7 +37859,7 @@
                           </a:solidFill>
                           <a:latin typeface="Kanit"/>
                         </a:rPr>
-                        <a:t>29/157</a:t>
+                        <a:t>26/157</a:t>
                       </a:r>
                     </a:p>
                   </a:txBody>
@@ -38091,7 +38091,7 @@
                           </a:solidFill>
                           <a:latin typeface="Kanit"/>
                         </a:rPr>
-                        <a:t>21/274</a:t>
+                        <a:t>22/274</a:t>
                       </a:r>
                     </a:p>
                   </a:txBody>
@@ -38323,7 +38323,7 @@
                           </a:solidFill>
                           <a:latin typeface="Kanit"/>
                         </a:rPr>
-                        <a:t>26/168</a:t>
+                        <a:t>25/169</a:t>
                       </a:r>
                     </a:p>
                   </a:txBody>

--- a/docs/decks/mcom-2026-08-05-macro.pptx
+++ b/docs/decks/mcom-2026-08-05-macro.pptx
@@ -6240,7 +6240,7 @@
                 </a:solidFill>
                 <a:latin typeface="Kanit"/>
               </a:rPr>
-              <a:t>120</a:t>
+              <a:t>141</a:t>
             </a:r>
           </a:p>
         </p:txBody>
@@ -6279,7 +6279,7 @@
                 </a:solidFill>
                 <a:latin typeface="Kanit"/>
               </a:rPr>
-              <a:t>of 797 (15.1%) · live · 2026-08-17</a:t>
+              <a:t>of 796 (17.7%) · live · 2026-08-22</a:t>
             </a:r>
           </a:p>
         </p:txBody>
@@ -6405,7 +6405,7 @@
                 </a:solidFill>
                 <a:latin typeface="Kanit"/>
               </a:rPr>
-              <a:t>8</a:t>
+              <a:t>17</a:t>
             </a:r>
           </a:p>
         </p:txBody>
@@ -6444,7 +6444,7 @@
                 </a:solidFill>
                 <a:latin typeface="Kanit"/>
               </a:rPr>
-              <a:t>latest daily reading · 2026-08-17</a:t>
+              <a:t>latest daily reading · 2026-08-22</a:t>
             </a:r>
           </a:p>
         </p:txBody>
@@ -7882,7 +7882,7 @@
                           </a:solidFill>
                           <a:latin typeface="Kanit"/>
                         </a:rPr>
-                        <a:t>นครพนม</a:t>
+                        <a:t>น่าน</a:t>
                       </a:r>
                     </a:p>
                   </a:txBody>
@@ -7905,7 +7905,7 @@
                           </a:solidFill>
                           <a:latin typeface="Kanit"/>
                         </a:rPr>
-                        <a:t>26</a:t>
+                        <a:t>215</a:t>
                       </a:r>
                     </a:p>
                   </a:txBody>
@@ -7928,7 +7928,7 @@
                           </a:solidFill>
                           <a:latin typeface="Kanit"/>
                         </a:rPr>
-                        <a:t>15</a:t>
+                        <a:t>68</a:t>
                       </a:r>
                     </a:p>
                   </a:txBody>
@@ -7947,11 +7947,11 @@
                       <a:r>
                         <a:rPr sz="900" b="1">
                           <a:solidFill>
-                            <a:srgbClr val="606060"/>
-                          </a:solidFill>
-                          <a:latin typeface="Kanit"/>
-                        </a:rPr>
-                        <a:t>0.0%</a:t>
+                            <a:srgbClr val="F5C242"/>
+                          </a:solidFill>
+                          <a:latin typeface="Kanit"/>
+                        </a:rPr>
+                        <a:t>1.9%</a:t>
                       </a:r>
                     </a:p>
                   </a:txBody>
@@ -7974,7 +7974,7 @@
                           </a:solidFill>
                           <a:latin typeface="Kanit"/>
                         </a:rPr>
-                        <a:t>6/14</a:t>
+                        <a:t>4/28</a:t>
                       </a:r>
                     </a:p>
                   </a:txBody>
@@ -8022,7 +8022,7 @@
                           </a:solidFill>
                           <a:latin typeface="Kanit"/>
                         </a:rPr>
-                        <a:t>มุกดาหาร</a:t>
+                        <a:t>นครพนม</a:t>
                       </a:r>
                     </a:p>
                   </a:txBody>
@@ -8045,7 +8045,7 @@
                           </a:solidFill>
                           <a:latin typeface="Kanit"/>
                         </a:rPr>
-                        <a:t>15</a:t>
+                        <a:t>28</a:t>
                       </a:r>
                     </a:p>
                   </a:txBody>
@@ -8068,7 +8068,7 @@
                           </a:solidFill>
                           <a:latin typeface="Kanit"/>
                         </a:rPr>
-                        <a:t>0</a:t>
+                        <a:t>8</a:t>
                       </a:r>
                     </a:p>
                   </a:txBody>
@@ -8114,7 +8114,7 @@
                           </a:solidFill>
                           <a:latin typeface="Kanit"/>
                         </a:rPr>
-                        <a:t>2/2</a:t>
+                        <a:t>8/14</a:t>
                       </a:r>
                     </a:p>
                   </a:txBody>
@@ -8162,7 +8162,7 @@
                           </a:solidFill>
                           <a:latin typeface="Kanit"/>
                         </a:rPr>
-                        <a:t>สกลนคร</a:t>
+                        <a:t>มุกดาหาร</a:t>
                       </a:r>
                     </a:p>
                   </a:txBody>
@@ -8185,7 +8185,7 @@
                           </a:solidFill>
                           <a:latin typeface="Kanit"/>
                         </a:rPr>
-                        <a:t>35</a:t>
+                        <a:t>17</a:t>
                       </a:r>
                     </a:p>
                   </a:txBody>
@@ -8208,7 +8208,7 @@
                           </a:solidFill>
                           <a:latin typeface="Kanit"/>
                         </a:rPr>
-                        <a:t>4</a:t>
+                        <a:t>12</a:t>
                       </a:r>
                     </a:p>
                   </a:txBody>
@@ -8254,7 +8254,7 @@
                           </a:solidFill>
                           <a:latin typeface="Kanit"/>
                         </a:rPr>
-                        <a:t>7/13</a:t>
+                        <a:t>2/2</a:t>
                       </a:r>
                     </a:p>
                   </a:txBody>
@@ -8302,7 +8302,7 @@
                           </a:solidFill>
                           <a:latin typeface="Kanit"/>
                         </a:rPr>
-                        <a:t>สตูล</a:t>
+                        <a:t>สกลนคร</a:t>
                       </a:r>
                     </a:p>
                   </a:txBody>
@@ -8325,7 +8325,7 @@
                           </a:solidFill>
                           <a:latin typeface="Kanit"/>
                         </a:rPr>
-                        <a:t>30</a:t>
+                        <a:t>38</a:t>
                       </a:r>
                     </a:p>
                   </a:txBody>
@@ -8348,7 +8348,7 @@
                           </a:solidFill>
                           <a:latin typeface="Kanit"/>
                         </a:rPr>
-                        <a:t>50</a:t>
+                        <a:t>22</a:t>
                       </a:r>
                     </a:p>
                   </a:txBody>
@@ -8367,11 +8367,11 @@
                       <a:r>
                         <a:rPr sz="900" b="1">
                           <a:solidFill>
-                            <a:srgbClr val="F5C242"/>
-                          </a:solidFill>
-                          <a:latin typeface="Kanit"/>
-                        </a:rPr>
-                        <a:t>13.3%</a:t>
+                            <a:srgbClr val="606060"/>
+                          </a:solidFill>
+                          <a:latin typeface="Kanit"/>
+                        </a:rPr>
+                        <a:t>0.0%</a:t>
                       </a:r>
                     </a:p>
                   </a:txBody>
@@ -8394,7 +8394,7 @@
                           </a:solidFill>
                           <a:latin typeface="Kanit"/>
                         </a:rPr>
-                        <a:t>1/8</a:t>
+                        <a:t>7/13</a:t>
                       </a:r>
                     </a:p>
                   </a:txBody>
@@ -8413,11 +8413,11 @@
                       <a:r>
                         <a:rPr sz="900" b="1">
                           <a:solidFill>
-                            <a:srgbClr val="F5C242"/>
-                          </a:solidFill>
-                          <a:latin typeface="Kanit"/>
-                        </a:rPr>
-                        <a:t>4</a:t>
+                            <a:srgbClr val="CC0000"/>
+                          </a:solidFill>
+                          <a:latin typeface="Kanit"/>
+                        </a:rPr>
+                        <a:t>5</a:t>
                       </a:r>
                     </a:p>
                   </a:txBody>
@@ -8442,7 +8442,7 @@
                           </a:solidFill>
                           <a:latin typeface="Kanit"/>
                         </a:rPr>
-                        <a:t>บึงกาฬ</a:t>
+                        <a:t>เพชรบูรณ์</a:t>
                       </a:r>
                     </a:p>
                   </a:txBody>
@@ -8465,7 +8465,7 @@
                           </a:solidFill>
                           <a:latin typeface="Kanit"/>
                         </a:rPr>
-                        <a:t>10</a:t>
+                        <a:t>80</a:t>
                       </a:r>
                     </a:p>
                   </a:txBody>
@@ -8488,7 +8488,7 @@
                           </a:solidFill>
                           <a:latin typeface="Kanit"/>
                         </a:rPr>
-                        <a:t>35</a:t>
+                        <a:t>18</a:t>
                       </a:r>
                     </a:p>
                   </a:txBody>
@@ -8507,11 +8507,11 @@
                       <a:r>
                         <a:rPr sz="900" b="1">
                           <a:solidFill>
-                            <a:srgbClr val="F5C242"/>
-                          </a:solidFill>
-                          <a:latin typeface="Kanit"/>
-                        </a:rPr>
-                        <a:t>10.0%</a:t>
+                            <a:srgbClr val="606060"/>
+                          </a:solidFill>
+                          <a:latin typeface="Kanit"/>
+                        </a:rPr>
+                        <a:t>0.0%</a:t>
                       </a:r>
                     </a:p>
                   </a:txBody>
@@ -8534,7 +8534,7 @@
                           </a:solidFill>
                           <a:latin typeface="Kanit"/>
                         </a:rPr>
-                        <a:t>1/1</a:t>
+                        <a:t>4/9</a:t>
                       </a:r>
                     </a:p>
                   </a:txBody>
@@ -8553,11 +8553,11 @@
                       <a:r>
                         <a:rPr sz="900" b="1">
                           <a:solidFill>
-                            <a:srgbClr val="F5C242"/>
-                          </a:solidFill>
-                          <a:latin typeface="Kanit"/>
-                        </a:rPr>
-                        <a:t>4</a:t>
+                            <a:srgbClr val="CC0000"/>
+                          </a:solidFill>
+                          <a:latin typeface="Kanit"/>
+                        </a:rPr>
+                        <a:t>5</a:t>
                       </a:r>
                     </a:p>
                   </a:txBody>
@@ -8582,7 +8582,7 @@
                           </a:solidFill>
                           <a:latin typeface="Kanit"/>
                         </a:rPr>
-                        <a:t>สงขลา</a:t>
+                        <a:t>กาญจนบุรี</a:t>
                       </a:r>
                     </a:p>
                   </a:txBody>
@@ -8605,7 +8605,7 @@
                           </a:solidFill>
                           <a:latin typeface="Kanit"/>
                         </a:rPr>
-                        <a:t>86</a:t>
+                        <a:t>93</a:t>
                       </a:r>
                     </a:p>
                   </a:txBody>
@@ -8628,7 +8628,7 @@
                           </a:solidFill>
                           <a:latin typeface="Kanit"/>
                         </a:rPr>
-                        <a:t>65</a:t>
+                        <a:t>45</a:t>
                       </a:r>
                     </a:p>
                   </a:txBody>
@@ -8651,7 +8651,7 @@
                           </a:solidFill>
                           <a:latin typeface="Kanit"/>
                         </a:rPr>
-                        <a:t>5.8%</a:t>
+                        <a:t>6.5%</a:t>
                       </a:r>
                     </a:p>
                   </a:txBody>
@@ -8674,7 +8674,7 @@
                           </a:solidFill>
                           <a:latin typeface="Kanit"/>
                         </a:rPr>
-                        <a:t>3/19</a:t>
+                        <a:t>4/26</a:t>
                       </a:r>
                     </a:p>
                   </a:txBody>
@@ -8909,7 +8909,7 @@
                 </a:solidFill>
                 <a:latin typeface="Kanit"/>
               </a:rPr>
-              <a:t>Planted area MEASURED (OAE — 3,295 amphoe crop rows). Drought is a MODELLED SPEI index from rainfall and evapotranspiration, refreshed monthly, retrieved 2026-07-20 — the best national-coverage signal available, but nobody has walked those districts. Rain and river telemetry MEASURED (ThaiWater, live, pulled daily and accumulated — a missed pull leaves a gap rather than an invented point) · rain to 2026-08-17, river to 2026-08-17. Structural flood exposure MEASURED (GISTDA 1:50,000 repeated-flooding census, 2005-2016 — a 12-year ground record, not a forecast).</a:t>
+              <a:t>Planted area MEASURED (OAE — 3,295 amphoe crop rows). Drought is a MODELLED SPEI index from rainfall and evapotranspiration, refreshed monthly, retrieved 2026-07-20 — the best national-coverage signal available, but nobody has walked those districts. Rain and river telemetry MEASURED (ThaiWater, live, pulled daily and accumulated — a missed pull leaves a gap rather than an invented point) · rain to 2026-08-22, river to 2026-08-22. Structural flood exposure MEASURED (GISTDA 1:50,000 repeated-flooding census, 2005-2016 — a 12-year ground record, not a forecast).</a:t>
             </a:r>
           </a:p>
         </p:txBody>
@@ -31476,7 +31476,7 @@
                 </a:solidFill>
                 <a:latin typeface="Kanit"/>
               </a:rPr>
-              <a:t>Median crop income rose +16.9%, but four provinces fell — all on the coconut (มะพร้าว) belt, worst สมุทรสงคราม at −63.2%.</a:t>
+              <a:t>Median crop income rose +17.2%, but four provinces fell — all on the coconut (มะพร้าว) belt, worst สมุทรสงคราม at −62.8%.</a:t>
             </a:r>
           </a:p>
         </p:txBody>
@@ -32047,7 +32047,7 @@
                 </a:solidFill>
                 <a:latin typeface="Kanit"/>
               </a:rPr>
-              <a:t>Vintages — world prices 2026M06 · Thai farm gate 2026-08-13 · Thai price history 2026-08-02 · crop cost of production OAE Cai-up 2568 (crop year 2568/69, OAE forecast Mar 2569) · drought 2026-06-21 · CPI 2026-05 · GDP 2026-Q1 · IMF WEO 2026 · resale index 2026-05 · registrations to 2026-01 · household debt NSO SES 2566 · wages NSO LFS 2568 · telemetry 2026-08-17.</a:t>
+              <a:t>Vintages — world prices 2026M06 · Thai farm gate 2026-08-20 · Thai price history 2026-08-17 · crop cost of production OAE Cai-up 2568 (crop year 2568/69, OAE forecast Mar 2569) · drought 2026-06-21 · CPI 2026-05 · GDP 2026-Q1 · IMF WEO 2026 · resale index 2026-05 · registrations to 2026-01 · household debt NSO SES 2566 · wages NSO LFS 2568 · telemetry 2026-08-22.</a:t>
             </a:r>
           </a:p>
         </p:txBody>
@@ -32545,8 +32545,8 @@
               </a:rPr>
               <a:t>Not on the world index — the farm gate (ราคาที่เกษตรกรขายได้) says otherwise.
 • Five of seventeen Thai farm-gate prices are falling year on year.
-• Beef: farm gate −6.1% vs world index +11.8%.
-• Margin over price: a 26% price move becomes an 87% swing in crop income.</a:t>
+• Beef: farm gate −6.1% vs world index +8.8%.
+• Margin over price: a 26% price move becomes an 86% swing in crop income.</a:t>
             </a:r>
           </a:p>
         </p:txBody>
@@ -33912,7 +33912,7 @@
                 </a:solidFill>
                 <a:latin typeface="Kanit"/>
               </a:rPr>
-              <a:t>33.12</a:t>
+              <a:t>33.02</a:t>
             </a:r>
           </a:p>
         </p:txBody>
@@ -33951,7 +33951,7 @@
                 </a:solidFill>
                 <a:latin typeface="Kanit"/>
               </a:rPr>
-              <a:t>ECB reference · 2026-08-14</a:t>
+              <a:t>ECB reference · 2026-08-17</a:t>
             </a:r>
           </a:p>
         </p:txBody>
@@ -35798,7 +35798,7 @@
                 </a:solidFill>
                 <a:latin typeface="Kanit"/>
               </a:rPr>
-              <a:t>NESDC 2026-Q1 · TPSO 2026-05 · Bank of Thailand 2026-06 · BIS 2025-Q4 · ECB 2026-08-14, each pulled from the publishing agency. IMF World Economic Outlook 2026 (pulled 2026-07-25) for the peer table. BoT published NPL ratio — 4.48% at 2026-Q1, 4.33% the quarter before, +0.24pp on the year, 3.08% low in 2021-Q1.</a:t>
+              <a:t>NESDC 2026-Q1 · TPSO 2026-05 · Bank of Thailand 2026-06 · BIS 2025-Q4 · ECB 2026-08-17, each pulled from the publishing agency. IMF World Economic Outlook 2026 (pulled 2026-07-25) for the peer table. BoT published NPL ratio — 4.48% at 2026-Q1, 4.33% the quarter before, +0.24pp on the year, 3.08% low in 2021-Q1.</a:t>
             </a:r>
           </a:p>
         </p:txBody>
@@ -37087,7 +37087,7 @@
                 </a:solidFill>
                 <a:latin typeface="Kanit"/>
               </a:rPr>
-              <a:t>338 of 928 districts · 120 of 797 rivers high</a:t>
+              <a:t>338 of 928 districts · 141 of 796 rivers high</a:t>
             </a:r>
           </a:p>
         </p:txBody>
@@ -37859,7 +37859,7 @@
                           </a:solidFill>
                           <a:latin typeface="Kanit"/>
                         </a:rPr>
-                        <a:t>26/157</a:t>
+                        <a:t>33/155</a:t>
                       </a:r>
                     </a:p>
                   </a:txBody>
@@ -38091,7 +38091,7 @@
                           </a:solidFill>
                           <a:latin typeface="Kanit"/>
                         </a:rPr>
-                        <a:t>22/274</a:t>
+                        <a:t>36/275</a:t>
                       </a:r>
                     </a:p>
                   </a:txBody>
@@ -38323,7 +38323,7 @@
                           </a:solidFill>
                           <a:latin typeface="Kanit"/>
                         </a:rPr>
-                        <a:t>25/169</a:t>
+                        <a:t>26/168</a:t>
                       </a:r>
                     </a:p>
                   </a:txBody>
@@ -38555,7 +38555,7 @@
                           </a:solidFill>
                           <a:latin typeface="Kanit"/>
                         </a:rPr>
-                        <a:t>6/52</a:t>
+                        <a:t>7/52</a:t>
                       </a:r>
                     </a:p>
                   </a:txBody>
@@ -38787,7 +38787,7 @@
                           </a:solidFill>
                           <a:latin typeface="Kanit"/>
                         </a:rPr>
-                        <a:t>41/145</a:t>
+                        <a:t>39/146</a:t>
                       </a:r>
                     </a:p>
                   </a:txBody>
@@ -39936,7 +39936,7 @@
                           </a:solidFill>
                           <a:latin typeface="Kanit"/>
                         </a:rPr>
-                        <a:t>−67.6%</a:t>
+                        <a:t>−67.2%</a:t>
                       </a:r>
                     </a:p>
                   </a:txBody>
@@ -39959,7 +39959,7 @@
                           </a:solidFill>
                           <a:latin typeface="Kanit"/>
                         </a:rPr>
-                        <a:t>−58.7%</a:t>
+                        <a:t>−48.8%</a:t>
                       </a:r>
                     </a:p>
                   </a:txBody>
@@ -40122,7 +40122,7 @@
                           </a:solidFill>
                           <a:latin typeface="Kanit"/>
                         </a:rPr>
-                        <a:t>+47.7%</a:t>
+                        <a:t>+48.0%</a:t>
                       </a:r>
                     </a:p>
                   </a:txBody>
@@ -40791,7 +40791,7 @@
                 </a:solidFill>
                 <a:latin typeface="Kanit"/>
               </a:rPr>
-              <a:t>Prices MEASURED — NABC daily quotes for the Thai farm gate, OCSB announced cane price; newest quote 2026-08-13. The six-month move is computed from NABC's own monthly series (thai_price_history, vintage 2026-08-02); a crop with no monthly series is marked, never estimated. Belt is an ESTIMATED read of where each commodity is produced, and belts overlap. Farming accounts are OURS and MEASURED — accounts whose recorded occupation is เกษตร in the belt provinces, from the 382,735-account tape at 2026-07; no cell below 30 accounts is published. They live where the crop grows; they are not confirmed to grow it.</a:t>
+              <a:t>Prices MEASURED — NABC daily quotes for the Thai farm gate, OCSB announced cane price; newest quote 2026-08-20. The six-month move is computed from NABC's own monthly series (thai_price_history, vintage 2026-08-17); a crop with no monthly series is marked, never estimated. Belt is an ESTIMATED read of where each commodity is produced, and belts overlap. Farming accounts are OURS and MEASURED — accounts whose recorded occupation is เกษตร in the belt provinces, from the 382,735-account tape at 2026-07; no cell below 30 accounts is published. They live where the crop grows; they are not confirmed to grow it.</a:t>
             </a:r>
           </a:p>
         </p:txBody>
@@ -40957,7 +40957,7 @@
                 </a:solidFill>
                 <a:latin typeface="Kanit"/>
               </a:rPr>
-              <a:t>World beef +11.8%, Thai farm gate −6.1% — a 17.9-point gap, opposite directions. 31,240 of our farming customers live in the beef belt, Isan.</a:t>
+              <a:t>World beef +8.8%, Thai farm gate −6.1% — a 14.9-point gap, opposite directions. 31,240 of our farming customers live in the beef belt, Isan.</a:t>
             </a:r>
           </a:p>
         </p:txBody>
@@ -41888,8 +41888,8 @@
         </p:nvSpPr>
         <p:spPr>
           <a:xfrm>
-            <a:off x="795528" y="1995005"/>
-            <a:ext cx="6428232" cy="1131906"/>
+            <a:off x="795528" y="2030750"/>
+            <a:ext cx="6428232" cy="1114034"/>
           </a:xfrm>
           <a:custGeom>
             <a:avLst/>
@@ -41898,186 +41898,186 @@
             <a:cxnLst/>
             <a:rect l="l" t="t" r="r" b="b"/>
             <a:pathLst>
-              <a:path w="6428232" h="1131906">
+              <a:path w="6428232" h="1114034">
                 <a:moveTo>
-                  <a:pt x="0" y="783628"/>
+                  <a:pt x="0" y="747883"/>
                 </a:moveTo>
                 <a:lnTo>
-                  <a:pt x="108953" y="759881"/>
-                </a:lnTo>
-                <a:lnTo>
-                  <a:pt x="217906" y="846951"/>
-                </a:lnTo>
-                <a:lnTo>
-                  <a:pt x="326859" y="783628"/>
-                </a:lnTo>
-                <a:lnTo>
-                  <a:pt x="435812" y="736135"/>
-                </a:lnTo>
-                <a:lnTo>
-                  <a:pt x="544765" y="744050"/>
-                </a:lnTo>
-                <a:lnTo>
-                  <a:pt x="653718" y="704473"/>
-                </a:lnTo>
-                <a:lnTo>
-                  <a:pt x="762671" y="593657"/>
-                </a:lnTo>
-                <a:lnTo>
-                  <a:pt x="871624" y="585742"/>
-                </a:lnTo>
-                <a:lnTo>
-                  <a:pt x="980577" y="609488"/>
-                </a:lnTo>
-                <a:lnTo>
-                  <a:pt x="1089530" y="633234"/>
-                </a:lnTo>
-                <a:lnTo>
-                  <a:pt x="1198483" y="656981"/>
-                </a:lnTo>
-                <a:lnTo>
-                  <a:pt x="1307437" y="854866"/>
-                </a:lnTo>
-                <a:lnTo>
-                  <a:pt x="1416390" y="989429"/>
-                </a:lnTo>
-                <a:lnTo>
-                  <a:pt x="1525343" y="1092329"/>
-                </a:lnTo>
-                <a:lnTo>
-                  <a:pt x="1634296" y="1076498"/>
-                </a:lnTo>
-                <a:lnTo>
-                  <a:pt x="1743249" y="1131906"/>
-                </a:lnTo>
-                <a:lnTo>
-                  <a:pt x="1852202" y="1044837"/>
-                </a:lnTo>
-                <a:lnTo>
-                  <a:pt x="1961155" y="973598"/>
-                </a:lnTo>
-                <a:lnTo>
-                  <a:pt x="2070108" y="981513"/>
-                </a:lnTo>
-                <a:lnTo>
-                  <a:pt x="2179061" y="1013175"/>
-                </a:lnTo>
-                <a:lnTo>
-                  <a:pt x="2288014" y="1044837"/>
-                </a:lnTo>
-                <a:lnTo>
-                  <a:pt x="2396967" y="1029006"/>
-                </a:lnTo>
-                <a:lnTo>
-                  <a:pt x="2505920" y="1052752"/>
-                </a:lnTo>
-                <a:lnTo>
-                  <a:pt x="2614874" y="1084414"/>
-                </a:lnTo>
-                <a:lnTo>
-                  <a:pt x="2723827" y="1100245"/>
-                </a:lnTo>
-                <a:lnTo>
-                  <a:pt x="2832780" y="1036921"/>
-                </a:lnTo>
-                <a:lnTo>
-                  <a:pt x="2941733" y="989429"/>
-                </a:lnTo>
-                <a:lnTo>
-                  <a:pt x="3050686" y="941936"/>
-                </a:lnTo>
-                <a:lnTo>
-                  <a:pt x="3159639" y="949851"/>
-                </a:lnTo>
-                <a:lnTo>
-                  <a:pt x="3268592" y="839035"/>
-                </a:lnTo>
-                <a:lnTo>
-                  <a:pt x="3377545" y="664896"/>
-                </a:lnTo>
-                <a:lnTo>
-                  <a:pt x="3486498" y="372025"/>
-                </a:lnTo>
-                <a:lnTo>
-                  <a:pt x="3595451" y="459095"/>
-                </a:lnTo>
-                <a:lnTo>
-                  <a:pt x="3704404" y="561996"/>
-                </a:lnTo>
-                <a:lnTo>
-                  <a:pt x="3813357" y="474926"/>
-                </a:lnTo>
-                <a:lnTo>
-                  <a:pt x="3922311" y="633234"/>
-                </a:lnTo>
-                <a:lnTo>
-                  <a:pt x="4031264" y="372025"/>
-                </a:lnTo>
-                <a:lnTo>
-                  <a:pt x="4140217" y="166224"/>
-                </a:lnTo>
-                <a:lnTo>
-                  <a:pt x="4249170" y="182055"/>
-                </a:lnTo>
-                <a:lnTo>
-                  <a:pt x="4358123" y="451180"/>
-                </a:lnTo>
-                <a:lnTo>
-                  <a:pt x="4467076" y="379941"/>
-                </a:lnTo>
-                <a:lnTo>
-                  <a:pt x="4576029" y="387856"/>
-                </a:lnTo>
-                <a:lnTo>
-                  <a:pt x="4684982" y="356194"/>
-                </a:lnTo>
-                <a:lnTo>
-                  <a:pt x="4793935" y="395772"/>
-                </a:lnTo>
-                <a:lnTo>
-                  <a:pt x="4902888" y="577826"/>
-                </a:lnTo>
-                <a:lnTo>
-                  <a:pt x="5011841" y="530334"/>
-                </a:lnTo>
-                <a:lnTo>
-                  <a:pt x="5120794" y="554080"/>
-                </a:lnTo>
-                <a:lnTo>
-                  <a:pt x="5229748" y="498672"/>
-                </a:lnTo>
-                <a:lnTo>
-                  <a:pt x="5338701" y="561996"/>
-                </a:lnTo>
-                <a:lnTo>
-                  <a:pt x="5447654" y="593657"/>
-                </a:lnTo>
-                <a:lnTo>
-                  <a:pt x="5556607" y="680727"/>
-                </a:lnTo>
-                <a:lnTo>
-                  <a:pt x="5665560" y="656981"/>
-                </a:lnTo>
-                <a:lnTo>
-                  <a:pt x="5774513" y="633234"/>
-                </a:lnTo>
-                <a:lnTo>
-                  <a:pt x="5883466" y="569911"/>
-                </a:lnTo>
-                <a:lnTo>
-                  <a:pt x="5992419" y="474926"/>
-                </a:lnTo>
-                <a:lnTo>
-                  <a:pt x="6101372" y="372025"/>
-                </a:lnTo>
-                <a:lnTo>
-                  <a:pt x="6210325" y="277040"/>
-                </a:lnTo>
-                <a:lnTo>
-                  <a:pt x="6319278" y="134562"/>
-                </a:lnTo>
-                <a:lnTo>
-                  <a:pt x="6428232" y="0"/>
+                  <a:pt x="108953" y="833577"/>
+                </a:lnTo>
+                <a:lnTo>
+                  <a:pt x="217906" y="771254"/>
+                </a:lnTo>
+                <a:lnTo>
+                  <a:pt x="326859" y="724511"/>
+                </a:lnTo>
+                <a:lnTo>
+                  <a:pt x="435812" y="732302"/>
+                </a:lnTo>
+                <a:lnTo>
+                  <a:pt x="544765" y="693349"/>
+                </a:lnTo>
+                <a:lnTo>
+                  <a:pt x="653718" y="584283"/>
+                </a:lnTo>
+                <a:lnTo>
+                  <a:pt x="762671" y="576493"/>
+                </a:lnTo>
+                <a:lnTo>
+                  <a:pt x="871624" y="599864"/>
+                </a:lnTo>
+                <a:lnTo>
+                  <a:pt x="980577" y="623235"/>
+                </a:lnTo>
+                <a:lnTo>
+                  <a:pt x="1089530" y="646607"/>
+                </a:lnTo>
+                <a:lnTo>
+                  <a:pt x="1198483" y="841368"/>
+                </a:lnTo>
+                <a:lnTo>
+                  <a:pt x="1307437" y="973805"/>
+                </a:lnTo>
+                <a:lnTo>
+                  <a:pt x="1416390" y="1075081"/>
+                </a:lnTo>
+                <a:lnTo>
+                  <a:pt x="1525343" y="1059500"/>
+                </a:lnTo>
+                <a:lnTo>
+                  <a:pt x="1634296" y="1114034"/>
+                </a:lnTo>
+                <a:lnTo>
+                  <a:pt x="1743249" y="1028339"/>
+                </a:lnTo>
+                <a:lnTo>
+                  <a:pt x="1852202" y="958225"/>
+                </a:lnTo>
+                <a:lnTo>
+                  <a:pt x="1961155" y="966015"/>
+                </a:lnTo>
+                <a:lnTo>
+                  <a:pt x="2070108" y="997177"/>
+                </a:lnTo>
+                <a:lnTo>
+                  <a:pt x="2179061" y="1028339"/>
+                </a:lnTo>
+                <a:lnTo>
+                  <a:pt x="2288014" y="1012758"/>
+                </a:lnTo>
+                <a:lnTo>
+                  <a:pt x="2396967" y="1036129"/>
+                </a:lnTo>
+                <a:lnTo>
+                  <a:pt x="2505920" y="1067291"/>
+                </a:lnTo>
+                <a:lnTo>
+                  <a:pt x="2614874" y="1082872"/>
+                </a:lnTo>
+                <a:lnTo>
+                  <a:pt x="2723827" y="1020548"/>
+                </a:lnTo>
+                <a:lnTo>
+                  <a:pt x="2832780" y="973805"/>
+                </a:lnTo>
+                <a:lnTo>
+                  <a:pt x="2941733" y="927063"/>
+                </a:lnTo>
+                <a:lnTo>
+                  <a:pt x="3050686" y="934853"/>
+                </a:lnTo>
+                <a:lnTo>
+                  <a:pt x="3159639" y="825787"/>
+                </a:lnTo>
+                <a:lnTo>
+                  <a:pt x="3268592" y="654397"/>
+                </a:lnTo>
+                <a:lnTo>
+                  <a:pt x="3377545" y="366151"/>
+                </a:lnTo>
+                <a:lnTo>
+                  <a:pt x="3486498" y="451846"/>
+                </a:lnTo>
+                <a:lnTo>
+                  <a:pt x="3595451" y="553121"/>
+                </a:lnTo>
+                <a:lnTo>
+                  <a:pt x="3704404" y="467426"/>
+                </a:lnTo>
+                <a:lnTo>
+                  <a:pt x="3813357" y="623235"/>
+                </a:lnTo>
+                <a:lnTo>
+                  <a:pt x="3922311" y="366151"/>
+                </a:lnTo>
+                <a:lnTo>
+                  <a:pt x="4031264" y="163599"/>
+                </a:lnTo>
+                <a:lnTo>
+                  <a:pt x="4140217" y="179180"/>
+                </a:lnTo>
+                <a:lnTo>
+                  <a:pt x="4249170" y="444055"/>
+                </a:lnTo>
+                <a:lnTo>
+                  <a:pt x="4358123" y="373941"/>
+                </a:lnTo>
+                <a:lnTo>
+                  <a:pt x="4467076" y="381731"/>
+                </a:lnTo>
+                <a:lnTo>
+                  <a:pt x="4576029" y="350570"/>
+                </a:lnTo>
+                <a:lnTo>
+                  <a:pt x="4684982" y="389522"/>
+                </a:lnTo>
+                <a:lnTo>
+                  <a:pt x="4793935" y="568702"/>
+                </a:lnTo>
+                <a:lnTo>
+                  <a:pt x="4902888" y="521960"/>
+                </a:lnTo>
+                <a:lnTo>
+                  <a:pt x="5011841" y="545331"/>
+                </a:lnTo>
+                <a:lnTo>
+                  <a:pt x="5120794" y="490798"/>
+                </a:lnTo>
+                <a:lnTo>
+                  <a:pt x="5229748" y="553121"/>
+                </a:lnTo>
+                <a:lnTo>
+                  <a:pt x="5338701" y="584283"/>
+                </a:lnTo>
+                <a:lnTo>
+                  <a:pt x="5447654" y="669978"/>
+                </a:lnTo>
+                <a:lnTo>
+                  <a:pt x="5556607" y="646607"/>
+                </a:lnTo>
+                <a:lnTo>
+                  <a:pt x="5665560" y="623235"/>
+                </a:lnTo>
+                <a:lnTo>
+                  <a:pt x="5774513" y="560912"/>
+                </a:lnTo>
+                <a:lnTo>
+                  <a:pt x="5883466" y="467426"/>
+                </a:lnTo>
+                <a:lnTo>
+                  <a:pt x="5992419" y="366151"/>
+                </a:lnTo>
+                <a:lnTo>
+                  <a:pt x="6101372" y="272665"/>
+                </a:lnTo>
+                <a:lnTo>
+                  <a:pt x="6210325" y="132437"/>
+                </a:lnTo>
+                <a:lnTo>
+                  <a:pt x="6319278" y="0"/>
+                </a:lnTo>
+                <a:lnTo>
+                  <a:pt x="6428232" y="62323"/>
                 </a:lnTo>
               </a:path>
             </a:pathLst>
@@ -42120,8 +42120,8 @@
         </p:nvSpPr>
         <p:spPr>
           <a:xfrm>
-            <a:off x="795528" y="1899102"/>
-            <a:ext cx="6428232" cy="1086899"/>
+            <a:off x="795528" y="1834693"/>
+            <a:ext cx="6428232" cy="1116567"/>
           </a:xfrm>
           <a:custGeom>
             <a:avLst/>
@@ -42130,186 +42130,186 @@
             <a:cxnLst/>
             <a:rect l="l" t="t" r="r" b="b"/>
             <a:pathLst>
-              <a:path w="6428232" h="1086899">
+              <a:path w="6428232" h="1116567">
                 <a:moveTo>
-                  <a:pt x="0" y="879531"/>
+                  <a:pt x="0" y="943940"/>
                 </a:moveTo>
                 <a:lnTo>
-                  <a:pt x="108953" y="918859"/>
-                </a:lnTo>
-                <a:lnTo>
-                  <a:pt x="217906" y="929585"/>
-                </a:lnTo>
-                <a:lnTo>
-                  <a:pt x="326859" y="926010"/>
-                </a:lnTo>
-                <a:lnTo>
-                  <a:pt x="435812" y="929585"/>
-                </a:lnTo>
-                <a:lnTo>
-                  <a:pt x="544765" y="929585"/>
-                </a:lnTo>
-                <a:lnTo>
-                  <a:pt x="653718" y="833051"/>
-                </a:lnTo>
-                <a:lnTo>
-                  <a:pt x="762671" y="833051"/>
-                </a:lnTo>
-                <a:lnTo>
-                  <a:pt x="871624" y="850928"/>
-                </a:lnTo>
-                <a:lnTo>
-                  <a:pt x="980577" y="818750"/>
-                </a:lnTo>
-                <a:lnTo>
-                  <a:pt x="1089530" y="700764"/>
-                </a:lnTo>
-                <a:lnTo>
-                  <a:pt x="1198483" y="772271"/>
-                </a:lnTo>
-                <a:lnTo>
-                  <a:pt x="1307437" y="865229"/>
-                </a:lnTo>
-                <a:lnTo>
-                  <a:pt x="1416390" y="818750"/>
-                </a:lnTo>
-                <a:lnTo>
-                  <a:pt x="1525343" y="790147"/>
-                </a:lnTo>
-                <a:lnTo>
-                  <a:pt x="1634296" y="818750"/>
-                </a:lnTo>
-                <a:lnTo>
-                  <a:pt x="1743249" y="786572"/>
-                </a:lnTo>
-                <a:lnTo>
-                  <a:pt x="1852202" y="690038"/>
-                </a:lnTo>
-                <a:lnTo>
-                  <a:pt x="1961155" y="511272"/>
-                </a:lnTo>
-                <a:lnTo>
-                  <a:pt x="2070108" y="600655"/>
-                </a:lnTo>
-                <a:lnTo>
-                  <a:pt x="2179061" y="657860"/>
-                </a:lnTo>
-                <a:lnTo>
-                  <a:pt x="2288014" y="568477"/>
-                </a:lnTo>
-                <a:lnTo>
-                  <a:pt x="2396967" y="536299"/>
-                </a:lnTo>
-                <a:lnTo>
-                  <a:pt x="2505920" y="521998"/>
-                </a:lnTo>
-                <a:lnTo>
-                  <a:pt x="2614874" y="404012"/>
-                </a:lnTo>
-                <a:lnTo>
-                  <a:pt x="2723827" y="89383"/>
-                </a:lnTo>
-                <a:lnTo>
-                  <a:pt x="2832780" y="143013"/>
-                </a:lnTo>
-                <a:lnTo>
-                  <a:pt x="2941733" y="250273"/>
-                </a:lnTo>
-                <a:lnTo>
-                  <a:pt x="3050686" y="221670"/>
-                </a:lnTo>
-                <a:lnTo>
-                  <a:pt x="3159639" y="57206"/>
-                </a:lnTo>
-                <a:lnTo>
-                  <a:pt x="3268592" y="0"/>
-                </a:lnTo>
-                <a:lnTo>
-                  <a:pt x="3377545" y="128712"/>
-                </a:lnTo>
-                <a:lnTo>
-                  <a:pt x="3486498" y="168041"/>
-                </a:lnTo>
-                <a:lnTo>
-                  <a:pt x="3595451" y="243122"/>
-                </a:lnTo>
-                <a:lnTo>
-                  <a:pt x="3704404" y="114411"/>
-                </a:lnTo>
-                <a:lnTo>
-                  <a:pt x="3813357" y="100109"/>
-                </a:lnTo>
-                <a:lnTo>
-                  <a:pt x="3922311" y="250273"/>
-                </a:lnTo>
-                <a:lnTo>
-                  <a:pt x="4031264" y="253848"/>
-                </a:lnTo>
-                <a:lnTo>
-                  <a:pt x="4140217" y="286026"/>
-                </a:lnTo>
-                <a:lnTo>
-                  <a:pt x="4249170" y="518423"/>
-                </a:lnTo>
-                <a:lnTo>
-                  <a:pt x="4358123" y="532724"/>
-                </a:lnTo>
-                <a:lnTo>
-                  <a:pt x="4467076" y="475519"/>
-                </a:lnTo>
-                <a:lnTo>
-                  <a:pt x="4576029" y="650710"/>
-                </a:lnTo>
-                <a:lnTo>
-                  <a:pt x="4684982" y="797298"/>
-                </a:lnTo>
-                <a:lnTo>
-                  <a:pt x="4793935" y="840202"/>
-                </a:lnTo>
-                <a:lnTo>
-                  <a:pt x="4902888" y="875955"/>
-                </a:lnTo>
-                <a:lnTo>
-                  <a:pt x="5011841" y="818750"/>
-                </a:lnTo>
-                <a:lnTo>
-                  <a:pt x="5120794" y="861654"/>
-                </a:lnTo>
-                <a:lnTo>
-                  <a:pt x="5229748" y="958188"/>
-                </a:lnTo>
-                <a:lnTo>
-                  <a:pt x="5338701" y="1018968"/>
-                </a:lnTo>
-                <a:lnTo>
-                  <a:pt x="5447654" y="1022544"/>
-                </a:lnTo>
-                <a:lnTo>
-                  <a:pt x="5556607" y="1086899"/>
-                </a:lnTo>
-                <a:lnTo>
-                  <a:pt x="5665560" y="1043996"/>
-                </a:lnTo>
-                <a:lnTo>
-                  <a:pt x="5774513" y="843777"/>
-                </a:lnTo>
-                <a:lnTo>
-                  <a:pt x="5883466" y="900982"/>
-                </a:lnTo>
-                <a:lnTo>
-                  <a:pt x="5992419" y="897407"/>
-                </a:lnTo>
-                <a:lnTo>
-                  <a:pt x="6101372" y="997516"/>
-                </a:lnTo>
-                <a:lnTo>
-                  <a:pt x="6210325" y="918859"/>
-                </a:lnTo>
-                <a:lnTo>
-                  <a:pt x="6319278" y="786572"/>
-                </a:lnTo>
-                <a:lnTo>
-                  <a:pt x="6428232" y="593504"/>
+                  <a:pt x="108953" y="954958"/>
+                </a:lnTo>
+                <a:lnTo>
+                  <a:pt x="217906" y="951285"/>
+                </a:lnTo>
+                <a:lnTo>
+                  <a:pt x="326859" y="954958"/>
+                </a:lnTo>
+                <a:lnTo>
+                  <a:pt x="435812" y="954958"/>
+                </a:lnTo>
+                <a:lnTo>
+                  <a:pt x="544765" y="855790"/>
+                </a:lnTo>
+                <a:lnTo>
+                  <a:pt x="653718" y="855790"/>
+                </a:lnTo>
+                <a:lnTo>
+                  <a:pt x="762671" y="874154"/>
+                </a:lnTo>
+                <a:lnTo>
+                  <a:pt x="871624" y="841098"/>
+                </a:lnTo>
+                <a:lnTo>
+                  <a:pt x="980577" y="719892"/>
+                </a:lnTo>
+                <a:lnTo>
+                  <a:pt x="1089530" y="793350"/>
+                </a:lnTo>
+                <a:lnTo>
+                  <a:pt x="1198483" y="888846"/>
+                </a:lnTo>
+                <a:lnTo>
+                  <a:pt x="1307437" y="841098"/>
+                </a:lnTo>
+                <a:lnTo>
+                  <a:pt x="1416390" y="811715"/>
+                </a:lnTo>
+                <a:lnTo>
+                  <a:pt x="1525343" y="841098"/>
+                </a:lnTo>
+                <a:lnTo>
+                  <a:pt x="1634296" y="808042"/>
+                </a:lnTo>
+                <a:lnTo>
+                  <a:pt x="1743249" y="708873"/>
+                </a:lnTo>
+                <a:lnTo>
+                  <a:pt x="1852202" y="525227"/>
+                </a:lnTo>
+                <a:lnTo>
+                  <a:pt x="1961155" y="617050"/>
+                </a:lnTo>
+                <a:lnTo>
+                  <a:pt x="2070108" y="675817"/>
+                </a:lnTo>
+                <a:lnTo>
+                  <a:pt x="2179061" y="583994"/>
+                </a:lnTo>
+                <a:lnTo>
+                  <a:pt x="2288014" y="550938"/>
+                </a:lnTo>
+                <a:lnTo>
+                  <a:pt x="2396967" y="536246"/>
+                </a:lnTo>
+                <a:lnTo>
+                  <a:pt x="2505920" y="415040"/>
+                </a:lnTo>
+                <a:lnTo>
+                  <a:pt x="2614874" y="91823"/>
+                </a:lnTo>
+                <a:lnTo>
+                  <a:pt x="2723827" y="146917"/>
+                </a:lnTo>
+                <a:lnTo>
+                  <a:pt x="2832780" y="257104"/>
+                </a:lnTo>
+                <a:lnTo>
+                  <a:pt x="2941733" y="227721"/>
+                </a:lnTo>
+                <a:lnTo>
+                  <a:pt x="3050686" y="58767"/>
+                </a:lnTo>
+                <a:lnTo>
+                  <a:pt x="3159639" y="0"/>
+                </a:lnTo>
+                <a:lnTo>
+                  <a:pt x="3268592" y="132225"/>
+                </a:lnTo>
+                <a:lnTo>
+                  <a:pt x="3377545" y="172627"/>
+                </a:lnTo>
+                <a:lnTo>
+                  <a:pt x="3486498" y="249758"/>
+                </a:lnTo>
+                <a:lnTo>
+                  <a:pt x="3595451" y="117533"/>
+                </a:lnTo>
+                <a:lnTo>
+                  <a:pt x="3704404" y="102842"/>
+                </a:lnTo>
+                <a:lnTo>
+                  <a:pt x="3813357" y="257104"/>
+                </a:lnTo>
+                <a:lnTo>
+                  <a:pt x="3922311" y="260777"/>
+                </a:lnTo>
+                <a:lnTo>
+                  <a:pt x="4031264" y="293833"/>
+                </a:lnTo>
+                <a:lnTo>
+                  <a:pt x="4140217" y="532573"/>
+                </a:lnTo>
+                <a:lnTo>
+                  <a:pt x="4249170" y="547265"/>
+                </a:lnTo>
+                <a:lnTo>
+                  <a:pt x="4358123" y="488498"/>
+                </a:lnTo>
+                <a:lnTo>
+                  <a:pt x="4467076" y="668471"/>
+                </a:lnTo>
+                <a:lnTo>
+                  <a:pt x="4576029" y="819060"/>
+                </a:lnTo>
+                <a:lnTo>
+                  <a:pt x="4684982" y="863135"/>
+                </a:lnTo>
+                <a:lnTo>
+                  <a:pt x="4793935" y="899865"/>
+                </a:lnTo>
+                <a:lnTo>
+                  <a:pt x="4902888" y="841098"/>
+                </a:lnTo>
+                <a:lnTo>
+                  <a:pt x="5011841" y="885173"/>
+                </a:lnTo>
+                <a:lnTo>
+                  <a:pt x="5120794" y="984342"/>
+                </a:lnTo>
+                <a:lnTo>
+                  <a:pt x="5229748" y="1046781"/>
+                </a:lnTo>
+                <a:lnTo>
+                  <a:pt x="5338701" y="1050454"/>
+                </a:lnTo>
+                <a:lnTo>
+                  <a:pt x="5447654" y="1116567"/>
+                </a:lnTo>
+                <a:lnTo>
+                  <a:pt x="5556607" y="1072492"/>
+                </a:lnTo>
+                <a:lnTo>
+                  <a:pt x="5665560" y="866808"/>
+                </a:lnTo>
+                <a:lnTo>
+                  <a:pt x="5774513" y="925575"/>
+                </a:lnTo>
+                <a:lnTo>
+                  <a:pt x="5883466" y="921902"/>
+                </a:lnTo>
+                <a:lnTo>
+                  <a:pt x="5992419" y="1024744"/>
+                </a:lnTo>
+                <a:lnTo>
+                  <a:pt x="6101372" y="943940"/>
+                </a:lnTo>
+                <a:lnTo>
+                  <a:pt x="6210325" y="808042"/>
+                </a:lnTo>
+                <a:lnTo>
+                  <a:pt x="6319278" y="609704"/>
+                </a:lnTo>
+                <a:lnTo>
+                  <a:pt x="6428232" y="708873"/>
                 </a:lnTo>
               </a:path>
             </a:pathLst>
@@ -42352,8 +42352,8 @@
         </p:nvSpPr>
         <p:spPr>
           <a:xfrm>
-            <a:off x="795528" y="1784416"/>
-            <a:ext cx="6428232" cy="1354864"/>
+            <a:off x="795528" y="1955587"/>
+            <a:ext cx="6428232" cy="1261139"/>
           </a:xfrm>
           <a:custGeom>
             <a:avLst/>
@@ -42362,186 +42362,186 @@
             <a:cxnLst/>
             <a:rect l="l" t="t" r="r" b="b"/>
             <a:pathLst>
-              <a:path w="6428232" h="1354864">
+              <a:path w="6428232" h="1261139">
                 <a:moveTo>
-                  <a:pt x="0" y="994217"/>
+                  <a:pt x="0" y="823046"/>
                 </a:moveTo>
                 <a:lnTo>
-                  <a:pt x="108953" y="884212"/>
-                </a:lnTo>
-                <a:lnTo>
-                  <a:pt x="217906" y="829906"/>
-                </a:lnTo>
-                <a:lnTo>
-                  <a:pt x="326859" y="650279"/>
-                </a:lnTo>
-                <a:lnTo>
-                  <a:pt x="435812" y="607113"/>
-                </a:lnTo>
-                <a:lnTo>
-                  <a:pt x="544765" y="705977"/>
-                </a:lnTo>
-                <a:lnTo>
-                  <a:pt x="653718" y="601543"/>
-                </a:lnTo>
-                <a:lnTo>
-                  <a:pt x="762671" y="355077"/>
-                </a:lnTo>
-                <a:lnTo>
-                  <a:pt x="871624" y="0"/>
-                </a:lnTo>
-                <a:lnTo>
-                  <a:pt x="980577" y="130891"/>
-                </a:lnTo>
-                <a:lnTo>
-                  <a:pt x="1089530" y="83548"/>
-                </a:lnTo>
-                <a:lnTo>
-                  <a:pt x="1198483" y="384319"/>
-                </a:lnTo>
-                <a:lnTo>
-                  <a:pt x="1307437" y="1002571"/>
-                </a:lnTo>
-                <a:lnTo>
-                  <a:pt x="1416390" y="1045738"/>
-                </a:lnTo>
-                <a:lnTo>
-                  <a:pt x="1525343" y="1208655"/>
-                </a:lnTo>
-                <a:lnTo>
-                  <a:pt x="1634296" y="1236505"/>
-                </a:lnTo>
-                <a:lnTo>
-                  <a:pt x="1743249" y="1157134"/>
-                </a:lnTo>
-                <a:lnTo>
-                  <a:pt x="1852202" y="1165489"/>
-                </a:lnTo>
-                <a:lnTo>
-                  <a:pt x="1961155" y="1162704"/>
-                </a:lnTo>
-                <a:lnTo>
-                  <a:pt x="2070108" y="1151564"/>
-                </a:lnTo>
-                <a:lnTo>
-                  <a:pt x="2179061" y="1120930"/>
-                </a:lnTo>
-                <a:lnTo>
-                  <a:pt x="2288014" y="1074979"/>
-                </a:lnTo>
-                <a:lnTo>
-                  <a:pt x="2396967" y="1173844"/>
-                </a:lnTo>
-                <a:lnTo>
-                  <a:pt x="2505920" y="1336762"/>
-                </a:lnTo>
-                <a:lnTo>
-                  <a:pt x="2614874" y="1250429"/>
-                </a:lnTo>
-                <a:lnTo>
-                  <a:pt x="2723827" y="1275493"/>
-                </a:lnTo>
-                <a:lnTo>
-                  <a:pt x="2832780" y="1318660"/>
-                </a:lnTo>
-                <a:lnTo>
-                  <a:pt x="2941733" y="1354864"/>
-                </a:lnTo>
-                <a:lnTo>
-                  <a:pt x="3050686" y="1318660"/>
-                </a:lnTo>
-                <a:lnTo>
-                  <a:pt x="3159639" y="1340939"/>
-                </a:lnTo>
-                <a:lnTo>
-                  <a:pt x="3268592" y="1297773"/>
-                </a:lnTo>
-                <a:lnTo>
-                  <a:pt x="3377545" y="1281063"/>
-                </a:lnTo>
-                <a:lnTo>
-                  <a:pt x="3486498" y="1161312"/>
-                </a:lnTo>
-                <a:lnTo>
-                  <a:pt x="3595451" y="1171059"/>
-                </a:lnTo>
-                <a:lnTo>
-                  <a:pt x="3704404" y="1278278"/>
-                </a:lnTo>
-                <a:lnTo>
-                  <a:pt x="3813357" y="1257391"/>
-                </a:lnTo>
-                <a:lnTo>
-                  <a:pt x="3922311" y="1226757"/>
-                </a:lnTo>
-                <a:lnTo>
-                  <a:pt x="4031264" y="1175236"/>
-                </a:lnTo>
-                <a:lnTo>
-                  <a:pt x="4140217" y="1105613"/>
-                </a:lnTo>
-                <a:lnTo>
-                  <a:pt x="4249170" y="974722"/>
-                </a:lnTo>
-                <a:lnTo>
-                  <a:pt x="4358123" y="846616"/>
-                </a:lnTo>
-                <a:lnTo>
-                  <a:pt x="4467076" y="817374"/>
-                </a:lnTo>
-                <a:lnTo>
-                  <a:pt x="4576029" y="984469"/>
-                </a:lnTo>
-                <a:lnTo>
-                  <a:pt x="4684982" y="988647"/>
-                </a:lnTo>
-                <a:lnTo>
-                  <a:pt x="4793935" y="987254"/>
-                </a:lnTo>
-                <a:lnTo>
-                  <a:pt x="4902888" y="1090296"/>
-                </a:lnTo>
-                <a:lnTo>
-                  <a:pt x="5011841" y="1210048"/>
-                </a:lnTo>
-                <a:lnTo>
-                  <a:pt x="5120794" y="1172451"/>
-                </a:lnTo>
-                <a:lnTo>
-                  <a:pt x="5229748" y="1115361"/>
-                </a:lnTo>
-                <a:lnTo>
-                  <a:pt x="5338701" y="1045738"/>
-                </a:lnTo>
-                <a:lnTo>
-                  <a:pt x="5447654" y="1030420"/>
-                </a:lnTo>
-                <a:lnTo>
-                  <a:pt x="5556607" y="1029028"/>
-                </a:lnTo>
-                <a:lnTo>
-                  <a:pt x="5665560" y="1105613"/>
-                </a:lnTo>
-                <a:lnTo>
-                  <a:pt x="5774513" y="1109791"/>
-                </a:lnTo>
-                <a:lnTo>
-                  <a:pt x="5883466" y="1074979"/>
-                </a:lnTo>
-                <a:lnTo>
-                  <a:pt x="5992419" y="1027636"/>
-                </a:lnTo>
-                <a:lnTo>
-                  <a:pt x="6101372" y="930163"/>
-                </a:lnTo>
-                <a:lnTo>
-                  <a:pt x="6210325" y="878642"/>
-                </a:lnTo>
-                <a:lnTo>
-                  <a:pt x="6319278" y="892567"/>
-                </a:lnTo>
-                <a:lnTo>
-                  <a:pt x="6428232" y="935733"/>
+                  <a:pt x="108953" y="772496"/>
+                </a:lnTo>
+                <a:lnTo>
+                  <a:pt x="217906" y="605295"/>
+                </a:lnTo>
+                <a:lnTo>
+                  <a:pt x="326859" y="565115"/>
+                </a:lnTo>
+                <a:lnTo>
+                  <a:pt x="435812" y="657140"/>
+                </a:lnTo>
+                <a:lnTo>
+                  <a:pt x="544765" y="559930"/>
+                </a:lnTo>
+                <a:lnTo>
+                  <a:pt x="653718" y="330515"/>
+                </a:lnTo>
+                <a:lnTo>
+                  <a:pt x="762671" y="0"/>
+                </a:lnTo>
+                <a:lnTo>
+                  <a:pt x="871624" y="121837"/>
+                </a:lnTo>
+                <a:lnTo>
+                  <a:pt x="980577" y="77768"/>
+                </a:lnTo>
+                <a:lnTo>
+                  <a:pt x="1089530" y="357733"/>
+                </a:lnTo>
+                <a:lnTo>
+                  <a:pt x="1198483" y="933217"/>
+                </a:lnTo>
+                <a:lnTo>
+                  <a:pt x="1307437" y="973397"/>
+                </a:lnTo>
+                <a:lnTo>
+                  <a:pt x="1416390" y="1125045"/>
+                </a:lnTo>
+                <a:lnTo>
+                  <a:pt x="1525343" y="1150967"/>
+                </a:lnTo>
+                <a:lnTo>
+                  <a:pt x="1634296" y="1077088"/>
+                </a:lnTo>
+                <a:lnTo>
+                  <a:pt x="1743249" y="1084865"/>
+                </a:lnTo>
+                <a:lnTo>
+                  <a:pt x="1852202" y="1082272"/>
+                </a:lnTo>
+                <a:lnTo>
+                  <a:pt x="1961155" y="1071903"/>
+                </a:lnTo>
+                <a:lnTo>
+                  <a:pt x="2070108" y="1043388"/>
+                </a:lnTo>
+                <a:lnTo>
+                  <a:pt x="2179061" y="1000616"/>
+                </a:lnTo>
+                <a:lnTo>
+                  <a:pt x="2288014" y="1092641"/>
+                </a:lnTo>
+                <a:lnTo>
+                  <a:pt x="2396967" y="1244289"/>
+                </a:lnTo>
+                <a:lnTo>
+                  <a:pt x="2505920" y="1163929"/>
+                </a:lnTo>
+                <a:lnTo>
+                  <a:pt x="2614874" y="1187259"/>
+                </a:lnTo>
+                <a:lnTo>
+                  <a:pt x="2723827" y="1227439"/>
+                </a:lnTo>
+                <a:lnTo>
+                  <a:pt x="2832780" y="1261139"/>
+                </a:lnTo>
+                <a:lnTo>
+                  <a:pt x="2941733" y="1227439"/>
+                </a:lnTo>
+                <a:lnTo>
+                  <a:pt x="3050686" y="1248177"/>
+                </a:lnTo>
+                <a:lnTo>
+                  <a:pt x="3159639" y="1207997"/>
+                </a:lnTo>
+                <a:lnTo>
+                  <a:pt x="3268592" y="1192444"/>
+                </a:lnTo>
+                <a:lnTo>
+                  <a:pt x="3377545" y="1080976"/>
+                </a:lnTo>
+                <a:lnTo>
+                  <a:pt x="3486498" y="1090049"/>
+                </a:lnTo>
+                <a:lnTo>
+                  <a:pt x="3595451" y="1189851"/>
+                </a:lnTo>
+                <a:lnTo>
+                  <a:pt x="3704404" y="1170409"/>
+                </a:lnTo>
+                <a:lnTo>
+                  <a:pt x="3813357" y="1141894"/>
+                </a:lnTo>
+                <a:lnTo>
+                  <a:pt x="3922311" y="1093938"/>
+                </a:lnTo>
+                <a:lnTo>
+                  <a:pt x="4031264" y="1029131"/>
+                </a:lnTo>
+                <a:lnTo>
+                  <a:pt x="4140217" y="907294"/>
+                </a:lnTo>
+                <a:lnTo>
+                  <a:pt x="4249170" y="788050"/>
+                </a:lnTo>
+                <a:lnTo>
+                  <a:pt x="4358123" y="760831"/>
+                </a:lnTo>
+                <a:lnTo>
+                  <a:pt x="4467076" y="916367"/>
+                </a:lnTo>
+                <a:lnTo>
+                  <a:pt x="4576029" y="920256"/>
+                </a:lnTo>
+                <a:lnTo>
+                  <a:pt x="4684982" y="918959"/>
+                </a:lnTo>
+                <a:lnTo>
+                  <a:pt x="4793935" y="1014873"/>
+                </a:lnTo>
+                <a:lnTo>
+                  <a:pt x="4902888" y="1126341"/>
+                </a:lnTo>
+                <a:lnTo>
+                  <a:pt x="5011841" y="1091345"/>
+                </a:lnTo>
+                <a:lnTo>
+                  <a:pt x="5120794" y="1038204"/>
+                </a:lnTo>
+                <a:lnTo>
+                  <a:pt x="5229748" y="973397"/>
+                </a:lnTo>
+                <a:lnTo>
+                  <a:pt x="5338701" y="959140"/>
+                </a:lnTo>
+                <a:lnTo>
+                  <a:pt x="5447654" y="957843"/>
+                </a:lnTo>
+                <a:lnTo>
+                  <a:pt x="5556607" y="1029131"/>
+                </a:lnTo>
+                <a:lnTo>
+                  <a:pt x="5665560" y="1033019"/>
+                </a:lnTo>
+                <a:lnTo>
+                  <a:pt x="5774513" y="1000616"/>
+                </a:lnTo>
+                <a:lnTo>
+                  <a:pt x="5883466" y="956547"/>
+                </a:lnTo>
+                <a:lnTo>
+                  <a:pt x="5992419" y="865818"/>
+                </a:lnTo>
+                <a:lnTo>
+                  <a:pt x="6101372" y="817861"/>
+                </a:lnTo>
+                <a:lnTo>
+                  <a:pt x="6210325" y="830822"/>
+                </a:lnTo>
+                <a:lnTo>
+                  <a:pt x="6319278" y="872299"/>
+                </a:lnTo>
+                <a:lnTo>
+                  <a:pt x="6428232" y="876187"/>
                 </a:lnTo>
               </a:path>
             </a:pathLst>
@@ -42584,8 +42584,8 @@
         </p:nvSpPr>
         <p:spPr>
           <a:xfrm>
-            <a:off x="795528" y="2057517"/>
-            <a:ext cx="6428232" cy="1024743"/>
+            <a:off x="795528" y="2262289"/>
+            <a:ext cx="6428232" cy="929418"/>
           </a:xfrm>
           <a:custGeom>
             <a:avLst/>
@@ -42594,186 +42594,186 @@
             <a:cxnLst/>
             <a:rect l="l" t="t" r="r" b="b"/>
             <a:pathLst>
-              <a:path w="6428232" h="1024743">
+              <a:path w="6428232" h="929418">
                 <a:moveTo>
-                  <a:pt x="0" y="721116"/>
+                  <a:pt x="0" y="516344"/>
                 </a:moveTo>
                 <a:lnTo>
-                  <a:pt x="108953" y="569302"/>
-                </a:lnTo>
-                <a:lnTo>
-                  <a:pt x="217906" y="569302"/>
-                </a:lnTo>
-                <a:lnTo>
-                  <a:pt x="326859" y="607255"/>
-                </a:lnTo>
-                <a:lnTo>
-                  <a:pt x="435812" y="569302"/>
-                </a:lnTo>
-                <a:lnTo>
-                  <a:pt x="544765" y="607255"/>
-                </a:lnTo>
-                <a:lnTo>
-                  <a:pt x="653718" y="683162"/>
-                </a:lnTo>
-                <a:lnTo>
-                  <a:pt x="762671" y="721116"/>
-                </a:lnTo>
-                <a:lnTo>
-                  <a:pt x="871624" y="607255"/>
-                </a:lnTo>
-                <a:lnTo>
-                  <a:pt x="980577" y="569302"/>
-                </a:lnTo>
-                <a:lnTo>
-                  <a:pt x="1089530" y="569302"/>
-                </a:lnTo>
-                <a:lnTo>
-                  <a:pt x="1198483" y="607255"/>
-                </a:lnTo>
-                <a:lnTo>
-                  <a:pt x="1307437" y="683162"/>
-                </a:lnTo>
-                <a:lnTo>
-                  <a:pt x="1416390" y="721116"/>
-                </a:lnTo>
-                <a:lnTo>
-                  <a:pt x="1525343" y="721116"/>
-                </a:lnTo>
-                <a:lnTo>
-                  <a:pt x="1634296" y="721116"/>
-                </a:lnTo>
-                <a:lnTo>
-                  <a:pt x="1743249" y="645209"/>
-                </a:lnTo>
-                <a:lnTo>
-                  <a:pt x="1852202" y="607255"/>
-                </a:lnTo>
-                <a:lnTo>
-                  <a:pt x="1961155" y="607255"/>
-                </a:lnTo>
-                <a:lnTo>
-                  <a:pt x="2070108" y="493395"/>
-                </a:lnTo>
-                <a:lnTo>
-                  <a:pt x="2179061" y="493395"/>
-                </a:lnTo>
-                <a:lnTo>
-                  <a:pt x="2288014" y="189767"/>
-                </a:lnTo>
-                <a:lnTo>
-                  <a:pt x="2396967" y="75907"/>
-                </a:lnTo>
-                <a:lnTo>
-                  <a:pt x="2505920" y="151814"/>
-                </a:lnTo>
-                <a:lnTo>
-                  <a:pt x="2614874" y="227721"/>
-                </a:lnTo>
-                <a:lnTo>
-                  <a:pt x="2723827" y="189767"/>
-                </a:lnTo>
-                <a:lnTo>
-                  <a:pt x="2832780" y="0"/>
-                </a:lnTo>
-                <a:lnTo>
-                  <a:pt x="2941733" y="37953"/>
-                </a:lnTo>
-                <a:lnTo>
-                  <a:pt x="3050686" y="37953"/>
-                </a:lnTo>
-                <a:lnTo>
-                  <a:pt x="3159639" y="379534"/>
-                </a:lnTo>
-                <a:lnTo>
-                  <a:pt x="3268592" y="379534"/>
-                </a:lnTo>
-                <a:lnTo>
-                  <a:pt x="3377545" y="303627"/>
-                </a:lnTo>
-                <a:lnTo>
-                  <a:pt x="3486498" y="379534"/>
-                </a:lnTo>
-                <a:lnTo>
-                  <a:pt x="3595451" y="493395"/>
-                </a:lnTo>
-                <a:lnTo>
-                  <a:pt x="3704404" y="607255"/>
-                </a:lnTo>
-                <a:lnTo>
-                  <a:pt x="3813357" y="569302"/>
-                </a:lnTo>
-                <a:lnTo>
-                  <a:pt x="3922311" y="569302"/>
-                </a:lnTo>
-                <a:lnTo>
-                  <a:pt x="4031264" y="645209"/>
-                </a:lnTo>
-                <a:lnTo>
-                  <a:pt x="4140217" y="493395"/>
-                </a:lnTo>
-                <a:lnTo>
-                  <a:pt x="4249170" y="455441"/>
-                </a:lnTo>
-                <a:lnTo>
-                  <a:pt x="4358123" y="493395"/>
-                </a:lnTo>
-                <a:lnTo>
-                  <a:pt x="4467076" y="531348"/>
-                </a:lnTo>
-                <a:lnTo>
-                  <a:pt x="4576029" y="683162"/>
-                </a:lnTo>
-                <a:lnTo>
-                  <a:pt x="4684982" y="607255"/>
-                </a:lnTo>
-                <a:lnTo>
-                  <a:pt x="4793935" y="607255"/>
-                </a:lnTo>
-                <a:lnTo>
-                  <a:pt x="4902888" y="683162"/>
-                </a:lnTo>
-                <a:lnTo>
-                  <a:pt x="5011841" y="721116"/>
-                </a:lnTo>
-                <a:lnTo>
-                  <a:pt x="5120794" y="797022"/>
-                </a:lnTo>
-                <a:lnTo>
-                  <a:pt x="5229748" y="797022"/>
-                </a:lnTo>
-                <a:lnTo>
-                  <a:pt x="5338701" y="797022"/>
-                </a:lnTo>
-                <a:lnTo>
-                  <a:pt x="5447654" y="872929"/>
-                </a:lnTo>
-                <a:lnTo>
-                  <a:pt x="5556607" y="910883"/>
-                </a:lnTo>
-                <a:lnTo>
-                  <a:pt x="5665560" y="986790"/>
-                </a:lnTo>
-                <a:lnTo>
-                  <a:pt x="5774513" y="986790"/>
-                </a:lnTo>
-                <a:lnTo>
-                  <a:pt x="5883466" y="986790"/>
-                </a:lnTo>
-                <a:lnTo>
-                  <a:pt x="5992419" y="1024743"/>
-                </a:lnTo>
-                <a:lnTo>
-                  <a:pt x="6101372" y="948836"/>
-                </a:lnTo>
-                <a:lnTo>
-                  <a:pt x="6210325" y="986790"/>
-                </a:lnTo>
-                <a:lnTo>
-                  <a:pt x="6319278" y="910883"/>
-                </a:lnTo>
-                <a:lnTo>
-                  <a:pt x="6428232" y="986790"/>
+                  <a:pt x="108953" y="516344"/>
+                </a:lnTo>
+                <a:lnTo>
+                  <a:pt x="217906" y="550766"/>
+                </a:lnTo>
+                <a:lnTo>
+                  <a:pt x="326859" y="516344"/>
+                </a:lnTo>
+                <a:lnTo>
+                  <a:pt x="435812" y="550766"/>
+                </a:lnTo>
+                <a:lnTo>
+                  <a:pt x="544765" y="619612"/>
+                </a:lnTo>
+                <a:lnTo>
+                  <a:pt x="653718" y="654035"/>
+                </a:lnTo>
+                <a:lnTo>
+                  <a:pt x="762671" y="550766"/>
+                </a:lnTo>
+                <a:lnTo>
+                  <a:pt x="871624" y="516344"/>
+                </a:lnTo>
+                <a:lnTo>
+                  <a:pt x="980577" y="516344"/>
+                </a:lnTo>
+                <a:lnTo>
+                  <a:pt x="1089530" y="550766"/>
+                </a:lnTo>
+                <a:lnTo>
+                  <a:pt x="1198483" y="619612"/>
+                </a:lnTo>
+                <a:lnTo>
+                  <a:pt x="1307437" y="654035"/>
+                </a:lnTo>
+                <a:lnTo>
+                  <a:pt x="1416390" y="654035"/>
+                </a:lnTo>
+                <a:lnTo>
+                  <a:pt x="1525343" y="654035"/>
+                </a:lnTo>
+                <a:lnTo>
+                  <a:pt x="1634296" y="585189"/>
+                </a:lnTo>
+                <a:lnTo>
+                  <a:pt x="1743249" y="550766"/>
+                </a:lnTo>
+                <a:lnTo>
+                  <a:pt x="1852202" y="550766"/>
+                </a:lnTo>
+                <a:lnTo>
+                  <a:pt x="1961155" y="447498"/>
+                </a:lnTo>
+                <a:lnTo>
+                  <a:pt x="2070108" y="447498"/>
+                </a:lnTo>
+                <a:lnTo>
+                  <a:pt x="2179061" y="172114"/>
+                </a:lnTo>
+                <a:lnTo>
+                  <a:pt x="2288014" y="68846"/>
+                </a:lnTo>
+                <a:lnTo>
+                  <a:pt x="2396967" y="137692"/>
+                </a:lnTo>
+                <a:lnTo>
+                  <a:pt x="2505920" y="206537"/>
+                </a:lnTo>
+                <a:lnTo>
+                  <a:pt x="2614874" y="172114"/>
+                </a:lnTo>
+                <a:lnTo>
+                  <a:pt x="2723827" y="0"/>
+                </a:lnTo>
+                <a:lnTo>
+                  <a:pt x="2832780" y="34423"/>
+                </a:lnTo>
+                <a:lnTo>
+                  <a:pt x="2941733" y="34423"/>
+                </a:lnTo>
+                <a:lnTo>
+                  <a:pt x="3050686" y="344229"/>
+                </a:lnTo>
+                <a:lnTo>
+                  <a:pt x="3159639" y="344229"/>
+                </a:lnTo>
+                <a:lnTo>
+                  <a:pt x="3268592" y="275383"/>
+                </a:lnTo>
+                <a:lnTo>
+                  <a:pt x="3377545" y="344229"/>
+                </a:lnTo>
+                <a:lnTo>
+                  <a:pt x="3486498" y="447498"/>
+                </a:lnTo>
+                <a:lnTo>
+                  <a:pt x="3595451" y="550766"/>
+                </a:lnTo>
+                <a:lnTo>
+                  <a:pt x="3704404" y="516344"/>
+                </a:lnTo>
+                <a:lnTo>
+                  <a:pt x="3813357" y="516344"/>
+                </a:lnTo>
+                <a:lnTo>
+                  <a:pt x="3922311" y="585189"/>
+                </a:lnTo>
+                <a:lnTo>
+                  <a:pt x="4031264" y="447498"/>
+                </a:lnTo>
+                <a:lnTo>
+                  <a:pt x="4140217" y="413075"/>
+                </a:lnTo>
+                <a:lnTo>
+                  <a:pt x="4249170" y="447498"/>
+                </a:lnTo>
+                <a:lnTo>
+                  <a:pt x="4358123" y="481921"/>
+                </a:lnTo>
+                <a:lnTo>
+                  <a:pt x="4467076" y="619612"/>
+                </a:lnTo>
+                <a:lnTo>
+                  <a:pt x="4576029" y="550766"/>
+                </a:lnTo>
+                <a:lnTo>
+                  <a:pt x="4684982" y="550766"/>
+                </a:lnTo>
+                <a:lnTo>
+                  <a:pt x="4793935" y="619612"/>
+                </a:lnTo>
+                <a:lnTo>
+                  <a:pt x="4902888" y="654035"/>
+                </a:lnTo>
+                <a:lnTo>
+                  <a:pt x="5011841" y="722881"/>
+                </a:lnTo>
+                <a:lnTo>
+                  <a:pt x="5120794" y="722881"/>
+                </a:lnTo>
+                <a:lnTo>
+                  <a:pt x="5229748" y="722881"/>
+                </a:lnTo>
+                <a:lnTo>
+                  <a:pt x="5338701" y="791727"/>
+                </a:lnTo>
+                <a:lnTo>
+                  <a:pt x="5447654" y="826150"/>
+                </a:lnTo>
+                <a:lnTo>
+                  <a:pt x="5556607" y="894995"/>
+                </a:lnTo>
+                <a:lnTo>
+                  <a:pt x="5665560" y="894995"/>
+                </a:lnTo>
+                <a:lnTo>
+                  <a:pt x="5774513" y="894995"/>
+                </a:lnTo>
+                <a:lnTo>
+                  <a:pt x="5883466" y="929418"/>
+                </a:lnTo>
+                <a:lnTo>
+                  <a:pt x="5992419" y="860573"/>
+                </a:lnTo>
+                <a:lnTo>
+                  <a:pt x="6101372" y="894995"/>
+                </a:lnTo>
+                <a:lnTo>
+                  <a:pt x="6210325" y="826150"/>
+                </a:lnTo>
+                <a:lnTo>
+                  <a:pt x="6319278" y="894995"/>
+                </a:lnTo>
+                <a:lnTo>
+                  <a:pt x="6428232" y="826150"/>
                 </a:lnTo>
               </a:path>
             </a:pathLst>
@@ -42816,7 +42816,7 @@
         </p:nvSpPr>
         <p:spPr>
           <a:xfrm>
-            <a:off x="612647" y="3739896"/>
+            <a:off x="503694" y="3739896"/>
             <a:ext cx="365760" cy="125730"/>
           </a:xfrm>
           <a:prstGeom prst="rect">
@@ -42855,7 +42855,7 @@
         </p:nvSpPr>
         <p:spPr>
           <a:xfrm>
-            <a:off x="2573803" y="3739896"/>
+            <a:off x="2464850" y="3739896"/>
             <a:ext cx="365760" cy="125730"/>
           </a:xfrm>
           <a:prstGeom prst="rect">
@@ -42894,7 +42894,7 @@
         </p:nvSpPr>
         <p:spPr>
           <a:xfrm>
-            <a:off x="4534959" y="3739896"/>
+            <a:off x="4426005" y="3739896"/>
             <a:ext cx="365760" cy="125730"/>
           </a:xfrm>
           <a:prstGeom prst="rect">
@@ -42933,7 +42933,7 @@
         </p:nvSpPr>
         <p:spPr>
           <a:xfrm>
-            <a:off x="6496114" y="3739896"/>
+            <a:off x="6387161" y="3739896"/>
             <a:ext cx="365760" cy="125730"/>
           </a:xfrm>
           <a:prstGeom prst="rect">
@@ -43164,8 +43164,8 @@
                 </a:solidFill>
                 <a:latin typeface="Kanit"/>
               </a:rPr>
-              <a:t>• Sugar (น้ำตาล): world price −45% against its 2023-09 peak — down in 26 of the last 33 months, not a one-year dip.
-• Rubber (ยางพารา): spent 20 of the last 60 months below its own 2021 level — only just cleared it, after 29 months running above.</a:t>
+              <a:t>• Sugar (น้ำตาล): world price −41% against its 2023-09 peak — down in 26 of the last 34 months, not a one-year dip.
+• Rubber (ยางพารา): spent 21 of the last 60 months below its own 2021 level — only just cleared it, after 30 months running above.</a:t>
             </a:r>
           </a:p>
         </p:txBody>
@@ -43419,7 +43419,7 @@
                           </a:solidFill>
                           <a:latin typeface="Kanit"/>
                         </a:rPr>
-                        <a:t>94.74</a:t>
+                        <a:t>91.81</a:t>
                       </a:r>
                     </a:p>
                   </a:txBody>
@@ -43442,7 +43442,7 @@
                           </a:solidFill>
                           <a:latin typeface="Kanit"/>
                         </a:rPr>
-                        <a:t>+0.0%</a:t>
+                        <a:t>-2.8%</a:t>
                       </a:r>
                     </a:p>
                   </a:txBody>
@@ -43465,7 +43465,7 @@
                           </a:solidFill>
                           <a:latin typeface="Kanit"/>
                         </a:rPr>
-                        <a:t>+52.9%</a:t>
+                        <a:t>+46.3%</a:t>
                       </a:r>
                     </a:p>
                   </a:txBody>
@@ -43559,7 +43559,7 @@
                           </a:solidFill>
                           <a:latin typeface="Kanit"/>
                         </a:rPr>
-                        <a:t>16,364</a:t>
+                        <a:t>15,423</a:t>
                       </a:r>
                     </a:p>
                   </a:txBody>
@@ -43582,7 +43582,7 @@
                           </a:solidFill>
                           <a:latin typeface="Kanit"/>
                         </a:rPr>
-                        <a:t>-25.2%</a:t>
+                        <a:t>-29.2%</a:t>
                       </a:r>
                     </a:p>
                   </a:txBody>
@@ -43605,7 +43605,7 @@
                           </a:solidFill>
                           <a:latin typeface="Kanit"/>
                         </a:rPr>
-                        <a:t>+19.3%</a:t>
+                        <a:t>+15.9%</a:t>
                       </a:r>
                     </a:p>
                   </a:txBody>
@@ -43699,7 +43699,7 @@
                           </a:solidFill>
                           <a:latin typeface="Kanit"/>
                         </a:rPr>
-                        <a:t>36,603</a:t>
+                        <a:t>36,361</a:t>
                       </a:r>
                     </a:p>
                   </a:txBody>
@@ -43722,7 +43722,7 @@
                           </a:solidFill>
                           <a:latin typeface="Kanit"/>
                         </a:rPr>
-                        <a:t>-37.8%</a:t>
+                        <a:t>-38.0%</a:t>
                       </a:r>
                     </a:p>
                   </a:txBody>
@@ -43741,11 +43741,11 @@
                       <a:r>
                         <a:rPr sz="1000" b="1">
                           <a:solidFill>
-                            <a:srgbClr val="15795F"/>
-                          </a:solidFill>
-                          <a:latin typeface="Kanit"/>
-                        </a:rPr>
-                        <a:t>+4.0%</a:t>
+                            <a:srgbClr val="CC0000"/>
+                          </a:solidFill>
+                          <a:latin typeface="Kanit"/>
+                        </a:rPr>
+                        <a:t>-3.6%</a:t>
                       </a:r>
                     </a:p>
                   </a:txBody>
@@ -43839,7 +43839,7 @@
                           </a:solidFill>
                           <a:latin typeface="Kanit"/>
                         </a:rPr>
-                        <a:t>10.60</a:t>
+                        <a:t>11.23</a:t>
                       </a:r>
                     </a:p>
                   </a:txBody>
@@ -43862,7 +43862,7 @@
                           </a:solidFill>
                           <a:latin typeface="Kanit"/>
                         </a:rPr>
-                        <a:t>-44.8%</a:t>
+                        <a:t>-41.4%</a:t>
                       </a:r>
                     </a:p>
                   </a:txBody>
@@ -43885,7 +43885,7 @@
                           </a:solidFill>
                           <a:latin typeface="Kanit"/>
                         </a:rPr>
-                        <a:t>-17.9%</a:t>
+                        <a:t>-20.9%</a:t>
                       </a:r>
                     </a:p>
                   </a:txBody>
@@ -44058,7 +44058,7 @@
                 </a:solidFill>
                 <a:latin typeface="Kanit"/>
               </a:rPr>
-              <a:t>World Bank Pink Sheet nominal-USD monthly prices, vintage 2026M06 (60 observations per series, rebased to 100 at 2021-07 for the chart — units differ, so raw levels can’t share an axis). Baht conversion at the ECB reference rate USD/THB 33.125, 2026-08-14. Planted-area share MEASURED, OAE/DOAE crop mix (crop_mix.json). Nominal, not deflated: five years of Thai CPI sit under every ‘vs 5 yrs ago’ figure.</a:t>
+              <a:t>World Bank Pink Sheet nominal-USD monthly prices, vintage 2026M07 (60 observations per series, rebased to 100 at 2021-07 for the chart — units differ, so raw levels can’t share an axis). Baht conversion at the ECB reference rate USD/THB 33.025, 2026-08-17. Planted-area share MEASURED, OAE/DOAE crop mix (crop_mix.json). Nominal, not deflated: five years of Thai CPI sit under every ‘vs 5 yrs ago’ figure.</a:t>
             </a:r>
           </a:p>
         </p:txBody>
@@ -44679,7 +44679,7 @@
                 </a:solidFill>
                 <a:latin typeface="Kanit"/>
               </a:rPr>
-              <a:t>coconut −67.6%, pineapple −18.4%, sugarcane −17.9% year on year</a:t>
+              <a:t>coconut −67.2%, pineapple −18.4%, sugarcane −17.9% year on year</a:t>
             </a:r>
           </a:p>
         </p:txBody>
@@ -44805,7 +44805,7 @@
                 </a:solidFill>
                 <a:latin typeface="Kanit"/>
               </a:rPr>
-              <a:t>+16.9%</a:t>
+              <a:t>+17.2%</a:t>
             </a:r>
           </a:p>
         </p:txBody>
@@ -45279,7 +45279,7 @@
                           </a:solidFill>
                           <a:latin typeface="Kanit"/>
                         </a:rPr>
-                        <a:t>+6.7%</a:t>
+                        <a:t>+6.8%</a:t>
                       </a:r>
                     </a:p>
                   </a:txBody>
@@ -45348,7 +45348,7 @@
                           </a:solidFill>
                           <a:latin typeface="Kanit"/>
                         </a:rPr>
-                        <a:t>-63.2%</a:t>
+                        <a:t>-62.8%</a:t>
                       </a:r>
                     </a:p>
                   </a:txBody>
@@ -45419,7 +45419,7 @@
                           </a:solidFill>
                           <a:latin typeface="Kanit"/>
                         </a:rPr>
-                        <a:t>+15.6%</a:t>
+                        <a:t>+15.9%</a:t>
                       </a:r>
                     </a:p>
                   </a:txBody>
@@ -45488,7 +45488,7 @@
                           </a:solidFill>
                           <a:latin typeface="Kanit"/>
                         </a:rPr>
-                        <a:t>+10.0%</a:t>
+                        <a:t>+10.2%</a:t>
                       </a:r>
                     </a:p>
                   </a:txBody>
@@ -45559,7 +45559,7 @@
                           </a:solidFill>
                           <a:latin typeface="Kanit"/>
                         </a:rPr>
-                        <a:t>+16.8%</a:t>
+                        <a:t>+17.2%</a:t>
                       </a:r>
                     </a:p>
                   </a:txBody>
@@ -45628,7 +45628,7 @@
                           </a:solidFill>
                           <a:latin typeface="Kanit"/>
                         </a:rPr>
-                        <a:t>+8.7%</a:t>
+                        <a:t>+8.8%</a:t>
                       </a:r>
                     </a:p>
                   </a:txBody>
@@ -45699,7 +45699,7 @@
                           </a:solidFill>
                           <a:latin typeface="Kanit"/>
                         </a:rPr>
-                        <a:t>+26.0%</a:t>
+                        <a:t>+25.7%</a:t>
                       </a:r>
                     </a:p>
                   </a:txBody>
@@ -45768,7 +45768,7 @@
                           </a:solidFill>
                           <a:latin typeface="Kanit"/>
                         </a:rPr>
-                        <a:t>+10.8%</a:t>
+                        <a:t>+11.3%</a:t>
                       </a:r>
                     </a:p>
                   </a:txBody>
@@ -45839,7 +45839,7 @@
                           </a:solidFill>
                           <a:latin typeface="Kanit"/>
                         </a:rPr>
-                        <a:t>+36.7%</a:t>
+                        <a:t>+35.8%</a:t>
                       </a:r>
                     </a:p>
                   </a:txBody>
@@ -45908,7 +45908,7 @@
                           </a:solidFill>
                           <a:latin typeface="Kanit"/>
                         </a:rPr>
-                        <a:t>+28.8%</a:t>
+                        <a:t>+27.9%</a:t>
                       </a:r>
                     </a:p>
                   </a:txBody>
@@ -46084,8 +46084,8 @@
                 </a:solidFill>
                 <a:latin typeface="Kanit"/>
               </a:rPr>
-              <a:t>•  +42% rubber, +64% cassava, +25% palm, +14% rice at the farm gate. Crop income rose in every region.
-•  Four provinces fell — all coconut, all on the western gulf. Coconut price is down 68%.
+              <a:t>•  +41% rubber, +69% cassava, +24% palm, +14% rice at the farm gate. Crop income rose in every region.
+•  Four provinces fell — all coconut, all on the western gulf. Coconut price is down 67%.
 •  A gain on paper is not cash yet — the next table nets prices against cost.</a:t>
             </a:r>
           </a:p>
@@ -46387,7 +46387,7 @@
                           </a:solidFill>
                           <a:latin typeface="Kanit"/>
                         </a:rPr>
-                        <a:t>+16.9%</a:t>
+                        <a:t>+17.6%</a:t>
                       </a:r>
                     </a:p>
                   </a:txBody>
@@ -46550,7 +46550,7 @@
                           </a:solidFill>
                           <a:latin typeface="Kanit"/>
                         </a:rPr>
-                        <a:t>+21.3%</a:t>
+                        <a:t>+21.7%</a:t>
                       </a:r>
                     </a:p>
                   </a:txBody>
@@ -46713,7 +46713,7 @@
                           </a:solidFill>
                           <a:latin typeface="Kanit"/>
                         </a:rPr>
-                        <a:t>+11.2%</a:t>
+                        <a:t>+11.6%</a:t>
                       </a:r>
                     </a:p>
                   </a:txBody>
@@ -46876,7 +46876,7 @@
                           </a:solidFill>
                           <a:latin typeface="Kanit"/>
                         </a:rPr>
-                        <a:t>+34.5%</a:t>
+                        <a:t>+33.6%</a:t>
                       </a:r>
                     </a:p>
                   </a:txBody>
@@ -47039,7 +47039,7 @@
                           </a:solidFill>
                           <a:latin typeface="Kanit"/>
                         </a:rPr>
-                        <a:t>+16.9%</a:t>
+                        <a:t>+17.2%</a:t>
                       </a:r>
                     </a:p>
                   </a:txBody>
@@ -47202,7 +47202,7 @@
                           </a:solidFill>
                           <a:latin typeface="Kanit"/>
                         </a:rPr>
-                        <a:t>+15.6%</a:t>
+                        <a:t>+15.8%</a:t>
                       </a:r>
                     </a:p>
                   </a:txBody>
@@ -47829,7 +47829,7 @@
                 </a:solidFill>
                 <a:latin typeface="Kanit"/>
               </a:rPr>
-              <a:t>Year on year and six months disagree on direction for four of them. A single annual number can point the wrong way.</a:t>
+              <a:t>Year on year and six months disagree on direction for three of them. A single annual number can point the wrong way.</a:t>
             </a:r>
           </a:p>
         </p:txBody>
@@ -47985,7 +47985,7 @@
                 </a:solidFill>
                 <a:latin typeface="Kanit"/>
               </a:rPr>
-              <a:t>฿543.53 /ร้อยผล · S·E</a:t>
+              <a:t>฿620.00 /ร้อยผล · S·E</a:t>
             </a:r>
           </a:p>
         </p:txBody>
@@ -48024,7 +48024,7 @@
                 </a:solidFill>
                 <a:latin typeface="Kanit"/>
               </a:rPr>
-              <a:t>YoY −67.6%</a:t>
+              <a:t>YoY −67.2%</a:t>
             </a:r>
           </a:p>
         </p:txBody>
@@ -48063,7 +48063,7 @@
                 </a:solidFill>
                 <a:latin typeface="Kanit"/>
               </a:rPr>
-              <a:t>6m −58.7%</a:t>
+              <a:t>6m −48.8%</a:t>
             </a:r>
           </a:p>
         </p:txBody>
@@ -48137,19 +48137,19 @@
                   <a:pt x="0" y="0"/>
                 </a:moveTo>
                 <a:lnTo>
-                  <a:pt x="412943" y="149367"/>
-                </a:lnTo>
-                <a:lnTo>
-                  <a:pt x="825886" y="262297"/>
-                </a:lnTo>
-                <a:lnTo>
-                  <a:pt x="1238829" y="246096"/>
-                </a:lnTo>
-                <a:lnTo>
-                  <a:pt x="1651772" y="414999"/>
-                </a:lnTo>
-                <a:lnTo>
-                  <a:pt x="2064715" y="457200"/>
+                  <a:pt x="412943" y="170015"/>
+                </a:lnTo>
+                <a:lnTo>
+                  <a:pt x="825886" y="147424"/>
+                </a:lnTo>
+                <a:lnTo>
+                  <a:pt x="1238829" y="401963"/>
+                </a:lnTo>
+                <a:lnTo>
+                  <a:pt x="1651772" y="457200"/>
+                </a:lnTo>
+                <a:lnTo>
+                  <a:pt x="2064715" y="387883"/>
                 </a:lnTo>
               </a:path>
             </a:pathLst>
@@ -48192,7 +48192,7 @@
         </p:nvSpPr>
         <p:spPr>
           <a:xfrm>
-            <a:off x="2480767" y="2862072"/>
+            <a:off x="2480767" y="2792755"/>
             <a:ext cx="82296" cy="82296"/>
           </a:xfrm>
           <a:prstGeom prst="roundRect">
@@ -48303,7 +48303,7 @@
                 </a:solidFill>
                 <a:latin typeface="Kanit"/>
               </a:rPr>
-              <a:t>฿9.75 /กก. · E·W·N</a:t>
+              <a:t>฿9.77 /กก. · E·W·N</a:t>
             </a:r>
           </a:p>
         </p:txBody>
@@ -48381,7 +48381,7 @@
                 </a:solidFill>
                 <a:latin typeface="Kanit"/>
               </a:rPr>
-              <a:t>6m +47.7%</a:t>
+              <a:t>6m +48.0%</a:t>
             </a:r>
           </a:p>
         </p:txBody>
@@ -48452,19 +48452,19 @@
             <a:pathLst>
               <a:path w="2064715" h="457200">
                 <a:moveTo>
-                  <a:pt x="0" y="347240"/>
+                  <a:pt x="0" y="346494"/>
                 </a:moveTo>
                 <a:lnTo>
-                  <a:pt x="412943" y="400773"/>
+                  <a:pt x="412943" y="401128"/>
                 </a:lnTo>
                 <a:lnTo>
                   <a:pt x="825886" y="457200"/>
                 </a:lnTo>
                 <a:lnTo>
-                  <a:pt x="1238829" y="380517"/>
-                </a:lnTo>
-                <a:lnTo>
-                  <a:pt x="1651772" y="211237"/>
+                  <a:pt x="1238829" y="380999"/>
+                </a:lnTo>
+                <a:lnTo>
+                  <a:pt x="1651772" y="212784"/>
                 </a:lnTo>
                 <a:lnTo>
                   <a:pt x="2064715" y="0"/>
@@ -48557,6 +48557,324 @@
         <p:spPr>
           <a:xfrm>
             <a:off x="5016398" y="1970531"/>
+            <a:ext cx="2156155" cy="150876"/>
+          </a:xfrm>
+          <a:prstGeom prst="rect">
+            <a:avLst/>
+          </a:prstGeom>
+          <a:noFill/>
+        </p:spPr>
+        <p:txBody>
+          <a:bodyPr wrap="square" lIns="0" rIns="0" tIns="0" bIns="0" anchor="t">
+            <a:noAutofit/>
+          </a:bodyPr>
+          <a:lstStyle/>
+          <a:p>
+            <a:pPr algn="l">
+              <a:lnSpc>
+                <a:spcPts val="1188"/>
+              </a:lnSpc>
+            </a:pPr>
+            <a:r>
+              <a:rPr sz="900" b="1">
+                <a:solidFill>
+                  <a:srgbClr val="1E2F5C"/>
+                </a:solidFill>
+                <a:latin typeface="Kanit"/>
+              </a:rPr>
+              <a:t>White shrimp  กุ้งขาว</a:t>
+            </a:r>
+          </a:p>
+        </p:txBody>
+      </p:sp>
+      <p:sp>
+        <p:nvSpPr>
+          <p:cNvPr id="30" name="TextBox 29"/>
+          <p:cNvSpPr txBox="1"/>
+          <p:nvPr/>
+        </p:nvSpPr>
+        <p:spPr>
+          <a:xfrm>
+            <a:off x="5016398" y="2112263"/>
+            <a:ext cx="2156155" cy="125730"/>
+          </a:xfrm>
+          <a:prstGeom prst="rect">
+            <a:avLst/>
+          </a:prstGeom>
+          <a:noFill/>
+        </p:spPr>
+        <p:txBody>
+          <a:bodyPr wrap="square" lIns="0" rIns="0" tIns="0" bIns="0" anchor="t">
+            <a:noAutofit/>
+          </a:bodyPr>
+          <a:lstStyle/>
+          <a:p>
+            <a:pPr algn="l">
+              <a:lnSpc>
+                <a:spcPts val="990"/>
+              </a:lnSpc>
+            </a:pPr>
+            <a:r>
+              <a:rPr sz="750" b="0">
+                <a:solidFill>
+                  <a:srgbClr val="606060"/>
+                </a:solidFill>
+                <a:latin typeface="Kanit"/>
+              </a:rPr>
+              <a:t>฿143.33 /กก. · S·E coast</a:t>
+            </a:r>
+          </a:p>
+        </p:txBody>
+      </p:sp>
+      <p:sp>
+        <p:nvSpPr>
+          <p:cNvPr id="31" name="TextBox 30"/>
+          <p:cNvSpPr txBox="1"/>
+          <p:nvPr/>
+        </p:nvSpPr>
+        <p:spPr>
+          <a:xfrm>
+            <a:off x="5016398" y="2244851"/>
+            <a:ext cx="1078077" cy="134112"/>
+          </a:xfrm>
+          <a:prstGeom prst="rect">
+            <a:avLst/>
+          </a:prstGeom>
+          <a:noFill/>
+        </p:spPr>
+        <p:txBody>
+          <a:bodyPr wrap="square" lIns="0" rIns="0" tIns="0" bIns="0" anchor="t">
+            <a:noAutofit/>
+          </a:bodyPr>
+          <a:lstStyle/>
+          <a:p>
+            <a:pPr algn="l">
+              <a:lnSpc>
+                <a:spcPts val="1056"/>
+              </a:lnSpc>
+            </a:pPr>
+            <a:r>
+              <a:rPr sz="800" b="1">
+                <a:solidFill>
+                  <a:srgbClr val="15795F"/>
+                </a:solidFill>
+                <a:latin typeface="Kanit"/>
+              </a:rPr>
+              <a:t>YoY +1.6%</a:t>
+            </a:r>
+          </a:p>
+        </p:txBody>
+      </p:sp>
+      <p:sp>
+        <p:nvSpPr>
+          <p:cNvPr id="32" name="TextBox 31"/>
+          <p:cNvSpPr txBox="1"/>
+          <p:nvPr/>
+        </p:nvSpPr>
+        <p:spPr>
+          <a:xfrm>
+            <a:off x="6094475" y="2244851"/>
+            <a:ext cx="1078077" cy="134112"/>
+          </a:xfrm>
+          <a:prstGeom prst="rect">
+            <a:avLst/>
+          </a:prstGeom>
+          <a:noFill/>
+        </p:spPr>
+        <p:txBody>
+          <a:bodyPr wrap="square" lIns="0" rIns="0" tIns="0" bIns="0" anchor="t">
+            <a:noAutofit/>
+          </a:bodyPr>
+          <a:lstStyle/>
+          <a:p>
+            <a:pPr algn="l">
+              <a:lnSpc>
+                <a:spcPts val="1056"/>
+              </a:lnSpc>
+            </a:pPr>
+            <a:r>
+              <a:rPr sz="800" b="1">
+                <a:solidFill>
+                  <a:srgbClr val="CC0000"/>
+                </a:solidFill>
+                <a:latin typeface="Kanit"/>
+              </a:rPr>
+              <a:t>6m −1.9%</a:t>
+            </a:r>
+          </a:p>
+        </p:txBody>
+      </p:sp>
+      <p:sp>
+        <p:nvSpPr>
+          <p:cNvPr id="33" name="Rectangle 32"/>
+          <p:cNvSpPr/>
+          <p:nvPr/>
+        </p:nvSpPr>
+        <p:spPr>
+          <a:xfrm>
+            <a:off x="5016398" y="2400300"/>
+            <a:ext cx="2156155" cy="548640"/>
+          </a:xfrm>
+          <a:prstGeom prst="rect">
+            <a:avLst/>
+          </a:prstGeom>
+          <a:solidFill>
+            <a:srgbClr val="FBFCFE"/>
+          </a:solidFill>
+          <a:ln w="9525">
+            <a:solidFill>
+              <a:srgbClr val="D9DEE9"/>
+            </a:solidFill>
+          </a:ln>
+          <a:effectLst/>
+        </p:spPr>
+        <p:style>
+          <a:lnRef idx="1">
+            <a:schemeClr val="accent1"/>
+          </a:lnRef>
+          <a:fillRef idx="3">
+            <a:schemeClr val="accent1"/>
+          </a:fillRef>
+          <a:effectRef idx="2">
+            <a:schemeClr val="accent1"/>
+          </a:effectRef>
+          <a:fontRef idx="minor">
+            <a:schemeClr val="lt1"/>
+          </a:fontRef>
+        </p:style>
+        <p:txBody>
+          <a:bodyPr rtlCol="0" anchor="ctr" wrap="none"/>
+          <a:lstStyle/>
+          <a:p>
+            <a:pPr algn="ctr"/>
+          </a:p>
+        </p:txBody>
+      </p:sp>
+      <p:sp>
+        <p:nvSpPr>
+          <p:cNvPr id="34" name="Freeform 33"/>
+          <p:cNvSpPr/>
+          <p:nvPr/>
+        </p:nvSpPr>
+        <p:spPr>
+          <a:xfrm>
+            <a:off x="5062118" y="2446020"/>
+            <a:ext cx="2064715" cy="457200"/>
+          </a:xfrm>
+          <a:custGeom>
+            <a:avLst/>
+            <a:gdLst/>
+            <a:ahLst/>
+            <a:cxnLst/>
+            <a:rect l="l" t="t" r="r" b="b"/>
+            <a:pathLst>
+              <a:path w="2064715" h="457200">
+                <a:moveTo>
+                  <a:pt x="0" y="222838"/>
+                </a:moveTo>
+                <a:lnTo>
+                  <a:pt x="412943" y="418928"/>
+                </a:lnTo>
+                <a:lnTo>
+                  <a:pt x="825886" y="457200"/>
+                </a:lnTo>
+                <a:lnTo>
+                  <a:pt x="1238829" y="423249"/>
+                </a:lnTo>
+                <a:lnTo>
+                  <a:pt x="1651772" y="173867"/>
+                </a:lnTo>
+                <a:lnTo>
+                  <a:pt x="2064715" y="0"/>
+                </a:lnTo>
+              </a:path>
+            </a:pathLst>
+          </a:custGeom>
+          <a:noFill/>
+          <a:ln w="20320">
+            <a:solidFill>
+              <a:srgbClr val="CC0000"/>
+            </a:solidFill>
+          </a:ln>
+          <a:effectLst/>
+        </p:spPr>
+        <p:style>
+          <a:lnRef idx="1">
+            <a:schemeClr val="accent1"/>
+          </a:lnRef>
+          <a:fillRef idx="3">
+            <a:schemeClr val="accent1"/>
+          </a:fillRef>
+          <a:effectRef idx="2">
+            <a:schemeClr val="accent1"/>
+          </a:effectRef>
+          <a:fontRef idx="minor">
+            <a:schemeClr val="lt1"/>
+          </a:fontRef>
+        </p:style>
+        <p:txBody>
+          <a:bodyPr rtlCol="0" anchor="ctr"/>
+          <a:lstStyle/>
+          <a:p>
+            <a:pPr algn="ctr"/>
+          </a:p>
+        </p:txBody>
+      </p:sp>
+      <p:sp>
+        <p:nvSpPr>
+          <p:cNvPr id="35" name="Rounded Rectangle 34"/>
+          <p:cNvSpPr/>
+          <p:nvPr/>
+        </p:nvSpPr>
+        <p:spPr>
+          <a:xfrm>
+            <a:off x="7085685" y="2404872"/>
+            <a:ext cx="82296" cy="82296"/>
+          </a:xfrm>
+          <a:prstGeom prst="roundRect">
+            <a:avLst>
+              <a:gd name="adj" fmla="val 50000"/>
+            </a:avLst>
+          </a:prstGeom>
+          <a:solidFill>
+            <a:srgbClr val="CC0000"/>
+          </a:solidFill>
+          <a:ln>
+            <a:noFill/>
+          </a:ln>
+          <a:effectLst/>
+        </p:spPr>
+        <p:style>
+          <a:lnRef idx="1">
+            <a:schemeClr val="accent1"/>
+          </a:lnRef>
+          <a:fillRef idx="3">
+            <a:schemeClr val="accent1"/>
+          </a:fillRef>
+          <a:effectRef idx="2">
+            <a:schemeClr val="accent1"/>
+          </a:effectRef>
+          <a:fontRef idx="minor">
+            <a:schemeClr val="lt1"/>
+          </a:fontRef>
+        </p:style>
+        <p:txBody>
+          <a:bodyPr rtlCol="0" anchor="ctr" wrap="none"/>
+          <a:lstStyle/>
+          <a:p>
+            <a:pPr algn="ctr"/>
+          </a:p>
+        </p:txBody>
+      </p:sp>
+      <p:sp>
+        <p:nvSpPr>
+          <p:cNvPr id="36" name="TextBox 35"/>
+          <p:cNvSpPr txBox="1"/>
+          <p:nvPr/>
+        </p:nvSpPr>
+        <p:spPr>
+          <a:xfrm>
+            <a:off x="7318857" y="1970531"/>
             <a:ext cx="2156155" cy="150876"/>
           </a:xfrm>
           <a:prstGeom prst="rect">
@@ -48589,13 +48907,13 @@
       </p:sp>
       <p:sp>
         <p:nvSpPr>
-          <p:cNvPr id="30" name="TextBox 29"/>
+          <p:cNvPr id="37" name="TextBox 36"/>
           <p:cNvSpPr txBox="1"/>
           <p:nvPr/>
         </p:nvSpPr>
         <p:spPr>
           <a:xfrm>
-            <a:off x="5016398" y="2112263"/>
+            <a:off x="7318857" y="2112263"/>
             <a:ext cx="2156155" cy="125730"/>
           </a:xfrm>
           <a:prstGeom prst="rect">
@@ -48621,20 +48939,20 @@
                 </a:solidFill>
                 <a:latin typeface="Kanit"/>
               </a:rPr>
-              <a:t>฿338.24 /ร้อยฟอง · C·E</a:t>
+              <a:t>฿343.75 /ร้อยฟอง · C·E</a:t>
             </a:r>
           </a:p>
         </p:txBody>
       </p:sp>
       <p:sp>
         <p:nvSpPr>
-          <p:cNvPr id="31" name="TextBox 30"/>
+          <p:cNvPr id="38" name="TextBox 37"/>
           <p:cNvSpPr txBox="1"/>
           <p:nvPr/>
         </p:nvSpPr>
         <p:spPr>
           <a:xfrm>
-            <a:off x="5016398" y="2244851"/>
+            <a:off x="7318857" y="2244851"/>
             <a:ext cx="1078077" cy="134112"/>
           </a:xfrm>
           <a:prstGeom prst="rect">
@@ -48660,20 +48978,20 @@
                 </a:solidFill>
                 <a:latin typeface="Kanit"/>
               </a:rPr>
-              <a:t>YoY +0.7%</a:t>
+              <a:t>YoY +2.0%</a:t>
             </a:r>
           </a:p>
         </p:txBody>
       </p:sp>
       <p:sp>
         <p:nvSpPr>
-          <p:cNvPr id="32" name="TextBox 31"/>
+          <p:cNvPr id="39" name="TextBox 38"/>
           <p:cNvSpPr txBox="1"/>
           <p:nvPr/>
         </p:nvSpPr>
         <p:spPr>
           <a:xfrm>
-            <a:off x="6094475" y="2244851"/>
+            <a:off x="8396935" y="2244851"/>
             <a:ext cx="1078077" cy="134112"/>
           </a:xfrm>
           <a:prstGeom prst="rect">
@@ -48699,20 +49017,20 @@
                 </a:solidFill>
                 <a:latin typeface="Kanit"/>
               </a:rPr>
-              <a:t>6m +5.0%</a:t>
+              <a:t>6m +13.6%</a:t>
             </a:r>
           </a:p>
         </p:txBody>
       </p:sp>
       <p:sp>
         <p:nvSpPr>
-          <p:cNvPr id="33" name="Rectangle 32"/>
+          <p:cNvPr id="40" name="Rectangle 39"/>
           <p:cNvSpPr/>
           <p:nvPr/>
         </p:nvSpPr>
         <p:spPr>
           <a:xfrm>
-            <a:off x="5016398" y="2400300"/>
+            <a:off x="7318857" y="2400300"/>
             <a:ext cx="2156155" cy="548640"/>
           </a:xfrm>
           <a:prstGeom prst="rect">
@@ -48752,13 +49070,13 @@
       </p:sp>
       <p:sp>
         <p:nvSpPr>
-          <p:cNvPr id="34" name="Freeform 33"/>
+          <p:cNvPr id="41" name="Freeform 40"/>
           <p:cNvSpPr/>
           <p:nvPr/>
         </p:nvSpPr>
         <p:spPr>
           <a:xfrm>
-            <a:off x="5062118" y="2446020"/>
+            <a:off x="7364577" y="2446020"/>
             <a:ext cx="2064715" cy="457200"/>
           </a:xfrm>
           <a:custGeom>
@@ -48773,16 +49091,16 @@
                   <a:pt x="0" y="457200"/>
                 </a:moveTo>
                 <a:lnTo>
-                  <a:pt x="412943" y="391702"/>
-                </a:lnTo>
-                <a:lnTo>
-                  <a:pt x="825886" y="105409"/>
-                </a:lnTo>
-                <a:lnTo>
-                  <a:pt x="1238829" y="105409"/>
-                </a:lnTo>
-                <a:lnTo>
-                  <a:pt x="1651772" y="214144"/>
+                  <a:pt x="412943" y="173996"/>
+                </a:lnTo>
+                <a:lnTo>
+                  <a:pt x="825886" y="173996"/>
+                </a:lnTo>
+                <a:lnTo>
+                  <a:pt x="1238829" y="281558"/>
+                </a:lnTo>
+                <a:lnTo>
+                  <a:pt x="1651772" y="66435"/>
                 </a:lnTo>
                 <a:lnTo>
                   <a:pt x="2064715" y="0"/>
@@ -48822,13 +49140,13 @@
       </p:sp>
       <p:sp>
         <p:nvSpPr>
-          <p:cNvPr id="35" name="Rounded Rectangle 34"/>
+          <p:cNvPr id="42" name="Rounded Rectangle 41"/>
           <p:cNvSpPr/>
           <p:nvPr/>
         </p:nvSpPr>
         <p:spPr>
           <a:xfrm>
-            <a:off x="7085685" y="2404872"/>
+            <a:off x="9388144" y="2404872"/>
             <a:ext cx="82296" cy="82296"/>
           </a:xfrm>
           <a:prstGeom prst="roundRect">
@@ -48868,13 +49186,13 @@
       </p:sp>
       <p:sp>
         <p:nvSpPr>
-          <p:cNvPr id="36" name="TextBox 35"/>
+          <p:cNvPr id="43" name="TextBox 42"/>
           <p:cNvSpPr txBox="1"/>
           <p:nvPr/>
         </p:nvSpPr>
         <p:spPr>
           <a:xfrm>
-            <a:off x="7318857" y="1970531"/>
+            <a:off x="9621316" y="1970531"/>
             <a:ext cx="2156155" cy="150876"/>
           </a:xfrm>
           <a:prstGeom prst="rect">
@@ -48900,20 +49218,20 @@
                 </a:solidFill>
                 <a:latin typeface="Kanit"/>
               </a:rPr>
-              <a:t>White shrimp  กุ้งขาว</a:t>
+              <a:t>Chicken  ไก่</a:t>
             </a:r>
           </a:p>
         </p:txBody>
       </p:sp>
       <p:sp>
         <p:nvSpPr>
-          <p:cNvPr id="37" name="TextBox 36"/>
+          <p:cNvPr id="44" name="TextBox 43"/>
           <p:cNvSpPr txBox="1"/>
           <p:nvPr/>
         </p:nvSpPr>
         <p:spPr>
           <a:xfrm>
-            <a:off x="7318857" y="2112263"/>
+            <a:off x="9621316" y="2112263"/>
             <a:ext cx="2156155" cy="125730"/>
           </a:xfrm>
           <a:prstGeom prst="rect">
@@ -48939,20 +49257,20 @@
                 </a:solidFill>
                 <a:latin typeface="Kanit"/>
               </a:rPr>
-              <a:t>฿133.82 /กก. · S·E coast</a:t>
+              <a:t>฿43.00 /กก. · C·E</a:t>
             </a:r>
           </a:p>
         </p:txBody>
       </p:sp>
       <p:sp>
         <p:nvSpPr>
-          <p:cNvPr id="38" name="TextBox 37"/>
+          <p:cNvPr id="45" name="TextBox 44"/>
           <p:cNvSpPr txBox="1"/>
           <p:nvPr/>
         </p:nvSpPr>
         <p:spPr>
           <a:xfrm>
-            <a:off x="7318857" y="2244851"/>
+            <a:off x="9621316" y="2244851"/>
             <a:ext cx="1078077" cy="134112"/>
           </a:xfrm>
           <a:prstGeom prst="rect">
@@ -48978,20 +49296,20 @@
                 </a:solidFill>
                 <a:latin typeface="Kanit"/>
               </a:rPr>
-              <a:t>YoY +1.1%</a:t>
+              <a:t>YoY +3.5%</a:t>
             </a:r>
           </a:p>
         </p:txBody>
       </p:sp>
       <p:sp>
         <p:nvSpPr>
-          <p:cNvPr id="39" name="TextBox 38"/>
+          <p:cNvPr id="46" name="TextBox 45"/>
           <p:cNvSpPr txBox="1"/>
           <p:nvPr/>
         </p:nvSpPr>
         <p:spPr>
           <a:xfrm>
-            <a:off x="8396935" y="2244851"/>
+            <a:off x="10699394" y="2244851"/>
             <a:ext cx="1078077" cy="134112"/>
           </a:xfrm>
           <a:prstGeom prst="rect">
@@ -49013,24 +49331,24 @@
             <a:r>
               <a:rPr sz="800" b="1">
                 <a:solidFill>
-                  <a:srgbClr val="CC0000"/>
+                  <a:srgbClr val="15795F"/>
                 </a:solidFill>
                 <a:latin typeface="Kanit"/>
               </a:rPr>
-              <a:t>6m −15.8%</a:t>
+              <a:t>6m +2.3%</a:t>
             </a:r>
           </a:p>
         </p:txBody>
       </p:sp>
       <p:sp>
         <p:nvSpPr>
-          <p:cNvPr id="40" name="Rectangle 39"/>
+          <p:cNvPr id="47" name="Rectangle 46"/>
           <p:cNvSpPr/>
           <p:nvPr/>
         </p:nvSpPr>
         <p:spPr>
           <a:xfrm>
-            <a:off x="7318857" y="2400300"/>
+            <a:off x="9621316" y="2400300"/>
             <a:ext cx="2156155" cy="548640"/>
           </a:xfrm>
           <a:prstGeom prst="rect">
@@ -49070,13 +49388,13 @@
       </p:sp>
       <p:sp>
         <p:nvSpPr>
-          <p:cNvPr id="41" name="Freeform 40"/>
+          <p:cNvPr id="48" name="Freeform 47"/>
           <p:cNvSpPr/>
           <p:nvPr/>
         </p:nvSpPr>
         <p:spPr>
           <a:xfrm>
-            <a:off x="7364577" y="2446020"/>
+            <a:off x="9667036" y="2446020"/>
             <a:ext cx="2064715" cy="457200"/>
           </a:xfrm>
           <a:custGeom>
@@ -49091,19 +49409,19 @@
                   <a:pt x="0" y="0"/>
                 </a:moveTo>
                 <a:lnTo>
-                  <a:pt x="412943" y="247179"/>
-                </a:lnTo>
-                <a:lnTo>
-                  <a:pt x="825886" y="420769"/>
+                  <a:pt x="412943" y="114807"/>
+                </a:lnTo>
+                <a:lnTo>
+                  <a:pt x="825886" y="305815"/>
                 </a:lnTo>
                 <a:lnTo>
                   <a:pt x="1238829" y="457200"/>
                 </a:lnTo>
                 <a:lnTo>
-                  <a:pt x="1651772" y="424594"/>
-                </a:lnTo>
-                <a:lnTo>
-                  <a:pt x="2064715" y="223135"/>
+                  <a:pt x="1651772" y="244855"/>
+                </a:lnTo>
+                <a:lnTo>
+                  <a:pt x="2064715" y="91439"/>
                 </a:lnTo>
               </a:path>
             </a:pathLst>
@@ -49111,7 +49429,7 @@
           <a:noFill/>
           <a:ln w="20320">
             <a:solidFill>
-              <a:srgbClr val="CC0000"/>
+              <a:srgbClr val="15795F"/>
             </a:solidFill>
           </a:ln>
           <a:effectLst/>
@@ -49140,13 +49458,13 @@
       </p:sp>
       <p:sp>
         <p:nvSpPr>
-          <p:cNvPr id="42" name="Rounded Rectangle 41"/>
+          <p:cNvPr id="49" name="Rounded Rectangle 48"/>
           <p:cNvSpPr/>
           <p:nvPr/>
         </p:nvSpPr>
         <p:spPr>
           <a:xfrm>
-            <a:off x="9388144" y="2628007"/>
+            <a:off x="11690603" y="2496311"/>
             <a:ext cx="82296" cy="82296"/>
           </a:xfrm>
           <a:prstGeom prst="roundRect">
@@ -49155,7 +49473,7 @@
             </a:avLst>
           </a:prstGeom>
           <a:solidFill>
-            <a:srgbClr val="CC0000"/>
+            <a:srgbClr val="15795F"/>
           </a:solidFill>
           <a:ln>
             <a:noFill/>
@@ -49186,13 +49504,13 @@
       </p:sp>
       <p:sp>
         <p:nvSpPr>
-          <p:cNvPr id="43" name="TextBox 42"/>
+          <p:cNvPr id="50" name="TextBox 49"/>
           <p:cNvSpPr txBox="1"/>
           <p:nvPr/>
         </p:nvSpPr>
         <p:spPr>
           <a:xfrm>
-            <a:off x="9621316" y="1970531"/>
+            <a:off x="411480" y="3076956"/>
             <a:ext cx="2156155" cy="150876"/>
           </a:xfrm>
           <a:prstGeom prst="rect">
@@ -49225,13 +49543,13 @@
       </p:sp>
       <p:sp>
         <p:nvSpPr>
-          <p:cNvPr id="44" name="TextBox 43"/>
+          <p:cNvPr id="51" name="TextBox 50"/>
           <p:cNvSpPr txBox="1"/>
           <p:nvPr/>
         </p:nvSpPr>
         <p:spPr>
           <a:xfrm>
-            <a:off x="9621316" y="2112263"/>
+            <a:off x="411480" y="3218687"/>
             <a:ext cx="2156155" cy="125730"/>
           </a:xfrm>
           <a:prstGeom prst="rect">
@@ -49257,20 +49575,20 @@
                 </a:solidFill>
                 <a:latin typeface="Kanit"/>
               </a:rPr>
-              <a:t>฿66.65 /กก. · C·W·E</a:t>
+              <a:t>฿70.12 /กก. · C·W·E</a:t>
             </a:r>
           </a:p>
         </p:txBody>
       </p:sp>
       <p:sp>
         <p:nvSpPr>
-          <p:cNvPr id="45" name="TextBox 44"/>
+          <p:cNvPr id="52" name="TextBox 51"/>
           <p:cNvSpPr txBox="1"/>
           <p:nvPr/>
         </p:nvSpPr>
         <p:spPr>
           <a:xfrm>
-            <a:off x="9621316" y="2244851"/>
+            <a:off x="411480" y="3351275"/>
             <a:ext cx="1078077" cy="134112"/>
           </a:xfrm>
           <a:prstGeom prst="rect">
@@ -49296,20 +49614,20 @@
                 </a:solidFill>
                 <a:latin typeface="Kanit"/>
               </a:rPr>
-              <a:t>YoY +1.5%</a:t>
+              <a:t>YoY +5.4%</a:t>
             </a:r>
           </a:p>
         </p:txBody>
       </p:sp>
       <p:sp>
         <p:nvSpPr>
-          <p:cNvPr id="46" name="TextBox 45"/>
+          <p:cNvPr id="53" name="TextBox 52"/>
           <p:cNvSpPr txBox="1"/>
           <p:nvPr/>
         </p:nvSpPr>
         <p:spPr>
           <a:xfrm>
-            <a:off x="10699394" y="2244851"/>
+            <a:off x="1489557" y="3351275"/>
             <a:ext cx="1078077" cy="134112"/>
           </a:xfrm>
           <a:prstGeom prst="rect">
@@ -49335,20 +49653,20 @@
                 </a:solidFill>
                 <a:latin typeface="Kanit"/>
               </a:rPr>
-              <a:t>6m +6.1%</a:t>
+              <a:t>6m +26.3%</a:t>
             </a:r>
           </a:p>
         </p:txBody>
       </p:sp>
       <p:sp>
         <p:nvSpPr>
-          <p:cNvPr id="47" name="Rectangle 46"/>
+          <p:cNvPr id="54" name="Rectangle 53"/>
           <p:cNvSpPr/>
           <p:nvPr/>
         </p:nvSpPr>
         <p:spPr>
           <a:xfrm>
-            <a:off x="9621316" y="2400300"/>
+            <a:off x="411480" y="3506724"/>
             <a:ext cx="2156155" cy="548640"/>
           </a:xfrm>
           <a:prstGeom prst="rect">
@@ -49388,13 +49706,13 @@
       </p:sp>
       <p:sp>
         <p:nvSpPr>
-          <p:cNvPr id="48" name="Freeform 47"/>
+          <p:cNvPr id="55" name="Freeform 54"/>
           <p:cNvSpPr/>
           <p:nvPr/>
         </p:nvSpPr>
         <p:spPr>
           <a:xfrm>
-            <a:off x="9667036" y="2446020"/>
+            <a:off x="457200" y="3552444"/>
             <a:ext cx="2064715" cy="457200"/>
           </a:xfrm>
           <a:custGeom>
@@ -49406,22 +49724,22 @@
             <a:pathLst>
               <a:path w="2064715" h="457200">
                 <a:moveTo>
-                  <a:pt x="0" y="457200"/>
+                  <a:pt x="0" y="358828"/>
                 </a:moveTo>
                 <a:lnTo>
-                  <a:pt x="412943" y="182662"/>
-                </a:lnTo>
-                <a:lnTo>
-                  <a:pt x="825886" y="0"/>
-                </a:lnTo>
-                <a:lnTo>
-                  <a:pt x="1238829" y="252749"/>
-                </a:lnTo>
-                <a:lnTo>
-                  <a:pt x="1651772" y="129642"/>
-                </a:lnTo>
-                <a:lnTo>
-                  <a:pt x="2064715" y="53019"/>
+                  <a:pt x="412943" y="100410"/>
+                </a:lnTo>
+                <a:lnTo>
+                  <a:pt x="825886" y="457200"/>
+                </a:lnTo>
+                <a:lnTo>
+                  <a:pt x="1238829" y="286450"/>
+                </a:lnTo>
+                <a:lnTo>
+                  <a:pt x="1651772" y="170749"/>
+                </a:lnTo>
+                <a:lnTo>
+                  <a:pt x="2064715" y="0"/>
                 </a:lnTo>
               </a:path>
             </a:pathLst>
@@ -49458,13 +49776,13 @@
       </p:sp>
       <p:sp>
         <p:nvSpPr>
-          <p:cNvPr id="49" name="Rounded Rectangle 48"/>
+          <p:cNvPr id="56" name="Rounded Rectangle 55"/>
           <p:cNvSpPr/>
           <p:nvPr/>
         </p:nvSpPr>
         <p:spPr>
           <a:xfrm>
-            <a:off x="11690603" y="2457891"/>
+            <a:off x="2480767" y="3511296"/>
             <a:ext cx="82296" cy="82296"/>
           </a:xfrm>
           <a:prstGeom prst="roundRect">
@@ -49474,324 +49792,6 @@
           </a:prstGeom>
           <a:solidFill>
             <a:srgbClr val="15795F"/>
-          </a:solidFill>
-          <a:ln>
-            <a:noFill/>
-          </a:ln>
-          <a:effectLst/>
-        </p:spPr>
-        <p:style>
-          <a:lnRef idx="1">
-            <a:schemeClr val="accent1"/>
-          </a:lnRef>
-          <a:fillRef idx="3">
-            <a:schemeClr val="accent1"/>
-          </a:fillRef>
-          <a:effectRef idx="2">
-            <a:schemeClr val="accent1"/>
-          </a:effectRef>
-          <a:fontRef idx="minor">
-            <a:schemeClr val="lt1"/>
-          </a:fontRef>
-        </p:style>
-        <p:txBody>
-          <a:bodyPr rtlCol="0" anchor="ctr" wrap="none"/>
-          <a:lstStyle/>
-          <a:p>
-            <a:pPr algn="ctr"/>
-          </a:p>
-        </p:txBody>
-      </p:sp>
-      <p:sp>
-        <p:nvSpPr>
-          <p:cNvPr id="50" name="TextBox 49"/>
-          <p:cNvSpPr txBox="1"/>
-          <p:nvPr/>
-        </p:nvSpPr>
-        <p:spPr>
-          <a:xfrm>
-            <a:off x="411480" y="3076956"/>
-            <a:ext cx="2156155" cy="150876"/>
-          </a:xfrm>
-          <a:prstGeom prst="rect">
-            <a:avLst/>
-          </a:prstGeom>
-          <a:noFill/>
-        </p:spPr>
-        <p:txBody>
-          <a:bodyPr wrap="square" lIns="0" rIns="0" tIns="0" bIns="0" anchor="t">
-            <a:noAutofit/>
-          </a:bodyPr>
-          <a:lstStyle/>
-          <a:p>
-            <a:pPr algn="l">
-              <a:lnSpc>
-                <a:spcPts val="1188"/>
-              </a:lnSpc>
-            </a:pPr>
-            <a:r>
-              <a:rPr sz="900" b="1">
-                <a:solidFill>
-                  <a:srgbClr val="1E2F5C"/>
-                </a:solidFill>
-                <a:latin typeface="Kanit"/>
-              </a:rPr>
-              <a:t>Chicken  ไก่</a:t>
-            </a:r>
-          </a:p>
-        </p:txBody>
-      </p:sp>
-      <p:sp>
-        <p:nvSpPr>
-          <p:cNvPr id="51" name="TextBox 50"/>
-          <p:cNvSpPr txBox="1"/>
-          <p:nvPr/>
-        </p:nvSpPr>
-        <p:spPr>
-          <a:xfrm>
-            <a:off x="411480" y="3218687"/>
-            <a:ext cx="2156155" cy="125730"/>
-          </a:xfrm>
-          <a:prstGeom prst="rect">
-            <a:avLst/>
-          </a:prstGeom>
-          <a:noFill/>
-        </p:spPr>
-        <p:txBody>
-          <a:bodyPr wrap="square" lIns="0" rIns="0" tIns="0" bIns="0" anchor="t">
-            <a:noAutofit/>
-          </a:bodyPr>
-          <a:lstStyle/>
-          <a:p>
-            <a:pPr algn="l">
-              <a:lnSpc>
-                <a:spcPts val="990"/>
-              </a:lnSpc>
-            </a:pPr>
-            <a:r>
-              <a:rPr sz="750" b="0">
-                <a:solidFill>
-                  <a:srgbClr val="606060"/>
-                </a:solidFill>
-                <a:latin typeface="Kanit"/>
-              </a:rPr>
-              <a:t>฿41.19 /กก. · C·E</a:t>
-            </a:r>
-          </a:p>
-        </p:txBody>
-      </p:sp>
-      <p:sp>
-        <p:nvSpPr>
-          <p:cNvPr id="52" name="TextBox 51"/>
-          <p:cNvSpPr txBox="1"/>
-          <p:nvPr/>
-        </p:nvSpPr>
-        <p:spPr>
-          <a:xfrm>
-            <a:off x="411480" y="3351275"/>
-            <a:ext cx="1078077" cy="134112"/>
-          </a:xfrm>
-          <a:prstGeom prst="rect">
-            <a:avLst/>
-          </a:prstGeom>
-          <a:noFill/>
-        </p:spPr>
-        <p:txBody>
-          <a:bodyPr wrap="square" lIns="0" rIns="0" tIns="0" bIns="0" anchor="t">
-            <a:noAutofit/>
-          </a:bodyPr>
-          <a:lstStyle/>
-          <a:p>
-            <a:pPr algn="l">
-              <a:lnSpc>
-                <a:spcPts val="1056"/>
-              </a:lnSpc>
-            </a:pPr>
-            <a:r>
-              <a:rPr sz="800" b="1">
-                <a:solidFill>
-                  <a:srgbClr val="15795F"/>
-                </a:solidFill>
-                <a:latin typeface="Kanit"/>
-              </a:rPr>
-              <a:t>YoY +2.0%</a:t>
-            </a:r>
-          </a:p>
-        </p:txBody>
-      </p:sp>
-      <p:sp>
-        <p:nvSpPr>
-          <p:cNvPr id="53" name="TextBox 52"/>
-          <p:cNvSpPr txBox="1"/>
-          <p:nvPr/>
-        </p:nvSpPr>
-        <p:spPr>
-          <a:xfrm>
-            <a:off x="1489557" y="3351275"/>
-            <a:ext cx="1078077" cy="134112"/>
-          </a:xfrm>
-          <a:prstGeom prst="rect">
-            <a:avLst/>
-          </a:prstGeom>
-          <a:noFill/>
-        </p:spPr>
-        <p:txBody>
-          <a:bodyPr wrap="square" lIns="0" rIns="0" tIns="0" bIns="0" anchor="t">
-            <a:noAutofit/>
-          </a:bodyPr>
-          <a:lstStyle/>
-          <a:p>
-            <a:pPr algn="l">
-              <a:lnSpc>
-                <a:spcPts val="1056"/>
-              </a:lnSpc>
-            </a:pPr>
-            <a:r>
-              <a:rPr sz="800" b="1">
-                <a:solidFill>
-                  <a:srgbClr val="CC0000"/>
-                </a:solidFill>
-                <a:latin typeface="Kanit"/>
-              </a:rPr>
-              <a:t>6m −1.9%</a:t>
-            </a:r>
-          </a:p>
-        </p:txBody>
-      </p:sp>
-      <p:sp>
-        <p:nvSpPr>
-          <p:cNvPr id="54" name="Rectangle 53"/>
-          <p:cNvSpPr/>
-          <p:nvPr/>
-        </p:nvSpPr>
-        <p:spPr>
-          <a:xfrm>
-            <a:off x="411480" y="3506724"/>
-            <a:ext cx="2156155" cy="548640"/>
-          </a:xfrm>
-          <a:prstGeom prst="rect">
-            <a:avLst/>
-          </a:prstGeom>
-          <a:solidFill>
-            <a:srgbClr val="FBFCFE"/>
-          </a:solidFill>
-          <a:ln w="9525">
-            <a:solidFill>
-              <a:srgbClr val="D9DEE9"/>
-            </a:solidFill>
-          </a:ln>
-          <a:effectLst/>
-        </p:spPr>
-        <p:style>
-          <a:lnRef idx="1">
-            <a:schemeClr val="accent1"/>
-          </a:lnRef>
-          <a:fillRef idx="3">
-            <a:schemeClr val="accent1"/>
-          </a:fillRef>
-          <a:effectRef idx="2">
-            <a:schemeClr val="accent1"/>
-          </a:effectRef>
-          <a:fontRef idx="minor">
-            <a:schemeClr val="lt1"/>
-          </a:fontRef>
-        </p:style>
-        <p:txBody>
-          <a:bodyPr rtlCol="0" anchor="ctr" wrap="none"/>
-          <a:lstStyle/>
-          <a:p>
-            <a:pPr algn="ctr"/>
-          </a:p>
-        </p:txBody>
-      </p:sp>
-      <p:sp>
-        <p:nvSpPr>
-          <p:cNvPr id="55" name="Freeform 54"/>
-          <p:cNvSpPr/>
-          <p:nvPr/>
-        </p:nvSpPr>
-        <p:spPr>
-          <a:xfrm>
-            <a:off x="457200" y="3552444"/>
-            <a:ext cx="2064715" cy="457200"/>
-          </a:xfrm>
-          <a:custGeom>
-            <a:avLst/>
-            <a:gdLst/>
-            <a:ahLst/>
-            <a:cxnLst/>
-            <a:rect l="l" t="t" r="r" b="b"/>
-            <a:pathLst>
-              <a:path w="2064715" h="457200">
-                <a:moveTo>
-                  <a:pt x="0" y="187960"/>
-                </a:moveTo>
-                <a:lnTo>
-                  <a:pt x="412943" y="0"/>
-                </a:lnTo>
-                <a:lnTo>
-                  <a:pt x="825886" y="114807"/>
-                </a:lnTo>
-                <a:lnTo>
-                  <a:pt x="1238829" y="305815"/>
-                </a:lnTo>
-                <a:lnTo>
-                  <a:pt x="1651772" y="457200"/>
-                </a:lnTo>
-                <a:lnTo>
-                  <a:pt x="2064715" y="275336"/>
-                </a:lnTo>
-              </a:path>
-            </a:pathLst>
-          </a:custGeom>
-          <a:noFill/>
-          <a:ln w="20320">
-            <a:solidFill>
-              <a:srgbClr val="CC0000"/>
-            </a:solidFill>
-          </a:ln>
-          <a:effectLst/>
-        </p:spPr>
-        <p:style>
-          <a:lnRef idx="1">
-            <a:schemeClr val="accent1"/>
-          </a:lnRef>
-          <a:fillRef idx="3">
-            <a:schemeClr val="accent1"/>
-          </a:fillRef>
-          <a:effectRef idx="2">
-            <a:schemeClr val="accent1"/>
-          </a:effectRef>
-          <a:fontRef idx="minor">
-            <a:schemeClr val="lt1"/>
-          </a:fontRef>
-        </p:style>
-        <p:txBody>
-          <a:bodyPr rtlCol="0" anchor="ctr"/>
-          <a:lstStyle/>
-          <a:p>
-            <a:pPr algn="ctr"/>
-          </a:p>
-        </p:txBody>
-      </p:sp>
-      <p:sp>
-        <p:nvSpPr>
-          <p:cNvPr id="56" name="Rounded Rectangle 55"/>
-          <p:cNvSpPr/>
-          <p:nvPr/>
-        </p:nvSpPr>
-        <p:spPr>
-          <a:xfrm>
-            <a:off x="2480767" y="3786632"/>
-            <a:ext cx="82296" cy="82296"/>
-          </a:xfrm>
-          <a:prstGeom prst="roundRect">
-            <a:avLst>
-              <a:gd name="adj" fmla="val 50000"/>
-            </a:avLst>
-          </a:prstGeom>
-          <a:solidFill>
-            <a:srgbClr val="CC0000"/>
           </a:solidFill>
           <a:ln>
             <a:noFill/>
@@ -49893,7 +49893,7 @@
                 </a:solidFill>
                 <a:latin typeface="Kanit"/>
               </a:rPr>
-              <a:t>฿17,727 /ตัน · Isan·N·C</a:t>
+              <a:t>฿17,768 /ตัน · Isan·N·C</a:t>
             </a:r>
           </a:p>
         </p:txBody>
@@ -49932,7 +49932,7 @@
                 </a:solidFill>
                 <a:latin typeface="Kanit"/>
               </a:rPr>
-              <a:t>YoY +14.0%</a:t>
+              <a:t>YoY +14.2%</a:t>
             </a:r>
           </a:p>
         </p:txBody>
@@ -49971,7 +49971,7 @@
                 </a:solidFill>
                 <a:latin typeface="Kanit"/>
               </a:rPr>
-              <a:t>6m +8.1%</a:t>
+              <a:t>6m +8.0%</a:t>
             </a:r>
           </a:p>
         </p:txBody>
@@ -50045,16 +50045,16 @@
                   <a:pt x="0" y="457200"/>
                 </a:moveTo>
                 <a:lnTo>
-                  <a:pt x="412943" y="340931"/>
-                </a:lnTo>
-                <a:lnTo>
-                  <a:pt x="825886" y="253323"/>
-                </a:lnTo>
-                <a:lnTo>
-                  <a:pt x="1238829" y="103264"/>
-                </a:lnTo>
-                <a:lnTo>
-                  <a:pt x="1651772" y="6195"/>
+                  <a:pt x="412943" y="341616"/>
+                </a:lnTo>
+                <a:lnTo>
+                  <a:pt x="825886" y="154005"/>
+                </a:lnTo>
+                <a:lnTo>
+                  <a:pt x="1238829" y="47789"/>
+                </a:lnTo>
+                <a:lnTo>
+                  <a:pt x="1651772" y="27620"/>
                 </a:lnTo>
                 <a:lnTo>
                   <a:pt x="2064715" y="0"/>
@@ -50211,7 +50211,7 @@
                 </a:solidFill>
                 <a:latin typeface="Kanit"/>
               </a:rPr>
-              <a:t>฿10.76 /กก. · North</a:t>
+              <a:t>฿10.04 /กก. · North</a:t>
             </a:r>
           </a:p>
         </p:txBody>
@@ -50289,7 +50289,7 @@
                 </a:solidFill>
                 <a:latin typeface="Kanit"/>
               </a:rPr>
-              <a:t>6m +22.1%</a:t>
+              <a:t>6m +12.7%</a:t>
             </a:r>
           </a:p>
         </p:txBody>
@@ -50363,19 +50363,19 @@
                   <a:pt x="0" y="457200"/>
                 </a:moveTo>
                 <a:lnTo>
-                  <a:pt x="412943" y="415234"/>
-                </a:lnTo>
-                <a:lnTo>
-                  <a:pt x="825886" y="315843"/>
-                </a:lnTo>
-                <a:lnTo>
-                  <a:pt x="1238829" y="81721"/>
-                </a:lnTo>
-                <a:lnTo>
-                  <a:pt x="1651772" y="0"/>
-                </a:lnTo>
-                <a:lnTo>
-                  <a:pt x="2064715" y="46382"/>
+                  <a:pt x="412943" y="357808"/>
+                </a:lnTo>
+                <a:lnTo>
+                  <a:pt x="825886" y="86967"/>
+                </a:lnTo>
+                <a:lnTo>
+                  <a:pt x="1238829" y="0"/>
+                </a:lnTo>
+                <a:lnTo>
+                  <a:pt x="1651772" y="49695"/>
+                </a:lnTo>
+                <a:lnTo>
+                  <a:pt x="2064715" y="226115"/>
                 </a:lnTo>
               </a:path>
             </a:pathLst>
@@ -50418,7 +50418,7 @@
         </p:nvSpPr>
         <p:spPr>
           <a:xfrm>
-            <a:off x="7085685" y="3557678"/>
+            <a:off x="7085685" y="3737411"/>
             <a:ext cx="82296" cy="82296"/>
           </a:xfrm>
           <a:prstGeom prst="roundRect">
@@ -50529,7 +50529,7 @@
                 </a:solidFill>
                 <a:latin typeface="Kanit"/>
               </a:rPr>
-              <a:t>฿8.21 /กก. · South</a:t>
+              <a:t>฿8.65 /กก. · South</a:t>
             </a:r>
           </a:p>
         </p:txBody>
@@ -50568,7 +50568,7 @@
                 </a:solidFill>
                 <a:latin typeface="Kanit"/>
               </a:rPr>
-              <a:t>YoY +24.7%</a:t>
+              <a:t>YoY +23.9%</a:t>
             </a:r>
           </a:p>
         </p:txBody>
@@ -50607,7 +50607,7 @@
                 </a:solidFill>
                 <a:latin typeface="Kanit"/>
               </a:rPr>
-              <a:t>6m +28.7%</a:t>
+              <a:t>6m +26.6%</a:t>
             </a:r>
           </a:p>
         </p:txBody>
@@ -50681,16 +50681,16 @@
                   <a:pt x="0" y="457200"/>
                 </a:moveTo>
                 <a:lnTo>
-                  <a:pt x="412943" y="330385"/>
-                </a:lnTo>
-                <a:lnTo>
-                  <a:pt x="825886" y="320373"/>
-                </a:lnTo>
-                <a:lnTo>
-                  <a:pt x="1238829" y="337059"/>
-                </a:lnTo>
-                <a:lnTo>
-                  <a:pt x="1651772" y="180210"/>
+                  <a:pt x="412943" y="444499"/>
+                </a:lnTo>
+                <a:lnTo>
+                  <a:pt x="825886" y="457200"/>
+                </a:lnTo>
+                <a:lnTo>
+                  <a:pt x="1238829" y="311149"/>
+                </a:lnTo>
+                <a:lnTo>
+                  <a:pt x="1651772" y="114300"/>
                 </a:lnTo>
                 <a:lnTo>
                   <a:pt x="2064715" y="0"/>
@@ -50847,7 +50847,7 @@
                 </a:solidFill>
                 <a:latin typeface="Kanit"/>
               </a:rPr>
-              <a:t>฿84.55 /กก. · S·E</a:t>
+              <a:t>฿81.86 /กก. · S·E</a:t>
             </a:r>
           </a:p>
         </p:txBody>
@@ -50886,7 +50886,7 @@
                 </a:solidFill>
                 <a:latin typeface="Kanit"/>
               </a:rPr>
-              <a:t>YoY +42.4%</a:t>
+              <a:t>YoY +41.4%</a:t>
             </a:r>
           </a:p>
         </p:txBody>
@@ -50925,7 +50925,7 @@
                 </a:solidFill>
                 <a:latin typeface="Kanit"/>
               </a:rPr>
-              <a:t>6m +49.0%</a:t>
+              <a:t>6m +35.6%</a:t>
             </a:r>
           </a:p>
         </p:txBody>
@@ -50999,19 +50999,19 @@
                   <a:pt x="0" y="457200"/>
                 </a:moveTo>
                 <a:lnTo>
-                  <a:pt x="412943" y="318935"/>
-                </a:lnTo>
-                <a:lnTo>
-                  <a:pt x="825886" y="199735"/>
-                </a:lnTo>
-                <a:lnTo>
-                  <a:pt x="1238829" y="108509"/>
-                </a:lnTo>
-                <a:lnTo>
-                  <a:pt x="1651772" y="0"/>
-                </a:lnTo>
-                <a:lnTo>
-                  <a:pt x="2064715" y="26013"/>
+                  <a:pt x="412943" y="286327"/>
+                </a:lnTo>
+                <a:lnTo>
+                  <a:pt x="825886" y="157274"/>
+                </a:lnTo>
+                <a:lnTo>
+                  <a:pt x="1238829" y="0"/>
+                </a:lnTo>
+                <a:lnTo>
+                  <a:pt x="1651772" y="37202"/>
+                </a:lnTo>
+                <a:lnTo>
+                  <a:pt x="2064715" y="104678"/>
                 </a:lnTo>
               </a:path>
             </a:pathLst>
@@ -51054,7 +51054,7 @@
         </p:nvSpPr>
         <p:spPr>
           <a:xfrm>
-            <a:off x="11690603" y="3537309"/>
+            <a:off x="11690603" y="3615974"/>
             <a:ext cx="82296" cy="82296"/>
           </a:xfrm>
           <a:prstGeom prst="roundRect">
@@ -51165,7 +51165,7 @@
                 </a:solidFill>
                 <a:latin typeface="Kanit"/>
               </a:rPr>
-              <a:t>฿3.41 /กก. · Isan·N·E</a:t>
+              <a:t>฿3.75 /กก. · Isan·N·E</a:t>
             </a:r>
           </a:p>
         </p:txBody>
@@ -51204,7 +51204,7 @@
                 </a:solidFill>
                 <a:latin typeface="Kanit"/>
               </a:rPr>
-              <a:t>YoY +64.3%</a:t>
+              <a:t>YoY +69.4%</a:t>
             </a:r>
           </a:p>
         </p:txBody>
@@ -51243,7 +51243,7 @@
                 </a:solidFill>
                 <a:latin typeface="Kanit"/>
               </a:rPr>
-              <a:t>6m +40.3%</a:t>
+              <a:t>6m +49.4%</a:t>
             </a:r>
           </a:p>
         </p:txBody>
@@ -51317,16 +51317,16 @@
                   <a:pt x="0" y="457200"/>
                 </a:moveTo>
                 <a:lnTo>
-                  <a:pt x="412943" y="381000"/>
-                </a:lnTo>
-                <a:lnTo>
-                  <a:pt x="825886" y="254000"/>
-                </a:lnTo>
-                <a:lnTo>
-                  <a:pt x="1238829" y="152400"/>
-                </a:lnTo>
-                <a:lnTo>
-                  <a:pt x="1651772" y="25400"/>
+                  <a:pt x="412943" y="352338"/>
+                </a:lnTo>
+                <a:lnTo>
+                  <a:pt x="825886" y="268448"/>
+                </a:lnTo>
+                <a:lnTo>
+                  <a:pt x="1238829" y="163586"/>
+                </a:lnTo>
+                <a:lnTo>
+                  <a:pt x="1651772" y="130030"/>
                 </a:lnTo>
                 <a:lnTo>
                   <a:pt x="2064715" y="0"/>
@@ -51483,7 +51483,7 @@
                 </a:solidFill>
                 <a:latin typeface="Kanit"/>
               </a:rPr>
-              <a:t>฿85.88 /ร้อยผล · C·W</a:t>
+              <a:t>฿120.00 /ร้อยผล · C·W</a:t>
             </a:r>
           </a:p>
         </p:txBody>
@@ -51522,7 +51522,7 @@
                 </a:solidFill>
                 <a:latin typeface="Kanit"/>
               </a:rPr>
-              <a:t>YoY +126.5%</a:t>
+              <a:t>YoY +96.8%</a:t>
             </a:r>
           </a:p>
         </p:txBody>
@@ -51561,7 +51561,7 @@
                 </a:solidFill>
                 <a:latin typeface="Kanit"/>
               </a:rPr>
-              <a:t>6m −44.6%</a:t>
+              <a:t>6m −42.9%</a:t>
             </a:r>
           </a:p>
         </p:txBody>
@@ -51632,22 +51632,22 @@
             <a:pathLst>
               <a:path w="2064715" h="457200">
                 <a:moveTo>
-                  <a:pt x="0" y="375183"/>
+                  <a:pt x="0" y="213177"/>
                 </a:moveTo>
                 <a:lnTo>
-                  <a:pt x="412943" y="213449"/>
-                </a:lnTo>
-                <a:lnTo>
-                  <a:pt x="825886" y="0"/>
-                </a:lnTo>
-                <a:lnTo>
-                  <a:pt x="1238829" y="260067"/>
-                </a:lnTo>
-                <a:lnTo>
-                  <a:pt x="1651772" y="443905"/>
-                </a:lnTo>
-                <a:lnTo>
-                  <a:pt x="2064715" y="457200"/>
+                  <a:pt x="412943" y="0"/>
+                </a:lnTo>
+                <a:lnTo>
+                  <a:pt x="825886" y="259737"/>
+                </a:lnTo>
+                <a:lnTo>
+                  <a:pt x="1238829" y="443342"/>
+                </a:lnTo>
+                <a:lnTo>
+                  <a:pt x="1651772" y="457200"/>
+                </a:lnTo>
+                <a:lnTo>
+                  <a:pt x="2064715" y="434102"/>
                 </a:lnTo>
               </a:path>
             </a:pathLst>
@@ -51690,7 +51690,7 @@
         </p:nvSpPr>
         <p:spPr>
           <a:xfrm>
-            <a:off x="4783226" y="5074919"/>
+            <a:off x="4783226" y="5051821"/>
             <a:ext cx="82296" cy="82296"/>
           </a:xfrm>
           <a:prstGeom prst="roundRect">
@@ -51886,7 +51886,7 @@
                 </a:solidFill>
                 <a:latin typeface="Kanit"/>
               </a:rPr>
-              <a:t>Farm-gate prices MEASURED — NABC daily quotes, monthly means, in baht as published (no currency conversion); newest quote 2026-08-13, history vintage 2026-08-02. Farm gate (ราคาที่เกษตรกรขายได้) is what the grower is paid at first sale, before trading, milling or transport take a cut — not the world index and not a supermarket price. Belts are an ESTIMATED read of where each commodity is produced, and they overlap. Sugar is OCSB's announced season price, one point a year, so it has no six-month move to show.</a:t>
+              <a:t>Farm-gate prices MEASURED — NABC daily quotes, monthly means, in baht as published (no currency conversion); newest quote 2026-08-20, history vintage 2026-08-17. Farm gate (ราคาที่เกษตรกรขายได้) is what the grower is paid at first sale, before trading, milling or transport take a cut — not the world index and not a supermarket price. Belts are an ESTIMATED read of where each commodity is produced, and they overlap. Sugar is OCSB's announced season price, one point a year, so it has no six-month move to show.</a:t>
             </a:r>
           </a:p>
         </p:txBody>
@@ -52543,7 +52543,7 @@
                           </a:solidFill>
                           <a:latin typeface="Kanit"/>
                         </a:rPr>
-                        <a:t>+9.1%</a:t>
+                        <a:t>+9.3%</a:t>
                       </a:r>
                     </a:p>
                   </a:txBody>
@@ -52775,7 +52775,7 @@
                           </a:solidFill>
                           <a:latin typeface="Kanit"/>
                         </a:rPr>
-                        <a:t>+12.8%</a:t>
+                        <a:t>+10.5%</a:t>
                       </a:r>
                     </a:p>
                   </a:txBody>
@@ -53007,7 +53007,7 @@
                           </a:solidFill>
                           <a:latin typeface="Kanit"/>
                         </a:rPr>
-                        <a:t>+9.4%</a:t>
+                        <a:t>+9.6%</a:t>
                       </a:r>
                     </a:p>
                   </a:txBody>
@@ -53239,7 +53239,7 @@
                           </a:solidFill>
                           <a:latin typeface="Kanit"/>
                         </a:rPr>
-                        <a:t>+9.3%</a:t>
+                        <a:t>+9.2%</a:t>
                       </a:r>
                     </a:p>
                   </a:txBody>
@@ -53471,7 +53471,7 @@
                           </a:solidFill>
                           <a:latin typeface="Kanit"/>
                         </a:rPr>
-                        <a:t>+14.5%</a:t>
+                        <a:t>+10.7%</a:t>
                       </a:r>
                     </a:p>
                   </a:txBody>

--- a/docs/decks/mcom-2026-08-05-macro.pptx
+++ b/docs/decks/mcom-2026-08-05-macro.pptx
@@ -6240,7 +6240,7 @@
                 </a:solidFill>
                 <a:latin typeface="Kanit"/>
               </a:rPr>
-              <a:t>141</a:t>
+              <a:t>134</a:t>
             </a:r>
           </a:p>
         </p:txBody>
@@ -6279,7 +6279,7 @@
                 </a:solidFill>
                 <a:latin typeface="Kanit"/>
               </a:rPr>
-              <a:t>of 796 (17.7%) · live · 2026-08-22</a:t>
+              <a:t>of 795 (16.9%) · live · 2026-08-25</a:t>
             </a:r>
           </a:p>
         </p:txBody>
@@ -6405,7 +6405,7 @@
                 </a:solidFill>
                 <a:latin typeface="Kanit"/>
               </a:rPr>
-              <a:t>17</a:t>
+              <a:t>15</a:t>
             </a:r>
           </a:p>
         </p:txBody>
@@ -6444,7 +6444,7 @@
                 </a:solidFill>
                 <a:latin typeface="Kanit"/>
               </a:rPr>
-              <a:t>latest daily reading · 2026-08-22</a:t>
+              <a:t>latest daily reading · 2026-08-25</a:t>
             </a:r>
           </a:p>
         </p:txBody>
@@ -7882,7 +7882,7 @@
                           </a:solidFill>
                           <a:latin typeface="Kanit"/>
                         </a:rPr>
-                        <a:t>น่าน</a:t>
+                        <a:t>มุกดาหาร</a:t>
                       </a:r>
                     </a:p>
                   </a:txBody>
@@ -7905,7 +7905,7 @@
                           </a:solidFill>
                           <a:latin typeface="Kanit"/>
                         </a:rPr>
-                        <a:t>215</a:t>
+                        <a:t>18</a:t>
                       </a:r>
                     </a:p>
                   </a:txBody>
@@ -7928,7 +7928,7 @@
                           </a:solidFill>
                           <a:latin typeface="Kanit"/>
                         </a:rPr>
-                        <a:t>68</a:t>
+                        <a:t>37</a:t>
                       </a:r>
                     </a:p>
                   </a:txBody>
@@ -7951,7 +7951,7 @@
                           </a:solidFill>
                           <a:latin typeface="Kanit"/>
                         </a:rPr>
-                        <a:t>1.9%</a:t>
+                        <a:t>5.6%</a:t>
                       </a:r>
                     </a:p>
                   </a:txBody>
@@ -7974,7 +7974,7 @@
                           </a:solidFill>
                           <a:latin typeface="Kanit"/>
                         </a:rPr>
-                        <a:t>4/28</a:t>
+                        <a:t>2/2</a:t>
                       </a:r>
                     </a:p>
                   </a:txBody>
@@ -8022,7 +8022,7 @@
                           </a:solidFill>
                           <a:latin typeface="Kanit"/>
                         </a:rPr>
-                        <a:t>นครพนม</a:t>
+                        <a:t>สกลนคร</a:t>
                       </a:r>
                     </a:p>
                   </a:txBody>
@@ -8045,7 +8045,7 @@
                           </a:solidFill>
                           <a:latin typeface="Kanit"/>
                         </a:rPr>
-                        <a:t>28</a:t>
+                        <a:t>38</a:t>
                       </a:r>
                     </a:p>
                   </a:txBody>
@@ -8114,7 +8114,7 @@
                           </a:solidFill>
                           <a:latin typeface="Kanit"/>
                         </a:rPr>
-                        <a:t>8/14</a:t>
+                        <a:t>7/13</a:t>
                       </a:r>
                     </a:p>
                   </a:txBody>
@@ -8162,7 +8162,7 @@
                           </a:solidFill>
                           <a:latin typeface="Kanit"/>
                         </a:rPr>
-                        <a:t>มุกดาหาร</a:t>
+                        <a:t>สมุทรปราการ</a:t>
                       </a:r>
                     </a:p>
                   </a:txBody>
@@ -8185,7 +8185,7 @@
                           </a:solidFill>
                           <a:latin typeface="Kanit"/>
                         </a:rPr>
-                        <a:t>17</a:t>
+                        <a:t>16</a:t>
                       </a:r>
                     </a:p>
                   </a:txBody>
@@ -8208,7 +8208,7 @@
                           </a:solidFill>
                           <a:latin typeface="Kanit"/>
                         </a:rPr>
-                        <a:t>12</a:t>
+                        <a:t>1</a:t>
                       </a:r>
                     </a:p>
                   </a:txBody>
@@ -8254,7 +8254,7 @@
                           </a:solidFill>
                           <a:latin typeface="Kanit"/>
                         </a:rPr>
-                        <a:t>2/2</a:t>
+                        <a:t>4/5</a:t>
                       </a:r>
                     </a:p>
                   </a:txBody>
@@ -8302,7 +8302,7 @@
                           </a:solidFill>
                           <a:latin typeface="Kanit"/>
                         </a:rPr>
-                        <a:t>สกลนคร</a:t>
+                        <a:t>นราธิวาส</a:t>
                       </a:r>
                     </a:p>
                   </a:txBody>
@@ -8325,7 +8325,7 @@
                           </a:solidFill>
                           <a:latin typeface="Kanit"/>
                         </a:rPr>
-                        <a:t>38</a:t>
+                        <a:t>67</a:t>
                       </a:r>
                     </a:p>
                   </a:txBody>
@@ -8348,7 +8348,7 @@
                           </a:solidFill>
                           <a:latin typeface="Kanit"/>
                         </a:rPr>
-                        <a:t>22</a:t>
+                        <a:t>40</a:t>
                       </a:r>
                     </a:p>
                   </a:txBody>
@@ -8367,11 +8367,11 @@
                       <a:r>
                         <a:rPr sz="900" b="1">
                           <a:solidFill>
-                            <a:srgbClr val="606060"/>
-                          </a:solidFill>
-                          <a:latin typeface="Kanit"/>
-                        </a:rPr>
-                        <a:t>0.0%</a:t>
+                            <a:srgbClr val="F5C242"/>
+                          </a:solidFill>
+                          <a:latin typeface="Kanit"/>
+                        </a:rPr>
+                        <a:t>4.5%</a:t>
                       </a:r>
                     </a:p>
                   </a:txBody>
@@ -8394,7 +8394,7 @@
                           </a:solidFill>
                           <a:latin typeface="Kanit"/>
                         </a:rPr>
-                        <a:t>7/13</a:t>
+                        <a:t>5/10</a:t>
                       </a:r>
                     </a:p>
                   </a:txBody>
@@ -8413,11 +8413,11 @@
                       <a:r>
                         <a:rPr sz="900" b="1">
                           <a:solidFill>
-                            <a:srgbClr val="CC0000"/>
-                          </a:solidFill>
-                          <a:latin typeface="Kanit"/>
-                        </a:rPr>
-                        <a:t>5</a:t>
+                            <a:srgbClr val="F5C242"/>
+                          </a:solidFill>
+                          <a:latin typeface="Kanit"/>
+                        </a:rPr>
+                        <a:t>4</a:t>
                       </a:r>
                     </a:p>
                   </a:txBody>
@@ -8442,7 +8442,7 @@
                           </a:solidFill>
                           <a:latin typeface="Kanit"/>
                         </a:rPr>
-                        <a:t>เพชรบูรณ์</a:t>
+                        <a:t>สงขลา</a:t>
                       </a:r>
                     </a:p>
                   </a:txBody>
@@ -8465,7 +8465,7 @@
                           </a:solidFill>
                           <a:latin typeface="Kanit"/>
                         </a:rPr>
-                        <a:t>80</a:t>
+                        <a:t>95</a:t>
                       </a:r>
                     </a:p>
                   </a:txBody>
@@ -8488,7 +8488,7 @@
                           </a:solidFill>
                           <a:latin typeface="Kanit"/>
                         </a:rPr>
-                        <a:t>18</a:t>
+                        <a:t>40</a:t>
                       </a:r>
                     </a:p>
                   </a:txBody>
@@ -8507,11 +8507,11 @@
                       <a:r>
                         <a:rPr sz="900" b="1">
                           <a:solidFill>
-                            <a:srgbClr val="606060"/>
-                          </a:solidFill>
-                          <a:latin typeface="Kanit"/>
-                        </a:rPr>
-                        <a:t>0.0%</a:t>
+                            <a:srgbClr val="F5C242"/>
+                          </a:solidFill>
+                          <a:latin typeface="Kanit"/>
+                        </a:rPr>
+                        <a:t>2.1%</a:t>
                       </a:r>
                     </a:p>
                   </a:txBody>
@@ -8534,7 +8534,7 @@
                           </a:solidFill>
                           <a:latin typeface="Kanit"/>
                         </a:rPr>
-                        <a:t>4/9</a:t>
+                        <a:t>3/19</a:t>
                       </a:r>
                     </a:p>
                   </a:txBody>
@@ -8553,11 +8553,11 @@
                       <a:r>
                         <a:rPr sz="900" b="1">
                           <a:solidFill>
-                            <a:srgbClr val="CC0000"/>
-                          </a:solidFill>
-                          <a:latin typeface="Kanit"/>
-                        </a:rPr>
-                        <a:t>5</a:t>
+                            <a:srgbClr val="F5C242"/>
+                          </a:solidFill>
+                          <a:latin typeface="Kanit"/>
+                        </a:rPr>
+                        <a:t>4</a:t>
                       </a:r>
                     </a:p>
                   </a:txBody>
@@ -8582,7 +8582,7 @@
                           </a:solidFill>
                           <a:latin typeface="Kanit"/>
                         </a:rPr>
-                        <a:t>กาญจนบุรี</a:t>
+                        <a:t>พะเยา</a:t>
                       </a:r>
                     </a:p>
                   </a:txBody>
@@ -8605,7 +8605,7 @@
                           </a:solidFill>
                           <a:latin typeface="Kanit"/>
                         </a:rPr>
-                        <a:t>93</a:t>
+                        <a:t>124</a:t>
                       </a:r>
                     </a:p>
                   </a:txBody>
@@ -8628,7 +8628,7 @@
                           </a:solidFill>
                           <a:latin typeface="Kanit"/>
                         </a:rPr>
-                        <a:t>45</a:t>
+                        <a:t>39</a:t>
                       </a:r>
                     </a:p>
                   </a:txBody>
@@ -8651,7 +8651,7 @@
                           </a:solidFill>
                           <a:latin typeface="Kanit"/>
                         </a:rPr>
-                        <a:t>6.5%</a:t>
+                        <a:t>1.6%</a:t>
                       </a:r>
                     </a:p>
                   </a:txBody>
@@ -8674,7 +8674,7 @@
                           </a:solidFill>
                           <a:latin typeface="Kanit"/>
                         </a:rPr>
-                        <a:t>4/26</a:t>
+                        <a:t>3/13</a:t>
                       </a:r>
                     </a:p>
                   </a:txBody>
@@ -8909,7 +8909,7 @@
                 </a:solidFill>
                 <a:latin typeface="Kanit"/>
               </a:rPr>
-              <a:t>Planted area MEASURED (OAE — 3,295 amphoe crop rows). Drought is a MODELLED SPEI index from rainfall and evapotranspiration, refreshed monthly, retrieved 2026-07-20 — the best national-coverage signal available, but nobody has walked those districts. Rain and river telemetry MEASURED (ThaiWater, live, pulled daily and accumulated — a missed pull leaves a gap rather than an invented point) · rain to 2026-08-22, river to 2026-08-22. Structural flood exposure MEASURED (GISTDA 1:50,000 repeated-flooding census, 2005-2016 — a 12-year ground record, not a forecast).</a:t>
+              <a:t>Planted area MEASURED (OAE — 3,295 amphoe crop rows). Drought is a MODELLED SPEI index from rainfall and evapotranspiration, refreshed monthly, retrieved 2026-07-20 — the best national-coverage signal available, but nobody has walked those districts. Rain and river telemetry MEASURED (ThaiWater, live, pulled daily and accumulated — a missed pull leaves a gap rather than an invented point) · rain to 2026-08-25, river to 2026-08-25. Structural flood exposure MEASURED (GISTDA 1:50,000 repeated-flooding census, 2005-2016 — a 12-year ground record, not a forecast).</a:t>
             </a:r>
           </a:p>
         </p:txBody>
@@ -31476,7 +31476,7 @@
                 </a:solidFill>
                 <a:latin typeface="Kanit"/>
               </a:rPr>
-              <a:t>Median crop income rose +17.2%, but four provinces fell — all on the coconut (มะพร้าว) belt, worst สมุทรสงคราม at −62.8%.</a:t>
+              <a:t>Median crop income rose +17.0%, but four provinces fell — all on the coconut (มะพร้าว) belt, worst สมุทรสงคราม at −62.5%.</a:t>
             </a:r>
           </a:p>
         </p:txBody>
@@ -32047,7 +32047,7 @@
                 </a:solidFill>
                 <a:latin typeface="Kanit"/>
               </a:rPr>
-              <a:t>Vintages — world prices 2026M06 · Thai farm gate 2026-08-20 · Thai price history 2026-08-17 · crop cost of production OAE Cai-up 2568 (crop year 2568/69, OAE forecast Mar 2569) · drought 2026-06-21 · CPI 2026-05 · GDP 2026-Q1 · IMF WEO 2026 · resale index 2026-05 · registrations to 2026-01 · household debt NSO SES 2566 · wages NSO LFS 2568 · telemetry 2026-08-22.</a:t>
+              <a:t>Vintages — world prices 2026M06 · Thai farm gate 2026-08-24 · Thai price history 2026-08-23 · crop cost of production OAE Cai-up 2568 (crop year 2568/69, OAE forecast Mar 2569) · drought 2026-06-21 · CPI 2026-05 · GDP 2026-Q1 · IMF WEO 2026 · resale index 2026-05 · registrations to 2026-01 · household debt NSO SES 2566 · wages NSO LFS 2568 · telemetry 2026-08-25.</a:t>
             </a:r>
           </a:p>
         </p:txBody>
@@ -32546,7 +32546,7 @@
               <a:t>Not on the world index — the farm gate (ราคาที่เกษตรกรขายได้) says otherwise.
 • Five of seventeen Thai farm-gate prices are falling year on year.
 • Beef: farm gate −6.1% vs world index +8.8%.
-• Margin over price: a 26% price move becomes an 86% swing in crop income.</a:t>
+• Margin over price: a 26% price move becomes an 84% swing in crop income.</a:t>
             </a:r>
           </a:p>
         </p:txBody>
@@ -33912,7 +33912,7 @@
                 </a:solidFill>
                 <a:latin typeface="Kanit"/>
               </a:rPr>
-              <a:t>33.02</a:t>
+              <a:t>32.69</a:t>
             </a:r>
           </a:p>
         </p:txBody>
@@ -33951,7 +33951,7 @@
                 </a:solidFill>
                 <a:latin typeface="Kanit"/>
               </a:rPr>
-              <a:t>ECB reference · 2026-08-17</a:t>
+              <a:t>ECB reference · 2026-08-24</a:t>
             </a:r>
           </a:p>
         </p:txBody>
@@ -35798,7 +35798,7 @@
                 </a:solidFill>
                 <a:latin typeface="Kanit"/>
               </a:rPr>
-              <a:t>NESDC 2026-Q1 · TPSO 2026-05 · Bank of Thailand 2026-06 · BIS 2025-Q4 · ECB 2026-08-17, each pulled from the publishing agency. IMF World Economic Outlook 2026 (pulled 2026-07-25) for the peer table. BoT published NPL ratio — 4.48% at 2026-Q1, 4.33% the quarter before, +0.24pp on the year, 3.08% low in 2021-Q1.</a:t>
+              <a:t>NESDC 2026-Q1 · TPSO 2026-05 · Bank of Thailand 2026-06 · BIS 2025-Q4 · ECB 2026-08-24, each pulled from the publishing agency. IMF World Economic Outlook 2026 (pulled 2026-07-25) for the peer table. BoT published NPL ratio — 4.48% at 2026-Q1, 4.33% the quarter before, +0.24pp on the year, 3.08% low in 2021-Q1.</a:t>
             </a:r>
           </a:p>
         </p:txBody>
@@ -37087,7 +37087,7 @@
                 </a:solidFill>
                 <a:latin typeface="Kanit"/>
               </a:rPr>
-              <a:t>338 of 928 districts · 141 of 796 rivers high</a:t>
+              <a:t>338 of 928 districts · 134 of 795 rivers high</a:t>
             </a:r>
           </a:p>
         </p:txBody>
@@ -37859,7 +37859,7 @@
                           </a:solidFill>
                           <a:latin typeface="Kanit"/>
                         </a:rPr>
-                        <a:t>33/155</a:t>
+                        <a:t>29/156</a:t>
                       </a:r>
                     </a:p>
                   </a:txBody>
@@ -38091,7 +38091,7 @@
                           </a:solidFill>
                           <a:latin typeface="Kanit"/>
                         </a:rPr>
-                        <a:t>36/275</a:t>
+                        <a:t>29/275</a:t>
                       </a:r>
                     </a:p>
                   </a:txBody>
@@ -38555,7 +38555,7 @@
                           </a:solidFill>
                           <a:latin typeface="Kanit"/>
                         </a:rPr>
-                        <a:t>7/52</a:t>
+                        <a:t>8/51</a:t>
                       </a:r>
                     </a:p>
                   </a:txBody>
@@ -38787,7 +38787,7 @@
                           </a:solidFill>
                           <a:latin typeface="Kanit"/>
                         </a:rPr>
-                        <a:t>39/146</a:t>
+                        <a:t>42/145</a:t>
                       </a:r>
                     </a:p>
                   </a:txBody>
@@ -39936,7 +39936,7 @@
                           </a:solidFill>
                           <a:latin typeface="Kanit"/>
                         </a:rPr>
-                        <a:t>−67.2%</a:t>
+                        <a:t>−66.9%</a:t>
                       </a:r>
                     </a:p>
                   </a:txBody>
@@ -39959,7 +39959,7 @@
                           </a:solidFill>
                           <a:latin typeface="Kanit"/>
                         </a:rPr>
-                        <a:t>−48.8%</a:t>
+                        <a:t>−50.1%</a:t>
                       </a:r>
                     </a:p>
                   </a:txBody>
@@ -40791,7 +40791,7 @@
                 </a:solidFill>
                 <a:latin typeface="Kanit"/>
               </a:rPr>
-              <a:t>Prices MEASURED — NABC daily quotes for the Thai farm gate, OCSB announced cane price; newest quote 2026-08-20. The six-month move is computed from NABC's own monthly series (thai_price_history, vintage 2026-08-17); a crop with no monthly series is marked, never estimated. Belt is an ESTIMATED read of where each commodity is produced, and belts overlap. Farming accounts are OURS and MEASURED — accounts whose recorded occupation is เกษตร in the belt provinces, from the 382,735-account tape at 2026-07; no cell below 30 accounts is published. They live where the crop grows; they are not confirmed to grow it.</a:t>
+              <a:t>Prices MEASURED — NABC daily quotes for the Thai farm gate, OCSB announced cane price; newest quote 2026-08-24. The six-month move is computed from NABC's own monthly series (thai_price_history, vintage 2026-08-23); a crop with no monthly series is marked, never estimated. Belt is an ESTIMATED read of where each commodity is produced, and belts overlap. Farming accounts are OURS and MEASURED — accounts whose recorded occupation is เกษตร in the belt provinces, from the 382,735-account tape at 2026-07; no cell below 30 accounts is published. They live where the crop grows; they are not confirmed to grow it.</a:t>
             </a:r>
           </a:p>
         </p:txBody>
@@ -43419,7 +43419,7 @@
                           </a:solidFill>
                           <a:latin typeface="Kanit"/>
                         </a:rPr>
-                        <a:t>91.81</a:t>
+                        <a:t>90.86</a:t>
                       </a:r>
                     </a:p>
                   </a:txBody>
@@ -43559,7 +43559,7 @@
                           </a:solidFill>
                           <a:latin typeface="Kanit"/>
                         </a:rPr>
-                        <a:t>15,423</a:t>
+                        <a:t>15,264</a:t>
                       </a:r>
                     </a:p>
                   </a:txBody>
@@ -43699,7 +43699,7 @@
                           </a:solidFill>
                           <a:latin typeface="Kanit"/>
                         </a:rPr>
-                        <a:t>36,361</a:t>
+                        <a:t>35,986</a:t>
                       </a:r>
                     </a:p>
                   </a:txBody>
@@ -43839,7 +43839,7 @@
                           </a:solidFill>
                           <a:latin typeface="Kanit"/>
                         </a:rPr>
-                        <a:t>11.23</a:t>
+                        <a:t>11.11</a:t>
                       </a:r>
                     </a:p>
                   </a:txBody>
@@ -44058,7 +44058,7 @@
                 </a:solidFill>
                 <a:latin typeface="Kanit"/>
               </a:rPr>
-              <a:t>World Bank Pink Sheet nominal-USD monthly prices, vintage 2026M07 (60 observations per series, rebased to 100 at 2021-07 for the chart — units differ, so raw levels can’t share an axis). Baht conversion at the ECB reference rate USD/THB 33.025, 2026-08-17. Planted-area share MEASURED, OAE/DOAE crop mix (crop_mix.json). Nominal, not deflated: five years of Thai CPI sit under every ‘vs 5 yrs ago’ figure.</a:t>
+              <a:t>World Bank Pink Sheet nominal-USD monthly prices, vintage 2026M07 (60 observations per series, rebased to 100 at 2021-07 for the chart — units differ, so raw levels can’t share an axis). Baht conversion at the ECB reference rate USD/THB 32.685, 2026-08-24. Planted-area share MEASURED, OAE/DOAE crop mix (crop_mix.json). Nominal, not deflated: five years of Thai CPI sit under every ‘vs 5 yrs ago’ figure.</a:t>
             </a:r>
           </a:p>
         </p:txBody>
@@ -44679,7 +44679,7 @@
                 </a:solidFill>
                 <a:latin typeface="Kanit"/>
               </a:rPr>
-              <a:t>coconut −67.2%, pineapple −18.4%, sugarcane −17.9% year on year</a:t>
+              <a:t>coconut −66.9%, pineapple −18.4%, sugarcane −17.9% year on year</a:t>
             </a:r>
           </a:p>
         </p:txBody>
@@ -44805,7 +44805,7 @@
                 </a:solidFill>
                 <a:latin typeface="Kanit"/>
               </a:rPr>
-              <a:t>+17.2%</a:t>
+              <a:t>+17.0%</a:t>
             </a:r>
           </a:p>
         </p:txBody>
@@ -45279,7 +45279,7 @@
                           </a:solidFill>
                           <a:latin typeface="Kanit"/>
                         </a:rPr>
-                        <a:t>+6.8%</a:t>
+                        <a:t>+7.0%</a:t>
                       </a:r>
                     </a:p>
                   </a:txBody>
@@ -45348,7 +45348,7 @@
                           </a:solidFill>
                           <a:latin typeface="Kanit"/>
                         </a:rPr>
-                        <a:t>-62.8%</a:t>
+                        <a:t>-62.5%</a:t>
                       </a:r>
                     </a:p>
                   </a:txBody>
@@ -45419,7 +45419,7 @@
                           </a:solidFill>
                           <a:latin typeface="Kanit"/>
                         </a:rPr>
-                        <a:t>+15.9%</a:t>
+                        <a:t>+16.0%</a:t>
                       </a:r>
                     </a:p>
                   </a:txBody>
@@ -45488,7 +45488,7 @@
                           </a:solidFill>
                           <a:latin typeface="Kanit"/>
                         </a:rPr>
-                        <a:t>+10.2%</a:t>
+                        <a:t>+10.3%</a:t>
                       </a:r>
                     </a:p>
                   </a:txBody>
@@ -45559,7 +45559,7 @@
                           </a:solidFill>
                           <a:latin typeface="Kanit"/>
                         </a:rPr>
-                        <a:t>+17.2%</a:t>
+                        <a:t>+17.5%</a:t>
                       </a:r>
                     </a:p>
                   </a:txBody>
@@ -45628,7 +45628,7 @@
                           </a:solidFill>
                           <a:latin typeface="Kanit"/>
                         </a:rPr>
-                        <a:t>+8.8%</a:t>
+                        <a:t>+8.9%</a:t>
                       </a:r>
                     </a:p>
                   </a:txBody>
@@ -45699,7 +45699,7 @@
                           </a:solidFill>
                           <a:latin typeface="Kanit"/>
                         </a:rPr>
-                        <a:t>+25.7%</a:t>
+                        <a:t>+25.2%</a:t>
                       </a:r>
                     </a:p>
                   </a:txBody>
@@ -45768,7 +45768,7 @@
                           </a:solidFill>
                           <a:latin typeface="Kanit"/>
                         </a:rPr>
-                        <a:t>+11.3%</a:t>
+                        <a:t>+11.6%</a:t>
                       </a:r>
                     </a:p>
                   </a:txBody>
@@ -45839,7 +45839,7 @@
                           </a:solidFill>
                           <a:latin typeface="Kanit"/>
                         </a:rPr>
-                        <a:t>+35.8%</a:t>
+                        <a:t>+34.8%</a:t>
                       </a:r>
                     </a:p>
                   </a:txBody>
@@ -45908,7 +45908,7 @@
                           </a:solidFill>
                           <a:latin typeface="Kanit"/>
                         </a:rPr>
-                        <a:t>+27.9%</a:t>
+                        <a:t>+27.1%</a:t>
                       </a:r>
                     </a:p>
                   </a:txBody>
@@ -46084,7 +46084,7 @@
                 </a:solidFill>
                 <a:latin typeface="Kanit"/>
               </a:rPr>
-              <a:t>•  +41% rubber, +69% cassava, +24% palm, +14% rice at the farm gate. Crop income rose in every region.
+              <a:t>•  +40% rubber, +72% cassava, +23% palm, +14% rice at the farm gate. Crop income rose in every region.
 •  Four provinces fell — all coconut, all on the western gulf. Coconut price is down 67%.
 •  A gain on paper is not cash yet — the next table nets prices against cost.</a:t>
             </a:r>
@@ -46387,7 +46387,7 @@
                           </a:solidFill>
                           <a:latin typeface="Kanit"/>
                         </a:rPr>
-                        <a:t>+17.6%</a:t>
+                        <a:t>+18.0%</a:t>
                       </a:r>
                     </a:p>
                   </a:txBody>
@@ -46550,7 +46550,7 @@
                           </a:solidFill>
                           <a:latin typeface="Kanit"/>
                         </a:rPr>
-                        <a:t>+21.7%</a:t>
+                        <a:t>+21.9%</a:t>
                       </a:r>
                     </a:p>
                   </a:txBody>
@@ -46713,7 +46713,7 @@
                           </a:solidFill>
                           <a:latin typeface="Kanit"/>
                         </a:rPr>
-                        <a:t>+11.6%</a:t>
+                        <a:t>+11.9%</a:t>
                       </a:r>
                     </a:p>
                   </a:txBody>
@@ -46876,7 +46876,7 @@
                           </a:solidFill>
                           <a:latin typeface="Kanit"/>
                         </a:rPr>
-                        <a:t>+33.6%</a:t>
+                        <a:t>+32.7%</a:t>
                       </a:r>
                     </a:p>
                   </a:txBody>
@@ -47039,7 +47039,7 @@
                           </a:solidFill>
                           <a:latin typeface="Kanit"/>
                         </a:rPr>
-                        <a:t>+17.2%</a:t>
+                        <a:t>+17.4%</a:t>
                       </a:r>
                     </a:p>
                   </a:txBody>
@@ -47202,7 +47202,7 @@
                           </a:solidFill>
                           <a:latin typeface="Kanit"/>
                         </a:rPr>
-                        <a:t>+15.8%</a:t>
+                        <a:t>+16.0%</a:t>
                       </a:r>
                     </a:p>
                   </a:txBody>
@@ -47985,7 +47985,7 @@
                 </a:solidFill>
                 <a:latin typeface="Kanit"/>
               </a:rPr>
-              <a:t>฿620.00 /ร้อยผล · S·E</a:t>
+              <a:t>฿606.15 /ร้อยผล · S·E</a:t>
             </a:r>
           </a:p>
         </p:txBody>
@@ -48024,7 +48024,7 @@
                 </a:solidFill>
                 <a:latin typeface="Kanit"/>
               </a:rPr>
-              <a:t>YoY −67.2%</a:t>
+              <a:t>YoY −66.9%</a:t>
             </a:r>
           </a:p>
         </p:txBody>
@@ -48063,7 +48063,7 @@
                 </a:solidFill>
                 <a:latin typeface="Kanit"/>
               </a:rPr>
-              <a:t>6m −48.8%</a:t>
+              <a:t>6m −50.1%</a:t>
             </a:r>
           </a:p>
         </p:txBody>
@@ -48137,19 +48137,19 @@
                   <a:pt x="0" y="0"/>
                 </a:moveTo>
                 <a:lnTo>
-                  <a:pt x="412943" y="170015"/>
-                </a:lnTo>
-                <a:lnTo>
-                  <a:pt x="825886" y="147424"/>
-                </a:lnTo>
-                <a:lnTo>
-                  <a:pt x="1238829" y="401963"/>
+                  <a:pt x="412943" y="167653"/>
+                </a:lnTo>
+                <a:lnTo>
+                  <a:pt x="825886" y="145107"/>
+                </a:lnTo>
+                <a:lnTo>
+                  <a:pt x="1238829" y="402654"/>
                 </a:lnTo>
                 <a:lnTo>
                   <a:pt x="1651772" y="457200"/>
                 </a:lnTo>
                 <a:lnTo>
-                  <a:pt x="2064715" y="387883"/>
+                  <a:pt x="2064715" y="401204"/>
                 </a:lnTo>
               </a:path>
             </a:pathLst>
@@ -48192,7 +48192,7 @@
         </p:nvSpPr>
         <p:spPr>
           <a:xfrm>
-            <a:off x="2480767" y="2792755"/>
+            <a:off x="2480767" y="2806076"/>
             <a:ext cx="82296" cy="82296"/>
           </a:xfrm>
           <a:prstGeom prst="roundRect">
@@ -48621,7 +48621,7 @@
                 </a:solidFill>
                 <a:latin typeface="Kanit"/>
               </a:rPr>
-              <a:t>฿143.33 /กก. · S·E coast</a:t>
+              <a:t>฿143.00 /กก. · S·E coast</a:t>
             </a:r>
           </a:p>
         </p:txBody>
@@ -48660,7 +48660,7 @@
                 </a:solidFill>
                 <a:latin typeface="Kanit"/>
               </a:rPr>
-              <a:t>YoY +1.6%</a:t>
+              <a:t>YoY +1.4%</a:t>
             </a:r>
           </a:p>
         </p:txBody>
@@ -48699,7 +48699,7 @@
                 </a:solidFill>
                 <a:latin typeface="Kanit"/>
               </a:rPr>
-              <a:t>6m −1.9%</a:t>
+              <a:t>6m −2.1%</a:t>
             </a:r>
           </a:p>
         </p:txBody>
@@ -48770,19 +48770,19 @@
             <a:pathLst>
               <a:path w="2064715" h="457200">
                 <a:moveTo>
-                  <a:pt x="0" y="222838"/>
+                  <a:pt x="0" y="217911"/>
                 </a:moveTo>
                 <a:lnTo>
-                  <a:pt x="412943" y="418928"/>
+                  <a:pt x="412943" y="415692"/>
                 </a:lnTo>
                 <a:lnTo>
                   <a:pt x="825886" y="457200"/>
                 </a:lnTo>
                 <a:lnTo>
-                  <a:pt x="1238829" y="423249"/>
-                </a:lnTo>
-                <a:lnTo>
-                  <a:pt x="1651772" y="173867"/>
+                  <a:pt x="1238829" y="420051"/>
+                </a:lnTo>
+                <a:lnTo>
+                  <a:pt x="1651772" y="168518"/>
                 </a:lnTo>
                 <a:lnTo>
                   <a:pt x="2064715" y="0"/>
@@ -48939,7 +48939,7 @@
                 </a:solidFill>
                 <a:latin typeface="Kanit"/>
               </a:rPr>
-              <a:t>฿343.75 /ร้อยฟอง · C·E</a:t>
+              <a:t>฿346.15 /ร้อยฟอง · C·E</a:t>
             </a:r>
           </a:p>
         </p:txBody>
@@ -48978,7 +48978,7 @@
                 </a:solidFill>
                 <a:latin typeface="Kanit"/>
               </a:rPr>
-              <a:t>YoY +2.0%</a:t>
+              <a:t>YoY +3.2%</a:t>
             </a:r>
           </a:p>
         </p:txBody>
@@ -49017,7 +49017,7 @@
                 </a:solidFill>
                 <a:latin typeface="Kanit"/>
               </a:rPr>
-              <a:t>6m +13.6%</a:t>
+              <a:t>6m +14.4%</a:t>
             </a:r>
           </a:p>
         </p:txBody>
@@ -49091,16 +49091,16 @@
                   <a:pt x="0" y="457200"/>
                 </a:moveTo>
                 <a:lnTo>
-                  <a:pt x="412943" y="173996"/>
-                </a:lnTo>
-                <a:lnTo>
-                  <a:pt x="825886" y="173996"/>
-                </a:lnTo>
-                <a:lnTo>
-                  <a:pt x="1238829" y="281558"/>
-                </a:lnTo>
-                <a:lnTo>
-                  <a:pt x="1651772" y="66435"/>
+                  <a:pt x="412943" y="191637"/>
+                </a:lnTo>
+                <a:lnTo>
+                  <a:pt x="825886" y="191637"/>
+                </a:lnTo>
+                <a:lnTo>
+                  <a:pt x="1238829" y="292498"/>
+                </a:lnTo>
+                <a:lnTo>
+                  <a:pt x="1651772" y="90775"/>
                 </a:lnTo>
                 <a:lnTo>
                   <a:pt x="2064715" y="0"/>
@@ -49409,19 +49409,19 @@
                   <a:pt x="0" y="0"/>
                 </a:moveTo>
                 <a:lnTo>
-                  <a:pt x="412943" y="114807"/>
-                </a:lnTo>
-                <a:lnTo>
-                  <a:pt x="825886" y="305815"/>
+                  <a:pt x="412943" y="111737"/>
+                </a:lnTo>
+                <a:lnTo>
+                  <a:pt x="825886" y="304458"/>
                 </a:lnTo>
                 <a:lnTo>
                   <a:pt x="1238829" y="457200"/>
                 </a:lnTo>
                 <a:lnTo>
-                  <a:pt x="1651772" y="244855"/>
-                </a:lnTo>
-                <a:lnTo>
-                  <a:pt x="2064715" y="91439"/>
+                  <a:pt x="1651772" y="242951"/>
+                </a:lnTo>
+                <a:lnTo>
+                  <a:pt x="2064715" y="88159"/>
                 </a:lnTo>
               </a:path>
             </a:pathLst>
@@ -49464,7 +49464,7 @@
         </p:nvSpPr>
         <p:spPr>
           <a:xfrm>
-            <a:off x="11690603" y="2496311"/>
+            <a:off x="11690603" y="2493031"/>
             <a:ext cx="82296" cy="82296"/>
           </a:xfrm>
           <a:prstGeom prst="roundRect">
@@ -49575,7 +49575,7 @@
                 </a:solidFill>
                 <a:latin typeface="Kanit"/>
               </a:rPr>
-              <a:t>฿70.12 /กก. · C·W·E</a:t>
+              <a:t>฿70.33 /กก. · C·W·E</a:t>
             </a:r>
           </a:p>
         </p:txBody>
@@ -49614,7 +49614,7 @@
                 </a:solidFill>
                 <a:latin typeface="Kanit"/>
               </a:rPr>
-              <a:t>YoY +5.4%</a:t>
+              <a:t>YoY +8.8%</a:t>
             </a:r>
           </a:p>
         </p:txBody>
@@ -49653,7 +49653,7 @@
                 </a:solidFill>
                 <a:latin typeface="Kanit"/>
               </a:rPr>
-              <a:t>6m +26.3%</a:t>
+              <a:t>6m +26.7%</a:t>
             </a:r>
           </a:p>
         </p:txBody>
@@ -49724,19 +49724,19 @@
             <a:pathLst>
               <a:path w="2064715" h="457200">
                 <a:moveTo>
-                  <a:pt x="0" y="358828"/>
+                  <a:pt x="0" y="361078"/>
                 </a:moveTo>
                 <a:lnTo>
-                  <a:pt x="412943" y="100410"/>
+                  <a:pt x="412943" y="110564"/>
                 </a:lnTo>
                 <a:lnTo>
                   <a:pt x="825886" y="457200"/>
                 </a:lnTo>
                 <a:lnTo>
-                  <a:pt x="1238829" y="286450"/>
-                </a:lnTo>
-                <a:lnTo>
-                  <a:pt x="1651772" y="170749"/>
+                  <a:pt x="1238829" y="293843"/>
+                </a:lnTo>
+                <a:lnTo>
+                  <a:pt x="1651772" y="177301"/>
                 </a:lnTo>
                 <a:lnTo>
                   <a:pt x="2064715" y="0"/>
@@ -49893,7 +49893,7 @@
                 </a:solidFill>
                 <a:latin typeface="Kanit"/>
               </a:rPr>
-              <a:t>฿17,768 /ตัน · Isan·N·C</a:t>
+              <a:t>฿17,815 /ตัน · Isan·N·C</a:t>
             </a:r>
           </a:p>
         </p:txBody>
@@ -49932,7 +49932,7 @@
                 </a:solidFill>
                 <a:latin typeface="Kanit"/>
               </a:rPr>
-              <a:t>YoY +14.2%</a:t>
+              <a:t>YoY +14.4%</a:t>
             </a:r>
           </a:p>
         </p:txBody>
@@ -49971,7 +49971,7 @@
                 </a:solidFill>
                 <a:latin typeface="Kanit"/>
               </a:rPr>
-              <a:t>6m +8.0%</a:t>
+              <a:t>6m +8.2%</a:t>
             </a:r>
           </a:p>
         </p:txBody>
@@ -50045,16 +50045,16 @@
                   <a:pt x="0" y="457200"/>
                 </a:moveTo>
                 <a:lnTo>
-                  <a:pt x="412943" y="341616"/>
-                </a:lnTo>
-                <a:lnTo>
-                  <a:pt x="825886" y="154005"/>
-                </a:lnTo>
-                <a:lnTo>
-                  <a:pt x="1238829" y="47789"/>
-                </a:lnTo>
-                <a:lnTo>
-                  <a:pt x="1651772" y="27620"/>
+                  <a:pt x="412943" y="349810"/>
+                </a:lnTo>
+                <a:lnTo>
+                  <a:pt x="825886" y="168554"/>
+                </a:lnTo>
+                <a:lnTo>
+                  <a:pt x="1238829" y="54643"/>
+                </a:lnTo>
+                <a:lnTo>
+                  <a:pt x="1651772" y="63603"/>
                 </a:lnTo>
                 <a:lnTo>
                   <a:pt x="2064715" y="0"/>
@@ -50211,7 +50211,7 @@
                 </a:solidFill>
                 <a:latin typeface="Kanit"/>
               </a:rPr>
-              <a:t>฿10.04 /กก. · North</a:t>
+              <a:t>฿9.87 /กก. · North</a:t>
             </a:r>
           </a:p>
         </p:txBody>
@@ -50250,7 +50250,7 @@
                 </a:solidFill>
                 <a:latin typeface="Kanit"/>
               </a:rPr>
-              <a:t>YoY +16.5%</a:t>
+              <a:t>YoY +15.9%</a:t>
             </a:r>
           </a:p>
         </p:txBody>
@@ -50289,7 +50289,7 @@
                 </a:solidFill>
                 <a:latin typeface="Kanit"/>
               </a:rPr>
-              <a:t>6m +12.7%</a:t>
+              <a:t>6m +10.9%</a:t>
             </a:r>
           </a:p>
         </p:txBody>
@@ -50363,19 +50363,19 @@
                   <a:pt x="0" y="457200"/>
                 </a:moveTo>
                 <a:lnTo>
-                  <a:pt x="412943" y="357808"/>
-                </a:lnTo>
-                <a:lnTo>
-                  <a:pt x="825886" y="86967"/>
+                  <a:pt x="412943" y="355874"/>
+                </a:lnTo>
+                <a:lnTo>
+                  <a:pt x="825886" y="86497"/>
                 </a:lnTo>
                 <a:lnTo>
                   <a:pt x="1238829" y="0"/>
                 </a:lnTo>
                 <a:lnTo>
-                  <a:pt x="1651772" y="49695"/>
-                </a:lnTo>
-                <a:lnTo>
-                  <a:pt x="2064715" y="226115"/>
+                  <a:pt x="1651772" y="46955"/>
+                </a:lnTo>
+                <a:lnTo>
+                  <a:pt x="2064715" y="269377"/>
                 </a:lnTo>
               </a:path>
             </a:pathLst>
@@ -50418,7 +50418,7 @@
         </p:nvSpPr>
         <p:spPr>
           <a:xfrm>
-            <a:off x="7085685" y="3737411"/>
+            <a:off x="7085685" y="3780673"/>
             <a:ext cx="82296" cy="82296"/>
           </a:xfrm>
           <a:prstGeom prst="roundRect">
@@ -50529,7 +50529,7 @@
                 </a:solidFill>
                 <a:latin typeface="Kanit"/>
               </a:rPr>
-              <a:t>฿8.65 /กก. · South</a:t>
+              <a:t>฿8.55 /กก. · South</a:t>
             </a:r>
           </a:p>
         </p:txBody>
@@ -50568,7 +50568,7 @@
                 </a:solidFill>
                 <a:latin typeface="Kanit"/>
               </a:rPr>
-              <a:t>YoY +23.9%</a:t>
+              <a:t>YoY +23.3%</a:t>
             </a:r>
           </a:p>
         </p:txBody>
@@ -50607,7 +50607,7 @@
                 </a:solidFill>
                 <a:latin typeface="Kanit"/>
               </a:rPr>
-              <a:t>6m +26.6%</a:t>
+              <a:t>6m +25.0%</a:t>
             </a:r>
           </a:p>
         </p:txBody>
@@ -50678,19 +50678,19 @@
             <a:pathLst>
               <a:path w="2064715" h="457200">
                 <a:moveTo>
-                  <a:pt x="0" y="457200"/>
+                  <a:pt x="0" y="453788"/>
                 </a:moveTo>
                 <a:lnTo>
-                  <a:pt x="412943" y="444499"/>
+                  <a:pt x="412943" y="446964"/>
                 </a:lnTo>
                 <a:lnTo>
                   <a:pt x="825886" y="457200"/>
                 </a:lnTo>
                 <a:lnTo>
-                  <a:pt x="1238829" y="311149"/>
-                </a:lnTo>
-                <a:lnTo>
-                  <a:pt x="1651772" y="114300"/>
+                  <a:pt x="1238829" y="300250"/>
+                </a:lnTo>
+                <a:lnTo>
+                  <a:pt x="1651772" y="85298"/>
                 </a:lnTo>
                 <a:lnTo>
                   <a:pt x="2064715" y="0"/>
@@ -50847,7 +50847,7 @@
                 </a:solidFill>
                 <a:latin typeface="Kanit"/>
               </a:rPr>
-              <a:t>฿81.86 /กก. · S·E</a:t>
+              <a:t>฿81.51 /กก. · S·E</a:t>
             </a:r>
           </a:p>
         </p:txBody>
@@ -50886,7 +50886,7 @@
                 </a:solidFill>
                 <a:latin typeface="Kanit"/>
               </a:rPr>
-              <a:t>YoY +41.4%</a:t>
+              <a:t>YoY +40.2%</a:t>
             </a:r>
           </a:p>
         </p:txBody>
@@ -50925,7 +50925,7 @@
                 </a:solidFill>
                 <a:latin typeface="Kanit"/>
               </a:rPr>
-              <a:t>6m +35.6%</a:t>
+              <a:t>6m +35.1%</a:t>
             </a:r>
           </a:p>
         </p:txBody>
@@ -50999,19 +50999,19 @@
                   <a:pt x="0" y="457200"/>
                 </a:moveTo>
                 <a:lnTo>
-                  <a:pt x="412943" y="286327"/>
-                </a:lnTo>
-                <a:lnTo>
-                  <a:pt x="825886" y="157274"/>
+                  <a:pt x="412943" y="287287"/>
+                </a:lnTo>
+                <a:lnTo>
+                  <a:pt x="825886" y="158892"/>
                 </a:lnTo>
                 <a:lnTo>
                   <a:pt x="1238829" y="0"/>
                 </a:lnTo>
                 <a:lnTo>
-                  <a:pt x="1651772" y="37202"/>
-                </a:lnTo>
-                <a:lnTo>
-                  <a:pt x="2064715" y="104678"/>
+                  <a:pt x="1651772" y="38185"/>
+                </a:lnTo>
+                <a:lnTo>
+                  <a:pt x="2064715" y="115325"/>
                 </a:lnTo>
               </a:path>
             </a:pathLst>
@@ -51054,7 +51054,7 @@
         </p:nvSpPr>
         <p:spPr>
           <a:xfrm>
-            <a:off x="11690603" y="3615974"/>
+            <a:off x="11690603" y="3626621"/>
             <a:ext cx="82296" cy="82296"/>
           </a:xfrm>
           <a:prstGeom prst="roundRect">
@@ -51204,7 +51204,7 @@
                 </a:solidFill>
                 <a:latin typeface="Kanit"/>
               </a:rPr>
-              <a:t>YoY +69.4%</a:t>
+              <a:t>YoY +72.1%</a:t>
             </a:r>
           </a:p>
         </p:txBody>
@@ -51243,7 +51243,7 @@
                 </a:solidFill>
                 <a:latin typeface="Kanit"/>
               </a:rPr>
-              <a:t>6m +49.4%</a:t>
+              <a:t>6m +48.8%</a:t>
             </a:r>
           </a:p>
         </p:txBody>
@@ -51326,7 +51326,7 @@
                   <a:pt x="1238829" y="163586"/>
                 </a:lnTo>
                 <a:lnTo>
-                  <a:pt x="1651772" y="130030"/>
+                  <a:pt x="1651772" y="125835"/>
                 </a:lnTo>
                 <a:lnTo>
                   <a:pt x="2064715" y="0"/>
@@ -51483,7 +51483,7 @@
                 </a:solidFill>
                 <a:latin typeface="Kanit"/>
               </a:rPr>
-              <a:t>฿120.00 /ร้อยผล · C·W</a:t>
+              <a:t>฿129.23 /ร้อยผล · C·W</a:t>
             </a:r>
           </a:p>
         </p:txBody>
@@ -51522,7 +51522,7 @@
                 </a:solidFill>
                 <a:latin typeface="Kanit"/>
               </a:rPr>
-              <a:t>YoY +96.8%</a:t>
+              <a:t>YoY +102.6%</a:t>
             </a:r>
           </a:p>
         </p:txBody>
@@ -51561,7 +51561,7 @@
                 </a:solidFill>
                 <a:latin typeface="Kanit"/>
               </a:rPr>
-              <a:t>6m −42.9%</a:t>
+              <a:t>6m −38.5%</a:t>
             </a:r>
           </a:p>
         </p:txBody>
@@ -51647,7 +51647,7 @@
                   <a:pt x="1651772" y="457200"/>
                 </a:lnTo>
                 <a:lnTo>
-                  <a:pt x="2064715" y="434102"/>
+                  <a:pt x="2064715" y="428011"/>
                 </a:lnTo>
               </a:path>
             </a:pathLst>
@@ -51690,7 +51690,7 @@
         </p:nvSpPr>
         <p:spPr>
           <a:xfrm>
-            <a:off x="4783226" y="5051821"/>
+            <a:off x="4783226" y="5045730"/>
             <a:ext cx="82296" cy="82296"/>
           </a:xfrm>
           <a:prstGeom prst="roundRect">
@@ -51886,7 +51886,7 @@
                 </a:solidFill>
                 <a:latin typeface="Kanit"/>
               </a:rPr>
-              <a:t>Farm-gate prices MEASURED — NABC daily quotes, monthly means, in baht as published (no currency conversion); newest quote 2026-08-20, history vintage 2026-08-17. Farm gate (ราคาที่เกษตรกรขายได้) is what the grower is paid at first sale, before trading, milling or transport take a cut — not the world index and not a supermarket price. Belts are an ESTIMATED read of where each commodity is produced, and they overlap. Sugar is OCSB's announced season price, one point a year, so it has no six-month move to show.</a:t>
+              <a:t>Farm-gate prices MEASURED — NABC daily quotes, monthly means, in baht as published (no currency conversion); newest quote 2026-08-24, history vintage 2026-08-23. Farm gate (ราคาที่เกษตรกรขายได้) is what the grower is paid at first sale, before trading, milling or transport take a cut — not the world index and not a supermarket price. Belts are an ESTIMATED read of where each commodity is produced, and they overlap. Sugar is OCSB's announced season price, one point a year, so it has no six-month move to show.</a:t>
             </a:r>
           </a:p>
         </p:txBody>

--- a/docs/decks/mcom-2026-08-05-macro.pptx
+++ b/docs/decks/mcom-2026-08-05-macro.pptx
@@ -6240,7 +6240,7 @@
                 </a:solidFill>
                 <a:latin typeface="Kanit"/>
               </a:rPr>
-              <a:t>134</a:t>
+              <a:t>133</a:t>
             </a:r>
           </a:p>
         </p:txBody>
@@ -6279,7 +6279,7 @@
                 </a:solidFill>
                 <a:latin typeface="Kanit"/>
               </a:rPr>
-              <a:t>of 795 (16.9%) · live · 2026-08-25</a:t>
+              <a:t>of 795 (16.7%) · live · 2026-08-26</a:t>
             </a:r>
           </a:p>
         </p:txBody>
@@ -6405,7 +6405,7 @@
                 </a:solidFill>
                 <a:latin typeface="Kanit"/>
               </a:rPr>
-              <a:t>15</a:t>
+              <a:t>14</a:t>
             </a:r>
           </a:p>
         </p:txBody>
@@ -6444,7 +6444,7 @@
                 </a:solidFill>
                 <a:latin typeface="Kanit"/>
               </a:rPr>
-              <a:t>latest daily reading · 2026-08-25</a:t>
+              <a:t>latest daily reading · 2026-08-26</a:t>
             </a:r>
           </a:p>
         </p:txBody>
@@ -7882,7 +7882,7 @@
                           </a:solidFill>
                           <a:latin typeface="Kanit"/>
                         </a:rPr>
-                        <a:t>มุกดาหาร</a:t>
+                        <a:t>สกลนคร</a:t>
                       </a:r>
                     </a:p>
                   </a:txBody>
@@ -7905,7 +7905,7 @@
                           </a:solidFill>
                           <a:latin typeface="Kanit"/>
                         </a:rPr>
-                        <a:t>18</a:t>
+                        <a:t>38</a:t>
                       </a:r>
                     </a:p>
                   </a:txBody>
@@ -7928,7 +7928,7 @@
                           </a:solidFill>
                           <a:latin typeface="Kanit"/>
                         </a:rPr>
-                        <a:t>37</a:t>
+                        <a:t>44</a:t>
                       </a:r>
                     </a:p>
                   </a:txBody>
@@ -7951,7 +7951,7 @@
                           </a:solidFill>
                           <a:latin typeface="Kanit"/>
                         </a:rPr>
-                        <a:t>5.6%</a:t>
+                        <a:t>2.6%</a:t>
                       </a:r>
                     </a:p>
                   </a:txBody>
@@ -7974,7 +7974,7 @@
                           </a:solidFill>
                           <a:latin typeface="Kanit"/>
                         </a:rPr>
-                        <a:t>2/2</a:t>
+                        <a:t>7/13</a:t>
                       </a:r>
                     </a:p>
                   </a:txBody>
@@ -8022,7 +8022,7 @@
                           </a:solidFill>
                           <a:latin typeface="Kanit"/>
                         </a:rPr>
-                        <a:t>สกลนคร</a:t>
+                        <a:t>มุกดาหาร</a:t>
                       </a:r>
                     </a:p>
                   </a:txBody>
@@ -8045,7 +8045,7 @@
                           </a:solidFill>
                           <a:latin typeface="Kanit"/>
                         </a:rPr>
-                        <a:t>38</a:t>
+                        <a:t>17</a:t>
                       </a:r>
                     </a:p>
                   </a:txBody>
@@ -8068,7 +8068,7 @@
                           </a:solidFill>
                           <a:latin typeface="Kanit"/>
                         </a:rPr>
-                        <a:t>8</a:t>
+                        <a:t>16</a:t>
                       </a:r>
                     </a:p>
                   </a:txBody>
@@ -8114,7 +8114,7 @@
                           </a:solidFill>
                           <a:latin typeface="Kanit"/>
                         </a:rPr>
-                        <a:t>7/13</a:t>
+                        <a:t>2/2</a:t>
                       </a:r>
                     </a:p>
                   </a:txBody>
@@ -8162,7 +8162,7 @@
                           </a:solidFill>
                           <a:latin typeface="Kanit"/>
                         </a:rPr>
-                        <a:t>สมุทรปราการ</a:t>
+                        <a:t>บึงกาฬ</a:t>
                       </a:r>
                     </a:p>
                   </a:txBody>
@@ -8185,7 +8185,7 @@
                           </a:solidFill>
                           <a:latin typeface="Kanit"/>
                         </a:rPr>
-                        <a:t>16</a:t>
+                        <a:t>10</a:t>
                       </a:r>
                     </a:p>
                   </a:txBody>
@@ -8208,7 +8208,7 @@
                           </a:solidFill>
                           <a:latin typeface="Kanit"/>
                         </a:rPr>
-                        <a:t>1</a:t>
+                        <a:t>41</a:t>
                       </a:r>
                     </a:p>
                   </a:txBody>
@@ -8227,11 +8227,11 @@
                       <a:r>
                         <a:rPr sz="900" b="1">
                           <a:solidFill>
-                            <a:srgbClr val="606060"/>
-                          </a:solidFill>
-                          <a:latin typeface="Kanit"/>
-                        </a:rPr>
-                        <a:t>0.0%</a:t>
+                            <a:srgbClr val="F5C242"/>
+                          </a:solidFill>
+                          <a:latin typeface="Kanit"/>
+                        </a:rPr>
+                        <a:t>20.0%</a:t>
                       </a:r>
                     </a:p>
                   </a:txBody>
@@ -8254,7 +8254,7 @@
                           </a:solidFill>
                           <a:latin typeface="Kanit"/>
                         </a:rPr>
-                        <a:t>4/5</a:t>
+                        <a:t>1/1</a:t>
                       </a:r>
                     </a:p>
                   </a:txBody>
@@ -8273,11 +8273,11 @@
                       <a:r>
                         <a:rPr sz="900" b="1">
                           <a:solidFill>
-                            <a:srgbClr val="CC0000"/>
-                          </a:solidFill>
-                          <a:latin typeface="Kanit"/>
-                        </a:rPr>
-                        <a:t>5</a:t>
+                            <a:srgbClr val="F5C242"/>
+                          </a:solidFill>
+                          <a:latin typeface="Kanit"/>
+                        </a:rPr>
+                        <a:t>4</a:t>
                       </a:r>
                     </a:p>
                   </a:txBody>
@@ -8348,7 +8348,7 @@
                           </a:solidFill>
                           <a:latin typeface="Kanit"/>
                         </a:rPr>
-                        <a:t>40</a:t>
+                        <a:t>78</a:t>
                       </a:r>
                     </a:p>
                   </a:txBody>
@@ -8371,7 +8371,7 @@
                           </a:solidFill>
                           <a:latin typeface="Kanit"/>
                         </a:rPr>
-                        <a:t>4.5%</a:t>
+                        <a:t>9.0%</a:t>
                       </a:r>
                     </a:p>
                   </a:txBody>
@@ -8442,7 +8442,7 @@
                           </a:solidFill>
                           <a:latin typeface="Kanit"/>
                         </a:rPr>
-                        <a:t>สงขลา</a:t>
+                        <a:t>กาญจนบุรี</a:t>
                       </a:r>
                     </a:p>
                   </a:txBody>
@@ -8465,7 +8465,7 @@
                           </a:solidFill>
                           <a:latin typeface="Kanit"/>
                         </a:rPr>
-                        <a:t>95</a:t>
+                        <a:t>87</a:t>
                       </a:r>
                     </a:p>
                   </a:txBody>
@@ -8488,7 +8488,7 @@
                           </a:solidFill>
                           <a:latin typeface="Kanit"/>
                         </a:rPr>
-                        <a:t>40</a:t>
+                        <a:t>66</a:t>
                       </a:r>
                     </a:p>
                   </a:txBody>
@@ -8511,7 +8511,7 @@
                           </a:solidFill>
                           <a:latin typeface="Kanit"/>
                         </a:rPr>
-                        <a:t>2.1%</a:t>
+                        <a:t>6.9%</a:t>
                       </a:r>
                     </a:p>
                   </a:txBody>
@@ -8534,7 +8534,7 @@
                           </a:solidFill>
                           <a:latin typeface="Kanit"/>
                         </a:rPr>
-                        <a:t>3/19</a:t>
+                        <a:t>4/26</a:t>
                       </a:r>
                     </a:p>
                   </a:txBody>
@@ -8582,7 +8582,7 @@
                           </a:solidFill>
                           <a:latin typeface="Kanit"/>
                         </a:rPr>
-                        <a:t>พะเยา</a:t>
+                        <a:t>น่าน</a:t>
                       </a:r>
                     </a:p>
                   </a:txBody>
@@ -8605,7 +8605,7 @@
                           </a:solidFill>
                           <a:latin typeface="Kanit"/>
                         </a:rPr>
-                        <a:t>124</a:t>
+                        <a:t>214</a:t>
                       </a:r>
                     </a:p>
                   </a:txBody>
@@ -8628,7 +8628,7 @@
                           </a:solidFill>
                           <a:latin typeface="Kanit"/>
                         </a:rPr>
-                        <a:t>39</a:t>
+                        <a:t>93</a:t>
                       </a:r>
                     </a:p>
                   </a:txBody>
@@ -8651,7 +8651,7 @@
                           </a:solidFill>
                           <a:latin typeface="Kanit"/>
                         </a:rPr>
-                        <a:t>1.6%</a:t>
+                        <a:t>6.5%</a:t>
                       </a:r>
                     </a:p>
                   </a:txBody>
@@ -8674,7 +8674,7 @@
                           </a:solidFill>
                           <a:latin typeface="Kanit"/>
                         </a:rPr>
-                        <a:t>3/13</a:t>
+                        <a:t>1/28</a:t>
                       </a:r>
                     </a:p>
                   </a:txBody>
@@ -8909,7 +8909,7 @@
                 </a:solidFill>
                 <a:latin typeface="Kanit"/>
               </a:rPr>
-              <a:t>Planted area MEASURED (OAE — 3,295 amphoe crop rows). Drought is a MODELLED SPEI index from rainfall and evapotranspiration, refreshed monthly, retrieved 2026-07-20 — the best national-coverage signal available, but nobody has walked those districts. Rain and river telemetry MEASURED (ThaiWater, live, pulled daily and accumulated — a missed pull leaves a gap rather than an invented point) · rain to 2026-08-25, river to 2026-08-25. Structural flood exposure MEASURED (GISTDA 1:50,000 repeated-flooding census, 2005-2016 — a 12-year ground record, not a forecast).</a:t>
+              <a:t>Planted area MEASURED (OAE — 3,295 amphoe crop rows). Drought is a MODELLED SPEI index from rainfall and evapotranspiration, refreshed monthly, retrieved 2026-07-20 — the best national-coverage signal available, but nobody has walked those districts. Rain and river telemetry MEASURED (ThaiWater, live, pulled daily and accumulated — a missed pull leaves a gap rather than an invented point) · rain to 2026-08-26, river to 2026-08-26. Structural flood exposure MEASURED (GISTDA 1:50,000 repeated-flooding census, 2005-2016 — a 12-year ground record, not a forecast).</a:t>
             </a:r>
           </a:p>
         </p:txBody>
@@ -32047,7 +32047,7 @@
                 </a:solidFill>
                 <a:latin typeface="Kanit"/>
               </a:rPr>
-              <a:t>Vintages — world prices 2026M06 · Thai farm gate 2026-08-24 · Thai price history 2026-08-23 · crop cost of production OAE Cai-up 2568 (crop year 2568/69, OAE forecast Mar 2569) · drought 2026-06-21 · CPI 2026-05 · GDP 2026-Q1 · IMF WEO 2026 · resale index 2026-05 · registrations to 2026-01 · household debt NSO SES 2566 · wages NSO LFS 2568 · telemetry 2026-08-25.</a:t>
+              <a:t>Vintages — world prices 2026M06 · Thai farm gate 2026-08-24 · Thai price history 2026-08-23 · crop cost of production OAE Cai-up 2568 (crop year 2568/69, OAE forecast Mar 2569) · drought 2026-06-21 · CPI 2026-05 · GDP 2026-Q1 · IMF WEO 2026 · resale index 2026-05 · registrations to 2026-01 · household debt NSO SES 2566 · wages NSO LFS 2568 · telemetry 2026-08-26.</a:t>
             </a:r>
           </a:p>
         </p:txBody>
@@ -37087,7 +37087,7 @@
                 </a:solidFill>
                 <a:latin typeface="Kanit"/>
               </a:rPr>
-              <a:t>338 of 928 districts · 134 of 795 rivers high</a:t>
+              <a:t>338 of 928 districts · 133 of 795 rivers high</a:t>
             </a:r>
           </a:p>
         </p:txBody>
@@ -38091,7 +38091,7 @@
                           </a:solidFill>
                           <a:latin typeface="Kanit"/>
                         </a:rPr>
-                        <a:t>29/275</a:t>
+                        <a:t>28/275</a:t>
                       </a:r>
                     </a:p>
                   </a:txBody>
@@ -38555,7 +38555,7 @@
                           </a:solidFill>
                           <a:latin typeface="Kanit"/>
                         </a:rPr>
-                        <a:t>8/51</a:t>
+                        <a:t>7/51</a:t>
                       </a:r>
                     </a:p>
                   </a:txBody>
@@ -38787,7 +38787,7 @@
                           </a:solidFill>
                           <a:latin typeface="Kanit"/>
                         </a:rPr>
-                        <a:t>42/145</a:t>
+                        <a:t>43/145</a:t>
                       </a:r>
                     </a:p>
                   </a:txBody>

--- a/docs/decks/mcom-2026-08-05-macro.pptx
+++ b/docs/decks/mcom-2026-08-05-macro.pptx
@@ -6240,7 +6240,7 @@
                 </a:solidFill>
                 <a:latin typeface="Kanit"/>
               </a:rPr>
-              <a:t>133</a:t>
+              <a:t>126</a:t>
             </a:r>
           </a:p>
         </p:txBody>
@@ -6279,7 +6279,7 @@
                 </a:solidFill>
                 <a:latin typeface="Kanit"/>
               </a:rPr>
-              <a:t>of 795 (16.7%) · live · 2026-08-26</a:t>
+              <a:t>of 795 (15.8%) · live · 2026-08-26</a:t>
             </a:r>
           </a:p>
         </p:txBody>
@@ -6405,7 +6405,7 @@
                 </a:solidFill>
                 <a:latin typeface="Kanit"/>
               </a:rPr>
-              <a:t>14</a:t>
+              <a:t>12</a:t>
             </a:r>
           </a:p>
         </p:txBody>
@@ -7928,7 +7928,7 @@
                           </a:solidFill>
                           <a:latin typeface="Kanit"/>
                         </a:rPr>
-                        <a:t>44</a:t>
+                        <a:t>42</a:t>
                       </a:r>
                     </a:p>
                   </a:txBody>
@@ -8045,7 +8045,7 @@
                           </a:solidFill>
                           <a:latin typeface="Kanit"/>
                         </a:rPr>
-                        <a:t>17</a:t>
+                        <a:t>18</a:t>
                       </a:r>
                     </a:p>
                   </a:txBody>
@@ -8068,7 +8068,7 @@
                           </a:solidFill>
                           <a:latin typeface="Kanit"/>
                         </a:rPr>
-                        <a:t>16</a:t>
+                        <a:t>6</a:t>
                       </a:r>
                     </a:p>
                   </a:txBody>
@@ -8231,7 +8231,7 @@
                           </a:solidFill>
                           <a:latin typeface="Kanit"/>
                         </a:rPr>
-                        <a:t>20.0%</a:t>
+                        <a:t>10.0%</a:t>
                       </a:r>
                     </a:p>
                   </a:txBody>
@@ -8302,7 +8302,7 @@
                           </a:solidFill>
                           <a:latin typeface="Kanit"/>
                         </a:rPr>
-                        <a:t>นราธิวาส</a:t>
+                        <a:t>กาญจนบุรี</a:t>
                       </a:r>
                     </a:p>
                   </a:txBody>
@@ -8325,7 +8325,7 @@
                           </a:solidFill>
                           <a:latin typeface="Kanit"/>
                         </a:rPr>
-                        <a:t>67</a:t>
+                        <a:t>86</a:t>
                       </a:r>
                     </a:p>
                   </a:txBody>
@@ -8348,7 +8348,7 @@
                           </a:solidFill>
                           <a:latin typeface="Kanit"/>
                         </a:rPr>
-                        <a:t>78</a:t>
+                        <a:t>81</a:t>
                       </a:r>
                     </a:p>
                   </a:txBody>
@@ -8371,7 +8371,7 @@
                           </a:solidFill>
                           <a:latin typeface="Kanit"/>
                         </a:rPr>
-                        <a:t>9.0%</a:t>
+                        <a:t>9.3%</a:t>
                       </a:r>
                     </a:p>
                   </a:txBody>
@@ -8394,7 +8394,7 @@
                           </a:solidFill>
                           <a:latin typeface="Kanit"/>
                         </a:rPr>
-                        <a:t>5/10</a:t>
+                        <a:t>4/26</a:t>
                       </a:r>
                     </a:p>
                   </a:txBody>
@@ -8442,7 +8442,7 @@
                           </a:solidFill>
                           <a:latin typeface="Kanit"/>
                         </a:rPr>
-                        <a:t>กาญจนบุรี</a:t>
+                        <a:t>นราธิวาส</a:t>
                       </a:r>
                     </a:p>
                   </a:txBody>
@@ -8465,7 +8465,7 @@
                           </a:solidFill>
                           <a:latin typeface="Kanit"/>
                         </a:rPr>
-                        <a:t>87</a:t>
+                        <a:t>67</a:t>
                       </a:r>
                     </a:p>
                   </a:txBody>
@@ -8488,7 +8488,7 @@
                           </a:solidFill>
                           <a:latin typeface="Kanit"/>
                         </a:rPr>
-                        <a:t>66</a:t>
+                        <a:t>78</a:t>
                       </a:r>
                     </a:p>
                   </a:txBody>
@@ -8511,7 +8511,7 @@
                           </a:solidFill>
                           <a:latin typeface="Kanit"/>
                         </a:rPr>
-                        <a:t>6.9%</a:t>
+                        <a:t>9.0%</a:t>
                       </a:r>
                     </a:p>
                   </a:txBody>
@@ -8534,7 +8534,7 @@
                           </a:solidFill>
                           <a:latin typeface="Kanit"/>
                         </a:rPr>
-                        <a:t>4/26</a:t>
+                        <a:t>5/10</a:t>
                       </a:r>
                     </a:p>
                   </a:txBody>
@@ -8605,7 +8605,7 @@
                           </a:solidFill>
                           <a:latin typeface="Kanit"/>
                         </a:rPr>
-                        <a:t>214</a:t>
+                        <a:t>210</a:t>
                       </a:r>
                     </a:p>
                   </a:txBody>
@@ -8651,7 +8651,7 @@
                           </a:solidFill>
                           <a:latin typeface="Kanit"/>
                         </a:rPr>
-                        <a:t>6.5%</a:t>
+                        <a:t>6.7%</a:t>
                       </a:r>
                     </a:p>
                   </a:txBody>
@@ -37087,7 +37087,7 @@
                 </a:solidFill>
                 <a:latin typeface="Kanit"/>
               </a:rPr>
-              <a:t>338 of 928 districts · 133 of 795 rivers high</a:t>
+              <a:t>338 of 928 districts · 126 of 795 rivers high</a:t>
             </a:r>
           </a:p>
         </p:txBody>
@@ -38091,7 +38091,7 @@
                           </a:solidFill>
                           <a:latin typeface="Kanit"/>
                         </a:rPr>
-                        <a:t>28/275</a:t>
+                        <a:t>26/275</a:t>
                       </a:r>
                     </a:p>
                   </a:txBody>
@@ -38323,7 +38323,7 @@
                           </a:solidFill>
                           <a:latin typeface="Kanit"/>
                         </a:rPr>
-                        <a:t>26/168</a:t>
+                        <a:t>25/168</a:t>
                       </a:r>
                     </a:p>
                   </a:txBody>
@@ -38555,7 +38555,7 @@
                           </a:solidFill>
                           <a:latin typeface="Kanit"/>
                         </a:rPr>
-                        <a:t>7/51</a:t>
+                        <a:t>6/51</a:t>
                       </a:r>
                     </a:p>
                   </a:txBody>
@@ -38787,7 +38787,7 @@
                           </a:solidFill>
                           <a:latin typeface="Kanit"/>
                         </a:rPr>
-                        <a:t>43/145</a:t>
+                        <a:t>40/145</a:t>
                       </a:r>
                     </a:p>
                   </a:txBody>

--- a/docs/decks/mcom-2026-08-05-macro.pptx
+++ b/docs/decks/mcom-2026-08-05-macro.pptx
@@ -6240,7 +6240,7 @@
                 </a:solidFill>
                 <a:latin typeface="Kanit"/>
               </a:rPr>
-              <a:t>126</a:t>
+              <a:t>129</a:t>
             </a:r>
           </a:p>
         </p:txBody>
@@ -6279,7 +6279,7 @@
                 </a:solidFill>
                 <a:latin typeface="Kanit"/>
               </a:rPr>
-              <a:t>of 795 (15.8%) · live · 2026-08-26</a:t>
+              <a:t>of 795 (16.2%) · live · 2026-08-26</a:t>
             </a:r>
           </a:p>
         </p:txBody>
@@ -6405,7 +6405,7 @@
                 </a:solidFill>
                 <a:latin typeface="Kanit"/>
               </a:rPr>
-              <a:t>12</a:t>
+              <a:t>14</a:t>
             </a:r>
           </a:p>
         </p:txBody>
@@ -8068,7 +8068,7 @@
                           </a:solidFill>
                           <a:latin typeface="Kanit"/>
                         </a:rPr>
-                        <a:t>6</a:t>
+                        <a:t>2</a:t>
                       </a:r>
                     </a:p>
                   </a:txBody>
@@ -8162,7 +8162,7 @@
                           </a:solidFill>
                           <a:latin typeface="Kanit"/>
                         </a:rPr>
-                        <a:t>บึงกาฬ</a:t>
+                        <a:t>สมุทรปราการ</a:t>
                       </a:r>
                     </a:p>
                   </a:txBody>
@@ -8185,7 +8185,7 @@
                           </a:solidFill>
                           <a:latin typeface="Kanit"/>
                         </a:rPr>
-                        <a:t>10</a:t>
+                        <a:t>15</a:t>
                       </a:r>
                     </a:p>
                   </a:txBody>
@@ -8208,7 +8208,7 @@
                           </a:solidFill>
                           <a:latin typeface="Kanit"/>
                         </a:rPr>
-                        <a:t>41</a:t>
+                        <a:t>6</a:t>
                       </a:r>
                     </a:p>
                   </a:txBody>
@@ -8227,11 +8227,11 @@
                       <a:r>
                         <a:rPr sz="900" b="1">
                           <a:solidFill>
-                            <a:srgbClr val="F5C242"/>
-                          </a:solidFill>
-                          <a:latin typeface="Kanit"/>
-                        </a:rPr>
-                        <a:t>10.0%</a:t>
+                            <a:srgbClr val="606060"/>
+                          </a:solidFill>
+                          <a:latin typeface="Kanit"/>
+                        </a:rPr>
+                        <a:t>0.0%</a:t>
                       </a:r>
                     </a:p>
                   </a:txBody>
@@ -8254,7 +8254,7 @@
                           </a:solidFill>
                           <a:latin typeface="Kanit"/>
                         </a:rPr>
-                        <a:t>1/1</a:t>
+                        <a:t>4/5</a:t>
                       </a:r>
                     </a:p>
                   </a:txBody>
@@ -8273,11 +8273,11 @@
                       <a:r>
                         <a:rPr sz="900" b="1">
                           <a:solidFill>
-                            <a:srgbClr val="F5C242"/>
-                          </a:solidFill>
-                          <a:latin typeface="Kanit"/>
-                        </a:rPr>
-                        <a:t>4</a:t>
+                            <a:srgbClr val="CC0000"/>
+                          </a:solidFill>
+                          <a:latin typeface="Kanit"/>
+                        </a:rPr>
+                        <a:t>5</a:t>
                       </a:r>
                     </a:p>
                   </a:txBody>
@@ -8302,7 +8302,7 @@
                           </a:solidFill>
                           <a:latin typeface="Kanit"/>
                         </a:rPr>
-                        <a:t>กาญจนบุรี</a:t>
+                        <a:t>บึงกาฬ</a:t>
                       </a:r>
                     </a:p>
                   </a:txBody>
@@ -8325,7 +8325,7 @@
                           </a:solidFill>
                           <a:latin typeface="Kanit"/>
                         </a:rPr>
-                        <a:t>86</a:t>
+                        <a:t>10</a:t>
                       </a:r>
                     </a:p>
                   </a:txBody>
@@ -8348,7 +8348,7 @@
                           </a:solidFill>
                           <a:latin typeface="Kanit"/>
                         </a:rPr>
-                        <a:t>81</a:t>
+                        <a:t>41</a:t>
                       </a:r>
                     </a:p>
                   </a:txBody>
@@ -8371,7 +8371,7 @@
                           </a:solidFill>
                           <a:latin typeface="Kanit"/>
                         </a:rPr>
-                        <a:t>9.3%</a:t>
+                        <a:t>20.0%</a:t>
                       </a:r>
                     </a:p>
                   </a:txBody>
@@ -8394,7 +8394,7 @@
                           </a:solidFill>
                           <a:latin typeface="Kanit"/>
                         </a:rPr>
-                        <a:t>4/26</a:t>
+                        <a:t>1/1</a:t>
                       </a:r>
                     </a:p>
                   </a:txBody>
@@ -8442,7 +8442,7 @@
                           </a:solidFill>
                           <a:latin typeface="Kanit"/>
                         </a:rPr>
-                        <a:t>นราธิวาส</a:t>
+                        <a:t>กาญจนบุรี</a:t>
                       </a:r>
                     </a:p>
                   </a:txBody>
@@ -8465,7 +8465,7 @@
                           </a:solidFill>
                           <a:latin typeface="Kanit"/>
                         </a:rPr>
-                        <a:t>67</a:t>
+                        <a:t>87</a:t>
                       </a:r>
                     </a:p>
                   </a:txBody>
@@ -8511,7 +8511,7 @@
                           </a:solidFill>
                           <a:latin typeface="Kanit"/>
                         </a:rPr>
-                        <a:t>9.0%</a:t>
+                        <a:t>11.5%</a:t>
                       </a:r>
                     </a:p>
                   </a:txBody>
@@ -8534,7 +8534,7 @@
                           </a:solidFill>
                           <a:latin typeface="Kanit"/>
                         </a:rPr>
-                        <a:t>5/10</a:t>
+                        <a:t>5/26</a:t>
                       </a:r>
                     </a:p>
                   </a:txBody>
@@ -8582,7 +8582,7 @@
                           </a:solidFill>
                           <a:latin typeface="Kanit"/>
                         </a:rPr>
-                        <a:t>น่าน</a:t>
+                        <a:t>ตาก</a:t>
                       </a:r>
                     </a:p>
                   </a:txBody>
@@ -8605,7 +8605,7 @@
                           </a:solidFill>
                           <a:latin typeface="Kanit"/>
                         </a:rPr>
-                        <a:t>210</a:t>
+                        <a:t>112</a:t>
                       </a:r>
                     </a:p>
                   </a:txBody>
@@ -8628,7 +8628,7 @@
                           </a:solidFill>
                           <a:latin typeface="Kanit"/>
                         </a:rPr>
-                        <a:t>93</a:t>
+                        <a:t>116</a:t>
                       </a:r>
                     </a:p>
                   </a:txBody>
@@ -8651,7 +8651,7 @@
                           </a:solidFill>
                           <a:latin typeface="Kanit"/>
                         </a:rPr>
-                        <a:t>6.7%</a:t>
+                        <a:t>9.8%</a:t>
                       </a:r>
                     </a:p>
                   </a:txBody>
@@ -8674,7 +8674,7 @@
                           </a:solidFill>
                           <a:latin typeface="Kanit"/>
                         </a:rPr>
-                        <a:t>1/28</a:t>
+                        <a:t>1/17</a:t>
                       </a:r>
                     </a:p>
                   </a:txBody>
@@ -31476,7 +31476,7 @@
                 </a:solidFill>
                 <a:latin typeface="Kanit"/>
               </a:rPr>
-              <a:t>Median crop income rose +17.0%, but four provinces fell — all on the coconut (มะพร้าว) belt, worst สมุทรสงคราม at −62.5%.</a:t>
+              <a:t>Median crop income rose +17.0%, but four provinces fell — all on the coconut (มะพร้าว) belt, worst สมุทรสงคราม at −62.7%.</a:t>
             </a:r>
           </a:p>
         </p:txBody>
@@ -32047,7 +32047,7 @@
                 </a:solidFill>
                 <a:latin typeface="Kanit"/>
               </a:rPr>
-              <a:t>Vintages — world prices 2026M06 · Thai farm gate 2026-08-24 · Thai price history 2026-08-23 · crop cost of production OAE Cai-up 2568 (crop year 2568/69, OAE forecast Mar 2569) · drought 2026-06-21 · CPI 2026-05 · GDP 2026-Q1 · IMF WEO 2026 · resale index 2026-05 · registrations to 2026-01 · household debt NSO SES 2566 · wages NSO LFS 2568 · telemetry 2026-08-26.</a:t>
+              <a:t>Vintages — world prices 2026M06 · Thai farm gate 2026-08-26 · Thai price history 2026-08-23 · crop cost of production OAE Cai-up 2568 (crop year 2568/69, OAE forecast Mar 2569) · drought 2026-06-21 · CPI 2026-05 · GDP 2026-Q1 · IMF WEO 2026 · resale index 2026-05 · registrations to 2026-01 · household debt NSO SES 2566 · wages NSO LFS 2568 · telemetry 2026-08-26.</a:t>
             </a:r>
           </a:p>
         </p:txBody>
@@ -32546,7 +32546,7 @@
               <a:t>Not on the world index — the farm gate (ราคาที่เกษตรกรขายได้) says otherwise.
 • Five of seventeen Thai farm-gate prices are falling year on year.
 • Beef: farm gate −6.1% vs world index +8.8%.
-• Margin over price: a 26% price move becomes an 84% swing in crop income.</a:t>
+• Margin over price: a 26% price move becomes an 87% swing in crop income.</a:t>
             </a:r>
           </a:p>
         </p:txBody>
@@ -37087,7 +37087,7 @@
                 </a:solidFill>
                 <a:latin typeface="Kanit"/>
               </a:rPr>
-              <a:t>338 of 928 districts · 126 of 795 rivers high</a:t>
+              <a:t>338 of 928 districts · 129 of 795 rivers high</a:t>
             </a:r>
           </a:p>
         </p:txBody>
@@ -37859,7 +37859,7 @@
                           </a:solidFill>
                           <a:latin typeface="Kanit"/>
                         </a:rPr>
-                        <a:t>29/156</a:t>
+                        <a:t>31/156</a:t>
                       </a:r>
                     </a:p>
                   </a:txBody>
@@ -38091,7 +38091,7 @@
                           </a:solidFill>
                           <a:latin typeface="Kanit"/>
                         </a:rPr>
-                        <a:t>26/275</a:t>
+                        <a:t>24/275</a:t>
                       </a:r>
                     </a:p>
                   </a:txBody>
@@ -38787,7 +38787,7 @@
                           </a:solidFill>
                           <a:latin typeface="Kanit"/>
                         </a:rPr>
-                        <a:t>40/145</a:t>
+                        <a:t>43/145</a:t>
                       </a:r>
                     </a:p>
                   </a:txBody>
@@ -39936,7 +39936,7 @@
                           </a:solidFill>
                           <a:latin typeface="Kanit"/>
                         </a:rPr>
-                        <a:t>−66.9%</a:t>
+                        <a:t>−67.1%</a:t>
                       </a:r>
                     </a:p>
                   </a:txBody>
@@ -40791,7 +40791,7 @@
                 </a:solidFill>
                 <a:latin typeface="Kanit"/>
               </a:rPr>
-              <a:t>Prices MEASURED — NABC daily quotes for the Thai farm gate, OCSB announced cane price; newest quote 2026-08-24. The six-month move is computed from NABC's own monthly series (thai_price_history, vintage 2026-08-23); a crop with no monthly series is marked, never estimated. Belt is an ESTIMATED read of where each commodity is produced, and belts overlap. Farming accounts are OURS and MEASURED — accounts whose recorded occupation is เกษตร in the belt provinces, from the 382,735-account tape at 2026-07; no cell below 30 accounts is published. They live where the crop grows; they are not confirmed to grow it.</a:t>
+              <a:t>Prices MEASURED — NABC daily quotes for the Thai farm gate, OCSB announced cane price; newest quote 2026-08-26. The six-month move is computed from NABC's own monthly series (thai_price_history, vintage 2026-08-23); a crop with no monthly series is marked, never estimated. Belt is an ESTIMATED read of where each commodity is produced, and belts overlap. Farming accounts are OURS and MEASURED — accounts whose recorded occupation is เกษตร in the belt provinces, from the 382,735-account tape at 2026-07; no cell below 30 accounts is published. They live where the crop grows; they are not confirmed to grow it.</a:t>
             </a:r>
           </a:p>
         </p:txBody>
@@ -44679,7 +44679,7 @@
                 </a:solidFill>
                 <a:latin typeface="Kanit"/>
               </a:rPr>
-              <a:t>coconut −66.9%, pineapple −18.4%, sugarcane −17.9% year on year</a:t>
+              <a:t>coconut −67.1%, pineapple −18.4%, sugarcane −17.9% year on year</a:t>
             </a:r>
           </a:p>
         </p:txBody>
@@ -45279,7 +45279,7 @@
                           </a:solidFill>
                           <a:latin typeface="Kanit"/>
                         </a:rPr>
-                        <a:t>+7.0%</a:t>
+                        <a:t>+6.9%</a:t>
                       </a:r>
                     </a:p>
                   </a:txBody>
@@ -45348,7 +45348,7 @@
                           </a:solidFill>
                           <a:latin typeface="Kanit"/>
                         </a:rPr>
-                        <a:t>-62.5%</a:t>
+                        <a:t>-62.7%</a:t>
                       </a:r>
                     </a:p>
                   </a:txBody>
@@ -45419,7 +45419,7 @@
                           </a:solidFill>
                           <a:latin typeface="Kanit"/>
                         </a:rPr>
-                        <a:t>+16.0%</a:t>
+                        <a:t>+16.1%</a:t>
                       </a:r>
                     </a:p>
                   </a:txBody>
@@ -45628,7 +45628,7 @@
                           </a:solidFill>
                           <a:latin typeface="Kanit"/>
                         </a:rPr>
-                        <a:t>+8.9%</a:t>
+                        <a:t>+8.8%</a:t>
                       </a:r>
                     </a:p>
                   </a:txBody>
@@ -45699,7 +45699,7 @@
                           </a:solidFill>
                           <a:latin typeface="Kanit"/>
                         </a:rPr>
-                        <a:t>+25.2%</a:t>
+                        <a:t>+25.1%</a:t>
                       </a:r>
                     </a:p>
                   </a:txBody>
@@ -45768,7 +45768,7 @@
                           </a:solidFill>
                           <a:latin typeface="Kanit"/>
                         </a:rPr>
-                        <a:t>+11.6%</a:t>
+                        <a:t>+11.7%</a:t>
                       </a:r>
                     </a:p>
                   </a:txBody>
@@ -45839,7 +45839,7 @@
                           </a:solidFill>
                           <a:latin typeface="Kanit"/>
                         </a:rPr>
-                        <a:t>+34.8%</a:t>
+                        <a:t>+34.7%</a:t>
                       </a:r>
                     </a:p>
                   </a:txBody>
@@ -45908,7 +45908,7 @@
                           </a:solidFill>
                           <a:latin typeface="Kanit"/>
                         </a:rPr>
-                        <a:t>+27.1%</a:t>
+                        <a:t>+27.0%</a:t>
                       </a:r>
                     </a:p>
                   </a:txBody>
@@ -46084,7 +46084,7 @@
                 </a:solidFill>
                 <a:latin typeface="Kanit"/>
               </a:rPr>
-              <a:t>•  +40% rubber, +72% cassava, +23% palm, +14% rice at the farm gate. Crop income rose in every region.
+              <a:t>•  +40% rubber, +73% cassava, +23% palm, +14% rice at the farm gate. Crop income rose in every region.
 •  Four provinces fell — all coconut, all on the western gulf. Coconut price is down 67%.
 •  A gain on paper is not cash yet — the next table nets prices against cost.</a:t>
             </a:r>
@@ -46387,7 +46387,7 @@
                           </a:solidFill>
                           <a:latin typeface="Kanit"/>
                         </a:rPr>
-                        <a:t>+18.0%</a:t>
+                        <a:t>+18.2%</a:t>
                       </a:r>
                     </a:p>
                   </a:txBody>
@@ -46876,7 +46876,7 @@
                           </a:solidFill>
                           <a:latin typeface="Kanit"/>
                         </a:rPr>
-                        <a:t>+32.7%</a:t>
+                        <a:t>+32.6%</a:t>
                       </a:r>
                     </a:p>
                   </a:txBody>
@@ -47202,7 +47202,7 @@
                           </a:solidFill>
                           <a:latin typeface="Kanit"/>
                         </a:rPr>
-                        <a:t>+16.0%</a:t>
+                        <a:t>+15.9%</a:t>
                       </a:r>
                     </a:p>
                   </a:txBody>
@@ -48024,7 +48024,7 @@
                 </a:solidFill>
                 <a:latin typeface="Kanit"/>
               </a:rPr>
-              <a:t>YoY −66.9%</a:t>
+              <a:t>YoY −67.1%</a:t>
             </a:r>
           </a:p>
         </p:txBody>
@@ -48660,7 +48660,7 @@
                 </a:solidFill>
                 <a:latin typeface="Kanit"/>
               </a:rPr>
-              <a:t>YoY +1.4%</a:t>
+              <a:t>YoY +1.3%</a:t>
             </a:r>
           </a:p>
         </p:txBody>
@@ -48900,6 +48900,324 @@
                 </a:solidFill>
                 <a:latin typeface="Kanit"/>
               </a:rPr>
+              <a:t>Chicken  ไก่</a:t>
+            </a:r>
+          </a:p>
+        </p:txBody>
+      </p:sp>
+      <p:sp>
+        <p:nvSpPr>
+          <p:cNvPr id="37" name="TextBox 36"/>
+          <p:cNvSpPr txBox="1"/>
+          <p:nvPr/>
+        </p:nvSpPr>
+        <p:spPr>
+          <a:xfrm>
+            <a:off x="7318857" y="2112263"/>
+            <a:ext cx="2156155" cy="125730"/>
+          </a:xfrm>
+          <a:prstGeom prst="rect">
+            <a:avLst/>
+          </a:prstGeom>
+          <a:noFill/>
+        </p:spPr>
+        <p:txBody>
+          <a:bodyPr wrap="square" lIns="0" rIns="0" tIns="0" bIns="0" anchor="t">
+            <a:noAutofit/>
+          </a:bodyPr>
+          <a:lstStyle/>
+          <a:p>
+            <a:pPr algn="l">
+              <a:lnSpc>
+                <a:spcPts val="990"/>
+              </a:lnSpc>
+            </a:pPr>
+            <a:r>
+              <a:rPr sz="750" b="0">
+                <a:solidFill>
+                  <a:srgbClr val="606060"/>
+                </a:solidFill>
+                <a:latin typeface="Kanit"/>
+              </a:rPr>
+              <a:t>฿43.00 /กก. · C·E</a:t>
+            </a:r>
+          </a:p>
+        </p:txBody>
+      </p:sp>
+      <p:sp>
+        <p:nvSpPr>
+          <p:cNvPr id="38" name="TextBox 37"/>
+          <p:cNvSpPr txBox="1"/>
+          <p:nvPr/>
+        </p:nvSpPr>
+        <p:spPr>
+          <a:xfrm>
+            <a:off x="7318857" y="2244851"/>
+            <a:ext cx="1078077" cy="134112"/>
+          </a:xfrm>
+          <a:prstGeom prst="rect">
+            <a:avLst/>
+          </a:prstGeom>
+          <a:noFill/>
+        </p:spPr>
+        <p:txBody>
+          <a:bodyPr wrap="square" lIns="0" rIns="0" tIns="0" bIns="0" anchor="t">
+            <a:noAutofit/>
+          </a:bodyPr>
+          <a:lstStyle/>
+          <a:p>
+            <a:pPr algn="l">
+              <a:lnSpc>
+                <a:spcPts val="1056"/>
+              </a:lnSpc>
+            </a:pPr>
+            <a:r>
+              <a:rPr sz="800" b="1">
+                <a:solidFill>
+                  <a:srgbClr val="15795F"/>
+                </a:solidFill>
+                <a:latin typeface="Kanit"/>
+              </a:rPr>
+              <a:t>YoY +3.6%</a:t>
+            </a:r>
+          </a:p>
+        </p:txBody>
+      </p:sp>
+      <p:sp>
+        <p:nvSpPr>
+          <p:cNvPr id="39" name="TextBox 38"/>
+          <p:cNvSpPr txBox="1"/>
+          <p:nvPr/>
+        </p:nvSpPr>
+        <p:spPr>
+          <a:xfrm>
+            <a:off x="8396935" y="2244851"/>
+            <a:ext cx="1078077" cy="134112"/>
+          </a:xfrm>
+          <a:prstGeom prst="rect">
+            <a:avLst/>
+          </a:prstGeom>
+          <a:noFill/>
+        </p:spPr>
+        <p:txBody>
+          <a:bodyPr wrap="square" lIns="0" rIns="0" tIns="0" bIns="0" anchor="t">
+            <a:noAutofit/>
+          </a:bodyPr>
+          <a:lstStyle/>
+          <a:p>
+            <a:pPr algn="l">
+              <a:lnSpc>
+                <a:spcPts val="1056"/>
+              </a:lnSpc>
+            </a:pPr>
+            <a:r>
+              <a:rPr sz="800" b="1">
+                <a:solidFill>
+                  <a:srgbClr val="15795F"/>
+                </a:solidFill>
+                <a:latin typeface="Kanit"/>
+              </a:rPr>
+              <a:t>6m +2.3%</a:t>
+            </a:r>
+          </a:p>
+        </p:txBody>
+      </p:sp>
+      <p:sp>
+        <p:nvSpPr>
+          <p:cNvPr id="40" name="Rectangle 39"/>
+          <p:cNvSpPr/>
+          <p:nvPr/>
+        </p:nvSpPr>
+        <p:spPr>
+          <a:xfrm>
+            <a:off x="7318857" y="2400300"/>
+            <a:ext cx="2156155" cy="548640"/>
+          </a:xfrm>
+          <a:prstGeom prst="rect">
+            <a:avLst/>
+          </a:prstGeom>
+          <a:solidFill>
+            <a:srgbClr val="FBFCFE"/>
+          </a:solidFill>
+          <a:ln w="9525">
+            <a:solidFill>
+              <a:srgbClr val="D9DEE9"/>
+            </a:solidFill>
+          </a:ln>
+          <a:effectLst/>
+        </p:spPr>
+        <p:style>
+          <a:lnRef idx="1">
+            <a:schemeClr val="accent1"/>
+          </a:lnRef>
+          <a:fillRef idx="3">
+            <a:schemeClr val="accent1"/>
+          </a:fillRef>
+          <a:effectRef idx="2">
+            <a:schemeClr val="accent1"/>
+          </a:effectRef>
+          <a:fontRef idx="minor">
+            <a:schemeClr val="lt1"/>
+          </a:fontRef>
+        </p:style>
+        <p:txBody>
+          <a:bodyPr rtlCol="0" anchor="ctr" wrap="none"/>
+          <a:lstStyle/>
+          <a:p>
+            <a:pPr algn="ctr"/>
+          </a:p>
+        </p:txBody>
+      </p:sp>
+      <p:sp>
+        <p:nvSpPr>
+          <p:cNvPr id="41" name="Freeform 40"/>
+          <p:cNvSpPr/>
+          <p:nvPr/>
+        </p:nvSpPr>
+        <p:spPr>
+          <a:xfrm>
+            <a:off x="7364577" y="2446020"/>
+            <a:ext cx="2064715" cy="457200"/>
+          </a:xfrm>
+          <a:custGeom>
+            <a:avLst/>
+            <a:gdLst/>
+            <a:ahLst/>
+            <a:cxnLst/>
+            <a:rect l="l" t="t" r="r" b="b"/>
+            <a:pathLst>
+              <a:path w="2064715" h="457200">
+                <a:moveTo>
+                  <a:pt x="0" y="0"/>
+                </a:moveTo>
+                <a:lnTo>
+                  <a:pt x="412943" y="111737"/>
+                </a:lnTo>
+                <a:lnTo>
+                  <a:pt x="825886" y="304458"/>
+                </a:lnTo>
+                <a:lnTo>
+                  <a:pt x="1238829" y="457200"/>
+                </a:lnTo>
+                <a:lnTo>
+                  <a:pt x="1651772" y="242951"/>
+                </a:lnTo>
+                <a:lnTo>
+                  <a:pt x="2064715" y="88159"/>
+                </a:lnTo>
+              </a:path>
+            </a:pathLst>
+          </a:custGeom>
+          <a:noFill/>
+          <a:ln w="20320">
+            <a:solidFill>
+              <a:srgbClr val="15795F"/>
+            </a:solidFill>
+          </a:ln>
+          <a:effectLst/>
+        </p:spPr>
+        <p:style>
+          <a:lnRef idx="1">
+            <a:schemeClr val="accent1"/>
+          </a:lnRef>
+          <a:fillRef idx="3">
+            <a:schemeClr val="accent1"/>
+          </a:fillRef>
+          <a:effectRef idx="2">
+            <a:schemeClr val="accent1"/>
+          </a:effectRef>
+          <a:fontRef idx="minor">
+            <a:schemeClr val="lt1"/>
+          </a:fontRef>
+        </p:style>
+        <p:txBody>
+          <a:bodyPr rtlCol="0" anchor="ctr"/>
+          <a:lstStyle/>
+          <a:p>
+            <a:pPr algn="ctr"/>
+          </a:p>
+        </p:txBody>
+      </p:sp>
+      <p:sp>
+        <p:nvSpPr>
+          <p:cNvPr id="42" name="Rounded Rectangle 41"/>
+          <p:cNvSpPr/>
+          <p:nvPr/>
+        </p:nvSpPr>
+        <p:spPr>
+          <a:xfrm>
+            <a:off x="9388144" y="2493031"/>
+            <a:ext cx="82296" cy="82296"/>
+          </a:xfrm>
+          <a:prstGeom prst="roundRect">
+            <a:avLst>
+              <a:gd name="adj" fmla="val 50000"/>
+            </a:avLst>
+          </a:prstGeom>
+          <a:solidFill>
+            <a:srgbClr val="15795F"/>
+          </a:solidFill>
+          <a:ln>
+            <a:noFill/>
+          </a:ln>
+          <a:effectLst/>
+        </p:spPr>
+        <p:style>
+          <a:lnRef idx="1">
+            <a:schemeClr val="accent1"/>
+          </a:lnRef>
+          <a:fillRef idx="3">
+            <a:schemeClr val="accent1"/>
+          </a:fillRef>
+          <a:effectRef idx="2">
+            <a:schemeClr val="accent1"/>
+          </a:effectRef>
+          <a:fontRef idx="minor">
+            <a:schemeClr val="lt1"/>
+          </a:fontRef>
+        </p:style>
+        <p:txBody>
+          <a:bodyPr rtlCol="0" anchor="ctr" wrap="none"/>
+          <a:lstStyle/>
+          <a:p>
+            <a:pPr algn="ctr"/>
+          </a:p>
+        </p:txBody>
+      </p:sp>
+      <p:sp>
+        <p:nvSpPr>
+          <p:cNvPr id="43" name="TextBox 42"/>
+          <p:cNvSpPr txBox="1"/>
+          <p:nvPr/>
+        </p:nvSpPr>
+        <p:spPr>
+          <a:xfrm>
+            <a:off x="9621316" y="1970531"/>
+            <a:ext cx="2156155" cy="150876"/>
+          </a:xfrm>
+          <a:prstGeom prst="rect">
+            <a:avLst/>
+          </a:prstGeom>
+          <a:noFill/>
+        </p:spPr>
+        <p:txBody>
+          <a:bodyPr wrap="square" lIns="0" rIns="0" tIns="0" bIns="0" anchor="t">
+            <a:noAutofit/>
+          </a:bodyPr>
+          <a:lstStyle/>
+          <a:p>
+            <a:pPr algn="l">
+              <a:lnSpc>
+                <a:spcPts val="1188"/>
+              </a:lnSpc>
+            </a:pPr>
+            <a:r>
+              <a:rPr sz="900" b="1">
+                <a:solidFill>
+                  <a:srgbClr val="1E2F5C"/>
+                </a:solidFill>
+                <a:latin typeface="Kanit"/>
+              </a:rPr>
               <a:t>Eggs  ไข่ไก่</a:t>
             </a:r>
           </a:p>
@@ -48907,13 +49225,13 @@
       </p:sp>
       <p:sp>
         <p:nvSpPr>
-          <p:cNvPr id="37" name="TextBox 36"/>
+          <p:cNvPr id="44" name="TextBox 43"/>
           <p:cNvSpPr txBox="1"/>
           <p:nvPr/>
         </p:nvSpPr>
         <p:spPr>
           <a:xfrm>
-            <a:off x="7318857" y="2112263"/>
+            <a:off x="9621316" y="2112263"/>
             <a:ext cx="2156155" cy="125730"/>
           </a:xfrm>
           <a:prstGeom prst="rect">
@@ -48946,13 +49264,13 @@
       </p:sp>
       <p:sp>
         <p:nvSpPr>
-          <p:cNvPr id="38" name="TextBox 37"/>
+          <p:cNvPr id="45" name="TextBox 44"/>
           <p:cNvSpPr txBox="1"/>
           <p:nvPr/>
         </p:nvSpPr>
         <p:spPr>
           <a:xfrm>
-            <a:off x="7318857" y="2244851"/>
+            <a:off x="9621316" y="2244851"/>
             <a:ext cx="1078077" cy="134112"/>
           </a:xfrm>
           <a:prstGeom prst="rect">
@@ -48978,20 +49296,20 @@
                 </a:solidFill>
                 <a:latin typeface="Kanit"/>
               </a:rPr>
-              <a:t>YoY +3.2%</a:t>
+              <a:t>YoY +3.7%</a:t>
             </a:r>
           </a:p>
         </p:txBody>
       </p:sp>
       <p:sp>
         <p:nvSpPr>
-          <p:cNvPr id="39" name="TextBox 38"/>
+          <p:cNvPr id="46" name="TextBox 45"/>
           <p:cNvSpPr txBox="1"/>
           <p:nvPr/>
         </p:nvSpPr>
         <p:spPr>
           <a:xfrm>
-            <a:off x="8396935" y="2244851"/>
+            <a:off x="10699394" y="2244851"/>
             <a:ext cx="1078077" cy="134112"/>
           </a:xfrm>
           <a:prstGeom prst="rect">
@@ -49024,13 +49342,13 @@
       </p:sp>
       <p:sp>
         <p:nvSpPr>
-          <p:cNvPr id="40" name="Rectangle 39"/>
+          <p:cNvPr id="47" name="Rectangle 46"/>
           <p:cNvSpPr/>
           <p:nvPr/>
         </p:nvSpPr>
         <p:spPr>
           <a:xfrm>
-            <a:off x="7318857" y="2400300"/>
+            <a:off x="9621316" y="2400300"/>
             <a:ext cx="2156155" cy="548640"/>
           </a:xfrm>
           <a:prstGeom prst="rect">
@@ -49070,13 +49388,13 @@
       </p:sp>
       <p:sp>
         <p:nvSpPr>
-          <p:cNvPr id="41" name="Freeform 40"/>
+          <p:cNvPr id="48" name="Freeform 47"/>
           <p:cNvSpPr/>
           <p:nvPr/>
         </p:nvSpPr>
         <p:spPr>
           <a:xfrm>
-            <a:off x="7364577" y="2446020"/>
+            <a:off x="9667036" y="2446020"/>
             <a:ext cx="2064715" cy="457200"/>
           </a:xfrm>
           <a:custGeom>
@@ -49140,331 +49458,13 @@
       </p:sp>
       <p:sp>
         <p:nvSpPr>
-          <p:cNvPr id="42" name="Rounded Rectangle 41"/>
-          <p:cNvSpPr/>
-          <p:nvPr/>
-        </p:nvSpPr>
-        <p:spPr>
-          <a:xfrm>
-            <a:off x="9388144" y="2404872"/>
-            <a:ext cx="82296" cy="82296"/>
-          </a:xfrm>
-          <a:prstGeom prst="roundRect">
-            <a:avLst>
-              <a:gd name="adj" fmla="val 50000"/>
-            </a:avLst>
-          </a:prstGeom>
-          <a:solidFill>
-            <a:srgbClr val="15795F"/>
-          </a:solidFill>
-          <a:ln>
-            <a:noFill/>
-          </a:ln>
-          <a:effectLst/>
-        </p:spPr>
-        <p:style>
-          <a:lnRef idx="1">
-            <a:schemeClr val="accent1"/>
-          </a:lnRef>
-          <a:fillRef idx="3">
-            <a:schemeClr val="accent1"/>
-          </a:fillRef>
-          <a:effectRef idx="2">
-            <a:schemeClr val="accent1"/>
-          </a:effectRef>
-          <a:fontRef idx="minor">
-            <a:schemeClr val="lt1"/>
-          </a:fontRef>
-        </p:style>
-        <p:txBody>
-          <a:bodyPr rtlCol="0" anchor="ctr" wrap="none"/>
-          <a:lstStyle/>
-          <a:p>
-            <a:pPr algn="ctr"/>
-          </a:p>
-        </p:txBody>
-      </p:sp>
-      <p:sp>
-        <p:nvSpPr>
-          <p:cNvPr id="43" name="TextBox 42"/>
-          <p:cNvSpPr txBox="1"/>
-          <p:nvPr/>
-        </p:nvSpPr>
-        <p:spPr>
-          <a:xfrm>
-            <a:off x="9621316" y="1970531"/>
-            <a:ext cx="2156155" cy="150876"/>
-          </a:xfrm>
-          <a:prstGeom prst="rect">
-            <a:avLst/>
-          </a:prstGeom>
-          <a:noFill/>
-        </p:spPr>
-        <p:txBody>
-          <a:bodyPr wrap="square" lIns="0" rIns="0" tIns="0" bIns="0" anchor="t">
-            <a:noAutofit/>
-          </a:bodyPr>
-          <a:lstStyle/>
-          <a:p>
-            <a:pPr algn="l">
-              <a:lnSpc>
-                <a:spcPts val="1188"/>
-              </a:lnSpc>
-            </a:pPr>
-            <a:r>
-              <a:rPr sz="900" b="1">
-                <a:solidFill>
-                  <a:srgbClr val="1E2F5C"/>
-                </a:solidFill>
-                <a:latin typeface="Kanit"/>
-              </a:rPr>
-              <a:t>Chicken  ไก่</a:t>
-            </a:r>
-          </a:p>
-        </p:txBody>
-      </p:sp>
-      <p:sp>
-        <p:nvSpPr>
-          <p:cNvPr id="44" name="TextBox 43"/>
-          <p:cNvSpPr txBox="1"/>
-          <p:nvPr/>
-        </p:nvSpPr>
-        <p:spPr>
-          <a:xfrm>
-            <a:off x="9621316" y="2112263"/>
-            <a:ext cx="2156155" cy="125730"/>
-          </a:xfrm>
-          <a:prstGeom prst="rect">
-            <a:avLst/>
-          </a:prstGeom>
-          <a:noFill/>
-        </p:spPr>
-        <p:txBody>
-          <a:bodyPr wrap="square" lIns="0" rIns="0" tIns="0" bIns="0" anchor="t">
-            <a:noAutofit/>
-          </a:bodyPr>
-          <a:lstStyle/>
-          <a:p>
-            <a:pPr algn="l">
-              <a:lnSpc>
-                <a:spcPts val="990"/>
-              </a:lnSpc>
-            </a:pPr>
-            <a:r>
-              <a:rPr sz="750" b="0">
-                <a:solidFill>
-                  <a:srgbClr val="606060"/>
-                </a:solidFill>
-                <a:latin typeface="Kanit"/>
-              </a:rPr>
-              <a:t>฿43.00 /กก. · C·E</a:t>
-            </a:r>
-          </a:p>
-        </p:txBody>
-      </p:sp>
-      <p:sp>
-        <p:nvSpPr>
-          <p:cNvPr id="45" name="TextBox 44"/>
-          <p:cNvSpPr txBox="1"/>
-          <p:nvPr/>
-        </p:nvSpPr>
-        <p:spPr>
-          <a:xfrm>
-            <a:off x="9621316" y="2244851"/>
-            <a:ext cx="1078077" cy="134112"/>
-          </a:xfrm>
-          <a:prstGeom prst="rect">
-            <a:avLst/>
-          </a:prstGeom>
-          <a:noFill/>
-        </p:spPr>
-        <p:txBody>
-          <a:bodyPr wrap="square" lIns="0" rIns="0" tIns="0" bIns="0" anchor="t">
-            <a:noAutofit/>
-          </a:bodyPr>
-          <a:lstStyle/>
-          <a:p>
-            <a:pPr algn="l">
-              <a:lnSpc>
-                <a:spcPts val="1056"/>
-              </a:lnSpc>
-            </a:pPr>
-            <a:r>
-              <a:rPr sz="800" b="1">
-                <a:solidFill>
-                  <a:srgbClr val="15795F"/>
-                </a:solidFill>
-                <a:latin typeface="Kanit"/>
-              </a:rPr>
-              <a:t>YoY +3.5%</a:t>
-            </a:r>
-          </a:p>
-        </p:txBody>
-      </p:sp>
-      <p:sp>
-        <p:nvSpPr>
-          <p:cNvPr id="46" name="TextBox 45"/>
-          <p:cNvSpPr txBox="1"/>
-          <p:nvPr/>
-        </p:nvSpPr>
-        <p:spPr>
-          <a:xfrm>
-            <a:off x="10699394" y="2244851"/>
-            <a:ext cx="1078077" cy="134112"/>
-          </a:xfrm>
-          <a:prstGeom prst="rect">
-            <a:avLst/>
-          </a:prstGeom>
-          <a:noFill/>
-        </p:spPr>
-        <p:txBody>
-          <a:bodyPr wrap="square" lIns="0" rIns="0" tIns="0" bIns="0" anchor="t">
-            <a:noAutofit/>
-          </a:bodyPr>
-          <a:lstStyle/>
-          <a:p>
-            <a:pPr algn="l">
-              <a:lnSpc>
-                <a:spcPts val="1056"/>
-              </a:lnSpc>
-            </a:pPr>
-            <a:r>
-              <a:rPr sz="800" b="1">
-                <a:solidFill>
-                  <a:srgbClr val="15795F"/>
-                </a:solidFill>
-                <a:latin typeface="Kanit"/>
-              </a:rPr>
-              <a:t>6m +2.3%</a:t>
-            </a:r>
-          </a:p>
-        </p:txBody>
-      </p:sp>
-      <p:sp>
-        <p:nvSpPr>
-          <p:cNvPr id="47" name="Rectangle 46"/>
-          <p:cNvSpPr/>
-          <p:nvPr/>
-        </p:nvSpPr>
-        <p:spPr>
-          <a:xfrm>
-            <a:off x="9621316" y="2400300"/>
-            <a:ext cx="2156155" cy="548640"/>
-          </a:xfrm>
-          <a:prstGeom prst="rect">
-            <a:avLst/>
-          </a:prstGeom>
-          <a:solidFill>
-            <a:srgbClr val="FBFCFE"/>
-          </a:solidFill>
-          <a:ln w="9525">
-            <a:solidFill>
-              <a:srgbClr val="D9DEE9"/>
-            </a:solidFill>
-          </a:ln>
-          <a:effectLst/>
-        </p:spPr>
-        <p:style>
-          <a:lnRef idx="1">
-            <a:schemeClr val="accent1"/>
-          </a:lnRef>
-          <a:fillRef idx="3">
-            <a:schemeClr val="accent1"/>
-          </a:fillRef>
-          <a:effectRef idx="2">
-            <a:schemeClr val="accent1"/>
-          </a:effectRef>
-          <a:fontRef idx="minor">
-            <a:schemeClr val="lt1"/>
-          </a:fontRef>
-        </p:style>
-        <p:txBody>
-          <a:bodyPr rtlCol="0" anchor="ctr" wrap="none"/>
-          <a:lstStyle/>
-          <a:p>
-            <a:pPr algn="ctr"/>
-          </a:p>
-        </p:txBody>
-      </p:sp>
-      <p:sp>
-        <p:nvSpPr>
-          <p:cNvPr id="48" name="Freeform 47"/>
-          <p:cNvSpPr/>
-          <p:nvPr/>
-        </p:nvSpPr>
-        <p:spPr>
-          <a:xfrm>
-            <a:off x="9667036" y="2446020"/>
-            <a:ext cx="2064715" cy="457200"/>
-          </a:xfrm>
-          <a:custGeom>
-            <a:avLst/>
-            <a:gdLst/>
-            <a:ahLst/>
-            <a:cxnLst/>
-            <a:rect l="l" t="t" r="r" b="b"/>
-            <a:pathLst>
-              <a:path w="2064715" h="457200">
-                <a:moveTo>
-                  <a:pt x="0" y="0"/>
-                </a:moveTo>
-                <a:lnTo>
-                  <a:pt x="412943" y="111737"/>
-                </a:lnTo>
-                <a:lnTo>
-                  <a:pt x="825886" y="304458"/>
-                </a:lnTo>
-                <a:lnTo>
-                  <a:pt x="1238829" y="457200"/>
-                </a:lnTo>
-                <a:lnTo>
-                  <a:pt x="1651772" y="242951"/>
-                </a:lnTo>
-                <a:lnTo>
-                  <a:pt x="2064715" y="88159"/>
-                </a:lnTo>
-              </a:path>
-            </a:pathLst>
-          </a:custGeom>
-          <a:noFill/>
-          <a:ln w="20320">
-            <a:solidFill>
-              <a:srgbClr val="15795F"/>
-            </a:solidFill>
-          </a:ln>
-          <a:effectLst/>
-        </p:spPr>
-        <p:style>
-          <a:lnRef idx="1">
-            <a:schemeClr val="accent1"/>
-          </a:lnRef>
-          <a:fillRef idx="3">
-            <a:schemeClr val="accent1"/>
-          </a:fillRef>
-          <a:effectRef idx="2">
-            <a:schemeClr val="accent1"/>
-          </a:effectRef>
-          <a:fontRef idx="minor">
-            <a:schemeClr val="lt1"/>
-          </a:fontRef>
-        </p:style>
-        <p:txBody>
-          <a:bodyPr rtlCol="0" anchor="ctr"/>
-          <a:lstStyle/>
-          <a:p>
-            <a:pPr algn="ctr"/>
-          </a:p>
-        </p:txBody>
-      </p:sp>
-      <p:sp>
-        <p:nvSpPr>
           <p:cNvPr id="49" name="Rounded Rectangle 48"/>
           <p:cNvSpPr/>
           <p:nvPr/>
         </p:nvSpPr>
         <p:spPr>
           <a:xfrm>
-            <a:off x="11690603" y="2493031"/>
+            <a:off x="11690603" y="2404872"/>
             <a:ext cx="82296" cy="82296"/>
           </a:xfrm>
           <a:prstGeom prst="roundRect">
@@ -49614,7 +49614,7 @@
                 </a:solidFill>
                 <a:latin typeface="Kanit"/>
               </a:rPr>
-              <a:t>YoY +8.8%</a:t>
+              <a:t>YoY +10.6%</a:t>
             </a:r>
           </a:p>
         </p:txBody>
@@ -49932,7 +49932,7 @@
                 </a:solidFill>
                 <a:latin typeface="Kanit"/>
               </a:rPr>
-              <a:t>YoY +14.4%</a:t>
+              <a:t>YoY +14.3%</a:t>
             </a:r>
           </a:p>
         </p:txBody>
@@ -50250,7 +50250,7 @@
                 </a:solidFill>
                 <a:latin typeface="Kanit"/>
               </a:rPr>
-              <a:t>YoY +15.9%</a:t>
+              <a:t>YoY +16.6%</a:t>
             </a:r>
           </a:p>
         </p:txBody>
@@ -50568,7 +50568,7 @@
                 </a:solidFill>
                 <a:latin typeface="Kanit"/>
               </a:rPr>
-              <a:t>YoY +23.3%</a:t>
+              <a:t>YoY +23.2%</a:t>
             </a:r>
           </a:p>
         </p:txBody>
@@ -50886,7 +50886,7 @@
                 </a:solidFill>
                 <a:latin typeface="Kanit"/>
               </a:rPr>
-              <a:t>YoY +40.2%</a:t>
+              <a:t>YoY +40.1%</a:t>
             </a:r>
           </a:p>
         </p:txBody>
@@ -51204,7 +51204,7 @@
                 </a:solidFill>
                 <a:latin typeface="Kanit"/>
               </a:rPr>
-              <a:t>YoY +72.1%</a:t>
+              <a:t>YoY +73.3%</a:t>
             </a:r>
           </a:p>
         </p:txBody>
@@ -51522,7 +51522,7 @@
                 </a:solidFill>
                 <a:latin typeface="Kanit"/>
               </a:rPr>
-              <a:t>YoY +102.6%</a:t>
+              <a:t>YoY +107.4%</a:t>
             </a:r>
           </a:p>
         </p:txBody>
@@ -51886,7 +51886,7 @@
                 </a:solidFill>
                 <a:latin typeface="Kanit"/>
               </a:rPr>
-              <a:t>Farm-gate prices MEASURED — NABC daily quotes, monthly means, in baht as published (no currency conversion); newest quote 2026-08-24, history vintage 2026-08-23. Farm gate (ราคาที่เกษตรกรขายได้) is what the grower is paid at first sale, before trading, milling or transport take a cut — not the world index and not a supermarket price. Belts are an ESTIMATED read of where each commodity is produced, and they overlap. Sugar is OCSB's announced season price, one point a year, so it has no six-month move to show.</a:t>
+              <a:t>Farm-gate prices MEASURED — NABC daily quotes, monthly means, in baht as published (no currency conversion); newest quote 2026-08-26, history vintage 2026-08-23. Farm gate (ราคาที่เกษตรกรขายได้) is what the grower is paid at first sale, before trading, milling or transport take a cut — not the world index and not a supermarket price. Belts are an ESTIMATED read of where each commodity is produced, and they overlap. Sugar is OCSB's announced season price, one point a year, so it has no six-month move to show.</a:t>
             </a:r>
           </a:p>
         </p:txBody>

--- a/docs/decks/mcom-2026-08-05-macro.pptx
+++ b/docs/decks/mcom-2026-08-05-macro.pptx
@@ -6240,7 +6240,7 @@
                 </a:solidFill>
                 <a:latin typeface="Kanit"/>
               </a:rPr>
-              <a:t>129</a:t>
+              <a:t>131</a:t>
             </a:r>
           </a:p>
         </p:txBody>
@@ -6279,7 +6279,7 @@
                 </a:solidFill>
                 <a:latin typeface="Kanit"/>
               </a:rPr>
-              <a:t>of 795 (16.2%) · live · 2026-08-26</a:t>
+              <a:t>of 795 (16.5%) · live · 2026-08-28</a:t>
             </a:r>
           </a:p>
         </p:txBody>
@@ -6405,7 +6405,7 @@
                 </a:solidFill>
                 <a:latin typeface="Kanit"/>
               </a:rPr>
-              <a:t>14</a:t>
+              <a:t>13</a:t>
             </a:r>
           </a:p>
         </p:txBody>
@@ -6444,7 +6444,7 @@
                 </a:solidFill>
                 <a:latin typeface="Kanit"/>
               </a:rPr>
-              <a:t>latest daily reading · 2026-08-26</a:t>
+              <a:t>latest daily reading · 2026-08-28</a:t>
             </a:r>
           </a:p>
         </p:txBody>
@@ -7905,7 +7905,7 @@
                           </a:solidFill>
                           <a:latin typeface="Kanit"/>
                         </a:rPr>
-                        <a:t>38</a:t>
+                        <a:t>36</a:t>
                       </a:r>
                     </a:p>
                   </a:txBody>
@@ -7928,7 +7928,7 @@
                           </a:solidFill>
                           <a:latin typeface="Kanit"/>
                         </a:rPr>
-                        <a:t>42</a:t>
+                        <a:t>33</a:t>
                       </a:r>
                     </a:p>
                   </a:txBody>
@@ -7947,11 +7947,11 @@
                       <a:r>
                         <a:rPr sz="900" b="1">
                           <a:solidFill>
-                            <a:srgbClr val="F5C242"/>
-                          </a:solidFill>
-                          <a:latin typeface="Kanit"/>
-                        </a:rPr>
-                        <a:t>2.6%</a:t>
+                            <a:srgbClr val="606060"/>
+                          </a:solidFill>
+                          <a:latin typeface="Kanit"/>
+                        </a:rPr>
+                        <a:t>0.0%</a:t>
                       </a:r>
                     </a:p>
                   </a:txBody>
@@ -8022,7 +8022,7 @@
                           </a:solidFill>
                           <a:latin typeface="Kanit"/>
                         </a:rPr>
-                        <a:t>มุกดาหาร</a:t>
+                        <a:t>กาญจนบุรี</a:t>
                       </a:r>
                     </a:p>
                   </a:txBody>
@@ -8045,7 +8045,7 @@
                           </a:solidFill>
                           <a:latin typeface="Kanit"/>
                         </a:rPr>
-                        <a:t>18</a:t>
+                        <a:t>88</a:t>
                       </a:r>
                     </a:p>
                   </a:txBody>
@@ -8068,7 +8068,7 @@
                           </a:solidFill>
                           <a:latin typeface="Kanit"/>
                         </a:rPr>
-                        <a:t>2</a:t>
+                        <a:t>66</a:t>
                       </a:r>
                     </a:p>
                   </a:txBody>
@@ -8087,11 +8087,11 @@
                       <a:r>
                         <a:rPr sz="900" b="1">
                           <a:solidFill>
-                            <a:srgbClr val="606060"/>
-                          </a:solidFill>
-                          <a:latin typeface="Kanit"/>
-                        </a:rPr>
-                        <a:t>0.0%</a:t>
+                            <a:srgbClr val="F5C242"/>
+                          </a:solidFill>
+                          <a:latin typeface="Kanit"/>
+                        </a:rPr>
+                        <a:t>19.3%</a:t>
                       </a:r>
                     </a:p>
                   </a:txBody>
@@ -8114,7 +8114,7 @@
                           </a:solidFill>
                           <a:latin typeface="Kanit"/>
                         </a:rPr>
-                        <a:t>2/2</a:t>
+                        <a:t>5/26</a:t>
                       </a:r>
                     </a:p>
                   </a:txBody>
@@ -8133,11 +8133,11 @@
                       <a:r>
                         <a:rPr sz="900" b="1">
                           <a:solidFill>
-                            <a:srgbClr val="CC0000"/>
-                          </a:solidFill>
-                          <a:latin typeface="Kanit"/>
-                        </a:rPr>
-                        <a:t>5</a:t>
+                            <a:srgbClr val="F5C242"/>
+                          </a:solidFill>
+                          <a:latin typeface="Kanit"/>
+                        </a:rPr>
+                        <a:t>4</a:t>
                       </a:r>
                     </a:p>
                   </a:txBody>
@@ -8162,7 +8162,7 @@
                           </a:solidFill>
                           <a:latin typeface="Kanit"/>
                         </a:rPr>
-                        <a:t>สมุทรปราการ</a:t>
+                        <a:t>ชุมพร</a:t>
                       </a:r>
                     </a:p>
                   </a:txBody>
@@ -8185,7 +8185,7 @@
                           </a:solidFill>
                           <a:latin typeface="Kanit"/>
                         </a:rPr>
-                        <a:t>15</a:t>
+                        <a:t>90</a:t>
                       </a:r>
                     </a:p>
                   </a:txBody>
@@ -8208,7 +8208,7 @@
                           </a:solidFill>
                           <a:latin typeface="Kanit"/>
                         </a:rPr>
-                        <a:t>6</a:t>
+                        <a:t>65</a:t>
                       </a:r>
                     </a:p>
                   </a:txBody>
@@ -8227,11 +8227,11 @@
                       <a:r>
                         <a:rPr sz="900" b="1">
                           <a:solidFill>
-                            <a:srgbClr val="606060"/>
-                          </a:solidFill>
-                          <a:latin typeface="Kanit"/>
-                        </a:rPr>
-                        <a:t>0.0%</a:t>
+                            <a:srgbClr val="F5C242"/>
+                          </a:solidFill>
+                          <a:latin typeface="Kanit"/>
+                        </a:rPr>
+                        <a:t>12.2%</a:t>
                       </a:r>
                     </a:p>
                   </a:txBody>
@@ -8254,7 +8254,7 @@
                           </a:solidFill>
                           <a:latin typeface="Kanit"/>
                         </a:rPr>
-                        <a:t>4/5</a:t>
+                        <a:t>3/15</a:t>
                       </a:r>
                     </a:p>
                   </a:txBody>
@@ -8273,11 +8273,11 @@
                       <a:r>
                         <a:rPr sz="900" b="1">
                           <a:solidFill>
-                            <a:srgbClr val="CC0000"/>
-                          </a:solidFill>
-                          <a:latin typeface="Kanit"/>
-                        </a:rPr>
-                        <a:t>5</a:t>
+                            <a:srgbClr val="F5C242"/>
+                          </a:solidFill>
+                          <a:latin typeface="Kanit"/>
+                        </a:rPr>
+                        <a:t>4</a:t>
                       </a:r>
                     </a:p>
                   </a:txBody>
@@ -8302,7 +8302,7 @@
                           </a:solidFill>
                           <a:latin typeface="Kanit"/>
                         </a:rPr>
-                        <a:t>บึงกาฬ</a:t>
+                        <a:t>ตราด</a:t>
                       </a:r>
                     </a:p>
                   </a:txBody>
@@ -8325,7 +8325,7 @@
                           </a:solidFill>
                           <a:latin typeface="Kanit"/>
                         </a:rPr>
-                        <a:t>10</a:t>
+                        <a:t>44</a:t>
                       </a:r>
                     </a:p>
                   </a:txBody>
@@ -8348,7 +8348,7 @@
                           </a:solidFill>
                           <a:latin typeface="Kanit"/>
                         </a:rPr>
-                        <a:t>41</a:t>
+                        <a:t>61</a:t>
                       </a:r>
                     </a:p>
                   </a:txBody>
@@ -8371,7 +8371,7 @@
                           </a:solidFill>
                           <a:latin typeface="Kanit"/>
                         </a:rPr>
-                        <a:t>20.0%</a:t>
+                        <a:t>6.8%</a:t>
                       </a:r>
                     </a:p>
                   </a:txBody>
@@ -8394,7 +8394,7 @@
                           </a:solidFill>
                           <a:latin typeface="Kanit"/>
                         </a:rPr>
-                        <a:t>1/1</a:t>
+                        <a:t>3/9</a:t>
                       </a:r>
                     </a:p>
                   </a:txBody>
@@ -8442,7 +8442,7 @@
                           </a:solidFill>
                           <a:latin typeface="Kanit"/>
                         </a:rPr>
-                        <a:t>กาญจนบุรี</a:t>
+                        <a:t>ตาก</a:t>
                       </a:r>
                     </a:p>
                   </a:txBody>
@@ -8465,7 +8465,7 @@
                           </a:solidFill>
                           <a:latin typeface="Kanit"/>
                         </a:rPr>
-                        <a:t>87</a:t>
+                        <a:t>109</a:t>
                       </a:r>
                     </a:p>
                   </a:txBody>
@@ -8488,7 +8488,7 @@
                           </a:solidFill>
                           <a:latin typeface="Kanit"/>
                         </a:rPr>
-                        <a:t>78</a:t>
+                        <a:t>51</a:t>
                       </a:r>
                     </a:p>
                   </a:txBody>
@@ -8511,7 +8511,7 @@
                           </a:solidFill>
                           <a:latin typeface="Kanit"/>
                         </a:rPr>
-                        <a:t>11.5%</a:t>
+                        <a:t>2.8%</a:t>
                       </a:r>
                     </a:p>
                   </a:txBody>
@@ -8534,7 +8534,7 @@
                           </a:solidFill>
                           <a:latin typeface="Kanit"/>
                         </a:rPr>
-                        <a:t>5/26</a:t>
+                        <a:t>1/17</a:t>
                       </a:r>
                     </a:p>
                   </a:txBody>
@@ -8582,7 +8582,7 @@
                           </a:solidFill>
                           <a:latin typeface="Kanit"/>
                         </a:rPr>
-                        <a:t>ตาก</a:t>
+                        <a:t>ลำพูน</a:t>
                       </a:r>
                     </a:p>
                   </a:txBody>
@@ -8605,7 +8605,7 @@
                           </a:solidFill>
                           <a:latin typeface="Kanit"/>
                         </a:rPr>
-                        <a:t>112</a:t>
+                        <a:t>73</a:t>
                       </a:r>
                     </a:p>
                   </a:txBody>
@@ -8628,7 +8628,7 @@
                           </a:solidFill>
                           <a:latin typeface="Kanit"/>
                         </a:rPr>
-                        <a:t>116</a:t>
+                        <a:t>43</a:t>
                       </a:r>
                     </a:p>
                   </a:txBody>
@@ -8651,7 +8651,7 @@
                           </a:solidFill>
                           <a:latin typeface="Kanit"/>
                         </a:rPr>
-                        <a:t>9.8%</a:t>
+                        <a:t>2.7%</a:t>
                       </a:r>
                     </a:p>
                   </a:txBody>
@@ -8674,7 +8674,7 @@
                           </a:solidFill>
                           <a:latin typeface="Kanit"/>
                         </a:rPr>
-                        <a:t>1/17</a:t>
+                        <a:t>1/11</a:t>
                       </a:r>
                     </a:p>
                   </a:txBody>
@@ -8909,7 +8909,7 @@
                 </a:solidFill>
                 <a:latin typeface="Kanit"/>
               </a:rPr>
-              <a:t>Planted area MEASURED (OAE — 3,295 amphoe crop rows). Drought is a MODELLED SPEI index from rainfall and evapotranspiration, refreshed monthly, retrieved 2026-07-20 — the best national-coverage signal available, but nobody has walked those districts. Rain and river telemetry MEASURED (ThaiWater, live, pulled daily and accumulated — a missed pull leaves a gap rather than an invented point) · rain to 2026-08-26, river to 2026-08-26. Structural flood exposure MEASURED (GISTDA 1:50,000 repeated-flooding census, 2005-2016 — a 12-year ground record, not a forecast).</a:t>
+              <a:t>Planted area MEASURED (OAE — 3,295 amphoe crop rows). Drought is a MODELLED SPEI index from rainfall and evapotranspiration, refreshed monthly, retrieved 2026-07-20 — the best national-coverage signal available, but nobody has walked those districts. Rain and river telemetry MEASURED (ThaiWater, live, pulled daily and accumulated — a missed pull leaves a gap rather than an invented point) · rain to 2026-08-28, river to 2026-08-28. Structural flood exposure MEASURED (GISTDA 1:50,000 repeated-flooding census, 2005-2016 — a 12-year ground record, not a forecast).</a:t>
             </a:r>
           </a:p>
         </p:txBody>
@@ -32047,7 +32047,7 @@
                 </a:solidFill>
                 <a:latin typeface="Kanit"/>
               </a:rPr>
-              <a:t>Vintages — world prices 2026M06 · Thai farm gate 2026-08-26 · Thai price history 2026-08-23 · crop cost of production OAE Cai-up 2568 (crop year 2568/69, OAE forecast Mar 2569) · drought 2026-06-21 · CPI 2026-05 · GDP 2026-Q1 · IMF WEO 2026 · resale index 2026-05 · registrations to 2026-01 · household debt NSO SES 2566 · wages NSO LFS 2568 · telemetry 2026-08-26.</a:t>
+              <a:t>Vintages — world prices 2026M06 · Thai farm gate 2026-08-26 · Thai price history 2026-08-23 · crop cost of production OAE Cai-up 2568 (crop year 2568/69, OAE forecast Mar 2569) · drought 2026-06-21 · CPI 2026-05 · GDP 2026-Q1 · IMF WEO 2026 · resale index 2026-05 · registrations to 2026-01 · household debt NSO SES 2566 · wages NSO LFS 2568 · telemetry 2026-08-28.</a:t>
             </a:r>
           </a:p>
         </p:txBody>
@@ -37087,7 +37087,7 @@
                 </a:solidFill>
                 <a:latin typeface="Kanit"/>
               </a:rPr>
-              <a:t>338 of 928 districts · 129 of 795 rivers high</a:t>
+              <a:t>338 of 928 districts · 131 of 795 rivers high</a:t>
             </a:r>
           </a:p>
         </p:txBody>
@@ -37859,7 +37859,7 @@
                           </a:solidFill>
                           <a:latin typeface="Kanit"/>
                         </a:rPr>
-                        <a:t>31/156</a:t>
+                        <a:t>27/156</a:t>
                       </a:r>
                     </a:p>
                   </a:txBody>
@@ -38091,7 +38091,7 @@
                           </a:solidFill>
                           <a:latin typeface="Kanit"/>
                         </a:rPr>
-                        <a:t>24/275</a:t>
+                        <a:t>22/274</a:t>
                       </a:r>
                     </a:p>
                   </a:txBody>
@@ -38323,7 +38323,7 @@
                           </a:solidFill>
                           <a:latin typeface="Kanit"/>
                         </a:rPr>
-                        <a:t>25/168</a:t>
+                        <a:t>30/168</a:t>
                       </a:r>
                     </a:p>
                   </a:txBody>
@@ -38555,7 +38555,7 @@
                           </a:solidFill>
                           <a:latin typeface="Kanit"/>
                         </a:rPr>
-                        <a:t>6/51</a:t>
+                        <a:t>7/52</a:t>
                       </a:r>
                     </a:p>
                   </a:txBody>
@@ -38787,7 +38787,7 @@
                           </a:solidFill>
                           <a:latin typeface="Kanit"/>
                         </a:rPr>
-                        <a:t>43/145</a:t>
+                        <a:t>45/145</a:t>
                       </a:r>
                     </a:p>
                   </a:txBody>

--- a/docs/decks/mcom-2026-08-05-macro.pptx
+++ b/docs/decks/mcom-2026-08-05-macro.pptx
@@ -6240,7 +6240,7 @@
                 </a:solidFill>
                 <a:latin typeface="Kanit"/>
               </a:rPr>
-              <a:t>131</a:t>
+              <a:t>129</a:t>
             </a:r>
           </a:p>
         </p:txBody>
@@ -6279,7 +6279,7 @@
                 </a:solidFill>
                 <a:latin typeface="Kanit"/>
               </a:rPr>
-              <a:t>of 795 (16.5%) · live · 2026-08-28</a:t>
+              <a:t>of 795 (16.2%) · live · 2026-08-28</a:t>
             </a:r>
           </a:p>
         </p:txBody>
@@ -6405,7 +6405,7 @@
                 </a:solidFill>
                 <a:latin typeface="Kanit"/>
               </a:rPr>
-              <a:t>13</a:t>
+              <a:t>22</a:t>
             </a:r>
           </a:p>
         </p:txBody>
@@ -7905,7 +7905,7 @@
                           </a:solidFill>
                           <a:latin typeface="Kanit"/>
                         </a:rPr>
-                        <a:t>36</a:t>
+                        <a:t>38</a:t>
                       </a:r>
                     </a:p>
                   </a:txBody>
@@ -8022,7 +8022,7 @@
                           </a:solidFill>
                           <a:latin typeface="Kanit"/>
                         </a:rPr>
-                        <a:t>กาญจนบุรี</a:t>
+                        <a:t>ตราด</a:t>
                       </a:r>
                     </a:p>
                   </a:txBody>
@@ -8045,7 +8045,7 @@
                           </a:solidFill>
                           <a:latin typeface="Kanit"/>
                         </a:rPr>
-                        <a:t>88</a:t>
+                        <a:t>44</a:t>
                       </a:r>
                     </a:p>
                   </a:txBody>
@@ -8068,7 +8068,7 @@
                           </a:solidFill>
                           <a:latin typeface="Kanit"/>
                         </a:rPr>
-                        <a:t>66</a:t>
+                        <a:t>199</a:t>
                       </a:r>
                     </a:p>
                   </a:txBody>
@@ -8091,7 +8091,7 @@
                           </a:solidFill>
                           <a:latin typeface="Kanit"/>
                         </a:rPr>
-                        <a:t>19.3%</a:t>
+                        <a:t>72.7%</a:t>
                       </a:r>
                     </a:p>
                   </a:txBody>
@@ -8114,7 +8114,7 @@
                           </a:solidFill>
                           <a:latin typeface="Kanit"/>
                         </a:rPr>
-                        <a:t>5/26</a:t>
+                        <a:t>4/9</a:t>
                       </a:r>
                     </a:p>
                   </a:txBody>
@@ -8162,7 +8162,7 @@
                           </a:solidFill>
                           <a:latin typeface="Kanit"/>
                         </a:rPr>
-                        <a:t>ชุมพร</a:t>
+                        <a:t>ปทุมธานี</a:t>
                       </a:r>
                     </a:p>
                   </a:txBody>
@@ -8185,7 +8185,7 @@
                           </a:solidFill>
                           <a:latin typeface="Kanit"/>
                         </a:rPr>
-                        <a:t>90</a:t>
+                        <a:t>10</a:t>
                       </a:r>
                     </a:p>
                   </a:txBody>
@@ -8208,7 +8208,7 @@
                           </a:solidFill>
                           <a:latin typeface="Kanit"/>
                         </a:rPr>
-                        <a:t>65</a:t>
+                        <a:t>71</a:t>
                       </a:r>
                     </a:p>
                   </a:txBody>
@@ -8231,7 +8231,7 @@
                           </a:solidFill>
                           <a:latin typeface="Kanit"/>
                         </a:rPr>
-                        <a:t>12.2%</a:t>
+                        <a:t>50.0%</a:t>
                       </a:r>
                     </a:p>
                   </a:txBody>
@@ -8254,7 +8254,7 @@
                           </a:solidFill>
                           <a:latin typeface="Kanit"/>
                         </a:rPr>
-                        <a:t>3/15</a:t>
+                        <a:t>1/4</a:t>
                       </a:r>
                     </a:p>
                   </a:txBody>
@@ -8302,7 +8302,7 @@
                           </a:solidFill>
                           <a:latin typeface="Kanit"/>
                         </a:rPr>
-                        <a:t>ตราด</a:t>
+                        <a:t>นครนายก</a:t>
                       </a:r>
                     </a:p>
                   </a:txBody>
@@ -8325,7 +8325,7 @@
                           </a:solidFill>
                           <a:latin typeface="Kanit"/>
                         </a:rPr>
-                        <a:t>44</a:t>
+                        <a:t>26</a:t>
                       </a:r>
                     </a:p>
                   </a:txBody>
@@ -8348,7 +8348,7 @@
                           </a:solidFill>
                           <a:latin typeface="Kanit"/>
                         </a:rPr>
-                        <a:t>61</a:t>
+                        <a:t>81</a:t>
                       </a:r>
                     </a:p>
                   </a:txBody>
@@ -8371,7 +8371,7 @@
                           </a:solidFill>
                           <a:latin typeface="Kanit"/>
                         </a:rPr>
-                        <a:t>6.8%</a:t>
+                        <a:t>46.2%</a:t>
                       </a:r>
                     </a:p>
                   </a:txBody>
@@ -8394,7 +8394,7 @@
                           </a:solidFill>
                           <a:latin typeface="Kanit"/>
                         </a:rPr>
-                        <a:t>3/9</a:t>
+                        <a:t>1/6</a:t>
                       </a:r>
                     </a:p>
                   </a:txBody>
@@ -8442,7 +8442,7 @@
                           </a:solidFill>
                           <a:latin typeface="Kanit"/>
                         </a:rPr>
-                        <a:t>ตาก</a:t>
+                        <a:t>จันทบุรี</a:t>
                       </a:r>
                     </a:p>
                   </a:txBody>
@@ -8465,7 +8465,7 @@
                           </a:solidFill>
                           <a:latin typeface="Kanit"/>
                         </a:rPr>
-                        <a:t>109</a:t>
+                        <a:t>52</a:t>
                       </a:r>
                     </a:p>
                   </a:txBody>
@@ -8488,7 +8488,7 @@
                           </a:solidFill>
                           <a:latin typeface="Kanit"/>
                         </a:rPr>
-                        <a:t>51</a:t>
+                        <a:t>172</a:t>
                       </a:r>
                     </a:p>
                   </a:txBody>
@@ -8511,7 +8511,7 @@
                           </a:solidFill>
                           <a:latin typeface="Kanit"/>
                         </a:rPr>
-                        <a:t>2.8%</a:t>
+                        <a:t>34.6%</a:t>
                       </a:r>
                     </a:p>
                   </a:txBody>
@@ -8534,7 +8534,7 @@
                           </a:solidFill>
                           <a:latin typeface="Kanit"/>
                         </a:rPr>
-                        <a:t>1/17</a:t>
+                        <a:t>1/11</a:t>
                       </a:r>
                     </a:p>
                   </a:txBody>
@@ -8582,7 +8582,7 @@
                           </a:solidFill>
                           <a:latin typeface="Kanit"/>
                         </a:rPr>
-                        <a:t>ลำพูน</a:t>
+                        <a:t>ลพบุรี</a:t>
                       </a:r>
                     </a:p>
                   </a:txBody>
@@ -8605,7 +8605,7 @@
                           </a:solidFill>
                           <a:latin typeface="Kanit"/>
                         </a:rPr>
-                        <a:t>73</a:t>
+                        <a:t>27</a:t>
                       </a:r>
                     </a:p>
                   </a:txBody>
@@ -8628,7 +8628,7 @@
                           </a:solidFill>
                           <a:latin typeface="Kanit"/>
                         </a:rPr>
-                        <a:t>43</a:t>
+                        <a:t>61</a:t>
                       </a:r>
                     </a:p>
                   </a:txBody>
@@ -8651,7 +8651,7 @@
                           </a:solidFill>
                           <a:latin typeface="Kanit"/>
                         </a:rPr>
-                        <a:t>2.7%</a:t>
+                        <a:t>25.9%</a:t>
                       </a:r>
                     </a:p>
                   </a:txBody>
@@ -8674,7 +8674,7 @@
                           </a:solidFill>
                           <a:latin typeface="Kanit"/>
                         </a:rPr>
-                        <a:t>1/11</a:t>
+                        <a:t>4/8</a:t>
                       </a:r>
                     </a:p>
                   </a:txBody>
@@ -31476,7 +31476,7 @@
                 </a:solidFill>
                 <a:latin typeface="Kanit"/>
               </a:rPr>
-              <a:t>Median crop income rose +17.0%, but four provinces fell — all on the coconut (มะพร้าว) belt, worst สมุทรสงคราม at −62.7%.</a:t>
+              <a:t>Median crop income rose +16.8%, but four provinces fell — all on the coconut (มะพร้าว) belt, worst สมุทรสงคราม at −63.0%.</a:t>
             </a:r>
           </a:p>
         </p:txBody>
@@ -32047,7 +32047,7 @@
                 </a:solidFill>
                 <a:latin typeface="Kanit"/>
               </a:rPr>
-              <a:t>Vintages — world prices 2026M06 · Thai farm gate 2026-08-26 · Thai price history 2026-08-23 · crop cost of production OAE Cai-up 2568 (crop year 2568/69, OAE forecast Mar 2569) · drought 2026-06-21 · CPI 2026-05 · GDP 2026-Q1 · IMF WEO 2026 · resale index 2026-05 · registrations to 2026-01 · household debt NSO SES 2566 · wages NSO LFS 2568 · telemetry 2026-08-28.</a:t>
+              <a:t>Vintages — world prices 2026M06 · Thai farm gate 2026-08-28 · Thai price history 2026-08-23 · crop cost of production OAE Cai-up 2568 (crop year 2568/69, OAE forecast Mar 2569) · drought 2026-06-21 · CPI 2026-05 · GDP 2026-Q1 · IMF WEO 2026 · resale index 2026-05 · registrations to 2026-01 · household debt NSO SES 2566 · wages NSO LFS 2568 · telemetry 2026-08-28.</a:t>
             </a:r>
           </a:p>
         </p:txBody>
@@ -32546,7 +32546,7 @@
               <a:t>Not on the world index — the farm gate (ราคาที่เกษตรกรขายได้) says otherwise.
 • Five of seventeen Thai farm-gate prices are falling year on year.
 • Beef: farm gate −6.1% vs world index +8.8%.
-• Margin over price: a 26% price move becomes an 87% swing in crop income.</a:t>
+• Margin over price: a 26% price move becomes an 86% swing in crop income.</a:t>
             </a:r>
           </a:p>
         </p:txBody>
@@ -37087,7 +37087,7 @@
                 </a:solidFill>
                 <a:latin typeface="Kanit"/>
               </a:rPr>
-              <a:t>338 of 928 districts · 131 of 795 rivers high</a:t>
+              <a:t>338 of 928 districts · 129 of 795 rivers high</a:t>
             </a:r>
           </a:p>
         </p:txBody>
@@ -37859,7 +37859,7 @@
                           </a:solidFill>
                           <a:latin typeface="Kanit"/>
                         </a:rPr>
-                        <a:t>27/156</a:t>
+                        <a:t>26/156</a:t>
                       </a:r>
                     </a:p>
                   </a:txBody>
@@ -38091,7 +38091,7 @@
                           </a:solidFill>
                           <a:latin typeface="Kanit"/>
                         </a:rPr>
-                        <a:t>22/274</a:t>
+                        <a:t>21/274</a:t>
                       </a:r>
                     </a:p>
                   </a:txBody>
@@ -38323,7 +38323,7 @@
                           </a:solidFill>
                           <a:latin typeface="Kanit"/>
                         </a:rPr>
-                        <a:t>30/168</a:t>
+                        <a:t>29/168</a:t>
                       </a:r>
                     </a:p>
                   </a:txBody>
@@ -38555,7 +38555,7 @@
                           </a:solidFill>
                           <a:latin typeface="Kanit"/>
                         </a:rPr>
-                        <a:t>7/52</a:t>
+                        <a:t>8/52</a:t>
                       </a:r>
                     </a:p>
                   </a:txBody>
@@ -39936,7 +39936,7 @@
                           </a:solidFill>
                           <a:latin typeface="Kanit"/>
                         </a:rPr>
-                        <a:t>−67.1%</a:t>
+                        <a:t>−67.4%</a:t>
                       </a:r>
                     </a:p>
                   </a:txBody>
@@ -40791,7 +40791,7 @@
                 </a:solidFill>
                 <a:latin typeface="Kanit"/>
               </a:rPr>
-              <a:t>Prices MEASURED — NABC daily quotes for the Thai farm gate, OCSB announced cane price; newest quote 2026-08-26. The six-month move is computed from NABC's own monthly series (thai_price_history, vintage 2026-08-23); a crop with no monthly series is marked, never estimated. Belt is an ESTIMATED read of where each commodity is produced, and belts overlap. Farming accounts are OURS and MEASURED — accounts whose recorded occupation is เกษตร in the belt provinces, from the 382,735-account tape at 2026-07; no cell below 30 accounts is published. They live where the crop grows; they are not confirmed to grow it.</a:t>
+              <a:t>Prices MEASURED — NABC daily quotes for the Thai farm gate, OCSB announced cane price; newest quote 2026-08-28. The six-month move is computed from NABC's own monthly series (thai_price_history, vintage 2026-08-23); a crop with no monthly series is marked, never estimated. Belt is an ESTIMATED read of where each commodity is produced, and belts overlap. Farming accounts are OURS and MEASURED — accounts whose recorded occupation is เกษตร in the belt provinces, from the 382,735-account tape at 2026-07; no cell below 30 accounts is published. They live where the crop grows; they are not confirmed to grow it.</a:t>
             </a:r>
           </a:p>
         </p:txBody>
@@ -44679,7 +44679,7 @@
                 </a:solidFill>
                 <a:latin typeface="Kanit"/>
               </a:rPr>
-              <a:t>coconut −67.1%, pineapple −18.4%, sugarcane −17.9% year on year</a:t>
+              <a:t>coconut −67.4%, pineapple −18.4%, sugarcane −17.9% year on year</a:t>
             </a:r>
           </a:p>
         </p:txBody>
@@ -44805,7 +44805,7 @@
                 </a:solidFill>
                 <a:latin typeface="Kanit"/>
               </a:rPr>
-              <a:t>+17.0%</a:t>
+              <a:t>+16.8%</a:t>
             </a:r>
           </a:p>
         </p:txBody>
@@ -45279,7 +45279,7 @@
                           </a:solidFill>
                           <a:latin typeface="Kanit"/>
                         </a:rPr>
-                        <a:t>+6.9%</a:t>
+                        <a:t>+6.7%</a:t>
                       </a:r>
                     </a:p>
                   </a:txBody>
@@ -45348,7 +45348,7 @@
                           </a:solidFill>
                           <a:latin typeface="Kanit"/>
                         </a:rPr>
-                        <a:t>-62.7%</a:t>
+                        <a:t>-63.0%</a:t>
                       </a:r>
                     </a:p>
                   </a:txBody>
@@ -45419,7 +45419,7 @@
                           </a:solidFill>
                           <a:latin typeface="Kanit"/>
                         </a:rPr>
-                        <a:t>+16.1%</a:t>
+                        <a:t>+15.9%</a:t>
                       </a:r>
                     </a:p>
                   </a:txBody>
@@ -45488,7 +45488,7 @@
                           </a:solidFill>
                           <a:latin typeface="Kanit"/>
                         </a:rPr>
-                        <a:t>+10.3%</a:t>
+                        <a:t>+10.1%</a:t>
                       </a:r>
                     </a:p>
                   </a:txBody>
@@ -45559,7 +45559,7 @@
                           </a:solidFill>
                           <a:latin typeface="Kanit"/>
                         </a:rPr>
-                        <a:t>+17.5%</a:t>
+                        <a:t>+17.3%</a:t>
                       </a:r>
                     </a:p>
                   </a:txBody>
@@ -45628,7 +45628,7 @@
                           </a:solidFill>
                           <a:latin typeface="Kanit"/>
                         </a:rPr>
-                        <a:t>+8.8%</a:t>
+                        <a:t>+8.6%</a:t>
                       </a:r>
                     </a:p>
                   </a:txBody>
@@ -45699,7 +45699,7 @@
                           </a:solidFill>
                           <a:latin typeface="Kanit"/>
                         </a:rPr>
-                        <a:t>+25.1%</a:t>
+                        <a:t>+24.9%</a:t>
                       </a:r>
                     </a:p>
                   </a:txBody>
@@ -45768,7 +45768,7 @@
                           </a:solidFill>
                           <a:latin typeface="Kanit"/>
                         </a:rPr>
-                        <a:t>+11.7%</a:t>
+                        <a:t>+11.6%</a:t>
                       </a:r>
                     </a:p>
                   </a:txBody>
@@ -45839,7 +45839,7 @@
                           </a:solidFill>
                           <a:latin typeface="Kanit"/>
                         </a:rPr>
-                        <a:t>+34.7%</a:t>
+                        <a:t>+34.4%</a:t>
                       </a:r>
                     </a:p>
                   </a:txBody>
@@ -45908,7 +45908,7 @@
                           </a:solidFill>
                           <a:latin typeface="Kanit"/>
                         </a:rPr>
-                        <a:t>+27.0%</a:t>
+                        <a:t>+26.9%</a:t>
                       </a:r>
                     </a:p>
                   </a:txBody>
@@ -46084,7 +46084,7 @@
                 </a:solidFill>
                 <a:latin typeface="Kanit"/>
               </a:rPr>
-              <a:t>•  +40% rubber, +73% cassava, +23% palm, +14% rice at the farm gate. Crop income rose in every region.
+              <a:t>•  +40% rubber, +74% cassava, +23% palm, +14% rice at the farm gate. Crop income rose in every region.
 •  Four provinces fell — all coconut, all on the western gulf. Coconut price is down 67%.
 •  A gain on paper is not cash yet — the next table nets prices against cost.</a:t>
             </a:r>
@@ -46387,7 +46387,7 @@
                           </a:solidFill>
                           <a:latin typeface="Kanit"/>
                         </a:rPr>
-                        <a:t>+18.2%</a:t>
+                        <a:t>+18.0%</a:t>
                       </a:r>
                     </a:p>
                   </a:txBody>
@@ -46550,7 +46550,7 @@
                           </a:solidFill>
                           <a:latin typeface="Kanit"/>
                         </a:rPr>
-                        <a:t>+21.9%</a:t>
+                        <a:t>+21.7%</a:t>
                       </a:r>
                     </a:p>
                   </a:txBody>
@@ -46713,7 +46713,7 @@
                           </a:solidFill>
                           <a:latin typeface="Kanit"/>
                         </a:rPr>
-                        <a:t>+11.9%</a:t>
+                        <a:t>+11.8%</a:t>
                       </a:r>
                     </a:p>
                   </a:txBody>
@@ -46876,7 +46876,7 @@
                           </a:solidFill>
                           <a:latin typeface="Kanit"/>
                         </a:rPr>
-                        <a:t>+32.6%</a:t>
+                        <a:t>+32.4%</a:t>
                       </a:r>
                     </a:p>
                   </a:txBody>
@@ -47039,7 +47039,7 @@
                           </a:solidFill>
                           <a:latin typeface="Kanit"/>
                         </a:rPr>
-                        <a:t>+17.4%</a:t>
+                        <a:t>+17.1%</a:t>
                       </a:r>
                     </a:p>
                   </a:txBody>
@@ -47202,7 +47202,7 @@
                           </a:solidFill>
                           <a:latin typeface="Kanit"/>
                         </a:rPr>
-                        <a:t>+15.9%</a:t>
+                        <a:t>+15.6%</a:t>
                       </a:r>
                     </a:p>
                   </a:txBody>
@@ -48024,7 +48024,7 @@
                 </a:solidFill>
                 <a:latin typeface="Kanit"/>
               </a:rPr>
-              <a:t>YoY −67.1%</a:t>
+              <a:t>YoY −67.4%</a:t>
             </a:r>
           </a:p>
         </p:txBody>
@@ -48660,7 +48660,7 @@
                 </a:solidFill>
                 <a:latin typeface="Kanit"/>
               </a:rPr>
-              <a:t>YoY +1.3%</a:t>
+              <a:t>YoY +0.9%</a:t>
             </a:r>
           </a:p>
         </p:txBody>
@@ -48978,7 +48978,7 @@
                 </a:solidFill>
                 <a:latin typeface="Kanit"/>
               </a:rPr>
-              <a:t>YoY +3.6%</a:t>
+              <a:t>YoY +3.9%</a:t>
             </a:r>
           </a:p>
         </p:txBody>
@@ -49296,7 +49296,7 @@
                 </a:solidFill>
                 <a:latin typeface="Kanit"/>
               </a:rPr>
-              <a:t>YoY +3.7%</a:t>
+              <a:t>YoY +4.4%</a:t>
             </a:r>
           </a:p>
         </p:txBody>
@@ -49614,7 +49614,7 @@
                 </a:solidFill>
                 <a:latin typeface="Kanit"/>
               </a:rPr>
-              <a:t>YoY +10.6%</a:t>
+              <a:t>YoY +13.1%</a:t>
             </a:r>
           </a:p>
         </p:txBody>
@@ -49932,7 +49932,7 @@
                 </a:solidFill>
                 <a:latin typeface="Kanit"/>
               </a:rPr>
-              <a:t>YoY +14.3%</a:t>
+              <a:t>YoY +14.0%</a:t>
             </a:r>
           </a:p>
         </p:txBody>
@@ -50250,7 +50250,7 @@
                 </a:solidFill>
                 <a:latin typeface="Kanit"/>
               </a:rPr>
-              <a:t>YoY +16.6%</a:t>
+              <a:t>YoY +16.8%</a:t>
             </a:r>
           </a:p>
         </p:txBody>
@@ -50568,7 +50568,7 @@
                 </a:solidFill>
                 <a:latin typeface="Kanit"/>
               </a:rPr>
-              <a:t>YoY +23.2%</a:t>
+              <a:t>YoY +23.1%</a:t>
             </a:r>
           </a:p>
         </p:txBody>
@@ -50886,7 +50886,7 @@
                 </a:solidFill>
                 <a:latin typeface="Kanit"/>
               </a:rPr>
-              <a:t>YoY +40.1%</a:t>
+              <a:t>YoY +39.8%</a:t>
             </a:r>
           </a:p>
         </p:txBody>
@@ -51204,7 +51204,7 @@
                 </a:solidFill>
                 <a:latin typeface="Kanit"/>
               </a:rPr>
-              <a:t>YoY +73.3%</a:t>
+              <a:t>YoY +73.7%</a:t>
             </a:r>
           </a:p>
         </p:txBody>
@@ -51522,7 +51522,7 @@
                 </a:solidFill>
                 <a:latin typeface="Kanit"/>
               </a:rPr>
-              <a:t>YoY +107.4%</a:t>
+              <a:t>YoY +111.6%</a:t>
             </a:r>
           </a:p>
         </p:txBody>
@@ -51886,7 +51886,7 @@
                 </a:solidFill>
                 <a:latin typeface="Kanit"/>
               </a:rPr>
-              <a:t>Farm-gate prices MEASURED — NABC daily quotes, monthly means, in baht as published (no currency conversion); newest quote 2026-08-26, history vintage 2026-08-23. Farm gate (ราคาที่เกษตรกรขายได้) is what the grower is paid at first sale, before trading, milling or transport take a cut — not the world index and not a supermarket price. Belts are an ESTIMATED read of where each commodity is produced, and they overlap. Sugar is OCSB's announced season price, one point a year, so it has no six-month move to show.</a:t>
+              <a:t>Farm-gate prices MEASURED — NABC daily quotes, monthly means, in baht as published (no currency conversion); newest quote 2026-08-28, history vintage 2026-08-23. Farm gate (ราคาที่เกษตรกรขายได้) is what the grower is paid at first sale, before trading, milling or transport take a cut — not the world index and not a supermarket price. Belts are an ESTIMATED read of where each commodity is produced, and they overlap. Sugar is OCSB's announced season price, one point a year, so it has no six-month move to show.</a:t>
             </a:r>
           </a:p>
         </p:txBody>

--- a/docs/decks/mcom-2026-08-05-macro.pptx
+++ b/docs/decks/mcom-2026-08-05-macro.pptx
@@ -6240,7 +6240,7 @@
                 </a:solidFill>
                 <a:latin typeface="Kanit"/>
               </a:rPr>
-              <a:t>129</a:t>
+              <a:t>135</a:t>
             </a:r>
           </a:p>
         </p:txBody>
@@ -6279,7 +6279,7 @@
                 </a:solidFill>
                 <a:latin typeface="Kanit"/>
               </a:rPr>
-              <a:t>of 795 (16.2%) · live · 2026-08-28</a:t>
+              <a:t>of 794 (17.0%) · live · 2026-08-29</a:t>
             </a:r>
           </a:p>
         </p:txBody>
@@ -6444,7 +6444,7 @@
                 </a:solidFill>
                 <a:latin typeface="Kanit"/>
               </a:rPr>
-              <a:t>latest daily reading · 2026-08-28</a:t>
+              <a:t>latest daily reading · 2026-08-29</a:t>
             </a:r>
           </a:p>
         </p:txBody>
@@ -7928,7 +7928,7 @@
                           </a:solidFill>
                           <a:latin typeface="Kanit"/>
                         </a:rPr>
-                        <a:t>33</a:t>
+                        <a:t>23</a:t>
                       </a:r>
                     </a:p>
                   </a:txBody>
@@ -8045,7 +8045,7 @@
                           </a:solidFill>
                           <a:latin typeface="Kanit"/>
                         </a:rPr>
-                        <a:t>44</a:t>
+                        <a:t>42</a:t>
                       </a:r>
                     </a:p>
                   </a:txBody>
@@ -8068,7 +8068,7 @@
                           </a:solidFill>
                           <a:latin typeface="Kanit"/>
                         </a:rPr>
-                        <a:t>199</a:t>
+                        <a:t>196</a:t>
                       </a:r>
                     </a:p>
                   </a:txBody>
@@ -8091,7 +8091,7 @@
                           </a:solidFill>
                           <a:latin typeface="Kanit"/>
                         </a:rPr>
-                        <a:t>72.7%</a:t>
+                        <a:t>73.8%</a:t>
                       </a:r>
                     </a:p>
                   </a:txBody>
@@ -8162,7 +8162,7 @@
                           </a:solidFill>
                           <a:latin typeface="Kanit"/>
                         </a:rPr>
-                        <a:t>ปทุมธานี</a:t>
+                        <a:t>ระนอง</a:t>
                       </a:r>
                     </a:p>
                   </a:txBody>
@@ -8185,7 +8185,7 @@
                           </a:solidFill>
                           <a:latin typeface="Kanit"/>
                         </a:rPr>
-                        <a:t>10</a:t>
+                        <a:t>50</a:t>
                       </a:r>
                     </a:p>
                   </a:txBody>
@@ -8208,7 +8208,7 @@
                           </a:solidFill>
                           <a:latin typeface="Kanit"/>
                         </a:rPr>
-                        <a:t>71</a:t>
+                        <a:t>137</a:t>
                       </a:r>
                     </a:p>
                   </a:txBody>
@@ -8231,7 +8231,7 @@
                           </a:solidFill>
                           <a:latin typeface="Kanit"/>
                         </a:rPr>
-                        <a:t>50.0%</a:t>
+                        <a:t>56.0%</a:t>
                       </a:r>
                     </a:p>
                   </a:txBody>
@@ -8302,7 +8302,7 @@
                           </a:solidFill>
                           <a:latin typeface="Kanit"/>
                         </a:rPr>
-                        <a:t>นครนายก</a:t>
+                        <a:t>ปทุมธานี</a:t>
                       </a:r>
                     </a:p>
                   </a:txBody>
@@ -8325,7 +8325,7 @@
                           </a:solidFill>
                           <a:latin typeface="Kanit"/>
                         </a:rPr>
-                        <a:t>26</a:t>
+                        <a:t>10</a:t>
                       </a:r>
                     </a:p>
                   </a:txBody>
@@ -8348,7 +8348,7 @@
                           </a:solidFill>
                           <a:latin typeface="Kanit"/>
                         </a:rPr>
-                        <a:t>81</a:t>
+                        <a:t>72</a:t>
                       </a:r>
                     </a:p>
                   </a:txBody>
@@ -8371,7 +8371,7 @@
                           </a:solidFill>
                           <a:latin typeface="Kanit"/>
                         </a:rPr>
-                        <a:t>46.2%</a:t>
+                        <a:t>50.0%</a:t>
                       </a:r>
                     </a:p>
                   </a:txBody>
@@ -8394,7 +8394,7 @@
                           </a:solidFill>
                           <a:latin typeface="Kanit"/>
                         </a:rPr>
-                        <a:t>1/6</a:t>
+                        <a:t>2/4</a:t>
                       </a:r>
                     </a:p>
                   </a:txBody>
@@ -8442,7 +8442,7 @@
                           </a:solidFill>
                           <a:latin typeface="Kanit"/>
                         </a:rPr>
-                        <a:t>จันทบุรี</a:t>
+                        <a:t>นครนายก</a:t>
                       </a:r>
                     </a:p>
                   </a:txBody>
@@ -8465,7 +8465,7 @@
                           </a:solidFill>
                           <a:latin typeface="Kanit"/>
                         </a:rPr>
-                        <a:t>52</a:t>
+                        <a:t>26</a:t>
                       </a:r>
                     </a:p>
                   </a:txBody>
@@ -8488,7 +8488,7 @@
                           </a:solidFill>
                           <a:latin typeface="Kanit"/>
                         </a:rPr>
-                        <a:t>172</a:t>
+                        <a:t>119</a:t>
                       </a:r>
                     </a:p>
                   </a:txBody>
@@ -8511,7 +8511,7 @@
                           </a:solidFill>
                           <a:latin typeface="Kanit"/>
                         </a:rPr>
-                        <a:t>34.6%</a:t>
+                        <a:t>46.2%</a:t>
                       </a:r>
                     </a:p>
                   </a:txBody>
@@ -8534,7 +8534,7 @@
                           </a:solidFill>
                           <a:latin typeface="Kanit"/>
                         </a:rPr>
-                        <a:t>1/11</a:t>
+                        <a:t>2/6</a:t>
                       </a:r>
                     </a:p>
                   </a:txBody>
@@ -8582,7 +8582,7 @@
                           </a:solidFill>
                           <a:latin typeface="Kanit"/>
                         </a:rPr>
-                        <a:t>ลพบุรี</a:t>
+                        <a:t>จันทบุรี</a:t>
                       </a:r>
                     </a:p>
                   </a:txBody>
@@ -8605,7 +8605,7 @@
                           </a:solidFill>
                           <a:latin typeface="Kanit"/>
                         </a:rPr>
-                        <a:t>27</a:t>
+                        <a:t>52</a:t>
                       </a:r>
                     </a:p>
                   </a:txBody>
@@ -8628,7 +8628,7 @@
                           </a:solidFill>
                           <a:latin typeface="Kanit"/>
                         </a:rPr>
-                        <a:t>61</a:t>
+                        <a:t>168</a:t>
                       </a:r>
                     </a:p>
                   </a:txBody>
@@ -8651,7 +8651,7 @@
                           </a:solidFill>
                           <a:latin typeface="Kanit"/>
                         </a:rPr>
-                        <a:t>25.9%</a:t>
+                        <a:t>34.6%</a:t>
                       </a:r>
                     </a:p>
                   </a:txBody>
@@ -8674,7 +8674,7 @@
                           </a:solidFill>
                           <a:latin typeface="Kanit"/>
                         </a:rPr>
-                        <a:t>4/8</a:t>
+                        <a:t>5/11</a:t>
                       </a:r>
                     </a:p>
                   </a:txBody>
@@ -8909,7 +8909,7 @@
                 </a:solidFill>
                 <a:latin typeface="Kanit"/>
               </a:rPr>
-              <a:t>Planted area MEASURED (OAE — 3,295 amphoe crop rows). Drought is a MODELLED SPEI index from rainfall and evapotranspiration, refreshed monthly, retrieved 2026-07-20 — the best national-coverage signal available, but nobody has walked those districts. Rain and river telemetry MEASURED (ThaiWater, live, pulled daily and accumulated — a missed pull leaves a gap rather than an invented point) · rain to 2026-08-28, river to 2026-08-28. Structural flood exposure MEASURED (GISTDA 1:50,000 repeated-flooding census, 2005-2016 — a 12-year ground record, not a forecast).</a:t>
+              <a:t>Planted area MEASURED (OAE — 3,295 amphoe crop rows). Drought is a MODELLED SPEI index from rainfall and evapotranspiration, refreshed monthly, retrieved 2026-07-20 — the best national-coverage signal available, but nobody has walked those districts. Rain and river telemetry MEASURED (ThaiWater, live, pulled daily and accumulated — a missed pull leaves a gap rather than an invented point) · rain to 2026-08-29, river to 2026-08-29. Structural flood exposure MEASURED (GISTDA 1:50,000 repeated-flooding census, 2005-2016 — a 12-year ground record, not a forecast).</a:t>
             </a:r>
           </a:p>
         </p:txBody>
@@ -32047,7 +32047,7 @@
                 </a:solidFill>
                 <a:latin typeface="Kanit"/>
               </a:rPr>
-              <a:t>Vintages — world prices 2026M06 · Thai farm gate 2026-08-28 · Thai price history 2026-08-23 · crop cost of production OAE Cai-up 2568 (crop year 2568/69, OAE forecast Mar 2569) · drought 2026-06-21 · CPI 2026-05 · GDP 2026-Q1 · IMF WEO 2026 · resale index 2026-05 · registrations to 2026-01 · household debt NSO SES 2566 · wages NSO LFS 2568 · telemetry 2026-08-28.</a:t>
+              <a:t>Vintages — world prices 2026M06 · Thai farm gate 2026-08-28 · Thai price history 2026-08-23 · crop cost of production OAE Cai-up 2568 (crop year 2568/69, OAE forecast Mar 2569) · drought 2026-06-21 · CPI 2026-05 · GDP 2026-Q1 · IMF WEO 2026 · resale index 2026-05 · registrations to 2026-01 · household debt NSO SES 2566 · wages NSO LFS 2568 · telemetry 2026-08-29.</a:t>
             </a:r>
           </a:p>
         </p:txBody>
@@ -37087,7 +37087,7 @@
                 </a:solidFill>
                 <a:latin typeface="Kanit"/>
               </a:rPr>
-              <a:t>338 of 928 districts · 129 of 795 rivers high</a:t>
+              <a:t>338 of 928 districts · 135 of 794 rivers high</a:t>
             </a:r>
           </a:p>
         </p:txBody>
@@ -37859,7 +37859,7 @@
                           </a:solidFill>
                           <a:latin typeface="Kanit"/>
                         </a:rPr>
-                        <a:t>26/156</a:t>
+                        <a:t>25/156</a:t>
                       </a:r>
                     </a:p>
                   </a:txBody>
@@ -38091,7 +38091,7 @@
                           </a:solidFill>
                           <a:latin typeface="Kanit"/>
                         </a:rPr>
-                        <a:t>21/274</a:t>
+                        <a:t>20/273</a:t>
                       </a:r>
                     </a:p>
                   </a:txBody>
@@ -38323,7 +38323,7 @@
                           </a:solidFill>
                           <a:latin typeface="Kanit"/>
                         </a:rPr>
-                        <a:t>29/168</a:t>
+                        <a:t>30/168</a:t>
                       </a:r>
                     </a:p>
                   </a:txBody>
@@ -38555,7 +38555,7 @@
                           </a:solidFill>
                           <a:latin typeface="Kanit"/>
                         </a:rPr>
-                        <a:t>8/52</a:t>
+                        <a:t>13/52</a:t>
                       </a:r>
                     </a:p>
                   </a:txBody>
@@ -38787,7 +38787,7 @@
                           </a:solidFill>
                           <a:latin typeface="Kanit"/>
                         </a:rPr>
-                        <a:t>45/145</a:t>
+                        <a:t>47/145</a:t>
                       </a:r>
                     </a:p>
                   </a:txBody>

--- a/docs/decks/mcom-2026-08-05-macro.pptx
+++ b/docs/decks/mcom-2026-08-05-macro.pptx
@@ -6240,7 +6240,7 @@
                 </a:solidFill>
                 <a:latin typeface="Kanit"/>
               </a:rPr>
-              <a:t>135</a:t>
+              <a:t>127</a:t>
             </a:r>
           </a:p>
         </p:txBody>
@@ -6279,7 +6279,7 @@
                 </a:solidFill>
                 <a:latin typeface="Kanit"/>
               </a:rPr>
-              <a:t>of 794 (17.0%) · live · 2026-08-29</a:t>
+              <a:t>of 793 (16.0%) · live · 2026-08-29</a:t>
             </a:r>
           </a:p>
         </p:txBody>
@@ -8068,7 +8068,7 @@
                           </a:solidFill>
                           <a:latin typeface="Kanit"/>
                         </a:rPr>
-                        <a:t>196</a:t>
+                        <a:t>200</a:t>
                       </a:r>
                     </a:p>
                   </a:txBody>
@@ -8091,7 +8091,7 @@
                           </a:solidFill>
                           <a:latin typeface="Kanit"/>
                         </a:rPr>
-                        <a:t>73.8%</a:t>
+                        <a:t>76.2%</a:t>
                       </a:r>
                     </a:p>
                   </a:txBody>
@@ -8162,7 +8162,7 @@
                           </a:solidFill>
                           <a:latin typeface="Kanit"/>
                         </a:rPr>
-                        <a:t>ระนอง</a:t>
+                        <a:t>นครนายก</a:t>
                       </a:r>
                     </a:p>
                   </a:txBody>
@@ -8185,7 +8185,7 @@
                           </a:solidFill>
                           <a:latin typeface="Kanit"/>
                         </a:rPr>
-                        <a:t>50</a:t>
+                        <a:t>26</a:t>
                       </a:r>
                     </a:p>
                   </a:txBody>
@@ -8208,7 +8208,7 @@
                           </a:solidFill>
                           <a:latin typeface="Kanit"/>
                         </a:rPr>
-                        <a:t>137</a:t>
+                        <a:t>127</a:t>
                       </a:r>
                     </a:p>
                   </a:txBody>
@@ -8231,7 +8231,7 @@
                           </a:solidFill>
                           <a:latin typeface="Kanit"/>
                         </a:rPr>
-                        <a:t>56.0%</a:t>
+                        <a:t>50.0%</a:t>
                       </a:r>
                     </a:p>
                   </a:txBody>
@@ -8254,7 +8254,7 @@
                           </a:solidFill>
                           <a:latin typeface="Kanit"/>
                         </a:rPr>
-                        <a:t>1/4</a:t>
+                        <a:t>2/6</a:t>
                       </a:r>
                     </a:p>
                   </a:txBody>
@@ -8394,7 +8394,7 @@
                           </a:solidFill>
                           <a:latin typeface="Kanit"/>
                         </a:rPr>
-                        <a:t>2/4</a:t>
+                        <a:t>3/4</a:t>
                       </a:r>
                     </a:p>
                   </a:txBody>
@@ -8442,7 +8442,7 @@
                           </a:solidFill>
                           <a:latin typeface="Kanit"/>
                         </a:rPr>
-                        <a:t>นครนายก</a:t>
+                        <a:t>จันทบุรี</a:t>
                       </a:r>
                     </a:p>
                   </a:txBody>
@@ -8465,7 +8465,7 @@
                           </a:solidFill>
                           <a:latin typeface="Kanit"/>
                         </a:rPr>
-                        <a:t>26</a:t>
+                        <a:t>52</a:t>
                       </a:r>
                     </a:p>
                   </a:txBody>
@@ -8488,7 +8488,7 @@
                           </a:solidFill>
                           <a:latin typeface="Kanit"/>
                         </a:rPr>
-                        <a:t>119</a:t>
+                        <a:t>170</a:t>
                       </a:r>
                     </a:p>
                   </a:txBody>
@@ -8511,7 +8511,7 @@
                           </a:solidFill>
                           <a:latin typeface="Kanit"/>
                         </a:rPr>
-                        <a:t>46.2%</a:t>
+                        <a:t>34.6%</a:t>
                       </a:r>
                     </a:p>
                   </a:txBody>
@@ -8534,7 +8534,7 @@
                           </a:solidFill>
                           <a:latin typeface="Kanit"/>
                         </a:rPr>
-                        <a:t>2/6</a:t>
+                        <a:t>3/11</a:t>
                       </a:r>
                     </a:p>
                   </a:txBody>
@@ -8582,7 +8582,7 @@
                           </a:solidFill>
                           <a:latin typeface="Kanit"/>
                         </a:rPr>
-                        <a:t>จันทบุรี</a:t>
+                        <a:t>ลพบุรี</a:t>
                       </a:r>
                     </a:p>
                   </a:txBody>
@@ -8605,7 +8605,7 @@
                           </a:solidFill>
                           <a:latin typeface="Kanit"/>
                         </a:rPr>
-                        <a:t>52</a:t>
+                        <a:t>27</a:t>
                       </a:r>
                     </a:p>
                   </a:txBody>
@@ -8628,7 +8628,7 @@
                           </a:solidFill>
                           <a:latin typeface="Kanit"/>
                         </a:rPr>
-                        <a:t>168</a:t>
+                        <a:t>82</a:t>
                       </a:r>
                     </a:p>
                   </a:txBody>
@@ -8651,7 +8651,7 @@
                           </a:solidFill>
                           <a:latin typeface="Kanit"/>
                         </a:rPr>
-                        <a:t>34.6%</a:t>
+                        <a:t>29.6%</a:t>
                       </a:r>
                     </a:p>
                   </a:txBody>
@@ -8674,7 +8674,7 @@
                           </a:solidFill>
                           <a:latin typeface="Kanit"/>
                         </a:rPr>
-                        <a:t>5/11</a:t>
+                        <a:t>3/8</a:t>
                       </a:r>
                     </a:p>
                   </a:txBody>
@@ -37087,7 +37087,7 @@
                 </a:solidFill>
                 <a:latin typeface="Kanit"/>
               </a:rPr>
-              <a:t>338 of 928 districts · 135 of 794 rivers high</a:t>
+              <a:t>338 of 928 districts · 127 of 793 rivers high</a:t>
             </a:r>
           </a:p>
         </p:txBody>
@@ -37859,7 +37859,7 @@
                           </a:solidFill>
                           <a:latin typeface="Kanit"/>
                         </a:rPr>
-                        <a:t>25/156</a:t>
+                        <a:t>24/156</a:t>
                       </a:r>
                     </a:p>
                   </a:txBody>
@@ -38091,7 +38091,7 @@
                           </a:solidFill>
                           <a:latin typeface="Kanit"/>
                         </a:rPr>
-                        <a:t>20/273</a:t>
+                        <a:t>20/272</a:t>
                       </a:r>
                     </a:p>
                   </a:txBody>
@@ -38323,7 +38323,7 @@
                           </a:solidFill>
                           <a:latin typeface="Kanit"/>
                         </a:rPr>
-                        <a:t>30/168</a:t>
+                        <a:t>29/168</a:t>
                       </a:r>
                     </a:p>
                   </a:txBody>
@@ -38555,7 +38555,7 @@
                           </a:solidFill>
                           <a:latin typeface="Kanit"/>
                         </a:rPr>
-                        <a:t>13/52</a:t>
+                        <a:t>10/52</a:t>
                       </a:r>
                     </a:p>
                   </a:txBody>
@@ -38787,7 +38787,7 @@
                           </a:solidFill>
                           <a:latin typeface="Kanit"/>
                         </a:rPr>
-                        <a:t>47/145</a:t>
+                        <a:t>44/145</a:t>
                       </a:r>
                     </a:p>
                   </a:txBody>

--- a/docs/decks/mcom-2026-08-05-macro.pptx
+++ b/docs/decks/mcom-2026-08-05-macro.pptx
@@ -6240,7 +6240,7 @@
                 </a:solidFill>
                 <a:latin typeface="Kanit"/>
               </a:rPr>
-              <a:t>127</a:t>
+              <a:t>136</a:t>
             </a:r>
           </a:p>
         </p:txBody>
@@ -6279,7 +6279,7 @@
                 </a:solidFill>
                 <a:latin typeface="Kanit"/>
               </a:rPr>
-              <a:t>of 793 (16.0%) · live · 2026-08-29</a:t>
+              <a:t>of 793 (17.2%) · live · 2026-08-30</a:t>
             </a:r>
           </a:p>
         </p:txBody>
@@ -6405,7 +6405,7 @@
                 </a:solidFill>
                 <a:latin typeface="Kanit"/>
               </a:rPr>
-              <a:t>22</a:t>
+              <a:t>37</a:t>
             </a:r>
           </a:p>
         </p:txBody>
@@ -6444,7 +6444,7 @@
                 </a:solidFill>
                 <a:latin typeface="Kanit"/>
               </a:rPr>
-              <a:t>latest daily reading · 2026-08-29</a:t>
+              <a:t>latest daily reading · 2026-08-30</a:t>
             </a:r>
           </a:p>
         </p:txBody>
@@ -7905,7 +7905,7 @@
                           </a:solidFill>
                           <a:latin typeface="Kanit"/>
                         </a:rPr>
-                        <a:t>38</a:t>
+                        <a:t>37</a:t>
                       </a:r>
                     </a:p>
                   </a:txBody>
@@ -7928,7 +7928,7 @@
                           </a:solidFill>
                           <a:latin typeface="Kanit"/>
                         </a:rPr>
-                        <a:t>23</a:t>
+                        <a:t>8</a:t>
                       </a:r>
                     </a:p>
                   </a:txBody>
@@ -8022,7 +8022,7 @@
                           </a:solidFill>
                           <a:latin typeface="Kanit"/>
                         </a:rPr>
-                        <a:t>ตราด</a:t>
+                        <a:t>ยโสธร</a:t>
                       </a:r>
                     </a:p>
                   </a:txBody>
@@ -8045,7 +8045,7 @@
                           </a:solidFill>
                           <a:latin typeface="Kanit"/>
                         </a:rPr>
-                        <a:t>42</a:t>
+                        <a:t>15</a:t>
                       </a:r>
                     </a:p>
                   </a:txBody>
@@ -8068,7 +8068,7 @@
                           </a:solidFill>
                           <a:latin typeface="Kanit"/>
                         </a:rPr>
-                        <a:t>200</a:t>
+                        <a:t>76</a:t>
                       </a:r>
                     </a:p>
                   </a:txBody>
@@ -8091,7 +8091,7 @@
                           </a:solidFill>
                           <a:latin typeface="Kanit"/>
                         </a:rPr>
-                        <a:t>76.2%</a:t>
+                        <a:t>33.3%</a:t>
                       </a:r>
                     </a:p>
                   </a:txBody>
@@ -8114,7 +8114,7 @@
                           </a:solidFill>
                           <a:latin typeface="Kanit"/>
                         </a:rPr>
-                        <a:t>4/9</a:t>
+                        <a:t>2/5</a:t>
                       </a:r>
                     </a:p>
                   </a:txBody>
@@ -8162,7 +8162,7 @@
                           </a:solidFill>
                           <a:latin typeface="Kanit"/>
                         </a:rPr>
-                        <a:t>นครนายก</a:t>
+                        <a:t>ปราจีนบุรี</a:t>
                       </a:r>
                     </a:p>
                   </a:txBody>
@@ -8185,7 +8185,7 @@
                           </a:solidFill>
                           <a:latin typeface="Kanit"/>
                         </a:rPr>
-                        <a:t>26</a:t>
+                        <a:t>33</a:t>
                       </a:r>
                     </a:p>
                   </a:txBody>
@@ -8208,7 +8208,7 @@
                           </a:solidFill>
                           <a:latin typeface="Kanit"/>
                         </a:rPr>
-                        <a:t>127</a:t>
+                        <a:t>75</a:t>
                       </a:r>
                     </a:p>
                   </a:txBody>
@@ -8231,7 +8231,7 @@
                           </a:solidFill>
                           <a:latin typeface="Kanit"/>
                         </a:rPr>
-                        <a:t>50.0%</a:t>
+                        <a:t>21.2%</a:t>
                       </a:r>
                     </a:p>
                   </a:txBody>
@@ -8254,7 +8254,7 @@
                           </a:solidFill>
                           <a:latin typeface="Kanit"/>
                         </a:rPr>
-                        <a:t>2/6</a:t>
+                        <a:t>2/15</a:t>
                       </a:r>
                     </a:p>
                   </a:txBody>
@@ -8302,7 +8302,7 @@
                           </a:solidFill>
                           <a:latin typeface="Kanit"/>
                         </a:rPr>
-                        <a:t>ปทุมธานี</a:t>
+                        <a:t>จันทบุรี</a:t>
                       </a:r>
                     </a:p>
                   </a:txBody>
@@ -8325,7 +8325,7 @@
                           </a:solidFill>
                           <a:latin typeface="Kanit"/>
                         </a:rPr>
-                        <a:t>10</a:t>
+                        <a:t>53</a:t>
                       </a:r>
                     </a:p>
                   </a:txBody>
@@ -8348,7 +8348,7 @@
                           </a:solidFill>
                           <a:latin typeface="Kanit"/>
                         </a:rPr>
-                        <a:t>72</a:t>
+                        <a:t>58</a:t>
                       </a:r>
                     </a:p>
                   </a:txBody>
@@ -8371,7 +8371,7 @@
                           </a:solidFill>
                           <a:latin typeface="Kanit"/>
                         </a:rPr>
-                        <a:t>50.0%</a:t>
+                        <a:t>17.0%</a:t>
                       </a:r>
                     </a:p>
                   </a:txBody>
@@ -8394,7 +8394,7 @@
                           </a:solidFill>
                           <a:latin typeface="Kanit"/>
                         </a:rPr>
-                        <a:t>3/4</a:t>
+                        <a:t>5/11</a:t>
                       </a:r>
                     </a:p>
                   </a:txBody>
@@ -8442,7 +8442,7 @@
                           </a:solidFill>
                           <a:latin typeface="Kanit"/>
                         </a:rPr>
-                        <a:t>จันทบุรี</a:t>
+                        <a:t>ตราด</a:t>
                       </a:r>
                     </a:p>
                   </a:txBody>
@@ -8465,7 +8465,7 @@
                           </a:solidFill>
                           <a:latin typeface="Kanit"/>
                         </a:rPr>
-                        <a:t>52</a:t>
+                        <a:t>42</a:t>
                       </a:r>
                     </a:p>
                   </a:txBody>
@@ -8488,7 +8488,7 @@
                           </a:solidFill>
                           <a:latin typeface="Kanit"/>
                         </a:rPr>
-                        <a:t>170</a:t>
+                        <a:t>64</a:t>
                       </a:r>
                     </a:p>
                   </a:txBody>
@@ -8511,7 +8511,7 @@
                           </a:solidFill>
                           <a:latin typeface="Kanit"/>
                         </a:rPr>
-                        <a:t>34.6%</a:t>
+                        <a:t>16.7%</a:t>
                       </a:r>
                     </a:p>
                   </a:txBody>
@@ -8534,7 +8534,7 @@
                           </a:solidFill>
                           <a:latin typeface="Kanit"/>
                         </a:rPr>
-                        <a:t>3/11</a:t>
+                        <a:t>5/9</a:t>
                       </a:r>
                     </a:p>
                   </a:txBody>
@@ -8582,7 +8582,7 @@
                           </a:solidFill>
                           <a:latin typeface="Kanit"/>
                         </a:rPr>
-                        <a:t>ลพบุรี</a:t>
+                        <a:t>ชุมพร</a:t>
                       </a:r>
                     </a:p>
                   </a:txBody>
@@ -8605,7 +8605,7 @@
                           </a:solidFill>
                           <a:latin typeface="Kanit"/>
                         </a:rPr>
-                        <a:t>27</a:t>
+                        <a:t>91</a:t>
                       </a:r>
                     </a:p>
                   </a:txBody>
@@ -8628,7 +8628,7 @@
                           </a:solidFill>
                           <a:latin typeface="Kanit"/>
                         </a:rPr>
-                        <a:t>82</a:t>
+                        <a:t>52</a:t>
                       </a:r>
                     </a:p>
                   </a:txBody>
@@ -8651,7 +8651,7 @@
                           </a:solidFill>
                           <a:latin typeface="Kanit"/>
                         </a:rPr>
-                        <a:t>29.6%</a:t>
+                        <a:t>13.2%</a:t>
                       </a:r>
                     </a:p>
                   </a:txBody>
@@ -8674,7 +8674,7 @@
                           </a:solidFill>
                           <a:latin typeface="Kanit"/>
                         </a:rPr>
-                        <a:t>3/8</a:t>
+                        <a:t>3/14</a:t>
                       </a:r>
                     </a:p>
                   </a:txBody>
@@ -8909,7 +8909,7 @@
                 </a:solidFill>
                 <a:latin typeface="Kanit"/>
               </a:rPr>
-              <a:t>Planted area MEASURED (OAE — 3,295 amphoe crop rows). Drought is a MODELLED SPEI index from rainfall and evapotranspiration, refreshed monthly, retrieved 2026-07-20 — the best national-coverage signal available, but nobody has walked those districts. Rain and river telemetry MEASURED (ThaiWater, live, pulled daily and accumulated — a missed pull leaves a gap rather than an invented point) · rain to 2026-08-29, river to 2026-08-29. Structural flood exposure MEASURED (GISTDA 1:50,000 repeated-flooding census, 2005-2016 — a 12-year ground record, not a forecast).</a:t>
+              <a:t>Planted area MEASURED (OAE — 3,295 amphoe crop rows). Drought is a MODELLED SPEI index from rainfall and evapotranspiration, refreshed monthly, retrieved 2026-07-20 — the best national-coverage signal available, but nobody has walked those districts. Rain and river telemetry MEASURED (ThaiWater, live, pulled daily and accumulated — a missed pull leaves a gap rather than an invented point) · rain to 2026-08-30, river to 2026-08-30. Structural flood exposure MEASURED (GISTDA 1:50,000 repeated-flooding census, 2005-2016 — a 12-year ground record, not a forecast).</a:t>
             </a:r>
           </a:p>
         </p:txBody>
@@ -32047,7 +32047,7 @@
                 </a:solidFill>
                 <a:latin typeface="Kanit"/>
               </a:rPr>
-              <a:t>Vintages — world prices 2026M06 · Thai farm gate 2026-08-28 · Thai price history 2026-08-23 · crop cost of production OAE Cai-up 2568 (crop year 2568/69, OAE forecast Mar 2569) · drought 2026-06-21 · CPI 2026-05 · GDP 2026-Q1 · IMF WEO 2026 · resale index 2026-05 · registrations to 2026-01 · household debt NSO SES 2566 · wages NSO LFS 2568 · telemetry 2026-08-29.</a:t>
+              <a:t>Vintages — world prices 2026M06 · Thai farm gate 2026-08-28 · Thai price history 2026-08-23 · crop cost of production OAE Cai-up 2568 (crop year 2568/69, OAE forecast Mar 2569) · drought 2026-06-21 · CPI 2026-05 · GDP 2026-Q1 · IMF WEO 2026 · resale index 2026-05 · registrations to 2026-01 · household debt NSO SES 2566 · wages NSO LFS 2568 · telemetry 2026-08-30.</a:t>
             </a:r>
           </a:p>
         </p:txBody>
@@ -37087,7 +37087,7 @@
                 </a:solidFill>
                 <a:latin typeface="Kanit"/>
               </a:rPr>
-              <a:t>338 of 928 districts · 127 of 793 rivers high</a:t>
+              <a:t>338 of 928 districts · 136 of 793 rivers high</a:t>
             </a:r>
           </a:p>
         </p:txBody>
@@ -37859,7 +37859,7 @@
                           </a:solidFill>
                           <a:latin typeface="Kanit"/>
                         </a:rPr>
-                        <a:t>24/156</a:t>
+                        <a:t>25/156</a:t>
                       </a:r>
                     </a:p>
                   </a:txBody>
@@ -38091,7 +38091,7 @@
                           </a:solidFill>
                           <a:latin typeface="Kanit"/>
                         </a:rPr>
-                        <a:t>20/272</a:t>
+                        <a:t>19/273</a:t>
                       </a:r>
                     </a:p>
                   </a:txBody>
@@ -38323,7 +38323,7 @@
                           </a:solidFill>
                           <a:latin typeface="Kanit"/>
                         </a:rPr>
-                        <a:t>29/168</a:t>
+                        <a:t>31/167</a:t>
                       </a:r>
                     </a:p>
                   </a:txBody>
@@ -38555,7 +38555,7 @@
                           </a:solidFill>
                           <a:latin typeface="Kanit"/>
                         </a:rPr>
-                        <a:t>10/52</a:t>
+                        <a:t>15/52</a:t>
                       </a:r>
                     </a:p>
                   </a:txBody>
@@ -38787,7 +38787,7 @@
                           </a:solidFill>
                           <a:latin typeface="Kanit"/>
                         </a:rPr>
-                        <a:t>44/145</a:t>
+                        <a:t>46/145</a:t>
                       </a:r>
                     </a:p>
                   </a:txBody>

--- a/docs/decks/mcom-2026-08-05-macro.pptx
+++ b/docs/decks/mcom-2026-08-05-macro.pptx
@@ -6240,7 +6240,7 @@
                 </a:solidFill>
                 <a:latin typeface="Kanit"/>
               </a:rPr>
-              <a:t>136</a:t>
+              <a:t>133</a:t>
             </a:r>
           </a:p>
         </p:txBody>
@@ -6279,7 +6279,7 @@
                 </a:solidFill>
                 <a:latin typeface="Kanit"/>
               </a:rPr>
-              <a:t>of 793 (17.2%) · live · 2026-08-30</a:t>
+              <a:t>of 793 (16.8%) · live · 2026-09-01</a:t>
             </a:r>
           </a:p>
         </p:txBody>
@@ -6405,7 +6405,7 @@
                 </a:solidFill>
                 <a:latin typeface="Kanit"/>
               </a:rPr>
-              <a:t>37</a:t>
+              <a:t>29</a:t>
             </a:r>
           </a:p>
         </p:txBody>
@@ -6444,7 +6444,7 @@
                 </a:solidFill>
                 <a:latin typeface="Kanit"/>
               </a:rPr>
-              <a:t>latest daily reading · 2026-08-30</a:t>
+              <a:t>latest daily reading · 2026-09-01</a:t>
             </a:r>
           </a:p>
         </p:txBody>
@@ -7882,7 +7882,7 @@
                           </a:solidFill>
                           <a:latin typeface="Kanit"/>
                         </a:rPr>
-                        <a:t>สกลนคร</a:t>
+                        <a:t>กาญจนบุรี</a:t>
                       </a:r>
                     </a:p>
                   </a:txBody>
@@ -7905,7 +7905,7 @@
                           </a:solidFill>
                           <a:latin typeface="Kanit"/>
                         </a:rPr>
-                        <a:t>37</a:t>
+                        <a:t>86</a:t>
                       </a:r>
                     </a:p>
                   </a:txBody>
@@ -7928,7 +7928,7 @@
                           </a:solidFill>
                           <a:latin typeface="Kanit"/>
                         </a:rPr>
-                        <a:t>8</a:t>
+                        <a:t>94</a:t>
                       </a:r>
                     </a:p>
                   </a:txBody>
@@ -7947,11 +7947,11 @@
                       <a:r>
                         <a:rPr sz="900" b="1">
                           <a:solidFill>
-                            <a:srgbClr val="606060"/>
-                          </a:solidFill>
-                          <a:latin typeface="Kanit"/>
-                        </a:rPr>
-                        <a:t>0.0%</a:t>
+                            <a:srgbClr val="F5C242"/>
+                          </a:solidFill>
+                          <a:latin typeface="Kanit"/>
+                        </a:rPr>
+                        <a:t>18.6%</a:t>
                       </a:r>
                     </a:p>
                   </a:txBody>
@@ -7974,7 +7974,7 @@
                           </a:solidFill>
                           <a:latin typeface="Kanit"/>
                         </a:rPr>
-                        <a:t>7/13</a:t>
+                        <a:t>6/26</a:t>
                       </a:r>
                     </a:p>
                   </a:txBody>
@@ -8022,7 +8022,7 @@
                           </a:solidFill>
                           <a:latin typeface="Kanit"/>
                         </a:rPr>
-                        <a:t>ยโสธร</a:t>
+                        <a:t>อุทัยธานี</a:t>
                       </a:r>
                     </a:p>
                   </a:txBody>
@@ -8045,7 +8045,7 @@
                           </a:solidFill>
                           <a:latin typeface="Kanit"/>
                         </a:rPr>
-                        <a:t>15</a:t>
+                        <a:t>44</a:t>
                       </a:r>
                     </a:p>
                   </a:txBody>
@@ -8068,7 +8068,7 @@
                           </a:solidFill>
                           <a:latin typeface="Kanit"/>
                         </a:rPr>
-                        <a:t>76</a:t>
+                        <a:t>53</a:t>
                       </a:r>
                     </a:p>
                   </a:txBody>
@@ -8091,7 +8091,7 @@
                           </a:solidFill>
                           <a:latin typeface="Kanit"/>
                         </a:rPr>
-                        <a:t>33.3%</a:t>
+                        <a:t>6.8%</a:t>
                       </a:r>
                     </a:p>
                   </a:txBody>
@@ -8114,7 +8114,7 @@
                           </a:solidFill>
                           <a:latin typeface="Kanit"/>
                         </a:rPr>
-                        <a:t>2/5</a:t>
+                        <a:t>1/4</a:t>
                       </a:r>
                     </a:p>
                   </a:txBody>
@@ -8133,11 +8133,11 @@
                       <a:r>
                         <a:rPr sz="900" b="1">
                           <a:solidFill>
-                            <a:srgbClr val="F5C242"/>
-                          </a:solidFill>
-                          <a:latin typeface="Kanit"/>
-                        </a:rPr>
-                        <a:t>4</a:t>
+                            <a:srgbClr val="CC0000"/>
+                          </a:solidFill>
+                          <a:latin typeface="Kanit"/>
+                        </a:rPr>
+                        <a:t>5</a:t>
                       </a:r>
                     </a:p>
                   </a:txBody>
@@ -8162,7 +8162,7 @@
                           </a:solidFill>
                           <a:latin typeface="Kanit"/>
                         </a:rPr>
-                        <a:t>ปราจีนบุรี</a:t>
+                        <a:t>เลย</a:t>
                       </a:r>
                     </a:p>
                   </a:txBody>
@@ -8185,7 +8185,7 @@
                           </a:solidFill>
                           <a:latin typeface="Kanit"/>
                         </a:rPr>
-                        <a:t>33</a:t>
+                        <a:t>111</a:t>
                       </a:r>
                     </a:p>
                   </a:txBody>
@@ -8208,7 +8208,7 @@
                           </a:solidFill>
                           <a:latin typeface="Kanit"/>
                         </a:rPr>
-                        <a:t>75</a:t>
+                        <a:t>127</a:t>
                       </a:r>
                     </a:p>
                   </a:txBody>
@@ -8231,7 +8231,7 @@
                           </a:solidFill>
                           <a:latin typeface="Kanit"/>
                         </a:rPr>
-                        <a:t>21.2%</a:t>
+                        <a:t>0.9%</a:t>
                       </a:r>
                     </a:p>
                   </a:txBody>
@@ -8254,7 +8254,7 @@
                           </a:solidFill>
                           <a:latin typeface="Kanit"/>
                         </a:rPr>
-                        <a:t>2/15</a:t>
+                        <a:t>1/8</a:t>
                       </a:r>
                     </a:p>
                   </a:txBody>
@@ -8273,11 +8273,11 @@
                       <a:r>
                         <a:rPr sz="900" b="1">
                           <a:solidFill>
-                            <a:srgbClr val="F5C242"/>
-                          </a:solidFill>
-                          <a:latin typeface="Kanit"/>
-                        </a:rPr>
-                        <a:t>4</a:t>
+                            <a:srgbClr val="CC0000"/>
+                          </a:solidFill>
+                          <a:latin typeface="Kanit"/>
+                        </a:rPr>
+                        <a:t>5</a:t>
                       </a:r>
                     </a:p>
                   </a:txBody>
@@ -8302,7 +8302,7 @@
                           </a:solidFill>
                           <a:latin typeface="Kanit"/>
                         </a:rPr>
-                        <a:t>จันทบุรี</a:t>
+                        <a:t>สกลนคร</a:t>
                       </a:r>
                     </a:p>
                   </a:txBody>
@@ -8325,7 +8325,7 @@
                           </a:solidFill>
                           <a:latin typeface="Kanit"/>
                         </a:rPr>
-                        <a:t>53</a:t>
+                        <a:t>38</a:t>
                       </a:r>
                     </a:p>
                   </a:txBody>
@@ -8348,7 +8348,7 @@
                           </a:solidFill>
                           <a:latin typeface="Kanit"/>
                         </a:rPr>
-                        <a:t>58</a:t>
+                        <a:t>14</a:t>
                       </a:r>
                     </a:p>
                   </a:txBody>
@@ -8367,11 +8367,11 @@
                       <a:r>
                         <a:rPr sz="900" b="1">
                           <a:solidFill>
-                            <a:srgbClr val="F5C242"/>
-                          </a:solidFill>
-                          <a:latin typeface="Kanit"/>
-                        </a:rPr>
-                        <a:t>17.0%</a:t>
+                            <a:srgbClr val="606060"/>
+                          </a:solidFill>
+                          <a:latin typeface="Kanit"/>
+                        </a:rPr>
+                        <a:t>0.0%</a:t>
                       </a:r>
                     </a:p>
                   </a:txBody>
@@ -8394,7 +8394,7 @@
                           </a:solidFill>
                           <a:latin typeface="Kanit"/>
                         </a:rPr>
-                        <a:t>5/11</a:t>
+                        <a:t>7/13</a:t>
                       </a:r>
                     </a:p>
                   </a:txBody>
@@ -8413,11 +8413,11 @@
                       <a:r>
                         <a:rPr sz="900" b="1">
                           <a:solidFill>
-                            <a:srgbClr val="F5C242"/>
-                          </a:solidFill>
-                          <a:latin typeface="Kanit"/>
-                        </a:rPr>
-                        <a:t>4</a:t>
+                            <a:srgbClr val="CC0000"/>
+                          </a:solidFill>
+                          <a:latin typeface="Kanit"/>
+                        </a:rPr>
+                        <a:t>5</a:t>
                       </a:r>
                     </a:p>
                   </a:txBody>
@@ -8442,7 +8442,7 @@
                           </a:solidFill>
                           <a:latin typeface="Kanit"/>
                         </a:rPr>
-                        <a:t>ตราด</a:t>
+                        <a:t>สมุทรปราการ</a:t>
                       </a:r>
                     </a:p>
                   </a:txBody>
@@ -8465,7 +8465,7 @@
                           </a:solidFill>
                           <a:latin typeface="Kanit"/>
                         </a:rPr>
-                        <a:t>42</a:t>
+                        <a:t>16</a:t>
                       </a:r>
                     </a:p>
                   </a:txBody>
@@ -8488,7 +8488,7 @@
                           </a:solidFill>
                           <a:latin typeface="Kanit"/>
                         </a:rPr>
-                        <a:t>64</a:t>
+                        <a:t>20</a:t>
                       </a:r>
                     </a:p>
                   </a:txBody>
@@ -8507,11 +8507,11 @@
                       <a:r>
                         <a:rPr sz="900" b="1">
                           <a:solidFill>
-                            <a:srgbClr val="F5C242"/>
-                          </a:solidFill>
-                          <a:latin typeface="Kanit"/>
-                        </a:rPr>
-                        <a:t>16.7%</a:t>
+                            <a:srgbClr val="606060"/>
+                          </a:solidFill>
+                          <a:latin typeface="Kanit"/>
+                        </a:rPr>
+                        <a:t>0.0%</a:t>
                       </a:r>
                     </a:p>
                   </a:txBody>
@@ -8534,7 +8534,7 @@
                           </a:solidFill>
                           <a:latin typeface="Kanit"/>
                         </a:rPr>
-                        <a:t>5/9</a:t>
+                        <a:t>4/5</a:t>
                       </a:r>
                     </a:p>
                   </a:txBody>
@@ -8553,11 +8553,11 @@
                       <a:r>
                         <a:rPr sz="900" b="1">
                           <a:solidFill>
-                            <a:srgbClr val="F5C242"/>
-                          </a:solidFill>
-                          <a:latin typeface="Kanit"/>
-                        </a:rPr>
-                        <a:t>4</a:t>
+                            <a:srgbClr val="CC0000"/>
+                          </a:solidFill>
+                          <a:latin typeface="Kanit"/>
+                        </a:rPr>
+                        <a:t>5</a:t>
                       </a:r>
                     </a:p>
                   </a:txBody>
@@ -8582,7 +8582,7 @@
                           </a:solidFill>
                           <a:latin typeface="Kanit"/>
                         </a:rPr>
-                        <a:t>ชุมพร</a:t>
+                        <a:t>อุบลราชธานี</a:t>
                       </a:r>
                     </a:p>
                   </a:txBody>
@@ -8605,7 +8605,7 @@
                           </a:solidFill>
                           <a:latin typeface="Kanit"/>
                         </a:rPr>
-                        <a:t>91</a:t>
+                        <a:t>46</a:t>
                       </a:r>
                     </a:p>
                   </a:txBody>
@@ -8628,7 +8628,7 @@
                           </a:solidFill>
                           <a:latin typeface="Kanit"/>
                         </a:rPr>
-                        <a:t>52</a:t>
+                        <a:t>65</a:t>
                       </a:r>
                     </a:p>
                   </a:txBody>
@@ -8651,7 +8651,7 @@
                           </a:solidFill>
                           <a:latin typeface="Kanit"/>
                         </a:rPr>
-                        <a:t>13.2%</a:t>
+                        <a:t>23.9%</a:t>
                       </a:r>
                     </a:p>
                   </a:txBody>
@@ -8674,7 +8674,7 @@
                           </a:solidFill>
                           <a:latin typeface="Kanit"/>
                         </a:rPr>
-                        <a:t>3/14</a:t>
+                        <a:t>2/15</a:t>
                       </a:r>
                     </a:p>
                   </a:txBody>
@@ -8909,7 +8909,7 @@
                 </a:solidFill>
                 <a:latin typeface="Kanit"/>
               </a:rPr>
-              <a:t>Planted area MEASURED (OAE — 3,295 amphoe crop rows). Drought is a MODELLED SPEI index from rainfall and evapotranspiration, refreshed monthly, retrieved 2026-07-20 — the best national-coverage signal available, but nobody has walked those districts. Rain and river telemetry MEASURED (ThaiWater, live, pulled daily and accumulated — a missed pull leaves a gap rather than an invented point) · rain to 2026-08-30, river to 2026-08-30. Structural flood exposure MEASURED (GISTDA 1:50,000 repeated-flooding census, 2005-2016 — a 12-year ground record, not a forecast).</a:t>
+              <a:t>Planted area MEASURED (OAE — 3,295 amphoe crop rows). Drought is a MODELLED SPEI index from rainfall and evapotranspiration, refreshed monthly, retrieved 2026-07-20 — the best national-coverage signal available, but nobody has walked those districts. Rain and river telemetry MEASURED (ThaiWater, live, pulled daily and accumulated — a missed pull leaves a gap rather than an invented point) · rain to 2026-09-01, river to 2026-09-01. Structural flood exposure MEASURED (GISTDA 1:50,000 repeated-flooding census, 2005-2016 — a 12-year ground record, not a forecast).</a:t>
             </a:r>
           </a:p>
         </p:txBody>
@@ -32047,7 +32047,7 @@
                 </a:solidFill>
                 <a:latin typeface="Kanit"/>
               </a:rPr>
-              <a:t>Vintages — world prices 2026M06 · Thai farm gate 2026-08-28 · Thai price history 2026-08-23 · crop cost of production OAE Cai-up 2568 (crop year 2568/69, OAE forecast Mar 2569) · drought 2026-06-21 · CPI 2026-05 · GDP 2026-Q1 · IMF WEO 2026 · resale index 2026-05 · registrations to 2026-01 · household debt NSO SES 2566 · wages NSO LFS 2568 · telemetry 2026-08-30.</a:t>
+              <a:t>Vintages — world prices 2026M06 · Thai farm gate 2026-08-28 · Thai price history 2026-08-29 · crop cost of production OAE Cai-up 2568 (crop year 2568/69, OAE forecast Mar 2569) · drought 2026-06-21 · CPI 2026-05 · GDP 2026-Q1 · IMF WEO 2026 · resale index 2026-05 · registrations to 2026-01 · household debt NSO SES 2566 · wages NSO LFS 2568 · telemetry 2026-09-01.</a:t>
             </a:r>
           </a:p>
         </p:txBody>
@@ -33786,7 +33786,7 @@
                 </a:solidFill>
                 <a:latin typeface="Kanit"/>
               </a:rPr>
-              <a:t>Bank of Thailand · 2026-06</a:t>
+              <a:t>Bank of Thailand · 2026-08</a:t>
             </a:r>
           </a:p>
         </p:txBody>
@@ -33912,7 +33912,7 @@
                 </a:solidFill>
                 <a:latin typeface="Kanit"/>
               </a:rPr>
-              <a:t>32.69</a:t>
+              <a:t>33.16</a:t>
             </a:r>
           </a:p>
         </p:txBody>
@@ -33951,7 +33951,7 @@
                 </a:solidFill>
                 <a:latin typeface="Kanit"/>
               </a:rPr>
-              <a:t>ECB reference · 2026-08-24</a:t>
+              <a:t>ECB reference · 2026-08-31</a:t>
             </a:r>
           </a:p>
         </p:txBody>
@@ -35798,7 +35798,7 @@
                 </a:solidFill>
                 <a:latin typeface="Kanit"/>
               </a:rPr>
-              <a:t>NESDC 2026-Q1 · TPSO 2026-05 · Bank of Thailand 2026-06 · BIS 2025-Q4 · ECB 2026-08-24, each pulled from the publishing agency. IMF World Economic Outlook 2026 (pulled 2026-07-25) for the peer table. BoT published NPL ratio — 4.48% at 2026-Q1, 4.33% the quarter before, +0.24pp on the year, 3.08% low in 2021-Q1.</a:t>
+              <a:t>NESDC 2026-Q1 · TPSO 2026-05 · Bank of Thailand 2026-08 · BIS 2025-Q4 · ECB 2026-08-31, each pulled from the publishing agency. IMF World Economic Outlook 2026 (pulled 2026-07-25) for the peer table. BoT published NPL ratio — 4.48% at 2026-Q1, 4.33% the quarter before, +0.24pp on the year, 3.08% low in 2021-Q1.</a:t>
             </a:r>
           </a:p>
         </p:txBody>
@@ -37087,7 +37087,7 @@
                 </a:solidFill>
                 <a:latin typeface="Kanit"/>
               </a:rPr>
-              <a:t>338 of 928 districts · 136 of 793 rivers high</a:t>
+              <a:t>338 of 928 districts · 133 of 793 rivers high</a:t>
             </a:r>
           </a:p>
         </p:txBody>
@@ -37859,7 +37859,7 @@
                           </a:solidFill>
                           <a:latin typeface="Kanit"/>
                         </a:rPr>
-                        <a:t>25/156</a:t>
+                        <a:t>27/156</a:t>
                       </a:r>
                     </a:p>
                   </a:txBody>
@@ -38091,7 +38091,7 @@
                           </a:solidFill>
                           <a:latin typeface="Kanit"/>
                         </a:rPr>
-                        <a:t>19/273</a:t>
+                        <a:t>17/274</a:t>
                       </a:r>
                     </a:p>
                   </a:txBody>
@@ -38323,7 +38323,7 @@
                           </a:solidFill>
                           <a:latin typeface="Kanit"/>
                         </a:rPr>
-                        <a:t>31/167</a:t>
+                        <a:t>25/167</a:t>
                       </a:r>
                     </a:p>
                   </a:txBody>
@@ -38555,7 +38555,7 @@
                           </a:solidFill>
                           <a:latin typeface="Kanit"/>
                         </a:rPr>
-                        <a:t>15/52</a:t>
+                        <a:t>15/51</a:t>
                       </a:r>
                     </a:p>
                   </a:txBody>
@@ -38787,7 +38787,7 @@
                           </a:solidFill>
                           <a:latin typeface="Kanit"/>
                         </a:rPr>
-                        <a:t>46/145</a:t>
+                        <a:t>49/145</a:t>
                       </a:r>
                     </a:p>
                   </a:txBody>
@@ -39959,7 +39959,7 @@
                           </a:solidFill>
                           <a:latin typeface="Kanit"/>
                         </a:rPr>
-                        <a:t>−50.1%</a:t>
+                        <a:t>−50.7%</a:t>
                       </a:r>
                     </a:p>
                   </a:txBody>
@@ -40791,7 +40791,7 @@
                 </a:solidFill>
                 <a:latin typeface="Kanit"/>
               </a:rPr>
-              <a:t>Prices MEASURED — NABC daily quotes for the Thai farm gate, OCSB announced cane price; newest quote 2026-08-28. The six-month move is computed from NABC's own monthly series (thai_price_history, vintage 2026-08-23); a crop with no monthly series is marked, never estimated. Belt is an ESTIMATED read of where each commodity is produced, and belts overlap. Farming accounts are OURS and MEASURED — accounts whose recorded occupation is เกษตร in the belt provinces, from the 382,735-account tape at 2026-07; no cell below 30 accounts is published. They live where the crop grows; they are not confirmed to grow it.</a:t>
+              <a:t>Prices MEASURED — NABC daily quotes for the Thai farm gate, OCSB announced cane price; newest quote 2026-08-28. The six-month move is computed from NABC's own monthly series (thai_price_history, vintage 2026-08-29); a crop with no monthly series is marked, never estimated. Belt is an ESTIMATED read of where each commodity is produced, and belts overlap. Farming accounts are OURS and MEASURED — accounts whose recorded occupation is เกษตร in the belt provinces, from the 382,735-account tape at 2026-07; no cell below 30 accounts is published. They live where the crop grows; they are not confirmed to grow it.</a:t>
             </a:r>
           </a:p>
         </p:txBody>
@@ -43419,7 +43419,7 @@
                           </a:solidFill>
                           <a:latin typeface="Kanit"/>
                         </a:rPr>
-                        <a:t>90.86</a:t>
+                        <a:t>92.20</a:t>
                       </a:r>
                     </a:p>
                   </a:txBody>
@@ -43559,7 +43559,7 @@
                           </a:solidFill>
                           <a:latin typeface="Kanit"/>
                         </a:rPr>
-                        <a:t>15,264</a:t>
+                        <a:t>15,488</a:t>
                       </a:r>
                     </a:p>
                   </a:txBody>
@@ -43699,7 +43699,7 @@
                           </a:solidFill>
                           <a:latin typeface="Kanit"/>
                         </a:rPr>
-                        <a:t>35,986</a:t>
+                        <a:t>36,515</a:t>
                       </a:r>
                     </a:p>
                   </a:txBody>
@@ -43839,7 +43839,7 @@
                           </a:solidFill>
                           <a:latin typeface="Kanit"/>
                         </a:rPr>
-                        <a:t>11.11</a:t>
+                        <a:t>11.28</a:t>
                       </a:r>
                     </a:p>
                   </a:txBody>
@@ -44058,7 +44058,7 @@
                 </a:solidFill>
                 <a:latin typeface="Kanit"/>
               </a:rPr>
-              <a:t>World Bank Pink Sheet nominal-USD monthly prices, vintage 2026M07 (60 observations per series, rebased to 100 at 2021-07 for the chart — units differ, so raw levels can’t share an axis). Baht conversion at the ECB reference rate USD/THB 32.685, 2026-08-24. Planted-area share MEASURED, OAE/DOAE crop mix (crop_mix.json). Nominal, not deflated: five years of Thai CPI sit under every ‘vs 5 yrs ago’ figure.</a:t>
+              <a:t>World Bank Pink Sheet nominal-USD monthly prices, vintage 2026M07 (60 observations per series, rebased to 100 at 2021-07 for the chart — units differ, so raw levels can’t share an axis). Baht conversion at the ECB reference rate USD/THB 33.165, 2026-08-31. Planted-area share MEASURED, OAE/DOAE crop mix (crop_mix.json). Nominal, not deflated: five years of Thai CPI sit under every ‘vs 5 yrs ago’ figure.</a:t>
             </a:r>
           </a:p>
         </p:txBody>
@@ -47985,7 +47985,7 @@
                 </a:solidFill>
                 <a:latin typeface="Kanit"/>
               </a:rPr>
-              <a:t>฿606.15 /ร้อยผล · S·E</a:t>
+              <a:t>฿596.84 /ร้อยผล · S·E</a:t>
             </a:r>
           </a:p>
         </p:txBody>
@@ -48063,7 +48063,7 @@
                 </a:solidFill>
                 <a:latin typeface="Kanit"/>
               </a:rPr>
-              <a:t>6m −50.1%</a:t>
+              <a:t>6m −50.7%</a:t>
             </a:r>
           </a:p>
         </p:txBody>
@@ -48137,19 +48137,19 @@
                   <a:pt x="0" y="0"/>
                 </a:moveTo>
                 <a:lnTo>
-                  <a:pt x="412943" y="167653"/>
-                </a:lnTo>
-                <a:lnTo>
-                  <a:pt x="825886" y="145107"/>
-                </a:lnTo>
-                <a:lnTo>
-                  <a:pt x="1238829" y="402654"/>
+                  <a:pt x="412943" y="170673"/>
+                </a:lnTo>
+                <a:lnTo>
+                  <a:pt x="825886" y="145193"/>
+                </a:lnTo>
+                <a:lnTo>
+                  <a:pt x="1238829" y="399195"/>
                 </a:lnTo>
                 <a:lnTo>
                   <a:pt x="1651772" y="457200"/>
                 </a:lnTo>
                 <a:lnTo>
-                  <a:pt x="2064715" y="401204"/>
+                  <a:pt x="2064715" y="409348"/>
                 </a:lnTo>
               </a:path>
             </a:pathLst>
@@ -48192,7 +48192,7 @@
         </p:nvSpPr>
         <p:spPr>
           <a:xfrm>
-            <a:off x="2480767" y="2806076"/>
+            <a:off x="2480767" y="2814220"/>
             <a:ext cx="82296" cy="82296"/>
           </a:xfrm>
           <a:prstGeom prst="roundRect">
@@ -48621,7 +48621,7 @@
                 </a:solidFill>
                 <a:latin typeface="Kanit"/>
               </a:rPr>
-              <a:t>฿143.00 /กก. · S·E coast</a:t>
+              <a:t>฿143.14 /กก. · S·E coast</a:t>
             </a:r>
           </a:p>
         </p:txBody>
@@ -48699,7 +48699,7 @@
                 </a:solidFill>
                 <a:latin typeface="Kanit"/>
               </a:rPr>
-              <a:t>6m −2.1%</a:t>
+              <a:t>6m −2.0%</a:t>
             </a:r>
           </a:p>
         </p:txBody>
@@ -48770,19 +48770,19 @@
             <a:pathLst>
               <a:path w="2064715" h="457200">
                 <a:moveTo>
-                  <a:pt x="0" y="217911"/>
+                  <a:pt x="0" y="216948"/>
                 </a:moveTo>
                 <a:lnTo>
-                  <a:pt x="412943" y="415692"/>
+                  <a:pt x="412943" y="415955"/>
                 </a:lnTo>
                 <a:lnTo>
                   <a:pt x="825886" y="457200"/>
                 </a:lnTo>
                 <a:lnTo>
-                  <a:pt x="1238829" y="420051"/>
-                </a:lnTo>
-                <a:lnTo>
-                  <a:pt x="1651772" y="168518"/>
+                  <a:pt x="1238829" y="420285"/>
+                </a:lnTo>
+                <a:lnTo>
+                  <a:pt x="1651772" y="170341"/>
                 </a:lnTo>
                 <a:lnTo>
                   <a:pt x="2064715" y="0"/>
@@ -48939,7 +48939,7 @@
                 </a:solidFill>
                 <a:latin typeface="Kanit"/>
               </a:rPr>
-              <a:t>฿43.00 /กก. · C·E</a:t>
+              <a:t>฿43.05 /กก. · C·E</a:t>
             </a:r>
           </a:p>
         </p:txBody>
@@ -49017,7 +49017,7 @@
                 </a:solidFill>
                 <a:latin typeface="Kanit"/>
               </a:rPr>
-              <a:t>6m +2.3%</a:t>
+              <a:t>6m +2.4%</a:t>
             </a:r>
           </a:p>
         </p:txBody>
@@ -49091,19 +49091,19 @@
                   <a:pt x="0" y="0"/>
                 </a:moveTo>
                 <a:lnTo>
-                  <a:pt x="412943" y="111737"/>
-                </a:lnTo>
-                <a:lnTo>
-                  <a:pt x="825886" y="304458"/>
+                  <a:pt x="412943" y="119484"/>
+                </a:lnTo>
+                <a:lnTo>
+                  <a:pt x="825886" y="305129"/>
                 </a:lnTo>
                 <a:lnTo>
                   <a:pt x="1238829" y="457200"/>
                 </a:lnTo>
                 <a:lnTo>
-                  <a:pt x="1651772" y="242951"/>
-                </a:lnTo>
-                <a:lnTo>
-                  <a:pt x="2064715" y="88159"/>
+                  <a:pt x="1651772" y="245880"/>
+                </a:lnTo>
+                <a:lnTo>
+                  <a:pt x="2064715" y="91834"/>
                 </a:lnTo>
               </a:path>
             </a:pathLst>
@@ -49146,7 +49146,7 @@
         </p:nvSpPr>
         <p:spPr>
           <a:xfrm>
-            <a:off x="9388144" y="2493031"/>
+            <a:off x="9388144" y="2496706"/>
             <a:ext cx="82296" cy="82296"/>
           </a:xfrm>
           <a:prstGeom prst="roundRect">
@@ -49257,7 +49257,7 @@
                 </a:solidFill>
                 <a:latin typeface="Kanit"/>
               </a:rPr>
-              <a:t>฿346.15 /ร้อยฟอง · C·E</a:t>
+              <a:t>฿350.53 /ร้อยฟอง · C·E</a:t>
             </a:r>
           </a:p>
         </p:txBody>
@@ -49335,7 +49335,7 @@
                 </a:solidFill>
                 <a:latin typeface="Kanit"/>
               </a:rPr>
-              <a:t>6m +14.4%</a:t>
+              <a:t>6m +15.9%</a:t>
             </a:r>
           </a:p>
         </p:txBody>
@@ -49409,16 +49409,16 @@
                   <a:pt x="0" y="457200"/>
                 </a:moveTo>
                 <a:lnTo>
-                  <a:pt x="412943" y="191637"/>
-                </a:lnTo>
-                <a:lnTo>
-                  <a:pt x="825886" y="191637"/>
-                </a:lnTo>
-                <a:lnTo>
-                  <a:pt x="1238829" y="292498"/>
-                </a:lnTo>
-                <a:lnTo>
-                  <a:pt x="1651772" y="90775"/>
+                  <a:pt x="412943" y="218744"/>
+                </a:lnTo>
+                <a:lnTo>
+                  <a:pt x="825886" y="218744"/>
+                </a:lnTo>
+                <a:lnTo>
+                  <a:pt x="1238829" y="309310"/>
+                </a:lnTo>
+                <a:lnTo>
+                  <a:pt x="1651772" y="128177"/>
                 </a:lnTo>
                 <a:lnTo>
                   <a:pt x="2064715" y="0"/>
@@ -49575,7 +49575,7 @@
                 </a:solidFill>
                 <a:latin typeface="Kanit"/>
               </a:rPr>
-              <a:t>฿70.33 /กก. · C·W·E</a:t>
+              <a:t>฿71.18 /กก. · C·W·E</a:t>
             </a:r>
           </a:p>
         </p:txBody>
@@ -49653,7 +49653,7 @@
                 </a:solidFill>
                 <a:latin typeface="Kanit"/>
               </a:rPr>
-              <a:t>6m +26.7%</a:t>
+              <a:t>6m +28.2%</a:t>
             </a:r>
           </a:p>
         </p:txBody>
@@ -49724,19 +49724,19 @@
             <a:pathLst>
               <a:path w="2064715" h="457200">
                 <a:moveTo>
-                  <a:pt x="0" y="361078"/>
+                  <a:pt x="0" y="371819"/>
                 </a:moveTo>
                 <a:lnTo>
-                  <a:pt x="412943" y="110564"/>
+                  <a:pt x="412943" y="140924"/>
                 </a:lnTo>
                 <a:lnTo>
                   <a:pt x="825886" y="457200"/>
                 </a:lnTo>
                 <a:lnTo>
-                  <a:pt x="1238829" y="293843"/>
-                </a:lnTo>
-                <a:lnTo>
-                  <a:pt x="1651772" y="177301"/>
+                  <a:pt x="1238829" y="309849"/>
+                </a:lnTo>
+                <a:lnTo>
+                  <a:pt x="1651772" y="196008"/>
                 </a:lnTo>
                 <a:lnTo>
                   <a:pt x="2064715" y="0"/>
@@ -49893,7 +49893,7 @@
                 </a:solidFill>
                 <a:latin typeface="Kanit"/>
               </a:rPr>
-              <a:t>฿17,815 /ตัน · Isan·N·C</a:t>
+              <a:t>฿17,763 /ตัน · Isan·N·C</a:t>
             </a:r>
           </a:p>
         </p:txBody>
@@ -49971,7 +49971,7 @@
                 </a:solidFill>
                 <a:latin typeface="Kanit"/>
               </a:rPr>
-              <a:t>6m +8.2%</a:t>
+              <a:t>6m +7.7%</a:t>
             </a:r>
           </a:p>
         </p:txBody>
@@ -50045,16 +50045,16 @@
                   <a:pt x="0" y="457200"/>
                 </a:moveTo>
                 <a:lnTo>
-                  <a:pt x="412943" y="349810"/>
-                </a:lnTo>
-                <a:lnTo>
-                  <a:pt x="825886" y="168554"/>
-                </a:lnTo>
-                <a:lnTo>
-                  <a:pt x="1238829" y="54643"/>
-                </a:lnTo>
-                <a:lnTo>
-                  <a:pt x="1651772" y="63603"/>
+                  <a:pt x="412943" y="341371"/>
+                </a:lnTo>
+                <a:lnTo>
+                  <a:pt x="825886" y="153981"/>
+                </a:lnTo>
+                <a:lnTo>
+                  <a:pt x="1238829" y="34219"/>
+                </a:lnTo>
+                <a:lnTo>
+                  <a:pt x="1651772" y="23720"/>
                 </a:lnTo>
                 <a:lnTo>
                   <a:pt x="2064715" y="0"/>
@@ -50211,7 +50211,7 @@
                 </a:solidFill>
                 <a:latin typeface="Kanit"/>
               </a:rPr>
-              <a:t>฿9.87 /กก. · North</a:t>
+              <a:t>฿9.76 /กก. · North</a:t>
             </a:r>
           </a:p>
         </p:txBody>
@@ -50289,7 +50289,7 @@
                 </a:solidFill>
                 <a:latin typeface="Kanit"/>
               </a:rPr>
-              <a:t>6m +10.9%</a:t>
+              <a:t>6m +9.7%</a:t>
             </a:r>
           </a:p>
         </p:txBody>
@@ -50363,19 +50363,19 @@
                   <a:pt x="0" y="457200"/>
                 </a:moveTo>
                 <a:lnTo>
-                  <a:pt x="412943" y="355874"/>
-                </a:lnTo>
-                <a:lnTo>
-                  <a:pt x="825886" y="86497"/>
+                  <a:pt x="412943" y="350931"/>
+                </a:lnTo>
+                <a:lnTo>
+                  <a:pt x="825886" y="79083"/>
                 </a:lnTo>
                 <a:lnTo>
                   <a:pt x="1238829" y="0"/>
                 </a:lnTo>
                 <a:lnTo>
-                  <a:pt x="1651772" y="46955"/>
-                </a:lnTo>
-                <a:lnTo>
-                  <a:pt x="2064715" y="269377"/>
+                  <a:pt x="1651772" y="54369"/>
+                </a:lnTo>
+                <a:lnTo>
+                  <a:pt x="2064715" y="294090"/>
                 </a:lnTo>
               </a:path>
             </a:pathLst>
@@ -50418,7 +50418,7 @@
         </p:nvSpPr>
         <p:spPr>
           <a:xfrm>
-            <a:off x="7085685" y="3780673"/>
+            <a:off x="7085685" y="3805386"/>
             <a:ext cx="82296" cy="82296"/>
           </a:xfrm>
           <a:prstGeom prst="roundRect">
@@ -50529,7 +50529,7 @@
                 </a:solidFill>
                 <a:latin typeface="Kanit"/>
               </a:rPr>
-              <a:t>฿8.55 /กก. · South</a:t>
+              <a:t>฿8.51 /กก. · South</a:t>
             </a:r>
           </a:p>
         </p:txBody>
@@ -50607,7 +50607,7 @@
                 </a:solidFill>
                 <a:latin typeface="Kanit"/>
               </a:rPr>
-              <a:t>6m +25.0%</a:t>
+              <a:t>6m +24.6%</a:t>
             </a:r>
           </a:p>
         </p:txBody>
@@ -50678,19 +50678,19 @@
             <a:pathLst>
               <a:path w="2064715" h="457200">
                 <a:moveTo>
-                  <a:pt x="0" y="453788"/>
+                  <a:pt x="0" y="453709"/>
                 </a:moveTo>
                 <a:lnTo>
-                  <a:pt x="412943" y="446964"/>
+                  <a:pt x="412943" y="439749"/>
                 </a:lnTo>
                 <a:lnTo>
                   <a:pt x="825886" y="457200"/>
                 </a:lnTo>
                 <a:lnTo>
-                  <a:pt x="1238829" y="300250"/>
-                </a:lnTo>
-                <a:lnTo>
-                  <a:pt x="1651772" y="85298"/>
+                  <a:pt x="1238829" y="293166"/>
+                </a:lnTo>
+                <a:lnTo>
+                  <a:pt x="1651772" y="76781"/>
                 </a:lnTo>
                 <a:lnTo>
                   <a:pt x="2064715" y="0"/>
@@ -50847,7 +50847,7 @@
                 </a:solidFill>
                 <a:latin typeface="Kanit"/>
               </a:rPr>
-              <a:t>฿81.51 /กก. · S·E</a:t>
+              <a:t>฿81.23 /กก. · S·E</a:t>
             </a:r>
           </a:p>
         </p:txBody>
@@ -50925,7 +50925,7 @@
                 </a:solidFill>
                 <a:latin typeface="Kanit"/>
               </a:rPr>
-              <a:t>6m +35.1%</a:t>
+              <a:t>6m +34.6%</a:t>
             </a:r>
           </a:p>
         </p:txBody>
@@ -50999,19 +50999,19 @@
                   <a:pt x="0" y="457200"/>
                 </a:moveTo>
                 <a:lnTo>
-                  <a:pt x="412943" y="287287"/>
-                </a:lnTo>
-                <a:lnTo>
-                  <a:pt x="825886" y="158892"/>
+                  <a:pt x="412943" y="282748"/>
+                </a:lnTo>
+                <a:lnTo>
+                  <a:pt x="825886" y="158359"/>
                 </a:lnTo>
                 <a:lnTo>
                   <a:pt x="1238829" y="0"/>
                 </a:lnTo>
                 <a:lnTo>
-                  <a:pt x="1651772" y="38185"/>
-                </a:lnTo>
-                <a:lnTo>
-                  <a:pt x="2064715" y="115325"/>
+                  <a:pt x="1651772" y="39334"/>
+                </a:lnTo>
+                <a:lnTo>
+                  <a:pt x="2064715" y="122090"/>
                 </a:lnTo>
               </a:path>
             </a:pathLst>
@@ -51054,7 +51054,7 @@
         </p:nvSpPr>
         <p:spPr>
           <a:xfrm>
-            <a:off x="11690603" y="3626621"/>
+            <a:off x="11690603" y="3633386"/>
             <a:ext cx="82296" cy="82296"/>
           </a:xfrm>
           <a:prstGeom prst="roundRect">
@@ -51165,7 +51165,7 @@
                 </a:solidFill>
                 <a:latin typeface="Kanit"/>
               </a:rPr>
-              <a:t>฿3.75 /กก. · Isan·N·E</a:t>
+              <a:t>฿3.81 /กก. · Isan·N·E</a:t>
             </a:r>
           </a:p>
         </p:txBody>
@@ -51243,7 +51243,7 @@
                 </a:solidFill>
                 <a:latin typeface="Kanit"/>
               </a:rPr>
-              <a:t>6m +48.8%</a:t>
+              <a:t>6m +51.8%</a:t>
             </a:r>
           </a:p>
         </p:txBody>
@@ -51317,16 +51317,16 @@
                   <a:pt x="0" y="457200"/>
                 </a:moveTo>
                 <a:lnTo>
-                  <a:pt x="412943" y="352338"/>
-                </a:lnTo>
-                <a:lnTo>
-                  <a:pt x="825886" y="268448"/>
-                </a:lnTo>
-                <a:lnTo>
-                  <a:pt x="1238829" y="163586"/>
-                </a:lnTo>
-                <a:lnTo>
-                  <a:pt x="1651772" y="125835"/>
+                  <a:pt x="412943" y="357809"/>
+                </a:lnTo>
+                <a:lnTo>
+                  <a:pt x="825886" y="278296"/>
+                </a:lnTo>
+                <a:lnTo>
+                  <a:pt x="1238829" y="178905"/>
+                </a:lnTo>
+                <a:lnTo>
+                  <a:pt x="1651772" y="143124"/>
                 </a:lnTo>
                 <a:lnTo>
                   <a:pt x="2064715" y="0"/>
@@ -51483,7 +51483,7 @@
                 </a:solidFill>
                 <a:latin typeface="Kanit"/>
               </a:rPr>
-              <a:t>฿129.23 /ร้อยผล · C·W</a:t>
+              <a:t>฿146.32 /ร้อยผล · C·W</a:t>
             </a:r>
           </a:p>
         </p:txBody>
@@ -51561,7 +51561,7 @@
                 </a:solidFill>
                 <a:latin typeface="Kanit"/>
               </a:rPr>
-              <a:t>6m −38.5%</a:t>
+              <a:t>6m −30.3%</a:t>
             </a:r>
           </a:p>
         </p:txBody>
@@ -51647,7 +51647,7 @@
                   <a:pt x="1651772" y="457200"/>
                 </a:lnTo>
                 <a:lnTo>
-                  <a:pt x="2064715" y="428011"/>
+                  <a:pt x="2064715" y="416732"/>
                 </a:lnTo>
               </a:path>
             </a:pathLst>
@@ -51690,7 +51690,7 @@
         </p:nvSpPr>
         <p:spPr>
           <a:xfrm>
-            <a:off x="4783226" y="5045730"/>
+            <a:off x="4783226" y="5034451"/>
             <a:ext cx="82296" cy="82296"/>
           </a:xfrm>
           <a:prstGeom prst="roundRect">
@@ -51886,7 +51886,7 @@
                 </a:solidFill>
                 <a:latin typeface="Kanit"/>
               </a:rPr>
-              <a:t>Farm-gate prices MEASURED — NABC daily quotes, monthly means, in baht as published (no currency conversion); newest quote 2026-08-28, history vintage 2026-08-23. Farm gate (ราคาที่เกษตรกรขายได้) is what the grower is paid at first sale, before trading, milling or transport take a cut — not the world index and not a supermarket price. Belts are an ESTIMATED read of where each commodity is produced, and they overlap. Sugar is OCSB's announced season price, one point a year, so it has no six-month move to show.</a:t>
+              <a:t>Farm-gate prices MEASURED — NABC daily quotes, monthly means, in baht as published (no currency conversion); newest quote 2026-08-28, history vintage 2026-08-29. Farm gate (ราคาที่เกษตรกรขายได้) is what the grower is paid at first sale, before trading, milling or transport take a cut — not the world index and not a supermarket price. Belts are an ESTIMATED read of where each commodity is produced, and they overlap. Sugar is OCSB's announced season price, one point a year, so it has no six-month move to show.</a:t>
             </a:r>
           </a:p>
         </p:txBody>

--- a/docs/decks/mcom-2026-08-05-macro.pptx
+++ b/docs/decks/mcom-2026-08-05-macro.pptx
@@ -6240,7 +6240,7 @@
                 </a:solidFill>
                 <a:latin typeface="Kanit"/>
               </a:rPr>
-              <a:t>133</a:t>
+              <a:t>131</a:t>
             </a:r>
           </a:p>
         </p:txBody>
@@ -6279,7 +6279,7 @@
                 </a:solidFill>
                 <a:latin typeface="Kanit"/>
               </a:rPr>
-              <a:t>of 793 (16.8%) · live · 2026-09-01</a:t>
+              <a:t>of 792 (16.5%) · live · 2026-09-02</a:t>
             </a:r>
           </a:p>
         </p:txBody>
@@ -6405,7 +6405,7 @@
                 </a:solidFill>
                 <a:latin typeface="Kanit"/>
               </a:rPr>
-              <a:t>29</a:t>
+              <a:t>18</a:t>
             </a:r>
           </a:p>
         </p:txBody>
@@ -6444,7 +6444,7 @@
                 </a:solidFill>
                 <a:latin typeface="Kanit"/>
               </a:rPr>
-              <a:t>latest daily reading · 2026-09-01</a:t>
+              <a:t>latest daily reading · 2026-09-02</a:t>
             </a:r>
           </a:p>
         </p:txBody>
@@ -7882,7 +7882,7 @@
                           </a:solidFill>
                           <a:latin typeface="Kanit"/>
                         </a:rPr>
-                        <a:t>กาญจนบุรี</a:t>
+                        <a:t>สกลนคร</a:t>
                       </a:r>
                     </a:p>
                   </a:txBody>
@@ -7905,7 +7905,7 @@
                           </a:solidFill>
                           <a:latin typeface="Kanit"/>
                         </a:rPr>
-                        <a:t>86</a:t>
+                        <a:t>38</a:t>
                       </a:r>
                     </a:p>
                   </a:txBody>
@@ -7928,7 +7928,7 @@
                           </a:solidFill>
                           <a:latin typeface="Kanit"/>
                         </a:rPr>
-                        <a:t>94</a:t>
+                        <a:t>40</a:t>
                       </a:r>
                     </a:p>
                   </a:txBody>
@@ -7951,7 +7951,7 @@
                           </a:solidFill>
                           <a:latin typeface="Kanit"/>
                         </a:rPr>
-                        <a:t>18.6%</a:t>
+                        <a:t>2.6%</a:t>
                       </a:r>
                     </a:p>
                   </a:txBody>
@@ -7974,7 +7974,7 @@
                           </a:solidFill>
                           <a:latin typeface="Kanit"/>
                         </a:rPr>
-                        <a:t>6/26</a:t>
+                        <a:t>7/12</a:t>
                       </a:r>
                     </a:p>
                   </a:txBody>
@@ -8045,7 +8045,7 @@
                           </a:solidFill>
                           <a:latin typeface="Kanit"/>
                         </a:rPr>
-                        <a:t>44</a:t>
+                        <a:t>42</a:t>
                       </a:r>
                     </a:p>
                   </a:txBody>
@@ -8068,7 +8068,7 @@
                           </a:solidFill>
                           <a:latin typeface="Kanit"/>
                         </a:rPr>
-                        <a:t>53</a:t>
+                        <a:t>5</a:t>
                       </a:r>
                     </a:p>
                   </a:txBody>
@@ -8087,11 +8087,11 @@
                       <a:r>
                         <a:rPr sz="900" b="1">
                           <a:solidFill>
-                            <a:srgbClr val="F5C242"/>
-                          </a:solidFill>
-                          <a:latin typeface="Kanit"/>
-                        </a:rPr>
-                        <a:t>6.8%</a:t>
+                            <a:srgbClr val="606060"/>
+                          </a:solidFill>
+                          <a:latin typeface="Kanit"/>
+                        </a:rPr>
+                        <a:t>0.0%</a:t>
                       </a:r>
                     </a:p>
                   </a:txBody>
@@ -8185,7 +8185,7 @@
                           </a:solidFill>
                           <a:latin typeface="Kanit"/>
                         </a:rPr>
-                        <a:t>111</a:t>
+                        <a:t>110</a:t>
                       </a:r>
                     </a:p>
                   </a:txBody>
@@ -8208,7 +8208,7 @@
                           </a:solidFill>
                           <a:latin typeface="Kanit"/>
                         </a:rPr>
-                        <a:t>127</a:t>
+                        <a:t>5</a:t>
                       </a:r>
                     </a:p>
                   </a:txBody>
@@ -8227,11 +8227,11 @@
                       <a:r>
                         <a:rPr sz="900" b="1">
                           <a:solidFill>
-                            <a:srgbClr val="F5C242"/>
-                          </a:solidFill>
-                          <a:latin typeface="Kanit"/>
-                        </a:rPr>
-                        <a:t>0.9%</a:t>
+                            <a:srgbClr val="606060"/>
+                          </a:solidFill>
+                          <a:latin typeface="Kanit"/>
+                        </a:rPr>
+                        <a:t>0.0%</a:t>
                       </a:r>
                     </a:p>
                   </a:txBody>
@@ -8302,7 +8302,7 @@
                           </a:solidFill>
                           <a:latin typeface="Kanit"/>
                         </a:rPr>
-                        <a:t>สกลนคร</a:t>
+                        <a:t>บึงกาฬ</a:t>
                       </a:r>
                     </a:p>
                   </a:txBody>
@@ -8325,7 +8325,7 @@
                           </a:solidFill>
                           <a:latin typeface="Kanit"/>
                         </a:rPr>
-                        <a:t>38</a:t>
+                        <a:t>11</a:t>
                       </a:r>
                     </a:p>
                   </a:txBody>
@@ -8348,7 +8348,7 @@
                           </a:solidFill>
                           <a:latin typeface="Kanit"/>
                         </a:rPr>
-                        <a:t>14</a:t>
+                        <a:t>55</a:t>
                       </a:r>
                     </a:p>
                   </a:txBody>
@@ -8367,11 +8367,11 @@
                       <a:r>
                         <a:rPr sz="900" b="1">
                           <a:solidFill>
-                            <a:srgbClr val="606060"/>
-                          </a:solidFill>
-                          <a:latin typeface="Kanit"/>
-                        </a:rPr>
-                        <a:t>0.0%</a:t>
+                            <a:srgbClr val="F5C242"/>
+                          </a:solidFill>
+                          <a:latin typeface="Kanit"/>
+                        </a:rPr>
+                        <a:t>36.4%</a:t>
                       </a:r>
                     </a:p>
                   </a:txBody>
@@ -8394,7 +8394,7 @@
                           </a:solidFill>
                           <a:latin typeface="Kanit"/>
                         </a:rPr>
-                        <a:t>7/13</a:t>
+                        <a:t>1/1</a:t>
                       </a:r>
                     </a:p>
                   </a:txBody>
@@ -8413,11 +8413,11 @@
                       <a:r>
                         <a:rPr sz="900" b="1">
                           <a:solidFill>
-                            <a:srgbClr val="CC0000"/>
-                          </a:solidFill>
-                          <a:latin typeface="Kanit"/>
-                        </a:rPr>
-                        <a:t>5</a:t>
+                            <a:srgbClr val="F5C242"/>
+                          </a:solidFill>
+                          <a:latin typeface="Kanit"/>
+                        </a:rPr>
+                        <a:t>4</a:t>
                       </a:r>
                     </a:p>
                   </a:txBody>
@@ -8442,7 +8442,7 @@
                           </a:solidFill>
                           <a:latin typeface="Kanit"/>
                         </a:rPr>
-                        <a:t>สมุทรปราการ</a:t>
+                        <a:t>อุดรธานี</a:t>
                       </a:r>
                     </a:p>
                   </a:txBody>
@@ -8465,7 +8465,7 @@
                           </a:solidFill>
                           <a:latin typeface="Kanit"/>
                         </a:rPr>
-                        <a:t>16</a:t>
+                        <a:t>35</a:t>
                       </a:r>
                     </a:p>
                   </a:txBody>
@@ -8488,7 +8488,7 @@
                           </a:solidFill>
                           <a:latin typeface="Kanit"/>
                         </a:rPr>
-                        <a:t>20</a:t>
+                        <a:t>44</a:t>
                       </a:r>
                     </a:p>
                   </a:txBody>
@@ -8507,11 +8507,11 @@
                       <a:r>
                         <a:rPr sz="900" b="1">
                           <a:solidFill>
-                            <a:srgbClr val="606060"/>
-                          </a:solidFill>
-                          <a:latin typeface="Kanit"/>
-                        </a:rPr>
-                        <a:t>0.0%</a:t>
+                            <a:srgbClr val="F5C242"/>
+                          </a:solidFill>
+                          <a:latin typeface="Kanit"/>
+                        </a:rPr>
+                        <a:t>17.1%</a:t>
                       </a:r>
                     </a:p>
                   </a:txBody>
@@ -8534,7 +8534,7 @@
                           </a:solidFill>
                           <a:latin typeface="Kanit"/>
                         </a:rPr>
-                        <a:t>4/5</a:t>
+                        <a:t>3/7</a:t>
                       </a:r>
                     </a:p>
                   </a:txBody>
@@ -8553,11 +8553,11 @@
                       <a:r>
                         <a:rPr sz="900" b="1">
                           <a:solidFill>
-                            <a:srgbClr val="CC0000"/>
-                          </a:solidFill>
-                          <a:latin typeface="Kanit"/>
-                        </a:rPr>
-                        <a:t>5</a:t>
+                            <a:srgbClr val="F5C242"/>
+                          </a:solidFill>
+                          <a:latin typeface="Kanit"/>
+                        </a:rPr>
+                        <a:t>4</a:t>
                       </a:r>
                     </a:p>
                   </a:txBody>
@@ -8582,7 +8582,7 @@
                           </a:solidFill>
                           <a:latin typeface="Kanit"/>
                         </a:rPr>
-                        <a:t>อุบลราชธานี</a:t>
+                        <a:t>สมุทรสงคราม</a:t>
                       </a:r>
                     </a:p>
                   </a:txBody>
@@ -8605,7 +8605,7 @@
                           </a:solidFill>
                           <a:latin typeface="Kanit"/>
                         </a:rPr>
-                        <a:t>46</a:t>
+                        <a:t>6</a:t>
                       </a:r>
                     </a:p>
                   </a:txBody>
@@ -8628,7 +8628,7 @@
                           </a:solidFill>
                           <a:latin typeface="Kanit"/>
                         </a:rPr>
-                        <a:t>65</a:t>
+                        <a:t>35</a:t>
                       </a:r>
                     </a:p>
                   </a:txBody>
@@ -8651,7 +8651,7 @@
                           </a:solidFill>
                           <a:latin typeface="Kanit"/>
                         </a:rPr>
-                        <a:t>23.9%</a:t>
+                        <a:t>16.7%</a:t>
                       </a:r>
                     </a:p>
                   </a:txBody>
@@ -8674,7 +8674,7 @@
                           </a:solidFill>
                           <a:latin typeface="Kanit"/>
                         </a:rPr>
-                        <a:t>2/15</a:t>
+                        <a:t>1/2</a:t>
                       </a:r>
                     </a:p>
                   </a:txBody>
@@ -8909,7 +8909,7 @@
                 </a:solidFill>
                 <a:latin typeface="Kanit"/>
               </a:rPr>
-              <a:t>Planted area MEASURED (OAE — 3,295 amphoe crop rows). Drought is a MODELLED SPEI index from rainfall and evapotranspiration, refreshed monthly, retrieved 2026-07-20 — the best national-coverage signal available, but nobody has walked those districts. Rain and river telemetry MEASURED (ThaiWater, live, pulled daily and accumulated — a missed pull leaves a gap rather than an invented point) · rain to 2026-09-01, river to 2026-09-01. Structural flood exposure MEASURED (GISTDA 1:50,000 repeated-flooding census, 2005-2016 — a 12-year ground record, not a forecast).</a:t>
+              <a:t>Planted area MEASURED (OAE — 3,295 amphoe crop rows). Drought is a MODELLED SPEI index from rainfall and evapotranspiration, refreshed monthly, retrieved 2026-07-20 — the best national-coverage signal available, but nobody has walked those districts. Rain and river telemetry MEASURED (ThaiWater, live, pulled daily and accumulated — a missed pull leaves a gap rather than an invented point) · rain to 2026-09-02, river to 2026-09-02. Structural flood exposure MEASURED (GISTDA 1:50,000 repeated-flooding census, 2005-2016 — a 12-year ground record, not a forecast).</a:t>
             </a:r>
           </a:p>
         </p:txBody>
@@ -32047,7 +32047,7 @@
                 </a:solidFill>
                 <a:latin typeface="Kanit"/>
               </a:rPr>
-              <a:t>Vintages — world prices 2026M06 · Thai farm gate 2026-08-28 · Thai price history 2026-08-29 · crop cost of production OAE Cai-up 2568 (crop year 2568/69, OAE forecast Mar 2569) · drought 2026-06-21 · CPI 2026-05 · GDP 2026-Q1 · IMF WEO 2026 · resale index 2026-05 · registrations to 2026-01 · household debt NSO SES 2566 · wages NSO LFS 2568 · telemetry 2026-09-01.</a:t>
+              <a:t>Vintages — world prices 2026M06 · Thai farm gate 2026-08-28 · Thai price history 2026-08-29 · crop cost of production OAE Cai-up 2568 (crop year 2568/69, OAE forecast Mar 2569) · drought 2026-06-21 · CPI 2026-05 · GDP 2026-Q1 · IMF WEO 2026 · resale index 2026-05 · registrations to 2026-01 · household debt NSO SES 2566 · wages NSO LFS 2568 · telemetry 2026-09-02.</a:t>
             </a:r>
           </a:p>
         </p:txBody>
@@ -37087,7 +37087,7 @@
                 </a:solidFill>
                 <a:latin typeface="Kanit"/>
               </a:rPr>
-              <a:t>338 of 928 districts · 133 of 793 rivers high</a:t>
+              <a:t>338 of 928 districts · 131 of 792 rivers high</a:t>
             </a:r>
           </a:p>
         </p:txBody>
@@ -37859,7 +37859,7 @@
                           </a:solidFill>
                           <a:latin typeface="Kanit"/>
                         </a:rPr>
-                        <a:t>27/156</a:t>
+                        <a:t>28/157</a:t>
                       </a:r>
                     </a:p>
                   </a:txBody>
@@ -38555,7 +38555,7 @@
                           </a:solidFill>
                           <a:latin typeface="Kanit"/>
                         </a:rPr>
-                        <a:t>15/51</a:t>
+                        <a:t>16/51</a:t>
                       </a:r>
                     </a:p>
                   </a:txBody>
@@ -38787,7 +38787,7 @@
                           </a:solidFill>
                           <a:latin typeface="Kanit"/>
                         </a:rPr>
-                        <a:t>49/145</a:t>
+                        <a:t>45/143</a:t>
                       </a:r>
                     </a:p>
                   </a:txBody>

--- a/docs/decks/mcom-2026-08-05-macro.pptx
+++ b/docs/decks/mcom-2026-08-05-macro.pptx
@@ -6240,7 +6240,7 @@
                 </a:solidFill>
                 <a:latin typeface="Kanit"/>
               </a:rPr>
-              <a:t>131</a:t>
+              <a:t>123</a:t>
             </a:r>
           </a:p>
         </p:txBody>
@@ -6279,7 +6279,7 @@
                 </a:solidFill>
                 <a:latin typeface="Kanit"/>
               </a:rPr>
-              <a:t>of 792 (16.5%) · live · 2026-09-02</a:t>
+              <a:t>of 793 (15.5%) · live · 2026-09-05</a:t>
             </a:r>
           </a:p>
         </p:txBody>
@@ -6405,7 +6405,7 @@
                 </a:solidFill>
                 <a:latin typeface="Kanit"/>
               </a:rPr>
-              <a:t>18</a:t>
+              <a:t>25</a:t>
             </a:r>
           </a:p>
         </p:txBody>
@@ -6444,7 +6444,7 @@
                 </a:solidFill>
                 <a:latin typeface="Kanit"/>
               </a:rPr>
-              <a:t>latest daily reading · 2026-09-02</a:t>
+              <a:t>latest daily reading · 2026-09-05</a:t>
             </a:r>
           </a:p>
         </p:txBody>
@@ -7928,7 +7928,7 @@
                           </a:solidFill>
                           <a:latin typeface="Kanit"/>
                         </a:rPr>
-                        <a:t>40</a:t>
+                        <a:t>52</a:t>
                       </a:r>
                     </a:p>
                   </a:txBody>
@@ -7974,7 +7974,7 @@
                           </a:solidFill>
                           <a:latin typeface="Kanit"/>
                         </a:rPr>
-                        <a:t>7/12</a:t>
+                        <a:t>6/13</a:t>
                       </a:r>
                     </a:p>
                   </a:txBody>
@@ -8045,7 +8045,7 @@
                           </a:solidFill>
                           <a:latin typeface="Kanit"/>
                         </a:rPr>
-                        <a:t>42</a:t>
+                        <a:t>44</a:t>
                       </a:r>
                     </a:p>
                   </a:txBody>
@@ -8068,7 +8068,7 @@
                           </a:solidFill>
                           <a:latin typeface="Kanit"/>
                         </a:rPr>
-                        <a:t>5</a:t>
+                        <a:t>9</a:t>
                       </a:r>
                     </a:p>
                   </a:txBody>
@@ -8162,7 +8162,7 @@
                           </a:solidFill>
                           <a:latin typeface="Kanit"/>
                         </a:rPr>
-                        <a:t>เลย</a:t>
+                        <a:t>นครพนม</a:t>
                       </a:r>
                     </a:p>
                   </a:txBody>
@@ -8185,7 +8185,7 @@
                           </a:solidFill>
                           <a:latin typeface="Kanit"/>
                         </a:rPr>
-                        <a:t>110</a:t>
+                        <a:t>28</a:t>
                       </a:r>
                     </a:p>
                   </a:txBody>
@@ -8208,7 +8208,7 @@
                           </a:solidFill>
                           <a:latin typeface="Kanit"/>
                         </a:rPr>
-                        <a:t>5</a:t>
+                        <a:t>49</a:t>
                       </a:r>
                     </a:p>
                   </a:txBody>
@@ -8227,11 +8227,11 @@
                       <a:r>
                         <a:rPr sz="900" b="1">
                           <a:solidFill>
-                            <a:srgbClr val="606060"/>
-                          </a:solidFill>
-                          <a:latin typeface="Kanit"/>
-                        </a:rPr>
-                        <a:t>0.0%</a:t>
+                            <a:srgbClr val="F5C242"/>
+                          </a:solidFill>
+                          <a:latin typeface="Kanit"/>
+                        </a:rPr>
+                        <a:t>25.0%</a:t>
                       </a:r>
                     </a:p>
                   </a:txBody>
@@ -8254,7 +8254,7 @@
                           </a:solidFill>
                           <a:latin typeface="Kanit"/>
                         </a:rPr>
-                        <a:t>1/8</a:t>
+                        <a:t>8/14</a:t>
                       </a:r>
                     </a:p>
                   </a:txBody>
@@ -8273,11 +8273,11 @@
                       <a:r>
                         <a:rPr sz="900" b="1">
                           <a:solidFill>
-                            <a:srgbClr val="CC0000"/>
-                          </a:solidFill>
-                          <a:latin typeface="Kanit"/>
-                        </a:rPr>
-                        <a:t>5</a:t>
+                            <a:srgbClr val="F5C242"/>
+                          </a:solidFill>
+                          <a:latin typeface="Kanit"/>
+                        </a:rPr>
+                        <a:t>4</a:t>
                       </a:r>
                     </a:p>
                   </a:txBody>
@@ -8302,7 +8302,7 @@
                           </a:solidFill>
                           <a:latin typeface="Kanit"/>
                         </a:rPr>
-                        <a:t>บึงกาฬ</a:t>
+                        <a:t>พะเยา</a:t>
                       </a:r>
                     </a:p>
                   </a:txBody>
@@ -8325,7 +8325,7 @@
                           </a:solidFill>
                           <a:latin typeface="Kanit"/>
                         </a:rPr>
-                        <a:t>11</a:t>
+                        <a:t>126</a:t>
                       </a:r>
                     </a:p>
                   </a:txBody>
@@ -8348,7 +8348,7 @@
                           </a:solidFill>
                           <a:latin typeface="Kanit"/>
                         </a:rPr>
-                        <a:t>55</a:t>
+                        <a:t>88</a:t>
                       </a:r>
                     </a:p>
                   </a:txBody>
@@ -8371,7 +8371,7 @@
                           </a:solidFill>
                           <a:latin typeface="Kanit"/>
                         </a:rPr>
-                        <a:t>36.4%</a:t>
+                        <a:t>14.3%</a:t>
                       </a:r>
                     </a:p>
                   </a:txBody>
@@ -8394,7 +8394,7 @@
                           </a:solidFill>
                           <a:latin typeface="Kanit"/>
                         </a:rPr>
-                        <a:t>1/1</a:t>
+                        <a:t>3/13</a:t>
                       </a:r>
                     </a:p>
                   </a:txBody>
@@ -8442,7 +8442,7 @@
                           </a:solidFill>
                           <a:latin typeface="Kanit"/>
                         </a:rPr>
-                        <a:t>อุดรธานี</a:t>
+                        <a:t>น่าน</a:t>
                       </a:r>
                     </a:p>
                   </a:txBody>
@@ -8465,7 +8465,7 @@
                           </a:solidFill>
                           <a:latin typeface="Kanit"/>
                         </a:rPr>
-                        <a:t>35</a:t>
+                        <a:t>217</a:t>
                       </a:r>
                     </a:p>
                   </a:txBody>
@@ -8488,7 +8488,7 @@
                           </a:solidFill>
                           <a:latin typeface="Kanit"/>
                         </a:rPr>
-                        <a:t>44</a:t>
+                        <a:t>101</a:t>
                       </a:r>
                     </a:p>
                   </a:txBody>
@@ -8511,7 +8511,7 @@
                           </a:solidFill>
                           <a:latin typeface="Kanit"/>
                         </a:rPr>
-                        <a:t>17.1%</a:t>
+                        <a:t>13.8%</a:t>
                       </a:r>
                     </a:p>
                   </a:txBody>
@@ -8534,7 +8534,7 @@
                           </a:solidFill>
                           <a:latin typeface="Kanit"/>
                         </a:rPr>
-                        <a:t>3/7</a:t>
+                        <a:t>1/26</a:t>
                       </a:r>
                     </a:p>
                   </a:txBody>
@@ -8582,7 +8582,7 @@
                           </a:solidFill>
                           <a:latin typeface="Kanit"/>
                         </a:rPr>
-                        <a:t>สมุทรสงคราม</a:t>
+                        <a:t>อุบลราชธานี</a:t>
                       </a:r>
                     </a:p>
                   </a:txBody>
@@ -8605,7 +8605,7 @@
                           </a:solidFill>
                           <a:latin typeface="Kanit"/>
                         </a:rPr>
-                        <a:t>6</a:t>
+                        <a:t>46</a:t>
                       </a:r>
                     </a:p>
                   </a:txBody>
@@ -8628,7 +8628,7 @@
                           </a:solidFill>
                           <a:latin typeface="Kanit"/>
                         </a:rPr>
-                        <a:t>35</a:t>
+                        <a:t>68</a:t>
                       </a:r>
                     </a:p>
                   </a:txBody>
@@ -8651,7 +8651,7 @@
                           </a:solidFill>
                           <a:latin typeface="Kanit"/>
                         </a:rPr>
-                        <a:t>16.7%</a:t>
+                        <a:t>10.9%</a:t>
                       </a:r>
                     </a:p>
                   </a:txBody>
@@ -8674,7 +8674,7 @@
                           </a:solidFill>
                           <a:latin typeface="Kanit"/>
                         </a:rPr>
-                        <a:t>1/2</a:t>
+                        <a:t>2/14</a:t>
                       </a:r>
                     </a:p>
                   </a:txBody>
@@ -8909,7 +8909,7 @@
                 </a:solidFill>
                 <a:latin typeface="Kanit"/>
               </a:rPr>
-              <a:t>Planted area MEASURED (OAE — 3,295 amphoe crop rows). Drought is a MODELLED SPEI index from rainfall and evapotranspiration, refreshed monthly, retrieved 2026-07-20 — the best national-coverage signal available, but nobody has walked those districts. Rain and river telemetry MEASURED (ThaiWater, live, pulled daily and accumulated — a missed pull leaves a gap rather than an invented point) · rain to 2026-09-02, river to 2026-09-02. Structural flood exposure MEASURED (GISTDA 1:50,000 repeated-flooding census, 2005-2016 — a 12-year ground record, not a forecast).</a:t>
+              <a:t>Planted area MEASURED (OAE — 3,295 amphoe crop rows). Drought is a MODELLED SPEI index from rainfall and evapotranspiration, refreshed monthly, retrieved 2026-07-20 — the best national-coverage signal available, but nobody has walked those districts. Rain and river telemetry MEASURED (ThaiWater, live, pulled daily and accumulated — a missed pull leaves a gap rather than an invented point) · rain to 2026-09-05, river to 2026-09-05. Structural flood exposure MEASURED (GISTDA 1:50,000 repeated-flooding census, 2005-2016 — a 12-year ground record, not a forecast).</a:t>
             </a:r>
           </a:p>
         </p:txBody>
@@ -31476,7 +31476,7 @@
                 </a:solidFill>
                 <a:latin typeface="Kanit"/>
               </a:rPr>
-              <a:t>Median crop income rose +16.8%, but four provinces fell — all on the coconut (มะพร้าว) belt, worst สมุทรสงคราม at −63.0%.</a:t>
+              <a:t>Median crop income rose +16.4%, but four provinces fell — all on the coconut (มะพร้าว) belt, worst สมุทรสงคราม at −63.5%.</a:t>
             </a:r>
           </a:p>
         </p:txBody>
@@ -31842,7 +31842,7 @@
                 </a:solidFill>
                 <a:latin typeface="Kanit"/>
               </a:rPr>
-              <a:t>Transport income moves −2.8% on one national fuel number, no Thai freight data behind it. Drought (ภัยแล้ง) is a rainfall model — nobody has walked those districts.</a:t>
+              <a:t>Transport income moves −4.8% on one national fuel number, no Thai freight data behind it. Drought (ภัยแล้ง) is a rainfall model — nobody has walked those districts.</a:t>
             </a:r>
           </a:p>
         </p:txBody>
@@ -32047,7 +32047,7 @@
                 </a:solidFill>
                 <a:latin typeface="Kanit"/>
               </a:rPr>
-              <a:t>Vintages — world prices 2026M06 · Thai farm gate 2026-08-28 · Thai price history 2026-08-29 · crop cost of production OAE Cai-up 2568 (crop year 2568/69, OAE forecast Mar 2569) · drought 2026-06-21 · CPI 2026-05 · GDP 2026-Q1 · IMF WEO 2026 · resale index 2026-05 · registrations to 2026-01 · household debt NSO SES 2566 · wages NSO LFS 2568 · telemetry 2026-09-02.</a:t>
+              <a:t>Vintages — world prices 2026M06 · Thai farm gate 2026-09-03 · Thai price history 2026-08-29 · crop cost of production OAE Cai-up 2568 (crop year 2568/69, OAE forecast Mar 2569) · drought 2026-06-21 · CPI 2026-05 · GDP 2026-Q1 · IMF WEO 2026 · resale index 2026-05 · registrations to 2026-01 · household debt NSO SES 2566 · wages NSO LFS 2568 · telemetry 2026-09-05.</a:t>
             </a:r>
           </a:p>
         </p:txBody>
@@ -32546,7 +32546,7 @@
               <a:t>Not on the world index — the farm gate (ราคาที่เกษตรกรขายได้) says otherwise.
 • Five of seventeen Thai farm-gate prices are falling year on year.
 • Beef: farm gate −6.1% vs world index +8.8%.
-• Margin over price: a 26% price move becomes an 86% swing in crop income.</a:t>
+• Margin over price: a 26% price move becomes an 85% swing in crop income.</a:t>
             </a:r>
           </a:p>
         </p:txBody>
@@ -37087,7 +37087,7 @@
                 </a:solidFill>
                 <a:latin typeface="Kanit"/>
               </a:rPr>
-              <a:t>338 of 928 districts · 131 of 792 rivers high</a:t>
+              <a:t>338 of 928 districts · 123 of 793 rivers high</a:t>
             </a:r>
           </a:p>
         </p:txBody>
@@ -37859,7 +37859,7 @@
                           </a:solidFill>
                           <a:latin typeface="Kanit"/>
                         </a:rPr>
-                        <a:t>28/157</a:t>
+                        <a:t>26/157</a:t>
                       </a:r>
                     </a:p>
                   </a:txBody>
@@ -38091,7 +38091,7 @@
                           </a:solidFill>
                           <a:latin typeface="Kanit"/>
                         </a:rPr>
-                        <a:t>17/274</a:t>
+                        <a:t>19/274</a:t>
                       </a:r>
                     </a:p>
                   </a:txBody>
@@ -38323,7 +38323,7 @@
                           </a:solidFill>
                           <a:latin typeface="Kanit"/>
                         </a:rPr>
-                        <a:t>25/167</a:t>
+                        <a:t>26/168</a:t>
                       </a:r>
                     </a:p>
                   </a:txBody>
@@ -38555,7 +38555,7 @@
                           </a:solidFill>
                           <a:latin typeface="Kanit"/>
                         </a:rPr>
-                        <a:t>16/51</a:t>
+                        <a:t>15/51</a:t>
                       </a:r>
                     </a:p>
                   </a:txBody>
@@ -38787,7 +38787,7 @@
                           </a:solidFill>
                           <a:latin typeface="Kanit"/>
                         </a:rPr>
-                        <a:t>45/143</a:t>
+                        <a:t>37/143</a:t>
                       </a:r>
                     </a:p>
                   </a:txBody>
@@ -39936,7 +39936,7 @@
                           </a:solidFill>
                           <a:latin typeface="Kanit"/>
                         </a:rPr>
-                        <a:t>−67.4%</a:t>
+                        <a:t>−67.9%</a:t>
                       </a:r>
                     </a:p>
                   </a:txBody>
@@ -40791,7 +40791,7 @@
                 </a:solidFill>
                 <a:latin typeface="Kanit"/>
               </a:rPr>
-              <a:t>Prices MEASURED — NABC daily quotes for the Thai farm gate, OCSB announced cane price; newest quote 2026-08-28. The six-month move is computed from NABC's own monthly series (thai_price_history, vintage 2026-08-29); a crop with no monthly series is marked, never estimated. Belt is an ESTIMATED read of where each commodity is produced, and belts overlap. Farming accounts are OURS and MEASURED — accounts whose recorded occupation is เกษตร in the belt provinces, from the 382,735-account tape at 2026-07; no cell below 30 accounts is published. They live where the crop grows; they are not confirmed to grow it.</a:t>
+              <a:t>Prices MEASURED — NABC daily quotes for the Thai farm gate, OCSB announced cane price; newest quote 2026-09-03. The six-month move is computed from NABC's own monthly series (thai_price_history, vintage 2026-08-29); a crop with no monthly series is marked, never estimated. Belt is an ESTIMATED read of where each commodity is produced, and belts overlap. Farming accounts are OURS and MEASURED — accounts whose recorded occupation is เกษตร in the belt provinces, from the 382,735-account tape at 2026-07; no cell below 30 accounts is published. They live where the crop grows; they are not confirmed to grow it.</a:t>
             </a:r>
           </a:p>
         </p:txBody>
@@ -44679,7 +44679,7 @@
                 </a:solidFill>
                 <a:latin typeface="Kanit"/>
               </a:rPr>
-              <a:t>coconut −67.4%, pineapple −18.4%, sugarcane −17.9% year on year</a:t>
+              <a:t>coconut −67.9%, pineapple −18.4%, sugarcane −17.9% year on year</a:t>
             </a:r>
           </a:p>
         </p:txBody>
@@ -44805,7 +44805,7 @@
                 </a:solidFill>
                 <a:latin typeface="Kanit"/>
               </a:rPr>
-              <a:t>+16.8%</a:t>
+              <a:t>+16.4%</a:t>
             </a:r>
           </a:p>
         </p:txBody>
@@ -45279,7 +45279,7 @@
                           </a:solidFill>
                           <a:latin typeface="Kanit"/>
                         </a:rPr>
-                        <a:t>+6.7%</a:t>
+                        <a:t>+6.2%</a:t>
                       </a:r>
                     </a:p>
                   </a:txBody>
@@ -45348,7 +45348,7 @@
                           </a:solidFill>
                           <a:latin typeface="Kanit"/>
                         </a:rPr>
-                        <a:t>-63.0%</a:t>
+                        <a:t>-63.5%</a:t>
                       </a:r>
                     </a:p>
                   </a:txBody>
@@ -45419,7 +45419,7 @@
                           </a:solidFill>
                           <a:latin typeface="Kanit"/>
                         </a:rPr>
-                        <a:t>+15.9%</a:t>
+                        <a:t>+15.4%</a:t>
                       </a:r>
                     </a:p>
                   </a:txBody>
@@ -45488,7 +45488,7 @@
                           </a:solidFill>
                           <a:latin typeface="Kanit"/>
                         </a:rPr>
-                        <a:t>+10.1%</a:t>
+                        <a:t>+9.6%</a:t>
                       </a:r>
                     </a:p>
                   </a:txBody>
@@ -45559,7 +45559,7 @@
                           </a:solidFill>
                           <a:latin typeface="Kanit"/>
                         </a:rPr>
-                        <a:t>+17.3%</a:t>
+                        <a:t>+16.9%</a:t>
                       </a:r>
                     </a:p>
                   </a:txBody>
@@ -45628,7 +45628,7 @@
                           </a:solidFill>
                           <a:latin typeface="Kanit"/>
                         </a:rPr>
-                        <a:t>+8.6%</a:t>
+                        <a:t>+8.3%</a:t>
                       </a:r>
                     </a:p>
                   </a:txBody>
@@ -45699,7 +45699,7 @@
                           </a:solidFill>
                           <a:latin typeface="Kanit"/>
                         </a:rPr>
-                        <a:t>+24.9%</a:t>
+                        <a:t>+24.8%</a:t>
                       </a:r>
                     </a:p>
                   </a:txBody>
@@ -45768,7 +45768,7 @@
                           </a:solidFill>
                           <a:latin typeface="Kanit"/>
                         </a:rPr>
-                        <a:t>+11.6%</a:t>
+                        <a:t>+11.3%</a:t>
                       </a:r>
                     </a:p>
                   </a:txBody>
@@ -45908,7 +45908,7 @@
                           </a:solidFill>
                           <a:latin typeface="Kanit"/>
                         </a:rPr>
-                        <a:t>+26.9%</a:t>
+                        <a:t>+26.8%</a:t>
                       </a:r>
                     </a:p>
                   </a:txBody>
@@ -46084,8 +46084,8 @@
                 </a:solidFill>
                 <a:latin typeface="Kanit"/>
               </a:rPr>
-              <a:t>•  +40% rubber, +74% cassava, +23% palm, +14% rice at the farm gate. Crop income rose in every region.
-•  Four provinces fell — all coconut, all on the western gulf. Coconut price is down 67%.
+              <a:t>•  +40% rubber, +75% cassava, +23% palm, +13% rice at the farm gate. Crop income rose in every region.
+•  Four provinces fell — all coconut, all on the western gulf. Coconut price is down 68%.
 •  A gain on paper is not cash yet — the next table nets prices against cost.</a:t>
             </a:r>
           </a:p>
@@ -46387,7 +46387,7 @@
                           </a:solidFill>
                           <a:latin typeface="Kanit"/>
                         </a:rPr>
-                        <a:t>+18.0%</a:t>
+                        <a:t>+17.6%</a:t>
                       </a:r>
                     </a:p>
                   </a:txBody>
@@ -46550,7 +46550,7 @@
                           </a:solidFill>
                           <a:latin typeface="Kanit"/>
                         </a:rPr>
-                        <a:t>+21.7%</a:t>
+                        <a:t>+21.3%</a:t>
                       </a:r>
                     </a:p>
                   </a:txBody>
@@ -46713,7 +46713,7 @@
                           </a:solidFill>
                           <a:latin typeface="Kanit"/>
                         </a:rPr>
-                        <a:t>+11.8%</a:t>
+                        <a:t>+11.3%</a:t>
                       </a:r>
                     </a:p>
                   </a:txBody>
@@ -47039,7 +47039,7 @@
                           </a:solidFill>
                           <a:latin typeface="Kanit"/>
                         </a:rPr>
-                        <a:t>+17.1%</a:t>
+                        <a:t>+16.7%</a:t>
                       </a:r>
                     </a:p>
                   </a:txBody>
@@ -47202,7 +47202,7 @@
                           </a:solidFill>
                           <a:latin typeface="Kanit"/>
                         </a:rPr>
-                        <a:t>+15.6%</a:t>
+                        <a:t>+15.1%</a:t>
                       </a:r>
                     </a:p>
                   </a:txBody>
@@ -48024,7 +48024,7 @@
                 </a:solidFill>
                 <a:latin typeface="Kanit"/>
               </a:rPr>
-              <a:t>YoY −67.4%</a:t>
+              <a:t>YoY −67.9%</a:t>
             </a:r>
           </a:p>
         </p:txBody>
@@ -48660,7 +48660,7 @@
                 </a:solidFill>
                 <a:latin typeface="Kanit"/>
               </a:rPr>
-              <a:t>YoY +0.9%</a:t>
+              <a:t>YoY +1.0%</a:t>
             </a:r>
           </a:p>
         </p:txBody>
@@ -48978,7 +48978,7 @@
                 </a:solidFill>
                 <a:latin typeface="Kanit"/>
               </a:rPr>
-              <a:t>YoY +3.9%</a:t>
+              <a:t>YoY +4.5%</a:t>
             </a:r>
           </a:p>
         </p:txBody>
@@ -49296,7 +49296,7 @@
                 </a:solidFill>
                 <a:latin typeface="Kanit"/>
               </a:rPr>
-              <a:t>YoY +4.4%</a:t>
+              <a:t>YoY +5.6%</a:t>
             </a:r>
           </a:p>
         </p:txBody>
@@ -49536,6 +49536,642 @@
                 </a:solidFill>
                 <a:latin typeface="Kanit"/>
               </a:rPr>
+              <a:t>Rice  ข้าวหอมมะลิ</a:t>
+            </a:r>
+          </a:p>
+        </p:txBody>
+      </p:sp>
+      <p:sp>
+        <p:nvSpPr>
+          <p:cNvPr id="51" name="TextBox 50"/>
+          <p:cNvSpPr txBox="1"/>
+          <p:nvPr/>
+        </p:nvSpPr>
+        <p:spPr>
+          <a:xfrm>
+            <a:off x="411480" y="3218687"/>
+            <a:ext cx="2156155" cy="125730"/>
+          </a:xfrm>
+          <a:prstGeom prst="rect">
+            <a:avLst/>
+          </a:prstGeom>
+          <a:noFill/>
+        </p:spPr>
+        <p:txBody>
+          <a:bodyPr wrap="square" lIns="0" rIns="0" tIns="0" bIns="0" anchor="t">
+            <a:noAutofit/>
+          </a:bodyPr>
+          <a:lstStyle/>
+          <a:p>
+            <a:pPr algn="l">
+              <a:lnSpc>
+                <a:spcPts val="990"/>
+              </a:lnSpc>
+            </a:pPr>
+            <a:r>
+              <a:rPr sz="750" b="0">
+                <a:solidFill>
+                  <a:srgbClr val="606060"/>
+                </a:solidFill>
+                <a:latin typeface="Kanit"/>
+              </a:rPr>
+              <a:t>฿17,763 /ตัน · Isan·N·C</a:t>
+            </a:r>
+          </a:p>
+        </p:txBody>
+      </p:sp>
+      <p:sp>
+        <p:nvSpPr>
+          <p:cNvPr id="52" name="TextBox 51"/>
+          <p:cNvSpPr txBox="1"/>
+          <p:nvPr/>
+        </p:nvSpPr>
+        <p:spPr>
+          <a:xfrm>
+            <a:off x="411480" y="3351275"/>
+            <a:ext cx="1078077" cy="134112"/>
+          </a:xfrm>
+          <a:prstGeom prst="rect">
+            <a:avLst/>
+          </a:prstGeom>
+          <a:noFill/>
+        </p:spPr>
+        <p:txBody>
+          <a:bodyPr wrap="square" lIns="0" rIns="0" tIns="0" bIns="0" anchor="t">
+            <a:noAutofit/>
+          </a:bodyPr>
+          <a:lstStyle/>
+          <a:p>
+            <a:pPr algn="l">
+              <a:lnSpc>
+                <a:spcPts val="1056"/>
+              </a:lnSpc>
+            </a:pPr>
+            <a:r>
+              <a:rPr sz="800" b="1">
+                <a:solidFill>
+                  <a:srgbClr val="15795F"/>
+                </a:solidFill>
+                <a:latin typeface="Kanit"/>
+              </a:rPr>
+              <a:t>YoY +13.4%</a:t>
+            </a:r>
+          </a:p>
+        </p:txBody>
+      </p:sp>
+      <p:sp>
+        <p:nvSpPr>
+          <p:cNvPr id="53" name="TextBox 52"/>
+          <p:cNvSpPr txBox="1"/>
+          <p:nvPr/>
+        </p:nvSpPr>
+        <p:spPr>
+          <a:xfrm>
+            <a:off x="1489557" y="3351275"/>
+            <a:ext cx="1078077" cy="134112"/>
+          </a:xfrm>
+          <a:prstGeom prst="rect">
+            <a:avLst/>
+          </a:prstGeom>
+          <a:noFill/>
+        </p:spPr>
+        <p:txBody>
+          <a:bodyPr wrap="square" lIns="0" rIns="0" tIns="0" bIns="0" anchor="t">
+            <a:noAutofit/>
+          </a:bodyPr>
+          <a:lstStyle/>
+          <a:p>
+            <a:pPr algn="l">
+              <a:lnSpc>
+                <a:spcPts val="1056"/>
+              </a:lnSpc>
+            </a:pPr>
+            <a:r>
+              <a:rPr sz="800" b="1">
+                <a:solidFill>
+                  <a:srgbClr val="15795F"/>
+                </a:solidFill>
+                <a:latin typeface="Kanit"/>
+              </a:rPr>
+              <a:t>6m +7.7%</a:t>
+            </a:r>
+          </a:p>
+        </p:txBody>
+      </p:sp>
+      <p:sp>
+        <p:nvSpPr>
+          <p:cNvPr id="54" name="Rectangle 53"/>
+          <p:cNvSpPr/>
+          <p:nvPr/>
+        </p:nvSpPr>
+        <p:spPr>
+          <a:xfrm>
+            <a:off x="411480" y="3506724"/>
+            <a:ext cx="2156155" cy="548640"/>
+          </a:xfrm>
+          <a:prstGeom prst="rect">
+            <a:avLst/>
+          </a:prstGeom>
+          <a:solidFill>
+            <a:srgbClr val="FBFCFE"/>
+          </a:solidFill>
+          <a:ln w="9525">
+            <a:solidFill>
+              <a:srgbClr val="D9DEE9"/>
+            </a:solidFill>
+          </a:ln>
+          <a:effectLst/>
+        </p:spPr>
+        <p:style>
+          <a:lnRef idx="1">
+            <a:schemeClr val="accent1"/>
+          </a:lnRef>
+          <a:fillRef idx="3">
+            <a:schemeClr val="accent1"/>
+          </a:fillRef>
+          <a:effectRef idx="2">
+            <a:schemeClr val="accent1"/>
+          </a:effectRef>
+          <a:fontRef idx="minor">
+            <a:schemeClr val="lt1"/>
+          </a:fontRef>
+        </p:style>
+        <p:txBody>
+          <a:bodyPr rtlCol="0" anchor="ctr" wrap="none"/>
+          <a:lstStyle/>
+          <a:p>
+            <a:pPr algn="ctr"/>
+          </a:p>
+        </p:txBody>
+      </p:sp>
+      <p:sp>
+        <p:nvSpPr>
+          <p:cNvPr id="55" name="Freeform 54"/>
+          <p:cNvSpPr/>
+          <p:nvPr/>
+        </p:nvSpPr>
+        <p:spPr>
+          <a:xfrm>
+            <a:off x="457200" y="3552444"/>
+            <a:ext cx="2064715" cy="457200"/>
+          </a:xfrm>
+          <a:custGeom>
+            <a:avLst/>
+            <a:gdLst/>
+            <a:ahLst/>
+            <a:cxnLst/>
+            <a:rect l="l" t="t" r="r" b="b"/>
+            <a:pathLst>
+              <a:path w="2064715" h="457200">
+                <a:moveTo>
+                  <a:pt x="0" y="457200"/>
+                </a:moveTo>
+                <a:lnTo>
+                  <a:pt x="412943" y="341371"/>
+                </a:lnTo>
+                <a:lnTo>
+                  <a:pt x="825886" y="153981"/>
+                </a:lnTo>
+                <a:lnTo>
+                  <a:pt x="1238829" y="34219"/>
+                </a:lnTo>
+                <a:lnTo>
+                  <a:pt x="1651772" y="23720"/>
+                </a:lnTo>
+                <a:lnTo>
+                  <a:pt x="2064715" y="0"/>
+                </a:lnTo>
+              </a:path>
+            </a:pathLst>
+          </a:custGeom>
+          <a:noFill/>
+          <a:ln w="20320">
+            <a:solidFill>
+              <a:srgbClr val="15795F"/>
+            </a:solidFill>
+          </a:ln>
+          <a:effectLst/>
+        </p:spPr>
+        <p:style>
+          <a:lnRef idx="1">
+            <a:schemeClr val="accent1"/>
+          </a:lnRef>
+          <a:fillRef idx="3">
+            <a:schemeClr val="accent1"/>
+          </a:fillRef>
+          <a:effectRef idx="2">
+            <a:schemeClr val="accent1"/>
+          </a:effectRef>
+          <a:fontRef idx="minor">
+            <a:schemeClr val="lt1"/>
+          </a:fontRef>
+        </p:style>
+        <p:txBody>
+          <a:bodyPr rtlCol="0" anchor="ctr"/>
+          <a:lstStyle/>
+          <a:p>
+            <a:pPr algn="ctr"/>
+          </a:p>
+        </p:txBody>
+      </p:sp>
+      <p:sp>
+        <p:nvSpPr>
+          <p:cNvPr id="56" name="Rounded Rectangle 55"/>
+          <p:cNvSpPr/>
+          <p:nvPr/>
+        </p:nvSpPr>
+        <p:spPr>
+          <a:xfrm>
+            <a:off x="2480767" y="3511296"/>
+            <a:ext cx="82296" cy="82296"/>
+          </a:xfrm>
+          <a:prstGeom prst="roundRect">
+            <a:avLst>
+              <a:gd name="adj" fmla="val 50000"/>
+            </a:avLst>
+          </a:prstGeom>
+          <a:solidFill>
+            <a:srgbClr val="15795F"/>
+          </a:solidFill>
+          <a:ln>
+            <a:noFill/>
+          </a:ln>
+          <a:effectLst/>
+        </p:spPr>
+        <p:style>
+          <a:lnRef idx="1">
+            <a:schemeClr val="accent1"/>
+          </a:lnRef>
+          <a:fillRef idx="3">
+            <a:schemeClr val="accent1"/>
+          </a:fillRef>
+          <a:effectRef idx="2">
+            <a:schemeClr val="accent1"/>
+          </a:effectRef>
+          <a:fontRef idx="minor">
+            <a:schemeClr val="lt1"/>
+          </a:fontRef>
+        </p:style>
+        <p:txBody>
+          <a:bodyPr rtlCol="0" anchor="ctr" wrap="none"/>
+          <a:lstStyle/>
+          <a:p>
+            <a:pPr algn="ctr"/>
+          </a:p>
+        </p:txBody>
+      </p:sp>
+      <p:sp>
+        <p:nvSpPr>
+          <p:cNvPr id="57" name="TextBox 56"/>
+          <p:cNvSpPr txBox="1"/>
+          <p:nvPr/>
+        </p:nvSpPr>
+        <p:spPr>
+          <a:xfrm>
+            <a:off x="2713939" y="3076956"/>
+            <a:ext cx="2156155" cy="150876"/>
+          </a:xfrm>
+          <a:prstGeom prst="rect">
+            <a:avLst/>
+          </a:prstGeom>
+          <a:noFill/>
+        </p:spPr>
+        <p:txBody>
+          <a:bodyPr wrap="square" lIns="0" rIns="0" tIns="0" bIns="0" anchor="t">
+            <a:noAutofit/>
+          </a:bodyPr>
+          <a:lstStyle/>
+          <a:p>
+            <a:pPr algn="l">
+              <a:lnSpc>
+                <a:spcPts val="1188"/>
+              </a:lnSpc>
+            </a:pPr>
+            <a:r>
+              <a:rPr sz="900" b="1">
+                <a:solidFill>
+                  <a:srgbClr val="1E2F5C"/>
+                </a:solidFill>
+                <a:latin typeface="Kanit"/>
+              </a:rPr>
+              <a:t>Maize  ข้าวโพดเลี้ยงสัตว์</a:t>
+            </a:r>
+          </a:p>
+        </p:txBody>
+      </p:sp>
+      <p:sp>
+        <p:nvSpPr>
+          <p:cNvPr id="58" name="TextBox 57"/>
+          <p:cNvSpPr txBox="1"/>
+          <p:nvPr/>
+        </p:nvSpPr>
+        <p:spPr>
+          <a:xfrm>
+            <a:off x="2713939" y="3218687"/>
+            <a:ext cx="2156155" cy="125730"/>
+          </a:xfrm>
+          <a:prstGeom prst="rect">
+            <a:avLst/>
+          </a:prstGeom>
+          <a:noFill/>
+        </p:spPr>
+        <p:txBody>
+          <a:bodyPr wrap="square" lIns="0" rIns="0" tIns="0" bIns="0" anchor="t">
+            <a:noAutofit/>
+          </a:bodyPr>
+          <a:lstStyle/>
+          <a:p>
+            <a:pPr algn="l">
+              <a:lnSpc>
+                <a:spcPts val="990"/>
+              </a:lnSpc>
+            </a:pPr>
+            <a:r>
+              <a:rPr sz="750" b="0">
+                <a:solidFill>
+                  <a:srgbClr val="606060"/>
+                </a:solidFill>
+                <a:latin typeface="Kanit"/>
+              </a:rPr>
+              <a:t>฿9.76 /กก. · North</a:t>
+            </a:r>
+          </a:p>
+        </p:txBody>
+      </p:sp>
+      <p:sp>
+        <p:nvSpPr>
+          <p:cNvPr id="59" name="TextBox 58"/>
+          <p:cNvSpPr txBox="1"/>
+          <p:nvPr/>
+        </p:nvSpPr>
+        <p:spPr>
+          <a:xfrm>
+            <a:off x="2713939" y="3351275"/>
+            <a:ext cx="1078077" cy="134112"/>
+          </a:xfrm>
+          <a:prstGeom prst="rect">
+            <a:avLst/>
+          </a:prstGeom>
+          <a:noFill/>
+        </p:spPr>
+        <p:txBody>
+          <a:bodyPr wrap="square" lIns="0" rIns="0" tIns="0" bIns="0" anchor="t">
+            <a:noAutofit/>
+          </a:bodyPr>
+          <a:lstStyle/>
+          <a:p>
+            <a:pPr algn="l">
+              <a:lnSpc>
+                <a:spcPts val="1056"/>
+              </a:lnSpc>
+            </a:pPr>
+            <a:r>
+              <a:rPr sz="800" b="1">
+                <a:solidFill>
+                  <a:srgbClr val="15795F"/>
+                </a:solidFill>
+                <a:latin typeface="Kanit"/>
+              </a:rPr>
+              <a:t>YoY +15.5%</a:t>
+            </a:r>
+          </a:p>
+        </p:txBody>
+      </p:sp>
+      <p:sp>
+        <p:nvSpPr>
+          <p:cNvPr id="60" name="TextBox 59"/>
+          <p:cNvSpPr txBox="1"/>
+          <p:nvPr/>
+        </p:nvSpPr>
+        <p:spPr>
+          <a:xfrm>
+            <a:off x="3792016" y="3351275"/>
+            <a:ext cx="1078077" cy="134112"/>
+          </a:xfrm>
+          <a:prstGeom prst="rect">
+            <a:avLst/>
+          </a:prstGeom>
+          <a:noFill/>
+        </p:spPr>
+        <p:txBody>
+          <a:bodyPr wrap="square" lIns="0" rIns="0" tIns="0" bIns="0" anchor="t">
+            <a:noAutofit/>
+          </a:bodyPr>
+          <a:lstStyle/>
+          <a:p>
+            <a:pPr algn="l">
+              <a:lnSpc>
+                <a:spcPts val="1056"/>
+              </a:lnSpc>
+            </a:pPr>
+            <a:r>
+              <a:rPr sz="800" b="1">
+                <a:solidFill>
+                  <a:srgbClr val="15795F"/>
+                </a:solidFill>
+                <a:latin typeface="Kanit"/>
+              </a:rPr>
+              <a:t>6m +9.7%</a:t>
+            </a:r>
+          </a:p>
+        </p:txBody>
+      </p:sp>
+      <p:sp>
+        <p:nvSpPr>
+          <p:cNvPr id="61" name="Rectangle 60"/>
+          <p:cNvSpPr/>
+          <p:nvPr/>
+        </p:nvSpPr>
+        <p:spPr>
+          <a:xfrm>
+            <a:off x="2713939" y="3506724"/>
+            <a:ext cx="2156155" cy="548640"/>
+          </a:xfrm>
+          <a:prstGeom prst="rect">
+            <a:avLst/>
+          </a:prstGeom>
+          <a:solidFill>
+            <a:srgbClr val="FBFCFE"/>
+          </a:solidFill>
+          <a:ln w="9525">
+            <a:solidFill>
+              <a:srgbClr val="D9DEE9"/>
+            </a:solidFill>
+          </a:ln>
+          <a:effectLst/>
+        </p:spPr>
+        <p:style>
+          <a:lnRef idx="1">
+            <a:schemeClr val="accent1"/>
+          </a:lnRef>
+          <a:fillRef idx="3">
+            <a:schemeClr val="accent1"/>
+          </a:fillRef>
+          <a:effectRef idx="2">
+            <a:schemeClr val="accent1"/>
+          </a:effectRef>
+          <a:fontRef idx="minor">
+            <a:schemeClr val="lt1"/>
+          </a:fontRef>
+        </p:style>
+        <p:txBody>
+          <a:bodyPr rtlCol="0" anchor="ctr" wrap="none"/>
+          <a:lstStyle/>
+          <a:p>
+            <a:pPr algn="ctr"/>
+          </a:p>
+        </p:txBody>
+      </p:sp>
+      <p:sp>
+        <p:nvSpPr>
+          <p:cNvPr id="62" name="Freeform 61"/>
+          <p:cNvSpPr/>
+          <p:nvPr/>
+        </p:nvSpPr>
+        <p:spPr>
+          <a:xfrm>
+            <a:off x="2759659" y="3552444"/>
+            <a:ext cx="2064715" cy="457200"/>
+          </a:xfrm>
+          <a:custGeom>
+            <a:avLst/>
+            <a:gdLst/>
+            <a:ahLst/>
+            <a:cxnLst/>
+            <a:rect l="l" t="t" r="r" b="b"/>
+            <a:pathLst>
+              <a:path w="2064715" h="457200">
+                <a:moveTo>
+                  <a:pt x="0" y="457200"/>
+                </a:moveTo>
+                <a:lnTo>
+                  <a:pt x="412943" y="350931"/>
+                </a:lnTo>
+                <a:lnTo>
+                  <a:pt x="825886" y="79083"/>
+                </a:lnTo>
+                <a:lnTo>
+                  <a:pt x="1238829" y="0"/>
+                </a:lnTo>
+                <a:lnTo>
+                  <a:pt x="1651772" y="54369"/>
+                </a:lnTo>
+                <a:lnTo>
+                  <a:pt x="2064715" y="294090"/>
+                </a:lnTo>
+              </a:path>
+            </a:pathLst>
+          </a:custGeom>
+          <a:noFill/>
+          <a:ln w="20320">
+            <a:solidFill>
+              <a:srgbClr val="15795F"/>
+            </a:solidFill>
+          </a:ln>
+          <a:effectLst/>
+        </p:spPr>
+        <p:style>
+          <a:lnRef idx="1">
+            <a:schemeClr val="accent1"/>
+          </a:lnRef>
+          <a:fillRef idx="3">
+            <a:schemeClr val="accent1"/>
+          </a:fillRef>
+          <a:effectRef idx="2">
+            <a:schemeClr val="accent1"/>
+          </a:effectRef>
+          <a:fontRef idx="minor">
+            <a:schemeClr val="lt1"/>
+          </a:fontRef>
+        </p:style>
+        <p:txBody>
+          <a:bodyPr rtlCol="0" anchor="ctr"/>
+          <a:lstStyle/>
+          <a:p>
+            <a:pPr algn="ctr"/>
+          </a:p>
+        </p:txBody>
+      </p:sp>
+      <p:sp>
+        <p:nvSpPr>
+          <p:cNvPr id="63" name="Rounded Rectangle 62"/>
+          <p:cNvSpPr/>
+          <p:nvPr/>
+        </p:nvSpPr>
+        <p:spPr>
+          <a:xfrm>
+            <a:off x="4783226" y="3805386"/>
+            <a:ext cx="82296" cy="82296"/>
+          </a:xfrm>
+          <a:prstGeom prst="roundRect">
+            <a:avLst>
+              <a:gd name="adj" fmla="val 50000"/>
+            </a:avLst>
+          </a:prstGeom>
+          <a:solidFill>
+            <a:srgbClr val="15795F"/>
+          </a:solidFill>
+          <a:ln>
+            <a:noFill/>
+          </a:ln>
+          <a:effectLst/>
+        </p:spPr>
+        <p:style>
+          <a:lnRef idx="1">
+            <a:schemeClr val="accent1"/>
+          </a:lnRef>
+          <a:fillRef idx="3">
+            <a:schemeClr val="accent1"/>
+          </a:fillRef>
+          <a:effectRef idx="2">
+            <a:schemeClr val="accent1"/>
+          </a:effectRef>
+          <a:fontRef idx="minor">
+            <a:schemeClr val="lt1"/>
+          </a:fontRef>
+        </p:style>
+        <p:txBody>
+          <a:bodyPr rtlCol="0" anchor="ctr" wrap="none"/>
+          <a:lstStyle/>
+          <a:p>
+            <a:pPr algn="ctr"/>
+          </a:p>
+        </p:txBody>
+      </p:sp>
+      <p:sp>
+        <p:nvSpPr>
+          <p:cNvPr id="64" name="TextBox 63"/>
+          <p:cNvSpPr txBox="1"/>
+          <p:nvPr/>
+        </p:nvSpPr>
+        <p:spPr>
+          <a:xfrm>
+            <a:off x="5016398" y="3076956"/>
+            <a:ext cx="2156155" cy="150876"/>
+          </a:xfrm>
+          <a:prstGeom prst="rect">
+            <a:avLst/>
+          </a:prstGeom>
+          <a:noFill/>
+        </p:spPr>
+        <p:txBody>
+          <a:bodyPr wrap="square" lIns="0" rIns="0" tIns="0" bIns="0" anchor="t">
+            <a:noAutofit/>
+          </a:bodyPr>
+          <a:lstStyle/>
+          <a:p>
+            <a:pPr algn="l">
+              <a:lnSpc>
+                <a:spcPts val="1188"/>
+              </a:lnSpc>
+            </a:pPr>
+            <a:r>
+              <a:rPr sz="900" b="1">
+                <a:solidFill>
+                  <a:srgbClr val="1E2F5C"/>
+                </a:solidFill>
+                <a:latin typeface="Kanit"/>
+              </a:rPr>
               <a:t>Pork  สุกร</a:t>
             </a:r>
           </a:p>
@@ -49543,13 +50179,13 @@
       </p:sp>
       <p:sp>
         <p:nvSpPr>
-          <p:cNvPr id="51" name="TextBox 50"/>
+          <p:cNvPr id="65" name="TextBox 64"/>
           <p:cNvSpPr txBox="1"/>
           <p:nvPr/>
         </p:nvSpPr>
         <p:spPr>
           <a:xfrm>
-            <a:off x="411480" y="3218687"/>
+            <a:off x="5016398" y="3218687"/>
             <a:ext cx="2156155" cy="125730"/>
           </a:xfrm>
           <a:prstGeom prst="rect">
@@ -49582,13 +50218,13 @@
       </p:sp>
       <p:sp>
         <p:nvSpPr>
-          <p:cNvPr id="52" name="TextBox 51"/>
+          <p:cNvPr id="66" name="TextBox 65"/>
           <p:cNvSpPr txBox="1"/>
           <p:nvPr/>
         </p:nvSpPr>
         <p:spPr>
           <a:xfrm>
-            <a:off x="411480" y="3351275"/>
+            <a:off x="5016398" y="3351275"/>
             <a:ext cx="1078077" cy="134112"/>
           </a:xfrm>
           <a:prstGeom prst="rect">
@@ -49614,20 +50250,20 @@
                 </a:solidFill>
                 <a:latin typeface="Kanit"/>
               </a:rPr>
-              <a:t>YoY +13.1%</a:t>
+              <a:t>YoY +18.0%</a:t>
             </a:r>
           </a:p>
         </p:txBody>
       </p:sp>
       <p:sp>
         <p:nvSpPr>
-          <p:cNvPr id="53" name="TextBox 52"/>
+          <p:cNvPr id="67" name="TextBox 66"/>
           <p:cNvSpPr txBox="1"/>
           <p:nvPr/>
         </p:nvSpPr>
         <p:spPr>
           <a:xfrm>
-            <a:off x="1489557" y="3351275"/>
+            <a:off x="6094475" y="3351275"/>
             <a:ext cx="1078077" cy="134112"/>
           </a:xfrm>
           <a:prstGeom prst="rect">
@@ -49660,13 +50296,13 @@
       </p:sp>
       <p:sp>
         <p:nvSpPr>
-          <p:cNvPr id="54" name="Rectangle 53"/>
+          <p:cNvPr id="68" name="Rectangle 67"/>
           <p:cNvSpPr/>
           <p:nvPr/>
         </p:nvSpPr>
         <p:spPr>
           <a:xfrm>
-            <a:off x="411480" y="3506724"/>
+            <a:off x="5016398" y="3506724"/>
             <a:ext cx="2156155" cy="548640"/>
           </a:xfrm>
           <a:prstGeom prst="rect">
@@ -49706,13 +50342,13 @@
       </p:sp>
       <p:sp>
         <p:nvSpPr>
-          <p:cNvPr id="55" name="Freeform 54"/>
+          <p:cNvPr id="69" name="Freeform 68"/>
           <p:cNvSpPr/>
           <p:nvPr/>
         </p:nvSpPr>
         <p:spPr>
           <a:xfrm>
-            <a:off x="457200" y="3552444"/>
+            <a:off x="5062118" y="3552444"/>
             <a:ext cx="2064715" cy="457200"/>
           </a:xfrm>
           <a:custGeom>
@@ -49776,649 +50412,13 @@
       </p:sp>
       <p:sp>
         <p:nvSpPr>
-          <p:cNvPr id="56" name="Rounded Rectangle 55"/>
-          <p:cNvSpPr/>
-          <p:nvPr/>
-        </p:nvSpPr>
-        <p:spPr>
-          <a:xfrm>
-            <a:off x="2480767" y="3511296"/>
-            <a:ext cx="82296" cy="82296"/>
-          </a:xfrm>
-          <a:prstGeom prst="roundRect">
-            <a:avLst>
-              <a:gd name="adj" fmla="val 50000"/>
-            </a:avLst>
-          </a:prstGeom>
-          <a:solidFill>
-            <a:srgbClr val="15795F"/>
-          </a:solidFill>
-          <a:ln>
-            <a:noFill/>
-          </a:ln>
-          <a:effectLst/>
-        </p:spPr>
-        <p:style>
-          <a:lnRef idx="1">
-            <a:schemeClr val="accent1"/>
-          </a:lnRef>
-          <a:fillRef idx="3">
-            <a:schemeClr val="accent1"/>
-          </a:fillRef>
-          <a:effectRef idx="2">
-            <a:schemeClr val="accent1"/>
-          </a:effectRef>
-          <a:fontRef idx="minor">
-            <a:schemeClr val="lt1"/>
-          </a:fontRef>
-        </p:style>
-        <p:txBody>
-          <a:bodyPr rtlCol="0" anchor="ctr" wrap="none"/>
-          <a:lstStyle/>
-          <a:p>
-            <a:pPr algn="ctr"/>
-          </a:p>
-        </p:txBody>
-      </p:sp>
-      <p:sp>
-        <p:nvSpPr>
-          <p:cNvPr id="57" name="TextBox 56"/>
-          <p:cNvSpPr txBox="1"/>
-          <p:nvPr/>
-        </p:nvSpPr>
-        <p:spPr>
-          <a:xfrm>
-            <a:off x="2713939" y="3076956"/>
-            <a:ext cx="2156155" cy="150876"/>
-          </a:xfrm>
-          <a:prstGeom prst="rect">
-            <a:avLst/>
-          </a:prstGeom>
-          <a:noFill/>
-        </p:spPr>
-        <p:txBody>
-          <a:bodyPr wrap="square" lIns="0" rIns="0" tIns="0" bIns="0" anchor="t">
-            <a:noAutofit/>
-          </a:bodyPr>
-          <a:lstStyle/>
-          <a:p>
-            <a:pPr algn="l">
-              <a:lnSpc>
-                <a:spcPts val="1188"/>
-              </a:lnSpc>
-            </a:pPr>
-            <a:r>
-              <a:rPr sz="900" b="1">
-                <a:solidFill>
-                  <a:srgbClr val="1E2F5C"/>
-                </a:solidFill>
-                <a:latin typeface="Kanit"/>
-              </a:rPr>
-              <a:t>Rice  ข้าวหอมมะลิ</a:t>
-            </a:r>
-          </a:p>
-        </p:txBody>
-      </p:sp>
-      <p:sp>
-        <p:nvSpPr>
-          <p:cNvPr id="58" name="TextBox 57"/>
-          <p:cNvSpPr txBox="1"/>
-          <p:nvPr/>
-        </p:nvSpPr>
-        <p:spPr>
-          <a:xfrm>
-            <a:off x="2713939" y="3218687"/>
-            <a:ext cx="2156155" cy="125730"/>
-          </a:xfrm>
-          <a:prstGeom prst="rect">
-            <a:avLst/>
-          </a:prstGeom>
-          <a:noFill/>
-        </p:spPr>
-        <p:txBody>
-          <a:bodyPr wrap="square" lIns="0" rIns="0" tIns="0" bIns="0" anchor="t">
-            <a:noAutofit/>
-          </a:bodyPr>
-          <a:lstStyle/>
-          <a:p>
-            <a:pPr algn="l">
-              <a:lnSpc>
-                <a:spcPts val="990"/>
-              </a:lnSpc>
-            </a:pPr>
-            <a:r>
-              <a:rPr sz="750" b="0">
-                <a:solidFill>
-                  <a:srgbClr val="606060"/>
-                </a:solidFill>
-                <a:latin typeface="Kanit"/>
-              </a:rPr>
-              <a:t>฿17,763 /ตัน · Isan·N·C</a:t>
-            </a:r>
-          </a:p>
-        </p:txBody>
-      </p:sp>
-      <p:sp>
-        <p:nvSpPr>
-          <p:cNvPr id="59" name="TextBox 58"/>
-          <p:cNvSpPr txBox="1"/>
-          <p:nvPr/>
-        </p:nvSpPr>
-        <p:spPr>
-          <a:xfrm>
-            <a:off x="2713939" y="3351275"/>
-            <a:ext cx="1078077" cy="134112"/>
-          </a:xfrm>
-          <a:prstGeom prst="rect">
-            <a:avLst/>
-          </a:prstGeom>
-          <a:noFill/>
-        </p:spPr>
-        <p:txBody>
-          <a:bodyPr wrap="square" lIns="0" rIns="0" tIns="0" bIns="0" anchor="t">
-            <a:noAutofit/>
-          </a:bodyPr>
-          <a:lstStyle/>
-          <a:p>
-            <a:pPr algn="l">
-              <a:lnSpc>
-                <a:spcPts val="1056"/>
-              </a:lnSpc>
-            </a:pPr>
-            <a:r>
-              <a:rPr sz="800" b="1">
-                <a:solidFill>
-                  <a:srgbClr val="15795F"/>
-                </a:solidFill>
-                <a:latin typeface="Kanit"/>
-              </a:rPr>
-              <a:t>YoY +14.0%</a:t>
-            </a:r>
-          </a:p>
-        </p:txBody>
-      </p:sp>
-      <p:sp>
-        <p:nvSpPr>
-          <p:cNvPr id="60" name="TextBox 59"/>
-          <p:cNvSpPr txBox="1"/>
-          <p:nvPr/>
-        </p:nvSpPr>
-        <p:spPr>
-          <a:xfrm>
-            <a:off x="3792016" y="3351275"/>
-            <a:ext cx="1078077" cy="134112"/>
-          </a:xfrm>
-          <a:prstGeom prst="rect">
-            <a:avLst/>
-          </a:prstGeom>
-          <a:noFill/>
-        </p:spPr>
-        <p:txBody>
-          <a:bodyPr wrap="square" lIns="0" rIns="0" tIns="0" bIns="0" anchor="t">
-            <a:noAutofit/>
-          </a:bodyPr>
-          <a:lstStyle/>
-          <a:p>
-            <a:pPr algn="l">
-              <a:lnSpc>
-                <a:spcPts val="1056"/>
-              </a:lnSpc>
-            </a:pPr>
-            <a:r>
-              <a:rPr sz="800" b="1">
-                <a:solidFill>
-                  <a:srgbClr val="15795F"/>
-                </a:solidFill>
-                <a:latin typeface="Kanit"/>
-              </a:rPr>
-              <a:t>6m +7.7%</a:t>
-            </a:r>
-          </a:p>
-        </p:txBody>
-      </p:sp>
-      <p:sp>
-        <p:nvSpPr>
-          <p:cNvPr id="61" name="Rectangle 60"/>
-          <p:cNvSpPr/>
-          <p:nvPr/>
-        </p:nvSpPr>
-        <p:spPr>
-          <a:xfrm>
-            <a:off x="2713939" y="3506724"/>
-            <a:ext cx="2156155" cy="548640"/>
-          </a:xfrm>
-          <a:prstGeom prst="rect">
-            <a:avLst/>
-          </a:prstGeom>
-          <a:solidFill>
-            <a:srgbClr val="FBFCFE"/>
-          </a:solidFill>
-          <a:ln w="9525">
-            <a:solidFill>
-              <a:srgbClr val="D9DEE9"/>
-            </a:solidFill>
-          </a:ln>
-          <a:effectLst/>
-        </p:spPr>
-        <p:style>
-          <a:lnRef idx="1">
-            <a:schemeClr val="accent1"/>
-          </a:lnRef>
-          <a:fillRef idx="3">
-            <a:schemeClr val="accent1"/>
-          </a:fillRef>
-          <a:effectRef idx="2">
-            <a:schemeClr val="accent1"/>
-          </a:effectRef>
-          <a:fontRef idx="minor">
-            <a:schemeClr val="lt1"/>
-          </a:fontRef>
-        </p:style>
-        <p:txBody>
-          <a:bodyPr rtlCol="0" anchor="ctr" wrap="none"/>
-          <a:lstStyle/>
-          <a:p>
-            <a:pPr algn="ctr"/>
-          </a:p>
-        </p:txBody>
-      </p:sp>
-      <p:sp>
-        <p:nvSpPr>
-          <p:cNvPr id="62" name="Freeform 61"/>
-          <p:cNvSpPr/>
-          <p:nvPr/>
-        </p:nvSpPr>
-        <p:spPr>
-          <a:xfrm>
-            <a:off x="2759659" y="3552444"/>
-            <a:ext cx="2064715" cy="457200"/>
-          </a:xfrm>
-          <a:custGeom>
-            <a:avLst/>
-            <a:gdLst/>
-            <a:ahLst/>
-            <a:cxnLst/>
-            <a:rect l="l" t="t" r="r" b="b"/>
-            <a:pathLst>
-              <a:path w="2064715" h="457200">
-                <a:moveTo>
-                  <a:pt x="0" y="457200"/>
-                </a:moveTo>
-                <a:lnTo>
-                  <a:pt x="412943" y="341371"/>
-                </a:lnTo>
-                <a:lnTo>
-                  <a:pt x="825886" y="153981"/>
-                </a:lnTo>
-                <a:lnTo>
-                  <a:pt x="1238829" y="34219"/>
-                </a:lnTo>
-                <a:lnTo>
-                  <a:pt x="1651772" y="23720"/>
-                </a:lnTo>
-                <a:lnTo>
-                  <a:pt x="2064715" y="0"/>
-                </a:lnTo>
-              </a:path>
-            </a:pathLst>
-          </a:custGeom>
-          <a:noFill/>
-          <a:ln w="20320">
-            <a:solidFill>
-              <a:srgbClr val="15795F"/>
-            </a:solidFill>
-          </a:ln>
-          <a:effectLst/>
-        </p:spPr>
-        <p:style>
-          <a:lnRef idx="1">
-            <a:schemeClr val="accent1"/>
-          </a:lnRef>
-          <a:fillRef idx="3">
-            <a:schemeClr val="accent1"/>
-          </a:fillRef>
-          <a:effectRef idx="2">
-            <a:schemeClr val="accent1"/>
-          </a:effectRef>
-          <a:fontRef idx="minor">
-            <a:schemeClr val="lt1"/>
-          </a:fontRef>
-        </p:style>
-        <p:txBody>
-          <a:bodyPr rtlCol="0" anchor="ctr"/>
-          <a:lstStyle/>
-          <a:p>
-            <a:pPr algn="ctr"/>
-          </a:p>
-        </p:txBody>
-      </p:sp>
-      <p:sp>
-        <p:nvSpPr>
-          <p:cNvPr id="63" name="Rounded Rectangle 62"/>
-          <p:cNvSpPr/>
-          <p:nvPr/>
-        </p:nvSpPr>
-        <p:spPr>
-          <a:xfrm>
-            <a:off x="4783226" y="3511296"/>
-            <a:ext cx="82296" cy="82296"/>
-          </a:xfrm>
-          <a:prstGeom prst="roundRect">
-            <a:avLst>
-              <a:gd name="adj" fmla="val 50000"/>
-            </a:avLst>
-          </a:prstGeom>
-          <a:solidFill>
-            <a:srgbClr val="15795F"/>
-          </a:solidFill>
-          <a:ln>
-            <a:noFill/>
-          </a:ln>
-          <a:effectLst/>
-        </p:spPr>
-        <p:style>
-          <a:lnRef idx="1">
-            <a:schemeClr val="accent1"/>
-          </a:lnRef>
-          <a:fillRef idx="3">
-            <a:schemeClr val="accent1"/>
-          </a:fillRef>
-          <a:effectRef idx="2">
-            <a:schemeClr val="accent1"/>
-          </a:effectRef>
-          <a:fontRef idx="minor">
-            <a:schemeClr val="lt1"/>
-          </a:fontRef>
-        </p:style>
-        <p:txBody>
-          <a:bodyPr rtlCol="0" anchor="ctr" wrap="none"/>
-          <a:lstStyle/>
-          <a:p>
-            <a:pPr algn="ctr"/>
-          </a:p>
-        </p:txBody>
-      </p:sp>
-      <p:sp>
-        <p:nvSpPr>
-          <p:cNvPr id="64" name="TextBox 63"/>
-          <p:cNvSpPr txBox="1"/>
-          <p:nvPr/>
-        </p:nvSpPr>
-        <p:spPr>
-          <a:xfrm>
-            <a:off x="5016398" y="3076956"/>
-            <a:ext cx="2156155" cy="150876"/>
-          </a:xfrm>
-          <a:prstGeom prst="rect">
-            <a:avLst/>
-          </a:prstGeom>
-          <a:noFill/>
-        </p:spPr>
-        <p:txBody>
-          <a:bodyPr wrap="square" lIns="0" rIns="0" tIns="0" bIns="0" anchor="t">
-            <a:noAutofit/>
-          </a:bodyPr>
-          <a:lstStyle/>
-          <a:p>
-            <a:pPr algn="l">
-              <a:lnSpc>
-                <a:spcPts val="1188"/>
-              </a:lnSpc>
-            </a:pPr>
-            <a:r>
-              <a:rPr sz="900" b="1">
-                <a:solidFill>
-                  <a:srgbClr val="1E2F5C"/>
-                </a:solidFill>
-                <a:latin typeface="Kanit"/>
-              </a:rPr>
-              <a:t>Maize  ข้าวโพดเลี้ยงสัตว์</a:t>
-            </a:r>
-          </a:p>
-        </p:txBody>
-      </p:sp>
-      <p:sp>
-        <p:nvSpPr>
-          <p:cNvPr id="65" name="TextBox 64"/>
-          <p:cNvSpPr txBox="1"/>
-          <p:nvPr/>
-        </p:nvSpPr>
-        <p:spPr>
-          <a:xfrm>
-            <a:off x="5016398" y="3218687"/>
-            <a:ext cx="2156155" cy="125730"/>
-          </a:xfrm>
-          <a:prstGeom prst="rect">
-            <a:avLst/>
-          </a:prstGeom>
-          <a:noFill/>
-        </p:spPr>
-        <p:txBody>
-          <a:bodyPr wrap="square" lIns="0" rIns="0" tIns="0" bIns="0" anchor="t">
-            <a:noAutofit/>
-          </a:bodyPr>
-          <a:lstStyle/>
-          <a:p>
-            <a:pPr algn="l">
-              <a:lnSpc>
-                <a:spcPts val="990"/>
-              </a:lnSpc>
-            </a:pPr>
-            <a:r>
-              <a:rPr sz="750" b="0">
-                <a:solidFill>
-                  <a:srgbClr val="606060"/>
-                </a:solidFill>
-                <a:latin typeface="Kanit"/>
-              </a:rPr>
-              <a:t>฿9.76 /กก. · North</a:t>
-            </a:r>
-          </a:p>
-        </p:txBody>
-      </p:sp>
-      <p:sp>
-        <p:nvSpPr>
-          <p:cNvPr id="66" name="TextBox 65"/>
-          <p:cNvSpPr txBox="1"/>
-          <p:nvPr/>
-        </p:nvSpPr>
-        <p:spPr>
-          <a:xfrm>
-            <a:off x="5016398" y="3351275"/>
-            <a:ext cx="1078077" cy="134112"/>
-          </a:xfrm>
-          <a:prstGeom prst="rect">
-            <a:avLst/>
-          </a:prstGeom>
-          <a:noFill/>
-        </p:spPr>
-        <p:txBody>
-          <a:bodyPr wrap="square" lIns="0" rIns="0" tIns="0" bIns="0" anchor="t">
-            <a:noAutofit/>
-          </a:bodyPr>
-          <a:lstStyle/>
-          <a:p>
-            <a:pPr algn="l">
-              <a:lnSpc>
-                <a:spcPts val="1056"/>
-              </a:lnSpc>
-            </a:pPr>
-            <a:r>
-              <a:rPr sz="800" b="1">
-                <a:solidFill>
-                  <a:srgbClr val="15795F"/>
-                </a:solidFill>
-                <a:latin typeface="Kanit"/>
-              </a:rPr>
-              <a:t>YoY +16.8%</a:t>
-            </a:r>
-          </a:p>
-        </p:txBody>
-      </p:sp>
-      <p:sp>
-        <p:nvSpPr>
-          <p:cNvPr id="67" name="TextBox 66"/>
-          <p:cNvSpPr txBox="1"/>
-          <p:nvPr/>
-        </p:nvSpPr>
-        <p:spPr>
-          <a:xfrm>
-            <a:off x="6094475" y="3351275"/>
-            <a:ext cx="1078077" cy="134112"/>
-          </a:xfrm>
-          <a:prstGeom prst="rect">
-            <a:avLst/>
-          </a:prstGeom>
-          <a:noFill/>
-        </p:spPr>
-        <p:txBody>
-          <a:bodyPr wrap="square" lIns="0" rIns="0" tIns="0" bIns="0" anchor="t">
-            <a:noAutofit/>
-          </a:bodyPr>
-          <a:lstStyle/>
-          <a:p>
-            <a:pPr algn="l">
-              <a:lnSpc>
-                <a:spcPts val="1056"/>
-              </a:lnSpc>
-            </a:pPr>
-            <a:r>
-              <a:rPr sz="800" b="1">
-                <a:solidFill>
-                  <a:srgbClr val="15795F"/>
-                </a:solidFill>
-                <a:latin typeface="Kanit"/>
-              </a:rPr>
-              <a:t>6m +9.7%</a:t>
-            </a:r>
-          </a:p>
-        </p:txBody>
-      </p:sp>
-      <p:sp>
-        <p:nvSpPr>
-          <p:cNvPr id="68" name="Rectangle 67"/>
-          <p:cNvSpPr/>
-          <p:nvPr/>
-        </p:nvSpPr>
-        <p:spPr>
-          <a:xfrm>
-            <a:off x="5016398" y="3506724"/>
-            <a:ext cx="2156155" cy="548640"/>
-          </a:xfrm>
-          <a:prstGeom prst="rect">
-            <a:avLst/>
-          </a:prstGeom>
-          <a:solidFill>
-            <a:srgbClr val="FBFCFE"/>
-          </a:solidFill>
-          <a:ln w="9525">
-            <a:solidFill>
-              <a:srgbClr val="D9DEE9"/>
-            </a:solidFill>
-          </a:ln>
-          <a:effectLst/>
-        </p:spPr>
-        <p:style>
-          <a:lnRef idx="1">
-            <a:schemeClr val="accent1"/>
-          </a:lnRef>
-          <a:fillRef idx="3">
-            <a:schemeClr val="accent1"/>
-          </a:fillRef>
-          <a:effectRef idx="2">
-            <a:schemeClr val="accent1"/>
-          </a:effectRef>
-          <a:fontRef idx="minor">
-            <a:schemeClr val="lt1"/>
-          </a:fontRef>
-        </p:style>
-        <p:txBody>
-          <a:bodyPr rtlCol="0" anchor="ctr" wrap="none"/>
-          <a:lstStyle/>
-          <a:p>
-            <a:pPr algn="ctr"/>
-          </a:p>
-        </p:txBody>
-      </p:sp>
-      <p:sp>
-        <p:nvSpPr>
-          <p:cNvPr id="69" name="Freeform 68"/>
-          <p:cNvSpPr/>
-          <p:nvPr/>
-        </p:nvSpPr>
-        <p:spPr>
-          <a:xfrm>
-            <a:off x="5062118" y="3552444"/>
-            <a:ext cx="2064715" cy="457200"/>
-          </a:xfrm>
-          <a:custGeom>
-            <a:avLst/>
-            <a:gdLst/>
-            <a:ahLst/>
-            <a:cxnLst/>
-            <a:rect l="l" t="t" r="r" b="b"/>
-            <a:pathLst>
-              <a:path w="2064715" h="457200">
-                <a:moveTo>
-                  <a:pt x="0" y="457200"/>
-                </a:moveTo>
-                <a:lnTo>
-                  <a:pt x="412943" y="350931"/>
-                </a:lnTo>
-                <a:lnTo>
-                  <a:pt x="825886" y="79083"/>
-                </a:lnTo>
-                <a:lnTo>
-                  <a:pt x="1238829" y="0"/>
-                </a:lnTo>
-                <a:lnTo>
-                  <a:pt x="1651772" y="54369"/>
-                </a:lnTo>
-                <a:lnTo>
-                  <a:pt x="2064715" y="294090"/>
-                </a:lnTo>
-              </a:path>
-            </a:pathLst>
-          </a:custGeom>
-          <a:noFill/>
-          <a:ln w="20320">
-            <a:solidFill>
-              <a:srgbClr val="15795F"/>
-            </a:solidFill>
-          </a:ln>
-          <a:effectLst/>
-        </p:spPr>
-        <p:style>
-          <a:lnRef idx="1">
-            <a:schemeClr val="accent1"/>
-          </a:lnRef>
-          <a:fillRef idx="3">
-            <a:schemeClr val="accent1"/>
-          </a:fillRef>
-          <a:effectRef idx="2">
-            <a:schemeClr val="accent1"/>
-          </a:effectRef>
-          <a:fontRef idx="minor">
-            <a:schemeClr val="lt1"/>
-          </a:fontRef>
-        </p:style>
-        <p:txBody>
-          <a:bodyPr rtlCol="0" anchor="ctr"/>
-          <a:lstStyle/>
-          <a:p>
-            <a:pPr algn="ctr"/>
-          </a:p>
-        </p:txBody>
-      </p:sp>
-      <p:sp>
-        <p:nvSpPr>
           <p:cNvPr id="70" name="Rounded Rectangle 69"/>
           <p:cNvSpPr/>
           <p:nvPr/>
         </p:nvSpPr>
         <p:spPr>
           <a:xfrm>
-            <a:off x="7085685" y="3805386"/>
+            <a:off x="7085685" y="3511296"/>
             <a:ext cx="82296" cy="82296"/>
           </a:xfrm>
           <a:prstGeom prst="roundRect">
@@ -51204,7 +51204,7 @@
                 </a:solidFill>
                 <a:latin typeface="Kanit"/>
               </a:rPr>
-              <a:t>YoY +73.7%</a:t>
+              <a:t>YoY +74.8%</a:t>
             </a:r>
           </a:p>
         </p:txBody>
@@ -51522,7 +51522,7 @@
                 </a:solidFill>
                 <a:latin typeface="Kanit"/>
               </a:rPr>
-              <a:t>YoY +111.6%</a:t>
+              <a:t>YoY +134.7%</a:t>
             </a:r>
           </a:p>
         </p:txBody>
@@ -51886,7 +51886,7 @@
                 </a:solidFill>
                 <a:latin typeface="Kanit"/>
               </a:rPr>
-              <a:t>Farm-gate prices MEASURED — NABC daily quotes, monthly means, in baht as published (no currency conversion); newest quote 2026-08-28, history vintage 2026-08-29. Farm gate (ราคาที่เกษตรกรขายได้) is what the grower is paid at first sale, before trading, milling or transport take a cut — not the world index and not a supermarket price. Belts are an ESTIMATED read of where each commodity is produced, and they overlap. Sugar is OCSB's announced season price, one point a year, so it has no six-month move to show.</a:t>
+              <a:t>Farm-gate prices MEASURED — NABC daily quotes, monthly means, in baht as published (no currency conversion); newest quote 2026-09-03, history vintage 2026-08-29. Farm gate (ราคาที่เกษตรกรขายได้) is what the grower is paid at first sale, before trading, milling or transport take a cut — not the world index and not a supermarket price. Belts are an ESTIMATED read of where each commodity is produced, and they overlap. Sugar is OCSB's announced season price, one point a year, so it has no six-month move to show.</a:t>
             </a:r>
           </a:p>
         </p:txBody>
@@ -52543,7 +52543,7 @@
                           </a:solidFill>
                           <a:latin typeface="Kanit"/>
                         </a:rPr>
-                        <a:t>+9.3%</a:t>
+                        <a:t>+8.5%</a:t>
                       </a:r>
                     </a:p>
                   </a:txBody>
@@ -52775,7 +52775,7 @@
                           </a:solidFill>
                           <a:latin typeface="Kanit"/>
                         </a:rPr>
-                        <a:t>+10.5%</a:t>
+                        <a:t>+9.6%</a:t>
                       </a:r>
                     </a:p>
                   </a:txBody>
@@ -53007,7 +53007,7 @@
                           </a:solidFill>
                           <a:latin typeface="Kanit"/>
                         </a:rPr>
-                        <a:t>+9.6%</a:t>
+                        <a:t>+8.7%</a:t>
                       </a:r>
                     </a:p>
                   </a:txBody>
@@ -53239,7 +53239,7 @@
                           </a:solidFill>
                           <a:latin typeface="Kanit"/>
                         </a:rPr>
-                        <a:t>+9.2%</a:t>
+                        <a:t>+8.3%</a:t>
                       </a:r>
                     </a:p>
                   </a:txBody>
@@ -53471,7 +53471,7 @@
                           </a:solidFill>
                           <a:latin typeface="Kanit"/>
                         </a:rPr>
-                        <a:t>+10.7%</a:t>
+                        <a:t>+9.8%</a:t>
                       </a:r>
                     </a:p>
                   </a:txBody>
@@ -53766,7 +53766,7 @@
                 </a:solidFill>
                 <a:latin typeface="Kanit"/>
               </a:rPr>
-              <a:t>Income MEASURED — NSO SES province income (NSO SES 2566), NSO LFS regional wages (2568 (4-quarter average)), ฿/month; region = unweighted mean of its provinces. Move is ESTIMATED — one first-order model of the price and fuel round (fuel driver 2026M07), at documented coefficients, not fitted. No monthly SES/LFS series exists, so no 6-month figure sits beside it.</a:t>
+              <a:t>Income MEASURED — NSO SES province income (NSO SES 2566), NSO LFS regional wages (2568 (4-quarter average)), ฿/month; region = unweighted mean of its provinces. Move is ESTIMATED — one first-order model of the price and fuel round (fuel driver 2026M08), at documented coefficients, not fitted. No monthly SES/LFS series exists, so no 6-month figure sits beside it.</a:t>
             </a:r>
           </a:p>
         </p:txBody>
@@ -54100,7 +54100,7 @@
                 </a:solidFill>
                 <a:latin typeface="Kanit"/>
               </a:rPr>
-              <a:t>• Down −2.75% in every region. Factory moves the same way; office is flat — no channel modelled for it, which is not the same as no change.
+              <a:t>• Down −4.77% in every region. Factory moves the same way; office is flat — no channel modelled for it, which is not the same as no change.
 • One measured crude-oil move through one chosen coefficient. No Thai diesel or freight series behind it.
 • Still matters: here the vehicle IS the income. An early call beats a late one.</a:t>
             </a:r>

--- a/docs/decks/mcom-2026-08-05-macro.pptx
+++ b/docs/decks/mcom-2026-08-05-macro.pptx
@@ -6240,7 +6240,7 @@
                 </a:solidFill>
                 <a:latin typeface="Kanit"/>
               </a:rPr>
-              <a:t>123</a:t>
+              <a:t>133</a:t>
             </a:r>
           </a:p>
         </p:txBody>
@@ -6279,7 +6279,7 @@
                 </a:solidFill>
                 <a:latin typeface="Kanit"/>
               </a:rPr>
-              <a:t>of 793 (15.5%) · live · 2026-09-05</a:t>
+              <a:t>of 792 (16.8%) · live · 2026-09-06</a:t>
             </a:r>
           </a:p>
         </p:txBody>
@@ -6405,7 +6405,7 @@
                 </a:solidFill>
                 <a:latin typeface="Kanit"/>
               </a:rPr>
-              <a:t>25</a:t>
+              <a:t>39</a:t>
             </a:r>
           </a:p>
         </p:txBody>
@@ -6444,7 +6444,7 @@
                 </a:solidFill>
                 <a:latin typeface="Kanit"/>
               </a:rPr>
-              <a:t>latest daily reading · 2026-09-05</a:t>
+              <a:t>latest daily reading · 2026-09-06</a:t>
             </a:r>
           </a:p>
         </p:txBody>
@@ -7928,7 +7928,7 @@
                           </a:solidFill>
                           <a:latin typeface="Kanit"/>
                         </a:rPr>
-                        <a:t>52</a:t>
+                        <a:t>58</a:t>
                       </a:r>
                     </a:p>
                   </a:txBody>
@@ -7951,7 +7951,7 @@
                           </a:solidFill>
                           <a:latin typeface="Kanit"/>
                         </a:rPr>
-                        <a:t>2.6%</a:t>
+                        <a:t>15.8%</a:t>
                       </a:r>
                     </a:p>
                   </a:txBody>
@@ -8022,7 +8022,7 @@
                           </a:solidFill>
                           <a:latin typeface="Kanit"/>
                         </a:rPr>
-                        <a:t>อุทัยธานี</a:t>
+                        <a:t>สมุทรปราการ</a:t>
                       </a:r>
                     </a:p>
                   </a:txBody>
@@ -8045,7 +8045,7 @@
                           </a:solidFill>
                           <a:latin typeface="Kanit"/>
                         </a:rPr>
-                        <a:t>44</a:t>
+                        <a:t>15</a:t>
                       </a:r>
                     </a:p>
                   </a:txBody>
@@ -8068,7 +8068,7 @@
                           </a:solidFill>
                           <a:latin typeface="Kanit"/>
                         </a:rPr>
-                        <a:t>9</a:t>
+                        <a:t>13</a:t>
                       </a:r>
                     </a:p>
                   </a:txBody>
@@ -8114,7 +8114,7 @@
                           </a:solidFill>
                           <a:latin typeface="Kanit"/>
                         </a:rPr>
-                        <a:t>1/4</a:t>
+                        <a:t>4/4</a:t>
                       </a:r>
                     </a:p>
                   </a:txBody>
@@ -8162,7 +8162,7 @@
                           </a:solidFill>
                           <a:latin typeface="Kanit"/>
                         </a:rPr>
-                        <a:t>นครพนม</a:t>
+                        <a:t>อุทัยธานี</a:t>
                       </a:r>
                     </a:p>
                   </a:txBody>
@@ -8185,7 +8185,7 @@
                           </a:solidFill>
                           <a:latin typeface="Kanit"/>
                         </a:rPr>
-                        <a:t>28</a:t>
+                        <a:t>45</a:t>
                       </a:r>
                     </a:p>
                   </a:txBody>
@@ -8208,7 +8208,7 @@
                           </a:solidFill>
                           <a:latin typeface="Kanit"/>
                         </a:rPr>
-                        <a:t>49</a:t>
+                        <a:t>13</a:t>
                       </a:r>
                     </a:p>
                   </a:txBody>
@@ -8227,11 +8227,11 @@
                       <a:r>
                         <a:rPr sz="900" b="1">
                           <a:solidFill>
-                            <a:srgbClr val="F5C242"/>
-                          </a:solidFill>
-                          <a:latin typeface="Kanit"/>
-                        </a:rPr>
-                        <a:t>25.0%</a:t>
+                            <a:srgbClr val="606060"/>
+                          </a:solidFill>
+                          <a:latin typeface="Kanit"/>
+                        </a:rPr>
+                        <a:t>0.0%</a:t>
                       </a:r>
                     </a:p>
                   </a:txBody>
@@ -8254,7 +8254,7 @@
                           </a:solidFill>
                           <a:latin typeface="Kanit"/>
                         </a:rPr>
-                        <a:t>8/14</a:t>
+                        <a:t>1/4</a:t>
                       </a:r>
                     </a:p>
                   </a:txBody>
@@ -8273,11 +8273,11 @@
                       <a:r>
                         <a:rPr sz="900" b="1">
                           <a:solidFill>
-                            <a:srgbClr val="F5C242"/>
-                          </a:solidFill>
-                          <a:latin typeface="Kanit"/>
-                        </a:rPr>
-                        <a:t>4</a:t>
+                            <a:srgbClr val="CC0000"/>
+                          </a:solidFill>
+                          <a:latin typeface="Kanit"/>
+                        </a:rPr>
+                        <a:t>5</a:t>
                       </a:r>
                     </a:p>
                   </a:txBody>
@@ -8302,7 +8302,7 @@
                           </a:solidFill>
                           <a:latin typeface="Kanit"/>
                         </a:rPr>
-                        <a:t>พะเยา</a:t>
+                        <a:t>บึงกาฬ</a:t>
                       </a:r>
                     </a:p>
                   </a:txBody>
@@ -8325,7 +8325,7 @@
                           </a:solidFill>
                           <a:latin typeface="Kanit"/>
                         </a:rPr>
-                        <a:t>126</a:t>
+                        <a:t>11</a:t>
                       </a:r>
                     </a:p>
                   </a:txBody>
@@ -8348,7 +8348,7 @@
                           </a:solidFill>
                           <a:latin typeface="Kanit"/>
                         </a:rPr>
-                        <a:t>88</a:t>
+                        <a:t>134</a:t>
                       </a:r>
                     </a:p>
                   </a:txBody>
@@ -8371,7 +8371,7 @@
                           </a:solidFill>
                           <a:latin typeface="Kanit"/>
                         </a:rPr>
-                        <a:t>14.3%</a:t>
+                        <a:t>45.5%</a:t>
                       </a:r>
                     </a:p>
                   </a:txBody>
@@ -8394,7 +8394,7 @@
                           </a:solidFill>
                           <a:latin typeface="Kanit"/>
                         </a:rPr>
-                        <a:t>3/13</a:t>
+                        <a:t>1/1</a:t>
                       </a:r>
                     </a:p>
                   </a:txBody>
@@ -8442,7 +8442,7 @@
                           </a:solidFill>
                           <a:latin typeface="Kanit"/>
                         </a:rPr>
-                        <a:t>น่าน</a:t>
+                        <a:t>นครนายก</a:t>
                       </a:r>
                     </a:p>
                   </a:txBody>
@@ -8465,7 +8465,7 @@
                           </a:solidFill>
                           <a:latin typeface="Kanit"/>
                         </a:rPr>
-                        <a:t>217</a:t>
+                        <a:t>26</a:t>
                       </a:r>
                     </a:p>
                   </a:txBody>
@@ -8488,7 +8488,7 @@
                           </a:solidFill>
                           <a:latin typeface="Kanit"/>
                         </a:rPr>
-                        <a:t>101</a:t>
+                        <a:t>60</a:t>
                       </a:r>
                     </a:p>
                   </a:txBody>
@@ -8511,7 +8511,7 @@
                           </a:solidFill>
                           <a:latin typeface="Kanit"/>
                         </a:rPr>
-                        <a:t>13.8%</a:t>
+                        <a:t>42.3%</a:t>
                       </a:r>
                     </a:p>
                   </a:txBody>
@@ -8534,7 +8534,7 @@
                           </a:solidFill>
                           <a:latin typeface="Kanit"/>
                         </a:rPr>
-                        <a:t>1/26</a:t>
+                        <a:t>2/6</a:t>
                       </a:r>
                     </a:p>
                   </a:txBody>
@@ -8582,7 +8582,7 @@
                           </a:solidFill>
                           <a:latin typeface="Kanit"/>
                         </a:rPr>
-                        <a:t>อุบลราชธานี</a:t>
+                        <a:t>ปราจีนบุรี</a:t>
                       </a:r>
                     </a:p>
                   </a:txBody>
@@ -8605,7 +8605,7 @@
                           </a:solidFill>
                           <a:latin typeface="Kanit"/>
                         </a:rPr>
-                        <a:t>46</a:t>
+                        <a:t>35</a:t>
                       </a:r>
                     </a:p>
                   </a:txBody>
@@ -8651,7 +8651,7 @@
                           </a:solidFill>
                           <a:latin typeface="Kanit"/>
                         </a:rPr>
-                        <a:t>10.9%</a:t>
+                        <a:t>37.1%</a:t>
                       </a:r>
                     </a:p>
                   </a:txBody>
@@ -8674,7 +8674,7 @@
                           </a:solidFill>
                           <a:latin typeface="Kanit"/>
                         </a:rPr>
-                        <a:t>2/14</a:t>
+                        <a:t>5/15</a:t>
                       </a:r>
                     </a:p>
                   </a:txBody>
@@ -8909,7 +8909,7 @@
                 </a:solidFill>
                 <a:latin typeface="Kanit"/>
               </a:rPr>
-              <a:t>Planted area MEASURED (OAE — 3,295 amphoe crop rows). Drought is a MODELLED SPEI index from rainfall and evapotranspiration, refreshed monthly, retrieved 2026-07-20 — the best national-coverage signal available, but nobody has walked those districts. Rain and river telemetry MEASURED (ThaiWater, live, pulled daily and accumulated — a missed pull leaves a gap rather than an invented point) · rain to 2026-09-05, river to 2026-09-05. Structural flood exposure MEASURED (GISTDA 1:50,000 repeated-flooding census, 2005-2016 — a 12-year ground record, not a forecast).</a:t>
+              <a:t>Planted area MEASURED (OAE — 3,295 amphoe crop rows). Drought is a MODELLED SPEI index from rainfall and evapotranspiration, refreshed monthly, retrieved 2026-07-20 — the best national-coverage signal available, but nobody has walked those districts. Rain and river telemetry MEASURED (ThaiWater, live, pulled daily and accumulated — a missed pull leaves a gap rather than an invented point) · rain to 2026-09-06, river to 2026-09-06. Structural flood exposure MEASURED (GISTDA 1:50,000 repeated-flooding census, 2005-2016 — a 12-year ground record, not a forecast).</a:t>
             </a:r>
           </a:p>
         </p:txBody>
@@ -32047,7 +32047,7 @@
                 </a:solidFill>
                 <a:latin typeface="Kanit"/>
               </a:rPr>
-              <a:t>Vintages — world prices 2026M06 · Thai farm gate 2026-09-03 · Thai price history 2026-08-29 · crop cost of production OAE Cai-up 2568 (crop year 2568/69, OAE forecast Mar 2569) · drought 2026-06-21 · CPI 2026-05 · GDP 2026-Q1 · IMF WEO 2026 · resale index 2026-05 · registrations to 2026-01 · household debt NSO SES 2566 · wages NSO LFS 2568 · telemetry 2026-09-05.</a:t>
+              <a:t>Vintages — world prices 2026M06 · Thai farm gate 2026-09-03 · Thai price history 2026-09-05 · crop cost of production OAE Cai-up 2568 (crop year 2568/69, OAE forecast Mar 2569) · drought 2026-06-21 · CPI 2026-05 · GDP 2026-Q1 · IMF WEO 2026 · resale index 2026-05 · registrations to 2026-01 · household debt NSO SES 2566 · wages NSO LFS 2568 · telemetry 2026-09-06.</a:t>
             </a:r>
           </a:p>
         </p:txBody>
@@ -33912,7 +33912,7 @@
                 </a:solidFill>
                 <a:latin typeface="Kanit"/>
               </a:rPr>
-              <a:t>33.16</a:t>
+              <a:t>32.92</a:t>
             </a:r>
           </a:p>
         </p:txBody>
@@ -33951,7 +33951,7 @@
                 </a:solidFill>
                 <a:latin typeface="Kanit"/>
               </a:rPr>
-              <a:t>ECB reference · 2026-08-31</a:t>
+              <a:t>ECB reference · 2026-09-04</a:t>
             </a:r>
           </a:p>
         </p:txBody>
@@ -35798,7 +35798,7 @@
                 </a:solidFill>
                 <a:latin typeface="Kanit"/>
               </a:rPr>
-              <a:t>NESDC 2026-Q1 · TPSO 2026-05 · Bank of Thailand 2026-08 · BIS 2025-Q4 · ECB 2026-08-31, each pulled from the publishing agency. IMF World Economic Outlook 2026 (pulled 2026-07-25) for the peer table. BoT published NPL ratio — 4.48% at 2026-Q1, 4.33% the quarter before, +0.24pp on the year, 3.08% low in 2021-Q1.</a:t>
+              <a:t>NESDC 2026-Q1 · TPSO 2026-05 · Bank of Thailand 2026-08 · BIS 2025-Q4 · ECB 2026-09-04, each pulled from the publishing agency. IMF World Economic Outlook 2026 (pulled 2026-07-25) for the peer table. BoT published NPL ratio — 4.48% at 2026-Q1, 4.33% the quarter before, +0.24pp on the year, 3.08% low in 2021-Q1.</a:t>
             </a:r>
           </a:p>
         </p:txBody>
@@ -37087,7 +37087,7 @@
                 </a:solidFill>
                 <a:latin typeface="Kanit"/>
               </a:rPr>
-              <a:t>338 of 928 districts · 123 of 793 rivers high</a:t>
+              <a:t>338 of 928 districts · 133 of 792 rivers high</a:t>
             </a:r>
           </a:p>
         </p:txBody>
@@ -37859,7 +37859,7 @@
                           </a:solidFill>
                           <a:latin typeface="Kanit"/>
                         </a:rPr>
-                        <a:t>26/157</a:t>
+                        <a:t>29/157</a:t>
                       </a:r>
                     </a:p>
                   </a:txBody>
@@ -38091,7 +38091,7 @@
                           </a:solidFill>
                           <a:latin typeface="Kanit"/>
                         </a:rPr>
-                        <a:t>19/274</a:t>
+                        <a:t>16/274</a:t>
                       </a:r>
                     </a:p>
                   </a:txBody>
@@ -38323,7 +38323,7 @@
                           </a:solidFill>
                           <a:latin typeface="Kanit"/>
                         </a:rPr>
-                        <a:t>26/168</a:t>
+                        <a:t>29/167</a:t>
                       </a:r>
                     </a:p>
                   </a:txBody>
@@ -38555,7 +38555,7 @@
                           </a:solidFill>
                           <a:latin typeface="Kanit"/>
                         </a:rPr>
-                        <a:t>15/51</a:t>
+                        <a:t>14/51</a:t>
                       </a:r>
                     </a:p>
                   </a:txBody>
@@ -38787,7 +38787,7 @@
                           </a:solidFill>
                           <a:latin typeface="Kanit"/>
                         </a:rPr>
-                        <a:t>37/143</a:t>
+                        <a:t>45/143</a:t>
                       </a:r>
                     </a:p>
                   </a:txBody>
@@ -39959,7 +39959,7 @@
                           </a:solidFill>
                           <a:latin typeface="Kanit"/>
                         </a:rPr>
-                        <a:t>−50.7%</a:t>
+                        <a:t>−41.3%</a:t>
                       </a:r>
                     </a:p>
                   </a:txBody>
@@ -40791,7 +40791,7 @@
                 </a:solidFill>
                 <a:latin typeface="Kanit"/>
               </a:rPr>
-              <a:t>Prices MEASURED — NABC daily quotes for the Thai farm gate, OCSB announced cane price; newest quote 2026-09-03. The six-month move is computed from NABC's own monthly series (thai_price_history, vintage 2026-08-29); a crop with no monthly series is marked, never estimated. Belt is an ESTIMATED read of where each commodity is produced, and belts overlap. Farming accounts are OURS and MEASURED — accounts whose recorded occupation is เกษตร in the belt provinces, from the 382,735-account tape at 2026-07; no cell below 30 accounts is published. They live where the crop grows; they are not confirmed to grow it.</a:t>
+              <a:t>Prices MEASURED — NABC daily quotes for the Thai farm gate, OCSB announced cane price; newest quote 2026-09-03. The six-month move is computed from NABC's own monthly series (thai_price_history, vintage 2026-09-05); a crop with no monthly series is marked, never estimated. Belt is an ESTIMATED read of where each commodity is produced, and belts overlap. Farming accounts are OURS and MEASURED — accounts whose recorded occupation is เกษตร in the belt provinces, from the 382,735-account tape at 2026-07; no cell below 30 accounts is published. They live where the crop grows; they are not confirmed to grow it.</a:t>
             </a:r>
           </a:p>
         </p:txBody>
@@ -43419,7 +43419,7 @@
                           </a:solidFill>
                           <a:latin typeface="Kanit"/>
                         </a:rPr>
-                        <a:t>92.20</a:t>
+                        <a:t>91.52</a:t>
                       </a:r>
                     </a:p>
                   </a:txBody>
@@ -43559,7 +43559,7 @@
                           </a:solidFill>
                           <a:latin typeface="Kanit"/>
                         </a:rPr>
-                        <a:t>15,488</a:t>
+                        <a:t>15,374</a:t>
                       </a:r>
                     </a:p>
                   </a:txBody>
@@ -43699,7 +43699,7 @@
                           </a:solidFill>
                           <a:latin typeface="Kanit"/>
                         </a:rPr>
-                        <a:t>36,515</a:t>
+                        <a:t>36,245</a:t>
                       </a:r>
                     </a:p>
                   </a:txBody>
@@ -43839,7 +43839,7 @@
                           </a:solidFill>
                           <a:latin typeface="Kanit"/>
                         </a:rPr>
-                        <a:t>11.28</a:t>
+                        <a:t>11.19</a:t>
                       </a:r>
                     </a:p>
                   </a:txBody>
@@ -44058,7 +44058,7 @@
                 </a:solidFill>
                 <a:latin typeface="Kanit"/>
               </a:rPr>
-              <a:t>World Bank Pink Sheet nominal-USD monthly prices, vintage 2026M07 (60 observations per series, rebased to 100 at 2021-07 for the chart — units differ, so raw levels can’t share an axis). Baht conversion at the ECB reference rate USD/THB 33.165, 2026-08-31. Planted-area share MEASURED, OAE/DOAE crop mix (crop_mix.json). Nominal, not deflated: five years of Thai CPI sit under every ‘vs 5 yrs ago’ figure.</a:t>
+              <a:t>World Bank Pink Sheet nominal-USD monthly prices, vintage 2026M07 (60 observations per series, rebased to 100 at 2021-07 for the chart — units differ, so raw levels can’t share an axis). Baht conversion at the ECB reference rate USD/THB 32.920, 2026-09-04. Planted-area share MEASURED, OAE/DOAE crop mix (crop_mix.json). Nominal, not deflated: five years of Thai CPI sit under every ‘vs 5 yrs ago’ figure.</a:t>
             </a:r>
           </a:p>
         </p:txBody>
@@ -47985,7 +47985,7 @@
                 </a:solidFill>
                 <a:latin typeface="Kanit"/>
               </a:rPr>
-              <a:t>฿596.84 /ร้อยผล · S·E</a:t>
+              <a:t>฿580.00 /ร้อยผล · S·E</a:t>
             </a:r>
           </a:p>
         </p:txBody>
@@ -48063,7 +48063,7 @@
                 </a:solidFill>
                 <a:latin typeface="Kanit"/>
               </a:rPr>
-              <a:t>6m −50.7%</a:t>
+              <a:t>6m −41.3%</a:t>
             </a:r>
           </a:p>
         </p:txBody>
@@ -48134,22 +48134,22 @@
             <a:pathLst>
               <a:path w="2064715" h="457200">
                 <a:moveTo>
-                  <a:pt x="0" y="0"/>
+                  <a:pt x="0" y="38315"/>
                 </a:moveTo>
                 <a:lnTo>
-                  <a:pt x="412943" y="170673"/>
-                </a:lnTo>
-                <a:lnTo>
-                  <a:pt x="825886" y="145193"/>
-                </a:lnTo>
-                <a:lnTo>
-                  <a:pt x="1238829" y="399195"/>
-                </a:lnTo>
-                <a:lnTo>
-                  <a:pt x="1651772" y="457200"/>
-                </a:lnTo>
-                <a:lnTo>
-                  <a:pt x="2064715" y="409348"/>
+                  <a:pt x="412943" y="0"/>
+                </a:lnTo>
+                <a:lnTo>
+                  <a:pt x="825886" y="372997"/>
+                </a:lnTo>
+                <a:lnTo>
+                  <a:pt x="1238829" y="457200"/>
+                </a:lnTo>
+                <a:lnTo>
+                  <a:pt x="1651772" y="385356"/>
+                </a:lnTo>
+                <a:lnTo>
+                  <a:pt x="2064715" y="411313"/>
                 </a:lnTo>
               </a:path>
             </a:pathLst>
@@ -48192,7 +48192,7 @@
         </p:nvSpPr>
         <p:spPr>
           <a:xfrm>
-            <a:off x="2480767" y="2814220"/>
+            <a:off x="2480767" y="2816185"/>
             <a:ext cx="82296" cy="82296"/>
           </a:xfrm>
           <a:prstGeom prst="roundRect">
@@ -48621,7 +48621,7 @@
                 </a:solidFill>
                 <a:latin typeface="Kanit"/>
               </a:rPr>
-              <a:t>฿143.14 /กก. · S·E coast</a:t>
+              <a:t>฿142.50 /กก. · S·E coast</a:t>
             </a:r>
           </a:p>
         </p:txBody>
@@ -48695,11 +48695,11 @@
             <a:r>
               <a:rPr sz="800" b="1">
                 <a:solidFill>
-                  <a:srgbClr val="CC0000"/>
+                  <a:srgbClr val="15795F"/>
                 </a:solidFill>
                 <a:latin typeface="Kanit"/>
               </a:rPr>
-              <a:t>6m −2.0%</a:t>
+              <a:t>6m +8.0%</a:t>
             </a:r>
           </a:p>
         </p:txBody>
@@ -48770,22 +48770,22 @@
             <a:pathLst>
               <a:path w="2064715" h="457200">
                 <a:moveTo>
-                  <a:pt x="0" y="216948"/>
+                  <a:pt x="0" y="415899"/>
                 </a:moveTo>
                 <a:lnTo>
-                  <a:pt x="412943" y="415955"/>
-                </a:lnTo>
-                <a:lnTo>
-                  <a:pt x="825886" y="457200"/>
-                </a:lnTo>
-                <a:lnTo>
-                  <a:pt x="1238829" y="420285"/>
-                </a:lnTo>
-                <a:lnTo>
-                  <a:pt x="1651772" y="170341"/>
-                </a:lnTo>
-                <a:lnTo>
-                  <a:pt x="2064715" y="0"/>
+                  <a:pt x="412943" y="457200"/>
+                </a:lnTo>
+                <a:lnTo>
+                  <a:pt x="825886" y="420235"/>
+                </a:lnTo>
+                <a:lnTo>
+                  <a:pt x="1238829" y="169952"/>
+                </a:lnTo>
+                <a:lnTo>
+                  <a:pt x="1651772" y="0"/>
+                </a:lnTo>
+                <a:lnTo>
+                  <a:pt x="2064715" y="12596"/>
                 </a:lnTo>
               </a:path>
             </a:pathLst>
@@ -48793,7 +48793,7 @@
           <a:noFill/>
           <a:ln w="20320">
             <a:solidFill>
-              <a:srgbClr val="CC0000"/>
+              <a:srgbClr val="15795F"/>
             </a:solidFill>
           </a:ln>
           <a:effectLst/>
@@ -48828,7 +48828,7 @@
         </p:nvSpPr>
         <p:spPr>
           <a:xfrm>
-            <a:off x="7085685" y="2404872"/>
+            <a:off x="7085685" y="2417468"/>
             <a:ext cx="82296" cy="82296"/>
           </a:xfrm>
           <a:prstGeom prst="roundRect">
@@ -48837,7 +48837,7 @@
             </a:avLst>
           </a:prstGeom>
           <a:solidFill>
-            <a:srgbClr val="CC0000"/>
+            <a:srgbClr val="15795F"/>
           </a:solidFill>
           <a:ln>
             <a:noFill/>
@@ -48939,7 +48939,7 @@
                 </a:solidFill>
                 <a:latin typeface="Kanit"/>
               </a:rPr>
-              <a:t>฿43.05 /กก. · C·E</a:t>
+              <a:t>฿44.00 /กก. · C·E</a:t>
             </a:r>
           </a:p>
         </p:txBody>
@@ -49017,7 +49017,7 @@
                 </a:solidFill>
                 <a:latin typeface="Kanit"/>
               </a:rPr>
-              <a:t>6m +2.4%</a:t>
+              <a:t>6m +0.0%</a:t>
             </a:r>
           </a:p>
         </p:txBody>
@@ -49088,22 +49088,22 @@
             <a:pathLst>
               <a:path w="2064715" h="457200">
                 <a:moveTo>
-                  <a:pt x="0" y="0"/>
+                  <a:pt x="0" y="122251"/>
                 </a:moveTo>
                 <a:lnTo>
-                  <a:pt x="412943" y="119484"/>
-                </a:lnTo>
-                <a:lnTo>
-                  <a:pt x="825886" y="305129"/>
-                </a:lnTo>
-                <a:lnTo>
-                  <a:pt x="1238829" y="457200"/>
-                </a:lnTo>
-                <a:lnTo>
-                  <a:pt x="1651772" y="245880"/>
-                </a:lnTo>
-                <a:lnTo>
-                  <a:pt x="2064715" y="91834"/>
+                  <a:pt x="412943" y="309106"/>
+                </a:lnTo>
+                <a:lnTo>
+                  <a:pt x="825886" y="457200"/>
+                </a:lnTo>
+                <a:lnTo>
+                  <a:pt x="1238829" y="249472"/>
+                </a:lnTo>
+                <a:lnTo>
+                  <a:pt x="1651772" y="89452"/>
+                </a:lnTo>
+                <a:lnTo>
+                  <a:pt x="2064715" y="0"/>
                 </a:lnTo>
               </a:path>
             </a:pathLst>
@@ -49146,7 +49146,7 @@
         </p:nvSpPr>
         <p:spPr>
           <a:xfrm>
-            <a:off x="9388144" y="2496706"/>
+            <a:off x="9388144" y="2404872"/>
             <a:ext cx="82296" cy="82296"/>
           </a:xfrm>
           <a:prstGeom prst="roundRect">
@@ -49257,7 +49257,7 @@
                 </a:solidFill>
                 <a:latin typeface="Kanit"/>
               </a:rPr>
-              <a:t>฿350.53 /ร้อยฟอง · C·E</a:t>
+              <a:t>฿360.00 /ร้อยฟอง · C·E</a:t>
             </a:r>
           </a:p>
         </p:txBody>
@@ -49335,7 +49335,7 @@
                 </a:solidFill>
                 <a:latin typeface="Kanit"/>
               </a:rPr>
-              <a:t>6m +15.9%</a:t>
+              <a:t>6m +17.0%</a:t>
             </a:r>
           </a:p>
         </p:txBody>
@@ -49406,19 +49406,19 @@
             <a:pathLst>
               <a:path w="2064715" h="457200">
                 <a:moveTo>
-                  <a:pt x="0" y="457200"/>
+                  <a:pt x="0" y="356259"/>
                 </a:moveTo>
                 <a:lnTo>
-                  <a:pt x="412943" y="218744"/>
-                </a:lnTo>
-                <a:lnTo>
-                  <a:pt x="825886" y="218744"/>
-                </a:lnTo>
-                <a:lnTo>
-                  <a:pt x="1238829" y="309310"/>
-                </a:lnTo>
-                <a:lnTo>
-                  <a:pt x="1651772" y="128177"/>
+                  <a:pt x="412943" y="356259"/>
+                </a:lnTo>
+                <a:lnTo>
+                  <a:pt x="825886" y="457200"/>
+                </a:lnTo>
+                <a:lnTo>
+                  <a:pt x="1238829" y="255319"/>
+                </a:lnTo>
+                <a:lnTo>
+                  <a:pt x="1651772" y="106877"/>
                 </a:lnTo>
                 <a:lnTo>
                   <a:pt x="2064715" y="0"/>
@@ -49575,7 +49575,7 @@
                 </a:solidFill>
                 <a:latin typeface="Kanit"/>
               </a:rPr>
-              <a:t>฿17,763 /ตัน · Isan·N·C</a:t>
+              <a:t>฿17,494 /ตัน · Isan·N·C</a:t>
             </a:r>
           </a:p>
         </p:txBody>
@@ -49653,7 +49653,7 @@
                 </a:solidFill>
                 <a:latin typeface="Kanit"/>
               </a:rPr>
-              <a:t>6m +7.7%</a:t>
+              <a:t>6m +4.3%</a:t>
             </a:r>
           </a:p>
         </p:txBody>
@@ -49727,19 +49727,19 @@
                   <a:pt x="0" y="457200"/>
                 </a:moveTo>
                 <a:lnTo>
-                  <a:pt x="412943" y="341371"/>
-                </a:lnTo>
-                <a:lnTo>
-                  <a:pt x="825886" y="153981"/>
-                </a:lnTo>
-                <a:lnTo>
-                  <a:pt x="1238829" y="34219"/>
-                </a:lnTo>
-                <a:lnTo>
-                  <a:pt x="1651772" y="23720"/>
-                </a:lnTo>
-                <a:lnTo>
-                  <a:pt x="2064715" y="0"/>
+                  <a:pt x="412943" y="212701"/>
+                </a:lnTo>
+                <a:lnTo>
+                  <a:pt x="825886" y="41154"/>
+                </a:lnTo>
+                <a:lnTo>
+                  <a:pt x="1238829" y="30357"/>
+                </a:lnTo>
+                <a:lnTo>
+                  <a:pt x="1651772" y="0"/>
+                </a:lnTo>
+                <a:lnTo>
+                  <a:pt x="2064715" y="163560"/>
                 </a:lnTo>
               </a:path>
             </a:pathLst>
@@ -49782,7 +49782,7 @@
         </p:nvSpPr>
         <p:spPr>
           <a:xfrm>
-            <a:off x="2480767" y="3511296"/>
+            <a:off x="2480767" y="3674856"/>
             <a:ext cx="82296" cy="82296"/>
           </a:xfrm>
           <a:prstGeom prst="roundRect">
@@ -49893,7 +49893,7 @@
                 </a:solidFill>
                 <a:latin typeface="Kanit"/>
               </a:rPr>
-              <a:t>฿9.76 /กก. · North</a:t>
+              <a:t>฿9.05 /กก. · North</a:t>
             </a:r>
           </a:p>
         </p:txBody>
@@ -49967,11 +49967,11 @@
             <a:r>
               <a:rPr sz="800" b="1">
                 <a:solidFill>
-                  <a:srgbClr val="15795F"/>
+                  <a:srgbClr val="CC0000"/>
                 </a:solidFill>
                 <a:latin typeface="Kanit"/>
               </a:rPr>
-              <a:t>6m +9.7%</a:t>
+              <a:t>6m −0.3%</a:t>
             </a:r>
           </a:p>
         </p:txBody>
@@ -50042,22 +50042,22 @@
             <a:pathLst>
               <a:path w="2064715" h="457200">
                 <a:moveTo>
-                  <a:pt x="0" y="457200"/>
+                  <a:pt x="0" y="342301"/>
                 </a:moveTo>
                 <a:lnTo>
-                  <a:pt x="412943" y="350931"/>
-                </a:lnTo>
-                <a:lnTo>
-                  <a:pt x="825886" y="79083"/>
-                </a:lnTo>
-                <a:lnTo>
-                  <a:pt x="1238829" y="0"/>
-                </a:lnTo>
-                <a:lnTo>
-                  <a:pt x="1651772" y="54369"/>
-                </a:lnTo>
-                <a:lnTo>
-                  <a:pt x="2064715" y="294090"/>
+                  <a:pt x="412943" y="83780"/>
+                </a:lnTo>
+                <a:lnTo>
+                  <a:pt x="825886" y="0"/>
+                </a:lnTo>
+                <a:lnTo>
+                  <a:pt x="1238829" y="47874"/>
+                </a:lnTo>
+                <a:lnTo>
+                  <a:pt x="1651772" y="292033"/>
+                </a:lnTo>
+                <a:lnTo>
+                  <a:pt x="2064715" y="457200"/>
                 </a:lnTo>
               </a:path>
             </a:pathLst>
@@ -50065,7 +50065,7 @@
           <a:noFill/>
           <a:ln w="20320">
             <a:solidFill>
-              <a:srgbClr val="15795F"/>
+              <a:srgbClr val="CC0000"/>
             </a:solidFill>
           </a:ln>
           <a:effectLst/>
@@ -50100,7 +50100,7 @@
         </p:nvSpPr>
         <p:spPr>
           <a:xfrm>
-            <a:off x="4783226" y="3805386"/>
+            <a:off x="4783226" y="3968496"/>
             <a:ext cx="82296" cy="82296"/>
           </a:xfrm>
           <a:prstGeom prst="roundRect">
@@ -50109,7 +50109,7 @@
             </a:avLst>
           </a:prstGeom>
           <a:solidFill>
-            <a:srgbClr val="15795F"/>
+            <a:srgbClr val="CC0000"/>
           </a:solidFill>
           <a:ln>
             <a:noFill/>
@@ -50211,7 +50211,7 @@
                 </a:solidFill>
                 <a:latin typeface="Kanit"/>
               </a:rPr>
-              <a:t>฿71.18 /กก. · C·W·E</a:t>
+              <a:t>฿74.67 /กก. · C·W·E</a:t>
             </a:r>
           </a:p>
         </p:txBody>
@@ -50289,7 +50289,7 @@
                 </a:solidFill>
                 <a:latin typeface="Kanit"/>
               </a:rPr>
-              <a:t>6m +28.2%</a:t>
+              <a:t>6m +18.4%</a:t>
             </a:r>
           </a:p>
         </p:txBody>
@@ -50360,19 +50360,19 @@
             <a:pathLst>
               <a:path w="2064715" h="457200">
                 <a:moveTo>
-                  <a:pt x="0" y="371819"/>
+                  <a:pt x="0" y="220046"/>
                 </a:moveTo>
                 <a:lnTo>
-                  <a:pt x="412943" y="140924"/>
-                </a:lnTo>
-                <a:lnTo>
-                  <a:pt x="825886" y="457200"/>
-                </a:lnTo>
-                <a:lnTo>
-                  <a:pt x="1238829" y="309849"/>
-                </a:lnTo>
-                <a:lnTo>
-                  <a:pt x="1651772" y="196008"/>
+                  <a:pt x="412943" y="457200"/>
+                </a:lnTo>
+                <a:lnTo>
+                  <a:pt x="825886" y="343487"/>
+                </a:lnTo>
+                <a:lnTo>
+                  <a:pt x="1238829" y="264994"/>
+                </a:lnTo>
+                <a:lnTo>
+                  <a:pt x="1651772" y="111364"/>
                 </a:lnTo>
                 <a:lnTo>
                   <a:pt x="2064715" y="0"/>
@@ -50529,7 +50529,7 @@
                 </a:solidFill>
                 <a:latin typeface="Kanit"/>
               </a:rPr>
-              <a:t>฿8.51 /กก. · South</a:t>
+              <a:t>฿8.38 /กก. · South</a:t>
             </a:r>
           </a:p>
         </p:txBody>
@@ -50607,7 +50607,7 @@
                 </a:solidFill>
                 <a:latin typeface="Kanit"/>
               </a:rPr>
-              <a:t>6m +24.6%</a:t>
+              <a:t>6m +16.2%</a:t>
             </a:r>
           </a:p>
         </p:txBody>
@@ -50678,22 +50678,22 @@
             <a:pathLst>
               <a:path w="2064715" h="457200">
                 <a:moveTo>
-                  <a:pt x="0" y="453709"/>
+                  <a:pt x="0" y="439749"/>
                 </a:moveTo>
                 <a:lnTo>
-                  <a:pt x="412943" y="439749"/>
-                </a:lnTo>
-                <a:lnTo>
-                  <a:pt x="825886" y="457200"/>
-                </a:lnTo>
-                <a:lnTo>
-                  <a:pt x="1238829" y="293166"/>
-                </a:lnTo>
-                <a:lnTo>
-                  <a:pt x="1651772" y="76781"/>
-                </a:lnTo>
-                <a:lnTo>
-                  <a:pt x="2064715" y="0"/>
+                  <a:pt x="412943" y="457200"/>
+                </a:lnTo>
+                <a:lnTo>
+                  <a:pt x="825886" y="293166"/>
+                </a:lnTo>
+                <a:lnTo>
+                  <a:pt x="1238829" y="76781"/>
+                </a:lnTo>
+                <a:lnTo>
+                  <a:pt x="1651772" y="0"/>
+                </a:lnTo>
+                <a:lnTo>
+                  <a:pt x="2064715" y="45370"/>
                 </a:lnTo>
               </a:path>
             </a:pathLst>
@@ -50736,7 +50736,7 @@
         </p:nvSpPr>
         <p:spPr>
           <a:xfrm>
-            <a:off x="9388144" y="3511296"/>
+            <a:off x="9388144" y="3556666"/>
             <a:ext cx="82296" cy="82296"/>
           </a:xfrm>
           <a:prstGeom prst="roundRect">
@@ -50847,7 +50847,7 @@
                 </a:solidFill>
                 <a:latin typeface="Kanit"/>
               </a:rPr>
-              <a:t>฿81.23 /กก. · S·E</a:t>
+              <a:t>฿80.62 /กก. · S·E</a:t>
             </a:r>
           </a:p>
         </p:txBody>
@@ -50925,7 +50925,7 @@
                 </a:solidFill>
                 <a:latin typeface="Kanit"/>
               </a:rPr>
-              <a:t>6m +34.6%</a:t>
+              <a:t>6m +18.5%</a:t>
             </a:r>
           </a:p>
         </p:txBody>
@@ -50999,19 +50999,19 @@
                   <a:pt x="0" y="457200"/>
                 </a:moveTo>
                 <a:lnTo>
-                  <a:pt x="412943" y="282748"/>
-                </a:lnTo>
-                <a:lnTo>
-                  <a:pt x="825886" y="158359"/>
-                </a:lnTo>
-                <a:lnTo>
-                  <a:pt x="1238829" y="0"/>
-                </a:lnTo>
-                <a:lnTo>
-                  <a:pt x="1651772" y="39334"/>
-                </a:lnTo>
-                <a:lnTo>
-                  <a:pt x="2064715" y="122090"/>
+                  <a:pt x="412943" y="252867"/>
+                </a:lnTo>
+                <a:lnTo>
+                  <a:pt x="825886" y="0"/>
+                </a:lnTo>
+                <a:lnTo>
+                  <a:pt x="1238829" y="66071"/>
+                </a:lnTo>
+                <a:lnTo>
+                  <a:pt x="1651772" y="195360"/>
+                </a:lnTo>
+                <a:lnTo>
+                  <a:pt x="2064715" y="219831"/>
                 </a:lnTo>
               </a:path>
             </a:pathLst>
@@ -51054,7 +51054,7 @@
         </p:nvSpPr>
         <p:spPr>
           <a:xfrm>
-            <a:off x="11690603" y="3633386"/>
+            <a:off x="11690603" y="3731127"/>
             <a:ext cx="82296" cy="82296"/>
           </a:xfrm>
           <a:prstGeom prst="roundRect">
@@ -51165,7 +51165,7 @@
                 </a:solidFill>
                 <a:latin typeface="Kanit"/>
               </a:rPr>
-              <a:t>฿3.81 /กก. · Isan·N·E</a:t>
+              <a:t>฿3.92 /กก. · Isan·N·E</a:t>
             </a:r>
           </a:p>
         </p:txBody>
@@ -51243,7 +51243,7 @@
                 </a:solidFill>
                 <a:latin typeface="Kanit"/>
               </a:rPr>
-              <a:t>6m +51.8%</a:t>
+              <a:t>6m +47.4%</a:t>
             </a:r>
           </a:p>
         </p:txBody>
@@ -51317,16 +51317,16 @@
                   <a:pt x="0" y="457200"/>
                 </a:moveTo>
                 <a:lnTo>
-                  <a:pt x="412943" y="357809"/>
-                </a:lnTo>
-                <a:lnTo>
-                  <a:pt x="825886" y="278296"/>
-                </a:lnTo>
-                <a:lnTo>
-                  <a:pt x="1238829" y="178905"/>
-                </a:lnTo>
-                <a:lnTo>
-                  <a:pt x="1651772" y="143124"/>
+                  <a:pt x="412943" y="366666"/>
+                </a:lnTo>
+                <a:lnTo>
+                  <a:pt x="825886" y="253498"/>
+                </a:lnTo>
+                <a:lnTo>
+                  <a:pt x="1238829" y="217284"/>
+                </a:lnTo>
+                <a:lnTo>
+                  <a:pt x="1651772" y="49795"/>
                 </a:lnTo>
                 <a:lnTo>
                   <a:pt x="2064715" y="0"/>
@@ -51483,7 +51483,7 @@
                 </a:solidFill>
                 <a:latin typeface="Kanit"/>
               </a:rPr>
-              <a:t>฿146.32 /ร้อยผล · C·W</a:t>
+              <a:t>฿250.00 /ร้อยผล · C·W</a:t>
             </a:r>
           </a:p>
         </p:txBody>
@@ -51561,7 +51561,7 @@
                 </a:solidFill>
                 <a:latin typeface="Kanit"/>
               </a:rPr>
-              <a:t>6m −30.3%</a:t>
+              <a:t>6m −45.0%</a:t>
             </a:r>
           </a:p>
         </p:txBody>
@@ -51632,22 +51632,22 @@
             <a:pathLst>
               <a:path w="2064715" h="457200">
                 <a:moveTo>
-                  <a:pt x="0" y="213177"/>
+                  <a:pt x="0" y="0"/>
                 </a:moveTo>
                 <a:lnTo>
-                  <a:pt x="412943" y="0"/>
-                </a:lnTo>
-                <a:lnTo>
-                  <a:pt x="825886" y="259737"/>
-                </a:lnTo>
-                <a:lnTo>
-                  <a:pt x="1238829" y="443342"/>
-                </a:lnTo>
-                <a:lnTo>
-                  <a:pt x="1651772" y="457200"/>
-                </a:lnTo>
-                <a:lnTo>
-                  <a:pt x="2064715" y="416732"/>
+                  <a:pt x="412943" y="259737"/>
+                </a:lnTo>
+                <a:lnTo>
+                  <a:pt x="825886" y="443342"/>
+                </a:lnTo>
+                <a:lnTo>
+                  <a:pt x="1238829" y="457200"/>
+                </a:lnTo>
+                <a:lnTo>
+                  <a:pt x="1651772" y="413314"/>
+                </a:lnTo>
+                <a:lnTo>
+                  <a:pt x="2064715" y="348309"/>
                 </a:lnTo>
               </a:path>
             </a:pathLst>
@@ -51690,7 +51690,7 @@
         </p:nvSpPr>
         <p:spPr>
           <a:xfrm>
-            <a:off x="4783226" y="5034451"/>
+            <a:off x="4783226" y="4966028"/>
             <a:ext cx="82296" cy="82296"/>
           </a:xfrm>
           <a:prstGeom prst="roundRect">
@@ -51886,7 +51886,7 @@
                 </a:solidFill>
                 <a:latin typeface="Kanit"/>
               </a:rPr>
-              <a:t>Farm-gate prices MEASURED — NABC daily quotes, monthly means, in baht as published (no currency conversion); newest quote 2026-09-03, history vintage 2026-08-29. Farm gate (ราคาที่เกษตรกรขายได้) is what the grower is paid at first sale, before trading, milling or transport take a cut — not the world index and not a supermarket price. Belts are an ESTIMATED read of where each commodity is produced, and they overlap. Sugar is OCSB's announced season price, one point a year, so it has no six-month move to show.</a:t>
+              <a:t>Farm-gate prices MEASURED — NABC daily quotes, monthly means, in baht as published (no currency conversion); newest quote 2026-09-03, history vintage 2026-09-05. Farm gate (ราคาที่เกษตรกรขายได้) is what the grower is paid at first sale, before trading, milling or transport take a cut — not the world index and not a supermarket price. Belts are an ESTIMATED read of where each commodity is produced, and they overlap. Sugar is OCSB's announced season price, one point a year, so it has no six-month move to show.</a:t>
             </a:r>
           </a:p>
         </p:txBody>

--- a/docs/decks/mcom-2026-08-05-macro.pptx
+++ b/docs/decks/mcom-2026-08-05-macro.pptx
@@ -6240,7 +6240,7 @@
                 </a:solidFill>
                 <a:latin typeface="Kanit"/>
               </a:rPr>
-              <a:t>133</a:t>
+              <a:t>124</a:t>
             </a:r>
           </a:p>
         </p:txBody>
@@ -6279,7 +6279,7 @@
                 </a:solidFill>
                 <a:latin typeface="Kanit"/>
               </a:rPr>
-              <a:t>of 792 (16.8%) · live · 2026-09-06</a:t>
+              <a:t>of 792 (15.7%) · live · 2026-09-07</a:t>
             </a:r>
           </a:p>
         </p:txBody>
@@ -6405,7 +6405,7 @@
                 </a:solidFill>
                 <a:latin typeface="Kanit"/>
               </a:rPr>
-              <a:t>39</a:t>
+              <a:t>45</a:t>
             </a:r>
           </a:p>
         </p:txBody>
@@ -6444,7 +6444,7 @@
                 </a:solidFill>
                 <a:latin typeface="Kanit"/>
               </a:rPr>
-              <a:t>latest daily reading · 2026-09-06</a:t>
+              <a:t>latest daily reading · 2026-09-07</a:t>
             </a:r>
           </a:p>
         </p:txBody>
@@ -7928,7 +7928,7 @@
                           </a:solidFill>
                           <a:latin typeface="Kanit"/>
                         </a:rPr>
-                        <a:t>58</a:t>
+                        <a:t>76</a:t>
                       </a:r>
                     </a:p>
                   </a:txBody>
@@ -7951,7 +7951,7 @@
                           </a:solidFill>
                           <a:latin typeface="Kanit"/>
                         </a:rPr>
-                        <a:t>15.8%</a:t>
+                        <a:t>26.3%</a:t>
                       </a:r>
                     </a:p>
                   </a:txBody>
@@ -8022,7 +8022,7 @@
                           </a:solidFill>
                           <a:latin typeface="Kanit"/>
                         </a:rPr>
-                        <a:t>สมุทรปราการ</a:t>
+                        <a:t>อุทัยธานี</a:t>
                       </a:r>
                     </a:p>
                   </a:txBody>
@@ -8045,7 +8045,7 @@
                           </a:solidFill>
                           <a:latin typeface="Kanit"/>
                         </a:rPr>
-                        <a:t>15</a:t>
+                        <a:t>45</a:t>
                       </a:r>
                     </a:p>
                   </a:txBody>
@@ -8114,7 +8114,7 @@
                           </a:solidFill>
                           <a:latin typeface="Kanit"/>
                         </a:rPr>
-                        <a:t>4/4</a:t>
+                        <a:t>1/4</a:t>
                       </a:r>
                     </a:p>
                   </a:txBody>
@@ -8162,7 +8162,7 @@
                           </a:solidFill>
                           <a:latin typeface="Kanit"/>
                         </a:rPr>
-                        <a:t>อุทัยธานี</a:t>
+                        <a:t>บึงกาฬ</a:t>
                       </a:r>
                     </a:p>
                   </a:txBody>
@@ -8185,7 +8185,7 @@
                           </a:solidFill>
                           <a:latin typeface="Kanit"/>
                         </a:rPr>
-                        <a:t>45</a:t>
+                        <a:t>11</a:t>
                       </a:r>
                     </a:p>
                   </a:txBody>
@@ -8208,7 +8208,7 @@
                           </a:solidFill>
                           <a:latin typeface="Kanit"/>
                         </a:rPr>
-                        <a:t>13</a:t>
+                        <a:t>162</a:t>
                       </a:r>
                     </a:p>
                   </a:txBody>
@@ -8227,11 +8227,11 @@
                       <a:r>
                         <a:rPr sz="900" b="1">
                           <a:solidFill>
-                            <a:srgbClr val="606060"/>
-                          </a:solidFill>
-                          <a:latin typeface="Kanit"/>
-                        </a:rPr>
-                        <a:t>0.0%</a:t>
+                            <a:srgbClr val="F5C242"/>
+                          </a:solidFill>
+                          <a:latin typeface="Kanit"/>
+                        </a:rPr>
+                        <a:t>54.5%</a:t>
                       </a:r>
                     </a:p>
                   </a:txBody>
@@ -8254,7 +8254,7 @@
                           </a:solidFill>
                           <a:latin typeface="Kanit"/>
                         </a:rPr>
-                        <a:t>1/4</a:t>
+                        <a:t>1/1</a:t>
                       </a:r>
                     </a:p>
                   </a:txBody>
@@ -8273,11 +8273,11 @@
                       <a:r>
                         <a:rPr sz="900" b="1">
                           <a:solidFill>
-                            <a:srgbClr val="CC0000"/>
-                          </a:solidFill>
-                          <a:latin typeface="Kanit"/>
-                        </a:rPr>
-                        <a:t>5</a:t>
+                            <a:srgbClr val="F5C242"/>
+                          </a:solidFill>
+                          <a:latin typeface="Kanit"/>
+                        </a:rPr>
+                        <a:t>4</a:t>
                       </a:r>
                     </a:p>
                   </a:txBody>
@@ -8302,7 +8302,7 @@
                           </a:solidFill>
                           <a:latin typeface="Kanit"/>
                         </a:rPr>
-                        <a:t>บึงกาฬ</a:t>
+                        <a:t>นครนายก</a:t>
                       </a:r>
                     </a:p>
                   </a:txBody>
@@ -8325,7 +8325,7 @@
                           </a:solidFill>
                           <a:latin typeface="Kanit"/>
                         </a:rPr>
-                        <a:t>11</a:t>
+                        <a:t>26</a:t>
                       </a:r>
                     </a:p>
                   </a:txBody>
@@ -8348,7 +8348,7 @@
                           </a:solidFill>
                           <a:latin typeface="Kanit"/>
                         </a:rPr>
-                        <a:t>134</a:t>
+                        <a:t>69</a:t>
                       </a:r>
                     </a:p>
                   </a:txBody>
@@ -8371,7 +8371,7 @@
                           </a:solidFill>
                           <a:latin typeface="Kanit"/>
                         </a:rPr>
-                        <a:t>45.5%</a:t>
+                        <a:t>42.3%</a:t>
                       </a:r>
                     </a:p>
                   </a:txBody>
@@ -8394,7 +8394,7 @@
                           </a:solidFill>
                           <a:latin typeface="Kanit"/>
                         </a:rPr>
-                        <a:t>1/1</a:t>
+                        <a:t>2/6</a:t>
                       </a:r>
                     </a:p>
                   </a:txBody>
@@ -8442,7 +8442,7 @@
                           </a:solidFill>
                           <a:latin typeface="Kanit"/>
                         </a:rPr>
-                        <a:t>นครนายก</a:t>
+                        <a:t>นนทบุรี</a:t>
                       </a:r>
                     </a:p>
                   </a:txBody>
@@ -8465,7 +8465,7 @@
                           </a:solidFill>
                           <a:latin typeface="Kanit"/>
                         </a:rPr>
-                        <a:t>26</a:t>
+                        <a:t>3</a:t>
                       </a:r>
                     </a:p>
                   </a:txBody>
@@ -8488,7 +8488,7 @@
                           </a:solidFill>
                           <a:latin typeface="Kanit"/>
                         </a:rPr>
-                        <a:t>60</a:t>
+                        <a:t>71</a:t>
                       </a:r>
                     </a:p>
                   </a:txBody>
@@ -8511,7 +8511,7 @@
                           </a:solidFill>
                           <a:latin typeface="Kanit"/>
                         </a:rPr>
-                        <a:t>42.3%</a:t>
+                        <a:t>33.3%</a:t>
                       </a:r>
                     </a:p>
                   </a:txBody>
@@ -8534,7 +8534,7 @@
                           </a:solidFill>
                           <a:latin typeface="Kanit"/>
                         </a:rPr>
-                        <a:t>2/6</a:t>
+                        <a:t>1/2</a:t>
                       </a:r>
                     </a:p>
                   </a:txBody>
@@ -8582,7 +8582,7 @@
                           </a:solidFill>
                           <a:latin typeface="Kanit"/>
                         </a:rPr>
-                        <a:t>ปราจีนบุรี</a:t>
+                        <a:t>พระนครศรีอยุธยา</a:t>
                       </a:r>
                     </a:p>
                   </a:txBody>
@@ -8605,7 +8605,7 @@
                           </a:solidFill>
                           <a:latin typeface="Kanit"/>
                         </a:rPr>
-                        <a:t>35</a:t>
+                        <a:t>30</a:t>
                       </a:r>
                     </a:p>
                   </a:txBody>
@@ -8628,7 +8628,7 @@
                           </a:solidFill>
                           <a:latin typeface="Kanit"/>
                         </a:rPr>
-                        <a:t>68</a:t>
+                        <a:t>71</a:t>
                       </a:r>
                     </a:p>
                   </a:txBody>
@@ -8651,7 +8651,7 @@
                           </a:solidFill>
                           <a:latin typeface="Kanit"/>
                         </a:rPr>
-                        <a:t>37.1%</a:t>
+                        <a:t>30.0%</a:t>
                       </a:r>
                     </a:p>
                   </a:txBody>
@@ -8674,7 +8674,7 @@
                           </a:solidFill>
                           <a:latin typeface="Kanit"/>
                         </a:rPr>
-                        <a:t>5/15</a:t>
+                        <a:t>8/22</a:t>
                       </a:r>
                     </a:p>
                   </a:txBody>
@@ -8909,7 +8909,7 @@
                 </a:solidFill>
                 <a:latin typeface="Kanit"/>
               </a:rPr>
-              <a:t>Planted area MEASURED (OAE — 3,295 amphoe crop rows). Drought is a MODELLED SPEI index from rainfall and evapotranspiration, refreshed monthly, retrieved 2026-07-20 — the best national-coverage signal available, but nobody has walked those districts. Rain and river telemetry MEASURED (ThaiWater, live, pulled daily and accumulated — a missed pull leaves a gap rather than an invented point) · rain to 2026-09-06, river to 2026-09-06. Structural flood exposure MEASURED (GISTDA 1:50,000 repeated-flooding census, 2005-2016 — a 12-year ground record, not a forecast).</a:t>
+              <a:t>Planted area MEASURED (OAE — 3,295 amphoe crop rows). Drought is a MODELLED SPEI index from rainfall and evapotranspiration, refreshed monthly, retrieved 2026-07-20 — the best national-coverage signal available, but nobody has walked those districts. Rain and river telemetry MEASURED (ThaiWater, live, pulled daily and accumulated — a missed pull leaves a gap rather than an invented point) · rain to 2026-09-07, river to 2026-09-07. Structural flood exposure MEASURED (GISTDA 1:50,000 repeated-flooding census, 2005-2016 — a 12-year ground record, not a forecast).</a:t>
             </a:r>
           </a:p>
         </p:txBody>
@@ -32047,7 +32047,7 @@
                 </a:solidFill>
                 <a:latin typeface="Kanit"/>
               </a:rPr>
-              <a:t>Vintages — world prices 2026M06 · Thai farm gate 2026-09-03 · Thai price history 2026-09-05 · crop cost of production OAE Cai-up 2568 (crop year 2568/69, OAE forecast Mar 2569) · drought 2026-06-21 · CPI 2026-05 · GDP 2026-Q1 · IMF WEO 2026 · resale index 2026-05 · registrations to 2026-01 · household debt NSO SES 2566 · wages NSO LFS 2568 · telemetry 2026-09-06.</a:t>
+              <a:t>Vintages — world prices 2026M06 · Thai farm gate 2026-09-03 · Thai price history 2026-09-05 · crop cost of production OAE Cai-up 2568 (crop year 2568/69, OAE forecast Mar 2569) · drought 2026-06-21 · CPI 2026-05 · GDP 2026-Q1 · IMF WEO 2026 · resale index 2026-05 · registrations to 2026-01 · household debt NSO SES 2566 · wages NSO LFS 2568 · telemetry 2026-09-07.</a:t>
             </a:r>
           </a:p>
         </p:txBody>
@@ -37087,7 +37087,7 @@
                 </a:solidFill>
                 <a:latin typeface="Kanit"/>
               </a:rPr>
-              <a:t>338 of 928 districts · 133 of 792 rivers high</a:t>
+              <a:t>338 of 928 districts · 124 of 792 rivers high</a:t>
             </a:r>
           </a:p>
         </p:txBody>
@@ -37859,7 +37859,7 @@
                           </a:solidFill>
                           <a:latin typeface="Kanit"/>
                         </a:rPr>
-                        <a:t>29/157</a:t>
+                        <a:t>30/157</a:t>
                       </a:r>
                     </a:p>
                   </a:txBody>
@@ -38323,7 +38323,7 @@
                           </a:solidFill>
                           <a:latin typeface="Kanit"/>
                         </a:rPr>
-                        <a:t>29/167</a:t>
+                        <a:t>26/167</a:t>
                       </a:r>
                     </a:p>
                   </a:txBody>
@@ -38555,7 +38555,7 @@
                           </a:solidFill>
                           <a:latin typeface="Kanit"/>
                         </a:rPr>
-                        <a:t>14/51</a:t>
+                        <a:t>13/51</a:t>
                       </a:r>
                     </a:p>
                   </a:txBody>
@@ -38787,7 +38787,7 @@
                           </a:solidFill>
                           <a:latin typeface="Kanit"/>
                         </a:rPr>
-                        <a:t>45/143</a:t>
+                        <a:t>39/143</a:t>
                       </a:r>
                     </a:p>
                   </a:txBody>

--- a/docs/decks/mcom-2026-08-05-macro.pptx
+++ b/docs/decks/mcom-2026-08-05-macro.pptx
@@ -6240,7 +6240,7 @@
                 </a:solidFill>
                 <a:latin typeface="Kanit"/>
               </a:rPr>
-              <a:t>124</a:t>
+              <a:t>123</a:t>
             </a:r>
           </a:p>
         </p:txBody>
@@ -6279,7 +6279,7 @@
                 </a:solidFill>
                 <a:latin typeface="Kanit"/>
               </a:rPr>
-              <a:t>of 792 (15.7%) · live · 2026-09-07</a:t>
+              <a:t>of 792 (15.5%) · live · 2026-09-07</a:t>
             </a:r>
           </a:p>
         </p:txBody>
@@ -7951,7 +7951,7 @@
                           </a:solidFill>
                           <a:latin typeface="Kanit"/>
                         </a:rPr>
-                        <a:t>26.3%</a:t>
+                        <a:t>28.9%</a:t>
                       </a:r>
                     </a:p>
                   </a:txBody>
@@ -7974,7 +7974,7 @@
                           </a:solidFill>
                           <a:latin typeface="Kanit"/>
                         </a:rPr>
-                        <a:t>6/13</a:t>
+                        <a:t>7/13</a:t>
                       </a:r>
                     </a:p>
                   </a:txBody>
@@ -8068,7 +8068,7 @@
                           </a:solidFill>
                           <a:latin typeface="Kanit"/>
                         </a:rPr>
-                        <a:t>13</a:t>
+                        <a:t>15</a:t>
                       </a:r>
                     </a:p>
                   </a:txBody>
@@ -8231,7 +8231,7 @@
                           </a:solidFill>
                           <a:latin typeface="Kanit"/>
                         </a:rPr>
-                        <a:t>54.5%</a:t>
+                        <a:t>45.5%</a:t>
                       </a:r>
                     </a:p>
                   </a:txBody>
@@ -8325,7 +8325,7 @@
                           </a:solidFill>
                           <a:latin typeface="Kanit"/>
                         </a:rPr>
-                        <a:t>26</a:t>
+                        <a:t>25</a:t>
                       </a:r>
                     </a:p>
                   </a:txBody>
@@ -8371,7 +8371,7 @@
                           </a:solidFill>
                           <a:latin typeface="Kanit"/>
                         </a:rPr>
-                        <a:t>42.3%</a:t>
+                        <a:t>44.0%</a:t>
                       </a:r>
                     </a:p>
                   </a:txBody>
@@ -8674,7 +8674,7 @@
                           </a:solidFill>
                           <a:latin typeface="Kanit"/>
                         </a:rPr>
-                        <a:t>8/22</a:t>
+                        <a:t>7/22</a:t>
                       </a:r>
                     </a:p>
                   </a:txBody>
@@ -31476,7 +31476,7 @@
                 </a:solidFill>
                 <a:latin typeface="Kanit"/>
               </a:rPr>
-              <a:t>Median crop income rose +16.4%, but four provinces fell — all on the coconut (มะพร้าว) belt, worst สมุทรสงคราม at −63.5%.</a:t>
+              <a:t>Median crop income rose +16.3%, but four provinces fell — all on the coconut (มะพร้าว) belt, worst สมุทรสงคราม at −63.8%.</a:t>
             </a:r>
           </a:p>
         </p:txBody>
@@ -32047,7 +32047,7 @@
                 </a:solidFill>
                 <a:latin typeface="Kanit"/>
               </a:rPr>
-              <a:t>Vintages — world prices 2026M06 · Thai farm gate 2026-09-03 · Thai price history 2026-09-05 · crop cost of production OAE Cai-up 2568 (crop year 2568/69, OAE forecast Mar 2569) · drought 2026-06-21 · CPI 2026-05 · GDP 2026-Q1 · IMF WEO 2026 · resale index 2026-05 · registrations to 2026-01 · household debt NSO SES 2566 · wages NSO LFS 2568 · telemetry 2026-09-07.</a:t>
+              <a:t>Vintages — world prices 2026M06 · Thai farm gate 2026-09-04 · Thai price history 2026-09-05 · crop cost of production OAE Cai-up 2568 (crop year 2568/69, OAE forecast Mar 2569) · drought 2026-06-21 · CPI 2026-05 · GDP 2026-Q1 · IMF WEO 2026 · resale index 2026-05 · registrations to 2026-01 · household debt NSO SES 2566 · wages NSO LFS 2568 · telemetry 2026-09-07.</a:t>
             </a:r>
           </a:p>
         </p:txBody>
@@ -32546,7 +32546,7 @@
               <a:t>Not on the world index — the farm gate (ราคาที่เกษตรกรขายได้) says otherwise.
 • Five of seventeen Thai farm-gate prices are falling year on year.
 • Beef: farm gate −6.1% vs world index +8.8%.
-• Margin over price: a 26% price move becomes an 85% swing in crop income.</a:t>
+• Margin over price: a 26% price move becomes an 87% swing in crop income.</a:t>
             </a:r>
           </a:p>
         </p:txBody>
@@ -37087,7 +37087,7 @@
                 </a:solidFill>
                 <a:latin typeface="Kanit"/>
               </a:rPr>
-              <a:t>338 of 928 districts · 124 of 792 rivers high</a:t>
+              <a:t>338 of 928 districts · 123 of 792 rivers high</a:t>
             </a:r>
           </a:p>
         </p:txBody>
@@ -37859,7 +37859,7 @@
                           </a:solidFill>
                           <a:latin typeface="Kanit"/>
                         </a:rPr>
-                        <a:t>30/157</a:t>
+                        <a:t>29/157</a:t>
                       </a:r>
                     </a:p>
                   </a:txBody>
@@ -38091,7 +38091,7 @@
                           </a:solidFill>
                           <a:latin typeface="Kanit"/>
                         </a:rPr>
-                        <a:t>16/274</a:t>
+                        <a:t>18/274</a:t>
                       </a:r>
                     </a:p>
                   </a:txBody>
@@ -38323,7 +38323,7 @@
                           </a:solidFill>
                           <a:latin typeface="Kanit"/>
                         </a:rPr>
-                        <a:t>26/167</a:t>
+                        <a:t>25/167</a:t>
                       </a:r>
                     </a:p>
                   </a:txBody>
@@ -38555,7 +38555,7 @@
                           </a:solidFill>
                           <a:latin typeface="Kanit"/>
                         </a:rPr>
-                        <a:t>13/51</a:t>
+                        <a:t>14/51</a:t>
                       </a:r>
                     </a:p>
                   </a:txBody>
@@ -38787,7 +38787,7 @@
                           </a:solidFill>
                           <a:latin typeface="Kanit"/>
                         </a:rPr>
-                        <a:t>39/143</a:t>
+                        <a:t>37/143</a:t>
                       </a:r>
                     </a:p>
                   </a:txBody>
@@ -39936,7 +39936,7 @@
                           </a:solidFill>
                           <a:latin typeface="Kanit"/>
                         </a:rPr>
-                        <a:t>−67.9%</a:t>
+                        <a:t>−68.2%</a:t>
                       </a:r>
                     </a:p>
                   </a:txBody>
@@ -40791,7 +40791,7 @@
                 </a:solidFill>
                 <a:latin typeface="Kanit"/>
               </a:rPr>
-              <a:t>Prices MEASURED — NABC daily quotes for the Thai farm gate, OCSB announced cane price; newest quote 2026-09-03. The six-month move is computed from NABC's own monthly series (thai_price_history, vintage 2026-09-05); a crop with no monthly series is marked, never estimated. Belt is an ESTIMATED read of where each commodity is produced, and belts overlap. Farming accounts are OURS and MEASURED — accounts whose recorded occupation is เกษตร in the belt provinces, from the 382,735-account tape at 2026-07; no cell below 30 accounts is published. They live where the crop grows; they are not confirmed to grow it.</a:t>
+              <a:t>Prices MEASURED — NABC daily quotes for the Thai farm gate, OCSB announced cane price; newest quote 2026-09-04. The six-month move is computed from NABC's own monthly series (thai_price_history, vintage 2026-09-05); a crop with no monthly series is marked, never estimated. Belt is an ESTIMATED read of where each commodity is produced, and belts overlap. Farming accounts are OURS and MEASURED — accounts whose recorded occupation is เกษตร in the belt provinces, from the 382,735-account tape at 2026-07; no cell below 30 accounts is published. They live where the crop grows; they are not confirmed to grow it.</a:t>
             </a:r>
           </a:p>
         </p:txBody>
@@ -44679,7 +44679,7 @@
                 </a:solidFill>
                 <a:latin typeface="Kanit"/>
               </a:rPr>
-              <a:t>coconut −67.9%, pineapple −18.4%, sugarcane −17.9% year on year</a:t>
+              <a:t>coconut −68.2%, pineapple −18.4%, sugarcane −17.9% year on year</a:t>
             </a:r>
           </a:p>
         </p:txBody>
@@ -44805,7 +44805,7 @@
                 </a:solidFill>
                 <a:latin typeface="Kanit"/>
               </a:rPr>
-              <a:t>+16.4%</a:t>
+              <a:t>+16.3%</a:t>
             </a:r>
           </a:p>
         </p:txBody>
@@ -45348,7 +45348,7 @@
                           </a:solidFill>
                           <a:latin typeface="Kanit"/>
                         </a:rPr>
-                        <a:t>-63.5%</a:t>
+                        <a:t>-63.8%</a:t>
                       </a:r>
                     </a:p>
                   </a:txBody>
@@ -45419,7 +45419,7 @@
                           </a:solidFill>
                           <a:latin typeface="Kanit"/>
                         </a:rPr>
-                        <a:t>+15.4%</a:t>
+                        <a:t>+15.3%</a:t>
                       </a:r>
                     </a:p>
                   </a:txBody>
@@ -47039,7 +47039,7 @@
                           </a:solidFill>
                           <a:latin typeface="Kanit"/>
                         </a:rPr>
-                        <a:t>+16.7%</a:t>
+                        <a:t>+16.6%</a:t>
                       </a:r>
                     </a:p>
                   </a:txBody>
@@ -48024,7 +48024,7 @@
                 </a:solidFill>
                 <a:latin typeface="Kanit"/>
               </a:rPr>
-              <a:t>YoY −67.9%</a:t>
+              <a:t>YoY −68.2%</a:t>
             </a:r>
           </a:p>
         </p:txBody>
@@ -48660,7 +48660,7 @@
                 </a:solidFill>
                 <a:latin typeface="Kanit"/>
               </a:rPr>
-              <a:t>YoY +1.0%</a:t>
+              <a:t>YoY +0.9%</a:t>
             </a:r>
           </a:p>
         </p:txBody>
@@ -48978,7 +48978,7 @@
                 </a:solidFill>
                 <a:latin typeface="Kanit"/>
               </a:rPr>
-              <a:t>YoY +4.5%</a:t>
+              <a:t>YoY +4.6%</a:t>
             </a:r>
           </a:p>
         </p:txBody>
@@ -49296,7 +49296,7 @@
                 </a:solidFill>
                 <a:latin typeface="Kanit"/>
               </a:rPr>
-              <a:t>YoY +5.6%</a:t>
+              <a:t>YoY +5.9%</a:t>
             </a:r>
           </a:p>
         </p:txBody>
@@ -49932,7 +49932,7 @@
                 </a:solidFill>
                 <a:latin typeface="Kanit"/>
               </a:rPr>
-              <a:t>YoY +15.5%</a:t>
+              <a:t>YoY +15.1%</a:t>
             </a:r>
           </a:p>
         </p:txBody>
@@ -50250,7 +50250,7 @@
                 </a:solidFill>
                 <a:latin typeface="Kanit"/>
               </a:rPr>
-              <a:t>YoY +18.0%</a:t>
+              <a:t>YoY +19.5%</a:t>
             </a:r>
           </a:p>
         </p:txBody>
@@ -51522,7 +51522,7 @@
                 </a:solidFill>
                 <a:latin typeface="Kanit"/>
               </a:rPr>
-              <a:t>YoY +134.7%</a:t>
+              <a:t>YoY +161.6%</a:t>
             </a:r>
           </a:p>
         </p:txBody>
@@ -51886,7 +51886,7 @@
                 </a:solidFill>
                 <a:latin typeface="Kanit"/>
               </a:rPr>
-              <a:t>Farm-gate prices MEASURED — NABC daily quotes, monthly means, in baht as published (no currency conversion); newest quote 2026-09-03, history vintage 2026-09-05. Farm gate (ราคาที่เกษตรกรขายได้) is what the grower is paid at first sale, before trading, milling or transport take a cut — not the world index and not a supermarket price. Belts are an ESTIMATED read of where each commodity is produced, and they overlap. Sugar is OCSB's announced season price, one point a year, so it has no six-month move to show.</a:t>
+              <a:t>Farm-gate prices MEASURED — NABC daily quotes, monthly means, in baht as published (no currency conversion); newest quote 2026-09-04, history vintage 2026-09-05. Farm gate (ราคาที่เกษตรกรขายได้) is what the grower is paid at first sale, before trading, milling or transport take a cut — not the world index and not a supermarket price. Belts are an ESTIMATED read of where each commodity is produced, and they overlap. Sugar is OCSB's announced season price, one point a year, so it has no six-month move to show.</a:t>
             </a:r>
           </a:p>
         </p:txBody>

--- a/docs/decks/mcom-2026-08-05-macro.pptx
+++ b/docs/decks/mcom-2026-08-05-macro.pptx
@@ -6240,7 +6240,7 @@
                 </a:solidFill>
                 <a:latin typeface="Kanit"/>
               </a:rPr>
-              <a:t>123</a:t>
+              <a:t>125</a:t>
             </a:r>
           </a:p>
         </p:txBody>
@@ -6279,7 +6279,7 @@
                 </a:solidFill>
                 <a:latin typeface="Kanit"/>
               </a:rPr>
-              <a:t>of 792 (15.5%) · live · 2026-09-07</a:t>
+              <a:t>of 792 (15.8%) · live · 2026-09-07</a:t>
             </a:r>
           </a:p>
         </p:txBody>
@@ -37087,7 +37087,7 @@
                 </a:solidFill>
                 <a:latin typeface="Kanit"/>
               </a:rPr>
-              <a:t>338 of 928 districts · 123 of 792 rivers high</a:t>
+              <a:t>338 of 928 districts · 125 of 792 rivers high</a:t>
             </a:r>
           </a:p>
         </p:txBody>
@@ -38787,7 +38787,7 @@
                           </a:solidFill>
                           <a:latin typeface="Kanit"/>
                         </a:rPr>
-                        <a:t>37/143</a:t>
+                        <a:t>39/143</a:t>
                       </a:r>
                     </a:p>
                   </a:txBody>

--- a/docs/decks/mcom-2026-08-05-macro.pptx
+++ b/docs/decks/mcom-2026-08-05-macro.pptx
@@ -6240,7 +6240,7 @@
                 </a:solidFill>
                 <a:latin typeface="Kanit"/>
               </a:rPr>
-              <a:t>125</a:t>
+              <a:t>129</a:t>
             </a:r>
           </a:p>
         </p:txBody>
@@ -6279,7 +6279,7 @@
                 </a:solidFill>
                 <a:latin typeface="Kanit"/>
               </a:rPr>
-              <a:t>of 792 (15.8%) · live · 2026-09-07</a:t>
+              <a:t>of 790 (16.3%) · live · 2026-09-08</a:t>
             </a:r>
           </a:p>
         </p:txBody>
@@ -6405,7 +6405,7 @@
                 </a:solidFill>
                 <a:latin typeface="Kanit"/>
               </a:rPr>
-              <a:t>45</a:t>
+              <a:t>32</a:t>
             </a:r>
           </a:p>
         </p:txBody>
@@ -6444,7 +6444,7 @@
                 </a:solidFill>
                 <a:latin typeface="Kanit"/>
               </a:rPr>
-              <a:t>latest daily reading · 2026-09-07</a:t>
+              <a:t>latest daily reading · 2026-09-08</a:t>
             </a:r>
           </a:p>
         </p:txBody>
@@ -7928,7 +7928,7 @@
                           </a:solidFill>
                           <a:latin typeface="Kanit"/>
                         </a:rPr>
-                        <a:t>76</a:t>
+                        <a:t>33</a:t>
                       </a:r>
                     </a:p>
                   </a:txBody>
@@ -7947,11 +7947,11 @@
                       <a:r>
                         <a:rPr sz="900" b="1">
                           <a:solidFill>
-                            <a:srgbClr val="F5C242"/>
-                          </a:solidFill>
-                          <a:latin typeface="Kanit"/>
-                        </a:rPr>
-                        <a:t>28.9%</a:t>
+                            <a:srgbClr val="606060"/>
+                          </a:solidFill>
+                          <a:latin typeface="Kanit"/>
+                        </a:rPr>
+                        <a:t>0.0%</a:t>
                       </a:r>
                     </a:p>
                   </a:txBody>
@@ -7974,7 +7974,7 @@
                           </a:solidFill>
                           <a:latin typeface="Kanit"/>
                         </a:rPr>
-                        <a:t>7/13</a:t>
+                        <a:t>7/12</a:t>
                       </a:r>
                     </a:p>
                   </a:txBody>
@@ -8068,7 +8068,7 @@
                           </a:solidFill>
                           <a:latin typeface="Kanit"/>
                         </a:rPr>
-                        <a:t>15</a:t>
+                        <a:t>19</a:t>
                       </a:r>
                     </a:p>
                   </a:txBody>
@@ -8162,7 +8162,7 @@
                           </a:solidFill>
                           <a:latin typeface="Kanit"/>
                         </a:rPr>
-                        <a:t>บึงกาฬ</a:t>
+                        <a:t>ยโสธร</a:t>
                       </a:r>
                     </a:p>
                   </a:txBody>
@@ -8185,7 +8185,7 @@
                           </a:solidFill>
                           <a:latin typeface="Kanit"/>
                         </a:rPr>
-                        <a:t>11</a:t>
+                        <a:t>14</a:t>
                       </a:r>
                     </a:p>
                   </a:txBody>
@@ -8208,7 +8208,7 @@
                           </a:solidFill>
                           <a:latin typeface="Kanit"/>
                         </a:rPr>
-                        <a:t>162</a:t>
+                        <a:t>88</a:t>
                       </a:r>
                     </a:p>
                   </a:txBody>
@@ -8231,7 +8231,7 @@
                           </a:solidFill>
                           <a:latin typeface="Kanit"/>
                         </a:rPr>
-                        <a:t>45.5%</a:t>
+                        <a:t>21.4%</a:t>
                       </a:r>
                     </a:p>
                   </a:txBody>
@@ -8254,7 +8254,7 @@
                           </a:solidFill>
                           <a:latin typeface="Kanit"/>
                         </a:rPr>
-                        <a:t>1/1</a:t>
+                        <a:t>3/5</a:t>
                       </a:r>
                     </a:p>
                   </a:txBody>
@@ -8302,7 +8302,7 @@
                           </a:solidFill>
                           <a:latin typeface="Kanit"/>
                         </a:rPr>
-                        <a:t>นครนายก</a:t>
+                        <a:t>ลำพูน</a:t>
                       </a:r>
                     </a:p>
                   </a:txBody>
@@ -8325,7 +8325,7 @@
                           </a:solidFill>
                           <a:latin typeface="Kanit"/>
                         </a:rPr>
-                        <a:t>25</a:t>
+                        <a:t>76</a:t>
                       </a:r>
                     </a:p>
                   </a:txBody>
@@ -8348,7 +8348,7 @@
                           </a:solidFill>
                           <a:latin typeface="Kanit"/>
                         </a:rPr>
-                        <a:t>69</a:t>
+                        <a:t>70</a:t>
                       </a:r>
                     </a:p>
                   </a:txBody>
@@ -8371,7 +8371,7 @@
                           </a:solidFill>
                           <a:latin typeface="Kanit"/>
                         </a:rPr>
-                        <a:t>44.0%</a:t>
+                        <a:t>10.5%</a:t>
                       </a:r>
                     </a:p>
                   </a:txBody>
@@ -8394,7 +8394,7 @@
                           </a:solidFill>
                           <a:latin typeface="Kanit"/>
                         </a:rPr>
-                        <a:t>2/6</a:t>
+                        <a:t>1/11</a:t>
                       </a:r>
                     </a:p>
                   </a:txBody>
@@ -8442,7 +8442,7 @@
                           </a:solidFill>
                           <a:latin typeface="Kanit"/>
                         </a:rPr>
-                        <a:t>นนทบุรี</a:t>
+                        <a:t>บึงกาฬ</a:t>
                       </a:r>
                     </a:p>
                   </a:txBody>
@@ -8465,7 +8465,7 @@
                           </a:solidFill>
                           <a:latin typeface="Kanit"/>
                         </a:rPr>
-                        <a:t>3</a:t>
+                        <a:t>11</a:t>
                       </a:r>
                     </a:p>
                   </a:txBody>
@@ -8488,7 +8488,7 @@
                           </a:solidFill>
                           <a:latin typeface="Kanit"/>
                         </a:rPr>
-                        <a:t>71</a:t>
+                        <a:t>56</a:t>
                       </a:r>
                     </a:p>
                   </a:txBody>
@@ -8511,7 +8511,7 @@
                           </a:solidFill>
                           <a:latin typeface="Kanit"/>
                         </a:rPr>
-                        <a:t>33.3%</a:t>
+                        <a:t>9.1%</a:t>
                       </a:r>
                     </a:p>
                   </a:txBody>
@@ -8534,7 +8534,7 @@
                           </a:solidFill>
                           <a:latin typeface="Kanit"/>
                         </a:rPr>
-                        <a:t>1/2</a:t>
+                        <a:t>1/1</a:t>
                       </a:r>
                     </a:p>
                   </a:txBody>
@@ -8582,7 +8582,7 @@
                           </a:solidFill>
                           <a:latin typeface="Kanit"/>
                         </a:rPr>
-                        <a:t>พระนครศรีอยุธยา</a:t>
+                        <a:t>พะเยา</a:t>
                       </a:r>
                     </a:p>
                   </a:txBody>
@@ -8605,7 +8605,7 @@
                           </a:solidFill>
                           <a:latin typeface="Kanit"/>
                         </a:rPr>
-                        <a:t>30</a:t>
+                        <a:t>125</a:t>
                       </a:r>
                     </a:p>
                   </a:txBody>
@@ -8628,7 +8628,7 @@
                           </a:solidFill>
                           <a:latin typeface="Kanit"/>
                         </a:rPr>
-                        <a:t>71</a:t>
+                        <a:t>96</a:t>
                       </a:r>
                     </a:p>
                   </a:txBody>
@@ -8651,7 +8651,7 @@
                           </a:solidFill>
                           <a:latin typeface="Kanit"/>
                         </a:rPr>
-                        <a:t>30.0%</a:t>
+                        <a:t>8.8%</a:t>
                       </a:r>
                     </a:p>
                   </a:txBody>
@@ -8674,7 +8674,7 @@
                           </a:solidFill>
                           <a:latin typeface="Kanit"/>
                         </a:rPr>
-                        <a:t>7/22</a:t>
+                        <a:t>3/13</a:t>
                       </a:r>
                     </a:p>
                   </a:txBody>
@@ -8909,7 +8909,7 @@
                 </a:solidFill>
                 <a:latin typeface="Kanit"/>
               </a:rPr>
-              <a:t>Planted area MEASURED (OAE — 3,295 amphoe crop rows). Drought is a MODELLED SPEI index from rainfall and evapotranspiration, refreshed monthly, retrieved 2026-07-20 — the best national-coverage signal available, but nobody has walked those districts. Rain and river telemetry MEASURED (ThaiWater, live, pulled daily and accumulated — a missed pull leaves a gap rather than an invented point) · rain to 2026-09-07, river to 2026-09-07. Structural flood exposure MEASURED (GISTDA 1:50,000 repeated-flooding census, 2005-2016 — a 12-year ground record, not a forecast).</a:t>
+              <a:t>Planted area MEASURED (OAE — 3,295 amphoe crop rows). Drought is a MODELLED SPEI index from rainfall and evapotranspiration, refreshed monthly, retrieved 2026-07-20 — the best national-coverage signal available, but nobody has walked those districts. Rain and river telemetry MEASURED (ThaiWater, live, pulled daily and accumulated — a missed pull leaves a gap rather than an invented point) · rain to 2026-09-08, river to 2026-09-08. Structural flood exposure MEASURED (GISTDA 1:50,000 repeated-flooding census, 2005-2016 — a 12-year ground record, not a forecast).</a:t>
             </a:r>
           </a:p>
         </p:txBody>
@@ -31476,7 +31476,7 @@
                 </a:solidFill>
                 <a:latin typeface="Kanit"/>
               </a:rPr>
-              <a:t>Median crop income rose +16.3%, but four provinces fell — all on the coconut (มะพร้าว) belt, worst สมุทรสงคราม at −63.8%.</a:t>
+              <a:t>Median crop income rose +15.9%, but four provinces fell — all on the coconut (มะพร้าว) belt, worst สมุทรสงคราม at −64.2%.</a:t>
             </a:r>
           </a:p>
         </p:txBody>
@@ -32047,7 +32047,7 @@
                 </a:solidFill>
                 <a:latin typeface="Kanit"/>
               </a:rPr>
-              <a:t>Vintages — world prices 2026M06 · Thai farm gate 2026-09-04 · Thai price history 2026-09-05 · crop cost of production OAE Cai-up 2568 (crop year 2568/69, OAE forecast Mar 2569) · drought 2026-06-21 · CPI 2026-05 · GDP 2026-Q1 · IMF WEO 2026 · resale index 2026-05 · registrations to 2026-01 · household debt NSO SES 2566 · wages NSO LFS 2568 · telemetry 2026-09-07.</a:t>
+              <a:t>Vintages — world prices 2026M06 · Thai farm gate 2026-09-07 · Thai price history 2026-09-05 · crop cost of production OAE Cai-up 2568 (crop year 2568/69, OAE forecast Mar 2569) · drought 2026-06-21 · CPI 2026-05 · GDP 2026-Q1 · IMF WEO 2026 · resale index 2026-05 · registrations to 2026-01 · household debt NSO SES 2566 · wages NSO LFS 2568 · telemetry 2026-09-08.</a:t>
             </a:r>
           </a:p>
         </p:txBody>
@@ -32546,7 +32546,7 @@
               <a:t>Not on the world index — the farm gate (ราคาที่เกษตรกรขายได้) says otherwise.
 • Five of seventeen Thai farm-gate prices are falling year on year.
 • Beef: farm gate −6.1% vs world index +8.8%.
-• Margin over price: a 26% price move becomes an 87% swing in crop income.</a:t>
+• Margin over price: a 26% price move becomes an 83% swing in crop income.</a:t>
             </a:r>
           </a:p>
         </p:txBody>
@@ -37087,7 +37087,7 @@
                 </a:solidFill>
                 <a:latin typeface="Kanit"/>
               </a:rPr>
-              <a:t>338 of 928 districts · 125 of 792 rivers high</a:t>
+              <a:t>338 of 928 districts · 129 of 790 rivers high</a:t>
             </a:r>
           </a:p>
         </p:txBody>
@@ -37859,7 +37859,7 @@
                           </a:solidFill>
                           <a:latin typeface="Kanit"/>
                         </a:rPr>
-                        <a:t>29/157</a:t>
+                        <a:t>30/155</a:t>
                       </a:r>
                     </a:p>
                   </a:txBody>
@@ -37905,7 +37905,7 @@
                           </a:solidFill>
                           <a:latin typeface="Kanit"/>
                         </a:rPr>
-                        <a:t>0.09</a:t>
+                        <a:t>0.11</a:t>
                       </a:r>
                     </a:p>
                   </a:txBody>
@@ -38137,7 +38137,7 @@
                           </a:solidFill>
                           <a:latin typeface="Kanit"/>
                         </a:rPr>
-                        <a:t>0.14</a:t>
+                        <a:t>0.15</a:t>
                       </a:r>
                     </a:p>
                   </a:txBody>
@@ -38323,7 +38323,7 @@
                           </a:solidFill>
                           <a:latin typeface="Kanit"/>
                         </a:rPr>
-                        <a:t>25/167</a:t>
+                        <a:t>26/167</a:t>
                       </a:r>
                     </a:p>
                   </a:txBody>
@@ -38787,7 +38787,7 @@
                           </a:solidFill>
                           <a:latin typeface="Kanit"/>
                         </a:rPr>
-                        <a:t>39/143</a:t>
+                        <a:t>41/143</a:t>
                       </a:r>
                     </a:p>
                   </a:txBody>
@@ -38833,7 +38833,7 @@
                           </a:solidFill>
                           <a:latin typeface="Kanit"/>
                         </a:rPr>
-                        <a:t>0.26</a:t>
+                        <a:t>0.27</a:t>
                       </a:r>
                     </a:p>
                   </a:txBody>
@@ -39936,7 +39936,7 @@
                           </a:solidFill>
                           <a:latin typeface="Kanit"/>
                         </a:rPr>
-                        <a:t>−68.2%</a:t>
+                        <a:t>−68.6%</a:t>
                       </a:r>
                     </a:p>
                   </a:txBody>
@@ -40791,7 +40791,7 @@
                 </a:solidFill>
                 <a:latin typeface="Kanit"/>
               </a:rPr>
-              <a:t>Prices MEASURED — NABC daily quotes for the Thai farm gate, OCSB announced cane price; newest quote 2026-09-04. The six-month move is computed from NABC's own monthly series (thai_price_history, vintage 2026-09-05); a crop with no monthly series is marked, never estimated. Belt is an ESTIMATED read of where each commodity is produced, and belts overlap. Farming accounts are OURS and MEASURED — accounts whose recorded occupation is เกษตร in the belt provinces, from the 382,735-account tape at 2026-07; no cell below 30 accounts is published. They live where the crop grows; they are not confirmed to grow it.</a:t>
+              <a:t>Prices MEASURED — NABC daily quotes for the Thai farm gate, OCSB announced cane price; newest quote 2026-09-07. The six-month move is computed from NABC's own monthly series (thai_price_history, vintage 2026-09-05); a crop with no monthly series is marked, never estimated. Belt is an ESTIMATED read of where each commodity is produced, and belts overlap. Farming accounts are OURS and MEASURED — accounts whose recorded occupation is เกษตร in the belt provinces, from the 382,735-account tape at 2026-07; no cell below 30 accounts is published. They live where the crop grows; they are not confirmed to grow it.</a:t>
             </a:r>
           </a:p>
         </p:txBody>
@@ -44679,7 +44679,7 @@
                 </a:solidFill>
                 <a:latin typeface="Kanit"/>
               </a:rPr>
-              <a:t>coconut −68.2%, pineapple −18.4%, sugarcane −17.9% year on year</a:t>
+              <a:t>coconut −68.6%, pineapple −18.4%, sugarcane −17.9% year on year</a:t>
             </a:r>
           </a:p>
         </p:txBody>
@@ -44805,7 +44805,7 @@
                 </a:solidFill>
                 <a:latin typeface="Kanit"/>
               </a:rPr>
-              <a:t>+16.3%</a:t>
+              <a:t>+15.9%</a:t>
             </a:r>
           </a:p>
         </p:txBody>
@@ -45279,7 +45279,7 @@
                           </a:solidFill>
                           <a:latin typeface="Kanit"/>
                         </a:rPr>
-                        <a:t>+6.2%</a:t>
+                        <a:t>+6.1%</a:t>
                       </a:r>
                     </a:p>
                   </a:txBody>
@@ -45348,7 +45348,7 @@
                           </a:solidFill>
                           <a:latin typeface="Kanit"/>
                         </a:rPr>
-                        <a:t>-63.8%</a:t>
+                        <a:t>-64.2%</a:t>
                       </a:r>
                     </a:p>
                   </a:txBody>
@@ -45419,7 +45419,7 @@
                           </a:solidFill>
                           <a:latin typeface="Kanit"/>
                         </a:rPr>
-                        <a:t>+15.3%</a:t>
+                        <a:t>+15.1%</a:t>
                       </a:r>
                     </a:p>
                   </a:txBody>
@@ -45488,7 +45488,7 @@
                           </a:solidFill>
                           <a:latin typeface="Kanit"/>
                         </a:rPr>
-                        <a:t>+9.6%</a:t>
+                        <a:t>+9.5%</a:t>
                       </a:r>
                     </a:p>
                   </a:txBody>
@@ -45628,7 +45628,7 @@
                           </a:solidFill>
                           <a:latin typeface="Kanit"/>
                         </a:rPr>
-                        <a:t>+8.3%</a:t>
+                        <a:t>+8.2%</a:t>
                       </a:r>
                     </a:p>
                   </a:txBody>
@@ -46084,8 +46084,8 @@
                 </a:solidFill>
                 <a:latin typeface="Kanit"/>
               </a:rPr>
-              <a:t>•  +40% rubber, +75% cassava, +23% palm, +13% rice at the farm gate. Crop income rose in every region.
-•  Four provinces fell — all coconut, all on the western gulf. Coconut price is down 68%.
+              <a:t>•  +40% rubber, +76% cassava, +23% palm, +13% rice at the farm gate. Crop income rose in every region.
+•  Four provinces fell — all coconut, all on the western gulf. Coconut price is down 69%.
 •  A gain on paper is not cash yet — the next table nets prices against cost.</a:t>
             </a:r>
           </a:p>
@@ -46713,7 +46713,7 @@
                           </a:solidFill>
                           <a:latin typeface="Kanit"/>
                         </a:rPr>
-                        <a:t>+11.3%</a:t>
+                        <a:t>+11.2%</a:t>
                       </a:r>
                     </a:p>
                   </a:txBody>
@@ -47202,7 +47202,7 @@
                           </a:solidFill>
                           <a:latin typeface="Kanit"/>
                         </a:rPr>
-                        <a:t>+15.1%</a:t>
+                        <a:t>+15.0%</a:t>
                       </a:r>
                     </a:p>
                   </a:txBody>
@@ -48024,7 +48024,7 @@
                 </a:solidFill>
                 <a:latin typeface="Kanit"/>
               </a:rPr>
-              <a:t>YoY −68.2%</a:t>
+              <a:t>YoY −68.6%</a:t>
             </a:r>
           </a:p>
         </p:txBody>
@@ -48660,7 +48660,7 @@
                 </a:solidFill>
                 <a:latin typeface="Kanit"/>
               </a:rPr>
-              <a:t>YoY +0.9%</a:t>
+              <a:t>YoY +0.6%</a:t>
             </a:r>
           </a:p>
         </p:txBody>
@@ -48978,7 +48978,7 @@
                 </a:solidFill>
                 <a:latin typeface="Kanit"/>
               </a:rPr>
-              <a:t>YoY +4.6%</a:t>
+              <a:t>YoY +4.8%</a:t>
             </a:r>
           </a:p>
         </p:txBody>
@@ -49296,7 +49296,7 @@
                 </a:solidFill>
                 <a:latin typeface="Kanit"/>
               </a:rPr>
-              <a:t>YoY +5.9%</a:t>
+              <a:t>YoY +6.8%</a:t>
             </a:r>
           </a:p>
         </p:txBody>
@@ -49614,7 +49614,7 @@
                 </a:solidFill>
                 <a:latin typeface="Kanit"/>
               </a:rPr>
-              <a:t>YoY +13.4%</a:t>
+              <a:t>YoY +13.3%</a:t>
             </a:r>
           </a:p>
         </p:txBody>
@@ -49932,7 +49932,7 @@
                 </a:solidFill>
                 <a:latin typeface="Kanit"/>
               </a:rPr>
-              <a:t>YoY +15.1%</a:t>
+              <a:t>YoY +13.8%</a:t>
             </a:r>
           </a:p>
         </p:txBody>
@@ -50250,7 +50250,7 @@
                 </a:solidFill>
                 <a:latin typeface="Kanit"/>
               </a:rPr>
-              <a:t>YoY +19.5%</a:t>
+              <a:t>YoY +21.8%</a:t>
             </a:r>
           </a:p>
         </p:txBody>
@@ -51204,7 +51204,7 @@
                 </a:solidFill>
                 <a:latin typeface="Kanit"/>
               </a:rPr>
-              <a:t>YoY +74.8%</a:t>
+              <a:t>YoY +75.9%</a:t>
             </a:r>
           </a:p>
         </p:txBody>
@@ -51522,7 +51522,7 @@
                 </a:solidFill>
                 <a:latin typeface="Kanit"/>
               </a:rPr>
-              <a:t>YoY +161.6%</a:t>
+              <a:t>YoY +181.0%</a:t>
             </a:r>
           </a:p>
         </p:txBody>
@@ -51886,7 +51886,7 @@
                 </a:solidFill>
                 <a:latin typeface="Kanit"/>
               </a:rPr>
-              <a:t>Farm-gate prices MEASURED — NABC daily quotes, monthly means, in baht as published (no currency conversion); newest quote 2026-09-04, history vintage 2026-09-05. Farm gate (ราคาที่เกษตรกรขายได้) is what the grower is paid at first sale, before trading, milling or transport take a cut — not the world index and not a supermarket price. Belts are an ESTIMATED read of where each commodity is produced, and they overlap. Sugar is OCSB's announced season price, one point a year, so it has no six-month move to show.</a:t>
+              <a:t>Farm-gate prices MEASURED — NABC daily quotes, monthly means, in baht as published (no currency conversion); newest quote 2026-09-07, history vintage 2026-09-05. Farm gate (ราคาที่เกษตรกรขายได้) is what the grower is paid at first sale, before trading, milling or transport take a cut — not the world index and not a supermarket price. Belts are an ESTIMATED read of where each commodity is produced, and they overlap. Sugar is OCSB's announced season price, one point a year, so it has no six-month move to show.</a:t>
             </a:r>
           </a:p>
         </p:txBody>

--- a/docs/decks/mcom-2026-08-05-macro.pptx
+++ b/docs/decks/mcom-2026-08-05-macro.pptx
@@ -6240,7 +6240,7 @@
                 </a:solidFill>
                 <a:latin typeface="Kanit"/>
               </a:rPr>
-              <a:t>129</a:t>
+              <a:t>132</a:t>
             </a:r>
           </a:p>
         </p:txBody>
@@ -6279,7 +6279,7 @@
                 </a:solidFill>
                 <a:latin typeface="Kanit"/>
               </a:rPr>
-              <a:t>of 790 (16.3%) · live · 2026-09-08</a:t>
+              <a:t>of 787 (16.8%) · live · 2026-09-09</a:t>
             </a:r>
           </a:p>
         </p:txBody>
@@ -6405,7 +6405,7 @@
                 </a:solidFill>
                 <a:latin typeface="Kanit"/>
               </a:rPr>
-              <a:t>32</a:t>
+              <a:t>34</a:t>
             </a:r>
           </a:p>
         </p:txBody>
@@ -6444,7 +6444,7 @@
                 </a:solidFill>
                 <a:latin typeface="Kanit"/>
               </a:rPr>
-              <a:t>latest daily reading · 2026-09-08</a:t>
+              <a:t>latest daily reading · 2026-09-09</a:t>
             </a:r>
           </a:p>
         </p:txBody>
@@ -7905,7 +7905,7 @@
                           </a:solidFill>
                           <a:latin typeface="Kanit"/>
                         </a:rPr>
-                        <a:t>38</a:t>
+                        <a:t>37</a:t>
                       </a:r>
                     </a:p>
                   </a:txBody>
@@ -7928,7 +7928,7 @@
                           </a:solidFill>
                           <a:latin typeface="Kanit"/>
                         </a:rPr>
-                        <a:t>33</a:t>
+                        <a:t>65</a:t>
                       </a:r>
                     </a:p>
                   </a:txBody>
@@ -7947,11 +7947,11 @@
                       <a:r>
                         <a:rPr sz="900" b="1">
                           <a:solidFill>
-                            <a:srgbClr val="606060"/>
-                          </a:solidFill>
-                          <a:latin typeface="Kanit"/>
-                        </a:rPr>
-                        <a:t>0.0%</a:t>
+                            <a:srgbClr val="F5C242"/>
+                          </a:solidFill>
+                          <a:latin typeface="Kanit"/>
+                        </a:rPr>
+                        <a:t>16.2%</a:t>
                       </a:r>
                     </a:p>
                   </a:txBody>
@@ -8022,7 +8022,7 @@
                           </a:solidFill>
                           <a:latin typeface="Kanit"/>
                         </a:rPr>
-                        <a:t>อุทัยธานี</a:t>
+                        <a:t>สมุทรปราการ</a:t>
                       </a:r>
                     </a:p>
                   </a:txBody>
@@ -8045,7 +8045,7 @@
                           </a:solidFill>
                           <a:latin typeface="Kanit"/>
                         </a:rPr>
-                        <a:t>45</a:t>
+                        <a:t>15</a:t>
                       </a:r>
                     </a:p>
                   </a:txBody>
@@ -8068,7 +8068,7 @@
                           </a:solidFill>
                           <a:latin typeface="Kanit"/>
                         </a:rPr>
-                        <a:t>19</a:t>
+                        <a:t>2</a:t>
                       </a:r>
                     </a:p>
                   </a:txBody>
@@ -8114,7 +8114,7 @@
                           </a:solidFill>
                           <a:latin typeface="Kanit"/>
                         </a:rPr>
-                        <a:t>1/4</a:t>
+                        <a:t>4/4</a:t>
                       </a:r>
                     </a:p>
                   </a:txBody>
@@ -8162,7 +8162,7 @@
                           </a:solidFill>
                           <a:latin typeface="Kanit"/>
                         </a:rPr>
-                        <a:t>ยโสธร</a:t>
+                        <a:t>บึงกาฬ</a:t>
                       </a:r>
                     </a:p>
                   </a:txBody>
@@ -8185,7 +8185,7 @@
                           </a:solidFill>
                           <a:latin typeface="Kanit"/>
                         </a:rPr>
-                        <a:t>14</a:t>
+                        <a:t>11</a:t>
                       </a:r>
                     </a:p>
                   </a:txBody>
@@ -8208,7 +8208,7 @@
                           </a:solidFill>
                           <a:latin typeface="Kanit"/>
                         </a:rPr>
-                        <a:t>88</a:t>
+                        <a:t>150</a:t>
                       </a:r>
                     </a:p>
                   </a:txBody>
@@ -8231,7 +8231,7 @@
                           </a:solidFill>
                           <a:latin typeface="Kanit"/>
                         </a:rPr>
-                        <a:t>21.4%</a:t>
+                        <a:t>54.5%</a:t>
                       </a:r>
                     </a:p>
                   </a:txBody>
@@ -8254,7 +8254,7 @@
                           </a:solidFill>
                           <a:latin typeface="Kanit"/>
                         </a:rPr>
-                        <a:t>3/5</a:t>
+                        <a:t>1/1</a:t>
                       </a:r>
                     </a:p>
                   </a:txBody>
@@ -8302,7 +8302,7 @@
                           </a:solidFill>
                           <a:latin typeface="Kanit"/>
                         </a:rPr>
-                        <a:t>ลำพูน</a:t>
+                        <a:t>หนองบัวลำภู</a:t>
                       </a:r>
                     </a:p>
                   </a:txBody>
@@ -8325,7 +8325,7 @@
                           </a:solidFill>
                           <a:latin typeface="Kanit"/>
                         </a:rPr>
-                        <a:t>76</a:t>
+                        <a:t>30</a:t>
                       </a:r>
                     </a:p>
                   </a:txBody>
@@ -8348,7 +8348,7 @@
                           </a:solidFill>
                           <a:latin typeface="Kanit"/>
                         </a:rPr>
-                        <a:t>70</a:t>
+                        <a:t>98</a:t>
                       </a:r>
                     </a:p>
                   </a:txBody>
@@ -8371,7 +8371,7 @@
                           </a:solidFill>
                           <a:latin typeface="Kanit"/>
                         </a:rPr>
-                        <a:t>10.5%</a:t>
+                        <a:t>26.7%</a:t>
                       </a:r>
                     </a:p>
                   </a:txBody>
@@ -8394,7 +8394,7 @@
                           </a:solidFill>
                           <a:latin typeface="Kanit"/>
                         </a:rPr>
-                        <a:t>1/11</a:t>
+                        <a:t>2/3</a:t>
                       </a:r>
                     </a:p>
                   </a:txBody>
@@ -8442,7 +8442,7 @@
                           </a:solidFill>
                           <a:latin typeface="Kanit"/>
                         </a:rPr>
-                        <a:t>บึงกาฬ</a:t>
+                        <a:t>ชุมพร</a:t>
                       </a:r>
                     </a:p>
                   </a:txBody>
@@ -8465,7 +8465,7 @@
                           </a:solidFill>
                           <a:latin typeface="Kanit"/>
                         </a:rPr>
-                        <a:t>11</a:t>
+                        <a:t>92</a:t>
                       </a:r>
                     </a:p>
                   </a:txBody>
@@ -8488,7 +8488,7 @@
                           </a:solidFill>
                           <a:latin typeface="Kanit"/>
                         </a:rPr>
-                        <a:t>56</a:t>
+                        <a:t>80</a:t>
                       </a:r>
                     </a:p>
                   </a:txBody>
@@ -8511,7 +8511,7 @@
                           </a:solidFill>
                           <a:latin typeface="Kanit"/>
                         </a:rPr>
-                        <a:t>9.1%</a:t>
+                        <a:t>16.3%</a:t>
                       </a:r>
                     </a:p>
                   </a:txBody>
@@ -8534,7 +8534,7 @@
                           </a:solidFill>
                           <a:latin typeface="Kanit"/>
                         </a:rPr>
-                        <a:t>1/1</a:t>
+                        <a:t>2/14</a:t>
                       </a:r>
                     </a:p>
                   </a:txBody>
@@ -8582,7 +8582,7 @@
                           </a:solidFill>
                           <a:latin typeface="Kanit"/>
                         </a:rPr>
-                        <a:t>พะเยา</a:t>
+                        <a:t>อุดรธานี</a:t>
                       </a:r>
                     </a:p>
                   </a:txBody>
@@ -8605,7 +8605,7 @@
                           </a:solidFill>
                           <a:latin typeface="Kanit"/>
                         </a:rPr>
-                        <a:t>125</a:t>
+                        <a:t>35</a:t>
                       </a:r>
                     </a:p>
                   </a:txBody>
@@ -8628,7 +8628,7 @@
                           </a:solidFill>
                           <a:latin typeface="Kanit"/>
                         </a:rPr>
-                        <a:t>96</a:t>
+                        <a:t>127</a:t>
                       </a:r>
                     </a:p>
                   </a:txBody>
@@ -8651,7 +8651,7 @@
                           </a:solidFill>
                           <a:latin typeface="Kanit"/>
                         </a:rPr>
-                        <a:t>8.8%</a:t>
+                        <a:t>14.3%</a:t>
                       </a:r>
                     </a:p>
                   </a:txBody>
@@ -8674,7 +8674,7 @@
                           </a:solidFill>
                           <a:latin typeface="Kanit"/>
                         </a:rPr>
-                        <a:t>3/13</a:t>
+                        <a:t>3/7</a:t>
                       </a:r>
                     </a:p>
                   </a:txBody>
@@ -8909,7 +8909,7 @@
                 </a:solidFill>
                 <a:latin typeface="Kanit"/>
               </a:rPr>
-              <a:t>Planted area MEASURED (OAE — 3,295 amphoe crop rows). Drought is a MODELLED SPEI index from rainfall and evapotranspiration, refreshed monthly, retrieved 2026-07-20 — the best national-coverage signal available, but nobody has walked those districts. Rain and river telemetry MEASURED (ThaiWater, live, pulled daily and accumulated — a missed pull leaves a gap rather than an invented point) · rain to 2026-09-08, river to 2026-09-08. Structural flood exposure MEASURED (GISTDA 1:50,000 repeated-flooding census, 2005-2016 — a 12-year ground record, not a forecast).</a:t>
+              <a:t>Planted area MEASURED (OAE — 3,295 amphoe crop rows). Drought is a MODELLED SPEI index from rainfall and evapotranspiration, refreshed monthly, retrieved 2026-07-20 — the best national-coverage signal available, but nobody has walked those districts. Rain and river telemetry MEASURED (ThaiWater, live, pulled daily and accumulated — a missed pull leaves a gap rather than an invented point) · rain to 2026-09-09, river to 2026-09-09. Structural flood exposure MEASURED (GISTDA 1:50,000 repeated-flooding census, 2005-2016 — a 12-year ground record, not a forecast).</a:t>
             </a:r>
           </a:p>
         </p:txBody>
@@ -31476,7 +31476,7 @@
                 </a:solidFill>
                 <a:latin typeface="Kanit"/>
               </a:rPr>
-              <a:t>Median crop income rose +15.9%, but four provinces fell — all on the coconut (มะพร้าว) belt, worst สมุทรสงคราม at −64.2%.</a:t>
+              <a:t>Median crop income rose +15.6%, but four provinces fell — all on the coconut (มะพร้าว) belt, worst สมุทรสงคราม at −64.3%.</a:t>
             </a:r>
           </a:p>
         </p:txBody>
@@ -32047,7 +32047,7 @@
                 </a:solidFill>
                 <a:latin typeface="Kanit"/>
               </a:rPr>
-              <a:t>Vintages — world prices 2026M06 · Thai farm gate 2026-09-07 · Thai price history 2026-09-05 · crop cost of production OAE Cai-up 2568 (crop year 2568/69, OAE forecast Mar 2569) · drought 2026-06-21 · CPI 2026-05 · GDP 2026-Q1 · IMF WEO 2026 · resale index 2026-05 · registrations to 2026-01 · household debt NSO SES 2566 · wages NSO LFS 2568 · telemetry 2026-09-08.</a:t>
+              <a:t>Vintages — world prices 2026M06 · Thai farm gate 2026-09-09 · Thai price history 2026-09-05 · crop cost of production OAE Cai-up 2568 (crop year 2568/69, OAE forecast Mar 2569) · drought 2026-06-21 · CPI 2026-05 · GDP 2026-Q1 · IMF WEO 2026 · resale index 2026-05 · registrations to 2026-01 · household debt NSO SES 2566 · wages NSO LFS 2568 · telemetry 2026-09-09.</a:t>
             </a:r>
           </a:p>
         </p:txBody>
@@ -32546,7 +32546,7 @@
               <a:t>Not on the world index — the farm gate (ราคาที่เกษตรกรขายได้) says otherwise.
 • Five of seventeen Thai farm-gate prices are falling year on year.
 • Beef: farm gate −6.1% vs world index +8.8%.
-• Margin over price: a 26% price move becomes an 83% swing in crop income.</a:t>
+• Margin over price: a 26% price move becomes an 82% swing in crop income.</a:t>
             </a:r>
           </a:p>
         </p:txBody>
@@ -33912,7 +33912,7 @@
                 </a:solidFill>
                 <a:latin typeface="Kanit"/>
               </a:rPr>
-              <a:t>32.92</a:t>
+              <a:t>32.90</a:t>
             </a:r>
           </a:p>
         </p:txBody>
@@ -33951,7 +33951,7 @@
                 </a:solidFill>
                 <a:latin typeface="Kanit"/>
               </a:rPr>
-              <a:t>ECB reference · 2026-09-04</a:t>
+              <a:t>ECB reference · 2026-09-07</a:t>
             </a:r>
           </a:p>
         </p:txBody>
@@ -35798,7 +35798,7 @@
                 </a:solidFill>
                 <a:latin typeface="Kanit"/>
               </a:rPr>
-              <a:t>NESDC 2026-Q1 · TPSO 2026-05 · Bank of Thailand 2026-08 · BIS 2025-Q4 · ECB 2026-09-04, each pulled from the publishing agency. IMF World Economic Outlook 2026 (pulled 2026-07-25) for the peer table. BoT published NPL ratio — 4.48% at 2026-Q1, 4.33% the quarter before, +0.24pp on the year, 3.08% low in 2021-Q1.</a:t>
+              <a:t>NESDC 2026-Q1 · TPSO 2026-05 · Bank of Thailand 2026-08 · BIS 2025-Q4 · ECB 2026-09-07, each pulled from the publishing agency. IMF World Economic Outlook 2026 (pulled 2026-07-25) for the peer table. BoT published NPL ratio — 4.48% at 2026-Q1, 4.33% the quarter before, +0.24pp on the year, 3.08% low in 2021-Q1.</a:t>
             </a:r>
           </a:p>
         </p:txBody>
@@ -37087,7 +37087,7 @@
                 </a:solidFill>
                 <a:latin typeface="Kanit"/>
               </a:rPr>
-              <a:t>338 of 928 districts · 129 of 790 rivers high</a:t>
+              <a:t>338 of 928 districts · 132 of 787 rivers high</a:t>
             </a:r>
           </a:p>
         </p:txBody>
@@ -37859,7 +37859,7 @@
                           </a:solidFill>
                           <a:latin typeface="Kanit"/>
                         </a:rPr>
-                        <a:t>30/155</a:t>
+                        <a:t>31/154</a:t>
                       </a:r>
                     </a:p>
                   </a:txBody>
@@ -38091,7 +38091,7 @@
                           </a:solidFill>
                           <a:latin typeface="Kanit"/>
                         </a:rPr>
-                        <a:t>18/274</a:t>
+                        <a:t>18/272</a:t>
                       </a:r>
                     </a:p>
                   </a:txBody>
@@ -38555,7 +38555,7 @@
                           </a:solidFill>
                           <a:latin typeface="Kanit"/>
                         </a:rPr>
-                        <a:t>14/51</a:t>
+                        <a:t>12/51</a:t>
                       </a:r>
                     </a:p>
                   </a:txBody>
@@ -38787,7 +38787,7 @@
                           </a:solidFill>
                           <a:latin typeface="Kanit"/>
                         </a:rPr>
-                        <a:t>41/143</a:t>
+                        <a:t>45/143</a:t>
                       </a:r>
                     </a:p>
                   </a:txBody>
@@ -39936,7 +39936,7 @@
                           </a:solidFill>
                           <a:latin typeface="Kanit"/>
                         </a:rPr>
-                        <a:t>−68.6%</a:t>
+                        <a:t>−68.7%</a:t>
                       </a:r>
                     </a:p>
                   </a:txBody>
@@ -40791,7 +40791,7 @@
                 </a:solidFill>
                 <a:latin typeface="Kanit"/>
               </a:rPr>
-              <a:t>Prices MEASURED — NABC daily quotes for the Thai farm gate, OCSB announced cane price; newest quote 2026-09-07. The six-month move is computed from NABC's own monthly series (thai_price_history, vintage 2026-09-05); a crop with no monthly series is marked, never estimated. Belt is an ESTIMATED read of where each commodity is produced, and belts overlap. Farming accounts are OURS and MEASURED — accounts whose recorded occupation is เกษตร in the belt provinces, from the 382,735-account tape at 2026-07; no cell below 30 accounts is published. They live where the crop grows; they are not confirmed to grow it.</a:t>
+              <a:t>Prices MEASURED — NABC daily quotes for the Thai farm gate, OCSB announced cane price; newest quote 2026-09-09. The six-month move is computed from NABC's own monthly series (thai_price_history, vintage 2026-09-05); a crop with no monthly series is marked, never estimated. Belt is an ESTIMATED read of where each commodity is produced, and belts overlap. Farming accounts are OURS and MEASURED — accounts whose recorded occupation is เกษตร in the belt provinces, from the 382,735-account tape at 2026-07; no cell below 30 accounts is published. They live where the crop grows; they are not confirmed to grow it.</a:t>
             </a:r>
           </a:p>
         </p:txBody>
@@ -43419,7 +43419,7 @@
                           </a:solidFill>
                           <a:latin typeface="Kanit"/>
                         </a:rPr>
-                        <a:t>91.52</a:t>
+                        <a:t>91.45</a:t>
                       </a:r>
                     </a:p>
                   </a:txBody>
@@ -43559,7 +43559,7 @@
                           </a:solidFill>
                           <a:latin typeface="Kanit"/>
                         </a:rPr>
-                        <a:t>15,374</a:t>
+                        <a:t>15,362</a:t>
                       </a:r>
                     </a:p>
                   </a:txBody>
@@ -43699,7 +43699,7 @@
                           </a:solidFill>
                           <a:latin typeface="Kanit"/>
                         </a:rPr>
-                        <a:t>36,245</a:t>
+                        <a:t>36,217</a:t>
                       </a:r>
                     </a:p>
                   </a:txBody>
@@ -43839,7 +43839,7 @@
                           </a:solidFill>
                           <a:latin typeface="Kanit"/>
                         </a:rPr>
-                        <a:t>11.19</a:t>
+                        <a:t>11.18</a:t>
                       </a:r>
                     </a:p>
                   </a:txBody>
@@ -44058,7 +44058,7 @@
                 </a:solidFill>
                 <a:latin typeface="Kanit"/>
               </a:rPr>
-              <a:t>World Bank Pink Sheet nominal-USD monthly prices, vintage 2026M07 (60 observations per series, rebased to 100 at 2021-07 for the chart — units differ, so raw levels can’t share an axis). Baht conversion at the ECB reference rate USD/THB 32.920, 2026-09-04. Planted-area share MEASURED, OAE/DOAE crop mix (crop_mix.json). Nominal, not deflated: five years of Thai CPI sit under every ‘vs 5 yrs ago’ figure.</a:t>
+              <a:t>World Bank Pink Sheet nominal-USD monthly prices, vintage 2026M07 (60 observations per series, rebased to 100 at 2021-07 for the chart — units differ, so raw levels can’t share an axis). Baht conversion at the ECB reference rate USD/THB 32.895, 2026-09-07. Planted-area share MEASURED, OAE/DOAE crop mix (crop_mix.json). Nominal, not deflated: five years of Thai CPI sit under every ‘vs 5 yrs ago’ figure.</a:t>
             </a:r>
           </a:p>
         </p:txBody>
@@ -44679,7 +44679,7 @@
                 </a:solidFill>
                 <a:latin typeface="Kanit"/>
               </a:rPr>
-              <a:t>coconut −68.6%, pineapple −18.4%, sugarcane −17.9% year on year</a:t>
+              <a:t>coconut −68.7%, pineapple −18.4%, sugarcane −17.9% year on year</a:t>
             </a:r>
           </a:p>
         </p:txBody>
@@ -44805,7 +44805,7 @@
                 </a:solidFill>
                 <a:latin typeface="Kanit"/>
               </a:rPr>
-              <a:t>+15.9%</a:t>
+              <a:t>+15.6%</a:t>
             </a:r>
           </a:p>
         </p:txBody>
@@ -45279,7 +45279,7 @@
                           </a:solidFill>
                           <a:latin typeface="Kanit"/>
                         </a:rPr>
-                        <a:t>+6.1%</a:t>
+                        <a:t>+5.7%</a:t>
                       </a:r>
                     </a:p>
                   </a:txBody>
@@ -45348,7 +45348,7 @@
                           </a:solidFill>
                           <a:latin typeface="Kanit"/>
                         </a:rPr>
-                        <a:t>-64.2%</a:t>
+                        <a:t>-64.3%</a:t>
                       </a:r>
                     </a:p>
                   </a:txBody>
@@ -45419,7 +45419,7 @@
                           </a:solidFill>
                           <a:latin typeface="Kanit"/>
                         </a:rPr>
-                        <a:t>+15.1%</a:t>
+                        <a:t>+14.8%</a:t>
                       </a:r>
                     </a:p>
                   </a:txBody>
@@ -45488,7 +45488,7 @@
                           </a:solidFill>
                           <a:latin typeface="Kanit"/>
                         </a:rPr>
-                        <a:t>+9.5%</a:t>
+                        <a:t>+9.2%</a:t>
                       </a:r>
                     </a:p>
                   </a:txBody>
@@ -45559,7 +45559,7 @@
                           </a:solidFill>
                           <a:latin typeface="Kanit"/>
                         </a:rPr>
-                        <a:t>+16.9%</a:t>
+                        <a:t>+16.6%</a:t>
                       </a:r>
                     </a:p>
                   </a:txBody>
@@ -45628,7 +45628,7 @@
                           </a:solidFill>
                           <a:latin typeface="Kanit"/>
                         </a:rPr>
-                        <a:t>+8.2%</a:t>
+                        <a:t>+8.0%</a:t>
                       </a:r>
                     </a:p>
                   </a:txBody>
@@ -45699,7 +45699,7 @@
                           </a:solidFill>
                           <a:latin typeface="Kanit"/>
                         </a:rPr>
-                        <a:t>+24.8%</a:t>
+                        <a:t>+25.0%</a:t>
                       </a:r>
                     </a:p>
                   </a:txBody>
@@ -45768,7 +45768,7 @@
                           </a:solidFill>
                           <a:latin typeface="Kanit"/>
                         </a:rPr>
-                        <a:t>+11.3%</a:t>
+                        <a:t>+11.1%</a:t>
                       </a:r>
                     </a:p>
                   </a:txBody>
@@ -45839,7 +45839,7 @@
                           </a:solidFill>
                           <a:latin typeface="Kanit"/>
                         </a:rPr>
-                        <a:t>+34.4%</a:t>
+                        <a:t>+34.8%</a:t>
                       </a:r>
                     </a:p>
                   </a:txBody>
@@ -45908,7 +45908,7 @@
                           </a:solidFill>
                           <a:latin typeface="Kanit"/>
                         </a:rPr>
-                        <a:t>+26.8%</a:t>
+                        <a:t>+27.2%</a:t>
                       </a:r>
                     </a:p>
                   </a:txBody>
@@ -46387,7 +46387,7 @@
                           </a:solidFill>
                           <a:latin typeface="Kanit"/>
                         </a:rPr>
-                        <a:t>+17.6%</a:t>
+                        <a:t>+17.3%</a:t>
                       </a:r>
                     </a:p>
                   </a:txBody>
@@ -46550,7 +46550,7 @@
                           </a:solidFill>
                           <a:latin typeface="Kanit"/>
                         </a:rPr>
-                        <a:t>+21.3%</a:t>
+                        <a:t>+21.0%</a:t>
                       </a:r>
                     </a:p>
                   </a:txBody>
@@ -46713,7 +46713,7 @@
                           </a:solidFill>
                           <a:latin typeface="Kanit"/>
                         </a:rPr>
-                        <a:t>+11.2%</a:t>
+                        <a:t>+10.9%</a:t>
                       </a:r>
                     </a:p>
                   </a:txBody>
@@ -46876,7 +46876,7 @@
                           </a:solidFill>
                           <a:latin typeface="Kanit"/>
                         </a:rPr>
-                        <a:t>+32.4%</a:t>
+                        <a:t>+32.8%</a:t>
                       </a:r>
                     </a:p>
                   </a:txBody>
@@ -47039,7 +47039,7 @@
                           </a:solidFill>
                           <a:latin typeface="Kanit"/>
                         </a:rPr>
-                        <a:t>+16.6%</a:t>
+                        <a:t>+16.3%</a:t>
                       </a:r>
                     </a:p>
                   </a:txBody>
@@ -47202,7 +47202,7 @@
                           </a:solidFill>
                           <a:latin typeface="Kanit"/>
                         </a:rPr>
-                        <a:t>+15.0%</a:t>
+                        <a:t>+14.6%</a:t>
                       </a:r>
                     </a:p>
                   </a:txBody>
@@ -48024,7 +48024,7 @@
                 </a:solidFill>
                 <a:latin typeface="Kanit"/>
               </a:rPr>
-              <a:t>YoY −68.6%</a:t>
+              <a:t>YoY −68.7%</a:t>
             </a:r>
           </a:p>
         </p:txBody>
@@ -48660,7 +48660,7 @@
                 </a:solidFill>
                 <a:latin typeface="Kanit"/>
               </a:rPr>
-              <a:t>YoY +0.6%</a:t>
+              <a:t>YoY +0.4%</a:t>
             </a:r>
           </a:p>
         </p:txBody>
@@ -48978,7 +48978,7 @@
                 </a:solidFill>
                 <a:latin typeface="Kanit"/>
               </a:rPr>
-              <a:t>YoY +4.8%</a:t>
+              <a:t>YoY +5.1%</a:t>
             </a:r>
           </a:p>
         </p:txBody>
@@ -49296,7 +49296,7 @@
                 </a:solidFill>
                 <a:latin typeface="Kanit"/>
               </a:rPr>
-              <a:t>YoY +6.8%</a:t>
+              <a:t>YoY +7.1%</a:t>
             </a:r>
           </a:p>
         </p:txBody>
@@ -49614,7 +49614,7 @@
                 </a:solidFill>
                 <a:latin typeface="Kanit"/>
               </a:rPr>
-              <a:t>YoY +13.3%</a:t>
+              <a:t>YoY +12.8%</a:t>
             </a:r>
           </a:p>
         </p:txBody>
@@ -49932,7 +49932,7 @@
                 </a:solidFill>
                 <a:latin typeface="Kanit"/>
               </a:rPr>
-              <a:t>YoY +13.8%</a:t>
+              <a:t>YoY +13.6%</a:t>
             </a:r>
           </a:p>
         </p:txBody>
@@ -50172,6 +50172,324 @@
                 </a:solidFill>
                 <a:latin typeface="Kanit"/>
               </a:rPr>
+              <a:t>Palm oil  ปาล์มน้ำมัน</a:t>
+            </a:r>
+          </a:p>
+        </p:txBody>
+      </p:sp>
+      <p:sp>
+        <p:nvSpPr>
+          <p:cNvPr id="65" name="TextBox 64"/>
+          <p:cNvSpPr txBox="1"/>
+          <p:nvPr/>
+        </p:nvSpPr>
+        <p:spPr>
+          <a:xfrm>
+            <a:off x="5016398" y="3218687"/>
+            <a:ext cx="2156155" cy="125730"/>
+          </a:xfrm>
+          <a:prstGeom prst="rect">
+            <a:avLst/>
+          </a:prstGeom>
+          <a:noFill/>
+        </p:spPr>
+        <p:txBody>
+          <a:bodyPr wrap="square" lIns="0" rIns="0" tIns="0" bIns="0" anchor="t">
+            <a:noAutofit/>
+          </a:bodyPr>
+          <a:lstStyle/>
+          <a:p>
+            <a:pPr algn="l">
+              <a:lnSpc>
+                <a:spcPts val="990"/>
+              </a:lnSpc>
+            </a:pPr>
+            <a:r>
+              <a:rPr sz="750" b="0">
+                <a:solidFill>
+                  <a:srgbClr val="606060"/>
+                </a:solidFill>
+                <a:latin typeface="Kanit"/>
+              </a:rPr>
+              <a:t>฿8.38 /กก. · South</a:t>
+            </a:r>
+          </a:p>
+        </p:txBody>
+      </p:sp>
+      <p:sp>
+        <p:nvSpPr>
+          <p:cNvPr id="66" name="TextBox 65"/>
+          <p:cNvSpPr txBox="1"/>
+          <p:nvPr/>
+        </p:nvSpPr>
+        <p:spPr>
+          <a:xfrm>
+            <a:off x="5016398" y="3351275"/>
+            <a:ext cx="1078077" cy="134112"/>
+          </a:xfrm>
+          <a:prstGeom prst="rect">
+            <a:avLst/>
+          </a:prstGeom>
+          <a:noFill/>
+        </p:spPr>
+        <p:txBody>
+          <a:bodyPr wrap="square" lIns="0" rIns="0" tIns="0" bIns="0" anchor="t">
+            <a:noAutofit/>
+          </a:bodyPr>
+          <a:lstStyle/>
+          <a:p>
+            <a:pPr algn="l">
+              <a:lnSpc>
+                <a:spcPts val="1056"/>
+              </a:lnSpc>
+            </a:pPr>
+            <a:r>
+              <a:rPr sz="800" b="1">
+                <a:solidFill>
+                  <a:srgbClr val="15795F"/>
+                </a:solidFill>
+                <a:latin typeface="Kanit"/>
+              </a:rPr>
+              <a:t>YoY +23.4%</a:t>
+            </a:r>
+          </a:p>
+        </p:txBody>
+      </p:sp>
+      <p:sp>
+        <p:nvSpPr>
+          <p:cNvPr id="67" name="TextBox 66"/>
+          <p:cNvSpPr txBox="1"/>
+          <p:nvPr/>
+        </p:nvSpPr>
+        <p:spPr>
+          <a:xfrm>
+            <a:off x="6094475" y="3351275"/>
+            <a:ext cx="1078077" cy="134112"/>
+          </a:xfrm>
+          <a:prstGeom prst="rect">
+            <a:avLst/>
+          </a:prstGeom>
+          <a:noFill/>
+        </p:spPr>
+        <p:txBody>
+          <a:bodyPr wrap="square" lIns="0" rIns="0" tIns="0" bIns="0" anchor="t">
+            <a:noAutofit/>
+          </a:bodyPr>
+          <a:lstStyle/>
+          <a:p>
+            <a:pPr algn="l">
+              <a:lnSpc>
+                <a:spcPts val="1056"/>
+              </a:lnSpc>
+            </a:pPr>
+            <a:r>
+              <a:rPr sz="800" b="1">
+                <a:solidFill>
+                  <a:srgbClr val="15795F"/>
+                </a:solidFill>
+                <a:latin typeface="Kanit"/>
+              </a:rPr>
+              <a:t>6m +16.2%</a:t>
+            </a:r>
+          </a:p>
+        </p:txBody>
+      </p:sp>
+      <p:sp>
+        <p:nvSpPr>
+          <p:cNvPr id="68" name="Rectangle 67"/>
+          <p:cNvSpPr/>
+          <p:nvPr/>
+        </p:nvSpPr>
+        <p:spPr>
+          <a:xfrm>
+            <a:off x="5016398" y="3506724"/>
+            <a:ext cx="2156155" cy="548640"/>
+          </a:xfrm>
+          <a:prstGeom prst="rect">
+            <a:avLst/>
+          </a:prstGeom>
+          <a:solidFill>
+            <a:srgbClr val="FBFCFE"/>
+          </a:solidFill>
+          <a:ln w="9525">
+            <a:solidFill>
+              <a:srgbClr val="D9DEE9"/>
+            </a:solidFill>
+          </a:ln>
+          <a:effectLst/>
+        </p:spPr>
+        <p:style>
+          <a:lnRef idx="1">
+            <a:schemeClr val="accent1"/>
+          </a:lnRef>
+          <a:fillRef idx="3">
+            <a:schemeClr val="accent1"/>
+          </a:fillRef>
+          <a:effectRef idx="2">
+            <a:schemeClr val="accent1"/>
+          </a:effectRef>
+          <a:fontRef idx="minor">
+            <a:schemeClr val="lt1"/>
+          </a:fontRef>
+        </p:style>
+        <p:txBody>
+          <a:bodyPr rtlCol="0" anchor="ctr" wrap="none"/>
+          <a:lstStyle/>
+          <a:p>
+            <a:pPr algn="ctr"/>
+          </a:p>
+        </p:txBody>
+      </p:sp>
+      <p:sp>
+        <p:nvSpPr>
+          <p:cNvPr id="69" name="Freeform 68"/>
+          <p:cNvSpPr/>
+          <p:nvPr/>
+        </p:nvSpPr>
+        <p:spPr>
+          <a:xfrm>
+            <a:off x="5062118" y="3552444"/>
+            <a:ext cx="2064715" cy="457200"/>
+          </a:xfrm>
+          <a:custGeom>
+            <a:avLst/>
+            <a:gdLst/>
+            <a:ahLst/>
+            <a:cxnLst/>
+            <a:rect l="l" t="t" r="r" b="b"/>
+            <a:pathLst>
+              <a:path w="2064715" h="457200">
+                <a:moveTo>
+                  <a:pt x="0" y="439749"/>
+                </a:moveTo>
+                <a:lnTo>
+                  <a:pt x="412943" y="457200"/>
+                </a:lnTo>
+                <a:lnTo>
+                  <a:pt x="825886" y="293166"/>
+                </a:lnTo>
+                <a:lnTo>
+                  <a:pt x="1238829" y="76781"/>
+                </a:lnTo>
+                <a:lnTo>
+                  <a:pt x="1651772" y="0"/>
+                </a:lnTo>
+                <a:lnTo>
+                  <a:pt x="2064715" y="45370"/>
+                </a:lnTo>
+              </a:path>
+            </a:pathLst>
+          </a:custGeom>
+          <a:noFill/>
+          <a:ln w="20320">
+            <a:solidFill>
+              <a:srgbClr val="15795F"/>
+            </a:solidFill>
+          </a:ln>
+          <a:effectLst/>
+        </p:spPr>
+        <p:style>
+          <a:lnRef idx="1">
+            <a:schemeClr val="accent1"/>
+          </a:lnRef>
+          <a:fillRef idx="3">
+            <a:schemeClr val="accent1"/>
+          </a:fillRef>
+          <a:effectRef idx="2">
+            <a:schemeClr val="accent1"/>
+          </a:effectRef>
+          <a:fontRef idx="minor">
+            <a:schemeClr val="lt1"/>
+          </a:fontRef>
+        </p:style>
+        <p:txBody>
+          <a:bodyPr rtlCol="0" anchor="ctr"/>
+          <a:lstStyle/>
+          <a:p>
+            <a:pPr algn="ctr"/>
+          </a:p>
+        </p:txBody>
+      </p:sp>
+      <p:sp>
+        <p:nvSpPr>
+          <p:cNvPr id="70" name="Rounded Rectangle 69"/>
+          <p:cNvSpPr/>
+          <p:nvPr/>
+        </p:nvSpPr>
+        <p:spPr>
+          <a:xfrm>
+            <a:off x="7085685" y="3556666"/>
+            <a:ext cx="82296" cy="82296"/>
+          </a:xfrm>
+          <a:prstGeom prst="roundRect">
+            <a:avLst>
+              <a:gd name="adj" fmla="val 50000"/>
+            </a:avLst>
+          </a:prstGeom>
+          <a:solidFill>
+            <a:srgbClr val="15795F"/>
+          </a:solidFill>
+          <a:ln>
+            <a:noFill/>
+          </a:ln>
+          <a:effectLst/>
+        </p:spPr>
+        <p:style>
+          <a:lnRef idx="1">
+            <a:schemeClr val="accent1"/>
+          </a:lnRef>
+          <a:fillRef idx="3">
+            <a:schemeClr val="accent1"/>
+          </a:fillRef>
+          <a:effectRef idx="2">
+            <a:schemeClr val="accent1"/>
+          </a:effectRef>
+          <a:fontRef idx="minor">
+            <a:schemeClr val="lt1"/>
+          </a:fontRef>
+        </p:style>
+        <p:txBody>
+          <a:bodyPr rtlCol="0" anchor="ctr" wrap="none"/>
+          <a:lstStyle/>
+          <a:p>
+            <a:pPr algn="ctr"/>
+          </a:p>
+        </p:txBody>
+      </p:sp>
+      <p:sp>
+        <p:nvSpPr>
+          <p:cNvPr id="71" name="TextBox 70"/>
+          <p:cNvSpPr txBox="1"/>
+          <p:nvPr/>
+        </p:nvSpPr>
+        <p:spPr>
+          <a:xfrm>
+            <a:off x="7318857" y="3076956"/>
+            <a:ext cx="2156155" cy="150876"/>
+          </a:xfrm>
+          <a:prstGeom prst="rect">
+            <a:avLst/>
+          </a:prstGeom>
+          <a:noFill/>
+        </p:spPr>
+        <p:txBody>
+          <a:bodyPr wrap="square" lIns="0" rIns="0" tIns="0" bIns="0" anchor="t">
+            <a:noAutofit/>
+          </a:bodyPr>
+          <a:lstStyle/>
+          <a:p>
+            <a:pPr algn="l">
+              <a:lnSpc>
+                <a:spcPts val="1188"/>
+              </a:lnSpc>
+            </a:pPr>
+            <a:r>
+              <a:rPr sz="900" b="1">
+                <a:solidFill>
+                  <a:srgbClr val="1E2F5C"/>
+                </a:solidFill>
+                <a:latin typeface="Kanit"/>
+              </a:rPr>
               <a:t>Pork  สุกร</a:t>
             </a:r>
           </a:p>
@@ -50179,13 +50497,13 @@
       </p:sp>
       <p:sp>
         <p:nvSpPr>
-          <p:cNvPr id="65" name="TextBox 64"/>
+          <p:cNvPr id="72" name="TextBox 71"/>
           <p:cNvSpPr txBox="1"/>
           <p:nvPr/>
         </p:nvSpPr>
         <p:spPr>
           <a:xfrm>
-            <a:off x="5016398" y="3218687"/>
+            <a:off x="7318857" y="3218687"/>
             <a:ext cx="2156155" cy="125730"/>
           </a:xfrm>
           <a:prstGeom prst="rect">
@@ -50218,13 +50536,13 @@
       </p:sp>
       <p:sp>
         <p:nvSpPr>
-          <p:cNvPr id="66" name="TextBox 65"/>
+          <p:cNvPr id="73" name="TextBox 72"/>
           <p:cNvSpPr txBox="1"/>
           <p:nvPr/>
         </p:nvSpPr>
         <p:spPr>
           <a:xfrm>
-            <a:off x="5016398" y="3351275"/>
+            <a:off x="7318857" y="3351275"/>
             <a:ext cx="1078077" cy="134112"/>
           </a:xfrm>
           <a:prstGeom prst="rect">
@@ -50250,20 +50568,20 @@
                 </a:solidFill>
                 <a:latin typeface="Kanit"/>
               </a:rPr>
-              <a:t>YoY +21.8%</a:t>
+              <a:t>YoY +24.2%</a:t>
             </a:r>
           </a:p>
         </p:txBody>
       </p:sp>
       <p:sp>
         <p:nvSpPr>
-          <p:cNvPr id="67" name="TextBox 66"/>
+          <p:cNvPr id="74" name="TextBox 73"/>
           <p:cNvSpPr txBox="1"/>
           <p:nvPr/>
         </p:nvSpPr>
         <p:spPr>
           <a:xfrm>
-            <a:off x="6094475" y="3351275"/>
+            <a:off x="8396935" y="3351275"/>
             <a:ext cx="1078077" cy="134112"/>
           </a:xfrm>
           <a:prstGeom prst="rect">
@@ -50296,13 +50614,13 @@
       </p:sp>
       <p:sp>
         <p:nvSpPr>
-          <p:cNvPr id="68" name="Rectangle 67"/>
+          <p:cNvPr id="75" name="Rectangle 74"/>
           <p:cNvSpPr/>
           <p:nvPr/>
         </p:nvSpPr>
         <p:spPr>
           <a:xfrm>
-            <a:off x="5016398" y="3506724"/>
+            <a:off x="7318857" y="3506724"/>
             <a:ext cx="2156155" cy="548640"/>
           </a:xfrm>
           <a:prstGeom prst="rect">
@@ -50342,13 +50660,13 @@
       </p:sp>
       <p:sp>
         <p:nvSpPr>
-          <p:cNvPr id="69" name="Freeform 68"/>
+          <p:cNvPr id="76" name="Freeform 75"/>
           <p:cNvSpPr/>
           <p:nvPr/>
         </p:nvSpPr>
         <p:spPr>
           <a:xfrm>
-            <a:off x="5062118" y="3552444"/>
+            <a:off x="7364577" y="3552444"/>
             <a:ext cx="2064715" cy="457200"/>
           </a:xfrm>
           <a:custGeom>
@@ -50412,331 +50730,13 @@
       </p:sp>
       <p:sp>
         <p:nvSpPr>
-          <p:cNvPr id="70" name="Rounded Rectangle 69"/>
-          <p:cNvSpPr/>
-          <p:nvPr/>
-        </p:nvSpPr>
-        <p:spPr>
-          <a:xfrm>
-            <a:off x="7085685" y="3511296"/>
-            <a:ext cx="82296" cy="82296"/>
-          </a:xfrm>
-          <a:prstGeom prst="roundRect">
-            <a:avLst>
-              <a:gd name="adj" fmla="val 50000"/>
-            </a:avLst>
-          </a:prstGeom>
-          <a:solidFill>
-            <a:srgbClr val="15795F"/>
-          </a:solidFill>
-          <a:ln>
-            <a:noFill/>
-          </a:ln>
-          <a:effectLst/>
-        </p:spPr>
-        <p:style>
-          <a:lnRef idx="1">
-            <a:schemeClr val="accent1"/>
-          </a:lnRef>
-          <a:fillRef idx="3">
-            <a:schemeClr val="accent1"/>
-          </a:fillRef>
-          <a:effectRef idx="2">
-            <a:schemeClr val="accent1"/>
-          </a:effectRef>
-          <a:fontRef idx="minor">
-            <a:schemeClr val="lt1"/>
-          </a:fontRef>
-        </p:style>
-        <p:txBody>
-          <a:bodyPr rtlCol="0" anchor="ctr" wrap="none"/>
-          <a:lstStyle/>
-          <a:p>
-            <a:pPr algn="ctr"/>
-          </a:p>
-        </p:txBody>
-      </p:sp>
-      <p:sp>
-        <p:nvSpPr>
-          <p:cNvPr id="71" name="TextBox 70"/>
-          <p:cNvSpPr txBox="1"/>
-          <p:nvPr/>
-        </p:nvSpPr>
-        <p:spPr>
-          <a:xfrm>
-            <a:off x="7318857" y="3076956"/>
-            <a:ext cx="2156155" cy="150876"/>
-          </a:xfrm>
-          <a:prstGeom prst="rect">
-            <a:avLst/>
-          </a:prstGeom>
-          <a:noFill/>
-        </p:spPr>
-        <p:txBody>
-          <a:bodyPr wrap="square" lIns="0" rIns="0" tIns="0" bIns="0" anchor="t">
-            <a:noAutofit/>
-          </a:bodyPr>
-          <a:lstStyle/>
-          <a:p>
-            <a:pPr algn="l">
-              <a:lnSpc>
-                <a:spcPts val="1188"/>
-              </a:lnSpc>
-            </a:pPr>
-            <a:r>
-              <a:rPr sz="900" b="1">
-                <a:solidFill>
-                  <a:srgbClr val="1E2F5C"/>
-                </a:solidFill>
-                <a:latin typeface="Kanit"/>
-              </a:rPr>
-              <a:t>Palm oil  ปาล์มน้ำมัน</a:t>
-            </a:r>
-          </a:p>
-        </p:txBody>
-      </p:sp>
-      <p:sp>
-        <p:nvSpPr>
-          <p:cNvPr id="72" name="TextBox 71"/>
-          <p:cNvSpPr txBox="1"/>
-          <p:nvPr/>
-        </p:nvSpPr>
-        <p:spPr>
-          <a:xfrm>
-            <a:off x="7318857" y="3218687"/>
-            <a:ext cx="2156155" cy="125730"/>
-          </a:xfrm>
-          <a:prstGeom prst="rect">
-            <a:avLst/>
-          </a:prstGeom>
-          <a:noFill/>
-        </p:spPr>
-        <p:txBody>
-          <a:bodyPr wrap="square" lIns="0" rIns="0" tIns="0" bIns="0" anchor="t">
-            <a:noAutofit/>
-          </a:bodyPr>
-          <a:lstStyle/>
-          <a:p>
-            <a:pPr algn="l">
-              <a:lnSpc>
-                <a:spcPts val="990"/>
-              </a:lnSpc>
-            </a:pPr>
-            <a:r>
-              <a:rPr sz="750" b="0">
-                <a:solidFill>
-                  <a:srgbClr val="606060"/>
-                </a:solidFill>
-                <a:latin typeface="Kanit"/>
-              </a:rPr>
-              <a:t>฿8.38 /กก. · South</a:t>
-            </a:r>
-          </a:p>
-        </p:txBody>
-      </p:sp>
-      <p:sp>
-        <p:nvSpPr>
-          <p:cNvPr id="73" name="TextBox 72"/>
-          <p:cNvSpPr txBox="1"/>
-          <p:nvPr/>
-        </p:nvSpPr>
-        <p:spPr>
-          <a:xfrm>
-            <a:off x="7318857" y="3351275"/>
-            <a:ext cx="1078077" cy="134112"/>
-          </a:xfrm>
-          <a:prstGeom prst="rect">
-            <a:avLst/>
-          </a:prstGeom>
-          <a:noFill/>
-        </p:spPr>
-        <p:txBody>
-          <a:bodyPr wrap="square" lIns="0" rIns="0" tIns="0" bIns="0" anchor="t">
-            <a:noAutofit/>
-          </a:bodyPr>
-          <a:lstStyle/>
-          <a:p>
-            <a:pPr algn="l">
-              <a:lnSpc>
-                <a:spcPts val="1056"/>
-              </a:lnSpc>
-            </a:pPr>
-            <a:r>
-              <a:rPr sz="800" b="1">
-                <a:solidFill>
-                  <a:srgbClr val="15795F"/>
-                </a:solidFill>
-                <a:latin typeface="Kanit"/>
-              </a:rPr>
-              <a:t>YoY +23.1%</a:t>
-            </a:r>
-          </a:p>
-        </p:txBody>
-      </p:sp>
-      <p:sp>
-        <p:nvSpPr>
-          <p:cNvPr id="74" name="TextBox 73"/>
-          <p:cNvSpPr txBox="1"/>
-          <p:nvPr/>
-        </p:nvSpPr>
-        <p:spPr>
-          <a:xfrm>
-            <a:off x="8396935" y="3351275"/>
-            <a:ext cx="1078077" cy="134112"/>
-          </a:xfrm>
-          <a:prstGeom prst="rect">
-            <a:avLst/>
-          </a:prstGeom>
-          <a:noFill/>
-        </p:spPr>
-        <p:txBody>
-          <a:bodyPr wrap="square" lIns="0" rIns="0" tIns="0" bIns="0" anchor="t">
-            <a:noAutofit/>
-          </a:bodyPr>
-          <a:lstStyle/>
-          <a:p>
-            <a:pPr algn="l">
-              <a:lnSpc>
-                <a:spcPts val="1056"/>
-              </a:lnSpc>
-            </a:pPr>
-            <a:r>
-              <a:rPr sz="800" b="1">
-                <a:solidFill>
-                  <a:srgbClr val="15795F"/>
-                </a:solidFill>
-                <a:latin typeface="Kanit"/>
-              </a:rPr>
-              <a:t>6m +16.2%</a:t>
-            </a:r>
-          </a:p>
-        </p:txBody>
-      </p:sp>
-      <p:sp>
-        <p:nvSpPr>
-          <p:cNvPr id="75" name="Rectangle 74"/>
-          <p:cNvSpPr/>
-          <p:nvPr/>
-        </p:nvSpPr>
-        <p:spPr>
-          <a:xfrm>
-            <a:off x="7318857" y="3506724"/>
-            <a:ext cx="2156155" cy="548640"/>
-          </a:xfrm>
-          <a:prstGeom prst="rect">
-            <a:avLst/>
-          </a:prstGeom>
-          <a:solidFill>
-            <a:srgbClr val="FBFCFE"/>
-          </a:solidFill>
-          <a:ln w="9525">
-            <a:solidFill>
-              <a:srgbClr val="D9DEE9"/>
-            </a:solidFill>
-          </a:ln>
-          <a:effectLst/>
-        </p:spPr>
-        <p:style>
-          <a:lnRef idx="1">
-            <a:schemeClr val="accent1"/>
-          </a:lnRef>
-          <a:fillRef idx="3">
-            <a:schemeClr val="accent1"/>
-          </a:fillRef>
-          <a:effectRef idx="2">
-            <a:schemeClr val="accent1"/>
-          </a:effectRef>
-          <a:fontRef idx="minor">
-            <a:schemeClr val="lt1"/>
-          </a:fontRef>
-        </p:style>
-        <p:txBody>
-          <a:bodyPr rtlCol="0" anchor="ctr" wrap="none"/>
-          <a:lstStyle/>
-          <a:p>
-            <a:pPr algn="ctr"/>
-          </a:p>
-        </p:txBody>
-      </p:sp>
-      <p:sp>
-        <p:nvSpPr>
-          <p:cNvPr id="76" name="Freeform 75"/>
-          <p:cNvSpPr/>
-          <p:nvPr/>
-        </p:nvSpPr>
-        <p:spPr>
-          <a:xfrm>
-            <a:off x="7364577" y="3552444"/>
-            <a:ext cx="2064715" cy="457200"/>
-          </a:xfrm>
-          <a:custGeom>
-            <a:avLst/>
-            <a:gdLst/>
-            <a:ahLst/>
-            <a:cxnLst/>
-            <a:rect l="l" t="t" r="r" b="b"/>
-            <a:pathLst>
-              <a:path w="2064715" h="457200">
-                <a:moveTo>
-                  <a:pt x="0" y="439749"/>
-                </a:moveTo>
-                <a:lnTo>
-                  <a:pt x="412943" y="457200"/>
-                </a:lnTo>
-                <a:lnTo>
-                  <a:pt x="825886" y="293166"/>
-                </a:lnTo>
-                <a:lnTo>
-                  <a:pt x="1238829" y="76781"/>
-                </a:lnTo>
-                <a:lnTo>
-                  <a:pt x="1651772" y="0"/>
-                </a:lnTo>
-                <a:lnTo>
-                  <a:pt x="2064715" y="45370"/>
-                </a:lnTo>
-              </a:path>
-            </a:pathLst>
-          </a:custGeom>
-          <a:noFill/>
-          <a:ln w="20320">
-            <a:solidFill>
-              <a:srgbClr val="15795F"/>
-            </a:solidFill>
-          </a:ln>
-          <a:effectLst/>
-        </p:spPr>
-        <p:style>
-          <a:lnRef idx="1">
-            <a:schemeClr val="accent1"/>
-          </a:lnRef>
-          <a:fillRef idx="3">
-            <a:schemeClr val="accent1"/>
-          </a:fillRef>
-          <a:effectRef idx="2">
-            <a:schemeClr val="accent1"/>
-          </a:effectRef>
-          <a:fontRef idx="minor">
-            <a:schemeClr val="lt1"/>
-          </a:fontRef>
-        </p:style>
-        <p:txBody>
-          <a:bodyPr rtlCol="0" anchor="ctr"/>
-          <a:lstStyle/>
-          <a:p>
-            <a:pPr algn="ctr"/>
-          </a:p>
-        </p:txBody>
-      </p:sp>
-      <p:sp>
-        <p:nvSpPr>
           <p:cNvPr id="77" name="Rounded Rectangle 76"/>
           <p:cNvSpPr/>
           <p:nvPr/>
         </p:nvSpPr>
         <p:spPr>
           <a:xfrm>
-            <a:off x="9388144" y="3556666"/>
+            <a:off x="9388144" y="3511296"/>
             <a:ext cx="82296" cy="82296"/>
           </a:xfrm>
           <a:prstGeom prst="roundRect">
@@ -50886,7 +50886,7 @@
                 </a:solidFill>
                 <a:latin typeface="Kanit"/>
               </a:rPr>
-              <a:t>YoY +39.8%</a:t>
+              <a:t>YoY +40.3%</a:t>
             </a:r>
           </a:p>
         </p:txBody>
@@ -51204,7 +51204,7 @@
                 </a:solidFill>
                 <a:latin typeface="Kanit"/>
               </a:rPr>
-              <a:t>YoY +75.9%</a:t>
+              <a:t>YoY +76.3%</a:t>
             </a:r>
           </a:p>
         </p:txBody>
@@ -51522,7 +51522,7 @@
                 </a:solidFill>
                 <a:latin typeface="Kanit"/>
               </a:rPr>
-              <a:t>YoY +181.0%</a:t>
+              <a:t>YoY +114.6%</a:t>
             </a:r>
           </a:p>
         </p:txBody>
@@ -51886,7 +51886,7 @@
                 </a:solidFill>
                 <a:latin typeface="Kanit"/>
               </a:rPr>
-              <a:t>Farm-gate prices MEASURED — NABC daily quotes, monthly means, in baht as published (no currency conversion); newest quote 2026-09-07, history vintage 2026-09-05. Farm gate (ราคาที่เกษตรกรขายได้) is what the grower is paid at first sale, before trading, milling or transport take a cut — not the world index and not a supermarket price. Belts are an ESTIMATED read of where each commodity is produced, and they overlap. Sugar is OCSB's announced season price, one point a year, so it has no six-month move to show.</a:t>
+              <a:t>Farm-gate prices MEASURED — NABC daily quotes, monthly means, in baht as published (no currency conversion); newest quote 2026-09-09, history vintage 2026-09-05. Farm gate (ราคาที่เกษตรกรขายได้) is what the grower is paid at first sale, before trading, milling or transport take a cut — not the world index and not a supermarket price. Belts are an ESTIMATED read of where each commodity is produced, and they overlap. Sugar is OCSB's announced season price, one point a year, so it has no six-month move to show.</a:t>
             </a:r>
           </a:p>
         </p:txBody>

--- a/docs/decks/mcom-2026-08-05-macro.pptx
+++ b/docs/decks/mcom-2026-08-05-macro.pptx
@@ -6240,7 +6240,7 @@
                 </a:solidFill>
                 <a:latin typeface="Kanit"/>
               </a:rPr>
-              <a:t>132</a:t>
+              <a:t>145</a:t>
             </a:r>
           </a:p>
         </p:txBody>
@@ -6279,7 +6279,7 @@
                 </a:solidFill>
                 <a:latin typeface="Kanit"/>
               </a:rPr>
-              <a:t>of 787 (16.8%) · live · 2026-09-09</a:t>
+              <a:t>of 789 (18.4%) · live · 2026-09-10</a:t>
             </a:r>
           </a:p>
         </p:txBody>
@@ -6405,7 +6405,7 @@
                 </a:solidFill>
                 <a:latin typeface="Kanit"/>
               </a:rPr>
-              <a:t>34</a:t>
+              <a:t>51</a:t>
             </a:r>
           </a:p>
         </p:txBody>
@@ -6444,7 +6444,7 @@
                 </a:solidFill>
                 <a:latin typeface="Kanit"/>
               </a:rPr>
-              <a:t>latest daily reading · 2026-09-09</a:t>
+              <a:t>latest daily reading · 2026-09-10</a:t>
             </a:r>
           </a:p>
         </p:txBody>
@@ -7882,7 +7882,7 @@
                           </a:solidFill>
                           <a:latin typeface="Kanit"/>
                         </a:rPr>
-                        <a:t>สกลนคร</a:t>
+                        <a:t>ชุมพร</a:t>
                       </a:r>
                     </a:p>
                   </a:txBody>
@@ -7905,7 +7905,7 @@
                           </a:solidFill>
                           <a:latin typeface="Kanit"/>
                         </a:rPr>
-                        <a:t>37</a:t>
+                        <a:t>89</a:t>
                       </a:r>
                     </a:p>
                   </a:txBody>
@@ -7928,7 +7928,7 @@
                           </a:solidFill>
                           <a:latin typeface="Kanit"/>
                         </a:rPr>
-                        <a:t>65</a:t>
+                        <a:t>60</a:t>
                       </a:r>
                     </a:p>
                   </a:txBody>
@@ -7951,7 +7951,7 @@
                           </a:solidFill>
                           <a:latin typeface="Kanit"/>
                         </a:rPr>
-                        <a:t>16.2%</a:t>
+                        <a:t>6.7%</a:t>
                       </a:r>
                     </a:p>
                   </a:txBody>
@@ -7974,7 +7974,7 @@
                           </a:solidFill>
                           <a:latin typeface="Kanit"/>
                         </a:rPr>
-                        <a:t>7/12</a:t>
+                        <a:t>3/14</a:t>
                       </a:r>
                     </a:p>
                   </a:txBody>
@@ -8022,7 +8022,7 @@
                           </a:solidFill>
                           <a:latin typeface="Kanit"/>
                         </a:rPr>
-                        <a:t>สมุทรปราการ</a:t>
+                        <a:t>สกลนคร</a:t>
                       </a:r>
                     </a:p>
                   </a:txBody>
@@ -8045,7 +8045,7 @@
                           </a:solidFill>
                           <a:latin typeface="Kanit"/>
                         </a:rPr>
-                        <a:t>15</a:t>
+                        <a:t>38</a:t>
                       </a:r>
                     </a:p>
                   </a:txBody>
@@ -8068,7 +8068,7 @@
                           </a:solidFill>
                           <a:latin typeface="Kanit"/>
                         </a:rPr>
-                        <a:t>2</a:t>
+                        <a:t>69</a:t>
                       </a:r>
                     </a:p>
                   </a:txBody>
@@ -8087,11 +8087,11 @@
                       <a:r>
                         <a:rPr sz="900" b="1">
                           <a:solidFill>
-                            <a:srgbClr val="606060"/>
-                          </a:solidFill>
-                          <a:latin typeface="Kanit"/>
-                        </a:rPr>
-                        <a:t>0.0%</a:t>
+                            <a:srgbClr val="F5C242"/>
+                          </a:solidFill>
+                          <a:latin typeface="Kanit"/>
+                        </a:rPr>
+                        <a:t>2.6%</a:t>
                       </a:r>
                     </a:p>
                   </a:txBody>
@@ -8114,7 +8114,7 @@
                           </a:solidFill>
                           <a:latin typeface="Kanit"/>
                         </a:rPr>
-                        <a:t>4/4</a:t>
+                        <a:t>7/12</a:t>
                       </a:r>
                     </a:p>
                   </a:txBody>
@@ -8162,7 +8162,7 @@
                           </a:solidFill>
                           <a:latin typeface="Kanit"/>
                         </a:rPr>
-                        <a:t>บึงกาฬ</a:t>
+                        <a:t>สมุทรปราการ</a:t>
                       </a:r>
                     </a:p>
                   </a:txBody>
@@ -8185,7 +8185,7 @@
                           </a:solidFill>
                           <a:latin typeface="Kanit"/>
                         </a:rPr>
-                        <a:t>11</a:t>
+                        <a:t>15</a:t>
                       </a:r>
                     </a:p>
                   </a:txBody>
@@ -8208,7 +8208,7 @@
                           </a:solidFill>
                           <a:latin typeface="Kanit"/>
                         </a:rPr>
-                        <a:t>150</a:t>
+                        <a:t>19</a:t>
                       </a:r>
                     </a:p>
                   </a:txBody>
@@ -8227,11 +8227,11 @@
                       <a:r>
                         <a:rPr sz="900" b="1">
                           <a:solidFill>
-                            <a:srgbClr val="F5C242"/>
-                          </a:solidFill>
-                          <a:latin typeface="Kanit"/>
-                        </a:rPr>
-                        <a:t>54.5%</a:t>
+                            <a:srgbClr val="606060"/>
+                          </a:solidFill>
+                          <a:latin typeface="Kanit"/>
+                        </a:rPr>
+                        <a:t>0.0%</a:t>
                       </a:r>
                     </a:p>
                   </a:txBody>
@@ -8254,7 +8254,7 @@
                           </a:solidFill>
                           <a:latin typeface="Kanit"/>
                         </a:rPr>
-                        <a:t>1/1</a:t>
+                        <a:t>4/4</a:t>
                       </a:r>
                     </a:p>
                   </a:txBody>
@@ -8273,11 +8273,11 @@
                       <a:r>
                         <a:rPr sz="900" b="1">
                           <a:solidFill>
-                            <a:srgbClr val="F5C242"/>
-                          </a:solidFill>
-                          <a:latin typeface="Kanit"/>
-                        </a:rPr>
-                        <a:t>4</a:t>
+                            <a:srgbClr val="CC0000"/>
+                          </a:solidFill>
+                          <a:latin typeface="Kanit"/>
+                        </a:rPr>
+                        <a:t>5</a:t>
                       </a:r>
                     </a:p>
                   </a:txBody>
@@ -8302,7 +8302,7 @@
                           </a:solidFill>
                           <a:latin typeface="Kanit"/>
                         </a:rPr>
-                        <a:t>หนองบัวลำภู</a:t>
+                        <a:t>อุดรธานี</a:t>
                       </a:r>
                     </a:p>
                   </a:txBody>
@@ -8325,7 +8325,7 @@
                           </a:solidFill>
                           <a:latin typeface="Kanit"/>
                         </a:rPr>
-                        <a:t>30</a:t>
+                        <a:t>35</a:t>
                       </a:r>
                     </a:p>
                   </a:txBody>
@@ -8348,7 +8348,7 @@
                           </a:solidFill>
                           <a:latin typeface="Kanit"/>
                         </a:rPr>
-                        <a:t>98</a:t>
+                        <a:t>65</a:t>
                       </a:r>
                     </a:p>
                   </a:txBody>
@@ -8371,7 +8371,7 @@
                           </a:solidFill>
                           <a:latin typeface="Kanit"/>
                         </a:rPr>
-                        <a:t>26.7%</a:t>
+                        <a:t>37.1%</a:t>
                       </a:r>
                     </a:p>
                   </a:txBody>
@@ -8394,7 +8394,7 @@
                           </a:solidFill>
                           <a:latin typeface="Kanit"/>
                         </a:rPr>
-                        <a:t>2/3</a:t>
+                        <a:t>5/7</a:t>
                       </a:r>
                     </a:p>
                   </a:txBody>
@@ -8442,7 +8442,7 @@
                           </a:solidFill>
                           <a:latin typeface="Kanit"/>
                         </a:rPr>
-                        <a:t>ชุมพร</a:t>
+                        <a:t>ปราจีนบุรี</a:t>
                       </a:r>
                     </a:p>
                   </a:txBody>
@@ -8465,7 +8465,7 @@
                           </a:solidFill>
                           <a:latin typeface="Kanit"/>
                         </a:rPr>
-                        <a:t>92</a:t>
+                        <a:t>35</a:t>
                       </a:r>
                     </a:p>
                   </a:txBody>
@@ -8488,7 +8488,7 @@
                           </a:solidFill>
                           <a:latin typeface="Kanit"/>
                         </a:rPr>
-                        <a:t>80</a:t>
+                        <a:t>66</a:t>
                       </a:r>
                     </a:p>
                   </a:txBody>
@@ -8511,7 +8511,7 @@
                           </a:solidFill>
                           <a:latin typeface="Kanit"/>
                         </a:rPr>
-                        <a:t>16.3%</a:t>
+                        <a:t>34.3%</a:t>
                       </a:r>
                     </a:p>
                   </a:txBody>
@@ -8534,7 +8534,7 @@
                           </a:solidFill>
                           <a:latin typeface="Kanit"/>
                         </a:rPr>
-                        <a:t>2/14</a:t>
+                        <a:t>6/15</a:t>
                       </a:r>
                     </a:p>
                   </a:txBody>
@@ -8582,7 +8582,7 @@
                           </a:solidFill>
                           <a:latin typeface="Kanit"/>
                         </a:rPr>
-                        <a:t>อุดรธานี</a:t>
+                        <a:t>ตราด</a:t>
                       </a:r>
                     </a:p>
                   </a:txBody>
@@ -8605,7 +8605,7 @@
                           </a:solidFill>
                           <a:latin typeface="Kanit"/>
                         </a:rPr>
-                        <a:t>35</a:t>
+                        <a:t>46</a:t>
                       </a:r>
                     </a:p>
                   </a:txBody>
@@ -8628,7 +8628,7 @@
                           </a:solidFill>
                           <a:latin typeface="Kanit"/>
                         </a:rPr>
-                        <a:t>127</a:t>
+                        <a:t>121</a:t>
                       </a:r>
                     </a:p>
                   </a:txBody>
@@ -8651,7 +8651,7 @@
                           </a:solidFill>
                           <a:latin typeface="Kanit"/>
                         </a:rPr>
-                        <a:t>14.3%</a:t>
+                        <a:t>32.6%</a:t>
                       </a:r>
                     </a:p>
                   </a:txBody>
@@ -8674,7 +8674,7 @@
                           </a:solidFill>
                           <a:latin typeface="Kanit"/>
                         </a:rPr>
-                        <a:t>3/7</a:t>
+                        <a:t>4/9</a:t>
                       </a:r>
                     </a:p>
                   </a:txBody>
@@ -8909,7 +8909,7 @@
                 </a:solidFill>
                 <a:latin typeface="Kanit"/>
               </a:rPr>
-              <a:t>Planted area MEASURED (OAE — 3,295 amphoe crop rows). Drought is a MODELLED SPEI index from rainfall and evapotranspiration, refreshed monthly, retrieved 2026-07-20 — the best national-coverage signal available, but nobody has walked those districts. Rain and river telemetry MEASURED (ThaiWater, live, pulled daily and accumulated — a missed pull leaves a gap rather than an invented point) · rain to 2026-09-09, river to 2026-09-09. Structural flood exposure MEASURED (GISTDA 1:50,000 repeated-flooding census, 2005-2016 — a 12-year ground record, not a forecast).</a:t>
+              <a:t>Planted area MEASURED (OAE — 3,295 amphoe crop rows). Drought is a MODELLED SPEI index from rainfall and evapotranspiration, refreshed monthly, retrieved 2026-07-20 — the best national-coverage signal available, but nobody has walked those districts. Rain and river telemetry MEASURED (ThaiWater, live, pulled daily and accumulated — a missed pull leaves a gap rather than an invented point) · rain to 2026-09-10, river to 2026-09-10. Structural flood exposure MEASURED (GISTDA 1:50,000 repeated-flooding census, 2005-2016 — a 12-year ground record, not a forecast).</a:t>
             </a:r>
           </a:p>
         </p:txBody>
@@ -32047,7 +32047,7 @@
                 </a:solidFill>
                 <a:latin typeface="Kanit"/>
               </a:rPr>
-              <a:t>Vintages — world prices 2026M06 · Thai farm gate 2026-09-09 · Thai price history 2026-09-05 · crop cost of production OAE Cai-up 2568 (crop year 2568/69, OAE forecast Mar 2569) · drought 2026-06-21 · CPI 2026-05 · GDP 2026-Q1 · IMF WEO 2026 · resale index 2026-05 · registrations to 2026-01 · household debt NSO SES 2566 · wages NSO LFS 2568 · telemetry 2026-09-09.</a:t>
+              <a:t>Vintages — world prices 2026M06 · Thai farm gate 2026-09-09 · Thai price history 2026-09-05 · crop cost of production OAE Cai-up 2568 (crop year 2568/69, OAE forecast Mar 2569) · drought 2026-06-21 · CPI 2026-05 · GDP 2026-Q1 · IMF WEO 2026 · resale index 2026-05 · registrations to 2026-01 · household debt NSO SES 2566 · wages NSO LFS 2568 · telemetry 2026-09-10.</a:t>
             </a:r>
           </a:p>
         </p:txBody>
@@ -37087,7 +37087,7 @@
                 </a:solidFill>
                 <a:latin typeface="Kanit"/>
               </a:rPr>
-              <a:t>338 of 928 districts · 132 of 787 rivers high</a:t>
+              <a:t>338 of 928 districts · 145 of 789 rivers high</a:t>
             </a:r>
           </a:p>
         </p:txBody>
@@ -37859,7 +37859,7 @@
                           </a:solidFill>
                           <a:latin typeface="Kanit"/>
                         </a:rPr>
-                        <a:t>31/154</a:t>
+                        <a:t>39/156</a:t>
                       </a:r>
                     </a:p>
                   </a:txBody>
@@ -38091,7 +38091,7 @@
                           </a:solidFill>
                           <a:latin typeface="Kanit"/>
                         </a:rPr>
-                        <a:t>18/272</a:t>
+                        <a:t>21/272</a:t>
                       </a:r>
                     </a:p>
                   </a:txBody>
@@ -38323,7 +38323,7 @@
                           </a:solidFill>
                           <a:latin typeface="Kanit"/>
                         </a:rPr>
-                        <a:t>26/167</a:t>
+                        <a:t>28/167</a:t>
                       </a:r>
                     </a:p>
                   </a:txBody>
@@ -38555,7 +38555,7 @@
                           </a:solidFill>
                           <a:latin typeface="Kanit"/>
                         </a:rPr>
-                        <a:t>12/51</a:t>
+                        <a:t>13/51</a:t>
                       </a:r>
                     </a:p>
                   </a:txBody>
@@ -38787,7 +38787,7 @@
                           </a:solidFill>
                           <a:latin typeface="Kanit"/>
                         </a:rPr>
-                        <a:t>45/143</a:t>
+                        <a:t>44/143</a:t>
                       </a:r>
                     </a:p>
                   </a:txBody>

--- a/docs/decks/mcom-2026-08-05-macro.pptx
+++ b/docs/decks/mcom-2026-08-05-macro.pptx
@@ -6240,7 +6240,7 @@
                 </a:solidFill>
                 <a:latin typeface="Kanit"/>
               </a:rPr>
-              <a:t>145</a:t>
+              <a:t>147</a:t>
             </a:r>
           </a:p>
         </p:txBody>
@@ -6279,7 +6279,7 @@
                 </a:solidFill>
                 <a:latin typeface="Kanit"/>
               </a:rPr>
-              <a:t>of 789 (18.4%) · live · 2026-09-10</a:t>
+              <a:t>of 788 (18.7%) · live · 2026-09-11</a:t>
             </a:r>
           </a:p>
         </p:txBody>
@@ -6405,7 +6405,7 @@
                 </a:solidFill>
                 <a:latin typeface="Kanit"/>
               </a:rPr>
-              <a:t>51</a:t>
+              <a:t>61</a:t>
             </a:r>
           </a:p>
         </p:txBody>
@@ -6444,7 +6444,7 @@
                 </a:solidFill>
                 <a:latin typeface="Kanit"/>
               </a:rPr>
-              <a:t>latest daily reading · 2026-09-10</a:t>
+              <a:t>latest daily reading · 2026-09-11</a:t>
             </a:r>
           </a:p>
         </p:txBody>
@@ -7882,7 +7882,7 @@
                           </a:solidFill>
                           <a:latin typeface="Kanit"/>
                         </a:rPr>
-                        <a:t>ชุมพร</a:t>
+                        <a:t>สกลนคร</a:t>
                       </a:r>
                     </a:p>
                   </a:txBody>
@@ -7905,7 +7905,7 @@
                           </a:solidFill>
                           <a:latin typeface="Kanit"/>
                         </a:rPr>
-                        <a:t>89</a:t>
+                        <a:t>38</a:t>
                       </a:r>
                     </a:p>
                   </a:txBody>
@@ -7928,7 +7928,7 @@
                           </a:solidFill>
                           <a:latin typeface="Kanit"/>
                         </a:rPr>
-                        <a:t>60</a:t>
+                        <a:t>15</a:t>
                       </a:r>
                     </a:p>
                   </a:txBody>
@@ -7947,11 +7947,11 @@
                       <a:r>
                         <a:rPr sz="900" b="1">
                           <a:solidFill>
-                            <a:srgbClr val="F5C242"/>
-                          </a:solidFill>
-                          <a:latin typeface="Kanit"/>
-                        </a:rPr>
-                        <a:t>6.7%</a:t>
+                            <a:srgbClr val="606060"/>
+                          </a:solidFill>
+                          <a:latin typeface="Kanit"/>
+                        </a:rPr>
+                        <a:t>0.0%</a:t>
                       </a:r>
                     </a:p>
                   </a:txBody>
@@ -7974,7 +7974,7 @@
                           </a:solidFill>
                           <a:latin typeface="Kanit"/>
                         </a:rPr>
-                        <a:t>3/14</a:t>
+                        <a:t>7/12</a:t>
                       </a:r>
                     </a:p>
                   </a:txBody>
@@ -8022,7 +8022,7 @@
                           </a:solidFill>
                           <a:latin typeface="Kanit"/>
                         </a:rPr>
-                        <a:t>สกลนคร</a:t>
+                        <a:t>สมุทรปราการ</a:t>
                       </a:r>
                     </a:p>
                   </a:txBody>
@@ -8045,7 +8045,7 @@
                           </a:solidFill>
                           <a:latin typeface="Kanit"/>
                         </a:rPr>
-                        <a:t>38</a:t>
+                        <a:t>15</a:t>
                       </a:r>
                     </a:p>
                   </a:txBody>
@@ -8068,7 +8068,7 @@
                           </a:solidFill>
                           <a:latin typeface="Kanit"/>
                         </a:rPr>
-                        <a:t>69</a:t>
+                        <a:t>94</a:t>
                       </a:r>
                     </a:p>
                   </a:txBody>
@@ -8091,7 +8091,7 @@
                           </a:solidFill>
                           <a:latin typeface="Kanit"/>
                         </a:rPr>
-                        <a:t>2.6%</a:t>
+                        <a:t>60.0%</a:t>
                       </a:r>
                     </a:p>
                   </a:txBody>
@@ -8114,7 +8114,7 @@
                           </a:solidFill>
                           <a:latin typeface="Kanit"/>
                         </a:rPr>
-                        <a:t>7/12</a:t>
+                        <a:t>4/4</a:t>
                       </a:r>
                     </a:p>
                   </a:txBody>
@@ -8133,11 +8133,11 @@
                       <a:r>
                         <a:rPr sz="900" b="1">
                           <a:solidFill>
-                            <a:srgbClr val="CC0000"/>
-                          </a:solidFill>
-                          <a:latin typeface="Kanit"/>
-                        </a:rPr>
-                        <a:t>5</a:t>
+                            <a:srgbClr val="F5C242"/>
+                          </a:solidFill>
+                          <a:latin typeface="Kanit"/>
+                        </a:rPr>
+                        <a:t>4</a:t>
                       </a:r>
                     </a:p>
                   </a:txBody>
@@ -8162,7 +8162,7 @@
                           </a:solidFill>
                           <a:latin typeface="Kanit"/>
                         </a:rPr>
-                        <a:t>สมุทรปราการ</a:t>
+                        <a:t>นครปฐม</a:t>
                       </a:r>
                     </a:p>
                   </a:txBody>
@@ -8185,7 +8185,7 @@
                           </a:solidFill>
                           <a:latin typeface="Kanit"/>
                         </a:rPr>
-                        <a:t>15</a:t>
+                        <a:t>9</a:t>
                       </a:r>
                     </a:p>
                   </a:txBody>
@@ -8208,7 +8208,7 @@
                           </a:solidFill>
                           <a:latin typeface="Kanit"/>
                         </a:rPr>
-                        <a:t>19</a:t>
+                        <a:t>59</a:t>
                       </a:r>
                     </a:p>
                   </a:txBody>
@@ -8227,11 +8227,11 @@
                       <a:r>
                         <a:rPr sz="900" b="1">
                           <a:solidFill>
-                            <a:srgbClr val="606060"/>
-                          </a:solidFill>
-                          <a:latin typeface="Kanit"/>
-                        </a:rPr>
-                        <a:t>0.0%</a:t>
+                            <a:srgbClr val="F5C242"/>
+                          </a:solidFill>
+                          <a:latin typeface="Kanit"/>
+                        </a:rPr>
+                        <a:t>44.4%</a:t>
                       </a:r>
                     </a:p>
                   </a:txBody>
@@ -8254,7 +8254,7 @@
                           </a:solidFill>
                           <a:latin typeface="Kanit"/>
                         </a:rPr>
-                        <a:t>4/4</a:t>
+                        <a:t>5/7</a:t>
                       </a:r>
                     </a:p>
                   </a:txBody>
@@ -8273,11 +8273,11 @@
                       <a:r>
                         <a:rPr sz="900" b="1">
                           <a:solidFill>
-                            <a:srgbClr val="CC0000"/>
-                          </a:solidFill>
-                          <a:latin typeface="Kanit"/>
-                        </a:rPr>
-                        <a:t>5</a:t>
+                            <a:srgbClr val="F5C242"/>
+                          </a:solidFill>
+                          <a:latin typeface="Kanit"/>
+                        </a:rPr>
+                        <a:t>4</a:t>
                       </a:r>
                     </a:p>
                   </a:txBody>
@@ -8302,7 +8302,7 @@
                           </a:solidFill>
                           <a:latin typeface="Kanit"/>
                         </a:rPr>
-                        <a:t>อุดรธานี</a:t>
+                        <a:t>ตราด</a:t>
                       </a:r>
                     </a:p>
                   </a:txBody>
@@ -8325,7 +8325,7 @@
                           </a:solidFill>
                           <a:latin typeface="Kanit"/>
                         </a:rPr>
-                        <a:t>35</a:t>
+                        <a:t>46</a:t>
                       </a:r>
                     </a:p>
                   </a:txBody>
@@ -8348,7 +8348,7 @@
                           </a:solidFill>
                           <a:latin typeface="Kanit"/>
                         </a:rPr>
-                        <a:t>65</a:t>
+                        <a:t>125</a:t>
                       </a:r>
                     </a:p>
                   </a:txBody>
@@ -8371,7 +8371,7 @@
                           </a:solidFill>
                           <a:latin typeface="Kanit"/>
                         </a:rPr>
-                        <a:t>37.1%</a:t>
+                        <a:t>43.5%</a:t>
                       </a:r>
                     </a:p>
                   </a:txBody>
@@ -8394,7 +8394,7 @@
                           </a:solidFill>
                           <a:latin typeface="Kanit"/>
                         </a:rPr>
-                        <a:t>5/7</a:t>
+                        <a:t>4/9</a:t>
                       </a:r>
                     </a:p>
                   </a:txBody>
@@ -8442,7 +8442,7 @@
                           </a:solidFill>
                           <a:latin typeface="Kanit"/>
                         </a:rPr>
-                        <a:t>ปราจีนบุรี</a:t>
+                        <a:t>ศรีสะเกษ</a:t>
                       </a:r>
                     </a:p>
                   </a:txBody>
@@ -8465,7 +8465,7 @@
                           </a:solidFill>
                           <a:latin typeface="Kanit"/>
                         </a:rPr>
-                        <a:t>35</a:t>
+                        <a:t>21</a:t>
                       </a:r>
                     </a:p>
                   </a:txBody>
@@ -8488,7 +8488,7 @@
                           </a:solidFill>
                           <a:latin typeface="Kanit"/>
                         </a:rPr>
-                        <a:t>66</a:t>
+                        <a:t>141</a:t>
                       </a:r>
                     </a:p>
                   </a:txBody>
@@ -8511,7 +8511,7 @@
                           </a:solidFill>
                           <a:latin typeface="Kanit"/>
                         </a:rPr>
-                        <a:t>34.3%</a:t>
+                        <a:t>33.3%</a:t>
                       </a:r>
                     </a:p>
                   </a:txBody>
@@ -8534,7 +8534,7 @@
                           </a:solidFill>
                           <a:latin typeface="Kanit"/>
                         </a:rPr>
-                        <a:t>6/15</a:t>
+                        <a:t>1/9</a:t>
                       </a:r>
                     </a:p>
                   </a:txBody>
@@ -8582,7 +8582,7 @@
                           </a:solidFill>
                           <a:latin typeface="Kanit"/>
                         </a:rPr>
-                        <a:t>ตราด</a:t>
+                        <a:t>สมุทรสงคราม</a:t>
                       </a:r>
                     </a:p>
                   </a:txBody>
@@ -8605,7 +8605,7 @@
                           </a:solidFill>
                           <a:latin typeface="Kanit"/>
                         </a:rPr>
-                        <a:t>46</a:t>
+                        <a:t>6</a:t>
                       </a:r>
                     </a:p>
                   </a:txBody>
@@ -8628,7 +8628,7 @@
                           </a:solidFill>
                           <a:latin typeface="Kanit"/>
                         </a:rPr>
-                        <a:t>121</a:t>
+                        <a:t>65</a:t>
                       </a:r>
                     </a:p>
                   </a:txBody>
@@ -8651,7 +8651,7 @@
                           </a:solidFill>
                           <a:latin typeface="Kanit"/>
                         </a:rPr>
-                        <a:t>32.6%</a:t>
+                        <a:t>33.3%</a:t>
                       </a:r>
                     </a:p>
                   </a:txBody>
@@ -8674,7 +8674,7 @@
                           </a:solidFill>
                           <a:latin typeface="Kanit"/>
                         </a:rPr>
-                        <a:t>4/9</a:t>
+                        <a:t>1/2</a:t>
                       </a:r>
                     </a:p>
                   </a:txBody>
@@ -8909,7 +8909,7 @@
                 </a:solidFill>
                 <a:latin typeface="Kanit"/>
               </a:rPr>
-              <a:t>Planted area MEASURED (OAE — 3,295 amphoe crop rows). Drought is a MODELLED SPEI index from rainfall and evapotranspiration, refreshed monthly, retrieved 2026-07-20 — the best national-coverage signal available, but nobody has walked those districts. Rain and river telemetry MEASURED (ThaiWater, live, pulled daily and accumulated — a missed pull leaves a gap rather than an invented point) · rain to 2026-09-10, river to 2026-09-10. Structural flood exposure MEASURED (GISTDA 1:50,000 repeated-flooding census, 2005-2016 — a 12-year ground record, not a forecast).</a:t>
+              <a:t>Planted area MEASURED (OAE — 3,295 amphoe crop rows). Drought is a MODELLED SPEI index from rainfall and evapotranspiration, refreshed monthly, retrieved 2026-07-20 — the best national-coverage signal available, but nobody has walked those districts. Rain and river telemetry MEASURED (ThaiWater, live, pulled daily and accumulated — a missed pull leaves a gap rather than an invented point) · rain to 2026-09-11, river to 2026-09-11. Structural flood exposure MEASURED (GISTDA 1:50,000 repeated-flooding census, 2005-2016 — a 12-year ground record, not a forecast).</a:t>
             </a:r>
           </a:p>
         </p:txBody>
@@ -32047,7 +32047,7 @@
                 </a:solidFill>
                 <a:latin typeface="Kanit"/>
               </a:rPr>
-              <a:t>Vintages — world prices 2026M06 · Thai farm gate 2026-09-09 · Thai price history 2026-09-05 · crop cost of production OAE Cai-up 2568 (crop year 2568/69, OAE forecast Mar 2569) · drought 2026-06-21 · CPI 2026-05 · GDP 2026-Q1 · IMF WEO 2026 · resale index 2026-05 · registrations to 2026-01 · household debt NSO SES 2566 · wages NSO LFS 2568 · telemetry 2026-09-10.</a:t>
+              <a:t>Vintages — world prices 2026M06 · Thai farm gate 2026-09-09 · Thai price history 2026-09-05 · crop cost of production OAE Cai-up 2568 (crop year 2568/69, OAE forecast Mar 2569) · drought 2026-06-21 · CPI 2026-05 · GDP 2026-Q1 · IMF WEO 2026 · resale index 2026-05 · registrations to 2026-01 · household debt NSO SES 2566 · wages NSO LFS 2568 · telemetry 2026-09-11.</a:t>
             </a:r>
           </a:p>
         </p:txBody>
@@ -37087,7 +37087,7 @@
                 </a:solidFill>
                 <a:latin typeface="Kanit"/>
               </a:rPr>
-              <a:t>338 of 928 districts · 145 of 789 rivers high</a:t>
+              <a:t>338 of 928 districts · 147 of 788 rivers high</a:t>
             </a:r>
           </a:p>
         </p:txBody>
@@ -37859,7 +37859,7 @@
                           </a:solidFill>
                           <a:latin typeface="Kanit"/>
                         </a:rPr>
-                        <a:t>39/156</a:t>
+                        <a:t>40/155</a:t>
                       </a:r>
                     </a:p>
                   </a:txBody>
@@ -38091,7 +38091,7 @@
                           </a:solidFill>
                           <a:latin typeface="Kanit"/>
                         </a:rPr>
-                        <a:t>21/272</a:t>
+                        <a:t>19/272</a:t>
                       </a:r>
                     </a:p>
                   </a:txBody>
@@ -38323,7 +38323,7 @@
                           </a:solidFill>
                           <a:latin typeface="Kanit"/>
                         </a:rPr>
-                        <a:t>28/167</a:t>
+                        <a:t>31/167</a:t>
                       </a:r>
                     </a:p>
                   </a:txBody>

--- a/docs/decks/mcom-2026-08-05-macro.pptx
+++ b/docs/decks/mcom-2026-08-05-macro.pptx
@@ -6240,7 +6240,7 @@
                 </a:solidFill>
                 <a:latin typeface="Kanit"/>
               </a:rPr>
-              <a:t>147</a:t>
+              <a:t>144</a:t>
             </a:r>
           </a:p>
         </p:txBody>
@@ -6279,7 +6279,7 @@
                 </a:solidFill>
                 <a:latin typeface="Kanit"/>
               </a:rPr>
-              <a:t>of 788 (18.7%) · live · 2026-09-11</a:t>
+              <a:t>of 788 (18.3%) · live · 2026-09-11</a:t>
             </a:r>
           </a:p>
         </p:txBody>
@@ -6405,7 +6405,7 @@
                 </a:solidFill>
                 <a:latin typeface="Kanit"/>
               </a:rPr>
-              <a:t>61</a:t>
+              <a:t>51</a:t>
             </a:r>
           </a:p>
         </p:txBody>
@@ -7882,7 +7882,7 @@
                           </a:solidFill>
                           <a:latin typeface="Kanit"/>
                         </a:rPr>
-                        <a:t>สกลนคร</a:t>
+                        <a:t>สมุทรปราการ</a:t>
                       </a:r>
                     </a:p>
                   </a:txBody>
@@ -7905,7 +7905,7 @@
                           </a:solidFill>
                           <a:latin typeface="Kanit"/>
                         </a:rPr>
-                        <a:t>38</a:t>
+                        <a:t>16</a:t>
                       </a:r>
                     </a:p>
                   </a:txBody>
@@ -7928,7 +7928,7 @@
                           </a:solidFill>
                           <a:latin typeface="Kanit"/>
                         </a:rPr>
-                        <a:t>15</a:t>
+                        <a:t>95</a:t>
                       </a:r>
                     </a:p>
                   </a:txBody>
@@ -7947,11 +7947,11 @@
                       <a:r>
                         <a:rPr sz="900" b="1">
                           <a:solidFill>
-                            <a:srgbClr val="606060"/>
-                          </a:solidFill>
-                          <a:latin typeface="Kanit"/>
-                        </a:rPr>
-                        <a:t>0.0%</a:t>
+                            <a:srgbClr val="F5C242"/>
+                          </a:solidFill>
+                          <a:latin typeface="Kanit"/>
+                        </a:rPr>
+                        <a:t>62.5%</a:t>
                       </a:r>
                     </a:p>
                   </a:txBody>
@@ -7974,7 +7974,7 @@
                           </a:solidFill>
                           <a:latin typeface="Kanit"/>
                         </a:rPr>
-                        <a:t>7/12</a:t>
+                        <a:t>4/4</a:t>
                       </a:r>
                     </a:p>
                   </a:txBody>
@@ -8022,7 +8022,7 @@
                           </a:solidFill>
                           <a:latin typeface="Kanit"/>
                         </a:rPr>
-                        <a:t>สมุทรปราการ</a:t>
+                        <a:t>สกลนคร</a:t>
                       </a:r>
                     </a:p>
                   </a:txBody>
@@ -8045,7 +8045,7 @@
                           </a:solidFill>
                           <a:latin typeface="Kanit"/>
                         </a:rPr>
-                        <a:t>15</a:t>
+                        <a:t>38</a:t>
                       </a:r>
                     </a:p>
                   </a:txBody>
@@ -8068,7 +8068,7 @@
                           </a:solidFill>
                           <a:latin typeface="Kanit"/>
                         </a:rPr>
-                        <a:t>94</a:t>
+                        <a:t>7</a:t>
                       </a:r>
                     </a:p>
                   </a:txBody>
@@ -8087,11 +8087,11 @@
                       <a:r>
                         <a:rPr sz="900" b="1">
                           <a:solidFill>
-                            <a:srgbClr val="F5C242"/>
-                          </a:solidFill>
-                          <a:latin typeface="Kanit"/>
-                        </a:rPr>
-                        <a:t>60.0%</a:t>
+                            <a:srgbClr val="606060"/>
+                          </a:solidFill>
+                          <a:latin typeface="Kanit"/>
+                        </a:rPr>
+                        <a:t>0.0%</a:t>
                       </a:r>
                     </a:p>
                   </a:txBody>
@@ -8114,7 +8114,7 @@
                           </a:solidFill>
                           <a:latin typeface="Kanit"/>
                         </a:rPr>
-                        <a:t>4/4</a:t>
+                        <a:t>7/12</a:t>
                       </a:r>
                     </a:p>
                   </a:txBody>
@@ -8133,11 +8133,11 @@
                       <a:r>
                         <a:rPr sz="900" b="1">
                           <a:solidFill>
-                            <a:srgbClr val="F5C242"/>
-                          </a:solidFill>
-                          <a:latin typeface="Kanit"/>
-                        </a:rPr>
-                        <a:t>4</a:t>
+                            <a:srgbClr val="CC0000"/>
+                          </a:solidFill>
+                          <a:latin typeface="Kanit"/>
+                        </a:rPr>
+                        <a:t>5</a:t>
                       </a:r>
                     </a:p>
                   </a:txBody>
@@ -8162,7 +8162,7 @@
                           </a:solidFill>
                           <a:latin typeface="Kanit"/>
                         </a:rPr>
-                        <a:t>นครปฐม</a:t>
+                        <a:t>สมุทรสงคราม</a:t>
                       </a:r>
                     </a:p>
                   </a:txBody>
@@ -8185,7 +8185,7 @@
                           </a:solidFill>
                           <a:latin typeface="Kanit"/>
                         </a:rPr>
-                        <a:t>9</a:t>
+                        <a:t>6</a:t>
                       </a:r>
                     </a:p>
                   </a:txBody>
@@ -8208,7 +8208,7 @@
                           </a:solidFill>
                           <a:latin typeface="Kanit"/>
                         </a:rPr>
-                        <a:t>59</a:t>
+                        <a:t>74</a:t>
                       </a:r>
                     </a:p>
                   </a:txBody>
@@ -8231,7 +8231,7 @@
                           </a:solidFill>
                           <a:latin typeface="Kanit"/>
                         </a:rPr>
-                        <a:t>44.4%</a:t>
+                        <a:t>50.0%</a:t>
                       </a:r>
                     </a:p>
                   </a:txBody>
@@ -8254,7 +8254,7 @@
                           </a:solidFill>
                           <a:latin typeface="Kanit"/>
                         </a:rPr>
-                        <a:t>5/7</a:t>
+                        <a:t>1/2</a:t>
                       </a:r>
                     </a:p>
                   </a:txBody>
@@ -8302,7 +8302,7 @@
                           </a:solidFill>
                           <a:latin typeface="Kanit"/>
                         </a:rPr>
-                        <a:t>ตราด</a:t>
+                        <a:t>นครปฐม</a:t>
                       </a:r>
                     </a:p>
                   </a:txBody>
@@ -8325,7 +8325,7 @@
                           </a:solidFill>
                           <a:latin typeface="Kanit"/>
                         </a:rPr>
-                        <a:t>46</a:t>
+                        <a:t>9</a:t>
                       </a:r>
                     </a:p>
                   </a:txBody>
@@ -8348,7 +8348,7 @@
                           </a:solidFill>
                           <a:latin typeface="Kanit"/>
                         </a:rPr>
-                        <a:t>125</a:t>
+                        <a:t>60</a:t>
                       </a:r>
                     </a:p>
                   </a:txBody>
@@ -8371,7 +8371,7 @@
                           </a:solidFill>
                           <a:latin typeface="Kanit"/>
                         </a:rPr>
-                        <a:t>43.5%</a:t>
+                        <a:t>44.4%</a:t>
                       </a:r>
                     </a:p>
                   </a:txBody>
@@ -8394,7 +8394,7 @@
                           </a:solidFill>
                           <a:latin typeface="Kanit"/>
                         </a:rPr>
-                        <a:t>4/9</a:t>
+                        <a:t>5/7</a:t>
                       </a:r>
                     </a:p>
                   </a:txBody>
@@ -8442,7 +8442,7 @@
                           </a:solidFill>
                           <a:latin typeface="Kanit"/>
                         </a:rPr>
-                        <a:t>ศรีสะเกษ</a:t>
+                        <a:t>สตูล</a:t>
                       </a:r>
                     </a:p>
                   </a:txBody>
@@ -8465,7 +8465,7 @@
                           </a:solidFill>
                           <a:latin typeface="Kanit"/>
                         </a:rPr>
-                        <a:t>21</a:t>
+                        <a:t>37</a:t>
                       </a:r>
                     </a:p>
                   </a:txBody>
@@ -8488,7 +8488,7 @@
                           </a:solidFill>
                           <a:latin typeface="Kanit"/>
                         </a:rPr>
-                        <a:t>141</a:t>
+                        <a:t>83</a:t>
                       </a:r>
                     </a:p>
                   </a:txBody>
@@ -8511,7 +8511,7 @@
                           </a:solidFill>
                           <a:latin typeface="Kanit"/>
                         </a:rPr>
-                        <a:t>33.3%</a:t>
+                        <a:t>40.5%</a:t>
                       </a:r>
                     </a:p>
                   </a:txBody>
@@ -8534,7 +8534,7 @@
                           </a:solidFill>
                           <a:latin typeface="Kanit"/>
                         </a:rPr>
-                        <a:t>1/9</a:t>
+                        <a:t>1/8</a:t>
                       </a:r>
                     </a:p>
                   </a:txBody>
@@ -8582,7 +8582,7 @@
                           </a:solidFill>
                           <a:latin typeface="Kanit"/>
                         </a:rPr>
-                        <a:t>สมุทรสงคราม</a:t>
+                        <a:t>สมุทรสาคร</a:t>
                       </a:r>
                     </a:p>
                   </a:txBody>
@@ -8628,7 +8628,7 @@
                           </a:solidFill>
                           <a:latin typeface="Kanit"/>
                         </a:rPr>
-                        <a:t>65</a:t>
+                        <a:t>104</a:t>
                       </a:r>
                     </a:p>
                   </a:txBody>
@@ -8674,7 +8674,7 @@
                           </a:solidFill>
                           <a:latin typeface="Kanit"/>
                         </a:rPr>
-                        <a:t>1/2</a:t>
+                        <a:t>3/3</a:t>
                       </a:r>
                     </a:p>
                   </a:txBody>
@@ -31476,7 +31476,7 @@
                 </a:solidFill>
                 <a:latin typeface="Kanit"/>
               </a:rPr>
-              <a:t>Median crop income rose +15.6%, but four provinces fell — all on the coconut (มะพร้าว) belt, worst สมุทรสงคราม at −64.3%.</a:t>
+              <a:t>Median crop income rose +15.3%, but four provinces fell — all on the coconut (มะพร้าว) belt, worst สมุทรสงคราม at −64.6%.</a:t>
             </a:r>
           </a:p>
         </p:txBody>
@@ -32047,7 +32047,7 @@
                 </a:solidFill>
                 <a:latin typeface="Kanit"/>
               </a:rPr>
-              <a:t>Vintages — world prices 2026M06 · Thai farm gate 2026-09-09 · Thai price history 2026-09-05 · crop cost of production OAE Cai-up 2568 (crop year 2568/69, OAE forecast Mar 2569) · drought 2026-06-21 · CPI 2026-05 · GDP 2026-Q1 · IMF WEO 2026 · resale index 2026-05 · registrations to 2026-01 · household debt NSO SES 2566 · wages NSO LFS 2568 · telemetry 2026-09-11.</a:t>
+              <a:t>Vintages — world prices 2026M06 · Thai farm gate 2026-09-11 · Thai price history 2026-09-11 · crop cost of production OAE Cai-up 2568 (crop year 2568/69, OAE forecast Mar 2569) · drought 2026-06-21 · CPI 2026-05 · GDP 2026-Q1 · IMF WEO 2026 · resale index 2026-05 · registrations to 2026-01 · household debt NSO SES 2566 · wages NSO LFS 2568 · telemetry 2026-09-11.</a:t>
             </a:r>
           </a:p>
         </p:txBody>
@@ -32546,7 +32546,7 @@
               <a:t>Not on the world index — the farm gate (ราคาที่เกษตรกรขายได้) says otherwise.
 • Five of seventeen Thai farm-gate prices are falling year on year.
 • Beef: farm gate −6.1% vs world index +8.8%.
-• Margin over price: a 26% price move becomes an 82% swing in crop income.</a:t>
+• Margin over price: a 25% price move becomes an 86% swing in crop income.</a:t>
             </a:r>
           </a:p>
         </p:txBody>
@@ -33912,7 +33912,7 @@
                 </a:solidFill>
                 <a:latin typeface="Kanit"/>
               </a:rPr>
-              <a:t>32.90</a:t>
+              <a:t>32.99</a:t>
             </a:r>
           </a:p>
         </p:txBody>
@@ -33951,7 +33951,7 @@
                 </a:solidFill>
                 <a:latin typeface="Kanit"/>
               </a:rPr>
-              <a:t>ECB reference · 2026-09-07</a:t>
+              <a:t>ECB reference · 2026-09-10</a:t>
             </a:r>
           </a:p>
         </p:txBody>
@@ -34242,7 +34242,7 @@
                 </a:solidFill>
                 <a:latin typeface="Kanit"/>
               </a:rPr>
-              <a:t>32.2M</a:t>
+              <a:t>32.1M</a:t>
             </a:r>
           </a:p>
         </p:txBody>
@@ -34281,7 +34281,7 @@
                 </a:solidFill>
                 <a:latin typeface="Kanit"/>
               </a:rPr>
-              <a:t>trailing 12m · −6.6% YoY · BoT 2026-06</a:t>
+              <a:t>trailing 12m · −5.5% YoY · BoT 2026-07</a:t>
             </a:r>
           </a:p>
         </p:txBody>
@@ -35798,7 +35798,7 @@
                 </a:solidFill>
                 <a:latin typeface="Kanit"/>
               </a:rPr>
-              <a:t>NESDC 2026-Q1 · TPSO 2026-05 · Bank of Thailand 2026-08 · BIS 2025-Q4 · ECB 2026-09-07, each pulled from the publishing agency. IMF World Economic Outlook 2026 (pulled 2026-07-25) for the peer table. BoT published NPL ratio — 4.48% at 2026-Q1, 4.33% the quarter before, +0.24pp on the year, 3.08% low in 2021-Q1.</a:t>
+              <a:t>NESDC 2026-Q1 · TPSO 2026-05 · Bank of Thailand 2026-08 · BIS 2025-Q4 · ECB 2026-09-10, each pulled from the publishing agency. IMF World Economic Outlook 2026 (pulled 2026-07-25) for the peer table. BoT published NPL ratio — 4.48% at 2026-Q1, 4.33% the quarter before, +0.24pp on the year, 3.08% low in 2021-Q1.</a:t>
             </a:r>
           </a:p>
         </p:txBody>
@@ -35967,7 +35967,7 @@
               <a:t>• Growth: IMF forecast 1.5%, actual +2.8%.
 • Inflation: IMF forecast 0.9%, actual +2.79%.
 • We use the Thai number over the projection, wherever one exists.
-• Exception: tourism, −6.6% YoY (trailing 12 months) — feeds informal income in the South and East, missing from crop and fleet data.</a:t>
+• Exception: tourism, −5.5% YoY (trailing 12 months) — feeds informal income in the South and East, missing from crop and fleet data.</a:t>
             </a:r>
           </a:p>
         </p:txBody>
@@ -37087,7 +37087,7 @@
                 </a:solidFill>
                 <a:latin typeface="Kanit"/>
               </a:rPr>
-              <a:t>338 of 928 districts · 147 of 788 rivers high</a:t>
+              <a:t>338 of 928 districts · 144 of 788 rivers high</a:t>
             </a:r>
           </a:p>
         </p:txBody>
@@ -38091,7 +38091,7 @@
                           </a:solidFill>
                           <a:latin typeface="Kanit"/>
                         </a:rPr>
-                        <a:t>19/272</a:t>
+                        <a:t>20/272</a:t>
                       </a:r>
                     </a:p>
                   </a:txBody>
@@ -38323,7 +38323,7 @@
                           </a:solidFill>
                           <a:latin typeface="Kanit"/>
                         </a:rPr>
-                        <a:t>31/167</a:t>
+                        <a:t>28/167</a:t>
                       </a:r>
                     </a:p>
                   </a:txBody>
@@ -38787,7 +38787,7 @@
                           </a:solidFill>
                           <a:latin typeface="Kanit"/>
                         </a:rPr>
-                        <a:t>44/143</a:t>
+                        <a:t>43/143</a:t>
                       </a:r>
                     </a:p>
                   </a:txBody>
@@ -39936,7 +39936,7 @@
                           </a:solidFill>
                           <a:latin typeface="Kanit"/>
                         </a:rPr>
-                        <a:t>−68.7%</a:t>
+                        <a:t>−69.0%</a:t>
                       </a:r>
                     </a:p>
                   </a:txBody>
@@ -40791,7 +40791,7 @@
                 </a:solidFill>
                 <a:latin typeface="Kanit"/>
               </a:rPr>
-              <a:t>Prices MEASURED — NABC daily quotes for the Thai farm gate, OCSB announced cane price; newest quote 2026-09-09. The six-month move is computed from NABC's own monthly series (thai_price_history, vintage 2026-09-05); a crop with no monthly series is marked, never estimated. Belt is an ESTIMATED read of where each commodity is produced, and belts overlap. Farming accounts are OURS and MEASURED — accounts whose recorded occupation is เกษตร in the belt provinces, from the 382,735-account tape at 2026-07; no cell below 30 accounts is published. They live where the crop grows; they are not confirmed to grow it.</a:t>
+              <a:t>Prices MEASURED — NABC daily quotes for the Thai farm gate, OCSB announced cane price; newest quote 2026-09-11. The six-month move is computed from NABC's own monthly series (thai_price_history, vintage 2026-09-11); a crop with no monthly series is marked, never estimated. Belt is an ESTIMATED read of where each commodity is produced, and belts overlap. Farming accounts are OURS and MEASURED — accounts whose recorded occupation is เกษตร in the belt provinces, from the 382,735-account tape at 2026-07; no cell below 30 accounts is published. They live where the crop grows; they are not confirmed to grow it.</a:t>
             </a:r>
           </a:p>
         </p:txBody>
@@ -43419,7 +43419,7 @@
                           </a:solidFill>
                           <a:latin typeface="Kanit"/>
                         </a:rPr>
-                        <a:t>91.45</a:t>
+                        <a:t>91.73</a:t>
                       </a:r>
                     </a:p>
                   </a:txBody>
@@ -43559,7 +43559,7 @@
                           </a:solidFill>
                           <a:latin typeface="Kanit"/>
                         </a:rPr>
-                        <a:t>15,362</a:t>
+                        <a:t>15,409</a:t>
                       </a:r>
                     </a:p>
                   </a:txBody>
@@ -43699,7 +43699,7 @@
                           </a:solidFill>
                           <a:latin typeface="Kanit"/>
                         </a:rPr>
-                        <a:t>36,217</a:t>
+                        <a:t>36,327</a:t>
                       </a:r>
                     </a:p>
                   </a:txBody>
@@ -43839,7 +43839,7 @@
                           </a:solidFill>
                           <a:latin typeface="Kanit"/>
                         </a:rPr>
-                        <a:t>11.18</a:t>
+                        <a:t>11.22</a:t>
                       </a:r>
                     </a:p>
                   </a:txBody>
@@ -44058,7 +44058,7 @@
                 </a:solidFill>
                 <a:latin typeface="Kanit"/>
               </a:rPr>
-              <a:t>World Bank Pink Sheet nominal-USD monthly prices, vintage 2026M07 (60 observations per series, rebased to 100 at 2021-07 for the chart — units differ, so raw levels can’t share an axis). Baht conversion at the ECB reference rate USD/THB 32.895, 2026-09-07. Planted-area share MEASURED, OAE/DOAE crop mix (crop_mix.json). Nominal, not deflated: five years of Thai CPI sit under every ‘vs 5 yrs ago’ figure.</a:t>
+              <a:t>World Bank Pink Sheet nominal-USD monthly prices, vintage 2026M07 (60 observations per series, rebased to 100 at 2021-07 for the chart — units differ, so raw levels can’t share an axis). Baht conversion at the ECB reference rate USD/THB 32.995, 2026-09-10. Planted-area share MEASURED, OAE/DOAE crop mix (crop_mix.json). Nominal, not deflated: five years of Thai CPI sit under every ‘vs 5 yrs ago’ figure.</a:t>
             </a:r>
           </a:p>
         </p:txBody>
@@ -44679,7 +44679,7 @@
                 </a:solidFill>
                 <a:latin typeface="Kanit"/>
               </a:rPr>
-              <a:t>coconut −68.7%, pineapple −18.4%, sugarcane −17.9% year on year</a:t>
+              <a:t>coconut −69.0%, pineapple −18.4%, sugarcane −17.9% year on year</a:t>
             </a:r>
           </a:p>
         </p:txBody>
@@ -44805,7 +44805,7 @@
                 </a:solidFill>
                 <a:latin typeface="Kanit"/>
               </a:rPr>
-              <a:t>+15.6%</a:t>
+              <a:t>+15.3%</a:t>
             </a:r>
           </a:p>
         </p:txBody>
@@ -45279,7 +45279,7 @@
                           </a:solidFill>
                           <a:latin typeface="Kanit"/>
                         </a:rPr>
-                        <a:t>+5.7%</a:t>
+                        <a:t>+5.4%</a:t>
                       </a:r>
                     </a:p>
                   </a:txBody>
@@ -45348,7 +45348,7 @@
                           </a:solidFill>
                           <a:latin typeface="Kanit"/>
                         </a:rPr>
-                        <a:t>-64.3%</a:t>
+                        <a:t>-64.6%</a:t>
                       </a:r>
                     </a:p>
                   </a:txBody>
@@ -45419,7 +45419,7 @@
                           </a:solidFill>
                           <a:latin typeface="Kanit"/>
                         </a:rPr>
-                        <a:t>+14.8%</a:t>
+                        <a:t>+14.4%</a:t>
                       </a:r>
                     </a:p>
                   </a:txBody>
@@ -45488,7 +45488,7 @@
                           </a:solidFill>
                           <a:latin typeface="Kanit"/>
                         </a:rPr>
-                        <a:t>+9.2%</a:t>
+                        <a:t>+8.8%</a:t>
                       </a:r>
                     </a:p>
                   </a:txBody>
@@ -45559,7 +45559,7 @@
                           </a:solidFill>
                           <a:latin typeface="Kanit"/>
                         </a:rPr>
-                        <a:t>+16.6%</a:t>
+                        <a:t>+16.4%</a:t>
                       </a:r>
                     </a:p>
                   </a:txBody>
@@ -45628,7 +45628,7 @@
                           </a:solidFill>
                           <a:latin typeface="Kanit"/>
                         </a:rPr>
-                        <a:t>+8.0%</a:t>
+                        <a:t>+7.7%</a:t>
                       </a:r>
                     </a:p>
                   </a:txBody>
@@ -45768,7 +45768,7 @@
                           </a:solidFill>
                           <a:latin typeface="Kanit"/>
                         </a:rPr>
-                        <a:t>+11.1%</a:t>
+                        <a:t>+10.9%</a:t>
                       </a:r>
                     </a:p>
                   </a:txBody>
@@ -45908,7 +45908,7 @@
                           </a:solidFill>
                           <a:latin typeface="Kanit"/>
                         </a:rPr>
-                        <a:t>+27.2%</a:t>
+                        <a:t>+27.3%</a:t>
                       </a:r>
                     </a:p>
                   </a:txBody>
@@ -46084,7 +46084,7 @@
                 </a:solidFill>
                 <a:latin typeface="Kanit"/>
               </a:rPr>
-              <a:t>•  +40% rubber, +76% cassava, +23% palm, +13% rice at the farm gate. Crop income rose in every region.
+              <a:t>•  +40% rubber, +77% cassava, +24% palm, +12% rice at the farm gate. Crop income rose in every region.
 •  Four provinces fell — all coconut, all on the western gulf. Coconut price is down 69%.
 •  A gain on paper is not cash yet — the next table nets prices against cost.</a:t>
             </a:r>
@@ -46387,7 +46387,7 @@
                           </a:solidFill>
                           <a:latin typeface="Kanit"/>
                         </a:rPr>
-                        <a:t>+17.3%</a:t>
+                        <a:t>+17.0%</a:t>
                       </a:r>
                     </a:p>
                   </a:txBody>
@@ -46550,7 +46550,7 @@
                           </a:solidFill>
                           <a:latin typeface="Kanit"/>
                         </a:rPr>
-                        <a:t>+21.0%</a:t>
+                        <a:t>+20.7%</a:t>
                       </a:r>
                     </a:p>
                   </a:txBody>
@@ -46713,7 +46713,7 @@
                           </a:solidFill>
                           <a:latin typeface="Kanit"/>
                         </a:rPr>
-                        <a:t>+10.9%</a:t>
+                        <a:t>+10.6%</a:t>
                       </a:r>
                     </a:p>
                   </a:txBody>
@@ -47039,7 +47039,7 @@
                           </a:solidFill>
                           <a:latin typeface="Kanit"/>
                         </a:rPr>
-                        <a:t>+16.3%</a:t>
+                        <a:t>+16.0%</a:t>
                       </a:r>
                     </a:p>
                   </a:txBody>
@@ -47202,7 +47202,7 @@
                           </a:solidFill>
                           <a:latin typeface="Kanit"/>
                         </a:rPr>
-                        <a:t>+14.6%</a:t>
+                        <a:t>+14.3%</a:t>
                       </a:r>
                     </a:p>
                   </a:txBody>
@@ -48024,7 +48024,7 @@
                 </a:solidFill>
                 <a:latin typeface="Kanit"/>
               </a:rPr>
-              <a:t>YoY −68.7%</a:t>
+              <a:t>YoY −69.0%</a:t>
             </a:r>
           </a:p>
         </p:txBody>
@@ -48134,22 +48134,22 @@
             <a:pathLst>
               <a:path w="2064715" h="457200">
                 <a:moveTo>
-                  <a:pt x="0" y="38315"/>
+                  <a:pt x="0" y="38804"/>
                 </a:moveTo>
                 <a:lnTo>
                   <a:pt x="412943" y="0"/>
                 </a:lnTo>
                 <a:lnTo>
-                  <a:pt x="825886" y="372997"/>
+                  <a:pt x="825886" y="380210"/>
                 </a:lnTo>
                 <a:lnTo>
                   <a:pt x="1238829" y="457200"/>
                 </a:lnTo>
                 <a:lnTo>
-                  <a:pt x="1651772" y="385356"/>
-                </a:lnTo>
-                <a:lnTo>
-                  <a:pt x="2064715" y="411313"/>
+                  <a:pt x="1651772" y="398914"/>
+                </a:lnTo>
+                <a:lnTo>
+                  <a:pt x="2064715" y="419093"/>
                 </a:lnTo>
               </a:path>
             </a:pathLst>
@@ -48192,7 +48192,7 @@
         </p:nvSpPr>
         <p:spPr>
           <a:xfrm>
-            <a:off x="2480767" y="2816185"/>
+            <a:off x="2480767" y="2823965"/>
             <a:ext cx="82296" cy="82296"/>
           </a:xfrm>
           <a:prstGeom prst="roundRect">
@@ -48621,7 +48621,7 @@
                 </a:solidFill>
                 <a:latin typeface="Kanit"/>
               </a:rPr>
-              <a:t>฿142.50 /กก. · S·E coast</a:t>
+              <a:t>฿141.25 /กก. · S·E coast</a:t>
             </a:r>
           </a:p>
         </p:txBody>
@@ -48660,7 +48660,7 @@
                 </a:solidFill>
                 <a:latin typeface="Kanit"/>
               </a:rPr>
-              <a:t>YoY +0.4%</a:t>
+              <a:t>YoY +0.3%</a:t>
             </a:r>
           </a:p>
         </p:txBody>
@@ -48699,7 +48699,7 @@
                 </a:solidFill>
                 <a:latin typeface="Kanit"/>
               </a:rPr>
-              <a:t>6m +8.0%</a:t>
+              <a:t>6m +6.7%</a:t>
             </a:r>
           </a:p>
         </p:txBody>
@@ -48776,7 +48776,7 @@
                   <a:pt x="412943" y="457200"/>
                 </a:lnTo>
                 <a:lnTo>
-                  <a:pt x="825886" y="420235"/>
+                  <a:pt x="825886" y="425604"/>
                 </a:lnTo>
                 <a:lnTo>
                   <a:pt x="1238829" y="169952"/>
@@ -48785,7 +48785,7 @@
                   <a:pt x="1651772" y="0"/>
                 </a:lnTo>
                 <a:lnTo>
-                  <a:pt x="2064715" y="12596"/>
+                  <a:pt x="2064715" y="38409"/>
                 </a:lnTo>
               </a:path>
             </a:pathLst>
@@ -48828,7 +48828,7 @@
         </p:nvSpPr>
         <p:spPr>
           <a:xfrm>
-            <a:off x="7085685" y="2417468"/>
+            <a:off x="7085685" y="2443281"/>
             <a:ext cx="82296" cy="82296"/>
           </a:xfrm>
           <a:prstGeom prst="roundRect">
@@ -48978,7 +48978,7 @@
                 </a:solidFill>
                 <a:latin typeface="Kanit"/>
               </a:rPr>
-              <a:t>YoY +5.1%</a:t>
+              <a:t>YoY +5.4%</a:t>
             </a:r>
           </a:p>
         </p:txBody>
@@ -49017,7 +49017,7 @@
                 </a:solidFill>
                 <a:latin typeface="Kanit"/>
               </a:rPr>
-              <a:t>6m +0.0%</a:t>
+              <a:t>6m +0.2%</a:t>
             </a:r>
           </a:p>
         </p:txBody>
@@ -49088,7 +49088,7 @@
             <a:pathLst>
               <a:path w="2064715" h="457200">
                 <a:moveTo>
-                  <a:pt x="0" y="122251"/>
+                  <a:pt x="0" y="119269"/>
                 </a:moveTo>
                 <a:lnTo>
                   <a:pt x="412943" y="309106"/>
@@ -49296,7 +49296,7 @@
                 </a:solidFill>
                 <a:latin typeface="Kanit"/>
               </a:rPr>
-              <a:t>YoY +7.1%</a:t>
+              <a:t>YoY +7.6%</a:t>
             </a:r>
           </a:p>
         </p:txBody>
@@ -49536,7 +49536,7 @@
                 </a:solidFill>
                 <a:latin typeface="Kanit"/>
               </a:rPr>
-              <a:t>Rice  ข้าวหอมมะลิ</a:t>
+              <a:t>Maize  ข้าวโพดเลี้ยงสัตว์</a:t>
             </a:r>
           </a:p>
         </p:txBody>
@@ -49575,7 +49575,7 @@
                 </a:solidFill>
                 <a:latin typeface="Kanit"/>
               </a:rPr>
-              <a:t>฿17,494 /ตัน · Isan·N·C</a:t>
+              <a:t>฿8.92 /กก. · North</a:t>
             </a:r>
           </a:p>
         </p:txBody>
@@ -49614,7 +49614,7 @@
                 </a:solidFill>
                 <a:latin typeface="Kanit"/>
               </a:rPr>
-              <a:t>YoY +12.8%</a:t>
+              <a:t>YoY +12.1%</a:t>
             </a:r>
           </a:p>
         </p:txBody>
@@ -49628,6 +49628,285 @@
         <p:spPr>
           <a:xfrm>
             <a:off x="1489557" y="3351275"/>
+            <a:ext cx="1078077" cy="134112"/>
+          </a:xfrm>
+          <a:prstGeom prst="rect">
+            <a:avLst/>
+          </a:prstGeom>
+          <a:noFill/>
+        </p:spPr>
+        <p:txBody>
+          <a:bodyPr wrap="square" lIns="0" rIns="0" tIns="0" bIns="0" anchor="t">
+            <a:noAutofit/>
+          </a:bodyPr>
+          <a:lstStyle/>
+          <a:p>
+            <a:pPr algn="l">
+              <a:lnSpc>
+                <a:spcPts val="1056"/>
+              </a:lnSpc>
+            </a:pPr>
+            <a:r>
+              <a:rPr sz="800" b="1">
+                <a:solidFill>
+                  <a:srgbClr val="CC0000"/>
+                </a:solidFill>
+                <a:latin typeface="Kanit"/>
+              </a:rPr>
+              <a:t>6m −2.0%</a:t>
+            </a:r>
+          </a:p>
+        </p:txBody>
+      </p:sp>
+      <p:sp>
+        <p:nvSpPr>
+          <p:cNvPr id="54" name="Rectangle 53"/>
+          <p:cNvSpPr/>
+          <p:nvPr/>
+        </p:nvSpPr>
+        <p:spPr>
+          <a:xfrm>
+            <a:off x="411480" y="3506724"/>
+            <a:ext cx="2156155" cy="548640"/>
+          </a:xfrm>
+          <a:prstGeom prst="rect">
+            <a:avLst/>
+          </a:prstGeom>
+          <a:solidFill>
+            <a:srgbClr val="FBFCFE"/>
+          </a:solidFill>
+          <a:ln w="9525">
+            <a:solidFill>
+              <a:srgbClr val="D9DEE9"/>
+            </a:solidFill>
+          </a:ln>
+          <a:effectLst/>
+        </p:spPr>
+        <p:style>
+          <a:lnRef idx="1">
+            <a:schemeClr val="accent1"/>
+          </a:lnRef>
+          <a:fillRef idx="3">
+            <a:schemeClr val="accent1"/>
+          </a:fillRef>
+          <a:effectRef idx="2">
+            <a:schemeClr val="accent1"/>
+          </a:effectRef>
+          <a:fontRef idx="minor">
+            <a:schemeClr val="lt1"/>
+          </a:fontRef>
+        </p:style>
+        <p:txBody>
+          <a:bodyPr rtlCol="0" anchor="ctr" wrap="none"/>
+          <a:lstStyle/>
+          <a:p>
+            <a:pPr algn="ctr"/>
+          </a:p>
+        </p:txBody>
+      </p:sp>
+      <p:sp>
+        <p:nvSpPr>
+          <p:cNvPr id="55" name="Freeform 54"/>
+          <p:cNvSpPr/>
+          <p:nvPr/>
+        </p:nvSpPr>
+        <p:spPr>
+          <a:xfrm>
+            <a:off x="457200" y="3552444"/>
+            <a:ext cx="2064715" cy="457200"/>
+          </a:xfrm>
+          <a:custGeom>
+            <a:avLst/>
+            <a:gdLst/>
+            <a:ahLst/>
+            <a:cxnLst/>
+            <a:rect l="l" t="t" r="r" b="b"/>
+            <a:pathLst>
+              <a:path w="2064715" h="457200">
+                <a:moveTo>
+                  <a:pt x="0" y="321155"/>
+                </a:moveTo>
+                <a:lnTo>
+                  <a:pt x="412943" y="80288"/>
+                </a:lnTo>
+                <a:lnTo>
+                  <a:pt x="825886" y="0"/>
+                </a:lnTo>
+                <a:lnTo>
+                  <a:pt x="1238829" y="53525"/>
+                </a:lnTo>
+                <a:lnTo>
+                  <a:pt x="1651772" y="274319"/>
+                </a:lnTo>
+                <a:lnTo>
+                  <a:pt x="2064715" y="457200"/>
+                </a:lnTo>
+              </a:path>
+            </a:pathLst>
+          </a:custGeom>
+          <a:noFill/>
+          <a:ln w="20320">
+            <a:solidFill>
+              <a:srgbClr val="CC0000"/>
+            </a:solidFill>
+          </a:ln>
+          <a:effectLst/>
+        </p:spPr>
+        <p:style>
+          <a:lnRef idx="1">
+            <a:schemeClr val="accent1"/>
+          </a:lnRef>
+          <a:fillRef idx="3">
+            <a:schemeClr val="accent1"/>
+          </a:fillRef>
+          <a:effectRef idx="2">
+            <a:schemeClr val="accent1"/>
+          </a:effectRef>
+          <a:fontRef idx="minor">
+            <a:schemeClr val="lt1"/>
+          </a:fontRef>
+        </p:style>
+        <p:txBody>
+          <a:bodyPr rtlCol="0" anchor="ctr"/>
+          <a:lstStyle/>
+          <a:p>
+            <a:pPr algn="ctr"/>
+          </a:p>
+        </p:txBody>
+      </p:sp>
+      <p:sp>
+        <p:nvSpPr>
+          <p:cNvPr id="56" name="Rounded Rectangle 55"/>
+          <p:cNvSpPr/>
+          <p:nvPr/>
+        </p:nvSpPr>
+        <p:spPr>
+          <a:xfrm>
+            <a:off x="2480767" y="3968496"/>
+            <a:ext cx="82296" cy="82296"/>
+          </a:xfrm>
+          <a:prstGeom prst="roundRect">
+            <a:avLst>
+              <a:gd name="adj" fmla="val 50000"/>
+            </a:avLst>
+          </a:prstGeom>
+          <a:solidFill>
+            <a:srgbClr val="CC0000"/>
+          </a:solidFill>
+          <a:ln>
+            <a:noFill/>
+          </a:ln>
+          <a:effectLst/>
+        </p:spPr>
+        <p:style>
+          <a:lnRef idx="1">
+            <a:schemeClr val="accent1"/>
+          </a:lnRef>
+          <a:fillRef idx="3">
+            <a:schemeClr val="accent1"/>
+          </a:fillRef>
+          <a:effectRef idx="2">
+            <a:schemeClr val="accent1"/>
+          </a:effectRef>
+          <a:fontRef idx="minor">
+            <a:schemeClr val="lt1"/>
+          </a:fontRef>
+        </p:style>
+        <p:txBody>
+          <a:bodyPr rtlCol="0" anchor="ctr" wrap="none"/>
+          <a:lstStyle/>
+          <a:p>
+            <a:pPr algn="ctr"/>
+          </a:p>
+        </p:txBody>
+      </p:sp>
+      <p:sp>
+        <p:nvSpPr>
+          <p:cNvPr id="57" name="TextBox 56"/>
+          <p:cNvSpPr txBox="1"/>
+          <p:nvPr/>
+        </p:nvSpPr>
+        <p:spPr>
+          <a:xfrm>
+            <a:off x="2713939" y="3076956"/>
+            <a:ext cx="2156155" cy="150876"/>
+          </a:xfrm>
+          <a:prstGeom prst="rect">
+            <a:avLst/>
+          </a:prstGeom>
+          <a:noFill/>
+        </p:spPr>
+        <p:txBody>
+          <a:bodyPr wrap="square" lIns="0" rIns="0" tIns="0" bIns="0" anchor="t">
+            <a:noAutofit/>
+          </a:bodyPr>
+          <a:lstStyle/>
+          <a:p>
+            <a:pPr algn="l">
+              <a:lnSpc>
+                <a:spcPts val="1188"/>
+              </a:lnSpc>
+            </a:pPr>
+            <a:r>
+              <a:rPr sz="900" b="1">
+                <a:solidFill>
+                  <a:srgbClr val="1E2F5C"/>
+                </a:solidFill>
+                <a:latin typeface="Kanit"/>
+              </a:rPr>
+              <a:t>Rice  ข้าวหอมมะลิ</a:t>
+            </a:r>
+          </a:p>
+        </p:txBody>
+      </p:sp>
+      <p:sp>
+        <p:nvSpPr>
+          <p:cNvPr id="58" name="TextBox 57"/>
+          <p:cNvSpPr txBox="1"/>
+          <p:nvPr/>
+        </p:nvSpPr>
+        <p:spPr>
+          <a:xfrm>
+            <a:off x="2713939" y="3218687"/>
+            <a:ext cx="2156155" cy="125730"/>
+          </a:xfrm>
+          <a:prstGeom prst="rect">
+            <a:avLst/>
+          </a:prstGeom>
+          <a:noFill/>
+        </p:spPr>
+        <p:txBody>
+          <a:bodyPr wrap="square" lIns="0" rIns="0" tIns="0" bIns="0" anchor="t">
+            <a:noAutofit/>
+          </a:bodyPr>
+          <a:lstStyle/>
+          <a:p>
+            <a:pPr algn="l">
+              <a:lnSpc>
+                <a:spcPts val="990"/>
+              </a:lnSpc>
+            </a:pPr>
+            <a:r>
+              <a:rPr sz="750" b="0">
+                <a:solidFill>
+                  <a:srgbClr val="606060"/>
+                </a:solidFill>
+                <a:latin typeface="Kanit"/>
+              </a:rPr>
+              <a:t>฿17,443 /ตัน · Isan·N·C</a:t>
+            </a:r>
+          </a:p>
+        </p:txBody>
+      </p:sp>
+      <p:sp>
+        <p:nvSpPr>
+          <p:cNvPr id="59" name="TextBox 58"/>
+          <p:cNvSpPr txBox="1"/>
+          <p:nvPr/>
+        </p:nvSpPr>
+        <p:spPr>
+          <a:xfrm>
+            <a:off x="2713939" y="3351275"/>
             <a:ext cx="1078077" cy="134112"/>
           </a:xfrm>
           <a:prstGeom prst="rect">
@@ -49653,260 +49932,20 @@
                 </a:solidFill>
                 <a:latin typeface="Kanit"/>
               </a:rPr>
-              <a:t>6m +4.3%</a:t>
+              <a:t>YoY +12.4%</a:t>
             </a:r>
           </a:p>
         </p:txBody>
       </p:sp>
       <p:sp>
         <p:nvSpPr>
-          <p:cNvPr id="54" name="Rectangle 53"/>
-          <p:cNvSpPr/>
-          <p:nvPr/>
-        </p:nvSpPr>
-        <p:spPr>
-          <a:xfrm>
-            <a:off x="411480" y="3506724"/>
-            <a:ext cx="2156155" cy="548640"/>
-          </a:xfrm>
-          <a:prstGeom prst="rect">
-            <a:avLst/>
-          </a:prstGeom>
-          <a:solidFill>
-            <a:srgbClr val="FBFCFE"/>
-          </a:solidFill>
-          <a:ln w="9525">
-            <a:solidFill>
-              <a:srgbClr val="D9DEE9"/>
-            </a:solidFill>
-          </a:ln>
-          <a:effectLst/>
-        </p:spPr>
-        <p:style>
-          <a:lnRef idx="1">
-            <a:schemeClr val="accent1"/>
-          </a:lnRef>
-          <a:fillRef idx="3">
-            <a:schemeClr val="accent1"/>
-          </a:fillRef>
-          <a:effectRef idx="2">
-            <a:schemeClr val="accent1"/>
-          </a:effectRef>
-          <a:fontRef idx="minor">
-            <a:schemeClr val="lt1"/>
-          </a:fontRef>
-        </p:style>
-        <p:txBody>
-          <a:bodyPr rtlCol="0" anchor="ctr" wrap="none"/>
-          <a:lstStyle/>
-          <a:p>
-            <a:pPr algn="ctr"/>
-          </a:p>
-        </p:txBody>
-      </p:sp>
-      <p:sp>
-        <p:nvSpPr>
-          <p:cNvPr id="55" name="Freeform 54"/>
-          <p:cNvSpPr/>
-          <p:nvPr/>
-        </p:nvSpPr>
-        <p:spPr>
-          <a:xfrm>
-            <a:off x="457200" y="3552444"/>
-            <a:ext cx="2064715" cy="457200"/>
-          </a:xfrm>
-          <a:custGeom>
-            <a:avLst/>
-            <a:gdLst/>
-            <a:ahLst/>
-            <a:cxnLst/>
-            <a:rect l="l" t="t" r="r" b="b"/>
-            <a:pathLst>
-              <a:path w="2064715" h="457200">
-                <a:moveTo>
-                  <a:pt x="0" y="457200"/>
-                </a:moveTo>
-                <a:lnTo>
-                  <a:pt x="412943" y="212701"/>
-                </a:lnTo>
-                <a:lnTo>
-                  <a:pt x="825886" y="41154"/>
-                </a:lnTo>
-                <a:lnTo>
-                  <a:pt x="1238829" y="30357"/>
-                </a:lnTo>
-                <a:lnTo>
-                  <a:pt x="1651772" y="0"/>
-                </a:lnTo>
-                <a:lnTo>
-                  <a:pt x="2064715" y="163560"/>
-                </a:lnTo>
-              </a:path>
-            </a:pathLst>
-          </a:custGeom>
-          <a:noFill/>
-          <a:ln w="20320">
-            <a:solidFill>
-              <a:srgbClr val="15795F"/>
-            </a:solidFill>
-          </a:ln>
-          <a:effectLst/>
-        </p:spPr>
-        <p:style>
-          <a:lnRef idx="1">
-            <a:schemeClr val="accent1"/>
-          </a:lnRef>
-          <a:fillRef idx="3">
-            <a:schemeClr val="accent1"/>
-          </a:fillRef>
-          <a:effectRef idx="2">
-            <a:schemeClr val="accent1"/>
-          </a:effectRef>
-          <a:fontRef idx="minor">
-            <a:schemeClr val="lt1"/>
-          </a:fontRef>
-        </p:style>
-        <p:txBody>
-          <a:bodyPr rtlCol="0" anchor="ctr"/>
-          <a:lstStyle/>
-          <a:p>
-            <a:pPr algn="ctr"/>
-          </a:p>
-        </p:txBody>
-      </p:sp>
-      <p:sp>
-        <p:nvSpPr>
-          <p:cNvPr id="56" name="Rounded Rectangle 55"/>
-          <p:cNvSpPr/>
-          <p:nvPr/>
-        </p:nvSpPr>
-        <p:spPr>
-          <a:xfrm>
-            <a:off x="2480767" y="3674856"/>
-            <a:ext cx="82296" cy="82296"/>
-          </a:xfrm>
-          <a:prstGeom prst="roundRect">
-            <a:avLst>
-              <a:gd name="adj" fmla="val 50000"/>
-            </a:avLst>
-          </a:prstGeom>
-          <a:solidFill>
-            <a:srgbClr val="15795F"/>
-          </a:solidFill>
-          <a:ln>
-            <a:noFill/>
-          </a:ln>
-          <a:effectLst/>
-        </p:spPr>
-        <p:style>
-          <a:lnRef idx="1">
-            <a:schemeClr val="accent1"/>
-          </a:lnRef>
-          <a:fillRef idx="3">
-            <a:schemeClr val="accent1"/>
-          </a:fillRef>
-          <a:effectRef idx="2">
-            <a:schemeClr val="accent1"/>
-          </a:effectRef>
-          <a:fontRef idx="minor">
-            <a:schemeClr val="lt1"/>
-          </a:fontRef>
-        </p:style>
-        <p:txBody>
-          <a:bodyPr rtlCol="0" anchor="ctr" wrap="none"/>
-          <a:lstStyle/>
-          <a:p>
-            <a:pPr algn="ctr"/>
-          </a:p>
-        </p:txBody>
-      </p:sp>
-      <p:sp>
-        <p:nvSpPr>
-          <p:cNvPr id="57" name="TextBox 56"/>
+          <p:cNvPr id="60" name="TextBox 59"/>
           <p:cNvSpPr txBox="1"/>
           <p:nvPr/>
         </p:nvSpPr>
         <p:spPr>
           <a:xfrm>
-            <a:off x="2713939" y="3076956"/>
-            <a:ext cx="2156155" cy="150876"/>
-          </a:xfrm>
-          <a:prstGeom prst="rect">
-            <a:avLst/>
-          </a:prstGeom>
-          <a:noFill/>
-        </p:spPr>
-        <p:txBody>
-          <a:bodyPr wrap="square" lIns="0" rIns="0" tIns="0" bIns="0" anchor="t">
-            <a:noAutofit/>
-          </a:bodyPr>
-          <a:lstStyle/>
-          <a:p>
-            <a:pPr algn="l">
-              <a:lnSpc>
-                <a:spcPts val="1188"/>
-              </a:lnSpc>
-            </a:pPr>
-            <a:r>
-              <a:rPr sz="900" b="1">
-                <a:solidFill>
-                  <a:srgbClr val="1E2F5C"/>
-                </a:solidFill>
-                <a:latin typeface="Kanit"/>
-              </a:rPr>
-              <a:t>Maize  ข้าวโพดเลี้ยงสัตว์</a:t>
-            </a:r>
-          </a:p>
-        </p:txBody>
-      </p:sp>
-      <p:sp>
-        <p:nvSpPr>
-          <p:cNvPr id="58" name="TextBox 57"/>
-          <p:cNvSpPr txBox="1"/>
-          <p:nvPr/>
-        </p:nvSpPr>
-        <p:spPr>
-          <a:xfrm>
-            <a:off x="2713939" y="3218687"/>
-            <a:ext cx="2156155" cy="125730"/>
-          </a:xfrm>
-          <a:prstGeom prst="rect">
-            <a:avLst/>
-          </a:prstGeom>
-          <a:noFill/>
-        </p:spPr>
-        <p:txBody>
-          <a:bodyPr wrap="square" lIns="0" rIns="0" tIns="0" bIns="0" anchor="t">
-            <a:noAutofit/>
-          </a:bodyPr>
-          <a:lstStyle/>
-          <a:p>
-            <a:pPr algn="l">
-              <a:lnSpc>
-                <a:spcPts val="990"/>
-              </a:lnSpc>
-            </a:pPr>
-            <a:r>
-              <a:rPr sz="750" b="0">
-                <a:solidFill>
-                  <a:srgbClr val="606060"/>
-                </a:solidFill>
-                <a:latin typeface="Kanit"/>
-              </a:rPr>
-              <a:t>฿9.05 /กก. · North</a:t>
-            </a:r>
-          </a:p>
-        </p:txBody>
-      </p:sp>
-      <p:sp>
-        <p:nvSpPr>
-          <p:cNvPr id="59" name="TextBox 58"/>
-          <p:cNvSpPr txBox="1"/>
-          <p:nvPr/>
-        </p:nvSpPr>
-        <p:spPr>
-          <a:xfrm>
-            <a:off x="2713939" y="3351275"/>
+            <a:off x="3792016" y="3351275"/>
             <a:ext cx="1078077" cy="134112"/>
           </a:xfrm>
           <a:prstGeom prst="rect">
@@ -49932,46 +49971,7 @@
                 </a:solidFill>
                 <a:latin typeface="Kanit"/>
               </a:rPr>
-              <a:t>YoY +13.6%</a:t>
-            </a:r>
-          </a:p>
-        </p:txBody>
-      </p:sp>
-      <p:sp>
-        <p:nvSpPr>
-          <p:cNvPr id="60" name="TextBox 59"/>
-          <p:cNvSpPr txBox="1"/>
-          <p:nvPr/>
-        </p:nvSpPr>
-        <p:spPr>
-          <a:xfrm>
-            <a:off x="3792016" y="3351275"/>
-            <a:ext cx="1078077" cy="134112"/>
-          </a:xfrm>
-          <a:prstGeom prst="rect">
-            <a:avLst/>
-          </a:prstGeom>
-          <a:noFill/>
-        </p:spPr>
-        <p:txBody>
-          <a:bodyPr wrap="square" lIns="0" rIns="0" tIns="0" bIns="0" anchor="t">
-            <a:noAutofit/>
-          </a:bodyPr>
-          <a:lstStyle/>
-          <a:p>
-            <a:pPr algn="l">
-              <a:lnSpc>
-                <a:spcPts val="1056"/>
-              </a:lnSpc>
-            </a:pPr>
-            <a:r>
-              <a:rPr sz="800" b="1">
-                <a:solidFill>
-                  <a:srgbClr val="CC0000"/>
-                </a:solidFill>
-                <a:latin typeface="Kanit"/>
-              </a:rPr>
-              <a:t>6m −0.3%</a:t>
+              <a:t>6m +4.0%</a:t>
             </a:r>
           </a:p>
         </p:txBody>
@@ -50042,22 +50042,22 @@
             <a:pathLst>
               <a:path w="2064715" h="457200">
                 <a:moveTo>
-                  <a:pt x="0" y="342301"/>
+                  <a:pt x="0" y="457200"/>
                 </a:moveTo>
                 <a:lnTo>
-                  <a:pt x="412943" y="83780"/>
-                </a:lnTo>
-                <a:lnTo>
-                  <a:pt x="825886" y="0"/>
-                </a:lnTo>
-                <a:lnTo>
-                  <a:pt x="1238829" y="47874"/>
-                </a:lnTo>
-                <a:lnTo>
-                  <a:pt x="1651772" y="292033"/>
-                </a:lnTo>
-                <a:lnTo>
-                  <a:pt x="2064715" y="457200"/>
+                  <a:pt x="412943" y="237319"/>
+                </a:lnTo>
+                <a:lnTo>
+                  <a:pt x="825886" y="75982"/>
+                </a:lnTo>
+                <a:lnTo>
+                  <a:pt x="1238829" y="44763"/>
+                </a:lnTo>
+                <a:lnTo>
+                  <a:pt x="1651772" y="0"/>
+                </a:lnTo>
+                <a:lnTo>
+                  <a:pt x="2064715" y="211262"/>
                 </a:lnTo>
               </a:path>
             </a:pathLst>
@@ -50065,7 +50065,7 @@
           <a:noFill/>
           <a:ln w="20320">
             <a:solidFill>
-              <a:srgbClr val="CC0000"/>
+              <a:srgbClr val="15795F"/>
             </a:solidFill>
           </a:ln>
           <a:effectLst/>
@@ -50100,7 +50100,7 @@
         </p:nvSpPr>
         <p:spPr>
           <a:xfrm>
-            <a:off x="4783226" y="3968496"/>
+            <a:off x="4783226" y="3722558"/>
             <a:ext cx="82296" cy="82296"/>
           </a:xfrm>
           <a:prstGeom prst="roundRect">
@@ -50109,7 +50109,7 @@
             </a:avLst>
           </a:prstGeom>
           <a:solidFill>
-            <a:srgbClr val="CC0000"/>
+            <a:srgbClr val="15795F"/>
           </a:solidFill>
           <a:ln>
             <a:noFill/>
@@ -50211,7 +50211,7 @@
                 </a:solidFill>
                 <a:latin typeface="Kanit"/>
               </a:rPr>
-              <a:t>฿8.38 /กก. · South</a:t>
+              <a:t>฿8.41 /กก. · South</a:t>
             </a:r>
           </a:p>
         </p:txBody>
@@ -50250,7 +50250,7 @@
                 </a:solidFill>
                 <a:latin typeface="Kanit"/>
               </a:rPr>
-              <a:t>YoY +23.4%</a:t>
+              <a:t>YoY +23.6%</a:t>
             </a:r>
           </a:p>
         </p:txBody>
@@ -50289,7 +50289,7 @@
                 </a:solidFill>
                 <a:latin typeface="Kanit"/>
               </a:rPr>
-              <a:t>6m +16.2%</a:t>
+              <a:t>6m +16.6%</a:t>
             </a:r>
           </a:p>
         </p:txBody>
@@ -50366,7 +50366,7 @@
                   <a:pt x="412943" y="457200"/>
                 </a:lnTo>
                 <a:lnTo>
-                  <a:pt x="825886" y="293166"/>
+                  <a:pt x="825886" y="296656"/>
                 </a:lnTo>
                 <a:lnTo>
                   <a:pt x="1238829" y="76781"/>
@@ -50375,7 +50375,7 @@
                   <a:pt x="1651772" y="0"/>
                 </a:lnTo>
                 <a:lnTo>
-                  <a:pt x="2064715" y="45370"/>
+                  <a:pt x="2064715" y="34900"/>
                 </a:lnTo>
               </a:path>
             </a:pathLst>
@@ -50418,7 +50418,7 @@
         </p:nvSpPr>
         <p:spPr>
           <a:xfrm>
-            <a:off x="7085685" y="3556666"/>
+            <a:off x="7085685" y="3546196"/>
             <a:ext cx="82296" cy="82296"/>
           </a:xfrm>
           <a:prstGeom prst="roundRect">
@@ -50529,7 +50529,7 @@
                 </a:solidFill>
                 <a:latin typeface="Kanit"/>
               </a:rPr>
-              <a:t>฿74.67 /กก. · C·W·E</a:t>
+              <a:t>฿74.74 /กก. · C·W·E</a:t>
             </a:r>
           </a:p>
         </p:txBody>
@@ -50568,7 +50568,7 @@
                 </a:solidFill>
                 <a:latin typeface="Kanit"/>
               </a:rPr>
-              <a:t>YoY +24.2%</a:t>
+              <a:t>YoY +26.9%</a:t>
             </a:r>
           </a:p>
         </p:txBody>
@@ -50607,7 +50607,7 @@
                 </a:solidFill>
                 <a:latin typeface="Kanit"/>
               </a:rPr>
-              <a:t>6m +18.4%</a:t>
+              <a:t>6m +18.5%</a:t>
             </a:r>
           </a:p>
         </p:txBody>
@@ -50678,19 +50678,19 @@
             <a:pathLst>
               <a:path w="2064715" h="457200">
                 <a:moveTo>
-                  <a:pt x="0" y="220046"/>
+                  <a:pt x="0" y="223049"/>
                 </a:moveTo>
                 <a:lnTo>
                   <a:pt x="412943" y="457200"/>
                 </a:lnTo>
                 <a:lnTo>
-                  <a:pt x="825886" y="343487"/>
-                </a:lnTo>
-                <a:lnTo>
-                  <a:pt x="1238829" y="264994"/>
-                </a:lnTo>
-                <a:lnTo>
-                  <a:pt x="1651772" y="111364"/>
+                  <a:pt x="825886" y="346852"/>
+                </a:lnTo>
+                <a:lnTo>
+                  <a:pt x="1238829" y="262074"/>
+                </a:lnTo>
+                <a:lnTo>
+                  <a:pt x="1651772" y="114047"/>
                 </a:lnTo>
                 <a:lnTo>
                   <a:pt x="2064715" y="0"/>
@@ -50847,7 +50847,7 @@
                 </a:solidFill>
                 <a:latin typeface="Kanit"/>
               </a:rPr>
-              <a:t>฿80.62 /กก. · S·E</a:t>
+              <a:t>฿81.03 /กก. · S·E</a:t>
             </a:r>
           </a:p>
         </p:txBody>
@@ -50925,7 +50925,7 @@
                 </a:solidFill>
                 <a:latin typeface="Kanit"/>
               </a:rPr>
-              <a:t>6m +18.5%</a:t>
+              <a:t>6m +18.9%</a:t>
             </a:r>
           </a:p>
         </p:txBody>
@@ -51005,13 +51005,13 @@
                   <a:pt x="825886" y="0"/>
                 </a:lnTo>
                 <a:lnTo>
-                  <a:pt x="1238829" y="66071"/>
+                  <a:pt x="1238829" y="62808"/>
                 </a:lnTo>
                 <a:lnTo>
                   <a:pt x="1651772" y="195360"/>
                 </a:lnTo>
                 <a:lnTo>
-                  <a:pt x="2064715" y="219831"/>
+                  <a:pt x="2064715" y="203109"/>
                 </a:lnTo>
               </a:path>
             </a:pathLst>
@@ -51054,7 +51054,7 @@
         </p:nvSpPr>
         <p:spPr>
           <a:xfrm>
-            <a:off x="11690603" y="3731127"/>
+            <a:off x="11690603" y="3714405"/>
             <a:ext cx="82296" cy="82296"/>
           </a:xfrm>
           <a:prstGeom prst="roundRect">
@@ -51165,7 +51165,7 @@
                 </a:solidFill>
                 <a:latin typeface="Kanit"/>
               </a:rPr>
-              <a:t>฿3.92 /กก. · Isan·N·E</a:t>
+              <a:t>฿3.93 /กก. · Isan·N·E</a:t>
             </a:r>
           </a:p>
         </p:txBody>
@@ -51204,7 +51204,7 @@
                 </a:solidFill>
                 <a:latin typeface="Kanit"/>
               </a:rPr>
-              <a:t>YoY +76.3%</a:t>
+              <a:t>YoY +77.2%</a:t>
             </a:r>
           </a:p>
         </p:txBody>
@@ -51243,7 +51243,7 @@
                 </a:solidFill>
                 <a:latin typeface="Kanit"/>
               </a:rPr>
-              <a:t>6m +47.4%</a:t>
+              <a:t>6m +48.3%</a:t>
             </a:r>
           </a:p>
         </p:txBody>
@@ -51317,16 +51317,16 @@
                   <a:pt x="0" y="457200"/>
                 </a:moveTo>
                 <a:lnTo>
-                  <a:pt x="412943" y="366666"/>
-                </a:lnTo>
-                <a:lnTo>
-                  <a:pt x="825886" y="253498"/>
-                </a:lnTo>
-                <a:lnTo>
-                  <a:pt x="1238829" y="217284"/>
-                </a:lnTo>
-                <a:lnTo>
-                  <a:pt x="1651772" y="49795"/>
+                  <a:pt x="412943" y="367553"/>
+                </a:lnTo>
+                <a:lnTo>
+                  <a:pt x="825886" y="255495"/>
+                </a:lnTo>
+                <a:lnTo>
+                  <a:pt x="1238829" y="210671"/>
+                </a:lnTo>
+                <a:lnTo>
+                  <a:pt x="1651772" y="49306"/>
                 </a:lnTo>
                 <a:lnTo>
                   <a:pt x="2064715" y="0"/>
@@ -51483,7 +51483,7 @@
                 </a:solidFill>
                 <a:latin typeface="Kanit"/>
               </a:rPr>
-              <a:t>฿250.00 /ร้อยผล · C·W</a:t>
+              <a:t>฿277.78 /ร้อยผล · C·W</a:t>
             </a:r>
           </a:p>
         </p:txBody>
@@ -51522,7 +51522,7 @@
                 </a:solidFill>
                 <a:latin typeface="Kanit"/>
               </a:rPr>
-              <a:t>YoY +114.6%</a:t>
+              <a:t>YoY +198.1%</a:t>
             </a:r>
           </a:p>
         </p:txBody>
@@ -51561,7 +51561,7 @@
                 </a:solidFill>
                 <a:latin typeface="Kanit"/>
               </a:rPr>
-              <a:t>6m −45.0%</a:t>
+              <a:t>6m −38.9%</a:t>
             </a:r>
           </a:p>
         </p:txBody>
@@ -51647,7 +51647,7 @@
                   <a:pt x="1651772" y="413314"/>
                 </a:lnTo>
                 <a:lnTo>
-                  <a:pt x="2064715" y="348309"/>
+                  <a:pt x="2064715" y="329975"/>
                 </a:lnTo>
               </a:path>
             </a:pathLst>
@@ -51690,7 +51690,7 @@
         </p:nvSpPr>
         <p:spPr>
           <a:xfrm>
-            <a:off x="4783226" y="4966028"/>
+            <a:off x="4783226" y="4947694"/>
             <a:ext cx="82296" cy="82296"/>
           </a:xfrm>
           <a:prstGeom prst="roundRect">
@@ -51886,7 +51886,7 @@
                 </a:solidFill>
                 <a:latin typeface="Kanit"/>
               </a:rPr>
-              <a:t>Farm-gate prices MEASURED — NABC daily quotes, monthly means, in baht as published (no currency conversion); newest quote 2026-09-09, history vintage 2026-09-05. Farm gate (ราคาที่เกษตรกรขายได้) is what the grower is paid at first sale, before trading, milling or transport take a cut — not the world index and not a supermarket price. Belts are an ESTIMATED read of where each commodity is produced, and they overlap. Sugar is OCSB's announced season price, one point a year, so it has no six-month move to show.</a:t>
+              <a:t>Farm-gate prices MEASURED — NABC daily quotes, monthly means, in baht as published (no currency conversion); newest quote 2026-09-11, history vintage 2026-09-11. Farm gate (ราคาที่เกษตรกรขายได้) is what the grower is paid at first sale, before trading, milling or transport take a cut — not the world index and not a supermarket price. Belts are an ESTIMATED read of where each commodity is produced, and they overlap. Sugar is OCSB's announced season price, one point a year, so it has no six-month move to show.</a:t>
             </a:r>
           </a:p>
         </p:txBody>

--- a/docs/decks/mcom-2026-08-05-macro.pptx
+++ b/docs/decks/mcom-2026-08-05-macro.pptx
@@ -6240,7 +6240,7 @@
                 </a:solidFill>
                 <a:latin typeface="Kanit"/>
               </a:rPr>
-              <a:t>144</a:t>
+              <a:t>152</a:t>
             </a:r>
           </a:p>
         </p:txBody>
@@ -6279,7 +6279,7 @@
                 </a:solidFill>
                 <a:latin typeface="Kanit"/>
               </a:rPr>
-              <a:t>of 788 (18.3%) · live · 2026-09-11</a:t>
+              <a:t>of 788 (19.3%) · live · 2026-09-11</a:t>
             </a:r>
           </a:p>
         </p:txBody>
@@ -6405,7 +6405,7 @@
                 </a:solidFill>
                 <a:latin typeface="Kanit"/>
               </a:rPr>
-              <a:t>51</a:t>
+              <a:t>50</a:t>
             </a:r>
           </a:p>
         </p:txBody>
@@ -7882,7 +7882,7 @@
                           </a:solidFill>
                           <a:latin typeface="Kanit"/>
                         </a:rPr>
-                        <a:t>สมุทรปราการ</a:t>
+                        <a:t>สกลนคร</a:t>
                       </a:r>
                     </a:p>
                   </a:txBody>
@@ -7905,7 +7905,7 @@
                           </a:solidFill>
                           <a:latin typeface="Kanit"/>
                         </a:rPr>
-                        <a:t>16</a:t>
+                        <a:t>37</a:t>
                       </a:r>
                     </a:p>
                   </a:txBody>
@@ -7928,7 +7928,7 @@
                           </a:solidFill>
                           <a:latin typeface="Kanit"/>
                         </a:rPr>
-                        <a:t>95</a:t>
+                        <a:t>12</a:t>
                       </a:r>
                     </a:p>
                   </a:txBody>
@@ -7947,11 +7947,11 @@
                       <a:r>
                         <a:rPr sz="900" b="1">
                           <a:solidFill>
-                            <a:srgbClr val="F5C242"/>
-                          </a:solidFill>
-                          <a:latin typeface="Kanit"/>
-                        </a:rPr>
-                        <a:t>62.5%</a:t>
+                            <a:srgbClr val="606060"/>
+                          </a:solidFill>
+                          <a:latin typeface="Kanit"/>
+                        </a:rPr>
+                        <a:t>0.0%</a:t>
                       </a:r>
                     </a:p>
                   </a:txBody>
@@ -7974,7 +7974,7 @@
                           </a:solidFill>
                           <a:latin typeface="Kanit"/>
                         </a:rPr>
-                        <a:t>4/4</a:t>
+                        <a:t>7/12</a:t>
                       </a:r>
                     </a:p>
                   </a:txBody>
@@ -8022,7 +8022,7 @@
                           </a:solidFill>
                           <a:latin typeface="Kanit"/>
                         </a:rPr>
-                        <a:t>สกลนคร</a:t>
+                        <a:t>ปราจีนบุรี</a:t>
                       </a:r>
                     </a:p>
                   </a:txBody>
@@ -8045,7 +8045,7 @@
                           </a:solidFill>
                           <a:latin typeface="Kanit"/>
                         </a:rPr>
-                        <a:t>38</a:t>
+                        <a:t>35</a:t>
                       </a:r>
                     </a:p>
                   </a:txBody>
@@ -8068,7 +8068,7 @@
                           </a:solidFill>
                           <a:latin typeface="Kanit"/>
                         </a:rPr>
-                        <a:t>7</a:t>
+                        <a:t>98</a:t>
                       </a:r>
                     </a:p>
                   </a:txBody>
@@ -8087,11 +8087,11 @@
                       <a:r>
                         <a:rPr sz="900" b="1">
                           <a:solidFill>
-                            <a:srgbClr val="606060"/>
-                          </a:solidFill>
-                          <a:latin typeface="Kanit"/>
-                        </a:rPr>
-                        <a:t>0.0%</a:t>
+                            <a:srgbClr val="F5C242"/>
+                          </a:solidFill>
+                          <a:latin typeface="Kanit"/>
+                        </a:rPr>
+                        <a:t>54.3%</a:t>
                       </a:r>
                     </a:p>
                   </a:txBody>
@@ -8114,7 +8114,7 @@
                           </a:solidFill>
                           <a:latin typeface="Kanit"/>
                         </a:rPr>
-                        <a:t>7/12</a:t>
+                        <a:t>6/15</a:t>
                       </a:r>
                     </a:p>
                   </a:txBody>
@@ -8133,11 +8133,11 @@
                       <a:r>
                         <a:rPr sz="900" b="1">
                           <a:solidFill>
-                            <a:srgbClr val="CC0000"/>
-                          </a:solidFill>
-                          <a:latin typeface="Kanit"/>
-                        </a:rPr>
-                        <a:t>5</a:t>
+                            <a:srgbClr val="F5C242"/>
+                          </a:solidFill>
+                          <a:latin typeface="Kanit"/>
+                        </a:rPr>
+                        <a:t>4</a:t>
                       </a:r>
                     </a:p>
                   </a:txBody>
@@ -8162,7 +8162,7 @@
                           </a:solidFill>
                           <a:latin typeface="Kanit"/>
                         </a:rPr>
-                        <a:t>สมุทรสงคราม</a:t>
+                        <a:t>สตูล</a:t>
                       </a:r>
                     </a:p>
                   </a:txBody>
@@ -8185,7 +8185,7 @@
                           </a:solidFill>
                           <a:latin typeface="Kanit"/>
                         </a:rPr>
-                        <a:t>6</a:t>
+                        <a:t>37</a:t>
                       </a:r>
                     </a:p>
                   </a:txBody>
@@ -8208,7 +8208,7 @@
                           </a:solidFill>
                           <a:latin typeface="Kanit"/>
                         </a:rPr>
-                        <a:t>74</a:t>
+                        <a:t>83</a:t>
                       </a:r>
                     </a:p>
                   </a:txBody>
@@ -8231,7 +8231,7 @@
                           </a:solidFill>
                           <a:latin typeface="Kanit"/>
                         </a:rPr>
-                        <a:t>50.0%</a:t>
+                        <a:t>43.2%</a:t>
                       </a:r>
                     </a:p>
                   </a:txBody>
@@ -8254,7 +8254,7 @@
                           </a:solidFill>
                           <a:latin typeface="Kanit"/>
                         </a:rPr>
-                        <a:t>1/2</a:t>
+                        <a:t>1/8</a:t>
                       </a:r>
                     </a:p>
                   </a:txBody>
@@ -8302,7 +8302,7 @@
                           </a:solidFill>
                           <a:latin typeface="Kanit"/>
                         </a:rPr>
-                        <a:t>นครปฐม</a:t>
+                        <a:t>นครนายก</a:t>
                       </a:r>
                     </a:p>
                   </a:txBody>
@@ -8325,7 +8325,7 @@
                           </a:solidFill>
                           <a:latin typeface="Kanit"/>
                         </a:rPr>
-                        <a:t>9</a:t>
+                        <a:t>27</a:t>
                       </a:r>
                     </a:p>
                   </a:txBody>
@@ -8348,7 +8348,7 @@
                           </a:solidFill>
                           <a:latin typeface="Kanit"/>
                         </a:rPr>
-                        <a:t>60</a:t>
+                        <a:t>54</a:t>
                       </a:r>
                     </a:p>
                   </a:txBody>
@@ -8371,7 +8371,7 @@
                           </a:solidFill>
                           <a:latin typeface="Kanit"/>
                         </a:rPr>
-                        <a:t>44.4%</a:t>
+                        <a:t>37.0%</a:t>
                       </a:r>
                     </a:p>
                   </a:txBody>
@@ -8394,7 +8394,7 @@
                           </a:solidFill>
                           <a:latin typeface="Kanit"/>
                         </a:rPr>
-                        <a:t>5/7</a:t>
+                        <a:t>2/6</a:t>
                       </a:r>
                     </a:p>
                   </a:txBody>
@@ -8442,7 +8442,7 @@
                           </a:solidFill>
                           <a:latin typeface="Kanit"/>
                         </a:rPr>
-                        <a:t>สตูล</a:t>
+                        <a:t>ฉะเชิงเทรา</a:t>
                       </a:r>
                     </a:p>
                   </a:txBody>
@@ -8465,7 +8465,7 @@
                           </a:solidFill>
                           <a:latin typeface="Kanit"/>
                         </a:rPr>
-                        <a:t>37</a:t>
+                        <a:t>18</a:t>
                       </a:r>
                     </a:p>
                   </a:txBody>
@@ -8488,7 +8488,7 @@
                           </a:solidFill>
                           <a:latin typeface="Kanit"/>
                         </a:rPr>
-                        <a:t>83</a:t>
+                        <a:t>55</a:t>
                       </a:r>
                     </a:p>
                   </a:txBody>
@@ -8511,7 +8511,7 @@
                           </a:solidFill>
                           <a:latin typeface="Kanit"/>
                         </a:rPr>
-                        <a:t>40.5%</a:t>
+                        <a:t>33.3%</a:t>
                       </a:r>
                     </a:p>
                   </a:txBody>
@@ -8534,7 +8534,7 @@
                           </a:solidFill>
                           <a:latin typeface="Kanit"/>
                         </a:rPr>
-                        <a:t>1/8</a:t>
+                        <a:t>2/4</a:t>
                       </a:r>
                     </a:p>
                   </a:txBody>
@@ -8582,7 +8582,7 @@
                           </a:solidFill>
                           <a:latin typeface="Kanit"/>
                         </a:rPr>
-                        <a:t>สมุทรสาคร</a:t>
+                        <a:t>ชัยนาท</a:t>
                       </a:r>
                     </a:p>
                   </a:txBody>
@@ -8605,7 +8605,7 @@
                           </a:solidFill>
                           <a:latin typeface="Kanit"/>
                         </a:rPr>
-                        <a:t>6</a:t>
+                        <a:t>29</a:t>
                       </a:r>
                     </a:p>
                   </a:txBody>
@@ -8628,7 +8628,7 @@
                           </a:solidFill>
                           <a:latin typeface="Kanit"/>
                         </a:rPr>
-                        <a:t>104</a:t>
+                        <a:t>67</a:t>
                       </a:r>
                     </a:p>
                   </a:txBody>
@@ -8651,7 +8651,7 @@
                           </a:solidFill>
                           <a:latin typeface="Kanit"/>
                         </a:rPr>
-                        <a:t>33.3%</a:t>
+                        <a:t>31.0%</a:t>
                       </a:r>
                     </a:p>
                   </a:txBody>
@@ -8674,7 +8674,7 @@
                           </a:solidFill>
                           <a:latin typeface="Kanit"/>
                         </a:rPr>
-                        <a:t>3/3</a:t>
+                        <a:t>1/5</a:t>
                       </a:r>
                     </a:p>
                   </a:txBody>
@@ -37087,7 +37087,7 @@
                 </a:solidFill>
                 <a:latin typeface="Kanit"/>
               </a:rPr>
-              <a:t>338 of 928 districts · 144 of 788 rivers high</a:t>
+              <a:t>338 of 928 districts · 152 of 788 rivers high</a:t>
             </a:r>
           </a:p>
         </p:txBody>
@@ -37859,7 +37859,7 @@
                           </a:solidFill>
                           <a:latin typeface="Kanit"/>
                         </a:rPr>
-                        <a:t>40/155</a:t>
+                        <a:t>41/155</a:t>
                       </a:r>
                     </a:p>
                   </a:txBody>
@@ -38091,7 +38091,7 @@
                           </a:solidFill>
                           <a:latin typeface="Kanit"/>
                         </a:rPr>
-                        <a:t>20/272</a:t>
+                        <a:t>21/272</a:t>
                       </a:r>
                     </a:p>
                   </a:txBody>
@@ -38323,7 +38323,7 @@
                           </a:solidFill>
                           <a:latin typeface="Kanit"/>
                         </a:rPr>
-                        <a:t>28/167</a:t>
+                        <a:t>32/167</a:t>
                       </a:r>
                     </a:p>
                   </a:txBody>
@@ -38787,7 +38787,7 @@
                           </a:solidFill>
                           <a:latin typeface="Kanit"/>
                         </a:rPr>
-                        <a:t>43/143</a:t>
+                        <a:t>45/143</a:t>
                       </a:r>
                     </a:p>
                   </a:txBody>

--- a/docs/decks/mcom-2026-08-05-macro.pptx
+++ b/docs/decks/mcom-2026-08-05-macro.pptx
@@ -6240,7 +6240,7 @@
                 </a:solidFill>
                 <a:latin typeface="Kanit"/>
               </a:rPr>
-              <a:t>152</a:t>
+              <a:t>151</a:t>
             </a:r>
           </a:p>
         </p:txBody>
@@ -6279,7 +6279,7 @@
                 </a:solidFill>
                 <a:latin typeface="Kanit"/>
               </a:rPr>
-              <a:t>of 788 (19.3%) · live · 2026-09-11</a:t>
+              <a:t>of 788 (19.2%) · live · 2026-09-12</a:t>
             </a:r>
           </a:p>
         </p:txBody>
@@ -6405,7 +6405,7 @@
                 </a:solidFill>
                 <a:latin typeface="Kanit"/>
               </a:rPr>
-              <a:t>50</a:t>
+              <a:t>40</a:t>
             </a:r>
           </a:p>
         </p:txBody>
@@ -6444,7 +6444,7 @@
                 </a:solidFill>
                 <a:latin typeface="Kanit"/>
               </a:rPr>
-              <a:t>latest daily reading · 2026-09-11</a:t>
+              <a:t>latest daily reading · 2026-09-12</a:t>
             </a:r>
           </a:p>
         </p:txBody>
@@ -7882,7 +7882,7 @@
                           </a:solidFill>
                           <a:latin typeface="Kanit"/>
                         </a:rPr>
-                        <a:t>สกลนคร</a:t>
+                        <a:t>ลำปาง</a:t>
                       </a:r>
                     </a:p>
                   </a:txBody>
@@ -7905,7 +7905,7 @@
                           </a:solidFill>
                           <a:latin typeface="Kanit"/>
                         </a:rPr>
-                        <a:t>37</a:t>
+                        <a:t>178</a:t>
                       </a:r>
                     </a:p>
                   </a:txBody>
@@ -7928,7 +7928,7 @@
                           </a:solidFill>
                           <a:latin typeface="Kanit"/>
                         </a:rPr>
-                        <a:t>12</a:t>
+                        <a:t>74</a:t>
                       </a:r>
                     </a:p>
                   </a:txBody>
@@ -7947,11 +7947,11 @@
                       <a:r>
                         <a:rPr sz="900" b="1">
                           <a:solidFill>
-                            <a:srgbClr val="606060"/>
-                          </a:solidFill>
-                          <a:latin typeface="Kanit"/>
-                        </a:rPr>
-                        <a:t>0.0%</a:t>
+                            <a:srgbClr val="F5C242"/>
+                          </a:solidFill>
+                          <a:latin typeface="Kanit"/>
+                        </a:rPr>
+                        <a:t>9.6%</a:t>
                       </a:r>
                     </a:p>
                   </a:txBody>
@@ -7974,7 +7974,7 @@
                           </a:solidFill>
                           <a:latin typeface="Kanit"/>
                         </a:rPr>
-                        <a:t>7/12</a:t>
+                        <a:t>1/25</a:t>
                       </a:r>
                     </a:p>
                   </a:txBody>
@@ -8022,7 +8022,7 @@
                           </a:solidFill>
                           <a:latin typeface="Kanit"/>
                         </a:rPr>
-                        <a:t>ปราจีนบุรี</a:t>
+                        <a:t>สกลนคร</a:t>
                       </a:r>
                     </a:p>
                   </a:txBody>
@@ -8045,7 +8045,7 @@
                           </a:solidFill>
                           <a:latin typeface="Kanit"/>
                         </a:rPr>
-                        <a:t>35</a:t>
+                        <a:t>38</a:t>
                       </a:r>
                     </a:p>
                   </a:txBody>
@@ -8068,7 +8068,7 @@
                           </a:solidFill>
                           <a:latin typeface="Kanit"/>
                         </a:rPr>
-                        <a:t>98</a:t>
+                        <a:t>13</a:t>
                       </a:r>
                     </a:p>
                   </a:txBody>
@@ -8087,11 +8087,11 @@
                       <a:r>
                         <a:rPr sz="900" b="1">
                           <a:solidFill>
-                            <a:srgbClr val="F5C242"/>
-                          </a:solidFill>
-                          <a:latin typeface="Kanit"/>
-                        </a:rPr>
-                        <a:t>54.3%</a:t>
+                            <a:srgbClr val="606060"/>
+                          </a:solidFill>
+                          <a:latin typeface="Kanit"/>
+                        </a:rPr>
+                        <a:t>0.0%</a:t>
                       </a:r>
                     </a:p>
                   </a:txBody>
@@ -8114,7 +8114,7 @@
                           </a:solidFill>
                           <a:latin typeface="Kanit"/>
                         </a:rPr>
-                        <a:t>6/15</a:t>
+                        <a:t>7/12</a:t>
                       </a:r>
                     </a:p>
                   </a:txBody>
@@ -8133,11 +8133,11 @@
                       <a:r>
                         <a:rPr sz="900" b="1">
                           <a:solidFill>
-                            <a:srgbClr val="F5C242"/>
-                          </a:solidFill>
-                          <a:latin typeface="Kanit"/>
-                        </a:rPr>
-                        <a:t>4</a:t>
+                            <a:srgbClr val="CC0000"/>
+                          </a:solidFill>
+                          <a:latin typeface="Kanit"/>
+                        </a:rPr>
+                        <a:t>5</a:t>
                       </a:r>
                     </a:p>
                   </a:txBody>
@@ -8162,7 +8162,7 @@
                           </a:solidFill>
                           <a:latin typeface="Kanit"/>
                         </a:rPr>
-                        <a:t>สตูล</a:t>
+                        <a:t>ปราจีนบุรี</a:t>
                       </a:r>
                     </a:p>
                   </a:txBody>
@@ -8185,7 +8185,7 @@
                           </a:solidFill>
                           <a:latin typeface="Kanit"/>
                         </a:rPr>
-                        <a:t>37</a:t>
+                        <a:t>35</a:t>
                       </a:r>
                     </a:p>
                   </a:txBody>
@@ -8208,7 +8208,7 @@
                           </a:solidFill>
                           <a:latin typeface="Kanit"/>
                         </a:rPr>
-                        <a:t>83</a:t>
+                        <a:t>64</a:t>
                       </a:r>
                     </a:p>
                   </a:txBody>
@@ -8231,7 +8231,7 @@
                           </a:solidFill>
                           <a:latin typeface="Kanit"/>
                         </a:rPr>
-                        <a:t>43.2%</a:t>
+                        <a:t>34.3%</a:t>
                       </a:r>
                     </a:p>
                   </a:txBody>
@@ -8254,7 +8254,7 @@
                           </a:solidFill>
                           <a:latin typeface="Kanit"/>
                         </a:rPr>
-                        <a:t>1/8</a:t>
+                        <a:t>6/15</a:t>
                       </a:r>
                     </a:p>
                   </a:txBody>
@@ -8348,7 +8348,7 @@
                           </a:solidFill>
                           <a:latin typeface="Kanit"/>
                         </a:rPr>
-                        <a:t>54</a:t>
+                        <a:t>52</a:t>
                       </a:r>
                     </a:p>
                   </a:txBody>
@@ -8371,7 +8371,7 @@
                           </a:solidFill>
                           <a:latin typeface="Kanit"/>
                         </a:rPr>
-                        <a:t>37.0%</a:t>
+                        <a:t>25.9%</a:t>
                       </a:r>
                     </a:p>
                   </a:txBody>
@@ -8488,7 +8488,7 @@
                           </a:solidFill>
                           <a:latin typeface="Kanit"/>
                         </a:rPr>
-                        <a:t>55</a:t>
+                        <a:t>52</a:t>
                       </a:r>
                     </a:p>
                   </a:txBody>
@@ -8511,7 +8511,7 @@
                           </a:solidFill>
                           <a:latin typeface="Kanit"/>
                         </a:rPr>
-                        <a:t>33.3%</a:t>
+                        <a:t>22.2%</a:t>
                       </a:r>
                     </a:p>
                   </a:txBody>
@@ -8582,7 +8582,7 @@
                           </a:solidFill>
                           <a:latin typeface="Kanit"/>
                         </a:rPr>
-                        <a:t>ชัยนาท</a:t>
+                        <a:t>สตูล</a:t>
                       </a:r>
                     </a:p>
                   </a:txBody>
@@ -8605,7 +8605,7 @@
                           </a:solidFill>
                           <a:latin typeface="Kanit"/>
                         </a:rPr>
-                        <a:t>29</a:t>
+                        <a:t>37</a:t>
                       </a:r>
                     </a:p>
                   </a:txBody>
@@ -8628,7 +8628,7 @@
                           </a:solidFill>
                           <a:latin typeface="Kanit"/>
                         </a:rPr>
-                        <a:t>67</a:t>
+                        <a:t>48</a:t>
                       </a:r>
                     </a:p>
                   </a:txBody>
@@ -8651,7 +8651,7 @@
                           </a:solidFill>
                           <a:latin typeface="Kanit"/>
                         </a:rPr>
-                        <a:t>31.0%</a:t>
+                        <a:t>18.9%</a:t>
                       </a:r>
                     </a:p>
                   </a:txBody>
@@ -8674,7 +8674,7 @@
                           </a:solidFill>
                           <a:latin typeface="Kanit"/>
                         </a:rPr>
-                        <a:t>1/5</a:t>
+                        <a:t>2/8</a:t>
                       </a:r>
                     </a:p>
                   </a:txBody>
@@ -8909,7 +8909,7 @@
                 </a:solidFill>
                 <a:latin typeface="Kanit"/>
               </a:rPr>
-              <a:t>Planted area MEASURED (OAE — 3,295 amphoe crop rows). Drought is a MODELLED SPEI index from rainfall and evapotranspiration, refreshed monthly, retrieved 2026-07-20 — the best national-coverage signal available, but nobody has walked those districts. Rain and river telemetry MEASURED (ThaiWater, live, pulled daily and accumulated — a missed pull leaves a gap rather than an invented point) · rain to 2026-09-11, river to 2026-09-11. Structural flood exposure MEASURED (GISTDA 1:50,000 repeated-flooding census, 2005-2016 — a 12-year ground record, not a forecast).</a:t>
+              <a:t>Planted area MEASURED (OAE — 3,295 amphoe crop rows). Drought is a MODELLED SPEI index from rainfall and evapotranspiration, refreshed monthly, retrieved 2026-07-20 — the best national-coverage signal available, but nobody has walked those districts. Rain and river telemetry MEASURED (ThaiWater, live, pulled daily and accumulated — a missed pull leaves a gap rather than an invented point) · rain to 2026-09-12, river to 2026-09-12. Structural flood exposure MEASURED (GISTDA 1:50,000 repeated-flooding census, 2005-2016 — a 12-year ground record, not a forecast).</a:t>
             </a:r>
           </a:p>
         </p:txBody>
@@ -32047,7 +32047,7 @@
                 </a:solidFill>
                 <a:latin typeface="Kanit"/>
               </a:rPr>
-              <a:t>Vintages — world prices 2026M06 · Thai farm gate 2026-09-11 · Thai price history 2026-09-11 · crop cost of production OAE Cai-up 2568 (crop year 2568/69, OAE forecast Mar 2569) · drought 2026-06-21 · CPI 2026-05 · GDP 2026-Q1 · IMF WEO 2026 · resale index 2026-05 · registrations to 2026-01 · household debt NSO SES 2566 · wages NSO LFS 2568 · telemetry 2026-09-11.</a:t>
+              <a:t>Vintages — world prices 2026M06 · Thai farm gate 2026-09-11 · Thai price history 2026-09-11 · crop cost of production OAE Cai-up 2568 (crop year 2568/69, OAE forecast Mar 2569) · drought 2026-06-21 · CPI 2026-05 · GDP 2026-Q1 · IMF WEO 2026 · resale index 2026-05 · registrations to 2026-01 · household debt NSO SES 2566 · wages NSO LFS 2568 · telemetry 2026-09-12.</a:t>
             </a:r>
           </a:p>
         </p:txBody>
@@ -37087,7 +37087,7 @@
                 </a:solidFill>
                 <a:latin typeface="Kanit"/>
               </a:rPr>
-              <a:t>338 of 928 districts · 152 of 788 rivers high</a:t>
+              <a:t>338 of 928 districts · 151 of 788 rivers high</a:t>
             </a:r>
           </a:p>
         </p:txBody>
@@ -37859,7 +37859,7 @@
                           </a:solidFill>
                           <a:latin typeface="Kanit"/>
                         </a:rPr>
-                        <a:t>41/155</a:t>
+                        <a:t>42/155</a:t>
                       </a:r>
                     </a:p>
                   </a:txBody>
@@ -38091,7 +38091,7 @@
                           </a:solidFill>
                           <a:latin typeface="Kanit"/>
                         </a:rPr>
-                        <a:t>21/272</a:t>
+                        <a:t>22/272</a:t>
                       </a:r>
                     </a:p>
                   </a:txBody>
@@ -38323,7 +38323,7 @@
                           </a:solidFill>
                           <a:latin typeface="Kanit"/>
                         </a:rPr>
-                        <a:t>32/167</a:t>
+                        <a:t>30/167</a:t>
                       </a:r>
                     </a:p>
                   </a:txBody>
@@ -38555,7 +38555,7 @@
                           </a:solidFill>
                           <a:latin typeface="Kanit"/>
                         </a:rPr>
-                        <a:t>13/51</a:t>
+                        <a:t>12/51</a:t>
                       </a:r>
                     </a:p>
                   </a:txBody>

--- a/docs/decks/mcom-2026-08-05-macro.pptx
+++ b/docs/decks/mcom-2026-08-05-macro.pptx
@@ -6240,7 +6240,7 @@
                 </a:solidFill>
                 <a:latin typeface="Kanit"/>
               </a:rPr>
-              <a:t>151</a:t>
+              <a:t>145</a:t>
             </a:r>
           </a:p>
         </p:txBody>
@@ -6279,7 +6279,7 @@
                 </a:solidFill>
                 <a:latin typeface="Kanit"/>
               </a:rPr>
-              <a:t>of 788 (19.2%) · live · 2026-09-12</a:t>
+              <a:t>of 788 (18.4%) · live · 2026-09-12</a:t>
             </a:r>
           </a:p>
         </p:txBody>
@@ -6405,7 +6405,7 @@
                 </a:solidFill>
                 <a:latin typeface="Kanit"/>
               </a:rPr>
-              <a:t>40</a:t>
+              <a:t>26</a:t>
             </a:r>
           </a:p>
         </p:txBody>
@@ -7882,7 +7882,7 @@
                           </a:solidFill>
                           <a:latin typeface="Kanit"/>
                         </a:rPr>
-                        <a:t>ลำปาง</a:t>
+                        <a:t>สกลนคร</a:t>
                       </a:r>
                     </a:p>
                   </a:txBody>
@@ -7905,7 +7905,7 @@
                           </a:solidFill>
                           <a:latin typeface="Kanit"/>
                         </a:rPr>
-                        <a:t>178</a:t>
+                        <a:t>38</a:t>
                       </a:r>
                     </a:p>
                   </a:txBody>
@@ -7928,7 +7928,7 @@
                           </a:solidFill>
                           <a:latin typeface="Kanit"/>
                         </a:rPr>
-                        <a:t>74</a:t>
+                        <a:t>14</a:t>
                       </a:r>
                     </a:p>
                   </a:txBody>
@@ -7947,11 +7947,11 @@
                       <a:r>
                         <a:rPr sz="900" b="1">
                           <a:solidFill>
-                            <a:srgbClr val="F5C242"/>
-                          </a:solidFill>
-                          <a:latin typeface="Kanit"/>
-                        </a:rPr>
-                        <a:t>9.6%</a:t>
+                            <a:srgbClr val="606060"/>
+                          </a:solidFill>
+                          <a:latin typeface="Kanit"/>
+                        </a:rPr>
+                        <a:t>0.0%</a:t>
                       </a:r>
                     </a:p>
                   </a:txBody>
@@ -7974,7 +7974,7 @@
                           </a:solidFill>
                           <a:latin typeface="Kanit"/>
                         </a:rPr>
-                        <a:t>1/25</a:t>
+                        <a:t>7/12</a:t>
                       </a:r>
                     </a:p>
                   </a:txBody>
@@ -8022,7 +8022,7 @@
                           </a:solidFill>
                           <a:latin typeface="Kanit"/>
                         </a:rPr>
-                        <a:t>สกลนคร</a:t>
+                        <a:t>กาญจนบุรี</a:t>
                       </a:r>
                     </a:p>
                   </a:txBody>
@@ -8045,7 +8045,7 @@
                           </a:solidFill>
                           <a:latin typeface="Kanit"/>
                         </a:rPr>
-                        <a:t>38</a:t>
+                        <a:t>98</a:t>
                       </a:r>
                     </a:p>
                   </a:txBody>
@@ -8068,7 +8068,7 @@
                           </a:solidFill>
                           <a:latin typeface="Kanit"/>
                         </a:rPr>
-                        <a:t>13</a:t>
+                        <a:t>69</a:t>
                       </a:r>
                     </a:p>
                   </a:txBody>
@@ -8087,11 +8087,11 @@
                       <a:r>
                         <a:rPr sz="900" b="1">
                           <a:solidFill>
-                            <a:srgbClr val="606060"/>
-                          </a:solidFill>
-                          <a:latin typeface="Kanit"/>
-                        </a:rPr>
-                        <a:t>0.0%</a:t>
+                            <a:srgbClr val="F5C242"/>
+                          </a:solidFill>
+                          <a:latin typeface="Kanit"/>
+                        </a:rPr>
+                        <a:t>17.3%</a:t>
                       </a:r>
                     </a:p>
                   </a:txBody>
@@ -8114,7 +8114,7 @@
                           </a:solidFill>
                           <a:latin typeface="Kanit"/>
                         </a:rPr>
-                        <a:t>7/12</a:t>
+                        <a:t>4/25</a:t>
                       </a:r>
                     </a:p>
                   </a:txBody>
@@ -8133,11 +8133,11 @@
                       <a:r>
                         <a:rPr sz="900" b="1">
                           <a:solidFill>
-                            <a:srgbClr val="CC0000"/>
-                          </a:solidFill>
-                          <a:latin typeface="Kanit"/>
-                        </a:rPr>
-                        <a:t>5</a:t>
+                            <a:srgbClr val="F5C242"/>
+                          </a:solidFill>
+                          <a:latin typeface="Kanit"/>
+                        </a:rPr>
+                        <a:t>4</a:t>
                       </a:r>
                     </a:p>
                   </a:txBody>
@@ -8162,7 +8162,7 @@
                           </a:solidFill>
                           <a:latin typeface="Kanit"/>
                         </a:rPr>
-                        <a:t>ปราจีนบุรี</a:t>
+                        <a:t>สมุทรสาคร</a:t>
                       </a:r>
                     </a:p>
                   </a:txBody>
@@ -8185,7 +8185,7 @@
                           </a:solidFill>
                           <a:latin typeface="Kanit"/>
                         </a:rPr>
-                        <a:t>35</a:t>
+                        <a:t>6</a:t>
                       </a:r>
                     </a:p>
                   </a:txBody>
@@ -8208,7 +8208,7 @@
                           </a:solidFill>
                           <a:latin typeface="Kanit"/>
                         </a:rPr>
-                        <a:t>64</a:t>
+                        <a:t>39</a:t>
                       </a:r>
                     </a:p>
                   </a:txBody>
@@ -8231,7 +8231,7 @@
                           </a:solidFill>
                           <a:latin typeface="Kanit"/>
                         </a:rPr>
-                        <a:t>34.3%</a:t>
+                        <a:t>16.7%</a:t>
                       </a:r>
                     </a:p>
                   </a:txBody>
@@ -8254,7 +8254,7 @@
                           </a:solidFill>
                           <a:latin typeface="Kanit"/>
                         </a:rPr>
-                        <a:t>6/15</a:t>
+                        <a:t>2/3</a:t>
                       </a:r>
                     </a:p>
                   </a:txBody>
@@ -8302,7 +8302,7 @@
                           </a:solidFill>
                           <a:latin typeface="Kanit"/>
                         </a:rPr>
-                        <a:t>นครนายก</a:t>
+                        <a:t>ลำปาง</a:t>
                       </a:r>
                     </a:p>
                   </a:txBody>
@@ -8325,7 +8325,7 @@
                           </a:solidFill>
                           <a:latin typeface="Kanit"/>
                         </a:rPr>
-                        <a:t>27</a:t>
+                        <a:t>179</a:t>
                       </a:r>
                     </a:p>
                   </a:txBody>
@@ -8348,7 +8348,7 @@
                           </a:solidFill>
                           <a:latin typeface="Kanit"/>
                         </a:rPr>
-                        <a:t>52</a:t>
+                        <a:t>74</a:t>
                       </a:r>
                     </a:p>
                   </a:txBody>
@@ -8371,7 +8371,7 @@
                           </a:solidFill>
                           <a:latin typeface="Kanit"/>
                         </a:rPr>
-                        <a:t>25.9%</a:t>
+                        <a:t>14.0%</a:t>
                       </a:r>
                     </a:p>
                   </a:txBody>
@@ -8394,7 +8394,7 @@
                           </a:solidFill>
                           <a:latin typeface="Kanit"/>
                         </a:rPr>
-                        <a:t>2/6</a:t>
+                        <a:t>1/25</a:t>
                       </a:r>
                     </a:p>
                   </a:txBody>
@@ -8442,7 +8442,7 @@
                           </a:solidFill>
                           <a:latin typeface="Kanit"/>
                         </a:rPr>
-                        <a:t>ฉะเชิงเทรา</a:t>
+                        <a:t>นครศรีธรรมราช</a:t>
                       </a:r>
                     </a:p>
                   </a:txBody>
@@ -8465,7 +8465,7 @@
                           </a:solidFill>
                           <a:latin typeface="Kanit"/>
                         </a:rPr>
-                        <a:t>18</a:t>
+                        <a:t>144</a:t>
                       </a:r>
                     </a:p>
                   </a:txBody>
@@ -8488,7 +8488,7 @@
                           </a:solidFill>
                           <a:latin typeface="Kanit"/>
                         </a:rPr>
-                        <a:t>52</a:t>
+                        <a:t>104</a:t>
                       </a:r>
                     </a:p>
                   </a:txBody>
@@ -8511,7 +8511,7 @@
                           </a:solidFill>
                           <a:latin typeface="Kanit"/>
                         </a:rPr>
-                        <a:t>22.2%</a:t>
+                        <a:t>13.9%</a:t>
                       </a:r>
                     </a:p>
                   </a:txBody>
@@ -8534,7 +8534,7 @@
                           </a:solidFill>
                           <a:latin typeface="Kanit"/>
                         </a:rPr>
-                        <a:t>2/4</a:t>
+                        <a:t>4/23</a:t>
                       </a:r>
                     </a:p>
                   </a:txBody>
@@ -8582,7 +8582,7 @@
                           </a:solidFill>
                           <a:latin typeface="Kanit"/>
                         </a:rPr>
-                        <a:t>สตูล</a:t>
+                        <a:t>ฉะเชิงเทรา</a:t>
                       </a:r>
                     </a:p>
                   </a:txBody>
@@ -8605,7 +8605,7 @@
                           </a:solidFill>
                           <a:latin typeface="Kanit"/>
                         </a:rPr>
-                        <a:t>37</a:t>
+                        <a:t>18</a:t>
                       </a:r>
                     </a:p>
                   </a:txBody>
@@ -8628,7 +8628,7 @@
                           </a:solidFill>
                           <a:latin typeface="Kanit"/>
                         </a:rPr>
-                        <a:t>48</a:t>
+                        <a:t>40</a:t>
                       </a:r>
                     </a:p>
                   </a:txBody>
@@ -8651,7 +8651,7 @@
                           </a:solidFill>
                           <a:latin typeface="Kanit"/>
                         </a:rPr>
-                        <a:t>18.9%</a:t>
+                        <a:t>11.1%</a:t>
                       </a:r>
                     </a:p>
                   </a:txBody>
@@ -8674,7 +8674,7 @@
                           </a:solidFill>
                           <a:latin typeface="Kanit"/>
                         </a:rPr>
-                        <a:t>2/8</a:t>
+                        <a:t>2/4</a:t>
                       </a:r>
                     </a:p>
                   </a:txBody>
@@ -37087,7 +37087,7 @@
                 </a:solidFill>
                 <a:latin typeface="Kanit"/>
               </a:rPr>
-              <a:t>338 of 928 districts · 151 of 788 rivers high</a:t>
+              <a:t>338 of 928 districts · 145 of 788 rivers high</a:t>
             </a:r>
           </a:p>
         </p:txBody>
@@ -37859,7 +37859,7 @@
                           </a:solidFill>
                           <a:latin typeface="Kanit"/>
                         </a:rPr>
-                        <a:t>42/155</a:t>
+                        <a:t>40/155</a:t>
                       </a:r>
                     </a:p>
                   </a:txBody>
@@ -38091,7 +38091,7 @@
                           </a:solidFill>
                           <a:latin typeface="Kanit"/>
                         </a:rPr>
-                        <a:t>22/272</a:t>
+                        <a:t>23/272</a:t>
                       </a:r>
                     </a:p>
                   </a:txBody>
@@ -38323,7 +38323,7 @@
                           </a:solidFill>
                           <a:latin typeface="Kanit"/>
                         </a:rPr>
-                        <a:t>30/167</a:t>
+                        <a:t>28/167</a:t>
                       </a:r>
                     </a:p>
                   </a:txBody>
@@ -38787,7 +38787,7 @@
                           </a:solidFill>
                           <a:latin typeface="Kanit"/>
                         </a:rPr>
-                        <a:t>45/143</a:t>
+                        <a:t>42/143</a:t>
                       </a:r>
                     </a:p>
                   </a:txBody>

--- a/docs/decks/mcom-2026-08-05-macro.pptx
+++ b/docs/decks/mcom-2026-08-05-macro.pptx
@@ -6240,7 +6240,7 @@
                 </a:solidFill>
                 <a:latin typeface="Kanit"/>
               </a:rPr>
-              <a:t>145</a:t>
+              <a:t>149</a:t>
             </a:r>
           </a:p>
         </p:txBody>
@@ -6279,7 +6279,7 @@
                 </a:solidFill>
                 <a:latin typeface="Kanit"/>
               </a:rPr>
-              <a:t>of 788 (18.4%) · live · 2026-09-12</a:t>
+              <a:t>of 789 (18.9%) · live · 2026-09-12</a:t>
             </a:r>
           </a:p>
         </p:txBody>
@@ -7882,7 +7882,7 @@
                           </a:solidFill>
                           <a:latin typeface="Kanit"/>
                         </a:rPr>
-                        <a:t>สกลนคร</a:t>
+                        <a:t>นครปฐม</a:t>
                       </a:r>
                     </a:p>
                   </a:txBody>
@@ -7905,7 +7905,7 @@
                           </a:solidFill>
                           <a:latin typeface="Kanit"/>
                         </a:rPr>
-                        <a:t>38</a:t>
+                        <a:t>9</a:t>
                       </a:r>
                     </a:p>
                   </a:txBody>
@@ -7928,7 +7928,7 @@
                           </a:solidFill>
                           <a:latin typeface="Kanit"/>
                         </a:rPr>
-                        <a:t>14</a:t>
+                        <a:t>32</a:t>
                       </a:r>
                     </a:p>
                   </a:txBody>
@@ -7974,7 +7974,7 @@
                           </a:solidFill>
                           <a:latin typeface="Kanit"/>
                         </a:rPr>
-                        <a:t>7/12</a:t>
+                        <a:t>5/7</a:t>
                       </a:r>
                     </a:p>
                   </a:txBody>
@@ -8022,7 +8022,7 @@
                           </a:solidFill>
                           <a:latin typeface="Kanit"/>
                         </a:rPr>
-                        <a:t>กาญจนบุรี</a:t>
+                        <a:t>สกลนคร</a:t>
                       </a:r>
                     </a:p>
                   </a:txBody>
@@ -8045,7 +8045,7 @@
                           </a:solidFill>
                           <a:latin typeface="Kanit"/>
                         </a:rPr>
-                        <a:t>98</a:t>
+                        <a:t>36</a:t>
                       </a:r>
                     </a:p>
                   </a:txBody>
@@ -8068,7 +8068,7 @@
                           </a:solidFill>
                           <a:latin typeface="Kanit"/>
                         </a:rPr>
-                        <a:t>69</a:t>
+                        <a:t>0</a:t>
                       </a:r>
                     </a:p>
                   </a:txBody>
@@ -8087,11 +8087,11 @@
                       <a:r>
                         <a:rPr sz="900" b="1">
                           <a:solidFill>
-                            <a:srgbClr val="F5C242"/>
-                          </a:solidFill>
-                          <a:latin typeface="Kanit"/>
-                        </a:rPr>
-                        <a:t>17.3%</a:t>
+                            <a:srgbClr val="606060"/>
+                          </a:solidFill>
+                          <a:latin typeface="Kanit"/>
+                        </a:rPr>
+                        <a:t>0.0%</a:t>
                       </a:r>
                     </a:p>
                   </a:txBody>
@@ -8114,7 +8114,7 @@
                           </a:solidFill>
                           <a:latin typeface="Kanit"/>
                         </a:rPr>
-                        <a:t>4/25</a:t>
+                        <a:t>6/12</a:t>
                       </a:r>
                     </a:p>
                   </a:txBody>
@@ -8133,11 +8133,11 @@
                       <a:r>
                         <a:rPr sz="900" b="1">
                           <a:solidFill>
-                            <a:srgbClr val="F5C242"/>
-                          </a:solidFill>
-                          <a:latin typeface="Kanit"/>
-                        </a:rPr>
-                        <a:t>4</a:t>
+                            <a:srgbClr val="CC0000"/>
+                          </a:solidFill>
+                          <a:latin typeface="Kanit"/>
+                        </a:rPr>
+                        <a:t>5</a:t>
                       </a:r>
                     </a:p>
                   </a:txBody>
@@ -8162,7 +8162,7 @@
                           </a:solidFill>
                           <a:latin typeface="Kanit"/>
                         </a:rPr>
-                        <a:t>สมุทรสาคร</a:t>
+                        <a:t>นครศรีธรรมราช</a:t>
                       </a:r>
                     </a:p>
                   </a:txBody>
@@ -8185,7 +8185,7 @@
                           </a:solidFill>
                           <a:latin typeface="Kanit"/>
                         </a:rPr>
-                        <a:t>6</a:t>
+                        <a:t>143</a:t>
                       </a:r>
                     </a:p>
                   </a:txBody>
@@ -8208,7 +8208,7 @@
                           </a:solidFill>
                           <a:latin typeface="Kanit"/>
                         </a:rPr>
-                        <a:t>39</a:t>
+                        <a:t>75</a:t>
                       </a:r>
                     </a:p>
                   </a:txBody>
@@ -8231,7 +8231,7 @@
                           </a:solidFill>
                           <a:latin typeface="Kanit"/>
                         </a:rPr>
-                        <a:t>16.7%</a:t>
+                        <a:t>15.4%</a:t>
                       </a:r>
                     </a:p>
                   </a:txBody>
@@ -8254,7 +8254,7 @@
                           </a:solidFill>
                           <a:latin typeface="Kanit"/>
                         </a:rPr>
-                        <a:t>2/3</a:t>
+                        <a:t>5/23</a:t>
                       </a:r>
                     </a:p>
                   </a:txBody>
@@ -8302,7 +8302,7 @@
                           </a:solidFill>
                           <a:latin typeface="Kanit"/>
                         </a:rPr>
-                        <a:t>ลำปาง</a:t>
+                        <a:t>ตราด</a:t>
                       </a:r>
                     </a:p>
                   </a:txBody>
@@ -8325,7 +8325,7 @@
                           </a:solidFill>
                           <a:latin typeface="Kanit"/>
                         </a:rPr>
-                        <a:t>179</a:t>
+                        <a:t>44</a:t>
                       </a:r>
                     </a:p>
                   </a:txBody>
@@ -8348,7 +8348,7 @@
                           </a:solidFill>
                           <a:latin typeface="Kanit"/>
                         </a:rPr>
-                        <a:t>74</a:t>
+                        <a:t>55</a:t>
                       </a:r>
                     </a:p>
                   </a:txBody>
@@ -8371,7 +8371,7 @@
                           </a:solidFill>
                           <a:latin typeface="Kanit"/>
                         </a:rPr>
-                        <a:t>14.0%</a:t>
+                        <a:t>13.6%</a:t>
                       </a:r>
                     </a:p>
                   </a:txBody>
@@ -8394,7 +8394,7 @@
                           </a:solidFill>
                           <a:latin typeface="Kanit"/>
                         </a:rPr>
-                        <a:t>1/25</a:t>
+                        <a:t>3/9</a:t>
                       </a:r>
                     </a:p>
                   </a:txBody>
@@ -8442,7 +8442,7 @@
                           </a:solidFill>
                           <a:latin typeface="Kanit"/>
                         </a:rPr>
-                        <a:t>นครศรีธรรมราช</a:t>
+                        <a:t>กาญจนบุรี</a:t>
                       </a:r>
                     </a:p>
                   </a:txBody>
@@ -8465,7 +8465,7 @@
                           </a:solidFill>
                           <a:latin typeface="Kanit"/>
                         </a:rPr>
-                        <a:t>144</a:t>
+                        <a:t>95</a:t>
                       </a:r>
                     </a:p>
                   </a:txBody>
@@ -8488,7 +8488,7 @@
                           </a:solidFill>
                           <a:latin typeface="Kanit"/>
                         </a:rPr>
-                        <a:t>104</a:t>
+                        <a:t>76</a:t>
                       </a:r>
                     </a:p>
                   </a:txBody>
@@ -8511,7 +8511,7 @@
                           </a:solidFill>
                           <a:latin typeface="Kanit"/>
                         </a:rPr>
-                        <a:t>13.9%</a:t>
+                        <a:t>7.4%</a:t>
                       </a:r>
                     </a:p>
                   </a:txBody>
@@ -8534,7 +8534,7 @@
                           </a:solidFill>
                           <a:latin typeface="Kanit"/>
                         </a:rPr>
-                        <a:t>4/23</a:t>
+                        <a:t>4/25</a:t>
                       </a:r>
                     </a:p>
                   </a:txBody>
@@ -8628,7 +8628,7 @@
                           </a:solidFill>
                           <a:latin typeface="Kanit"/>
                         </a:rPr>
-                        <a:t>40</a:t>
+                        <a:t>47</a:t>
                       </a:r>
                     </a:p>
                   </a:txBody>
@@ -8651,7 +8651,7 @@
                           </a:solidFill>
                           <a:latin typeface="Kanit"/>
                         </a:rPr>
-                        <a:t>11.1%</a:t>
+                        <a:t>5.6%</a:t>
                       </a:r>
                     </a:p>
                   </a:txBody>
@@ -9722,7 +9722,7 @@
                           </a:solidFill>
                           <a:latin typeface="Kanit"/>
                         </a:rPr>
-                        <a:t>114%</a:t>
+                        <a:t>104%</a:t>
                       </a:r>
                     </a:p>
                   </a:txBody>
@@ -9954,7 +9954,7 @@
                           </a:solidFill>
                           <a:latin typeface="Kanit"/>
                         </a:rPr>
-                        <a:t>77%</a:t>
+                        <a:t>76%</a:t>
                       </a:r>
                     </a:p>
                   </a:txBody>
@@ -10140,7 +10140,7 @@
                           </a:solidFill>
                           <a:latin typeface="Kanit"/>
                         </a:rPr>
-                        <a:t>สิงห์บุรี</a:t>
+                        <a:t>มุกดาหาร</a:t>
                       </a:r>
                     </a:p>
                   </a:txBody>
@@ -10163,7 +10163,7 @@
                           </a:solidFill>
                           <a:latin typeface="Kanit"/>
                         </a:rPr>
-                        <a:t>Central&amp;BKK</a:t>
+                        <a:t>Isan</a:t>
                       </a:r>
                     </a:p>
                   </a:txBody>
@@ -10182,11 +10182,34 @@
                       <a:r>
                         <a:rPr sz="900" b="1">
                           <a:solidFill>
+                            <a:srgbClr val="CC0000"/>
+                          </a:solidFill>
+                          <a:latin typeface="Kanit"/>
+                        </a:rPr>
+                        <a:t>103%</a:t>
+                      </a:r>
+                    </a:p>
+                  </a:txBody>
+                  <a:tcPr marL="54864" marR="54864" marT="18288" marB="18288" anchor="ctr">
+                    <a:solidFill>
+                      <a:srgbClr val="FFFFFF"/>
+                    </a:solidFill>
+                  </a:tcPr>
+                </a:tc>
+                <a:tc>
+                  <a:txBody>
+                    <a:bodyPr wrap="square"/>
+                    <a:lstStyle/>
+                    <a:p>
+                      <a:pPr algn="r"/>
+                      <a:r>
+                        <a:rPr sz="900" b="1">
+                          <a:solidFill>
                             <a:srgbClr val="1E2F5C"/>
                           </a:solidFill>
                           <a:latin typeface="Kanit"/>
                         </a:rPr>
-                        <a:t>47%</a:t>
+                        <a:t>0.24%</a:t>
                       </a:r>
                     </a:p>
                   </a:txBody>
@@ -10201,7 +10224,30 @@
                     <a:bodyPr wrap="square"/>
                     <a:lstStyle/>
                     <a:p>
-                      <a:pPr algn="r"/>
+                      <a:pPr algn="l"/>
+                      <a:r>
+                        <a:rPr sz="900" b="0">
+                          <a:solidFill>
+                            <a:srgbClr val="1E2F5C"/>
+                          </a:solidFill>
+                          <a:latin typeface="Kanit"/>
+                        </a:rPr>
+                        <a:t>Rice 46%</a:t>
+                      </a:r>
+                    </a:p>
+                  </a:txBody>
+                  <a:tcPr marL="54864" marR="54864" marT="18288" marB="18288" anchor="ctr">
+                    <a:solidFill>
+                      <a:srgbClr val="FFFFFF"/>
+                    </a:solidFill>
+                  </a:tcPr>
+                </a:tc>
+                <a:tc>
+                  <a:txBody>
+                    <a:bodyPr wrap="square"/>
+                    <a:lstStyle/>
+                    <a:p>
+                      <a:pPr algn="l"/>
                       <a:r>
                         <a:rPr sz="900" b="1">
                           <a:solidFill>
@@ -10209,7 +10255,7 @@
                           </a:solidFill>
                           <a:latin typeface="Kanit"/>
                         </a:rPr>
-                        <a:t>2.29%</a:t>
+                        <a:t>below cost</a:t>
                       </a:r>
                     </a:p>
                   </a:txBody>
@@ -10224,7 +10270,30 @@
                     <a:bodyPr wrap="square"/>
                     <a:lstStyle/>
                     <a:p>
-                      <a:pPr algn="l"/>
+                      <a:pPr algn="r"/>
+                      <a:r>
+                        <a:rPr sz="900" b="1">
+                          <a:solidFill>
+                            <a:srgbClr val="CC0000"/>
+                          </a:solidFill>
+                          <a:latin typeface="Kanit"/>
+                        </a:rPr>
+                        <a:t>87%</a:t>
+                      </a:r>
+                    </a:p>
+                  </a:txBody>
+                  <a:tcPr marL="54864" marR="54864" marT="18288" marB="18288" anchor="ctr">
+                    <a:solidFill>
+                      <a:srgbClr val="FFFFFF"/>
+                    </a:solidFill>
+                  </a:tcPr>
+                </a:tc>
+                <a:tc>
+                  <a:txBody>
+                    <a:bodyPr wrap="square"/>
+                    <a:lstStyle/>
+                    <a:p>
+                      <a:pPr algn="r"/>
                       <a:r>
                         <a:rPr sz="900" b="0">
                           <a:solidFill>
@@ -10232,7 +10301,7 @@
                           </a:solidFill>
                           <a:latin typeface="Kanit"/>
                         </a:rPr>
-                        <a:t>Rice 93%</a:t>
+                        <a:t>6,302</a:t>
                       </a:r>
                     </a:p>
                   </a:txBody>
@@ -10247,52 +10316,6 @@
                     <a:bodyPr wrap="square"/>
                     <a:lstStyle/>
                     <a:p>
-                      <a:pPr algn="l"/>
-                      <a:r>
-                        <a:rPr sz="900" b="1">
-                          <a:solidFill>
-                            <a:srgbClr val="CC0000"/>
-                          </a:solidFill>
-                          <a:latin typeface="Kanit"/>
-                        </a:rPr>
-                        <a:t>below cost</a:t>
-                      </a:r>
-                    </a:p>
-                  </a:txBody>
-                  <a:tcPr marL="54864" marR="54864" marT="18288" marB="18288" anchor="ctr">
-                    <a:solidFill>
-                      <a:srgbClr val="FFFFFF"/>
-                    </a:solidFill>
-                  </a:tcPr>
-                </a:tc>
-                <a:tc>
-                  <a:txBody>
-                    <a:bodyPr wrap="square"/>
-                    <a:lstStyle/>
-                    <a:p>
-                      <a:pPr algn="r"/>
-                      <a:r>
-                        <a:rPr sz="900" b="1">
-                          <a:solidFill>
-                            <a:srgbClr val="CC0000"/>
-                          </a:solidFill>
-                          <a:latin typeface="Kanit"/>
-                        </a:rPr>
-                        <a:t>74%</a:t>
-                      </a:r>
-                    </a:p>
-                  </a:txBody>
-                  <a:tcPr marL="54864" marR="54864" marT="18288" marB="18288" anchor="ctr">
-                    <a:solidFill>
-                      <a:srgbClr val="FFFFFF"/>
-                    </a:solidFill>
-                  </a:tcPr>
-                </a:tc>
-                <a:tc>
-                  <a:txBody>
-                    <a:bodyPr wrap="square"/>
-                    <a:lstStyle/>
-                    <a:p>
                       <a:pPr algn="r"/>
                       <a:r>
                         <a:rPr sz="900" b="0">
@@ -10301,30 +10324,7 @@
                           </a:solidFill>
                           <a:latin typeface="Kanit"/>
                         </a:rPr>
-                        <a:t>9,802</a:t>
-                      </a:r>
-                    </a:p>
-                  </a:txBody>
-                  <a:tcPr marL="54864" marR="54864" marT="18288" marB="18288" anchor="ctr">
-                    <a:solidFill>
-                      <a:srgbClr val="FFFFFF"/>
-                    </a:solidFill>
-                  </a:tcPr>
-                </a:tc>
-                <a:tc>
-                  <a:txBody>
-                    <a:bodyPr wrap="square"/>
-                    <a:lstStyle/>
-                    <a:p>
-                      <a:pPr algn="r"/>
-                      <a:r>
-                        <a:rPr sz="900" b="0">
-                          <a:solidFill>
-                            <a:srgbClr val="1E2F5C"/>
-                          </a:solidFill>
-                          <a:latin typeface="Kanit"/>
-                        </a:rPr>
-                        <a:t>0.33M</a:t>
+                        <a:t>0.99M</a:t>
                       </a:r>
                     </a:p>
                   </a:txBody>
@@ -10372,7 +10372,7 @@
                           </a:solidFill>
                           <a:latin typeface="Kanit"/>
                         </a:rPr>
-                        <a:t>อุบลราชธานี</a:t>
+                        <a:t>สิงห์บุรี</a:t>
                       </a:r>
                     </a:p>
                   </a:txBody>
@@ -10395,7 +10395,7 @@
                           </a:solidFill>
                           <a:latin typeface="Kanit"/>
                         </a:rPr>
-                        <a:t>Isan</a:t>
+                        <a:t>Central&amp;BKK</a:t>
                       </a:r>
                     </a:p>
                   </a:txBody>
@@ -10414,11 +10414,34 @@
                       <a:r>
                         <a:rPr sz="900" b="1">
                           <a:solidFill>
+                            <a:srgbClr val="1E2F5C"/>
+                          </a:solidFill>
+                          <a:latin typeface="Kanit"/>
+                        </a:rPr>
+                        <a:t>41%</a:t>
+                      </a:r>
+                    </a:p>
+                  </a:txBody>
+                  <a:tcPr marL="54864" marR="54864" marT="18288" marB="18288" anchor="ctr">
+                    <a:solidFill>
+                      <a:srgbClr val="F7F9FC"/>
+                    </a:solidFill>
+                  </a:tcPr>
+                </a:tc>
+                <a:tc>
+                  <a:txBody>
+                    <a:bodyPr wrap="square"/>
+                    <a:lstStyle/>
+                    <a:p>
+                      <a:pPr algn="r"/>
+                      <a:r>
+                        <a:rPr sz="900" b="1">
+                          <a:solidFill>
                             <a:srgbClr val="CC0000"/>
                           </a:solidFill>
                           <a:latin typeface="Kanit"/>
                         </a:rPr>
-                        <a:t>100%</a:t>
+                        <a:t>2.29%</a:t>
                       </a:r>
                     </a:p>
                   </a:txBody>
@@ -10433,15 +10456,84 @@
                     <a:bodyPr wrap="square"/>
                     <a:lstStyle/>
                     <a:p>
-                      <a:pPr algn="r"/>
+                      <a:pPr algn="l"/>
+                      <a:r>
+                        <a:rPr sz="900" b="0">
+                          <a:solidFill>
+                            <a:srgbClr val="1E2F5C"/>
+                          </a:solidFill>
+                          <a:latin typeface="Kanit"/>
+                        </a:rPr>
+                        <a:t>Rice 93%</a:t>
+                      </a:r>
+                    </a:p>
+                  </a:txBody>
+                  <a:tcPr marL="54864" marR="54864" marT="18288" marB="18288" anchor="ctr">
+                    <a:solidFill>
+                      <a:srgbClr val="F7F9FC"/>
+                    </a:solidFill>
+                  </a:tcPr>
+                </a:tc>
+                <a:tc>
+                  <a:txBody>
+                    <a:bodyPr wrap="square"/>
+                    <a:lstStyle/>
+                    <a:p>
+                      <a:pPr algn="l"/>
                       <a:r>
                         <a:rPr sz="900" b="1">
                           <a:solidFill>
+                            <a:srgbClr val="CC0000"/>
+                          </a:solidFill>
+                          <a:latin typeface="Kanit"/>
+                        </a:rPr>
+                        <a:t>below cost</a:t>
+                      </a:r>
+                    </a:p>
+                  </a:txBody>
+                  <a:tcPr marL="54864" marR="54864" marT="18288" marB="18288" anchor="ctr">
+                    <a:solidFill>
+                      <a:srgbClr val="F7F9FC"/>
+                    </a:solidFill>
+                  </a:tcPr>
+                </a:tc>
+                <a:tc>
+                  <a:txBody>
+                    <a:bodyPr wrap="square"/>
+                    <a:lstStyle/>
+                    <a:p>
+                      <a:pPr algn="r"/>
+                      <a:r>
+                        <a:rPr sz="900" b="1">
+                          <a:solidFill>
+                            <a:srgbClr val="CC0000"/>
+                          </a:solidFill>
+                          <a:latin typeface="Kanit"/>
+                        </a:rPr>
+                        <a:t>74%</a:t>
+                      </a:r>
+                    </a:p>
+                  </a:txBody>
+                  <a:tcPr marL="54864" marR="54864" marT="18288" marB="18288" anchor="ctr">
+                    <a:solidFill>
+                      <a:srgbClr val="F7F9FC"/>
+                    </a:solidFill>
+                  </a:tcPr>
+                </a:tc>
+                <a:tc>
+                  <a:txBody>
+                    <a:bodyPr wrap="square"/>
+                    <a:lstStyle/>
+                    <a:p>
+                      <a:pPr algn="r"/>
+                      <a:r>
+                        <a:rPr sz="900" b="0">
+                          <a:solidFill>
                             <a:srgbClr val="1E2F5C"/>
                           </a:solidFill>
                           <a:latin typeface="Kanit"/>
                         </a:rPr>
-                        <a:t>0.16%</a:t>
+                        <a:t>9,802</a:t>
                       </a:r>
                     </a:p>
                   </a:txBody>
@@ -10456,7 +10548,7 @@
                     <a:bodyPr wrap="square"/>
                     <a:lstStyle/>
                     <a:p>
-                      <a:pPr algn="l"/>
+                      <a:pPr algn="r"/>
                       <a:r>
                         <a:rPr sz="900" b="0">
                           <a:solidFill>
@@ -10464,99 +10556,7 @@
                           </a:solidFill>
                           <a:latin typeface="Kanit"/>
                         </a:rPr>
-                        <a:t>Rice 79%</a:t>
-                      </a:r>
-                    </a:p>
-                  </a:txBody>
-                  <a:tcPr marL="54864" marR="54864" marT="18288" marB="18288" anchor="ctr">
-                    <a:solidFill>
-                      <a:srgbClr val="F7F9FC"/>
-                    </a:solidFill>
-                  </a:tcPr>
-                </a:tc>
-                <a:tc>
-                  <a:txBody>
-                    <a:bodyPr wrap="square"/>
-                    <a:lstStyle/>
-                    <a:p>
-                      <a:pPr algn="l"/>
-                      <a:r>
-                        <a:rPr sz="900" b="1">
-                          <a:solidFill>
-                            <a:srgbClr val="CC0000"/>
-                          </a:solidFill>
-                          <a:latin typeface="Kanit"/>
-                        </a:rPr>
-                        <a:t>below cost</a:t>
-                      </a:r>
-                    </a:p>
-                  </a:txBody>
-                  <a:tcPr marL="54864" marR="54864" marT="18288" marB="18288" anchor="ctr">
-                    <a:solidFill>
-                      <a:srgbClr val="F7F9FC"/>
-                    </a:solidFill>
-                  </a:tcPr>
-                </a:tc>
-                <a:tc>
-                  <a:txBody>
-                    <a:bodyPr wrap="square"/>
-                    <a:lstStyle/>
-                    <a:p>
-                      <a:pPr algn="r"/>
-                      <a:r>
-                        <a:rPr sz="900" b="1">
-                          <a:solidFill>
-                            <a:srgbClr val="CC0000"/>
-                          </a:solidFill>
-                          <a:latin typeface="Kanit"/>
-                        </a:rPr>
-                        <a:t>79%</a:t>
-                      </a:r>
-                    </a:p>
-                  </a:txBody>
-                  <a:tcPr marL="54864" marR="54864" marT="18288" marB="18288" anchor="ctr">
-                    <a:solidFill>
-                      <a:srgbClr val="F7F9FC"/>
-                    </a:solidFill>
-                  </a:tcPr>
-                </a:tc>
-                <a:tc>
-                  <a:txBody>
-                    <a:bodyPr wrap="square"/>
-                    <a:lstStyle/>
-                    <a:p>
-                      <a:pPr algn="r"/>
-                      <a:r>
-                        <a:rPr sz="900" b="0">
-                          <a:solidFill>
-                            <a:srgbClr val="1E2F5C"/>
-                          </a:solidFill>
-                          <a:latin typeface="Kanit"/>
-                        </a:rPr>
-                        <a:t>7,763</a:t>
-                      </a:r>
-                    </a:p>
-                  </a:txBody>
-                  <a:tcPr marL="54864" marR="54864" marT="18288" marB="18288" anchor="ctr">
-                    <a:solidFill>
-                      <a:srgbClr val="F7F9FC"/>
-                    </a:solidFill>
-                  </a:tcPr>
-                </a:tc>
-                <a:tc>
-                  <a:txBody>
-                    <a:bodyPr wrap="square"/>
-                    <a:lstStyle/>
-                    <a:p>
-                      <a:pPr algn="r"/>
-                      <a:r>
-                        <a:rPr sz="900" b="0">
-                          <a:solidFill>
-                            <a:srgbClr val="1E2F5C"/>
-                          </a:solidFill>
-                          <a:latin typeface="Kanit"/>
-                        </a:rPr>
-                        <a:t>5.21M</a:t>
+                        <a:t>0.33M</a:t>
                       </a:r>
                     </a:p>
                   </a:txBody>
@@ -10604,7 +10604,7 @@
                           </a:solidFill>
                           <a:latin typeface="Kanit"/>
                         </a:rPr>
-                        <a:t>นครพนม</a:t>
+                        <a:t>พิจิตร</a:t>
                       </a:r>
                     </a:p>
                   </a:txBody>
@@ -10627,7 +10627,7 @@
                           </a:solidFill>
                           <a:latin typeface="Kanit"/>
                         </a:rPr>
-                        <a:t>Isan</a:t>
+                        <a:t>North</a:t>
                       </a:r>
                     </a:p>
                   </a:txBody>
@@ -10650,7 +10650,7 @@
                           </a:solidFill>
                           <a:latin typeface="Kanit"/>
                         </a:rPr>
-                        <a:t>91%</a:t>
+                        <a:t>90%</a:t>
                       </a:r>
                     </a:p>
                   </a:txBody>
@@ -10669,11 +10669,57 @@
                       <a:r>
                         <a:rPr sz="900" b="1">
                           <a:solidFill>
+                            <a:srgbClr val="1E2F5C"/>
+                          </a:solidFill>
+                          <a:latin typeface="Kanit"/>
+                        </a:rPr>
+                        <a:t>1.43%</a:t>
+                      </a:r>
+                    </a:p>
+                  </a:txBody>
+                  <a:tcPr marL="54864" marR="54864" marT="18288" marB="18288" anchor="ctr">
+                    <a:solidFill>
+                      <a:srgbClr val="FFFFFF"/>
+                    </a:solidFill>
+                  </a:tcPr>
+                </a:tc>
+                <a:tc>
+                  <a:txBody>
+                    <a:bodyPr wrap="square"/>
+                    <a:lstStyle/>
+                    <a:p>
+                      <a:pPr algn="l"/>
+                      <a:r>
+                        <a:rPr sz="900" b="0">
+                          <a:solidFill>
+                            <a:srgbClr val="1E2F5C"/>
+                          </a:solidFill>
+                          <a:latin typeface="Kanit"/>
+                        </a:rPr>
+                        <a:t>Rice 93%</a:t>
+                      </a:r>
+                    </a:p>
+                  </a:txBody>
+                  <a:tcPr marL="54864" marR="54864" marT="18288" marB="18288" anchor="ctr">
+                    <a:solidFill>
+                      <a:srgbClr val="FFFFFF"/>
+                    </a:solidFill>
+                  </a:tcPr>
+                </a:tc>
+                <a:tc>
+                  <a:txBody>
+                    <a:bodyPr wrap="square"/>
+                    <a:lstStyle/>
+                    <a:p>
+                      <a:pPr algn="l"/>
+                      <a:r>
+                        <a:rPr sz="900" b="1">
+                          <a:solidFill>
                             <a:srgbClr val="CC0000"/>
                           </a:solidFill>
                           <a:latin typeface="Kanit"/>
                         </a:rPr>
-                        <a:t>2.32%</a:t>
+                        <a:t>below cost</a:t>
                       </a:r>
                     </a:p>
                   </a:txBody>
@@ -10688,7 +10734,30 @@
                     <a:bodyPr wrap="square"/>
                     <a:lstStyle/>
                     <a:p>
-                      <a:pPr algn="l"/>
+                      <a:pPr algn="r"/>
+                      <a:r>
+                        <a:rPr sz="900" b="1">
+                          <a:solidFill>
+                            <a:srgbClr val="CC0000"/>
+                          </a:solidFill>
+                          <a:latin typeface="Kanit"/>
+                        </a:rPr>
+                        <a:t>88%</a:t>
+                      </a:r>
+                    </a:p>
+                  </a:txBody>
+                  <a:tcPr marL="54864" marR="54864" marT="18288" marB="18288" anchor="ctr">
+                    <a:solidFill>
+                      <a:srgbClr val="FFFFFF"/>
+                    </a:solidFill>
+                  </a:tcPr>
+                </a:tc>
+                <a:tc>
+                  <a:txBody>
+                    <a:bodyPr wrap="square"/>
+                    <a:lstStyle/>
+                    <a:p>
+                      <a:pPr algn="r"/>
                       <a:r>
                         <a:rPr sz="900" b="0">
                           <a:solidFill>
@@ -10696,7 +10765,7 @@
                           </a:solidFill>
                           <a:latin typeface="Kanit"/>
                         </a:rPr>
-                        <a:t>Rice 78%</a:t>
+                        <a:t>8,845</a:t>
                       </a:r>
                     </a:p>
                   </a:txBody>
@@ -10711,84 +10780,15 @@
                     <a:bodyPr wrap="square"/>
                     <a:lstStyle/>
                     <a:p>
-                      <a:pPr algn="l"/>
-                      <a:r>
-                        <a:rPr sz="900" b="1">
-                          <a:solidFill>
-                            <a:srgbClr val="CC0000"/>
-                          </a:solidFill>
-                          <a:latin typeface="Kanit"/>
-                        </a:rPr>
-                        <a:t>below cost</a:t>
-                      </a:r>
-                    </a:p>
-                  </a:txBody>
-                  <a:tcPr marL="54864" marR="54864" marT="18288" marB="18288" anchor="ctr">
-                    <a:solidFill>
-                      <a:srgbClr val="FFFFFF"/>
-                    </a:solidFill>
-                  </a:tcPr>
-                </a:tc>
-                <a:tc>
-                  <a:txBody>
-                    <a:bodyPr wrap="square"/>
-                    <a:lstStyle/>
-                    <a:p>
-                      <a:pPr algn="r"/>
-                      <a:r>
-                        <a:rPr sz="900" b="1">
+                      <a:pPr algn="r"/>
+                      <a:r>
+                        <a:rPr sz="900" b="0">
                           <a:solidFill>
                             <a:srgbClr val="1E2F5C"/>
                           </a:solidFill>
                           <a:latin typeface="Kanit"/>
                         </a:rPr>
-                        <a:t>94%</a:t>
-                      </a:r>
-                    </a:p>
-                  </a:txBody>
-                  <a:tcPr marL="54864" marR="54864" marT="18288" marB="18288" anchor="ctr">
-                    <a:solidFill>
-                      <a:srgbClr val="FFFFFF"/>
-                    </a:solidFill>
-                  </a:tcPr>
-                </a:tc>
-                <a:tc>
-                  <a:txBody>
-                    <a:bodyPr wrap="square"/>
-                    <a:lstStyle/>
-                    <a:p>
-                      <a:pPr algn="r"/>
-                      <a:r>
-                        <a:rPr sz="900" b="0">
-                          <a:solidFill>
-                            <a:srgbClr val="1E2F5C"/>
-                          </a:solidFill>
-                          <a:latin typeface="Kanit"/>
-                        </a:rPr>
-                        <a:t>6,061</a:t>
-                      </a:r>
-                    </a:p>
-                  </a:txBody>
-                  <a:tcPr marL="54864" marR="54864" marT="18288" marB="18288" anchor="ctr">
-                    <a:solidFill>
-                      <a:srgbClr val="FFFFFF"/>
-                    </a:solidFill>
-                  </a:tcPr>
-                </a:tc>
-                <a:tc>
-                  <a:txBody>
-                    <a:bodyPr wrap="square"/>
-                    <a:lstStyle/>
-                    <a:p>
-                      <a:pPr algn="r"/>
-                      <a:r>
-                        <a:rPr sz="900" b="0">
-                          <a:solidFill>
-                            <a:srgbClr val="1E2F5C"/>
-                          </a:solidFill>
-                          <a:latin typeface="Kanit"/>
-                        </a:rPr>
-                        <a:t>1.90M</a:t>
+                        <a:t>1.95M</a:t>
                       </a:r>
                     </a:p>
                   </a:txBody>
@@ -10836,7 +10836,7 @@
                           </a:solidFill>
                           <a:latin typeface="Kanit"/>
                         </a:rPr>
-                        <a:t>กำแพงเพชร</a:t>
+                        <a:t>ราชบุรี</a:t>
                       </a:r>
                     </a:p>
                   </a:txBody>
@@ -10859,7 +10859,7 @@
                           </a:solidFill>
                           <a:latin typeface="Kanit"/>
                         </a:rPr>
-                        <a:t>North</a:t>
+                        <a:t>Central&amp;BKK</a:t>
                       </a:r>
                     </a:p>
                   </a:txBody>
@@ -10901,11 +10901,57 @@
                       <a:r>
                         <a:rPr sz="900" b="1">
                           <a:solidFill>
+                            <a:srgbClr val="1E2F5C"/>
+                          </a:solidFill>
+                          <a:latin typeface="Kanit"/>
+                        </a:rPr>
+                        <a:t>1.61%</a:t>
+                      </a:r>
+                    </a:p>
+                  </a:txBody>
+                  <a:tcPr marL="54864" marR="54864" marT="18288" marB="18288" anchor="ctr">
+                    <a:solidFill>
+                      <a:srgbClr val="F7F9FC"/>
+                    </a:solidFill>
+                  </a:tcPr>
+                </a:tc>
+                <a:tc>
+                  <a:txBody>
+                    <a:bodyPr wrap="square"/>
+                    <a:lstStyle/>
+                    <a:p>
+                      <a:pPr algn="l"/>
+                      <a:r>
+                        <a:rPr sz="900" b="0">
+                          <a:solidFill>
+                            <a:srgbClr val="1E2F5C"/>
+                          </a:solidFill>
+                          <a:latin typeface="Kanit"/>
+                        </a:rPr>
+                        <a:t>Rice 40%</a:t>
+                      </a:r>
+                    </a:p>
+                  </a:txBody>
+                  <a:tcPr marL="54864" marR="54864" marT="18288" marB="18288" anchor="ctr">
+                    <a:solidFill>
+                      <a:srgbClr val="F7F9FC"/>
+                    </a:solidFill>
+                  </a:tcPr>
+                </a:tc>
+                <a:tc>
+                  <a:txBody>
+                    <a:bodyPr wrap="square"/>
+                    <a:lstStyle/>
+                    <a:p>
+                      <a:pPr algn="l"/>
+                      <a:r>
+                        <a:rPr sz="900" b="1">
+                          <a:solidFill>
                             <a:srgbClr val="CC0000"/>
                           </a:solidFill>
                           <a:latin typeface="Kanit"/>
                         </a:rPr>
-                        <a:t>2.11%</a:t>
+                        <a:t>below cost</a:t>
                       </a:r>
                     </a:p>
                   </a:txBody>
@@ -10920,7 +10966,30 @@
                     <a:bodyPr wrap="square"/>
                     <a:lstStyle/>
                     <a:p>
-                      <a:pPr algn="l"/>
+                      <a:pPr algn="r"/>
+                      <a:r>
+                        <a:rPr sz="900" b="1">
+                          <a:solidFill>
+                            <a:srgbClr val="CC0000"/>
+                          </a:solidFill>
+                          <a:latin typeface="Kanit"/>
+                        </a:rPr>
+                        <a:t>56%</a:t>
+                      </a:r>
+                    </a:p>
+                  </a:txBody>
+                  <a:tcPr marL="54864" marR="54864" marT="18288" marB="18288" anchor="ctr">
+                    <a:solidFill>
+                      <a:srgbClr val="F7F9FC"/>
+                    </a:solidFill>
+                  </a:tcPr>
+                </a:tc>
+                <a:tc>
+                  <a:txBody>
+                    <a:bodyPr wrap="square"/>
+                    <a:lstStyle/>
+                    <a:p>
+                      <a:pPr algn="r"/>
                       <a:r>
                         <a:rPr sz="900" b="0">
                           <a:solidFill>
@@ -10928,7 +10997,7 @@
                           </a:solidFill>
                           <a:latin typeface="Kanit"/>
                         </a:rPr>
-                        <a:t>Rice 47%</a:t>
+                        <a:t>17,712</a:t>
                       </a:r>
                     </a:p>
                   </a:txBody>
@@ -10943,84 +11012,15 @@
                     <a:bodyPr wrap="square"/>
                     <a:lstStyle/>
                     <a:p>
-                      <a:pPr algn="l"/>
-                      <a:r>
-                        <a:rPr sz="900" b="1">
-                          <a:solidFill>
-                            <a:srgbClr val="CC0000"/>
-                          </a:solidFill>
-                          <a:latin typeface="Kanit"/>
-                        </a:rPr>
-                        <a:t>below cost</a:t>
-                      </a:r>
-                    </a:p>
-                  </a:txBody>
-                  <a:tcPr marL="54864" marR="54864" marT="18288" marB="18288" anchor="ctr">
-                    <a:solidFill>
-                      <a:srgbClr val="F7F9FC"/>
-                    </a:solidFill>
-                  </a:tcPr>
-                </a:tc>
-                <a:tc>
-                  <a:txBody>
-                    <a:bodyPr wrap="square"/>
-                    <a:lstStyle/>
-                    <a:p>
-                      <a:pPr algn="r"/>
-                      <a:r>
-                        <a:rPr sz="900" b="1">
+                      <a:pPr algn="r"/>
+                      <a:r>
+                        <a:rPr sz="900" b="0">
                           <a:solidFill>
                             <a:srgbClr val="1E2F5C"/>
                           </a:solidFill>
                           <a:latin typeface="Kanit"/>
                         </a:rPr>
-                        <a:t>94%</a:t>
-                      </a:r>
-                    </a:p>
-                  </a:txBody>
-                  <a:tcPr marL="54864" marR="54864" marT="18288" marB="18288" anchor="ctr">
-                    <a:solidFill>
-                      <a:srgbClr val="F7F9FC"/>
-                    </a:solidFill>
-                  </a:tcPr>
-                </a:tc>
-                <a:tc>
-                  <a:txBody>
-                    <a:bodyPr wrap="square"/>
-                    <a:lstStyle/>
-                    <a:p>
-                      <a:pPr algn="r"/>
-                      <a:r>
-                        <a:rPr sz="900" b="0">
-                          <a:solidFill>
-                            <a:srgbClr val="1E2F5C"/>
-                          </a:solidFill>
-                          <a:latin typeface="Kanit"/>
-                        </a:rPr>
-                        <a:t>7,919</a:t>
-                      </a:r>
-                    </a:p>
-                  </a:txBody>
-                  <a:tcPr marL="54864" marR="54864" marT="18288" marB="18288" anchor="ctr">
-                    <a:solidFill>
-                      <a:srgbClr val="F7F9FC"/>
-                    </a:solidFill>
-                  </a:tcPr>
-                </a:tc>
-                <a:tc>
-                  <a:txBody>
-                    <a:bodyPr wrap="square"/>
-                    <a:lstStyle/>
-                    <a:p>
-                      <a:pPr algn="r"/>
-                      <a:r>
-                        <a:rPr sz="900" b="0">
-                          <a:solidFill>
-                            <a:srgbClr val="1E2F5C"/>
-                          </a:solidFill>
-                          <a:latin typeface="Kanit"/>
-                        </a:rPr>
-                        <a:t>2.67M</a:t>
+                        <a:t>0.56M</a:t>
                       </a:r>
                     </a:p>
                   </a:txBody>
@@ -11068,7 +11068,7 @@
                           </a:solidFill>
                           <a:latin typeface="Kanit"/>
                         </a:rPr>
-                        <a:t>นราธิวาส</a:t>
+                        <a:t>อุตรดิตถ์</a:t>
                       </a:r>
                     </a:p>
                   </a:txBody>
@@ -11091,7 +11091,7 @@
                           </a:solidFill>
                           <a:latin typeface="Kanit"/>
                         </a:rPr>
-                        <a:t>South</a:t>
+                        <a:t>North</a:t>
                       </a:r>
                     </a:p>
                   </a:txBody>
@@ -11114,7 +11114,7 @@
                           </a:solidFill>
                           <a:latin typeface="Kanit"/>
                         </a:rPr>
-                        <a:t>74%</a:t>
+                        <a:t>87%</a:t>
                       </a:r>
                     </a:p>
                   </a:txBody>
@@ -11133,11 +11133,57 @@
                       <a:r>
                         <a:rPr sz="900" b="1">
                           <a:solidFill>
+                            <a:srgbClr val="1E2F5C"/>
+                          </a:solidFill>
+                          <a:latin typeface="Kanit"/>
+                        </a:rPr>
+                        <a:t>1.38%</a:t>
+                      </a:r>
+                    </a:p>
+                  </a:txBody>
+                  <a:tcPr marL="54864" marR="54864" marT="18288" marB="18288" anchor="ctr">
+                    <a:solidFill>
+                      <a:srgbClr val="FFFFFF"/>
+                    </a:solidFill>
+                  </a:tcPr>
+                </a:tc>
+                <a:tc>
+                  <a:txBody>
+                    <a:bodyPr wrap="square"/>
+                    <a:lstStyle/>
+                    <a:p>
+                      <a:pPr algn="l"/>
+                      <a:r>
+                        <a:rPr sz="900" b="0">
+                          <a:solidFill>
+                            <a:srgbClr val="1E2F5C"/>
+                          </a:solidFill>
+                          <a:latin typeface="Kanit"/>
+                        </a:rPr>
+                        <a:t>Rice 68%</a:t>
+                      </a:r>
+                    </a:p>
+                  </a:txBody>
+                  <a:tcPr marL="54864" marR="54864" marT="18288" marB="18288" anchor="ctr">
+                    <a:solidFill>
+                      <a:srgbClr val="FFFFFF"/>
+                    </a:solidFill>
+                  </a:tcPr>
+                </a:tc>
+                <a:tc>
+                  <a:txBody>
+                    <a:bodyPr wrap="square"/>
+                    <a:lstStyle/>
+                    <a:p>
+                      <a:pPr algn="l"/>
+                      <a:r>
+                        <a:rPr sz="900" b="1">
+                          <a:solidFill>
                             <a:srgbClr val="CC0000"/>
                           </a:solidFill>
                           <a:latin typeface="Kanit"/>
                         </a:rPr>
-                        <a:t>2.43%</a:t>
+                        <a:t>below cost</a:t>
                       </a:r>
                     </a:p>
                   </a:txBody>
@@ -11152,7 +11198,30 @@
                     <a:bodyPr wrap="square"/>
                     <a:lstStyle/>
                     <a:p>
-                      <a:pPr algn="l"/>
+                      <a:pPr algn="r"/>
+                      <a:r>
+                        <a:rPr sz="900" b="1">
+                          <a:solidFill>
+                            <a:srgbClr val="CC0000"/>
+                          </a:solidFill>
+                          <a:latin typeface="Kanit"/>
+                        </a:rPr>
+                        <a:t>73%</a:t>
+                      </a:r>
+                    </a:p>
+                  </a:txBody>
+                  <a:tcPr marL="54864" marR="54864" marT="18288" marB="18288" anchor="ctr">
+                    <a:solidFill>
+                      <a:srgbClr val="FFFFFF"/>
+                    </a:solidFill>
+                  </a:tcPr>
+                </a:tc>
+                <a:tc>
+                  <a:txBody>
+                    <a:bodyPr wrap="square"/>
+                    <a:lstStyle/>
+                    <a:p>
+                      <a:pPr algn="r"/>
                       <a:r>
                         <a:rPr sz="900" b="0">
                           <a:solidFill>
@@ -11160,7 +11229,7 @@
                           </a:solidFill>
                           <a:latin typeface="Kanit"/>
                         </a:rPr>
-                        <a:t>Rubber 90%</a:t>
+                        <a:t>8,444</a:t>
                       </a:r>
                     </a:p>
                   </a:txBody>
@@ -11175,84 +11244,15 @@
                     <a:bodyPr wrap="square"/>
                     <a:lstStyle/>
                     <a:p>
-                      <a:pPr algn="l"/>
-                      <a:r>
-                        <a:rPr sz="900" b="1">
-                          <a:solidFill>
-                            <a:srgbClr val="CC0000"/>
-                          </a:solidFill>
-                          <a:latin typeface="Kanit"/>
-                        </a:rPr>
-                        <a:t>below cost</a:t>
-                      </a:r>
-                    </a:p>
-                  </a:txBody>
-                  <a:tcPr marL="54864" marR="54864" marT="18288" marB="18288" anchor="ctr">
-                    <a:solidFill>
-                      <a:srgbClr val="FFFFFF"/>
-                    </a:solidFill>
-                  </a:tcPr>
-                </a:tc>
-                <a:tc>
-                  <a:txBody>
-                    <a:bodyPr wrap="square"/>
-                    <a:lstStyle/>
-                    <a:p>
-                      <a:pPr algn="r"/>
-                      <a:r>
-                        <a:rPr sz="900" b="1">
+                      <a:pPr algn="r"/>
+                      <a:r>
+                        <a:rPr sz="900" b="0">
                           <a:solidFill>
                             <a:srgbClr val="1E2F5C"/>
                           </a:solidFill>
                           <a:latin typeface="Kanit"/>
                         </a:rPr>
-                        <a:t>131%</a:t>
-                      </a:r>
-                    </a:p>
-                  </a:txBody>
-                  <a:tcPr marL="54864" marR="54864" marT="18288" marB="18288" anchor="ctr">
-                    <a:solidFill>
-                      <a:srgbClr val="FFFFFF"/>
-                    </a:solidFill>
-                  </a:tcPr>
-                </a:tc>
-                <a:tc>
-                  <a:txBody>
-                    <a:bodyPr wrap="square"/>
-                    <a:lstStyle/>
-                    <a:p>
-                      <a:pPr algn="r"/>
-                      <a:r>
-                        <a:rPr sz="900" b="0">
-                          <a:solidFill>
-                            <a:srgbClr val="1E2F5C"/>
-                          </a:solidFill>
-                          <a:latin typeface="Kanit"/>
-                        </a:rPr>
-                        <a:t>2,742</a:t>
-                      </a:r>
-                    </a:p>
-                  </a:txBody>
-                  <a:tcPr marL="54864" marR="54864" marT="18288" marB="18288" anchor="ctr">
-                    <a:solidFill>
-                      <a:srgbClr val="FFFFFF"/>
-                    </a:solidFill>
-                  </a:tcPr>
-                </a:tc>
-                <a:tc>
-                  <a:txBody>
-                    <a:bodyPr wrap="square"/>
-                    <a:lstStyle/>
-                    <a:p>
-                      <a:pPr algn="r"/>
-                      <a:r>
-                        <a:rPr sz="900" b="0">
-                          <a:solidFill>
-                            <a:srgbClr val="1E2F5C"/>
-                          </a:solidFill>
-                          <a:latin typeface="Kanit"/>
-                        </a:rPr>
-                        <a:t>1.03M</a:t>
+                        <a:t>0.92M</a:t>
                       </a:r>
                     </a:p>
                   </a:txBody>
@@ -11300,7 +11300,7 @@
                           </a:solidFill>
                           <a:latin typeface="Kanit"/>
                         </a:rPr>
-                        <a:t>บุรีรัมย์</a:t>
+                        <a:t>นครพนม</a:t>
                       </a:r>
                     </a:p>
                   </a:txBody>
@@ -11346,7 +11346,7 @@
                           </a:solidFill>
                           <a:latin typeface="Kanit"/>
                         </a:rPr>
-                        <a:t>76%</a:t>
+                        <a:t>71%</a:t>
                       </a:r>
                     </a:p>
                   </a:txBody>
@@ -11365,11 +11365,34 @@
                       <a:r>
                         <a:rPr sz="900" b="1">
                           <a:solidFill>
+                            <a:srgbClr val="CC0000"/>
+                          </a:solidFill>
+                          <a:latin typeface="Kanit"/>
+                        </a:rPr>
+                        <a:t>2.32%</a:t>
+                      </a:r>
+                    </a:p>
+                  </a:txBody>
+                  <a:tcPr marL="54864" marR="54864" marT="18288" marB="18288" anchor="ctr">
+                    <a:solidFill>
+                      <a:srgbClr val="F7F9FC"/>
+                    </a:solidFill>
+                  </a:tcPr>
+                </a:tc>
+                <a:tc>
+                  <a:txBody>
+                    <a:bodyPr wrap="square"/>
+                    <a:lstStyle/>
+                    <a:p>
+                      <a:pPr algn="l"/>
+                      <a:r>
+                        <a:rPr sz="900" b="0">
+                          <a:solidFill>
                             <a:srgbClr val="1E2F5C"/>
                           </a:solidFill>
                           <a:latin typeface="Kanit"/>
                         </a:rPr>
-                        <a:t>1.87%</a:t>
+                        <a:t>Rice 78%</a:t>
                       </a:r>
                     </a:p>
                   </a:txBody>
@@ -11386,13 +11409,59 @@
                     <a:p>
                       <a:pPr algn="l"/>
                       <a:r>
+                        <a:rPr sz="900" b="1">
+                          <a:solidFill>
+                            <a:srgbClr val="CC0000"/>
+                          </a:solidFill>
+                          <a:latin typeface="Kanit"/>
+                        </a:rPr>
+                        <a:t>below cost</a:t>
+                      </a:r>
+                    </a:p>
+                  </a:txBody>
+                  <a:tcPr marL="54864" marR="54864" marT="18288" marB="18288" anchor="ctr">
+                    <a:solidFill>
+                      <a:srgbClr val="F7F9FC"/>
+                    </a:solidFill>
+                  </a:tcPr>
+                </a:tc>
+                <a:tc>
+                  <a:txBody>
+                    <a:bodyPr wrap="square"/>
+                    <a:lstStyle/>
+                    <a:p>
+                      <a:pPr algn="r"/>
+                      <a:r>
+                        <a:rPr sz="900" b="1">
+                          <a:solidFill>
+                            <a:srgbClr val="1E2F5C"/>
+                          </a:solidFill>
+                          <a:latin typeface="Kanit"/>
+                        </a:rPr>
+                        <a:t>94%</a:t>
+                      </a:r>
+                    </a:p>
+                  </a:txBody>
+                  <a:tcPr marL="54864" marR="54864" marT="18288" marB="18288" anchor="ctr">
+                    <a:solidFill>
+                      <a:srgbClr val="F7F9FC"/>
+                    </a:solidFill>
+                  </a:tcPr>
+                </a:tc>
+                <a:tc>
+                  <a:txBody>
+                    <a:bodyPr wrap="square"/>
+                    <a:lstStyle/>
+                    <a:p>
+                      <a:pPr algn="r"/>
+                      <a:r>
                         <a:rPr sz="900" b="0">
                           <a:solidFill>
                             <a:srgbClr val="1E2F5C"/>
                           </a:solidFill>
                           <a:latin typeface="Kanit"/>
                         </a:rPr>
-                        <a:t>Rice 82%</a:t>
+                        <a:t>6,061</a:t>
                       </a:r>
                     </a:p>
                   </a:txBody>
@@ -11407,52 +11476,6 @@
                     <a:bodyPr wrap="square"/>
                     <a:lstStyle/>
                     <a:p>
-                      <a:pPr algn="l"/>
-                      <a:r>
-                        <a:rPr sz="900" b="1">
-                          <a:solidFill>
-                            <a:srgbClr val="CC0000"/>
-                          </a:solidFill>
-                          <a:latin typeface="Kanit"/>
-                        </a:rPr>
-                        <a:t>below cost</a:t>
-                      </a:r>
-                    </a:p>
-                  </a:txBody>
-                  <a:tcPr marL="54864" marR="54864" marT="18288" marB="18288" anchor="ctr">
-                    <a:solidFill>
-                      <a:srgbClr val="F7F9FC"/>
-                    </a:solidFill>
-                  </a:tcPr>
-                </a:tc>
-                <a:tc>
-                  <a:txBody>
-                    <a:bodyPr wrap="square"/>
-                    <a:lstStyle/>
-                    <a:p>
-                      <a:pPr algn="r"/>
-                      <a:r>
-                        <a:rPr sz="900" b="1">
-                          <a:solidFill>
-                            <a:srgbClr val="CC0000"/>
-                          </a:solidFill>
-                          <a:latin typeface="Kanit"/>
-                        </a:rPr>
-                        <a:t>84%</a:t>
-                      </a:r>
-                    </a:p>
-                  </a:txBody>
-                  <a:tcPr marL="54864" marR="54864" marT="18288" marB="18288" anchor="ctr">
-                    <a:solidFill>
-                      <a:srgbClr val="F7F9FC"/>
-                    </a:solidFill>
-                  </a:tcPr>
-                </a:tc>
-                <a:tc>
-                  <a:txBody>
-                    <a:bodyPr wrap="square"/>
-                    <a:lstStyle/>
-                    <a:p>
                       <a:pPr algn="r"/>
                       <a:r>
                         <a:rPr sz="900" b="0">
@@ -11461,30 +11484,7 @@
                           </a:solidFill>
                           <a:latin typeface="Kanit"/>
                         </a:rPr>
-                        <a:t>7,557</a:t>
-                      </a:r>
-                    </a:p>
-                  </a:txBody>
-                  <a:tcPr marL="54864" marR="54864" marT="18288" marB="18288" anchor="ctr">
-                    <a:solidFill>
-                      <a:srgbClr val="F7F9FC"/>
-                    </a:solidFill>
-                  </a:tcPr>
-                </a:tc>
-                <a:tc>
-                  <a:txBody>
-                    <a:bodyPr wrap="square"/>
-                    <a:lstStyle/>
-                    <a:p>
-                      <a:pPr algn="r"/>
-                      <a:r>
-                        <a:rPr sz="900" b="0">
-                          <a:solidFill>
-                            <a:srgbClr val="1E2F5C"/>
-                          </a:solidFill>
-                          <a:latin typeface="Kanit"/>
-                        </a:rPr>
-                        <a:t>3.65M</a:t>
+                        <a:t>1.90M</a:t>
                       </a:r>
                     </a:p>
                   </a:txBody>
@@ -31354,7 +31354,7 @@
                 </a:solidFill>
                 <a:latin typeface="Kanit"/>
               </a:rPr>
-              <a:t>อำนาจเจริญ trips all four warning flags. Three more trip three — สุโขทัย, สิงห์บุรี, อุบลราชธานี.</a:t>
+              <a:t>อำนาจเจริญ trips all four warning flags. Three more trip three — สุโขทัย, มุกดาหาร, สิงห์บุรี.</a:t>
             </a:r>
           </a:p>
         </p:txBody>
@@ -37087,7 +37087,7 @@
                 </a:solidFill>
                 <a:latin typeface="Kanit"/>
               </a:rPr>
-              <a:t>338 of 928 districts · 145 of 788 rivers high</a:t>
+              <a:t>338 of 928 districts · 149 of 789 rivers high</a:t>
             </a:r>
           </a:p>
         </p:txBody>
@@ -37859,7 +37859,7 @@
                           </a:solidFill>
                           <a:latin typeface="Kanit"/>
                         </a:rPr>
-                        <a:t>40/155</a:t>
+                        <a:t>39/155</a:t>
                       </a:r>
                     </a:p>
                   </a:txBody>
@@ -38091,7 +38091,7 @@
                           </a:solidFill>
                           <a:latin typeface="Kanit"/>
                         </a:rPr>
-                        <a:t>23/272</a:t>
+                        <a:t>21/272</a:t>
                       </a:r>
                     </a:p>
                   </a:txBody>
@@ -38323,7 +38323,7 @@
                           </a:solidFill>
                           <a:latin typeface="Kanit"/>
                         </a:rPr>
-                        <a:t>28/167</a:t>
+                        <a:t>31/168</a:t>
                       </a:r>
                     </a:p>
                   </a:txBody>
@@ -38787,7 +38787,7 @@
                           </a:solidFill>
                           <a:latin typeface="Kanit"/>
                         </a:rPr>
-                        <a:t>42/143</a:t>
+                        <a:t>46/143</a:t>
                       </a:r>
                     </a:p>
                   </a:txBody>
